--- a/lessons/lesson-11/slides.pptx
+++ b/lessons/lesson-11/slides.pptx
@@ -2,32 +2,32 @@
 <file path=ppt/presentation.xml><?xml version="1.0" encoding="utf-8"?>
 <p:presentation xmlns:p="http://schemas.openxmlformats.org/presentationml/2006/main">
   <p:sldMasterIdLst>
-    <p:sldMasterId xmlns:r="http://schemas.openxmlformats.org/officeDocument/2006/relationships" id="2147483648" r:id="R6f2f1560cc1243b3"/>
+    <p:sldMasterId xmlns:r="http://schemas.openxmlformats.org/officeDocument/2006/relationships" id="2147483648" r:id="Rf1750f7c60f84704"/>
   </p:sldMasterIdLst>
   <p:notesMasterIdLst>
-    <p:notesMasterId xmlns:r="http://schemas.openxmlformats.org/officeDocument/2006/relationships" r:id="Re74fd06111d04df4"/>
+    <p:notesMasterId xmlns:r="http://schemas.openxmlformats.org/officeDocument/2006/relationships" r:id="Rbf2a6d1213604480"/>
   </p:notesMasterIdLst>
   <p:sldIdLst>
-    <p:sldId xmlns:r="http://schemas.openxmlformats.org/officeDocument/2006/relationships" id="256" r:id="Rd9cec92a02d349c3"/>
-    <p:sldId xmlns:r="http://schemas.openxmlformats.org/officeDocument/2006/relationships" id="257" r:id="R2d6cfba1ff614a0e"/>
-    <p:sldId xmlns:r="http://schemas.openxmlformats.org/officeDocument/2006/relationships" id="258" r:id="R8e0ded8b79844eab"/>
-    <p:sldId xmlns:r="http://schemas.openxmlformats.org/officeDocument/2006/relationships" id="259" r:id="Rfb30ec17b24c43dd"/>
-    <p:sldId xmlns:r="http://schemas.openxmlformats.org/officeDocument/2006/relationships" id="260" r:id="R286b48930f264469"/>
-    <p:sldId xmlns:r="http://schemas.openxmlformats.org/officeDocument/2006/relationships" id="261" r:id="R01060cd321264b7a"/>
-    <p:sldId xmlns:r="http://schemas.openxmlformats.org/officeDocument/2006/relationships" id="262" r:id="Re19b40c179064f6b"/>
-    <p:sldId xmlns:r="http://schemas.openxmlformats.org/officeDocument/2006/relationships" id="263" r:id="Rc70f899254da46ad"/>
-    <p:sldId xmlns:r="http://schemas.openxmlformats.org/officeDocument/2006/relationships" id="264" r:id="R5e4eeb76b4ce408a"/>
-    <p:sldId xmlns:r="http://schemas.openxmlformats.org/officeDocument/2006/relationships" id="265" r:id="R300f490dd3a34088"/>
-    <p:sldId xmlns:r="http://schemas.openxmlformats.org/officeDocument/2006/relationships" id="266" r:id="Rdad0fb3698f845ea"/>
-    <p:sldId xmlns:r="http://schemas.openxmlformats.org/officeDocument/2006/relationships" id="267" r:id="R79e0fd13ee784ee8"/>
-    <p:sldId xmlns:r="http://schemas.openxmlformats.org/officeDocument/2006/relationships" id="268" r:id="R023cd7345b3247a6"/>
-    <p:sldId xmlns:r="http://schemas.openxmlformats.org/officeDocument/2006/relationships" id="269" r:id="Ra9a2db701977458f"/>
-    <p:sldId xmlns:r="http://schemas.openxmlformats.org/officeDocument/2006/relationships" id="270" r:id="R9ee674e57e424ce9"/>
-    <p:sldId xmlns:r="http://schemas.openxmlformats.org/officeDocument/2006/relationships" id="271" r:id="R37fc0a35e89744a9"/>
-    <p:sldId xmlns:r="http://schemas.openxmlformats.org/officeDocument/2006/relationships" id="272" r:id="R7c5dec5dc0e04a99"/>
-    <p:sldId xmlns:r="http://schemas.openxmlformats.org/officeDocument/2006/relationships" id="273" r:id="R4aa85fef751346d8"/>
-    <p:sldId xmlns:r="http://schemas.openxmlformats.org/officeDocument/2006/relationships" id="274" r:id="R2b100394fb814212"/>
-    <p:sldId xmlns:r="http://schemas.openxmlformats.org/officeDocument/2006/relationships" id="275" r:id="R2b99a2d806db4129"/>
+    <p:sldId xmlns:r="http://schemas.openxmlformats.org/officeDocument/2006/relationships" id="256" r:id="R207073b5df8e4df8"/>
+    <p:sldId xmlns:r="http://schemas.openxmlformats.org/officeDocument/2006/relationships" id="257" r:id="R09063de57d0b4c88"/>
+    <p:sldId xmlns:r="http://schemas.openxmlformats.org/officeDocument/2006/relationships" id="258" r:id="Rb89207e71e474c7c"/>
+    <p:sldId xmlns:r="http://schemas.openxmlformats.org/officeDocument/2006/relationships" id="259" r:id="Rd43bcb117eb941cc"/>
+    <p:sldId xmlns:r="http://schemas.openxmlformats.org/officeDocument/2006/relationships" id="260" r:id="R78576e95c8f74ce3"/>
+    <p:sldId xmlns:r="http://schemas.openxmlformats.org/officeDocument/2006/relationships" id="261" r:id="Rb533f2a7056544bc"/>
+    <p:sldId xmlns:r="http://schemas.openxmlformats.org/officeDocument/2006/relationships" id="262" r:id="Rc48e2032c3284317"/>
+    <p:sldId xmlns:r="http://schemas.openxmlformats.org/officeDocument/2006/relationships" id="263" r:id="R29edbd49359644b0"/>
+    <p:sldId xmlns:r="http://schemas.openxmlformats.org/officeDocument/2006/relationships" id="264" r:id="Rd1599cf8b6fb4d63"/>
+    <p:sldId xmlns:r="http://schemas.openxmlformats.org/officeDocument/2006/relationships" id="265" r:id="R62f03580ad1a496c"/>
+    <p:sldId xmlns:r="http://schemas.openxmlformats.org/officeDocument/2006/relationships" id="266" r:id="R9082322287f148c3"/>
+    <p:sldId xmlns:r="http://schemas.openxmlformats.org/officeDocument/2006/relationships" id="267" r:id="Rd6397cab654b4749"/>
+    <p:sldId xmlns:r="http://schemas.openxmlformats.org/officeDocument/2006/relationships" id="268" r:id="Ra22497c32e09435a"/>
+    <p:sldId xmlns:r="http://schemas.openxmlformats.org/officeDocument/2006/relationships" id="269" r:id="Re28a4eda34324b95"/>
+    <p:sldId xmlns:r="http://schemas.openxmlformats.org/officeDocument/2006/relationships" id="270" r:id="R18404663ebbc4e11"/>
+    <p:sldId xmlns:r="http://schemas.openxmlformats.org/officeDocument/2006/relationships" id="271" r:id="R3a329d6792d842bd"/>
+    <p:sldId xmlns:r="http://schemas.openxmlformats.org/officeDocument/2006/relationships" id="272" r:id="R250859af66ce4427"/>
+    <p:sldId xmlns:r="http://schemas.openxmlformats.org/officeDocument/2006/relationships" id="273" r:id="Re6a589dbc24f4dfe"/>
+    <p:sldId xmlns:r="http://schemas.openxmlformats.org/officeDocument/2006/relationships" id="274" r:id="R03967bdc99fc4428"/>
+    <p:sldId xmlns:r="http://schemas.openxmlformats.org/officeDocument/2006/relationships" id="275" r:id="R490d221ebaf24195"/>
   </p:sldIdLst>
   <p:sldSz cx="12192000" cy="6858000"/>
   <p:notesSz cx="6858000" cy="9144000"/>
@@ -407,7 +407,7 @@
           <a:lstStyle xmlns:a="http://schemas.openxmlformats.org/drawingml/2006/main"/>
           <a:p xmlns:a="http://schemas.openxmlformats.org/drawingml/2006/main">
             <a:r>
-              <a:t>第 11 课冻结队列与失败恢复。屏显按现行逐页母稿压缩为课堂可读对象，完整说明保留在讲义与教师备注。</a:t>
+              <a:t>P01｜第11讲 实验自动化与 AutoResearch 循环</a:t>
             </a:r>
           </a:p>
           <a:p xmlns:a="http://schemas.openxmlformats.org/drawingml/2006/main">
@@ -417,17 +417,52 @@
           </a:p>
           <a:p xmlns:a="http://schemas.openxmlformats.org/drawingml/2006/main">
             <a:r>
+              <a:t>讲述：开场放下第 10 课的受限执行记录。第 10 课已让 Agent 在受限权限下跑通一次，但"能跑通"和"可重复运行、可被评价、可被回退"之间还有距离。本课把受限执行扩展为实验自动化循环，并拆解 AutoResearch / AI Scientist 两类系统作为分析对象。</a:t>
+            </a:r>
+          </a:p>
+          <a:p xmlns:a="http://schemas.openxmlformats.org/drawingml/2006/main">
+            <a:r>
+              <a:t/>
+            </a:r>
+          </a:p>
+          <a:p xmlns:a="http://schemas.openxmlformats.org/drawingml/2006/main">
+            <a:r>
+              <a:t>学生动作：不展开课程行政信息，直接进入下一页回扣。</a:t>
+            </a:r>
+          </a:p>
+          <a:p xmlns:a="http://schemas.openxmlformats.org/drawingml/2006/main">
+            <a:r>
+              <a:t/>
+            </a:r>
+          </a:p>
+          <a:p xmlns:a="http://schemas.openxmlformats.org/drawingml/2006/main">
+            <a:r>
+              <a:t>建议时间：2 分钟。</a:t>
+            </a:r>
+          </a:p>
+          <a:p xmlns:a="http://schemas.openxmlformats.org/drawingml/2006/main">
+            <a:r>
+              <a:t/>
+            </a:r>
+          </a:p>
+          <a:p xmlns:a="http://schemas.openxmlformats.org/drawingml/2006/main">
+            <a:r>
               <a:t>[Sources]</a:t>
             </a:r>
           </a:p>
           <a:p xmlns:a="http://schemas.openxmlformats.org/drawingml/2006/main">
             <a:r>
-              <a:t>- /Users/bright/Projects/courses/graduate/lessons/lesson-11/slides.md</a:t>
-            </a:r>
-          </a:p>
-          <a:p xmlns:a="http://schemas.openxmlformats.org/drawingml/2006/main">
-            <a:r>
-              <a:t>- /Users/bright/Projects/courses/graduate/lessons/lesson-11/handout.md</a:t>
+              <a:t>lessons/lesson-11/slides.md P01</a:t>
+            </a:r>
+          </a:p>
+          <a:p xmlns:a="http://schemas.openxmlformats.org/drawingml/2006/main">
+            <a:r>
+              <a:t>lessons/lesson-11/handout.md</a:t>
+            </a:r>
+          </a:p>
+          <a:p xmlns:a="http://schemas.openxmlformats.org/drawingml/2006/main">
+            <a:r>
+              <a:t>课程信息以 [syllabus.md](../../course/syllabus.md) 为准；备课规划 [第 11 课](../备课规划.md) 权威六段。</a:t>
             </a:r>
           </a:p>
           <a:p xmlns:a="http://schemas.openxmlformats.org/drawingml/2006/main">
@@ -502,7 +537,7 @@
           <a:lstStyle xmlns:a="http://schemas.openxmlformats.org/drawingml/2006/main"/>
           <a:p xmlns:a="http://schemas.openxmlformats.org/drawingml/2006/main">
             <a:r>
-              <a:t>第 11 课冻结队列与失败恢复。屏显按现行逐页母稿压缩为课堂可读对象，完整说明保留在讲义与教师备注。</a:t>
+              <a:t>P10｜120 份冻结输出：执行、恢复与独立评价</a:t>
             </a:r>
           </a:p>
           <a:p xmlns:a="http://schemas.openxmlformats.org/drawingml/2006/main">
@@ -512,17 +547,52 @@
           </a:p>
           <a:p xmlns:a="http://schemas.openxmlformats.org/drawingml/2006/main">
             <a:r>
+              <a:t>讲述：同一批 20 篇公开论文分别进入阅读卡和自由摘要条件，各运行 3 次，完整规格共 120 份输出。生成器只能读取冻结输入与配置，不能读取人工基准或根据中间评价改 prompt、模型、指标或数据。超时、协议错误先停并留痕，人工确认后恢复原冻结配置。生成后由独立人工基准盲评，结果进入后续研究判断。本课只需小子集或预置 trace，不要求课堂跑完 120 份。</a:t>
+            </a:r>
+          </a:p>
+          <a:p xmlns:a="http://schemas.openxmlformats.org/drawingml/2006/main">
+            <a:r>
+              <a:t/>
+            </a:r>
+          </a:p>
+          <a:p xmlns:a="http://schemas.openxmlformats.org/drawingml/2006/main">
+            <a:r>
+              <a:t>学生动作：让学生在自己的可重复动作上写出四约束的数字（不必精确，先有）。</a:t>
+            </a:r>
+          </a:p>
+          <a:p xmlns:a="http://schemas.openxmlformats.org/drawingml/2006/main">
+            <a:r>
+              <a:t/>
+            </a:r>
+          </a:p>
+          <a:p xmlns:a="http://schemas.openxmlformats.org/drawingml/2006/main">
+            <a:r>
+              <a:t>建议时间：6 分钟。</a:t>
+            </a:r>
+          </a:p>
+          <a:p xmlns:a="http://schemas.openxmlformats.org/drawingml/2006/main">
+            <a:r>
+              <a:t/>
+            </a:r>
+          </a:p>
+          <a:p xmlns:a="http://schemas.openxmlformats.org/drawingml/2006/main">
+            <a:r>
               <a:t>[Sources]</a:t>
             </a:r>
           </a:p>
           <a:p xmlns:a="http://schemas.openxmlformats.org/drawingml/2006/main">
             <a:r>
-              <a:t>- /Users/bright/Projects/courses/graduate/lessons/lesson-11/slides.md</a:t>
-            </a:r>
-          </a:p>
-          <a:p xmlns:a="http://schemas.openxmlformats.org/drawingml/2006/main">
-            <a:r>
-              <a:t>- /Users/bright/Projects/courses/graduate/lessons/lesson-11/handout.md</a:t>
+              <a:t>lessons/lesson-11/slides.md P10</a:t>
+            </a:r>
+          </a:p>
+          <a:p xmlns:a="http://schemas.openxmlformats.org/drawingml/2006/main">
+            <a:r>
+              <a:t>lessons/lesson-11/handout.md</a:t>
+            </a:r>
+          </a:p>
+          <a:p xmlns:a="http://schemas.openxmlformats.org/drawingml/2006/main">
+            <a:r>
+              <a:t>handout §六·1-3；第 9 课贯穿案例（H1 + J1 + 实验规格）。</a:t>
             </a:r>
           </a:p>
           <a:p xmlns:a="http://schemas.openxmlformats.org/drawingml/2006/main">
@@ -597,7 +667,7 @@
           <a:lstStyle xmlns:a="http://schemas.openxmlformats.org/drawingml/2006/main"/>
           <a:p xmlns:a="http://schemas.openxmlformats.org/drawingml/2006/main">
             <a:r>
-              <a:t>第 11 课冻结队列与失败恢复。屏显按现行逐页母稿压缩为课堂可读对象，完整说明保留在讲义与教师备注。</a:t>
+              <a:t>P11｜失败保留需要一张完整运行账本</a:t>
             </a:r>
           </a:p>
           <a:p xmlns:a="http://schemas.openxmlformats.org/drawingml/2006/main">
@@ -607,17 +677,52 @@
           </a:p>
           <a:p xmlns:a="http://schemas.openxmlformats.org/drawingml/2006/main">
             <a:r>
+              <a:t>讲述：逐行区分执行有效、结果不支持和技术失败。前两者都保留原始输出；技术失败保留日志，协议错误须人工确认恢复。完整账本按全部运行对账，重试另留 run ID，不能替换失败记录。详细失败字段在 P17 和讲义 §五，表内 ID 均为虚构工件。</a:t>
+            </a:r>
+          </a:p>
+          <a:p xmlns:a="http://schemas.openxmlformats.org/drawingml/2006/main">
+            <a:r>
+              <a:t/>
+            </a:r>
+          </a:p>
+          <a:p xmlns:a="http://schemas.openxmlformats.org/drawingml/2006/main">
+            <a:r>
+              <a:t>学生动作：无。</a:t>
+            </a:r>
+          </a:p>
+          <a:p xmlns:a="http://schemas.openxmlformats.org/drawingml/2006/main">
+            <a:r>
+              <a:t/>
+            </a:r>
+          </a:p>
+          <a:p xmlns:a="http://schemas.openxmlformats.org/drawingml/2006/main">
+            <a:r>
+              <a:t>建议时间：4 分钟。</a:t>
+            </a:r>
+          </a:p>
+          <a:p xmlns:a="http://schemas.openxmlformats.org/drawingml/2006/main">
+            <a:r>
+              <a:t/>
+            </a:r>
+          </a:p>
+          <a:p xmlns:a="http://schemas.openxmlformats.org/drawingml/2006/main">
+            <a:r>
               <a:t>[Sources]</a:t>
             </a:r>
           </a:p>
           <a:p xmlns:a="http://schemas.openxmlformats.org/drawingml/2006/main">
             <a:r>
-              <a:t>- /Users/bright/Projects/courses/graduate/lessons/lesson-11/slides.md</a:t>
-            </a:r>
-          </a:p>
-          <a:p xmlns:a="http://schemas.openxmlformats.org/drawingml/2006/main">
-            <a:r>
-              <a:t>- /Users/bright/Projects/courses/graduate/lessons/lesson-11/handout.md</a:t>
+              <a:t>lessons/lesson-11/slides.md P11</a:t>
+            </a:r>
+          </a:p>
+          <a:p xmlns:a="http://schemas.openxmlformats.org/drawingml/2006/main">
+            <a:r>
+              <a:t>lessons/lesson-11/handout.md</a:t>
+            </a:r>
+          </a:p>
+          <a:p xmlns:a="http://schemas.openxmlformats.org/drawingml/2006/main">
+            <a:r>
+              <a:t>handout §五·2-3；第 1 课 §一·1 实验迭代风险列。</a:t>
             </a:r>
           </a:p>
           <a:p xmlns:a="http://schemas.openxmlformats.org/drawingml/2006/main">
@@ -692,7 +797,7 @@
           <a:lstStyle xmlns:a="http://schemas.openxmlformats.org/drawingml/2006/main"/>
           <a:p xmlns:a="http://schemas.openxmlformats.org/drawingml/2006/main">
             <a:r>
-              <a:t>第 11 课冻结队列与失败恢复。屏显按现行逐页母稿压缩为课堂可读对象，完整说明保留在讲义与教师备注。</a:t>
+              <a:t>P12｜AutoResearch 与 AI Scientist 的系统主链</a:t>
             </a:r>
           </a:p>
           <a:p xmlns:a="http://schemas.openxmlformats.org/drawingml/2006/main">
@@ -702,17 +807,52 @@
           </a:p>
           <a:p xmlns:a="http://schemas.openxmlformats.org/drawingml/2006/main">
             <a:r>
+              <a:t>讲述：用第 1 课 §四·2 的 Agent Workflow 八部分框架拆解这两类系统。它们是分析对象，不是结论外推的依据——要看清的是每个维度上"哪些已由系统处理、哪些仍需人工判断"，而不是断言"AI 已能自主科研"。AI Scientist 报告的是特定 ML 研究设置下的系统表现：三篇送审稿中一篇评分超过工作坊平均接收阈值，但按预设协议撤回；工作坊接收率为 70%，研究团队内部判断三篇均未达到 ICLR 主会标准。这不等于顶会正式接收，也不适用于所有学科。</a:t>
+            </a:r>
+          </a:p>
+          <a:p xmlns:a="http://schemas.openxmlformats.org/drawingml/2006/main">
+            <a:r>
+              <a:t/>
+            </a:r>
+          </a:p>
+          <a:p xmlns:a="http://schemas.openxmlformats.org/drawingml/2006/main">
+            <a:r>
+              <a:t>学生动作：无。</a:t>
+            </a:r>
+          </a:p>
+          <a:p xmlns:a="http://schemas.openxmlformats.org/drawingml/2006/main">
+            <a:r>
+              <a:t/>
+            </a:r>
+          </a:p>
+          <a:p xmlns:a="http://schemas.openxmlformats.org/drawingml/2006/main">
+            <a:r>
+              <a:t>建议时间：2 分钟。</a:t>
+            </a:r>
+          </a:p>
+          <a:p xmlns:a="http://schemas.openxmlformats.org/drawingml/2006/main">
+            <a:r>
+              <a:t/>
+            </a:r>
+          </a:p>
+          <a:p xmlns:a="http://schemas.openxmlformats.org/drawingml/2006/main">
+            <a:r>
               <a:t>[Sources]</a:t>
             </a:r>
           </a:p>
           <a:p xmlns:a="http://schemas.openxmlformats.org/drawingml/2006/main">
             <a:r>
-              <a:t>- /Users/bright/Projects/courses/graduate/lessons/lesson-11/slides.md</a:t>
-            </a:r>
-          </a:p>
-          <a:p xmlns:a="http://schemas.openxmlformats.org/drawingml/2006/main">
-            <a:r>
-              <a:t>- /Users/bright/Projects/courses/graduate/lessons/lesson-11/handout.md</a:t>
+              <a:t>lessons/lesson-11/slides.md P12</a:t>
+            </a:r>
+          </a:p>
+          <a:p xmlns:a="http://schemas.openxmlformats.org/drawingml/2006/main">
+            <a:r>
+              <a:t>lessons/lesson-11/handout.md</a:t>
+            </a:r>
+          </a:p>
+          <a:p xmlns:a="http://schemas.openxmlformats.org/drawingml/2006/main">
+            <a:r>
+              <a:t>Lu, C. et al. "Towards end-to-end automation of AI research." *Nature* (2026). DOI: [10.1038/s41586-026-10265-5](https://www.nature.com/articles/s41586-026-10265-5)。**不外推为通用自主科研能力**。Karpathy. [*AutoResearch* commit `228791f`](https://github.com/karpathy/autoresearch/tree/228791fb499afffb54b46200aca536f79142f117)。Huang et al. MLAgentBench, ICML 2024（评价方法参考）。</a:t>
             </a:r>
           </a:p>
           <a:p xmlns:a="http://schemas.openxmlformats.org/drawingml/2006/main">
@@ -787,7 +927,7 @@
           <a:lstStyle xmlns:a="http://schemas.openxmlformats.org/drawingml/2006/main"/>
           <a:p xmlns:a="http://schemas.openxmlformats.org/drawingml/2006/main">
             <a:r>
-              <a:t>第 11 课冻结队列与失败恢复。屏显按现行逐页母稿压缩为课堂可读对象，完整说明保留在讲义与教师备注。</a:t>
+              <a:t>P13｜八维比较的主轴是人工判断</a:t>
             </a:r>
           </a:p>
           <a:p xmlns:a="http://schemas.openxmlformats.org/drawingml/2006/main">
@@ -797,17 +937,52 @@
           </a:p>
           <a:p xmlns:a="http://schemas.openxmlformats.org/drawingml/2006/main">
             <a:r>
+              <a:t>讲述：逐维度拆解 AI Scientist。Evals 维度上，自动评审能发现部分问题，但不替代真实同行共识——模型评审不等于同行评审。失败恢复维度上，系统对失败有处理逻辑，但选择性保留的风险存在。每个维度都回答"哪些已由系统处理、哪些仍需人工判断"。</a:t>
+            </a:r>
+          </a:p>
+          <a:p xmlns:a="http://schemas.openxmlformats.org/drawingml/2006/main">
+            <a:r>
+              <a:t/>
+            </a:r>
+          </a:p>
+          <a:p xmlns:a="http://schemas.openxmlformats.org/drawingml/2006/main">
+            <a:r>
+              <a:t>学生动作：让学生指出八维中哪个维度"仍需人工判断"最难判断。</a:t>
+            </a:r>
+          </a:p>
+          <a:p xmlns:a="http://schemas.openxmlformats.org/drawingml/2006/main">
+            <a:r>
+              <a:t/>
+            </a:r>
+          </a:p>
+          <a:p xmlns:a="http://schemas.openxmlformats.org/drawingml/2006/main">
+            <a:r>
+              <a:t>建议时间：3 分钟。</a:t>
+            </a:r>
+          </a:p>
+          <a:p xmlns:a="http://schemas.openxmlformats.org/drawingml/2006/main">
+            <a:r>
+              <a:t/>
+            </a:r>
+          </a:p>
+          <a:p xmlns:a="http://schemas.openxmlformats.org/drawingml/2006/main">
+            <a:r>
               <a:t>[Sources]</a:t>
             </a:r>
           </a:p>
           <a:p xmlns:a="http://schemas.openxmlformats.org/drawingml/2006/main">
             <a:r>
-              <a:t>- /Users/bright/Projects/courses/graduate/lessons/lesson-11/slides.md</a:t>
-            </a:r>
-          </a:p>
-          <a:p xmlns:a="http://schemas.openxmlformats.org/drawingml/2006/main">
-            <a:r>
-              <a:t>- /Users/bright/Projects/courses/graduate/lessons/lesson-11/handout.md</a:t>
+              <a:t>lessons/lesson-11/slides.md P13</a:t>
+            </a:r>
+          </a:p>
+          <a:p xmlns:a="http://schemas.openxmlformats.org/drawingml/2006/main">
+            <a:r>
+              <a:t>lessons/lesson-11/handout.md</a:t>
+            </a:r>
+          </a:p>
+          <a:p xmlns:a="http://schemas.openxmlformats.org/drawingml/2006/main">
+            <a:r>
+              <a:t>handout §四·2；第 1 课 §四·2 Agent Workflow 八部分框架。Lu et al. 2026（Nature，DOI 同 P12）。</a:t>
             </a:r>
           </a:p>
           <a:p xmlns:a="http://schemas.openxmlformats.org/drawingml/2006/main">
@@ -882,7 +1057,7 @@
           <a:lstStyle xmlns:a="http://schemas.openxmlformats.org/drawingml/2006/main"/>
           <a:p xmlns:a="http://schemas.openxmlformats.org/drawingml/2006/main">
             <a:r>
-              <a:t>第 11 课冻结队列与失败恢复。屏显按现行逐页母稿压缩为课堂可读对象，完整说明保留在讲义与教师备注。</a:t>
+              <a:t>P14｜系统边界决定哪些表述可以成立</a:t>
             </a:r>
           </a:p>
           <a:p xmlns:a="http://schemas.openxmlformats.org/drawingml/2006/main">
@@ -892,17 +1067,52 @@
           </a:p>
           <a:p xmlns:a="http://schemas.openxmlformats.org/drawingml/2006/main">
             <a:r>
+              <a:t>讲述：两个边界判断贯穿本课。AI Scientist 只在特定 ML 设置下验证，不外推为通用自主科研。自动评审只作循环内部 Evals，不替代同行共识。不外推清单中的表述都超出了来源证据的适用范围。在作业或 slides 中出现类似表述，都应标记为越界并改写为带边界的形式。</a:t>
+            </a:r>
+          </a:p>
+          <a:p xmlns:a="http://schemas.openxmlformats.org/drawingml/2006/main">
+            <a:r>
+              <a:t/>
+            </a:r>
+          </a:p>
+          <a:p xmlns:a="http://schemas.openxmlformats.org/drawingml/2006/main">
+            <a:r>
+              <a:t>学生动作：让学生检查自己第 10 课的 AI 使用记录中是否出现过清单中的表述。</a:t>
+            </a:r>
+          </a:p>
+          <a:p xmlns:a="http://schemas.openxmlformats.org/drawingml/2006/main">
+            <a:r>
+              <a:t/>
+            </a:r>
+          </a:p>
+          <a:p xmlns:a="http://schemas.openxmlformats.org/drawingml/2006/main">
+            <a:r>
+              <a:t>建议时间：3 分钟。</a:t>
+            </a:r>
+          </a:p>
+          <a:p xmlns:a="http://schemas.openxmlformats.org/drawingml/2006/main">
+            <a:r>
+              <a:t/>
+            </a:r>
+          </a:p>
+          <a:p xmlns:a="http://schemas.openxmlformats.org/drawingml/2006/main">
+            <a:r>
               <a:t>[Sources]</a:t>
             </a:r>
           </a:p>
           <a:p xmlns:a="http://schemas.openxmlformats.org/drawingml/2006/main">
             <a:r>
-              <a:t>- /Users/bright/Projects/courses/graduate/lessons/lesson-11/slides.md</a:t>
-            </a:r>
-          </a:p>
-          <a:p xmlns:a="http://schemas.openxmlformats.org/drawingml/2006/main">
-            <a:r>
-              <a:t>- /Users/bright/Projects/courses/graduate/lessons/lesson-11/handout.md</a:t>
+              <a:t>lessons/lesson-11/slides.md P14</a:t>
+            </a:r>
+          </a:p>
+          <a:p xmlns:a="http://schemas.openxmlformats.org/drawingml/2006/main">
+            <a:r>
+              <a:t>lessons/lesson-11/handout.md</a:t>
+            </a:r>
+          </a:p>
+          <a:p xmlns:a="http://schemas.openxmlformats.org/drawingml/2006/main">
+            <a:r>
+              <a:t>handout §四·3-4；[AGENTS.md](../../AGENTS.md) 证据标准（关键结论至少绑定一项可核验直接证据）。</a:t>
             </a:r>
           </a:p>
           <a:p xmlns:a="http://schemas.openxmlformats.org/drawingml/2006/main">
@@ -977,7 +1187,7 @@
           <a:lstStyle xmlns:a="http://schemas.openxmlformats.org/drawingml/2006/main"/>
           <a:p xmlns:a="http://schemas.openxmlformats.org/drawingml/2006/main">
             <a:r>
-              <a:t>第 11 课冻结队列与失败恢复。屏显按现行逐页母稿压缩为课堂可读对象，完整说明保留在讲义与教师备注。</a:t>
+              <a:t>P15｜同一工作流映射到两个分析对象</a:t>
             </a:r>
           </a:p>
           <a:p xmlns:a="http://schemas.openxmlformats.org/drawingml/2006/main">
@@ -987,17 +1197,52 @@
           </a:p>
           <a:p xmlns:a="http://schemas.openxmlformats.org/drawingml/2006/main">
             <a:r>
+              <a:t>讲述：只对比共同约束：指标、预算、停止与失败保留。AutoResearch 的候选方法优化不属于本课冻结生成队列；AI Scientist 的端到端链还包括想法、论文与评审，不能据此推断课程执行器拥有相同能力。主题价值、标注分歧与结论外推由研究者判断。</a:t>
+            </a:r>
+          </a:p>
+          <a:p xmlns:a="http://schemas.openxmlformats.org/drawingml/2006/main">
+            <a:r>
+              <a:t/>
+            </a:r>
+          </a:p>
+          <a:p xmlns:a="http://schemas.openxmlformats.org/drawingml/2006/main">
+            <a:r>
+              <a:t>学生动作：无。</a:t>
+            </a:r>
+          </a:p>
+          <a:p xmlns:a="http://schemas.openxmlformats.org/drawingml/2006/main">
+            <a:r>
+              <a:t/>
+            </a:r>
+          </a:p>
+          <a:p xmlns:a="http://schemas.openxmlformats.org/drawingml/2006/main">
+            <a:r>
+              <a:t>建议时间：2 分钟。</a:t>
+            </a:r>
+          </a:p>
+          <a:p xmlns:a="http://schemas.openxmlformats.org/drawingml/2006/main">
+            <a:r>
+              <a:t/>
+            </a:r>
+          </a:p>
+          <a:p xmlns:a="http://schemas.openxmlformats.org/drawingml/2006/main">
+            <a:r>
               <a:t>[Sources]</a:t>
             </a:r>
           </a:p>
           <a:p xmlns:a="http://schemas.openxmlformats.org/drawingml/2006/main">
             <a:r>
-              <a:t>- /Users/bright/Projects/courses/graduate/lessons/lesson-11/slides.md</a:t>
-            </a:r>
-          </a:p>
-          <a:p xmlns:a="http://schemas.openxmlformats.org/drawingml/2006/main">
-            <a:r>
-              <a:t>- /Users/bright/Projects/courses/graduate/lessons/lesson-11/handout.md</a:t>
+              <a:t>lessons/lesson-11/slides.md P15</a:t>
+            </a:r>
+          </a:p>
+          <a:p xmlns:a="http://schemas.openxmlformats.org/drawingml/2006/main">
+            <a:r>
+              <a:t>lessons/lesson-11/handout.md</a:t>
+            </a:r>
+          </a:p>
+          <a:p xmlns:a="http://schemas.openxmlformats.org/drawingml/2006/main">
+            <a:r>
+              <a:t>handout §六·5；Karpathy AutoResearch（commit `228791f`）；Lu et al. 2026（Nature）。</a:t>
             </a:r>
           </a:p>
           <a:p xmlns:a="http://schemas.openxmlformats.org/drawingml/2006/main">
@@ -1072,7 +1317,7 @@
           <a:lstStyle xmlns:a="http://schemas.openxmlformats.org/drawingml/2006/main"/>
           <a:p xmlns:a="http://schemas.openxmlformats.org/drawingml/2006/main">
             <a:r>
-              <a:t>第 11 课冻结队列与失败恢复。屏显按现行逐页母稿压缩为课堂可读对象，完整说明保留在讲义与教师备注。</a:t>
+              <a:t>P16｜把可重复动作改写为受限循环</a:t>
             </a:r>
           </a:p>
           <a:p xmlns:a="http://schemas.openxmlformats.org/drawingml/2006/main">
@@ -1082,17 +1327,52 @@
           </a:p>
           <a:p xmlns:a="http://schemas.openxmlformats.org/drawingml/2006/main">
             <a:r>
+              <a:t>讲述：先标明自己的动作是冻结队列还是开发集上的优化循环。第一段只完成四约束与执行/失败恢复骨架，保留人工审核点；冻结队列不能强行画方法 Keep / Discard。三种 trace 和短分析可在后续实践补齐。</a:t>
+            </a:r>
+          </a:p>
+          <a:p xmlns:a="http://schemas.openxmlformats.org/drawingml/2006/main">
+            <a:r>
+              <a:t/>
+            </a:r>
+          </a:p>
+          <a:p xmlns:a="http://schemas.openxmlformats.org/drawingml/2006/main">
+            <a:r>
+              <a:t>学生动作：巡视。对每位学生至少问一次：你的循环在哪个位置需要人工确认？</a:t>
+            </a:r>
+          </a:p>
+          <a:p xmlns:a="http://schemas.openxmlformats.org/drawingml/2006/main">
+            <a:r>
+              <a:t/>
+            </a:r>
+          </a:p>
+          <a:p xmlns:a="http://schemas.openxmlformats.org/drawingml/2006/main">
+            <a:r>
+              <a:t>建议时间：10 分钟。</a:t>
+            </a:r>
+          </a:p>
+          <a:p xmlns:a="http://schemas.openxmlformats.org/drawingml/2006/main">
+            <a:r>
+              <a:t/>
+            </a:r>
+          </a:p>
+          <a:p xmlns:a="http://schemas.openxmlformats.org/drawingml/2006/main">
+            <a:r>
               <a:t>[Sources]</a:t>
             </a:r>
           </a:p>
           <a:p xmlns:a="http://schemas.openxmlformats.org/drawingml/2006/main">
             <a:r>
-              <a:t>- /Users/bright/Projects/courses/graduate/lessons/lesson-11/slides.md</a:t>
-            </a:r>
-          </a:p>
-          <a:p xmlns:a="http://schemas.openxmlformats.org/drawingml/2006/main">
-            <a:r>
-              <a:t>- /Users/bright/Projects/courses/graduate/lessons/lesson-11/handout.md</a:t>
+              <a:t>lessons/lesson-11/slides.md P16</a:t>
+            </a:r>
+          </a:p>
+          <a:p xmlns:a="http://schemas.openxmlformats.org/drawingml/2006/main">
+            <a:r>
+              <a:t>lessons/lesson-11/handout.md</a:t>
+            </a:r>
+          </a:p>
+          <a:p xmlns:a="http://schemas.openxmlformats.org/drawingml/2006/main">
+            <a:r>
+              <a:t>handout §六·1-4；§八 练习 1-8。</a:t>
             </a:r>
           </a:p>
           <a:p xmlns:a="http://schemas.openxmlformats.org/drawingml/2006/main">
@@ -1167,7 +1447,7 @@
           <a:lstStyle xmlns:a="http://schemas.openxmlformats.org/drawingml/2006/main"/>
           <a:p xmlns:a="http://schemas.openxmlformats.org/drawingml/2006/main">
             <a:r>
-              <a:t>第 11 课冻结队列与失败恢复。屏显按现行逐页母稿压缩为课堂可读对象，完整说明保留在讲义与教师备注。</a:t>
+              <a:t>P17｜失败 trace 连接停止与冻结配置恢复</a:t>
             </a:r>
           </a:p>
           <a:p xmlns:a="http://schemas.openxmlformats.org/drawingml/2006/main">
@@ -1177,17 +1457,52 @@
           </a:p>
           <a:p xmlns:a="http://schemas.openxmlformats.org/drawingml/2006/main">
             <a:r>
+              <a:t>讲述：先用 5 分钟教师中点点评纠正三类共性卡点：把批量运行当优化、执行器自评、回退目标不稳定；再进行 10 分钟个人实践。样例是协议错误触发停止，human_review 表示人工已确认，恢复的是原冻结配置，不是看结果后重写参数。decision 字段记录停止与保留；优化循环可另记 Keep / Discard，但任何决定都不删除记录。</a:t>
+            </a:r>
+          </a:p>
+          <a:p xmlns:a="http://schemas.openxmlformats.org/drawingml/2006/main">
+            <a:r>
+              <a:t/>
+            </a:r>
+          </a:p>
+          <a:p xmlns:a="http://schemas.openxmlformats.org/drawingml/2006/main">
+            <a:r>
+              <a:t>学生动作：把这一页停留在屏幕上。巡视。</a:t>
+            </a:r>
+          </a:p>
+          <a:p xmlns:a="http://schemas.openxmlformats.org/drawingml/2006/main">
+            <a:r>
+              <a:t/>
+            </a:r>
+          </a:p>
+          <a:p xmlns:a="http://schemas.openxmlformats.org/drawingml/2006/main">
+            <a:r>
+              <a:t>建议时间：15 分钟（教师中点点评 5 分钟 + 个人实践 10 分钟）。</a:t>
+            </a:r>
+          </a:p>
+          <a:p xmlns:a="http://schemas.openxmlformats.org/drawingml/2006/main">
+            <a:r>
+              <a:t/>
+            </a:r>
+          </a:p>
+          <a:p xmlns:a="http://schemas.openxmlformats.org/drawingml/2006/main">
+            <a:r>
               <a:t>[Sources]</a:t>
             </a:r>
           </a:p>
           <a:p xmlns:a="http://schemas.openxmlformats.org/drawingml/2006/main">
             <a:r>
-              <a:t>- /Users/bright/Projects/courses/graduate/lessons/lesson-11/slides.md</a:t>
-            </a:r>
-          </a:p>
-          <a:p xmlns:a="http://schemas.openxmlformats.org/drawingml/2006/main">
-            <a:r>
-              <a:t>- /Users/bright/Projects/courses/graduate/lessons/lesson-11/handout.md</a:t>
+              <a:t>lessons/lesson-11/slides.md P17</a:t>
+            </a:r>
+          </a:p>
+          <a:p xmlns:a="http://schemas.openxmlformats.org/drawingml/2006/main">
+            <a:r>
+              <a:t>lessons/lesson-11/handout.md</a:t>
+            </a:r>
+          </a:p>
+          <a:p xmlns:a="http://schemas.openxmlformats.org/drawingml/2006/main">
+            <a:r>
+              <a:t>handout §六·6；§八 练习 1-8；§五·2；第 13 课失败复盘将直接使用这些记录。</a:t>
             </a:r>
           </a:p>
           <a:p xmlns:a="http://schemas.openxmlformats.org/drawingml/2006/main">
@@ -1262,7 +1577,7 @@
           <a:lstStyle xmlns:a="http://schemas.openxmlformats.org/drawingml/2006/main"/>
           <a:p xmlns:a="http://schemas.openxmlformats.org/drawingml/2006/main">
             <a:r>
-              <a:t>第 11 课冻结队列与失败恢复。屏显按现行逐页母稿压缩为课堂可读对象，完整说明保留在讲义与教师备注。</a:t>
+              <a:t>P18｜同伴只问四个循环边界</a:t>
             </a:r>
           </a:p>
           <a:p xmlns:a="http://schemas.openxmlformats.org/drawingml/2006/main">
@@ -1272,17 +1587,52 @@
           </a:p>
           <a:p xmlns:a="http://schemas.openxmlformats.org/drawingml/2006/main">
             <a:r>
+              <a:t>讲述：同伴互查只提问题，不替作者决定，不形成共同提交。重点检查四约束是否齐全、停止条件是否含禁止类、审核点是否标出、失败记录是否七字段、是否出现越界表述。同伴反馈由作者自己决定是否采纳，沿用第 8 课同伴组规则。</a:t>
+            </a:r>
+          </a:p>
+          <a:p xmlns:a="http://schemas.openxmlformats.org/drawingml/2006/main">
+            <a:r>
+              <a:t/>
+            </a:r>
+          </a:p>
+          <a:p xmlns:a="http://schemas.openxmlformats.org/drawingml/2006/main">
+            <a:r>
+              <a:t>学生动作：2–3 人互查，作者记录决定与理由；按本页建议时间完成。</a:t>
+            </a:r>
+          </a:p>
+          <a:p xmlns:a="http://schemas.openxmlformats.org/drawingml/2006/main">
+            <a:r>
+              <a:t/>
+            </a:r>
+          </a:p>
+          <a:p xmlns:a="http://schemas.openxmlformats.org/drawingml/2006/main">
+            <a:r>
+              <a:t>建议时间：15 分钟。</a:t>
+            </a:r>
+          </a:p>
+          <a:p xmlns:a="http://schemas.openxmlformats.org/drawingml/2006/main">
+            <a:r>
+              <a:t/>
+            </a:r>
+          </a:p>
+          <a:p xmlns:a="http://schemas.openxmlformats.org/drawingml/2006/main">
+            <a:r>
               <a:t>[Sources]</a:t>
             </a:r>
           </a:p>
           <a:p xmlns:a="http://schemas.openxmlformats.org/drawingml/2006/main">
             <a:r>
-              <a:t>- /Users/bright/Projects/courses/graduate/lessons/lesson-11/slides.md</a:t>
-            </a:r>
-          </a:p>
-          <a:p xmlns:a="http://schemas.openxmlformats.org/drawingml/2006/main">
-            <a:r>
-              <a:t>- /Users/bright/Projects/courses/graduate/lessons/lesson-11/handout.md</a:t>
+              <a:t>lessons/lesson-11/slides.md P18</a:t>
+            </a:r>
+          </a:p>
+          <a:p xmlns:a="http://schemas.openxmlformats.org/drawingml/2006/main">
+            <a:r>
+              <a:t>lessons/lesson-11/handout.md</a:t>
+            </a:r>
+          </a:p>
+          <a:p xmlns:a="http://schemas.openxmlformats.org/drawingml/2006/main">
+            <a:r>
+              <a:t>handout §七 常见错误；第 8 课同伴反馈规则。</a:t>
             </a:r>
           </a:p>
           <a:p xmlns:a="http://schemas.openxmlformats.org/drawingml/2006/main">
@@ -1357,7 +1707,7 @@
           <a:lstStyle xmlns:a="http://schemas.openxmlformats.org/drawingml/2006/main"/>
           <a:p xmlns:a="http://schemas.openxmlformats.org/drawingml/2006/main">
             <a:r>
-              <a:t>第 11 课冻结队列与失败恢复。屏显按现行逐页母稿压缩为课堂可读对象，完整说明保留在讲义与教师备注。</a:t>
+              <a:t>P19｜本讲知识点总结</a:t>
             </a:r>
           </a:p>
           <a:p xmlns:a="http://schemas.openxmlformats.org/drawingml/2006/main">
@@ -1367,17 +1717,52 @@
           </a:p>
           <a:p xmlns:a="http://schemas.openxmlformats.org/drawingml/2006/main">
             <a:r>
+              <a:t>讲述：回收循环结构、约束、失败追踪与人工审核的关系。本页不新增任务。</a:t>
+            </a:r>
+          </a:p>
+          <a:p xmlns:a="http://schemas.openxmlformats.org/drawingml/2006/main">
+            <a:r>
+              <a:t/>
+            </a:r>
+          </a:p>
+          <a:p xmlns:a="http://schemas.openxmlformats.org/drawingml/2006/main">
+            <a:r>
+              <a:t>学生动作：学生用一句话指出自己的循环最可能在哪项约束上失效。</a:t>
+            </a:r>
+          </a:p>
+          <a:p xmlns:a="http://schemas.openxmlformats.org/drawingml/2006/main">
+            <a:r>
+              <a:t/>
+            </a:r>
+          </a:p>
+          <a:p xmlns:a="http://schemas.openxmlformats.org/drawingml/2006/main">
+            <a:r>
+              <a:t>建议时间：2 分钟。</a:t>
+            </a:r>
+          </a:p>
+          <a:p xmlns:a="http://schemas.openxmlformats.org/drawingml/2006/main">
+            <a:r>
+              <a:t/>
+            </a:r>
+          </a:p>
+          <a:p xmlns:a="http://schemas.openxmlformats.org/drawingml/2006/main">
+            <a:r>
               <a:t>[Sources]</a:t>
             </a:r>
           </a:p>
           <a:p xmlns:a="http://schemas.openxmlformats.org/drawingml/2006/main">
             <a:r>
-              <a:t>- /Users/bright/Projects/courses/graduate/lessons/lesson-11/slides.md</a:t>
-            </a:r>
-          </a:p>
-          <a:p xmlns:a="http://schemas.openxmlformats.org/drawingml/2006/main">
-            <a:r>
-              <a:t>- /Users/bright/Projects/courses/graduate/lessons/lesson-11/handout.md</a:t>
+              <a:t>lessons/lesson-11/slides.md P19</a:t>
+            </a:r>
+          </a:p>
+          <a:p xmlns:a="http://schemas.openxmlformats.org/drawingml/2006/main">
+            <a:r>
+              <a:t>lessons/lesson-11/handout.md</a:t>
+            </a:r>
+          </a:p>
+          <a:p xmlns:a="http://schemas.openxmlformats.org/drawingml/2006/main">
+            <a:r>
+              <a:t>[handout.md](./handout.md) §二-§五；[teaching-plan.md](./teaching-plan.md) 第四至六节。</a:t>
             </a:r>
           </a:p>
           <a:p xmlns:a="http://schemas.openxmlformats.org/drawingml/2006/main">
@@ -1452,7 +1837,7 @@
           <a:lstStyle xmlns:a="http://schemas.openxmlformats.org/drawingml/2006/main"/>
           <a:p xmlns:a="http://schemas.openxmlformats.org/drawingml/2006/main">
             <a:r>
-              <a:t>第 11 课冻结队列与失败恢复。屏显按现行逐页母稿压缩为课堂可读对象，完整说明保留在讲义与教师备注。</a:t>
+              <a:t>P02｜从一次受限执行到冻结运行队列</a:t>
             </a:r>
           </a:p>
           <a:p xmlns:a="http://schemas.openxmlformats.org/drawingml/2006/main">
@@ -1462,17 +1847,52 @@
           </a:p>
           <a:p xmlns:a="http://schemas.openxmlformats.org/drawingml/2006/main">
             <a:r>
+              <a:t>讲述：回扣第 10 课：受限 Agent 让"Agent 帮忙"可见，但没有回答"能不能反复跑""指标会不会被篡改""失败会不会被删""AutoResearch 那类系统在哪些维度上仍需人工"。本课进入阶段七实验追踪，把受限执行扩展为受限循环。</a:t>
+            </a:r>
+          </a:p>
+          <a:p xmlns:a="http://schemas.openxmlformats.org/drawingml/2006/main">
+            <a:r>
+              <a:t/>
+            </a:r>
+          </a:p>
+          <a:p xmlns:a="http://schemas.openxmlformats.org/drawingml/2006/main">
+            <a:r>
+              <a:t>学生动作：先停 1 分钟：在你现有的受限执行记录里，圈出最缺的一项：指标 / 预算 / 停止 / 回退。然后快问：指标是预先固定的吗？失败能与运行次数对账吗？</a:t>
+            </a:r>
+          </a:p>
+          <a:p xmlns:a="http://schemas.openxmlformats.org/drawingml/2006/main">
+            <a:r>
+              <a:t/>
+            </a:r>
+          </a:p>
+          <a:p xmlns:a="http://schemas.openxmlformats.org/drawingml/2006/main">
+            <a:r>
+              <a:t>建议时间：3 分钟。</a:t>
+            </a:r>
+          </a:p>
+          <a:p xmlns:a="http://schemas.openxmlformats.org/drawingml/2006/main">
+            <a:r>
+              <a:t/>
+            </a:r>
+          </a:p>
+          <a:p xmlns:a="http://schemas.openxmlformats.org/drawingml/2006/main">
+            <a:r>
               <a:t>[Sources]</a:t>
             </a:r>
           </a:p>
           <a:p xmlns:a="http://schemas.openxmlformats.org/drawingml/2006/main">
             <a:r>
-              <a:t>- /Users/bright/Projects/courses/graduate/lessons/lesson-11/slides.md</a:t>
-            </a:r>
-          </a:p>
-          <a:p xmlns:a="http://schemas.openxmlformats.org/drawingml/2006/main">
-            <a:r>
-              <a:t>- /Users/bright/Projects/courses/graduate/lessons/lesson-11/handout.md</a:t>
+              <a:t>lessons/lesson-11/slides.md P02</a:t>
+            </a:r>
+          </a:p>
+          <a:p xmlns:a="http://schemas.openxmlformats.org/drawingml/2006/main">
+            <a:r>
+              <a:t>lessons/lesson-11/handout.md</a:t>
+            </a:r>
+          </a:p>
+          <a:p xmlns:a="http://schemas.openxmlformats.org/drawingml/2006/main">
+            <a:r>
+              <a:t>回扣第 10 课讲义与第 9 课实验规格；[AGENTS.md](../../AGENTS.md) 证据标准。</a:t>
             </a:r>
           </a:p>
           <a:p xmlns:a="http://schemas.openxmlformats.org/drawingml/2006/main">
@@ -1547,7 +1967,7 @@
           <a:lstStyle xmlns:a="http://schemas.openxmlformats.org/drawingml/2006/main"/>
           <a:p xmlns:a="http://schemas.openxmlformats.org/drawingml/2006/main">
             <a:r>
-              <a:t>第 11 课冻结队列与失败恢复。屏显按现行逐页母稿压缩为课堂可读对象，完整说明保留在讲义与教师备注。</a:t>
+              <a:t>P20｜受限循环将升级为最小工作流</a:t>
             </a:r>
           </a:p>
           <a:p xmlns:a="http://schemas.openxmlformats.org/drawingml/2006/main">
@@ -1557,17 +1977,52 @@
           </a:p>
           <a:p xmlns:a="http://schemas.openxmlformats.org/drawingml/2006/main">
             <a:r>
+              <a:t>讲述：退出卡让学生记录卡点。本课不正式提交。第 12 课会把本课的循环骨架重新组合为个人工作流设计——任务契约、Context、Memory、工具/MCP、权限、Evals、人工审核点会再次出现，但这次是你自己组合而非拆解别人的系统。第 13 课验证门统一检查实验记录与失败保留。</a:t>
+            </a:r>
+          </a:p>
+          <a:p xmlns:a="http://schemas.openxmlformats.org/drawingml/2006/main">
+            <a:r>
+              <a:t/>
+            </a:r>
+          </a:p>
+          <a:p xmlns:a="http://schemas.openxmlformats.org/drawingml/2006/main">
+            <a:r>
+              <a:t>学生动作：学生填写退出卡（2 分钟）。教师收回或学生自留。</a:t>
+            </a:r>
+          </a:p>
+          <a:p xmlns:a="http://schemas.openxmlformats.org/drawingml/2006/main">
+            <a:r>
+              <a:t/>
+            </a:r>
+          </a:p>
+          <a:p xmlns:a="http://schemas.openxmlformats.org/drawingml/2006/main">
+            <a:r>
+              <a:t>建议时间：3 分钟。</a:t>
+            </a:r>
+          </a:p>
+          <a:p xmlns:a="http://schemas.openxmlformats.org/drawingml/2006/main">
+            <a:r>
+              <a:t/>
+            </a:r>
+          </a:p>
+          <a:p xmlns:a="http://schemas.openxmlformats.org/drawingml/2006/main">
+            <a:r>
               <a:t>[Sources]</a:t>
             </a:r>
           </a:p>
           <a:p xmlns:a="http://schemas.openxmlformats.org/drawingml/2006/main">
             <a:r>
-              <a:t>- /Users/bright/Projects/courses/graduate/lessons/lesson-11/slides.md</a:t>
-            </a:r>
-          </a:p>
-          <a:p xmlns:a="http://schemas.openxmlformats.org/drawingml/2006/main">
-            <a:r>
-              <a:t>- /Users/bright/Projects/courses/graduate/lessons/lesson-11/handout.md</a:t>
+              <a:t>lessons/lesson-11/slides.md P20</a:t>
+            </a:r>
+          </a:p>
+          <a:p xmlns:a="http://schemas.openxmlformats.org/drawingml/2006/main">
+            <a:r>
+              <a:t>lessons/lesson-11/handout.md</a:t>
+            </a:r>
+          </a:p>
+          <a:p xmlns:a="http://schemas.openxmlformats.org/drawingml/2006/main">
+            <a:r>
+              <a:t>[assignments.md](../../course/assignments.md) 验证门 Checkpoint 3 在第 13 课后；[syllabus.md](../../course/syllabus.md) 第 12 课主题。</a:t>
             </a:r>
           </a:p>
           <a:p xmlns:a="http://schemas.openxmlformats.org/drawingml/2006/main">
@@ -1642,7 +2097,7 @@
           <a:lstStyle xmlns:a="http://schemas.openxmlformats.org/drawingml/2006/main"/>
           <a:p xmlns:a="http://schemas.openxmlformats.org/drawingml/2006/main">
             <a:r>
-              <a:t>第 11 课冻结队列与失败恢复。屏显按现行逐页母稿压缩为课堂可读对象，完整说明保留在讲义与教师备注。</a:t>
+              <a:t>P03｜本课形成三件可交给第 12 课的工件</a:t>
             </a:r>
           </a:p>
           <a:p xmlns:a="http://schemas.openxmlformats.org/drawingml/2006/main">
@@ -1652,17 +2107,52 @@
           </a:p>
           <a:p xmlns:a="http://schemas.openxmlformats.org/drawingml/2006/main">
             <a:r>
+              <a:t>讲述：明确边界：本课目标是建立受限循环说明和失败保留记录，不要求循环在课堂内跑完。本课不是验证门；验证门在第 13 课后，统一检查实验记录与失败保留。本课为第 12 课个人工作流设计直接铺垫——第 12 课会把本课的循环骨架重新组合为服务于学生自己科研动作的工作流。</a:t>
+            </a:r>
+          </a:p>
+          <a:p xmlns:a="http://schemas.openxmlformats.org/drawingml/2006/main">
+            <a:r>
+              <a:t/>
+            </a:r>
+          </a:p>
+          <a:p xmlns:a="http://schemas.openxmlformats.org/drawingml/2006/main">
+            <a:r>
+              <a:t>学生动作：无。</a:t>
+            </a:r>
+          </a:p>
+          <a:p xmlns:a="http://schemas.openxmlformats.org/drawingml/2006/main">
+            <a:r>
+              <a:t/>
+            </a:r>
+          </a:p>
+          <a:p xmlns:a="http://schemas.openxmlformats.org/drawingml/2006/main">
+            <a:r>
+              <a:t>建议时间：2 分钟。</a:t>
+            </a:r>
+          </a:p>
+          <a:p xmlns:a="http://schemas.openxmlformats.org/drawingml/2006/main">
+            <a:r>
+              <a:t/>
+            </a:r>
+          </a:p>
+          <a:p xmlns:a="http://schemas.openxmlformats.org/drawingml/2006/main">
+            <a:r>
               <a:t>[Sources]</a:t>
             </a:r>
           </a:p>
           <a:p xmlns:a="http://schemas.openxmlformats.org/drawingml/2006/main">
             <a:r>
-              <a:t>- /Users/bright/Projects/courses/graduate/lessons/lesson-11/slides.md</a:t>
-            </a:r>
-          </a:p>
-          <a:p xmlns:a="http://schemas.openxmlformats.org/drawingml/2006/main">
-            <a:r>
-              <a:t>- /Users/bright/Projects/courses/graduate/lessons/lesson-11/handout.md</a:t>
+              <a:t>lessons/lesson-11/slides.md P03</a:t>
+            </a:r>
+          </a:p>
+          <a:p xmlns:a="http://schemas.openxmlformats.org/drawingml/2006/main">
+            <a:r>
+              <a:t>lessons/lesson-11/handout.md</a:t>
+            </a:r>
+          </a:p>
+          <a:p xmlns:a="http://schemas.openxmlformats.org/drawingml/2006/main">
+            <a:r>
+              <a:t>[备课规划.md](../备课规划.md) 第 11 课权威六段；[assignments.md](../../course/assignments.md) 验证门 Checkpoint 3 在第 13 课后。</a:t>
             </a:r>
           </a:p>
           <a:p xmlns:a="http://schemas.openxmlformats.org/drawingml/2006/main">
@@ -1737,7 +2227,7 @@
           <a:lstStyle xmlns:a="http://schemas.openxmlformats.org/drawingml/2006/main"/>
           <a:p xmlns:a="http://schemas.openxmlformats.org/drawingml/2006/main">
             <a:r>
-              <a:t>第 11 课冻结队列与失败恢复。屏显按现行逐页母稿压缩为课堂可读对象，完整说明保留在讲义与教师备注。</a:t>
+              <a:t>P04｜循环五步与 Keep / Discard 分支</a:t>
             </a:r>
           </a:p>
           <a:p xmlns:a="http://schemas.openxmlformats.org/drawingml/2006/main">
@@ -1747,17 +2237,52 @@
           </a:p>
           <a:p xmlns:a="http://schemas.openxmlformats.org/drawingml/2006/main">
             <a:r>
+              <a:t>讲述：本页讲优化循环：候选方法改动在预先隔离的开发集上比较，评价口径、预算和停止规则保持冻结。Keep / Discard 决定是否采用候选改动，不删除失败记录。第 10 页的 120 份输出仅执行已冻结配置，不沿此分支调参。</a:t>
+            </a:r>
+          </a:p>
+          <a:p xmlns:a="http://schemas.openxmlformats.org/drawingml/2006/main">
+            <a:r>
+              <a:t/>
+            </a:r>
+          </a:p>
+          <a:p xmlns:a="http://schemas.openxmlformats.org/drawingml/2006/main">
+            <a:r>
+              <a:t>学生动作：快问：你之前做实验时，假设是先写的还是结果出来后补的？只听回答。</a:t>
+            </a:r>
+          </a:p>
+          <a:p xmlns:a="http://schemas.openxmlformats.org/drawingml/2006/main">
+            <a:r>
+              <a:t/>
+            </a:r>
+          </a:p>
+          <a:p xmlns:a="http://schemas.openxmlformats.org/drawingml/2006/main">
+            <a:r>
+              <a:t>建议时间：3 分钟。</a:t>
+            </a:r>
+          </a:p>
+          <a:p xmlns:a="http://schemas.openxmlformats.org/drawingml/2006/main">
+            <a:r>
+              <a:t/>
+            </a:r>
+          </a:p>
+          <a:p xmlns:a="http://schemas.openxmlformats.org/drawingml/2006/main">
+            <a:r>
               <a:t>[Sources]</a:t>
             </a:r>
           </a:p>
           <a:p xmlns:a="http://schemas.openxmlformats.org/drawingml/2006/main">
             <a:r>
-              <a:t>- /Users/bright/Projects/courses/graduate/lessons/lesson-11/slides.md</a:t>
-            </a:r>
-          </a:p>
-          <a:p xmlns:a="http://schemas.openxmlformats.org/drawingml/2006/main">
-            <a:r>
-              <a:t>- /Users/bright/Projects/courses/graduate/lessons/lesson-11/handout.md</a:t>
+              <a:t>lessons/lesson-11/slides.md P04</a:t>
+            </a:r>
+          </a:p>
+          <a:p xmlns:a="http://schemas.openxmlformats.org/drawingml/2006/main">
+            <a:r>
+              <a:t>lessons/lesson-11/handout.md</a:t>
+            </a:r>
+          </a:p>
+          <a:p xmlns:a="http://schemas.openxmlformats.org/drawingml/2006/main">
+            <a:r>
+              <a:t>handout §二·1；第 1 课 §2.7 工作流何时停止。</a:t>
             </a:r>
           </a:p>
           <a:p xmlns:a="http://schemas.openxmlformats.org/drawingml/2006/main">
@@ -1832,7 +2357,7 @@
           <a:lstStyle xmlns:a="http://schemas.openxmlformats.org/drawingml/2006/main"/>
           <a:p xmlns:a="http://schemas.openxmlformats.org/drawingml/2006/main">
             <a:r>
-              <a:t>第 11 课冻结队列与失败恢复。屏显按现行逐页母稿压缩为课堂可读对象，完整说明保留在讲义与教师备注。</a:t>
+              <a:t>P05｜适用边界取决于重复性与判断风险</a:t>
             </a:r>
           </a:p>
           <a:p xmlns:a="http://schemas.openxmlformats.org/drawingml/2006/main">
@@ -1842,17 +2367,52 @@
           </a:p>
           <a:p xmlns:a="http://schemas.openxmlformats.org/drawingml/2006/main">
             <a:r>
+              <a:t>讲述：区分可固定的评价协议与不可交给执行器的判断。指标可以依赖人工建立并复核的基准和盲评，并不因为需要专家标注就排除自动化。研究问题仍在形成、评价持续变化或高风险外部动作应保留人工主导。</a:t>
+            </a:r>
+          </a:p>
+          <a:p xmlns:a="http://schemas.openxmlformats.org/drawingml/2006/main">
+            <a:r>
+              <a:t/>
+            </a:r>
+          </a:p>
+          <a:p xmlns:a="http://schemas.openxmlformats.org/drawingml/2006/main">
+            <a:r>
+              <a:t>学生动作：追问：判断"Agent 自动判断哪篇论文值得深入研究"是否适合改写为循环？为什么？</a:t>
+            </a:r>
+          </a:p>
+          <a:p xmlns:a="http://schemas.openxmlformats.org/drawingml/2006/main">
+            <a:r>
+              <a:t/>
+            </a:r>
+          </a:p>
+          <a:p xmlns:a="http://schemas.openxmlformats.org/drawingml/2006/main">
+            <a:r>
+              <a:t>建议时间：3 分钟。</a:t>
+            </a:r>
+          </a:p>
+          <a:p xmlns:a="http://schemas.openxmlformats.org/drawingml/2006/main">
+            <a:r>
+              <a:t/>
+            </a:r>
+          </a:p>
+          <a:p xmlns:a="http://schemas.openxmlformats.org/drawingml/2006/main">
+            <a:r>
               <a:t>[Sources]</a:t>
             </a:r>
           </a:p>
           <a:p xmlns:a="http://schemas.openxmlformats.org/drawingml/2006/main">
             <a:r>
-              <a:t>- /Users/bright/Projects/courses/graduate/lessons/lesson-11/slides.md</a:t>
-            </a:r>
-          </a:p>
-          <a:p xmlns:a="http://schemas.openxmlformats.org/drawingml/2006/main">
-            <a:r>
-              <a:t>- /Users/bright/Projects/courses/graduate/lessons/lesson-11/handout.md</a:t>
+              <a:t>lessons/lesson-11/slides.md P05</a:t>
+            </a:r>
+          </a:p>
+          <a:p xmlns:a="http://schemas.openxmlformats.org/drawingml/2006/main">
+            <a:r>
+              <a:t>lessons/lesson-11/handout.md</a:t>
+            </a:r>
+          </a:p>
+          <a:p xmlns:a="http://schemas.openxmlformats.org/drawingml/2006/main">
+            <a:r>
+              <a:t>handout §二·2-3；Sandve et al. 2013（可复现追踪链）。</a:t>
             </a:r>
           </a:p>
           <a:p xmlns:a="http://schemas.openxmlformats.org/drawingml/2006/main">
@@ -1927,7 +2487,7 @@
           <a:lstStyle xmlns:a="http://schemas.openxmlformats.org/drawingml/2006/main"/>
           <a:p xmlns:a="http://schemas.openxmlformats.org/drawingml/2006/main">
             <a:r>
-              <a:t>第 11 课冻结队列与失败恢复。屏显按现行逐页母稿压缩为课堂可读对象，完整说明保留在讲义与教师备注。</a:t>
+              <a:t>P06｜指标定义在循环启动前冻结</a:t>
             </a:r>
           </a:p>
           <a:p xmlns:a="http://schemas.openxmlformats.org/drawingml/2006/main">
@@ -1937,17 +2497,52 @@
           </a:p>
           <a:p xmlns:a="http://schemas.openxmlformats.org/drawingml/2006/main">
             <a:r>
+              <a:t>讲述：固定指标不是"用什么指标"，而是"这个指标怎么算出来，且不可被工作流自身修改"。三个失败模式都是评价协议漂移的常见表现。判断指标是否被篡改：循环运行前后，指标定义文件、rubric 版本号、数据划分是否一致。任何不一致都应触发循环停止并人工审核。</a:t>
+            </a:r>
+          </a:p>
+          <a:p xmlns:a="http://schemas.openxmlformats.org/drawingml/2006/main">
+            <a:r>
+              <a:t/>
+            </a:r>
+          </a:p>
+          <a:p xmlns:a="http://schemas.openxmlformats.org/drawingml/2006/main">
+            <a:r>
+              <a:t>学生动作：无。</a:t>
+            </a:r>
+          </a:p>
+          <a:p xmlns:a="http://schemas.openxmlformats.org/drawingml/2006/main">
+            <a:r>
+              <a:t/>
+            </a:r>
+          </a:p>
+          <a:p xmlns:a="http://schemas.openxmlformats.org/drawingml/2006/main">
+            <a:r>
+              <a:t>建议时间：2 分钟。</a:t>
+            </a:r>
+          </a:p>
+          <a:p xmlns:a="http://schemas.openxmlformats.org/drawingml/2006/main">
+            <a:r>
+              <a:t/>
+            </a:r>
+          </a:p>
+          <a:p xmlns:a="http://schemas.openxmlformats.org/drawingml/2006/main">
+            <a:r>
               <a:t>[Sources]</a:t>
             </a:r>
           </a:p>
           <a:p xmlns:a="http://schemas.openxmlformats.org/drawingml/2006/main">
             <a:r>
-              <a:t>- /Users/bright/Projects/courses/graduate/lessons/lesson-11/slides.md</a:t>
-            </a:r>
-          </a:p>
-          <a:p xmlns:a="http://schemas.openxmlformats.org/drawingml/2006/main">
-            <a:r>
-              <a:t>- /Users/bright/Projects/courses/graduate/lessons/lesson-11/handout.md</a:t>
+              <a:t>lessons/lesson-11/slides.md P06</a:t>
+            </a:r>
+          </a:p>
+          <a:p xmlns:a="http://schemas.openxmlformats.org/drawingml/2006/main">
+            <a:r>
+              <a:t>lessons/lesson-11/handout.md</a:t>
+            </a:r>
+          </a:p>
+          <a:p xmlns:a="http://schemas.openxmlformats.org/drawingml/2006/main">
+            <a:r>
+              <a:t>handout §三·1；第 9 课 §三·3 度量标准与标注协议。</a:t>
             </a:r>
           </a:p>
           <a:p xmlns:a="http://schemas.openxmlformats.org/drawingml/2006/main">
@@ -2022,7 +2617,7 @@
           <a:lstStyle xmlns:a="http://schemas.openxmlformats.org/drawingml/2006/main"/>
           <a:p xmlns:a="http://schemas.openxmlformats.org/drawingml/2006/main">
             <a:r>
-              <a:t>第 11 课冻结队列与失败恢复。屏显按现行逐页母稿压缩为课堂可读对象，完整说明保留在讲义与教师备注。</a:t>
+              <a:t>P07｜预算与停止条件写进运行序列</a:t>
             </a:r>
           </a:p>
           <a:p xmlns:a="http://schemas.openxmlformats.org/drawingml/2006/main">
@@ -2032,17 +2627,52 @@
           </a:p>
           <a:p xmlns:a="http://schemas.openxmlformats.org/drawingml/2006/main">
             <a:r>
+              <a:t>讲述：预算是预先写明的硬上限，而非"大概要花多久"。停止条件在第 9 课是"运行次数与停止规则"，本课扩展为三类触发器。协议性停止指循环本身出了问题（数据污染、配置错误、指标被修改），与结果是否有利无关。禁止的停止是"因为结果不利就停、因为结果有利就停"——这构成隐性 p-hacking。</a:t>
+            </a:r>
+          </a:p>
+          <a:p xmlns:a="http://schemas.openxmlformats.org/drawingml/2006/main">
+            <a:r>
+              <a:t/>
+            </a:r>
+          </a:p>
+          <a:p xmlns:a="http://schemas.openxmlformats.org/drawingml/2006/main">
+            <a:r>
+              <a:t>学生动作：追问：你的循环如果"跑 100 次都没出现显著结果"，应该停还是继续？为什么？</a:t>
+            </a:r>
+          </a:p>
+          <a:p xmlns:a="http://schemas.openxmlformats.org/drawingml/2006/main">
+            <a:r>
+              <a:t/>
+            </a:r>
+          </a:p>
+          <a:p xmlns:a="http://schemas.openxmlformats.org/drawingml/2006/main">
+            <a:r>
+              <a:t>建议时间：3 分钟。</a:t>
+            </a:r>
+          </a:p>
+          <a:p xmlns:a="http://schemas.openxmlformats.org/drawingml/2006/main">
+            <a:r>
+              <a:t/>
+            </a:r>
+          </a:p>
+          <a:p xmlns:a="http://schemas.openxmlformats.org/drawingml/2006/main">
+            <a:r>
               <a:t>[Sources]</a:t>
             </a:r>
           </a:p>
           <a:p xmlns:a="http://schemas.openxmlformats.org/drawingml/2006/main">
             <a:r>
-              <a:t>- /Users/bright/Projects/courses/graduate/lessons/lesson-11/slides.md</a:t>
-            </a:r>
-          </a:p>
-          <a:p xmlns:a="http://schemas.openxmlformats.org/drawingml/2006/main">
-            <a:r>
-              <a:t>- /Users/bright/Projects/courses/graduate/lessons/lesson-11/handout.md</a:t>
+              <a:t>lessons/lesson-11/slides.md P07</a:t>
+            </a:r>
+          </a:p>
+          <a:p xmlns:a="http://schemas.openxmlformats.org/drawingml/2006/main">
+            <a:r>
+              <a:t>lessons/lesson-11/handout.md</a:t>
+            </a:r>
+          </a:p>
+          <a:p xmlns:a="http://schemas.openxmlformats.org/drawingml/2006/main">
+            <a:r>
+              <a:t>handout §三·2-3；第 9 课 §三·2 停止条件；第 1 课 §2.7 工作流何时停止。</a:t>
             </a:r>
           </a:p>
           <a:p xmlns:a="http://schemas.openxmlformats.org/drawingml/2006/main">
@@ -2117,7 +2747,7 @@
           <a:lstStyle xmlns:a="http://schemas.openxmlformats.org/drawingml/2006/main"/>
           <a:p xmlns:a="http://schemas.openxmlformats.org/drawingml/2006/main">
             <a:r>
-              <a:t>第 11 课冻结队列与失败恢复。屏显按现行逐页母稿压缩为课堂可读对象，完整说明保留在讲义与教师备注。</a:t>
+              <a:t>P08｜回退到稳定配置，同时保留失败</a:t>
             </a:r>
           </a:p>
           <a:p xmlns:a="http://schemas.openxmlformats.org/drawingml/2006/main">
@@ -2127,17 +2757,52 @@
           </a:p>
           <a:p xmlns:a="http://schemas.openxmlformats.org/drawingml/2006/main">
             <a:r>
+              <a:t>讲述：回退机制是循环在失败或停止后的处理路径。关键区分：回退到"最近一次通过人工审核的配置"，不是"上一次看起来不错的配置"——这两者经常被混淆。回退后失败迭代必须保留，并触发研究判断的修订。回退默认需要人工确认，因为回退通常意味着循环未按预期推进。</a:t>
+            </a:r>
+          </a:p>
+          <a:p xmlns:a="http://schemas.openxmlformats.org/drawingml/2006/main">
+            <a:r>
+              <a:t/>
+            </a:r>
+          </a:p>
+          <a:p xmlns:a="http://schemas.openxmlformats.org/drawingml/2006/main">
+            <a:r>
+              <a:t>学生动作：无。</a:t>
+            </a:r>
+          </a:p>
+          <a:p xmlns:a="http://schemas.openxmlformats.org/drawingml/2006/main">
+            <a:r>
+              <a:t/>
+            </a:r>
+          </a:p>
+          <a:p xmlns:a="http://schemas.openxmlformats.org/drawingml/2006/main">
+            <a:r>
+              <a:t>建议时间：2 分钟。</a:t>
+            </a:r>
+          </a:p>
+          <a:p xmlns:a="http://schemas.openxmlformats.org/drawingml/2006/main">
+            <a:r>
+              <a:t/>
+            </a:r>
+          </a:p>
+          <a:p xmlns:a="http://schemas.openxmlformats.org/drawingml/2006/main">
+            <a:r>
               <a:t>[Sources]</a:t>
             </a:r>
           </a:p>
           <a:p xmlns:a="http://schemas.openxmlformats.org/drawingml/2006/main">
             <a:r>
-              <a:t>- /Users/bright/Projects/courses/graduate/lessons/lesson-11/slides.md</a:t>
-            </a:r>
-          </a:p>
-          <a:p xmlns:a="http://schemas.openxmlformats.org/drawingml/2006/main">
-            <a:r>
-              <a:t>- /Users/bright/Projects/courses/graduate/lessons/lesson-11/handout.md</a:t>
+              <a:t>lessons/lesson-11/slides.md P08</a:t>
+            </a:r>
+          </a:p>
+          <a:p xmlns:a="http://schemas.openxmlformats.org/drawingml/2006/main">
+            <a:r>
+              <a:t>lessons/lesson-11/handout.md</a:t>
+            </a:r>
+          </a:p>
+          <a:p xmlns:a="http://schemas.openxmlformats.org/drawingml/2006/main">
+            <a:r>
+              <a:t>handout §三·4；第 9 课 §三·4 失败预案。</a:t>
             </a:r>
           </a:p>
           <a:p xmlns:a="http://schemas.openxmlformats.org/drawingml/2006/main">
@@ -2212,7 +2877,7 @@
           <a:lstStyle xmlns:a="http://schemas.openxmlformats.org/drawingml/2006/main"/>
           <a:p xmlns:a="http://schemas.openxmlformats.org/drawingml/2006/main">
             <a:r>
-              <a:t>第 11 课冻结队列与失败恢复。屏显按现行逐页母稿压缩为课堂可读对象，完整说明保留在讲义与教师备注。</a:t>
+              <a:t>P09｜评价协议漂移会让循环失去可比性</a:t>
             </a:r>
           </a:p>
           <a:p xmlns:a="http://schemas.openxmlformats.org/drawingml/2006/main">
@@ -2222,17 +2887,52 @@
           </a:p>
           <a:p xmlns:a="http://schemas.openxmlformats.org/drawingml/2006/main">
             <a:r>
+              <a:t>讲述：日志中的 auto-switch rubric 是协议漂移的直接证据。停止并拒绝的是协议改动或无效候选，失败日志必须保留；结果不支持本身仍是有效结果，不触发删除、换指标或结果导向停止。0.34 与 0.19 均为教学虚构值，不可作研究结论。</a:t>
+            </a:r>
+          </a:p>
+          <a:p xmlns:a="http://schemas.openxmlformats.org/drawingml/2006/main">
+            <a:r>
+              <a:t/>
+            </a:r>
+          </a:p>
+          <a:p xmlns:a="http://schemas.openxmlformats.org/drawingml/2006/main">
+            <a:r>
+              <a:t>学生动作：让学生指出日志中哪一行暴露了问题。追问：若只看较低的最终分数，是否能发现协议已改变？</a:t>
+            </a:r>
+          </a:p>
+          <a:p xmlns:a="http://schemas.openxmlformats.org/drawingml/2006/main">
+            <a:r>
+              <a:t/>
+            </a:r>
+          </a:p>
+          <a:p xmlns:a="http://schemas.openxmlformats.org/drawingml/2006/main">
+            <a:r>
+              <a:t>建议时间：5 分钟。</a:t>
+            </a:r>
+          </a:p>
+          <a:p xmlns:a="http://schemas.openxmlformats.org/drawingml/2006/main">
+            <a:r>
+              <a:t/>
+            </a:r>
+          </a:p>
+          <a:p xmlns:a="http://schemas.openxmlformats.org/drawingml/2006/main">
+            <a:r>
               <a:t>[Sources]</a:t>
             </a:r>
           </a:p>
           <a:p xmlns:a="http://schemas.openxmlformats.org/drawingml/2006/main">
             <a:r>
-              <a:t>- /Users/bright/Projects/courses/graduate/lessons/lesson-11/slides.md</a:t>
-            </a:r>
-          </a:p>
-          <a:p xmlns:a="http://schemas.openxmlformats.org/drawingml/2006/main">
-            <a:r>
-              <a:t>- /Users/bright/Projects/courses/graduate/lessons/lesson-11/handout.md</a:t>
+              <a:t>lessons/lesson-11/slides.md P09</a:t>
+            </a:r>
+          </a:p>
+          <a:p xmlns:a="http://schemas.openxmlformats.org/drawingml/2006/main">
+            <a:r>
+              <a:t>lessons/lesson-11/handout.md</a:t>
+            </a:r>
+          </a:p>
+          <a:p xmlns:a="http://schemas.openxmlformats.org/drawingml/2006/main">
+            <a:r>
+              <a:t>handout §三·1；第 9 课 §三·3 度量标准。</a:t>
             </a:r>
           </a:p>
           <a:p xmlns:a="http://schemas.openxmlformats.org/drawingml/2006/main">
@@ -2288,7 +2988,7 @@
           <p:nvPr/>
         </p:nvPicPr>
         <p:blipFill>
-          <a:blip xmlns:r="http://schemas.openxmlformats.org/officeDocument/2006/relationships" xmlns:a="http://schemas.openxmlformats.org/drawingml/2006/main" r:embed="R9bc49006ce3d4524">
+          <a:blip xmlns:r="http://schemas.openxmlformats.org/officeDocument/2006/relationships" xmlns:a="http://schemas.openxmlformats.org/drawingml/2006/main" r:embed="R7e2a19ea9e6d4fcb">
             <a:duotone>
               <a:prstClr val="black"/>
               <a:schemeClr val="accent1">
@@ -2466,7 +3166,7 @@
           <p:nvPr/>
         </p:nvPicPr>
         <p:blipFill rotWithShape="1">
-          <a:blip xmlns:r="http://schemas.openxmlformats.org/officeDocument/2006/relationships" xmlns:a="http://schemas.openxmlformats.org/drawingml/2006/main" r:embed="Ra975c2031bf444c0"/>
+          <a:blip xmlns:r="http://schemas.openxmlformats.org/officeDocument/2006/relationships" xmlns:a="http://schemas.openxmlformats.org/drawingml/2006/main" r:embed="R22bd21bf1f054b98"/>
           <a:srcRect xmlns:a="http://schemas.openxmlformats.org/drawingml/2006/main" l="74359" t="0" r="1346" b="0"/>
           <a:stretch xmlns:a="http://schemas.openxmlformats.org/drawingml/2006/main"/>
         </p:blipFill>
@@ -2489,7 +3189,7 @@
           <p:nvPr/>
         </p:nvPicPr>
         <p:blipFill rotWithShape="1">
-          <a:blip xmlns:r="http://schemas.openxmlformats.org/officeDocument/2006/relationships" xmlns:a="http://schemas.openxmlformats.org/drawingml/2006/main" r:embed="R7c3204bf36604292">
+          <a:blip xmlns:r="http://schemas.openxmlformats.org/officeDocument/2006/relationships" xmlns:a="http://schemas.openxmlformats.org/drawingml/2006/main" r:embed="Rbc65e38627b74b94">
             <a:alphaModFix amt="35000"/>
           </a:blip>
           <a:srcRect xmlns:a="http://schemas.openxmlformats.org/drawingml/2006/main" l="0" t="9831" r="0" b="36385"/>
@@ -2751,7 +3451,7 @@
           <p:nvPr/>
         </p:nvPicPr>
         <p:blipFill>
-          <a:blip xmlns:r="http://schemas.openxmlformats.org/officeDocument/2006/relationships" xmlns:a="http://schemas.openxmlformats.org/drawingml/2006/main" r:embed="Rd84ffb93b6cb4f41"/>
+          <a:blip xmlns:r="http://schemas.openxmlformats.org/officeDocument/2006/relationships" xmlns:a="http://schemas.openxmlformats.org/drawingml/2006/main" r:embed="R1e60effa69e24918"/>
           <a:srcRect xmlns:a="http://schemas.openxmlformats.org/drawingml/2006/main" l="0" t="0" r="54251" b="0"/>
           <a:stretch xmlns:a="http://schemas.openxmlformats.org/drawingml/2006/main"/>
         </p:blipFill>
@@ -3008,7 +3708,7 @@
           <p:nvPr/>
         </p:nvPicPr>
         <p:blipFill rotWithShape="1">
-          <a:blip xmlns:r="http://schemas.openxmlformats.org/officeDocument/2006/relationships" xmlns:a="http://schemas.openxmlformats.org/drawingml/2006/main" r:embed="Rcb8c4dac3d00414c"/>
+          <a:blip xmlns:r="http://schemas.openxmlformats.org/officeDocument/2006/relationships" xmlns:a="http://schemas.openxmlformats.org/drawingml/2006/main" r:embed="Rc19e4b86da1f43cf"/>
           <a:srcRect xmlns:a="http://schemas.openxmlformats.org/drawingml/2006/main" l="0" t="0" r="1346" b="0"/>
           <a:stretch xmlns:a="http://schemas.openxmlformats.org/drawingml/2006/main"/>
         </p:blipFill>
@@ -3191,7 +3891,7 @@
           <p:nvPr/>
         </p:nvPicPr>
         <p:blipFill>
-          <a:blip xmlns:r="http://schemas.openxmlformats.org/officeDocument/2006/relationships" xmlns:a="http://schemas.openxmlformats.org/drawingml/2006/main" r:embed="Rd00de6d61ccb4f51"/>
+          <a:blip xmlns:r="http://schemas.openxmlformats.org/officeDocument/2006/relationships" xmlns:a="http://schemas.openxmlformats.org/drawingml/2006/main" r:embed="R45d1740e22464fd2"/>
           <a:stretch xmlns:a="http://schemas.openxmlformats.org/drawingml/2006/main">
             <a:fillRect l="0" t="0" r="0" b="0"/>
           </a:stretch>
@@ -3287,7 +3987,7 @@
           <p:nvPr/>
         </p:nvPicPr>
         <p:blipFill>
-          <a:blip xmlns:r="http://schemas.openxmlformats.org/officeDocument/2006/relationships" xmlns:a="http://schemas.openxmlformats.org/drawingml/2006/main" r:embed="Ra92ca630a9914edb">
+          <a:blip xmlns:r="http://schemas.openxmlformats.org/officeDocument/2006/relationships" xmlns:a="http://schemas.openxmlformats.org/drawingml/2006/main" r:embed="Rc74311c37af04f09">
             <a:duotone>
               <a:prstClr val="black"/>
               <a:schemeClr val="accent1">
@@ -3454,7 +4154,7 @@
           <p:nvPr/>
         </p:nvPicPr>
         <p:blipFill rotWithShape="1">
-          <a:blip xmlns:r="http://schemas.openxmlformats.org/officeDocument/2006/relationships" xmlns:a="http://schemas.openxmlformats.org/drawingml/2006/main" r:embed="Ra7fdfef88c3b4fc7">
+          <a:blip xmlns:r="http://schemas.openxmlformats.org/officeDocument/2006/relationships" xmlns:a="http://schemas.openxmlformats.org/drawingml/2006/main" r:embed="Ra5f93de5d7694006">
             <a:alphaModFix amt="20000"/>
             <a:duotone>
               <a:schemeClr val="accent4">
@@ -3552,10 +4252,10 @@
   </p:cSld>
   <p:clrMap bg1="lt1" tx1="dk1" bg2="lt2" tx2="dk2" accent1="accent1" accent2="accent2" accent3="accent3" accent4="accent4" accent5="accent5" accent6="accent6" hlink="hlink" folHlink="folHlink"/>
   <p:sldLayoutIdLst>
-    <p:sldLayoutId xmlns:r="http://schemas.openxmlformats.org/officeDocument/2006/relationships" id="2147483649" r:id="R0d091fc547dd4123"/>
-    <p:sldLayoutId xmlns:r="http://schemas.openxmlformats.org/officeDocument/2006/relationships" id="2147483650" r:id="R88a5f35a84b3480d"/>
-    <p:sldLayoutId xmlns:r="http://schemas.openxmlformats.org/officeDocument/2006/relationships" id="2147483651" r:id="R7a4965264169488a"/>
-    <p:sldLayoutId xmlns:r="http://schemas.openxmlformats.org/officeDocument/2006/relationships" id="2147483652" r:id="Rc4d34ce73eb74c96"/>
+    <p:sldLayoutId xmlns:r="http://schemas.openxmlformats.org/officeDocument/2006/relationships" id="2147483649" r:id="Rda77c6b3fdb24bc2"/>
+    <p:sldLayoutId xmlns:r="http://schemas.openxmlformats.org/officeDocument/2006/relationships" id="2147483650" r:id="Rf445b2bf34f54f70"/>
+    <p:sldLayoutId xmlns:r="http://schemas.openxmlformats.org/officeDocument/2006/relationships" id="2147483651" r:id="Rb5c7b080de67478c"/>
+    <p:sldLayoutId xmlns:r="http://schemas.openxmlformats.org/officeDocument/2006/relationships" id="2147483652" r:id="R7206cbe87be042d5"/>
   </p:sldLayoutIdLst>
   <p:hf hdr="0" ftr="0" dt="0"/>
   <p:txStyles>
@@ -4208,7 +4908,7 @@
                 <a:ea typeface="微软雅黑"/>
                 <a:cs typeface="微软雅黑"/>
               </a:rPr>
-              <a:t>同一 120 份输出进入受限循环</a:t>
+              <a:t>120 份冻结输出：执行、恢复与独立评价</a:t>
             </a:r>
             <a:endParaRPr/>
           </a:p>
@@ -4274,14 +4974,14 @@
       </p:sp>
       <p:pic>
         <p:nvPicPr>
-          <p:cNvPr id="41" name=""/>
+          <p:cNvPr id="43" name=""/>
           <p:cNvPicPr>
             <a:picLocks xmlns:a="http://schemas.openxmlformats.org/drawingml/2006/main" noChangeAspect="1"/>
           </p:cNvPicPr>
           <p:nvPr/>
         </p:nvPicPr>
         <p:blipFill>
-          <a:blip xmlns:r="http://schemas.openxmlformats.org/officeDocument/2006/relationships" xmlns:a="http://schemas.openxmlformats.org/drawingml/2006/main" r:embed="R3fa5fc555ac04457"/>
+          <a:blip xmlns:r="http://schemas.openxmlformats.org/officeDocument/2006/relationships" xmlns:a="http://schemas.openxmlformats.org/drawingml/2006/main" r:embed="Re6a3d7f73ee742cc"/>
           <a:stretch xmlns:a="http://schemas.openxmlformats.org/drawingml/2006/main"/>
         </p:blipFill>
         <p:spPr>
@@ -4348,7 +5048,7 @@
                 <a:ea typeface="微软雅黑"/>
                 <a:cs typeface="微软雅黑"/>
               </a:rPr>
-              <a:t>同一 120 份输出进入受限循环</a:t>
+              <a:t>120 份冻结输出：执行、恢复与独立评价</a:t>
             </a:r>
           </a:p>
         </p:txBody>
@@ -5025,7 +5725,7 @@
                 <a:ea typeface="微软雅黑"/>
                 <a:cs typeface="微软雅黑"/>
               </a:rPr>
-              <a:t>假设冻结</a:t>
+              <a:t>配置冻结</a:t>
             </a:r>
           </a:p>
         </p:txBody>
@@ -5143,7 +5843,7 @@
                 <a:ea typeface="微软雅黑"/>
                 <a:cs typeface="微软雅黑"/>
               </a:rPr>
-              <a:t>H1/A1/A2/A3</a:t>
+              <a:t>模型 / prompt</a:t>
             </a:r>
           </a:p>
         </p:txBody>
@@ -5350,7 +6050,7 @@
                 <a:ea typeface="微软雅黑"/>
                 <a:cs typeface="微软雅黑"/>
               </a:rPr>
-              <a:t>批量执行</a:t>
+              <a:t>20 × 2 × 3</a:t>
             </a:r>
           </a:p>
         </p:txBody>
@@ -5439,7 +6139,7 @@
                 <a:ea typeface="微软雅黑"/>
                 <a:cs typeface="微软雅黑"/>
               </a:rPr>
-              <a:t>指标度量</a:t>
+              <a:t>失败恢复</a:t>
             </a:r>
           </a:p>
         </p:txBody>
@@ -5557,7 +6257,7 @@
                 <a:ea typeface="微软雅黑"/>
                 <a:cs typeface="微软雅黑"/>
               </a:rPr>
-              <a:t>不改口径</a:t>
+              <a:t>留痕 / 人工停止</a:t>
             </a:r>
           </a:p>
         </p:txBody>
@@ -5646,7 +6346,7 @@
                 <a:ea typeface="微软雅黑"/>
                 <a:cs typeface="微软雅黑"/>
               </a:rPr>
-              <a:t>人工评价</a:t>
+              <a:t>原始输出</a:t>
             </a:r>
           </a:p>
         </p:txBody>
@@ -5764,7 +6464,7 @@
                 <a:ea typeface="微软雅黑"/>
                 <a:cs typeface="微软雅黑"/>
               </a:rPr>
-              <a:t>三态判断</a:t>
+              <a:t>全部留痕</a:t>
             </a:r>
           </a:p>
         </p:txBody>
@@ -5853,7 +6553,7 @@
                 <a:ea typeface="微软雅黑"/>
                 <a:cs typeface="微软雅黑"/>
               </a:rPr>
-              <a:t>Keep / Discard</a:t>
+              <a:t>独立评价</a:t>
             </a:r>
           </a:p>
         </p:txBody>
@@ -5912,7 +6612,66 @@
                 <a:ea typeface="微软雅黑"/>
                 <a:cs typeface="微软雅黑"/>
               </a:rPr>
-              <a:t>含失败理由</a:t>
+              <a:t>人工基准 / 盲评</a:t>
+            </a:r>
+          </a:p>
+        </p:txBody>
+      </p:sp>
+      <p:sp>
+        <p:nvSpPr>
+          <p:cNvPr id="39" name="queue-boundary">
+            <a:extLst xmlns:a="http://schemas.openxmlformats.org/drawingml/2006/main">
+              <a:ext uri="{FF2B5EF4-FFF2-40B4-BE49-F238E27FC236}">
+                <a16:creationId xmlns:a16="http://schemas.microsoft.com/office/drawing/2014/main" id="{880E9D8B-687D-4926-A0CE-F614314210BD}"/>
+              </a:ext>
+            </a:extLst>
+          </p:cNvPr>
+          <p:cNvSpPr>
+            <a:spLocks xmlns:a="http://schemas.openxmlformats.org/drawingml/2006/main" noGrp="1"/>
+          </p:cNvSpPr>
+          <p:nvPr/>
+        </p:nvSpPr>
+        <p:spPr>
+          <a:xfrm xmlns:a="http://schemas.openxmlformats.org/drawingml/2006/main">
+            <a:off x="1428750" y="5191125"/>
+            <a:ext cx="9334500" cy="457200"/>
+          </a:xfrm>
+          <a:prstGeom xmlns:a="http://schemas.openxmlformats.org/drawingml/2006/main" prst="rect">
+            <a:avLst/>
+          </a:prstGeom>
+          <a:noFill xmlns:a="http://schemas.openxmlformats.org/drawingml/2006/main"/>
+          <a:ln xmlns:a="http://schemas.openxmlformats.org/drawingml/2006/main" w="0">
+            <a:noFill/>
+          </a:ln>
+        </p:spPr>
+        <p:txBody>
+          <a:bodyPr xmlns:a="http://schemas.openxmlformats.org/drawingml/2006/main" lIns="0" tIns="0" rIns="0" bIns="0" anchor="t"/>
+          <a:lstStyle xmlns:a="http://schemas.openxmlformats.org/drawingml/2006/main"/>
+          <a:p xmlns:a="http://schemas.openxmlformats.org/drawingml/2006/main">
+            <a:pPr algn="ctr">
+              <a:lnSpc>
+                <a:spcPct val="118000"/>
+              </a:lnSpc>
+              <a:buNone/>
+              <a:defRPr sz="2200" b="0">
+                <a:solidFill>
+                  <a:srgbClr val="1F4D78"/>
+                </a:solidFill>
+                <a:latin typeface="微软雅黑"/>
+                <a:ea typeface="微软雅黑"/>
+                <a:cs typeface="微软雅黑"/>
+              </a:defRPr>
+            </a:pPr>
+            <a:r>
+              <a:rPr sz="2200" b="0">
+                <a:solidFill>
+                  <a:srgbClr val="1F4D78"/>
+                </a:solidFill>
+                <a:latin typeface="微软雅黑"/>
+                <a:ea typeface="微软雅黑"/>
+                <a:cs typeface="微软雅黑"/>
+              </a:rPr>
+              <a:t>配置全程冻结；评价结果不回流调参。</a:t>
             </a:r>
           </a:p>
         </p:txBody>
@@ -6046,14 +6805,14 @@
       </p:sp>
       <p:pic>
         <p:nvPicPr>
-          <p:cNvPr id="28" name=""/>
+          <p:cNvPr id="30" name=""/>
           <p:cNvPicPr>
             <a:picLocks xmlns:a="http://schemas.openxmlformats.org/drawingml/2006/main" noChangeAspect="1"/>
           </p:cNvPicPr>
           <p:nvPr/>
         </p:nvPicPr>
         <p:blipFill>
-          <a:blip xmlns:r="http://schemas.openxmlformats.org/officeDocument/2006/relationships" xmlns:a="http://schemas.openxmlformats.org/drawingml/2006/main" r:embed="Rfa8b9d2a9e294971"/>
+          <a:blip xmlns:r="http://schemas.openxmlformats.org/officeDocument/2006/relationships" xmlns:a="http://schemas.openxmlformats.org/drawingml/2006/main" r:embed="R4e059fbce28547b7"/>
           <a:stretch xmlns:a="http://schemas.openxmlformats.org/drawingml/2006/main"/>
         </p:blipFill>
         <p:spPr>
@@ -6297,7 +7056,7 @@
                 <a:ea typeface="微软雅黑"/>
                 <a:cs typeface="微软雅黑"/>
               </a:rPr>
-              <a:t>正常｜0.18｜Keep</a:t>
+              <a:t>正常｜执行有效｜保留输出</a:t>
             </a:r>
           </a:p>
         </p:txBody>
@@ -6445,7 +7204,7 @@
                 <a:ea typeface="微软雅黑"/>
                 <a:cs typeface="微软雅黑"/>
               </a:rPr>
-              <a:t>无改善｜0.31｜Keep + 边界</a:t>
+              <a:t>结果不支持｜执行有效｜保留输出</a:t>
             </a:r>
           </a:p>
         </p:txBody>
@@ -6593,7 +7352,7 @@
                 <a:ea typeface="微软雅黑"/>
                 <a:cs typeface="微软雅黑"/>
               </a:rPr>
-              <a:t>超时｜无分数｜Discard</a:t>
+              <a:t>超时｜记录失败｜人工确认恢复</a:t>
             </a:r>
           </a:p>
         </p:txBody>
@@ -6741,7 +7500,7 @@
                 <a:ea typeface="微软雅黑"/>
                 <a:cs typeface="微软雅黑"/>
               </a:rPr>
-              <a:t>协议漂移｜拒绝｜Discard + failure-log</a:t>
+              <a:t>协议漂移｜停止｜恢复冻结配置</a:t>
             </a:r>
           </a:p>
         </p:txBody>
@@ -6889,7 +7648,7 @@
                 <a:ea typeface="微软雅黑"/>
                 <a:cs typeface="微软雅黑"/>
               </a:rPr>
-              <a:t>成功 + 无改善 + 失败 = 全部运行</a:t>
+              <a:t>有效运行（含不利结果）+ 技术失败 = 全部运行</a:t>
             </a:r>
           </a:p>
         </p:txBody>
@@ -6923,6 +7682,65 @@
             <a:noFill/>
           </a:ln>
         </p:spPr>
+      </p:sp>
+      <p:sp>
+        <p:nvSpPr>
+          <p:cNvPr id="26" name="fiction">
+            <a:extLst xmlns:a="http://schemas.openxmlformats.org/drawingml/2006/main">
+              <a:ext uri="{FF2B5EF4-FFF2-40B4-BE49-F238E27FC236}">
+                <a16:creationId xmlns:a16="http://schemas.microsoft.com/office/drawing/2014/main" id="{66E6E1F0-64A2-46EF-B889-4F0954B3915D}"/>
+              </a:ext>
+            </a:extLst>
+          </p:cNvPr>
+          <p:cNvSpPr>
+            <a:spLocks xmlns:a="http://schemas.openxmlformats.org/drawingml/2006/main" noGrp="1"/>
+          </p:cNvSpPr>
+          <p:nvPr/>
+        </p:nvSpPr>
+        <p:spPr>
+          <a:xfrm xmlns:a="http://schemas.openxmlformats.org/drawingml/2006/main">
+            <a:off x="609600" y="885825"/>
+            <a:ext cx="10572750" cy="314325"/>
+          </a:xfrm>
+          <a:prstGeom xmlns:a="http://schemas.openxmlformats.org/drawingml/2006/main" prst="rect">
+            <a:avLst/>
+          </a:prstGeom>
+          <a:noFill xmlns:a="http://schemas.openxmlformats.org/drawingml/2006/main"/>
+          <a:ln xmlns:a="http://schemas.openxmlformats.org/drawingml/2006/main" w="0">
+            <a:noFill/>
+          </a:ln>
+        </p:spPr>
+        <p:txBody>
+          <a:bodyPr xmlns:a="http://schemas.openxmlformats.org/drawingml/2006/main" lIns="0" tIns="0" rIns="0" bIns="0" anchor="t"/>
+          <a:lstStyle xmlns:a="http://schemas.openxmlformats.org/drawingml/2006/main"/>
+          <a:p xmlns:a="http://schemas.openxmlformats.org/drawingml/2006/main">
+            <a:pPr algn="l">
+              <a:lnSpc>
+                <a:spcPct val="118000"/>
+              </a:lnSpc>
+              <a:buNone/>
+              <a:defRPr sz="1800" b="0">
+                <a:solidFill>
+                  <a:srgbClr val="A96510"/>
+                </a:solidFill>
+                <a:latin typeface="微软雅黑"/>
+                <a:ea typeface="微软雅黑"/>
+                <a:cs typeface="微软雅黑"/>
+              </a:defRPr>
+            </a:pPr>
+            <a:r>
+              <a:rPr sz="1800" b="0">
+                <a:solidFill>
+                  <a:srgbClr val="A96510"/>
+                </a:solidFill>
+                <a:latin typeface="微软雅黑"/>
+                <a:ea typeface="微软雅黑"/>
+                <a:cs typeface="微软雅黑"/>
+              </a:rPr>
+              <a:t>课程虚构教学工件</a:t>
+            </a:r>
+          </a:p>
+        </p:txBody>
       </p:sp>
     </p:spTree>
     <p:extLst>
@@ -7053,14 +7871,14 @@
       </p:sp>
       <p:pic>
         <p:nvPicPr>
-          <p:cNvPr id="24" name=""/>
+          <p:cNvPr id="25" name=""/>
           <p:cNvPicPr>
             <a:picLocks xmlns:a="http://schemas.openxmlformats.org/drawingml/2006/main" noChangeAspect="1"/>
           </p:cNvPicPr>
           <p:nvPr/>
         </p:nvPicPr>
         <p:blipFill>
-          <a:blip xmlns:r="http://schemas.openxmlformats.org/officeDocument/2006/relationships" xmlns:a="http://schemas.openxmlformats.org/drawingml/2006/main" r:embed="R3b0dbab70c444cf4"/>
+          <a:blip xmlns:r="http://schemas.openxmlformats.org/officeDocument/2006/relationships" xmlns:a="http://schemas.openxmlformats.org/drawingml/2006/main" r:embed="Re007e5ea75b24b96"/>
           <a:stretch xmlns:a="http://schemas.openxmlformats.org/drawingml/2006/main"/>
         </p:blipFill>
         <p:spPr>
@@ -7940,14 +8758,14 @@
       </p:sp>
       <p:pic>
         <p:nvPicPr>
-          <p:cNvPr id="31" name=""/>
+          <p:cNvPr id="32" name=""/>
           <p:cNvPicPr>
             <a:picLocks xmlns:a="http://schemas.openxmlformats.org/drawingml/2006/main" noChangeAspect="1"/>
           </p:cNvPicPr>
           <p:nvPr/>
         </p:nvPicPr>
         <p:blipFill>
-          <a:blip xmlns:r="http://schemas.openxmlformats.org/officeDocument/2006/relationships" xmlns:a="http://schemas.openxmlformats.org/drawingml/2006/main" r:embed="R82af8b339a0d44b6"/>
+          <a:blip xmlns:r="http://schemas.openxmlformats.org/officeDocument/2006/relationships" xmlns:a="http://schemas.openxmlformats.org/drawingml/2006/main" r:embed="R8dc49a4c51b040d4"/>
           <a:stretch xmlns:a="http://schemas.openxmlformats.org/drawingml/2006/main"/>
         </p:blipFill>
         <p:spPr>
@@ -9095,14 +9913,14 @@
       </p:sp>
       <p:pic>
         <p:nvPicPr>
-          <p:cNvPr id="24" name=""/>
+          <p:cNvPr id="25" name=""/>
           <p:cNvPicPr>
             <a:picLocks xmlns:a="http://schemas.openxmlformats.org/drawingml/2006/main" noChangeAspect="1"/>
           </p:cNvPicPr>
           <p:nvPr/>
         </p:nvPicPr>
         <p:blipFill>
-          <a:blip xmlns:r="http://schemas.openxmlformats.org/officeDocument/2006/relationships" xmlns:a="http://schemas.openxmlformats.org/drawingml/2006/main" r:embed="R2c130e8240ed435a"/>
+          <a:blip xmlns:r="http://schemas.openxmlformats.org/officeDocument/2006/relationships" xmlns:a="http://schemas.openxmlformats.org/drawingml/2006/main" r:embed="R3c5ec5b18bc2433a"/>
           <a:stretch xmlns:a="http://schemas.openxmlformats.org/drawingml/2006/main"/>
         </p:blipFill>
         <p:spPr>
@@ -9982,14 +10800,14 @@
       </p:sp>
       <p:pic>
         <p:nvPicPr>
-          <p:cNvPr id="29" name=""/>
+          <p:cNvPr id="30" name=""/>
           <p:cNvPicPr>
             <a:picLocks xmlns:a="http://schemas.openxmlformats.org/drawingml/2006/main" noChangeAspect="1"/>
           </p:cNvPicPr>
           <p:nvPr/>
         </p:nvPicPr>
         <p:blipFill>
-          <a:blip xmlns:r="http://schemas.openxmlformats.org/officeDocument/2006/relationships" xmlns:a="http://schemas.openxmlformats.org/drawingml/2006/main" r:embed="Rfbea582486634573"/>
+          <a:blip xmlns:r="http://schemas.openxmlformats.org/officeDocument/2006/relationships" xmlns:a="http://schemas.openxmlformats.org/drawingml/2006/main" r:embed="Reecfe6c616c74b9e"/>
           <a:stretch xmlns:a="http://schemas.openxmlformats.org/drawingml/2006/main"/>
         </p:blipFill>
         <p:spPr>
@@ -10322,7 +11140,7 @@
                 <a:ea typeface="微软雅黑"/>
                 <a:cs typeface="微软雅黑"/>
               </a:rPr>
-              <a:t>两者都需</a:t>
+              <a:t>先写清边界</a:t>
             </a:r>
           </a:p>
         </p:txBody>
@@ -10529,7 +11347,7 @@
                 <a:ea typeface="微软雅黑"/>
                 <a:cs typeface="微软雅黑"/>
               </a:rPr>
-              <a:t>AutoResearch 更集中</a:t>
+              <a:t>冻结队列 / 优化</a:t>
             </a:r>
           </a:p>
         </p:txBody>
@@ -10736,7 +11554,7 @@
                 <a:ea typeface="微软雅黑"/>
                 <a:cs typeface="微软雅黑"/>
               </a:rPr>
-              <a:t>都不能自改</a:t>
+              <a:t>生成器不可自评</a:t>
             </a:r>
           </a:p>
         </p:txBody>
@@ -10884,7 +11702,7 @@
                 <a:ea typeface="微软雅黑"/>
                 <a:cs typeface="微软雅黑"/>
               </a:rPr>
-              <a:t>AI Scientist 边界更多</a:t>
+              <a:t>核验方法与结论</a:t>
             </a:r>
           </a:p>
         </p:txBody>
@@ -10943,7 +11761,7 @@
                 <a:ea typeface="微软雅黑"/>
                 <a:cs typeface="微软雅黑"/>
               </a:rPr>
-              <a:t>AutoResearch 共享最小循环；AI Scientist 增加想法、写作与评审环节。</a:t>
+              <a:t>共同约束：指标、预算、停止、失败保留；冻结队列不做方法优化。</a:t>
             </a:r>
           </a:p>
         </p:txBody>
@@ -11077,14 +11895,14 @@
       </p:sp>
       <p:pic>
         <p:nvPicPr>
-          <p:cNvPr id="27" name=""/>
+          <p:cNvPr id="28" name=""/>
           <p:cNvPicPr>
             <a:picLocks xmlns:a="http://schemas.openxmlformats.org/drawingml/2006/main" noChangeAspect="1"/>
           </p:cNvPicPr>
           <p:nvPr/>
         </p:nvPicPr>
         <p:blipFill>
-          <a:blip xmlns:r="http://schemas.openxmlformats.org/officeDocument/2006/relationships" xmlns:a="http://schemas.openxmlformats.org/drawingml/2006/main" r:embed="R1c8ca9165f604306"/>
+          <a:blip xmlns:r="http://schemas.openxmlformats.org/officeDocument/2006/relationships" xmlns:a="http://schemas.openxmlformats.org/drawingml/2006/main" r:embed="Rc351bb2c6b614a4e"/>
           <a:stretch xmlns:a="http://schemas.openxmlformats.org/drawingml/2006/main"/>
         </p:blipFill>
         <p:spPr>
@@ -11630,7 +12448,7 @@
                 <a:ea typeface="微软雅黑"/>
                 <a:cs typeface="微软雅黑"/>
               </a:rPr>
-              <a:t>画 Keep / Discard 与回退</a:t>
+              <a:t>区分队列 / 优化，画失败恢复</a:t>
             </a:r>
           </a:p>
         </p:txBody>
@@ -11715,7 +12533,7 @@
             <a:r>
               <a:rPr sz="1800" b="1">
                 <a:solidFill>
-                  <a:srgbClr val="C8161E"/>
+                  <a:srgbClr val="FFFFFF"/>
                 </a:solidFill>
                 <a:latin typeface="微软雅黑"/>
                 <a:ea typeface="微软雅黑"/>
@@ -12050,7 +12868,7 @@
                 <a:ea typeface="微软雅黑"/>
                 <a:cs typeface="微软雅黑"/>
               </a:rPr>
-              <a:t>失败 trace 连接运行与下一次配置</a:t>
+              <a:t>失败 trace 连接停止与冻结配置恢复</a:t>
             </a:r>
             <a:endParaRPr/>
           </a:p>
@@ -12116,14 +12934,14 @@
       </p:sp>
       <p:pic>
         <p:nvPicPr>
-          <p:cNvPr id="23" name=""/>
+          <p:cNvPr id="24" name=""/>
           <p:cNvPicPr>
             <a:picLocks xmlns:a="http://schemas.openxmlformats.org/drawingml/2006/main" noChangeAspect="1"/>
           </p:cNvPicPr>
           <p:nvPr/>
         </p:nvPicPr>
         <p:blipFill>
-          <a:blip xmlns:r="http://schemas.openxmlformats.org/officeDocument/2006/relationships" xmlns:a="http://schemas.openxmlformats.org/drawingml/2006/main" r:embed="R56066a86c7bf48ec"/>
+          <a:blip xmlns:r="http://schemas.openxmlformats.org/officeDocument/2006/relationships" xmlns:a="http://schemas.openxmlformats.org/drawingml/2006/main" r:embed="R567768211c9e4c3b"/>
           <a:stretch xmlns:a="http://schemas.openxmlformats.org/drawingml/2006/main"/>
         </p:blipFill>
         <p:spPr>
@@ -12190,7 +13008,7 @@
                 <a:ea typeface="微软雅黑"/>
                 <a:cs typeface="微软雅黑"/>
               </a:rPr>
-              <a:t>失败 trace 连接运行与下一次配置</a:t>
+              <a:t>失败 trace 连接停止与冻结配置恢复</a:t>
             </a:r>
           </a:p>
         </p:txBody>
@@ -12301,7 +13119,7 @@
         <p:spPr>
           <a:xfrm xmlns:a="http://schemas.openxmlformats.org/drawingml/2006/main">
             <a:off x="666750" y="1381125"/>
-            <a:ext cx="3429000" cy="323850"/>
+            <a:ext cx="4286250" cy="323850"/>
           </a:xfrm>
           <a:prstGeom xmlns:a="http://schemas.openxmlformats.org/drawingml/2006/main" prst="rect">
             <a:avLst/>
@@ -12331,7 +13149,7 @@
         <p:spPr>
           <a:xfrm xmlns:a="http://schemas.openxmlformats.org/drawingml/2006/main">
             <a:off x="742950" y="1400175"/>
-            <a:ext cx="3276600" cy="285750"/>
+            <a:ext cx="4133850" cy="285750"/>
           </a:xfrm>
           <a:prstGeom xmlns:a="http://schemas.openxmlformats.org/drawingml/2006/main" prst="rect">
             <a:avLst/>
@@ -12427,7 +13245,7 @@
                 <a:ea typeface="微软雅黑"/>
                 <a:cs typeface="微软雅黑"/>
               </a:rPr>
-              <a:t>run_id: exp01-iter07</a:t>
+              <a:t>run_id: exp01-iter07｜H1</a:t>
             </a:r>
           </a:p>
         </p:txBody>
@@ -12486,7 +13304,7 @@
                 <a:ea typeface="微软雅黑"/>
                 <a:cs typeface="微软雅黑"/>
               </a:rPr>
-              <a:t>status: failed</a:t>
+              <a:t>failure: metric protocol mismatch</a:t>
             </a:r>
           </a:p>
         </p:txBody>
@@ -12545,7 +13363,7 @@
                 <a:ea typeface="微软雅黑"/>
                 <a:cs typeface="微软雅黑"/>
               </a:rPr>
-              <a:t>failure: metric protocol mismatch</a:t>
+              <a:t>stop: protocol change detected</a:t>
             </a:r>
           </a:p>
         </p:txBody>
@@ -12604,7 +13422,7 @@
                 <a:ea typeface="微软雅黑"/>
                 <a:cs typeface="微软雅黑"/>
               </a:rPr>
-              <a:t>decision: discard candidate</a:t>
+              <a:t>rollback: frozen-config-v1</a:t>
             </a:r>
           </a:p>
         </p:txBody>
@@ -12663,7 +13481,7 @@
                 <a:ea typeface="微软雅黑"/>
                 <a:cs typeface="微软雅黑"/>
               </a:rPr>
-              <a:t>rollback: stable-config-v1</a:t>
+              <a:t>human_review: confirmed</a:t>
             </a:r>
           </a:p>
         </p:txBody>
@@ -12722,7 +13540,7 @@
                 <a:ea typeface="微软雅黑"/>
                 <a:cs typeface="微软雅黑"/>
               </a:rPr>
-              <a:t>next: fix protocol binding</a:t>
+              <a:t>decision: stop; retain failed run</a:t>
             </a:r>
           </a:p>
         </p:txBody>
@@ -12781,7 +13599,7 @@
                 <a:ea typeface="微软雅黑"/>
                 <a:cs typeface="微软雅黑"/>
               </a:rPr>
-              <a:t>失败没有被删除</a:t>
+              <a:t>失败记录保留</a:t>
             </a:r>
           </a:p>
           <a:p xmlns:a="http://schemas.openxmlformats.org/drawingml/2006/main">
@@ -12808,7 +13626,7 @@
                 <a:ea typeface="微软雅黑"/>
                 <a:cs typeface="微软雅黑"/>
               </a:rPr>
-              <a:t>它改变下一次配置</a:t>
+              <a:t>恢复原冻结配置</a:t>
             </a:r>
           </a:p>
         </p:txBody>
@@ -12942,14 +13760,14 @@
       </p:sp>
       <p:pic>
         <p:nvPicPr>
-          <p:cNvPr id="26" name=""/>
+          <p:cNvPr id="27" name=""/>
           <p:cNvPicPr>
             <a:picLocks xmlns:a="http://schemas.openxmlformats.org/drawingml/2006/main" noChangeAspect="1"/>
           </p:cNvPicPr>
           <p:nvPr/>
         </p:nvPicPr>
         <p:blipFill>
-          <a:blip xmlns:r="http://schemas.openxmlformats.org/officeDocument/2006/relationships" xmlns:a="http://schemas.openxmlformats.org/drawingml/2006/main" r:embed="R3296ea45d60c45b2"/>
+          <a:blip xmlns:r="http://schemas.openxmlformats.org/officeDocument/2006/relationships" xmlns:a="http://schemas.openxmlformats.org/drawingml/2006/main" r:embed="Ra0ff7f4d3fc84eef"/>
           <a:stretch xmlns:a="http://schemas.openxmlformats.org/drawingml/2006/main"/>
         </p:blipFill>
         <p:spPr>
@@ -13725,7 +14543,7 @@
                 <a:ea typeface="微软雅黑"/>
                 <a:cs typeface="微软雅黑"/>
               </a:rPr>
-              <a:t>? 120 输出是否被误写为优化</a:t>
+              <a:t>? 队列被当成优化吗</a:t>
             </a:r>
           </a:p>
         </p:txBody>
@@ -13945,14 +14763,14 @@
       </p:sp>
       <p:pic>
         <p:nvPicPr>
-          <p:cNvPr id="28" name=""/>
+          <p:cNvPr id="29" name=""/>
           <p:cNvPicPr>
             <a:picLocks xmlns:a="http://schemas.openxmlformats.org/drawingml/2006/main" noChangeAspect="1"/>
           </p:cNvPicPr>
           <p:nvPr/>
         </p:nvPicPr>
         <p:blipFill>
-          <a:blip xmlns:r="http://schemas.openxmlformats.org/officeDocument/2006/relationships" xmlns:a="http://schemas.openxmlformats.org/drawingml/2006/main" r:embed="Re566882fd7e244ca"/>
+          <a:blip xmlns:r="http://schemas.openxmlformats.org/officeDocument/2006/relationships" xmlns:a="http://schemas.openxmlformats.org/drawingml/2006/main" r:embed="R3301b66dbf364e13"/>
           <a:stretch xmlns:a="http://schemas.openxmlformats.org/drawingml/2006/main"/>
         </p:blipFill>
         <p:spPr>
@@ -14981,14 +15799,14 @@
       </p:sp>
       <p:pic>
         <p:nvPicPr>
-          <p:cNvPr id="29" name=""/>
+          <p:cNvPr id="30" name=""/>
           <p:cNvPicPr>
             <a:picLocks xmlns:a="http://schemas.openxmlformats.org/drawingml/2006/main" noChangeAspect="1"/>
           </p:cNvPicPr>
           <p:nvPr/>
         </p:nvPicPr>
         <p:blipFill>
-          <a:blip xmlns:r="http://schemas.openxmlformats.org/officeDocument/2006/relationships" xmlns:a="http://schemas.openxmlformats.org/drawingml/2006/main" r:embed="R7c52dd09d14c4c63"/>
+          <a:blip xmlns:r="http://schemas.openxmlformats.org/officeDocument/2006/relationships" xmlns:a="http://schemas.openxmlformats.org/drawingml/2006/main" r:embed="R0865613b385e4c6c"/>
           <a:stretch xmlns:a="http://schemas.openxmlformats.org/drawingml/2006/main"/>
         </p:blipFill>
         <p:spPr>
@@ -16076,14 +16894,14 @@
       </p:sp>
       <p:pic>
         <p:nvPicPr>
-          <p:cNvPr id="26" name=""/>
+          <p:cNvPr id="27" name=""/>
           <p:cNvPicPr>
             <a:picLocks xmlns:a="http://schemas.openxmlformats.org/drawingml/2006/main" noChangeAspect="1"/>
           </p:cNvPicPr>
           <p:nvPr/>
         </p:nvPicPr>
         <p:blipFill>
-          <a:blip xmlns:r="http://schemas.openxmlformats.org/officeDocument/2006/relationships" xmlns:a="http://schemas.openxmlformats.org/drawingml/2006/main" r:embed="R3db3761ef99e4f3c"/>
+          <a:blip xmlns:r="http://schemas.openxmlformats.org/officeDocument/2006/relationships" xmlns:a="http://schemas.openxmlformats.org/drawingml/2006/main" r:embed="R4a03f87a7c6a4320"/>
           <a:stretch xmlns:a="http://schemas.openxmlformats.org/drawingml/2006/main"/>
         </p:blipFill>
         <p:spPr>
@@ -17102,14 +17920,14 @@
       </p:sp>
       <p:pic>
         <p:nvPicPr>
-          <p:cNvPr id="24" name=""/>
+          <p:cNvPr id="25" name=""/>
           <p:cNvPicPr>
             <a:picLocks xmlns:a="http://schemas.openxmlformats.org/drawingml/2006/main" noChangeAspect="1"/>
           </p:cNvPicPr>
           <p:nvPr/>
         </p:nvPicPr>
         <p:blipFill>
-          <a:blip xmlns:r="http://schemas.openxmlformats.org/officeDocument/2006/relationships" xmlns:a="http://schemas.openxmlformats.org/drawingml/2006/main" r:embed="R8a4ad8eeacb64730"/>
+          <a:blip xmlns:r="http://schemas.openxmlformats.org/officeDocument/2006/relationships" xmlns:a="http://schemas.openxmlformats.org/drawingml/2006/main" r:embed="Rca211510f54b432c"/>
           <a:stretch xmlns:a="http://schemas.openxmlformats.org/drawingml/2006/main"/>
         </p:blipFill>
         <p:spPr>
@@ -17931,14 +18749,14 @@
       </p:sp>
       <p:pic>
         <p:nvPicPr>
-          <p:cNvPr id="33" name=""/>
+          <p:cNvPr id="34" name=""/>
           <p:cNvPicPr>
             <a:picLocks xmlns:a="http://schemas.openxmlformats.org/drawingml/2006/main" noChangeAspect="1"/>
           </p:cNvPicPr>
           <p:nvPr/>
         </p:nvPicPr>
         <p:blipFill>
-          <a:blip xmlns:r="http://schemas.openxmlformats.org/officeDocument/2006/relationships" xmlns:a="http://schemas.openxmlformats.org/drawingml/2006/main" r:embed="R823ec0b6671b4e6e"/>
+          <a:blip xmlns:r="http://schemas.openxmlformats.org/officeDocument/2006/relationships" xmlns:a="http://schemas.openxmlformats.org/drawingml/2006/main" r:embed="Rb9df01cd71344ed4"/>
           <a:stretch xmlns:a="http://schemas.openxmlformats.org/drawingml/2006/main"/>
         </p:blipFill>
         <p:spPr>
@@ -19099,7 +19917,7 @@
                 <a:ea typeface="微软雅黑"/>
                 <a:cs typeface="微软雅黑"/>
               </a:rPr>
-              <a:t>Discard 回到冻结假设与配置；失败日志留在账本中</a:t>
+              <a:t>Discard 回到稳定配置；失败日志留在账本中</a:t>
             </a:r>
           </a:p>
         </p:txBody>
@@ -19233,14 +20051,14 @@
       </p:sp>
       <p:pic>
         <p:nvPicPr>
-          <p:cNvPr id="24" name=""/>
+          <p:cNvPr id="25" name=""/>
           <p:cNvPicPr>
             <a:picLocks xmlns:a="http://schemas.openxmlformats.org/drawingml/2006/main" noChangeAspect="1"/>
           </p:cNvPicPr>
           <p:nvPr/>
         </p:nvPicPr>
         <p:blipFill>
-          <a:blip xmlns:r="http://schemas.openxmlformats.org/officeDocument/2006/relationships" xmlns:a="http://schemas.openxmlformats.org/drawingml/2006/main" r:embed="Rd434ee918631414c"/>
+          <a:blip xmlns:r="http://schemas.openxmlformats.org/officeDocument/2006/relationships" xmlns:a="http://schemas.openxmlformats.org/drawingml/2006/main" r:embed="R8b492c3ef4914888"/>
           <a:stretch xmlns:a="http://schemas.openxmlformats.org/drawingml/2006/main"/>
         </p:blipFill>
         <p:spPr>
@@ -20120,14 +20938,14 @@
       </p:sp>
       <p:pic>
         <p:nvPicPr>
-          <p:cNvPr id="25" name=""/>
+          <p:cNvPr id="27" name=""/>
           <p:cNvPicPr>
             <a:picLocks xmlns:a="http://schemas.openxmlformats.org/drawingml/2006/main" noChangeAspect="1"/>
           </p:cNvPicPr>
           <p:nvPr/>
         </p:nvPicPr>
         <p:blipFill>
-          <a:blip xmlns:r="http://schemas.openxmlformats.org/officeDocument/2006/relationships" xmlns:a="http://schemas.openxmlformats.org/drawingml/2006/main" r:embed="R1dbfe4fd2450464c"/>
+          <a:blip xmlns:r="http://schemas.openxmlformats.org/officeDocument/2006/relationships" xmlns:a="http://schemas.openxmlformats.org/drawingml/2006/main" r:embed="R618ca08bcae44709"/>
           <a:stretch xmlns:a="http://schemas.openxmlformats.org/drawingml/2006/main"/>
         </p:blipFill>
         <p:spPr>
@@ -20904,6 +21722,65 @@
                 <a:cs typeface="微软雅黑"/>
               </a:rPr>
               <a:t>× 不能改变人工基准</a:t>
+            </a:r>
+          </a:p>
+        </p:txBody>
+      </p:sp>
+      <p:sp>
+        <p:nvSpPr>
+          <p:cNvPr id="23" name="fiction">
+            <a:extLst xmlns:a="http://schemas.openxmlformats.org/drawingml/2006/main">
+              <a:ext uri="{FF2B5EF4-FFF2-40B4-BE49-F238E27FC236}">
+                <a16:creationId xmlns:a16="http://schemas.microsoft.com/office/drawing/2014/main" id="{B82D1743-C9E2-448A-91D4-6135A602DAF3}"/>
+              </a:ext>
+            </a:extLst>
+          </p:cNvPr>
+          <p:cNvSpPr>
+            <a:spLocks xmlns:a="http://schemas.openxmlformats.org/drawingml/2006/main" noGrp="1"/>
+          </p:cNvSpPr>
+          <p:nvPr/>
+        </p:nvSpPr>
+        <p:spPr>
+          <a:xfrm xmlns:a="http://schemas.openxmlformats.org/drawingml/2006/main">
+            <a:off x="609600" y="885825"/>
+            <a:ext cx="10572750" cy="314325"/>
+          </a:xfrm>
+          <a:prstGeom xmlns:a="http://schemas.openxmlformats.org/drawingml/2006/main" prst="rect">
+            <a:avLst/>
+          </a:prstGeom>
+          <a:noFill xmlns:a="http://schemas.openxmlformats.org/drawingml/2006/main"/>
+          <a:ln xmlns:a="http://schemas.openxmlformats.org/drawingml/2006/main" w="0">
+            <a:noFill/>
+          </a:ln>
+        </p:spPr>
+        <p:txBody>
+          <a:bodyPr xmlns:a="http://schemas.openxmlformats.org/drawingml/2006/main" lIns="0" tIns="0" rIns="0" bIns="0" anchor="t"/>
+          <a:lstStyle xmlns:a="http://schemas.openxmlformats.org/drawingml/2006/main"/>
+          <a:p xmlns:a="http://schemas.openxmlformats.org/drawingml/2006/main">
+            <a:pPr algn="l">
+              <a:lnSpc>
+                <a:spcPct val="118000"/>
+              </a:lnSpc>
+              <a:buNone/>
+              <a:defRPr sz="1800" b="0">
+                <a:solidFill>
+                  <a:srgbClr val="A96510"/>
+                </a:solidFill>
+                <a:latin typeface="微软雅黑"/>
+                <a:ea typeface="微软雅黑"/>
+                <a:cs typeface="微软雅黑"/>
+              </a:defRPr>
+            </a:pPr>
+            <a:r>
+              <a:rPr sz="1800" b="0">
+                <a:solidFill>
+                  <a:srgbClr val="A96510"/>
+                </a:solidFill>
+                <a:latin typeface="微软雅黑"/>
+                <a:ea typeface="微软雅黑"/>
+                <a:cs typeface="微软雅黑"/>
+              </a:rPr>
+              <a:t>课程虚构教学工件</a:t>
             </a:r>
           </a:p>
         </p:txBody>
@@ -21037,14 +21914,14 @@
       </p:sp>
       <p:pic>
         <p:nvPicPr>
-          <p:cNvPr id="33" name=""/>
+          <p:cNvPr id="34" name=""/>
           <p:cNvPicPr>
             <a:picLocks xmlns:a="http://schemas.openxmlformats.org/drawingml/2006/main" noChangeAspect="1"/>
           </p:cNvPicPr>
           <p:nvPr/>
         </p:nvPicPr>
         <p:blipFill>
-          <a:blip xmlns:r="http://schemas.openxmlformats.org/officeDocument/2006/relationships" xmlns:a="http://schemas.openxmlformats.org/drawingml/2006/main" r:embed="Rdd0913a507704464"/>
+          <a:blip xmlns:r="http://schemas.openxmlformats.org/officeDocument/2006/relationships" xmlns:a="http://schemas.openxmlformats.org/drawingml/2006/main" r:embed="R2693de53bd764c04"/>
           <a:stretch xmlns:a="http://schemas.openxmlformats.org/drawingml/2006/main"/>
         </p:blipFill>
         <p:spPr>
@@ -21998,7 +22875,7 @@
                 <a:ea typeface="微软雅黑"/>
                 <a:cs typeface="微软雅黑"/>
               </a:rPr>
-              <a:t>预算耗尽或稳定</a:t>
+              <a:t>预算耗尽或队列完成</a:t>
             </a:r>
           </a:p>
         </p:txBody>
@@ -22205,7 +23082,7 @@
                 <a:ea typeface="微软雅黑"/>
                 <a:cs typeface="微软雅黑"/>
               </a:rPr>
-              <a:t>禁止触发：越权、评价协议变更、失败日志删除 → 立即停止并记录</a:t>
+              <a:t>禁止按结果好坏停止；越权、协议变更或删日志须立即停并记录</a:t>
             </a:r>
           </a:p>
         </p:txBody>
@@ -22339,14 +23216,14 @@
       </p:sp>
       <p:pic>
         <p:nvPicPr>
-          <p:cNvPr id="29" name=""/>
+          <p:cNvPr id="30" name=""/>
           <p:cNvPicPr>
             <a:picLocks xmlns:a="http://schemas.openxmlformats.org/drawingml/2006/main" noChangeAspect="1"/>
           </p:cNvPicPr>
           <p:nvPr/>
         </p:nvPicPr>
         <p:blipFill>
-          <a:blip xmlns:r="http://schemas.openxmlformats.org/officeDocument/2006/relationships" xmlns:a="http://schemas.openxmlformats.org/drawingml/2006/main" r:embed="Rabbabfbc621d43d9"/>
+          <a:blip xmlns:r="http://schemas.openxmlformats.org/officeDocument/2006/relationships" xmlns:a="http://schemas.openxmlformats.org/drawingml/2006/main" r:embed="R1547e6306d6143a6"/>
           <a:stretch xmlns:a="http://schemas.openxmlformats.org/drawingml/2006/main"/>
         </p:blipFill>
         <p:spPr>
@@ -23434,14 +24311,14 @@
       </p:sp>
       <p:pic>
         <p:nvPicPr>
-          <p:cNvPr id="22" name=""/>
+          <p:cNvPr id="23" name=""/>
           <p:cNvPicPr>
             <a:picLocks xmlns:a="http://schemas.openxmlformats.org/drawingml/2006/main" noChangeAspect="1"/>
           </p:cNvPicPr>
           <p:nvPr/>
         </p:nvPicPr>
         <p:blipFill>
-          <a:blip xmlns:r="http://schemas.openxmlformats.org/officeDocument/2006/relationships" xmlns:a="http://schemas.openxmlformats.org/drawingml/2006/main" r:embed="Rca721d568c454ea9"/>
+          <a:blip xmlns:r="http://schemas.openxmlformats.org/officeDocument/2006/relationships" xmlns:a="http://schemas.openxmlformats.org/drawingml/2006/main" r:embed="R82c4a0703cee482b"/>
           <a:stretch xmlns:a="http://schemas.openxmlformats.org/drawingml/2006/main"/>
         </p:blipFill>
         <p:spPr>

--- a/lessons/lesson-11/slides.pptx
+++ b/lessons/lesson-11/slides.pptx
@@ -2,32 +2,32 @@
 <file path=ppt/presentation.xml><?xml version="1.0" encoding="utf-8"?>
 <p:presentation xmlns:p="http://schemas.openxmlformats.org/presentationml/2006/main">
   <p:sldMasterIdLst>
-    <p:sldMasterId xmlns:r="http://schemas.openxmlformats.org/officeDocument/2006/relationships" id="2147483648" r:id="Rf1750f7c60f84704"/>
+    <p:sldMasterId xmlns:r="http://schemas.openxmlformats.org/officeDocument/2006/relationships" id="2147483648" r:id="Rb63648eec3394e79"/>
   </p:sldMasterIdLst>
   <p:notesMasterIdLst>
-    <p:notesMasterId xmlns:r="http://schemas.openxmlformats.org/officeDocument/2006/relationships" r:id="Rbf2a6d1213604480"/>
+    <p:notesMasterId xmlns:r="http://schemas.openxmlformats.org/officeDocument/2006/relationships" r:id="R0ac36eb81e924060"/>
   </p:notesMasterIdLst>
   <p:sldIdLst>
-    <p:sldId xmlns:r="http://schemas.openxmlformats.org/officeDocument/2006/relationships" id="256" r:id="R207073b5df8e4df8"/>
-    <p:sldId xmlns:r="http://schemas.openxmlformats.org/officeDocument/2006/relationships" id="257" r:id="R09063de57d0b4c88"/>
-    <p:sldId xmlns:r="http://schemas.openxmlformats.org/officeDocument/2006/relationships" id="258" r:id="Rb89207e71e474c7c"/>
-    <p:sldId xmlns:r="http://schemas.openxmlformats.org/officeDocument/2006/relationships" id="259" r:id="Rd43bcb117eb941cc"/>
-    <p:sldId xmlns:r="http://schemas.openxmlformats.org/officeDocument/2006/relationships" id="260" r:id="R78576e95c8f74ce3"/>
-    <p:sldId xmlns:r="http://schemas.openxmlformats.org/officeDocument/2006/relationships" id="261" r:id="Rb533f2a7056544bc"/>
-    <p:sldId xmlns:r="http://schemas.openxmlformats.org/officeDocument/2006/relationships" id="262" r:id="Rc48e2032c3284317"/>
-    <p:sldId xmlns:r="http://schemas.openxmlformats.org/officeDocument/2006/relationships" id="263" r:id="R29edbd49359644b0"/>
-    <p:sldId xmlns:r="http://schemas.openxmlformats.org/officeDocument/2006/relationships" id="264" r:id="Rd1599cf8b6fb4d63"/>
-    <p:sldId xmlns:r="http://schemas.openxmlformats.org/officeDocument/2006/relationships" id="265" r:id="R62f03580ad1a496c"/>
-    <p:sldId xmlns:r="http://schemas.openxmlformats.org/officeDocument/2006/relationships" id="266" r:id="R9082322287f148c3"/>
-    <p:sldId xmlns:r="http://schemas.openxmlformats.org/officeDocument/2006/relationships" id="267" r:id="Rd6397cab654b4749"/>
-    <p:sldId xmlns:r="http://schemas.openxmlformats.org/officeDocument/2006/relationships" id="268" r:id="Ra22497c32e09435a"/>
-    <p:sldId xmlns:r="http://schemas.openxmlformats.org/officeDocument/2006/relationships" id="269" r:id="Re28a4eda34324b95"/>
-    <p:sldId xmlns:r="http://schemas.openxmlformats.org/officeDocument/2006/relationships" id="270" r:id="R18404663ebbc4e11"/>
-    <p:sldId xmlns:r="http://schemas.openxmlformats.org/officeDocument/2006/relationships" id="271" r:id="R3a329d6792d842bd"/>
-    <p:sldId xmlns:r="http://schemas.openxmlformats.org/officeDocument/2006/relationships" id="272" r:id="R250859af66ce4427"/>
-    <p:sldId xmlns:r="http://schemas.openxmlformats.org/officeDocument/2006/relationships" id="273" r:id="Re6a589dbc24f4dfe"/>
-    <p:sldId xmlns:r="http://schemas.openxmlformats.org/officeDocument/2006/relationships" id="274" r:id="R03967bdc99fc4428"/>
-    <p:sldId xmlns:r="http://schemas.openxmlformats.org/officeDocument/2006/relationships" id="275" r:id="R490d221ebaf24195"/>
+    <p:sldId xmlns:r="http://schemas.openxmlformats.org/officeDocument/2006/relationships" id="256" r:id="Rab2931de19414b23"/>
+    <p:sldId xmlns:r="http://schemas.openxmlformats.org/officeDocument/2006/relationships" id="257" r:id="R7f201091d00d47ec"/>
+    <p:sldId xmlns:r="http://schemas.openxmlformats.org/officeDocument/2006/relationships" id="258" r:id="Re8587e99d1a34bd6"/>
+    <p:sldId xmlns:r="http://schemas.openxmlformats.org/officeDocument/2006/relationships" id="259" r:id="Rfd289236d4f94b5c"/>
+    <p:sldId xmlns:r="http://schemas.openxmlformats.org/officeDocument/2006/relationships" id="260" r:id="Raf2b979408bd4483"/>
+    <p:sldId xmlns:r="http://schemas.openxmlformats.org/officeDocument/2006/relationships" id="261" r:id="Rd98a7f0d33dc42c0"/>
+    <p:sldId xmlns:r="http://schemas.openxmlformats.org/officeDocument/2006/relationships" id="262" r:id="Rdfac37ef1d2f4bfa"/>
+    <p:sldId xmlns:r="http://schemas.openxmlformats.org/officeDocument/2006/relationships" id="263" r:id="R03eeff3635614c17"/>
+    <p:sldId xmlns:r="http://schemas.openxmlformats.org/officeDocument/2006/relationships" id="264" r:id="Re55699c3e8c7449c"/>
+    <p:sldId xmlns:r="http://schemas.openxmlformats.org/officeDocument/2006/relationships" id="265" r:id="Re2650223914f4c93"/>
+    <p:sldId xmlns:r="http://schemas.openxmlformats.org/officeDocument/2006/relationships" id="266" r:id="Rf48407b4c6cc47b5"/>
+    <p:sldId xmlns:r="http://schemas.openxmlformats.org/officeDocument/2006/relationships" id="267" r:id="Rfbc97832eb7641a8"/>
+    <p:sldId xmlns:r="http://schemas.openxmlformats.org/officeDocument/2006/relationships" id="268" r:id="R1f555ae8c98b48c7"/>
+    <p:sldId xmlns:r="http://schemas.openxmlformats.org/officeDocument/2006/relationships" id="269" r:id="Rafdf716ba3fa4617"/>
+    <p:sldId xmlns:r="http://schemas.openxmlformats.org/officeDocument/2006/relationships" id="270" r:id="Rb675410b5c054d35"/>
+    <p:sldId xmlns:r="http://schemas.openxmlformats.org/officeDocument/2006/relationships" id="271" r:id="R5e196dd8e6bc4fd1"/>
+    <p:sldId xmlns:r="http://schemas.openxmlformats.org/officeDocument/2006/relationships" id="272" r:id="Rd2fcbe8002fd4574"/>
+    <p:sldId xmlns:r="http://schemas.openxmlformats.org/officeDocument/2006/relationships" id="273" r:id="Rfe17ecc4648e4996"/>
+    <p:sldId xmlns:r="http://schemas.openxmlformats.org/officeDocument/2006/relationships" id="274" r:id="R7e3550d1a27b4aa0"/>
+    <p:sldId xmlns:r="http://schemas.openxmlformats.org/officeDocument/2006/relationships" id="275" r:id="R2c81e26c7b214419"/>
   </p:sldIdLst>
   <p:sldSz cx="12192000" cy="6858000"/>
   <p:notesSz cx="6858000" cy="9144000"/>
@@ -407,37 +407,87 @@
           <a:lstStyle xmlns:a="http://schemas.openxmlformats.org/drawingml/2006/main"/>
           <a:p xmlns:a="http://schemas.openxmlformats.org/drawingml/2006/main">
             <a:r>
-              <a:t>P01｜第11讲 实验自动化与 AutoResearch 循环</a:t>
-            </a:r>
-          </a:p>
-          <a:p xmlns:a="http://schemas.openxmlformats.org/drawingml/2006/main">
-            <a:r>
-              <a:t/>
-            </a:r>
-          </a:p>
-          <a:p xmlns:a="http://schemas.openxmlformats.org/drawingml/2006/main">
-            <a:r>
-              <a:t>讲述：开场放下第 10 课的受限执行记录。第 10 课已让 Agent 在受限权限下跑通一次，但"能跑通"和"可重复运行、可被评价、可被回退"之间还有距离。本课把受限执行扩展为实验自动化循环，并拆解 AutoResearch / AI Scientist 两类系统作为分析对象。</a:t>
-            </a:r>
-          </a:p>
-          <a:p xmlns:a="http://schemas.openxmlformats.org/drawingml/2006/main">
-            <a:r>
-              <a:t/>
-            </a:r>
-          </a:p>
-          <a:p xmlns:a="http://schemas.openxmlformats.org/drawingml/2006/main">
-            <a:r>
-              <a:t>学生动作：不展开课程行政信息，直接进入下一页回扣。</a:t>
-            </a:r>
-          </a:p>
-          <a:p xmlns:a="http://schemas.openxmlformats.org/drawingml/2006/main">
-            <a:r>
-              <a:t/>
-            </a:r>
-          </a:p>
-          <a:p xmlns:a="http://schemas.openxmlformats.org/drawingml/2006/main">
-            <a:r>
-              <a:t>建议时间：2 分钟。</a:t>
+              <a:t>页面：P01 第11讲 实验自动化与 AutoResearch 循环</a:t>
+            </a:r>
+          </a:p>
+          <a:p xmlns:a="http://schemas.openxmlformats.org/drawingml/2006/main">
+            <a:r>
+              <a:t/>
+            </a:r>
+          </a:p>
+          <a:p xmlns:a="http://schemas.openxmlformats.org/drawingml/2006/main">
+            <a:r>
+              <a:t>讲义位置：本课讲义；见逐页母稿映射表</a:t>
+            </a:r>
+          </a:p>
+          <a:p xmlns:a="http://schemas.openxmlformats.org/drawingml/2006/main">
+            <a:r>
+              <a:t/>
+            </a:r>
+          </a:p>
+          <a:p xmlns:a="http://schemas.openxmlformats.org/drawingml/2006/main">
+            <a:r>
+              <a:t>屏显核对：</a:t>
+            </a:r>
+          </a:p>
+          <a:p xmlns:a="http://schemas.openxmlformats.org/drawingml/2006/main">
+            <a:r>
+              <a:t>第11讲 实验自动化与 AutoResearch 循环</a:t>
+            </a:r>
+          </a:p>
+          <a:p xmlns:a="http://schemas.openxmlformats.org/drawingml/2006/main">
+            <a:r>
+              <a:t/>
+            </a:r>
+          </a:p>
+          <a:p xmlns:a="http://schemas.openxmlformats.org/drawingml/2006/main">
+            <a:r>
+              <a:t>教师讲述：</a:t>
+            </a:r>
+          </a:p>
+          <a:p xmlns:a="http://schemas.openxmlformats.org/drawingml/2006/main">
+            <a:r>
+              <a:t>开场放下第 10 课的受限执行记录。第 10 课已让 Agent 在受限权限下跑通一次，但"能跑通"和"可重复运行、可被评价、可被回退"之间还有距离。本课把受限执行扩展为实验自动化循环，并拆解 AutoResearch / AI Scientist 两类系统作为分析对象。</a:t>
+            </a:r>
+          </a:p>
+          <a:p xmlns:a="http://schemas.openxmlformats.org/drawingml/2006/main">
+            <a:r>
+              <a:t/>
+            </a:r>
+          </a:p>
+          <a:p xmlns:a="http://schemas.openxmlformats.org/drawingml/2006/main">
+            <a:r>
+              <a:t>学生动作：</a:t>
+            </a:r>
+          </a:p>
+          <a:p xmlns:a="http://schemas.openxmlformats.org/drawingml/2006/main">
+            <a:r>
+              <a:t>不展开课程行政信息，直接进入下一页回扣。</a:t>
+            </a:r>
+          </a:p>
+          <a:p xmlns:a="http://schemas.openxmlformats.org/drawingml/2006/main">
+            <a:r>
+              <a:t/>
+            </a:r>
+          </a:p>
+          <a:p xmlns:a="http://schemas.openxmlformats.org/drawingml/2006/main">
+            <a:r>
+              <a:t>来源与边界：</a:t>
+            </a:r>
+          </a:p>
+          <a:p xmlns:a="http://schemas.openxmlformats.org/drawingml/2006/main">
+            <a:r>
+              <a:t>课程信息以 [syllabus.md](../../course/syllabus.md) 为准；备课规划 [第 11 课](../备课规划.md) 权威六段。</a:t>
+            </a:r>
+          </a:p>
+          <a:p xmlns:a="http://schemas.openxmlformats.org/drawingml/2006/main">
+            <a:r>
+              <a:t/>
+            </a:r>
+          </a:p>
+          <a:p xmlns:a="http://schemas.openxmlformats.org/drawingml/2006/main">
+            <a:r>
+              <a:t>---</a:t>
             </a:r>
           </a:p>
           <a:p xmlns:a="http://schemas.openxmlformats.org/drawingml/2006/main">
@@ -452,17 +502,27 @@
           </a:p>
           <a:p xmlns:a="http://schemas.openxmlformats.org/drawingml/2006/main">
             <a:r>
-              <a:t>lessons/lesson-11/slides.md P01</a:t>
-            </a:r>
-          </a:p>
-          <a:p xmlns:a="http://schemas.openxmlformats.org/drawingml/2006/main">
-            <a:r>
-              <a:t>lessons/lesson-11/handout.md</a:t>
-            </a:r>
-          </a:p>
-          <a:p xmlns:a="http://schemas.openxmlformats.org/drawingml/2006/main">
-            <a:r>
-              <a:t>课程信息以 [syllabus.md](../../course/syllabus.md) 为准；备课规划 [第 11 课](../备课规划.md) 权威六段。</a:t>
+              <a:t/>
+            </a:r>
+          </a:p>
+          <a:p xmlns:a="http://schemas.openxmlformats.org/drawingml/2006/main">
+            <a:r>
+              <a:t>- 本课 handout.md 与 slides.md</a:t>
+            </a:r>
+          </a:p>
+          <a:p xmlns:a="http://schemas.openxmlformats.org/drawingml/2006/main">
+            <a:r>
+              <a:t/>
+            </a:r>
+          </a:p>
+          <a:p xmlns:a="http://schemas.openxmlformats.org/drawingml/2006/main">
+            <a:r>
+              <a:t>- ../../course/reading-card-case.md</a:t>
+            </a:r>
+          </a:p>
+          <a:p xmlns:a="http://schemas.openxmlformats.org/drawingml/2006/main">
+            <a:r>
+              <a:t/>
             </a:r>
           </a:p>
           <a:p xmlns:a="http://schemas.openxmlformats.org/drawingml/2006/main">
@@ -537,37 +597,107 @@
           <a:lstStyle xmlns:a="http://schemas.openxmlformats.org/drawingml/2006/main"/>
           <a:p xmlns:a="http://schemas.openxmlformats.org/drawingml/2006/main">
             <a:r>
-              <a:t>P10｜120 份冻结输出：执行、恢复与独立评价</a:t>
-            </a:r>
-          </a:p>
-          <a:p xmlns:a="http://schemas.openxmlformats.org/drawingml/2006/main">
-            <a:r>
-              <a:t/>
-            </a:r>
-          </a:p>
-          <a:p xmlns:a="http://schemas.openxmlformats.org/drawingml/2006/main">
-            <a:r>
-              <a:t>讲述：同一批 20 篇公开论文分别进入阅读卡和自由摘要条件，各运行 3 次，完整规格共 120 份输出。生成器只能读取冻结输入与配置，不能读取人工基准或根据中间评价改 prompt、模型、指标或数据。超时、协议错误先停并留痕，人工确认后恢复原冻结配置。生成后由独立人工基准盲评，结果进入后续研究判断。本课只需小子集或预置 trace，不要求课堂跑完 120 份。</a:t>
-            </a:r>
-          </a:p>
-          <a:p xmlns:a="http://schemas.openxmlformats.org/drawingml/2006/main">
-            <a:r>
-              <a:t/>
-            </a:r>
-          </a:p>
-          <a:p xmlns:a="http://schemas.openxmlformats.org/drawingml/2006/main">
-            <a:r>
-              <a:t>学生动作：让学生在自己的可重复动作上写出四约束的数字（不必精确，先有）。</a:t>
-            </a:r>
-          </a:p>
-          <a:p xmlns:a="http://schemas.openxmlformats.org/drawingml/2006/main">
-            <a:r>
-              <a:t/>
-            </a:r>
-          </a:p>
-          <a:p xmlns:a="http://schemas.openxmlformats.org/drawingml/2006/main">
-            <a:r>
-              <a:t>建议时间：6 分钟。</a:t>
+              <a:t>页面：P10 6 份固定输出：执行、恢复与评价</a:t>
+            </a:r>
+          </a:p>
+          <a:p xmlns:a="http://schemas.openxmlformats.org/drawingml/2006/main">
+            <a:r>
+              <a:t/>
+            </a:r>
+          </a:p>
+          <a:p xmlns:a="http://schemas.openxmlformats.org/drawingml/2006/main">
+            <a:r>
+              <a:t>讲义位置：handout.md §六、贯穿案例：把可重复动作改写为受限循环</a:t>
+            </a:r>
+          </a:p>
+          <a:p xmlns:a="http://schemas.openxmlformats.org/drawingml/2006/main">
+            <a:r>
+              <a:t/>
+            </a:r>
+          </a:p>
+          <a:p xmlns:a="http://schemas.openxmlformats.org/drawingml/2006/main">
+            <a:r>
+              <a:t>屏显核对：</a:t>
+            </a:r>
+          </a:p>
+          <a:p xmlns:a="http://schemas.openxmlformats.org/drawingml/2006/main">
+            <a:r>
+              <a:t>3 份源文本 × 2 个条件 = 6 个任务</a:t>
+            </a:r>
+          </a:p>
+          <a:p xmlns:a="http://schemas.openxmlformats.org/drawingml/2006/main">
+            <a:r>
+              <a:t/>
+            </a:r>
+          </a:p>
+          <a:p xmlns:a="http://schemas.openxmlformats.org/drawingml/2006/main">
+            <a:r>
+              <a:t>执行：逐项回放固定输出。</a:t>
+            </a:r>
+          </a:p>
+          <a:p xmlns:a="http://schemas.openxmlformats.org/drawingml/2006/main">
+            <a:r>
+              <a:t>恢复：只重试未完成项，保留旧失败。</a:t>
+            </a:r>
+          </a:p>
+          <a:p xmlns:a="http://schemas.openxmlformats.org/drawingml/2006/main">
+            <a:r>
+              <a:t>评价：核验人工标注并汇总遗漏率。</a:t>
+            </a:r>
+          </a:p>
+          <a:p xmlns:a="http://schemas.openxmlformats.org/drawingml/2006/main">
+            <a:r>
+              <a:t/>
+            </a:r>
+          </a:p>
+          <a:p xmlns:a="http://schemas.openxmlformats.org/drawingml/2006/main">
+            <a:r>
+              <a:t>固定队列展示执行控制，不自动构成优化循环。</a:t>
+            </a:r>
+          </a:p>
+          <a:p xmlns:a="http://schemas.openxmlformats.org/drawingml/2006/main">
+            <a:r>
+              <a:t/>
+            </a:r>
+          </a:p>
+          <a:p xmlns:a="http://schemas.openxmlformats.org/drawingml/2006/main">
+            <a:r>
+              <a:t>教师讲述：</a:t>
+            </a:r>
+          </a:p>
+          <a:p xmlns:a="http://schemas.openxmlformats.org/drawingml/2006/main">
+            <a:r>
+              <a:t>打开实际小包，先指出任务清单。若任务不生成新候选、不据评价更新下一轮，就不能把它叫自主研究优化。随后用已有系统分析说明优化循环额外需要什么。</a:t>
+            </a:r>
+          </a:p>
+          <a:p xmlns:a="http://schemas.openxmlformats.org/drawingml/2006/main">
+            <a:r>
+              <a:t/>
+            </a:r>
+          </a:p>
+          <a:p xmlns:a="http://schemas.openxmlformats.org/drawingml/2006/main">
+            <a:r>
+              <a:t>学生动作：</a:t>
+            </a:r>
+          </a:p>
+          <a:p xmlns:a="http://schemas.openxmlformats.org/drawingml/2006/main">
+            <a:r>
+              <a:t>学生指出这个流程缺少哪一步才会成为优化循环。</a:t>
+            </a:r>
+          </a:p>
+          <a:p xmlns:a="http://schemas.openxmlformats.org/drawingml/2006/main">
+            <a:r>
+              <a:t/>
+            </a:r>
+          </a:p>
+          <a:p xmlns:a="http://schemas.openxmlformats.org/drawingml/2006/main">
+            <a:r>
+              <a:t>来源与边界：</a:t>
+            </a:r>
+          </a:p>
+          <a:p xmlns:a="http://schemas.openxmlformats.org/drawingml/2006/main">
+            <a:r>
+              <a:t>./handout.md；课堂示例与构造数据见 ../../course/reading-card-case.md</a:t>
             </a:r>
           </a:p>
           <a:p xmlns:a="http://schemas.openxmlformats.org/drawingml/2006/main">
@@ -582,17 +712,27 @@
           </a:p>
           <a:p xmlns:a="http://schemas.openxmlformats.org/drawingml/2006/main">
             <a:r>
-              <a:t>lessons/lesson-11/slides.md P10</a:t>
-            </a:r>
-          </a:p>
-          <a:p xmlns:a="http://schemas.openxmlformats.org/drawingml/2006/main">
-            <a:r>
-              <a:t>lessons/lesson-11/handout.md</a:t>
-            </a:r>
-          </a:p>
-          <a:p xmlns:a="http://schemas.openxmlformats.org/drawingml/2006/main">
-            <a:r>
-              <a:t>handout §六·1-3；第 9 课贯穿案例（H1 + J1 + 实验规格）。</a:t>
+              <a:t/>
+            </a:r>
+          </a:p>
+          <a:p xmlns:a="http://schemas.openxmlformats.org/drawingml/2006/main">
+            <a:r>
+              <a:t>- 本课 handout.md 与 slides.md</a:t>
+            </a:r>
+          </a:p>
+          <a:p xmlns:a="http://schemas.openxmlformats.org/drawingml/2006/main">
+            <a:r>
+              <a:t/>
+            </a:r>
+          </a:p>
+          <a:p xmlns:a="http://schemas.openxmlformats.org/drawingml/2006/main">
+            <a:r>
+              <a:t>- ../../course/reading-card-case.md</a:t>
+            </a:r>
+          </a:p>
+          <a:p xmlns:a="http://schemas.openxmlformats.org/drawingml/2006/main">
+            <a:r>
+              <a:t/>
             </a:r>
           </a:p>
           <a:p xmlns:a="http://schemas.openxmlformats.org/drawingml/2006/main">
@@ -667,37 +807,117 @@
           <a:lstStyle xmlns:a="http://schemas.openxmlformats.org/drawingml/2006/main"/>
           <a:p xmlns:a="http://schemas.openxmlformats.org/drawingml/2006/main">
             <a:r>
-              <a:t>P11｜失败保留需要一张完整运行账本</a:t>
-            </a:r>
-          </a:p>
-          <a:p xmlns:a="http://schemas.openxmlformats.org/drawingml/2006/main">
-            <a:r>
-              <a:t/>
-            </a:r>
-          </a:p>
-          <a:p xmlns:a="http://schemas.openxmlformats.org/drawingml/2006/main">
-            <a:r>
-              <a:t>讲述：逐行区分执行有效、结果不支持和技术失败。前两者都保留原始输出；技术失败保留日志，协议错误须人工确认恢复。完整账本按全部运行对账，重试另留 run ID，不能替换失败记录。详细失败字段在 P17 和讲义 §五，表内 ID 均为虚构工件。</a:t>
-            </a:r>
-          </a:p>
-          <a:p xmlns:a="http://schemas.openxmlformats.org/drawingml/2006/main">
-            <a:r>
-              <a:t/>
-            </a:r>
-          </a:p>
-          <a:p xmlns:a="http://schemas.openxmlformats.org/drawingml/2006/main">
-            <a:r>
-              <a:t>学生动作：无。</a:t>
-            </a:r>
-          </a:p>
-          <a:p xmlns:a="http://schemas.openxmlformats.org/drawingml/2006/main">
-            <a:r>
-              <a:t/>
-            </a:r>
-          </a:p>
-          <a:p xmlns:a="http://schemas.openxmlformats.org/drawingml/2006/main">
-            <a:r>
-              <a:t>建议时间：4 分钟。</a:t>
+              <a:t>页面：P11 失败与恢复保存在同一本账中</a:t>
+            </a:r>
+          </a:p>
+          <a:p xmlns:a="http://schemas.openxmlformats.org/drawingml/2006/main">
+            <a:r>
+              <a:t/>
+            </a:r>
+          </a:p>
+          <a:p xmlns:a="http://schemas.openxmlformats.org/drawingml/2006/main">
+            <a:r>
+              <a:t>讲义位置：handout.md §六、贯穿案例：把可重复动作改写为受限循环</a:t>
+            </a:r>
+          </a:p>
+          <a:p xmlns:a="http://schemas.openxmlformats.org/drawingml/2006/main">
+            <a:r>
+              <a:t/>
+            </a:r>
+          </a:p>
+          <a:p xmlns:a="http://schemas.openxmlformats.org/drawingml/2006/main">
+            <a:r>
+              <a:t>屏显核对：</a:t>
+            </a:r>
+          </a:p>
+          <a:p xmlns:a="http://schemas.openxmlformats.org/drawingml/2006/main">
+            <a:r>
+              <a:t>| 实际记录 | 回答的问题 |</a:t>
+            </a:r>
+          </a:p>
+          <a:p xmlns:a="http://schemas.openxmlformats.org/drawingml/2006/main">
+            <a:r>
+              <a:t>| --- | --- |</a:t>
+            </a:r>
+          </a:p>
+          <a:p xmlns:a="http://schemas.openxmlformats.org/drawingml/2006/main">
+            <a:r>
+              <a:t>| job_id | 哪个固定任务，如 T02-card |</a:t>
+            </a:r>
+          </a:p>
+          <a:p xmlns:a="http://schemas.openxmlformats.org/drawingml/2006/main">
+            <a:r>
+              <a:t>| run_id | 哪次执行，如 run-003、run-004 |</a:t>
+            </a:r>
+          </a:p>
+          <a:p xmlns:a="http://schemas.openxmlformats.org/drawingml/2006/main">
+            <a:r>
+              <a:t>| event | controlled_failure 或 replayed |</a:t>
+            </a:r>
+          </a:p>
+          <a:p xmlns:a="http://schemas.openxmlformats.org/drawingml/2006/main">
+            <a:r>
+              <a:t>| state.json | 已完成任务与累计尝试次数 |</a:t>
+            </a:r>
+          </a:p>
+          <a:p xmlns:a="http://schemas.openxmlformats.org/drawingml/2006/main">
+            <a:r>
+              <a:t>| input-identity.json | 输入与配置是否仍为同一版本 |</a:t>
+            </a:r>
+          </a:p>
+          <a:p xmlns:a="http://schemas.openxmlformats.org/drawingml/2006/main">
+            <a:r>
+              <a:t/>
+            </a:r>
+          </a:p>
+          <a:p xmlns:a="http://schemas.openxmlformats.org/drawingml/2006/main">
+            <a:r>
+              <a:t>同一任务恢复时产生新 run_id，旧失败保留。</a:t>
+            </a:r>
+          </a:p>
+          <a:p xmlns:a="http://schemas.openxmlformats.org/drawingml/2006/main">
+            <a:r>
+              <a:t/>
+            </a:r>
+          </a:p>
+          <a:p xmlns:a="http://schemas.openxmlformats.org/drawingml/2006/main">
+            <a:r>
+              <a:t>教师讲述：</a:t>
+            </a:r>
+          </a:p>
+          <a:p xmlns:a="http://schemas.openxmlformats.org/drawingml/2006/main">
+            <a:r>
+              <a:t>执行带fault-once的回放，预期在T02-card停住；去掉该选项再运行。让学生对照实际ID，课堂不写死虚构run-003。成功任务不能再生成重复记录。</a:t>
+            </a:r>
+          </a:p>
+          <a:p xmlns:a="http://schemas.openxmlformats.org/drawingml/2006/main">
+            <a:r>
+              <a:t/>
+            </a:r>
+          </a:p>
+          <a:p xmlns:a="http://schemas.openxmlformats.org/drawingml/2006/main">
+            <a:r>
+              <a:t>学生动作：</a:t>
+            </a:r>
+          </a:p>
+          <a:p xmlns:a="http://schemas.openxmlformats.org/drawingml/2006/main">
+            <a:r>
+              <a:t>找到同一任务的失败和成功事件，说明它们为什么不是两个独立样本。</a:t>
+            </a:r>
+          </a:p>
+          <a:p xmlns:a="http://schemas.openxmlformats.org/drawingml/2006/main">
+            <a:r>
+              <a:t/>
+            </a:r>
+          </a:p>
+          <a:p xmlns:a="http://schemas.openxmlformats.org/drawingml/2006/main">
+            <a:r>
+              <a:t>来源与边界：</a:t>
+            </a:r>
+          </a:p>
+          <a:p xmlns:a="http://schemas.openxmlformats.org/drawingml/2006/main">
+            <a:r>
+              <a:t>./handout.md；课堂示例与构造数据见 ../../course/reading-card-case.md</a:t>
             </a:r>
           </a:p>
           <a:p xmlns:a="http://schemas.openxmlformats.org/drawingml/2006/main">
@@ -712,17 +932,27 @@
           </a:p>
           <a:p xmlns:a="http://schemas.openxmlformats.org/drawingml/2006/main">
             <a:r>
-              <a:t>lessons/lesson-11/slides.md P11</a:t>
-            </a:r>
-          </a:p>
-          <a:p xmlns:a="http://schemas.openxmlformats.org/drawingml/2006/main">
-            <a:r>
-              <a:t>lessons/lesson-11/handout.md</a:t>
-            </a:r>
-          </a:p>
-          <a:p xmlns:a="http://schemas.openxmlformats.org/drawingml/2006/main">
-            <a:r>
-              <a:t>handout §五·2-3；第 1 课 §一·1 实验迭代风险列。</a:t>
+              <a:t/>
+            </a:r>
+          </a:p>
+          <a:p xmlns:a="http://schemas.openxmlformats.org/drawingml/2006/main">
+            <a:r>
+              <a:t>- 本课 handout.md 与 slides.md</a:t>
+            </a:r>
+          </a:p>
+          <a:p xmlns:a="http://schemas.openxmlformats.org/drawingml/2006/main">
+            <a:r>
+              <a:t/>
+            </a:r>
+          </a:p>
+          <a:p xmlns:a="http://schemas.openxmlformats.org/drawingml/2006/main">
+            <a:r>
+              <a:t>- ../../course/reading-card-case.md</a:t>
+            </a:r>
+          </a:p>
+          <a:p xmlns:a="http://schemas.openxmlformats.org/drawingml/2006/main">
+            <a:r>
+              <a:t/>
             </a:r>
           </a:p>
           <a:p xmlns:a="http://schemas.openxmlformats.org/drawingml/2006/main">
@@ -797,37 +1027,187 @@
           <a:lstStyle xmlns:a="http://schemas.openxmlformats.org/drawingml/2006/main"/>
           <a:p xmlns:a="http://schemas.openxmlformats.org/drawingml/2006/main">
             <a:r>
-              <a:t>P12｜AutoResearch 与 AI Scientist 的系统主链</a:t>
-            </a:r>
-          </a:p>
-          <a:p xmlns:a="http://schemas.openxmlformats.org/drawingml/2006/main">
-            <a:r>
-              <a:t/>
-            </a:r>
-          </a:p>
-          <a:p xmlns:a="http://schemas.openxmlformats.org/drawingml/2006/main">
-            <a:r>
-              <a:t>讲述：用第 1 课 §四·2 的 Agent Workflow 八部分框架拆解这两类系统。它们是分析对象，不是结论外推的依据——要看清的是每个维度上"哪些已由系统处理、哪些仍需人工判断"，而不是断言"AI 已能自主科研"。AI Scientist 报告的是特定 ML 研究设置下的系统表现：三篇送审稿中一篇评分超过工作坊平均接收阈值，但按预设协议撤回；工作坊接收率为 70%，研究团队内部判断三篇均未达到 ICLR 主会标准。这不等于顶会正式接收，也不适用于所有学科。</a:t>
-            </a:r>
-          </a:p>
-          <a:p xmlns:a="http://schemas.openxmlformats.org/drawingml/2006/main">
-            <a:r>
-              <a:t/>
-            </a:r>
-          </a:p>
-          <a:p xmlns:a="http://schemas.openxmlformats.org/drawingml/2006/main">
-            <a:r>
-              <a:t>学生动作：无。</a:t>
-            </a:r>
-          </a:p>
-          <a:p xmlns:a="http://schemas.openxmlformats.org/drawingml/2006/main">
-            <a:r>
-              <a:t/>
-            </a:r>
-          </a:p>
-          <a:p xmlns:a="http://schemas.openxmlformats.org/drawingml/2006/main">
-            <a:r>
-              <a:t>建议时间：2 分钟。</a:t>
+              <a:t>页面：P12 AutoResearch 与 AI Scientist 的系统主链</a:t>
+            </a:r>
+          </a:p>
+          <a:p xmlns:a="http://schemas.openxmlformats.org/drawingml/2006/main">
+            <a:r>
+              <a:t/>
+            </a:r>
+          </a:p>
+          <a:p xmlns:a="http://schemas.openxmlformats.org/drawingml/2006/main">
+            <a:r>
+              <a:t>讲义位置：本课讲义；见逐页母稿映射表</a:t>
+            </a:r>
+          </a:p>
+          <a:p xmlns:a="http://schemas.openxmlformats.org/drawingml/2006/main">
+            <a:r>
+              <a:t/>
+            </a:r>
+          </a:p>
+          <a:p xmlns:a="http://schemas.openxmlformats.org/drawingml/2006/main">
+            <a:r>
+              <a:t>屏显核对：</a:t>
+            </a:r>
+          </a:p>
+          <a:p xmlns:a="http://schemas.openxmlformats.org/drawingml/2006/main">
+            <a:r>
+              <a:t>AutoResearch 与 AI Scientist 的系统主链</a:t>
+            </a:r>
+          </a:p>
+          <a:p xmlns:a="http://schemas.openxmlformats.org/drawingml/2006/main">
+            <a:r>
+              <a:t/>
+            </a:r>
+          </a:p>
+          <a:p xmlns:a="http://schemas.openxmlformats.org/drawingml/2006/main">
+            <a:r>
+              <a:t>- AutoResearch｜最小循环</a:t>
+            </a:r>
+          </a:p>
+          <a:p xmlns:a="http://schemas.openxmlformats.org/drawingml/2006/main">
+            <a:r>
+              <a:t/>
+            </a:r>
+          </a:p>
+          <a:p xmlns:a="http://schemas.openxmlformats.org/drawingml/2006/main">
+            <a:r>
+              <a:t>- AI Scientist｜端到端链</a:t>
+            </a:r>
+          </a:p>
+          <a:p xmlns:a="http://schemas.openxmlformats.org/drawingml/2006/main">
+            <a:r>
+              <a:t/>
+            </a:r>
+          </a:p>
+          <a:p xmlns:a="http://schemas.openxmlformats.org/drawingml/2006/main">
+            <a:r>
+              <a:t>- 程序改动</a:t>
+            </a:r>
+          </a:p>
+          <a:p xmlns:a="http://schemas.openxmlformats.org/drawingml/2006/main">
+            <a:r>
+              <a:t/>
+            </a:r>
+          </a:p>
+          <a:p xmlns:a="http://schemas.openxmlformats.org/drawingml/2006/main">
+            <a:r>
+              <a:t>- 单指标评价</a:t>
+            </a:r>
+          </a:p>
+          <a:p xmlns:a="http://schemas.openxmlformats.org/drawingml/2006/main">
+            <a:r>
+              <a:t/>
+            </a:r>
+          </a:p>
+          <a:p xmlns:a="http://schemas.openxmlformats.org/drawingml/2006/main">
+            <a:r>
+              <a:t>- Keep / Discard</a:t>
+            </a:r>
+          </a:p>
+          <a:p xmlns:a="http://schemas.openxmlformats.org/drawingml/2006/main">
+            <a:r>
+              <a:t/>
+            </a:r>
+          </a:p>
+          <a:p xmlns:a="http://schemas.openxmlformats.org/drawingml/2006/main">
+            <a:r>
+              <a:t>- 回到稳定版本</a:t>
+            </a:r>
+          </a:p>
+          <a:p xmlns:a="http://schemas.openxmlformats.org/drawingml/2006/main">
+            <a:r>
+              <a:t/>
+            </a:r>
+          </a:p>
+          <a:p xmlns:a="http://schemas.openxmlformats.org/drawingml/2006/main">
+            <a:r>
+              <a:t>- 想法生成</a:t>
+            </a:r>
+          </a:p>
+          <a:p xmlns:a="http://schemas.openxmlformats.org/drawingml/2006/main">
+            <a:r>
+              <a:t/>
+            </a:r>
+          </a:p>
+          <a:p xmlns:a="http://schemas.openxmlformats.org/drawingml/2006/main">
+            <a:r>
+              <a:t>- 实现与实验</a:t>
+            </a:r>
+          </a:p>
+          <a:p xmlns:a="http://schemas.openxmlformats.org/drawingml/2006/main">
+            <a:r>
+              <a:t/>
+            </a:r>
+          </a:p>
+          <a:p xmlns:a="http://schemas.openxmlformats.org/drawingml/2006/main">
+            <a:r>
+              <a:t>- 结果分析</a:t>
+            </a:r>
+          </a:p>
+          <a:p xmlns:a="http://schemas.openxmlformats.org/drawingml/2006/main">
+            <a:r>
+              <a:t/>
+            </a:r>
+          </a:p>
+          <a:p xmlns:a="http://schemas.openxmlformats.org/drawingml/2006/main">
+            <a:r>
+              <a:t>- 论文与评审</a:t>
+            </a:r>
+          </a:p>
+          <a:p xmlns:a="http://schemas.openxmlformats.org/drawingml/2006/main">
+            <a:r>
+              <a:t/>
+            </a:r>
+          </a:p>
+          <a:p xmlns:a="http://schemas.openxmlformats.org/drawingml/2006/main">
+            <a:r>
+              <a:t>教师讲述：</a:t>
+            </a:r>
+          </a:p>
+          <a:p xmlns:a="http://schemas.openxmlformats.org/drawingml/2006/main">
+            <a:r>
+              <a:t>用第 1 课 §四·2 的 Agent Workflow 八部分框架拆解这两类系统。它们是分析对象，不是结论外推的依据——要看清的是每个维度上"哪些已由系统处理、哪些仍需人工判断"，而不是断言"AI 已能自主科研"。AI Scientist 报告的是特定 ML 研究设置下的系统表现：三篇送审稿中一篇评分超过工作坊平均接收阈值，但按预设协议撤回；工作坊接收率为 70%，研究团队内部判断三篇均未达到 ICLR 主会标准。这不等于顶会正式接收，也不适用于所有学科。</a:t>
+            </a:r>
+          </a:p>
+          <a:p xmlns:a="http://schemas.openxmlformats.org/drawingml/2006/main">
+            <a:r>
+              <a:t/>
+            </a:r>
+          </a:p>
+          <a:p xmlns:a="http://schemas.openxmlformats.org/drawingml/2006/main">
+            <a:r>
+              <a:t>学生动作：</a:t>
+            </a:r>
+          </a:p>
+          <a:p xmlns:a="http://schemas.openxmlformats.org/drawingml/2006/main">
+            <a:r>
+              <a:t>无。</a:t>
+            </a:r>
+          </a:p>
+          <a:p xmlns:a="http://schemas.openxmlformats.org/drawingml/2006/main">
+            <a:r>
+              <a:t/>
+            </a:r>
+          </a:p>
+          <a:p xmlns:a="http://schemas.openxmlformats.org/drawingml/2006/main">
+            <a:r>
+              <a:t>来源与边界：</a:t>
+            </a:r>
+          </a:p>
+          <a:p xmlns:a="http://schemas.openxmlformats.org/drawingml/2006/main">
+            <a:r>
+              <a:t>Lu, C. et al. "Towards end-to-end automation of AI research." *Nature* (2026). DOI: [10.1038/s41586-026-10265-5](https://www.nature.com/articles/s41586-026-10265-5)。**不外推为通用自主科研能力**。Karpathy. [*AutoResearch* commit `228791f`](https://github.com/karpathy/autoresearch/tree/228791fb499afffb54b46200aca536f79142f117)。Huang et al. MLAgentBench, ICML 2024（评价方法参考）。</a:t>
+            </a:r>
+          </a:p>
+          <a:p xmlns:a="http://schemas.openxmlformats.org/drawingml/2006/main">
+            <a:r>
+              <a:t/>
+            </a:r>
+          </a:p>
+          <a:p xmlns:a="http://schemas.openxmlformats.org/drawingml/2006/main">
+            <a:r>
+              <a:t>---</a:t>
             </a:r>
           </a:p>
           <a:p xmlns:a="http://schemas.openxmlformats.org/drawingml/2006/main">
@@ -842,17 +1222,47 @@
           </a:p>
           <a:p xmlns:a="http://schemas.openxmlformats.org/drawingml/2006/main">
             <a:r>
-              <a:t>lessons/lesson-11/slides.md P12</a:t>
-            </a:r>
-          </a:p>
-          <a:p xmlns:a="http://schemas.openxmlformats.org/drawingml/2006/main">
-            <a:r>
-              <a:t>lessons/lesson-11/handout.md</a:t>
-            </a:r>
-          </a:p>
-          <a:p xmlns:a="http://schemas.openxmlformats.org/drawingml/2006/main">
-            <a:r>
-              <a:t>Lu, C. et al. "Towards end-to-end automation of AI research." *Nature* (2026). DOI: [10.1038/s41586-026-10265-5](https://www.nature.com/articles/s41586-026-10265-5)。**不外推为通用自主科研能力**。Karpathy. [*AutoResearch* commit `228791f`](https://github.com/karpathy/autoresearch/tree/228791fb499afffb54b46200aca536f79142f117)。Huang et al. MLAgentBench, ICML 2024（评价方法参考）。</a:t>
+              <a:t/>
+            </a:r>
+          </a:p>
+          <a:p xmlns:a="http://schemas.openxmlformats.org/drawingml/2006/main">
+            <a:r>
+              <a:t>- https://www.nature.com/articles/s41586-026-10265-5</a:t>
+            </a:r>
+          </a:p>
+          <a:p xmlns:a="http://schemas.openxmlformats.org/drawingml/2006/main">
+            <a:r>
+              <a:t/>
+            </a:r>
+          </a:p>
+          <a:p xmlns:a="http://schemas.openxmlformats.org/drawingml/2006/main">
+            <a:r>
+              <a:t>- https://github.com/karpathy/autoresearch/tree/228791fb499afffb54b46200aca536f79142f117</a:t>
+            </a:r>
+          </a:p>
+          <a:p xmlns:a="http://schemas.openxmlformats.org/drawingml/2006/main">
+            <a:r>
+              <a:t/>
+            </a:r>
+          </a:p>
+          <a:p xmlns:a="http://schemas.openxmlformats.org/drawingml/2006/main">
+            <a:r>
+              <a:t>- 本课 handout.md 与 slides.md</a:t>
+            </a:r>
+          </a:p>
+          <a:p xmlns:a="http://schemas.openxmlformats.org/drawingml/2006/main">
+            <a:r>
+              <a:t/>
+            </a:r>
+          </a:p>
+          <a:p xmlns:a="http://schemas.openxmlformats.org/drawingml/2006/main">
+            <a:r>
+              <a:t>- ../../course/reading-card-case.md</a:t>
+            </a:r>
+          </a:p>
+          <a:p xmlns:a="http://schemas.openxmlformats.org/drawingml/2006/main">
+            <a:r>
+              <a:t/>
             </a:r>
           </a:p>
           <a:p xmlns:a="http://schemas.openxmlformats.org/drawingml/2006/main">
@@ -927,37 +1337,207 @@
           <a:lstStyle xmlns:a="http://schemas.openxmlformats.org/drawingml/2006/main"/>
           <a:p xmlns:a="http://schemas.openxmlformats.org/drawingml/2006/main">
             <a:r>
-              <a:t>P13｜八维比较的主轴是人工判断</a:t>
-            </a:r>
-          </a:p>
-          <a:p xmlns:a="http://schemas.openxmlformats.org/drawingml/2006/main">
-            <a:r>
-              <a:t/>
-            </a:r>
-          </a:p>
-          <a:p xmlns:a="http://schemas.openxmlformats.org/drawingml/2006/main">
-            <a:r>
-              <a:t>讲述：逐维度拆解 AI Scientist。Evals 维度上，自动评审能发现部分问题，但不替代真实同行共识——模型评审不等于同行评审。失败恢复维度上，系统对失败有处理逻辑，但选择性保留的风险存在。每个维度都回答"哪些已由系统处理、哪些仍需人工判断"。</a:t>
-            </a:r>
-          </a:p>
-          <a:p xmlns:a="http://schemas.openxmlformats.org/drawingml/2006/main">
-            <a:r>
-              <a:t/>
-            </a:r>
-          </a:p>
-          <a:p xmlns:a="http://schemas.openxmlformats.org/drawingml/2006/main">
-            <a:r>
-              <a:t>学生动作：让学生指出八维中哪个维度"仍需人工判断"最难判断。</a:t>
-            </a:r>
-          </a:p>
-          <a:p xmlns:a="http://schemas.openxmlformats.org/drawingml/2006/main">
-            <a:r>
-              <a:t/>
-            </a:r>
-          </a:p>
-          <a:p xmlns:a="http://schemas.openxmlformats.org/drawingml/2006/main">
-            <a:r>
-              <a:t>建议时间：3 分钟。</a:t>
+              <a:t>页面：P13 八维比较的主轴是人工判断</a:t>
+            </a:r>
+          </a:p>
+          <a:p xmlns:a="http://schemas.openxmlformats.org/drawingml/2006/main">
+            <a:r>
+              <a:t/>
+            </a:r>
+          </a:p>
+          <a:p xmlns:a="http://schemas.openxmlformats.org/drawingml/2006/main">
+            <a:r>
+              <a:t>讲义位置：本课讲义；见逐页母稿映射表</a:t>
+            </a:r>
+          </a:p>
+          <a:p xmlns:a="http://schemas.openxmlformats.org/drawingml/2006/main">
+            <a:r>
+              <a:t/>
+            </a:r>
+          </a:p>
+          <a:p xmlns:a="http://schemas.openxmlformats.org/drawingml/2006/main">
+            <a:r>
+              <a:t>屏显核对：</a:t>
+            </a:r>
+          </a:p>
+          <a:p xmlns:a="http://schemas.openxmlformats.org/drawingml/2006/main">
+            <a:r>
+              <a:t>八维比较的主轴是人工判断</a:t>
+            </a:r>
+          </a:p>
+          <a:p xmlns:a="http://schemas.openxmlformats.org/drawingml/2006/main">
+            <a:r>
+              <a:t/>
+            </a:r>
+          </a:p>
+          <a:p xmlns:a="http://schemas.openxmlformats.org/drawingml/2006/main">
+            <a:r>
+              <a:t>- 任务契约</a:t>
+            </a:r>
+          </a:p>
+          <a:p xmlns:a="http://schemas.openxmlformats.org/drawingml/2006/main">
+            <a:r>
+              <a:t/>
+            </a:r>
+          </a:p>
+          <a:p xmlns:a="http://schemas.openxmlformats.org/drawingml/2006/main">
+            <a:r>
+              <a:t>- 目标能否预先固定？</a:t>
+            </a:r>
+          </a:p>
+          <a:p xmlns:a="http://schemas.openxmlformats.org/drawingml/2006/main">
+            <a:r>
+              <a:t/>
+            </a:r>
+          </a:p>
+          <a:p xmlns:a="http://schemas.openxmlformats.org/drawingml/2006/main">
+            <a:r>
+              <a:t>- Context / 状态</a:t>
+            </a:r>
+          </a:p>
+          <a:p xmlns:a="http://schemas.openxmlformats.org/drawingml/2006/main">
+            <a:r>
+              <a:t/>
+            </a:r>
+          </a:p>
+          <a:p xmlns:a="http://schemas.openxmlformats.org/drawingml/2006/main">
+            <a:r>
+              <a:t>- 输入与中间工件能否追溯？</a:t>
+            </a:r>
+          </a:p>
+          <a:p xmlns:a="http://schemas.openxmlformats.org/drawingml/2006/main">
+            <a:r>
+              <a:t/>
+            </a:r>
+          </a:p>
+          <a:p xmlns:a="http://schemas.openxmlformats.org/drawingml/2006/main">
+            <a:r>
+              <a:t>- 工具与权限</a:t>
+            </a:r>
+          </a:p>
+          <a:p xmlns:a="http://schemas.openxmlformats.org/drawingml/2006/main">
+            <a:r>
+              <a:t/>
+            </a:r>
+          </a:p>
+          <a:p xmlns:a="http://schemas.openxmlformats.org/drawingml/2006/main">
+            <a:r>
+              <a:t>- 哪些外部动作必须确认？</a:t>
+            </a:r>
+          </a:p>
+          <a:p xmlns:a="http://schemas.openxmlformats.org/drawingml/2006/main">
+            <a:r>
+              <a:t/>
+            </a:r>
+          </a:p>
+          <a:p xmlns:a="http://schemas.openxmlformats.org/drawingml/2006/main">
+            <a:r>
+              <a:t>- 执行与追踪</a:t>
+            </a:r>
+          </a:p>
+          <a:p xmlns:a="http://schemas.openxmlformats.org/drawingml/2006/main">
+            <a:r>
+              <a:t/>
+            </a:r>
+          </a:p>
+          <a:p xmlns:a="http://schemas.openxmlformats.org/drawingml/2006/main">
+            <a:r>
+              <a:t>- 失败是否完整保留？</a:t>
+            </a:r>
+          </a:p>
+          <a:p xmlns:a="http://schemas.openxmlformats.org/drawingml/2006/main">
+            <a:r>
+              <a:t/>
+            </a:r>
+          </a:p>
+          <a:p xmlns:a="http://schemas.openxmlformats.org/drawingml/2006/main">
+            <a:r>
+              <a:t>- Evals</a:t>
+            </a:r>
+          </a:p>
+          <a:p xmlns:a="http://schemas.openxmlformats.org/drawingml/2006/main">
+            <a:r>
+              <a:t/>
+            </a:r>
+          </a:p>
+          <a:p xmlns:a="http://schemas.openxmlformats.org/drawingml/2006/main">
+            <a:r>
+              <a:t>- 评价器是否独立？</a:t>
+            </a:r>
+          </a:p>
+          <a:p xmlns:a="http://schemas.openxmlformats.org/drawingml/2006/main">
+            <a:r>
+              <a:t/>
+            </a:r>
+          </a:p>
+          <a:p xmlns:a="http://schemas.openxmlformats.org/drawingml/2006/main">
+            <a:r>
+              <a:t>- 人工判断</a:t>
+            </a:r>
+          </a:p>
+          <a:p xmlns:a="http://schemas.openxmlformats.org/drawingml/2006/main">
+            <a:r>
+              <a:t/>
+            </a:r>
+          </a:p>
+          <a:p xmlns:a="http://schemas.openxmlformats.org/drawingml/2006/main">
+            <a:r>
+              <a:t>- 方法、证据与结论由谁决定？</a:t>
+            </a:r>
+          </a:p>
+          <a:p xmlns:a="http://schemas.openxmlformats.org/drawingml/2006/main">
+            <a:r>
+              <a:t/>
+            </a:r>
+          </a:p>
+          <a:p xmlns:a="http://schemas.openxmlformats.org/drawingml/2006/main">
+            <a:r>
+              <a:t>教师讲述：</a:t>
+            </a:r>
+          </a:p>
+          <a:p xmlns:a="http://schemas.openxmlformats.org/drawingml/2006/main">
+            <a:r>
+              <a:t>逐维度拆解 AI Scientist。Evals 维度上，自动评审能发现部分问题，但不替代真实同行共识——模型评审不等于同行评审。失败恢复维度上，系统对失败有处理逻辑，但选择性保留的风险存在。每个维度都回答"哪些已由系统处理、哪些仍需人工判断"。</a:t>
+            </a:r>
+          </a:p>
+          <a:p xmlns:a="http://schemas.openxmlformats.org/drawingml/2006/main">
+            <a:r>
+              <a:t/>
+            </a:r>
+          </a:p>
+          <a:p xmlns:a="http://schemas.openxmlformats.org/drawingml/2006/main">
+            <a:r>
+              <a:t>学生动作：</a:t>
+            </a:r>
+          </a:p>
+          <a:p xmlns:a="http://schemas.openxmlformats.org/drawingml/2006/main">
+            <a:r>
+              <a:t>让学生指出八维中哪个维度"仍需人工判断"最难判断。</a:t>
+            </a:r>
+          </a:p>
+          <a:p xmlns:a="http://schemas.openxmlformats.org/drawingml/2006/main">
+            <a:r>
+              <a:t/>
+            </a:r>
+          </a:p>
+          <a:p xmlns:a="http://schemas.openxmlformats.org/drawingml/2006/main">
+            <a:r>
+              <a:t>来源与边界：</a:t>
+            </a:r>
+          </a:p>
+          <a:p xmlns:a="http://schemas.openxmlformats.org/drawingml/2006/main">
+            <a:r>
+              <a:t>handout §四·2；第 1 课 §四·2 Agent Workflow 八部分框架。Lu et al. 2026（Nature，DOI 同 P12）。</a:t>
+            </a:r>
+          </a:p>
+          <a:p xmlns:a="http://schemas.openxmlformats.org/drawingml/2006/main">
+            <a:r>
+              <a:t/>
+            </a:r>
+          </a:p>
+          <a:p xmlns:a="http://schemas.openxmlformats.org/drawingml/2006/main">
+            <a:r>
+              <a:t>---</a:t>
             </a:r>
           </a:p>
           <a:p xmlns:a="http://schemas.openxmlformats.org/drawingml/2006/main">
@@ -972,17 +1552,27 @@
           </a:p>
           <a:p xmlns:a="http://schemas.openxmlformats.org/drawingml/2006/main">
             <a:r>
-              <a:t>lessons/lesson-11/slides.md P13</a:t>
-            </a:r>
-          </a:p>
-          <a:p xmlns:a="http://schemas.openxmlformats.org/drawingml/2006/main">
-            <a:r>
-              <a:t>lessons/lesson-11/handout.md</a:t>
-            </a:r>
-          </a:p>
-          <a:p xmlns:a="http://schemas.openxmlformats.org/drawingml/2006/main">
-            <a:r>
-              <a:t>handout §四·2；第 1 课 §四·2 Agent Workflow 八部分框架。Lu et al. 2026（Nature，DOI 同 P12）。</a:t>
+              <a:t/>
+            </a:r>
+          </a:p>
+          <a:p xmlns:a="http://schemas.openxmlformats.org/drawingml/2006/main">
+            <a:r>
+              <a:t>- 本课 handout.md 与 slides.md</a:t>
+            </a:r>
+          </a:p>
+          <a:p xmlns:a="http://schemas.openxmlformats.org/drawingml/2006/main">
+            <a:r>
+              <a:t/>
+            </a:r>
+          </a:p>
+          <a:p xmlns:a="http://schemas.openxmlformats.org/drawingml/2006/main">
+            <a:r>
+              <a:t>- ../../course/reading-card-case.md</a:t>
+            </a:r>
+          </a:p>
+          <a:p xmlns:a="http://schemas.openxmlformats.org/drawingml/2006/main">
+            <a:r>
+              <a:t/>
             </a:r>
           </a:p>
           <a:p xmlns:a="http://schemas.openxmlformats.org/drawingml/2006/main">
@@ -1057,37 +1647,187 @@
           <a:lstStyle xmlns:a="http://schemas.openxmlformats.org/drawingml/2006/main"/>
           <a:p xmlns:a="http://schemas.openxmlformats.org/drawingml/2006/main">
             <a:r>
-              <a:t>P14｜系统边界决定哪些表述可以成立</a:t>
-            </a:r>
-          </a:p>
-          <a:p xmlns:a="http://schemas.openxmlformats.org/drawingml/2006/main">
-            <a:r>
-              <a:t/>
-            </a:r>
-          </a:p>
-          <a:p xmlns:a="http://schemas.openxmlformats.org/drawingml/2006/main">
-            <a:r>
-              <a:t>讲述：两个边界判断贯穿本课。AI Scientist 只在特定 ML 设置下验证，不外推为通用自主科研。自动评审只作循环内部 Evals，不替代同行共识。不外推清单中的表述都超出了来源证据的适用范围。在作业或 slides 中出现类似表述，都应标记为越界并改写为带边界的形式。</a:t>
-            </a:r>
-          </a:p>
-          <a:p xmlns:a="http://schemas.openxmlformats.org/drawingml/2006/main">
-            <a:r>
-              <a:t/>
-            </a:r>
-          </a:p>
-          <a:p xmlns:a="http://schemas.openxmlformats.org/drawingml/2006/main">
-            <a:r>
-              <a:t>学生动作：让学生检查自己第 10 课的 AI 使用记录中是否出现过清单中的表述。</a:t>
-            </a:r>
-          </a:p>
-          <a:p xmlns:a="http://schemas.openxmlformats.org/drawingml/2006/main">
-            <a:r>
-              <a:t/>
-            </a:r>
-          </a:p>
-          <a:p xmlns:a="http://schemas.openxmlformats.org/drawingml/2006/main">
-            <a:r>
-              <a:t>建议时间：3 分钟。</a:t>
+              <a:t>页面：P14 系统边界决定哪些表述可以成立</a:t>
+            </a:r>
+          </a:p>
+          <a:p xmlns:a="http://schemas.openxmlformats.org/drawingml/2006/main">
+            <a:r>
+              <a:t/>
+            </a:r>
+          </a:p>
+          <a:p xmlns:a="http://schemas.openxmlformats.org/drawingml/2006/main">
+            <a:r>
+              <a:t>讲义位置：本课讲义；见逐页母稿映射表</a:t>
+            </a:r>
+          </a:p>
+          <a:p xmlns:a="http://schemas.openxmlformats.org/drawingml/2006/main">
+            <a:r>
+              <a:t/>
+            </a:r>
+          </a:p>
+          <a:p xmlns:a="http://schemas.openxmlformats.org/drawingml/2006/main">
+            <a:r>
+              <a:t>屏显核对：</a:t>
+            </a:r>
+          </a:p>
+          <a:p xmlns:a="http://schemas.openxmlformats.org/drawingml/2006/main">
+            <a:r>
+              <a:t>系统边界决定哪些表述可以成立</a:t>
+            </a:r>
+          </a:p>
+          <a:p xmlns:a="http://schemas.openxmlformats.org/drawingml/2006/main">
+            <a:r>
+              <a:t/>
+            </a:r>
+          </a:p>
+          <a:p xmlns:a="http://schemas.openxmlformats.org/drawingml/2006/main">
+            <a:r>
+              <a:t>- 证据不支持的外推</a:t>
+            </a:r>
+          </a:p>
+          <a:p xmlns:a="http://schemas.openxmlformats.org/drawingml/2006/main">
+            <a:r>
+              <a:t/>
+            </a:r>
+          </a:p>
+          <a:p xmlns:a="http://schemas.openxmlformats.org/drawingml/2006/main">
+            <a:r>
+              <a:t>- 当前可成立</a:t>
+            </a:r>
+          </a:p>
+          <a:p xmlns:a="http://schemas.openxmlformats.org/drawingml/2006/main">
+            <a:r>
+              <a:t/>
+            </a:r>
+          </a:p>
+          <a:p xmlns:a="http://schemas.openxmlformats.org/drawingml/2006/main">
+            <a:r>
+              <a:t>- “自动完成完整科研”</a:t>
+            </a:r>
+          </a:p>
+          <a:p xmlns:a="http://schemas.openxmlformats.org/drawingml/2006/main">
+            <a:r>
+              <a:t/>
+            </a:r>
+          </a:p>
+          <a:p xmlns:a="http://schemas.openxmlformats.org/drawingml/2006/main">
+            <a:r>
+              <a:t>- “自动评审替代同行”</a:t>
+            </a:r>
+          </a:p>
+          <a:p xmlns:a="http://schemas.openxmlformats.org/drawingml/2006/main">
+            <a:r>
+              <a:t/>
+            </a:r>
+          </a:p>
+          <a:p xmlns:a="http://schemas.openxmlformats.org/drawingml/2006/main">
+            <a:r>
+              <a:t>- “端到端适用于所有学科”</a:t>
+            </a:r>
+          </a:p>
+          <a:p xmlns:a="http://schemas.openxmlformats.org/drawingml/2006/main">
+            <a:r>
+              <a:t/>
+            </a:r>
+          </a:p>
+          <a:p xmlns:a="http://schemas.openxmlformats.org/drawingml/2006/main">
+            <a:r>
+              <a:t>- “失败可以自动删除”</a:t>
+            </a:r>
+          </a:p>
+          <a:p xmlns:a="http://schemas.openxmlformats.org/drawingml/2006/main">
+            <a:r>
+              <a:t/>
+            </a:r>
+          </a:p>
+          <a:p xmlns:a="http://schemas.openxmlformats.org/drawingml/2006/main">
+            <a:r>
+              <a:t>- 可分析系统组件与边界</a:t>
+            </a:r>
+          </a:p>
+          <a:p xmlns:a="http://schemas.openxmlformats.org/drawingml/2006/main">
+            <a:r>
+              <a:t/>
+            </a:r>
+          </a:p>
+          <a:p xmlns:a="http://schemas.openxmlformats.org/drawingml/2006/main">
+            <a:r>
+              <a:t>- 可复用受限循环骨架</a:t>
+            </a:r>
+          </a:p>
+          <a:p xmlns:a="http://schemas.openxmlformats.org/drawingml/2006/main">
+            <a:r>
+              <a:t/>
+            </a:r>
+          </a:p>
+          <a:p xmlns:a="http://schemas.openxmlformats.org/drawingml/2006/main">
+            <a:r>
+              <a:t>- 需人工核验方法与结论</a:t>
+            </a:r>
+          </a:p>
+          <a:p xmlns:a="http://schemas.openxmlformats.org/drawingml/2006/main">
+            <a:r>
+              <a:t/>
+            </a:r>
+          </a:p>
+          <a:p xmlns:a="http://schemas.openxmlformats.org/drawingml/2006/main">
+            <a:r>
+              <a:t>- 失败进入可审计记录</a:t>
+            </a:r>
+          </a:p>
+          <a:p xmlns:a="http://schemas.openxmlformats.org/drawingml/2006/main">
+            <a:r>
+              <a:t/>
+            </a:r>
+          </a:p>
+          <a:p xmlns:a="http://schemas.openxmlformats.org/drawingml/2006/main">
+            <a:r>
+              <a:t>教师讲述：</a:t>
+            </a:r>
+          </a:p>
+          <a:p xmlns:a="http://schemas.openxmlformats.org/drawingml/2006/main">
+            <a:r>
+              <a:t>两个边界判断贯穿本课。AI Scientist 只在特定 ML 设置下验证，不外推为通用自主科研。自动评审只作循环内部 Evals，不替代同行共识。不外推清单中的表述都超出了来源证据的适用范围。在作业或 slides 中出现类似表述，都应标记为越界并改写为带边界的形式。</a:t>
+            </a:r>
+          </a:p>
+          <a:p xmlns:a="http://schemas.openxmlformats.org/drawingml/2006/main">
+            <a:r>
+              <a:t/>
+            </a:r>
+          </a:p>
+          <a:p xmlns:a="http://schemas.openxmlformats.org/drawingml/2006/main">
+            <a:r>
+              <a:t>学生动作：</a:t>
+            </a:r>
+          </a:p>
+          <a:p xmlns:a="http://schemas.openxmlformats.org/drawingml/2006/main">
+            <a:r>
+              <a:t>让学生检查自己第 10 课的 AI 使用记录中是否出现过清单中的表述。</a:t>
+            </a:r>
+          </a:p>
+          <a:p xmlns:a="http://schemas.openxmlformats.org/drawingml/2006/main">
+            <a:r>
+              <a:t/>
+            </a:r>
+          </a:p>
+          <a:p xmlns:a="http://schemas.openxmlformats.org/drawingml/2006/main">
+            <a:r>
+              <a:t>来源与边界：</a:t>
+            </a:r>
+          </a:p>
+          <a:p xmlns:a="http://schemas.openxmlformats.org/drawingml/2006/main">
+            <a:r>
+              <a:t>handout §四·3-4；[AGENTS.md](../../AGENTS.md) 证据标准（关键结论至少绑定一项可核验直接证据）。</a:t>
+            </a:r>
+          </a:p>
+          <a:p xmlns:a="http://schemas.openxmlformats.org/drawingml/2006/main">
+            <a:r>
+              <a:t/>
+            </a:r>
+          </a:p>
+          <a:p xmlns:a="http://schemas.openxmlformats.org/drawingml/2006/main">
+            <a:r>
+              <a:t>---</a:t>
             </a:r>
           </a:p>
           <a:p xmlns:a="http://schemas.openxmlformats.org/drawingml/2006/main">
@@ -1102,17 +1842,27 @@
           </a:p>
           <a:p xmlns:a="http://schemas.openxmlformats.org/drawingml/2006/main">
             <a:r>
-              <a:t>lessons/lesson-11/slides.md P14</a:t>
-            </a:r>
-          </a:p>
-          <a:p xmlns:a="http://schemas.openxmlformats.org/drawingml/2006/main">
-            <a:r>
-              <a:t>lessons/lesson-11/handout.md</a:t>
-            </a:r>
-          </a:p>
-          <a:p xmlns:a="http://schemas.openxmlformats.org/drawingml/2006/main">
-            <a:r>
-              <a:t>handout §四·3-4；[AGENTS.md](../../AGENTS.md) 证据标准（关键结论至少绑定一项可核验直接证据）。</a:t>
+              <a:t/>
+            </a:r>
+          </a:p>
+          <a:p xmlns:a="http://schemas.openxmlformats.org/drawingml/2006/main">
+            <a:r>
+              <a:t>- 本课 handout.md 与 slides.md</a:t>
+            </a:r>
+          </a:p>
+          <a:p xmlns:a="http://schemas.openxmlformats.org/drawingml/2006/main">
+            <a:r>
+              <a:t/>
+            </a:r>
+          </a:p>
+          <a:p xmlns:a="http://schemas.openxmlformats.org/drawingml/2006/main">
+            <a:r>
+              <a:t>- ../../course/reading-card-case.md</a:t>
+            </a:r>
+          </a:p>
+          <a:p xmlns:a="http://schemas.openxmlformats.org/drawingml/2006/main">
+            <a:r>
+              <a:t/>
             </a:r>
           </a:p>
           <a:p xmlns:a="http://schemas.openxmlformats.org/drawingml/2006/main">
@@ -1187,37 +1937,177 @@
           <a:lstStyle xmlns:a="http://schemas.openxmlformats.org/drawingml/2006/main"/>
           <a:p xmlns:a="http://schemas.openxmlformats.org/drawingml/2006/main">
             <a:r>
-              <a:t>P15｜同一工作流映射到两个分析对象</a:t>
-            </a:r>
-          </a:p>
-          <a:p xmlns:a="http://schemas.openxmlformats.org/drawingml/2006/main">
-            <a:r>
-              <a:t/>
-            </a:r>
-          </a:p>
-          <a:p xmlns:a="http://schemas.openxmlformats.org/drawingml/2006/main">
-            <a:r>
-              <a:t>讲述：只对比共同约束：指标、预算、停止与失败保留。AutoResearch 的候选方法优化不属于本课冻结生成队列；AI Scientist 的端到端链还包括想法、论文与评审，不能据此推断课程执行器拥有相同能力。主题价值、标注分歧与结论外推由研究者判断。</a:t>
-            </a:r>
-          </a:p>
-          <a:p xmlns:a="http://schemas.openxmlformats.org/drawingml/2006/main">
-            <a:r>
-              <a:t/>
-            </a:r>
-          </a:p>
-          <a:p xmlns:a="http://schemas.openxmlformats.org/drawingml/2006/main">
-            <a:r>
-              <a:t>学生动作：无。</a:t>
-            </a:r>
-          </a:p>
-          <a:p xmlns:a="http://schemas.openxmlformats.org/drawingml/2006/main">
-            <a:r>
-              <a:t/>
-            </a:r>
-          </a:p>
-          <a:p xmlns:a="http://schemas.openxmlformats.org/drawingml/2006/main">
-            <a:r>
-              <a:t>建议时间：2 分钟。</a:t>
+              <a:t>页面：P15 同一工作流映射到两个分析对象</a:t>
+            </a:r>
+          </a:p>
+          <a:p xmlns:a="http://schemas.openxmlformats.org/drawingml/2006/main">
+            <a:r>
+              <a:t/>
+            </a:r>
+          </a:p>
+          <a:p xmlns:a="http://schemas.openxmlformats.org/drawingml/2006/main">
+            <a:r>
+              <a:t>讲义位置：本课讲义；见逐页母稿映射表</a:t>
+            </a:r>
+          </a:p>
+          <a:p xmlns:a="http://schemas.openxmlformats.org/drawingml/2006/main">
+            <a:r>
+              <a:t/>
+            </a:r>
+          </a:p>
+          <a:p xmlns:a="http://schemas.openxmlformats.org/drawingml/2006/main">
+            <a:r>
+              <a:t>屏显核对：</a:t>
+            </a:r>
+          </a:p>
+          <a:p xmlns:a="http://schemas.openxmlformats.org/drawingml/2006/main">
+            <a:r>
+              <a:t>同一工作流映射到两个分析对象</a:t>
+            </a:r>
+          </a:p>
+          <a:p xmlns:a="http://schemas.openxmlformats.org/drawingml/2006/main">
+            <a:r>
+              <a:t/>
+            </a:r>
+          </a:p>
+          <a:p xmlns:a="http://schemas.openxmlformats.org/drawingml/2006/main">
+            <a:r>
+              <a:t>- 任务契约</a:t>
+            </a:r>
+          </a:p>
+          <a:p xmlns:a="http://schemas.openxmlformats.org/drawingml/2006/main">
+            <a:r>
+              <a:t/>
+            </a:r>
+          </a:p>
+          <a:p xmlns:a="http://schemas.openxmlformats.org/drawingml/2006/main">
+            <a:r>
+              <a:t>- 先写清边界</a:t>
+            </a:r>
+          </a:p>
+          <a:p xmlns:a="http://schemas.openxmlformats.org/drawingml/2006/main">
+            <a:r>
+              <a:t/>
+            </a:r>
+          </a:p>
+          <a:p xmlns:a="http://schemas.openxmlformats.org/drawingml/2006/main">
+            <a:r>
+              <a:t>- 执行循环</a:t>
+            </a:r>
+          </a:p>
+          <a:p xmlns:a="http://schemas.openxmlformats.org/drawingml/2006/main">
+            <a:r>
+              <a:t/>
+            </a:r>
+          </a:p>
+          <a:p xmlns:a="http://schemas.openxmlformats.org/drawingml/2006/main">
+            <a:r>
+              <a:t>- 冻结队列 / 优化</a:t>
+            </a:r>
+          </a:p>
+          <a:p xmlns:a="http://schemas.openxmlformats.org/drawingml/2006/main">
+            <a:r>
+              <a:t/>
+            </a:r>
+          </a:p>
+          <a:p xmlns:a="http://schemas.openxmlformats.org/drawingml/2006/main">
+            <a:r>
+              <a:t>- 独立 Evals</a:t>
+            </a:r>
+          </a:p>
+          <a:p xmlns:a="http://schemas.openxmlformats.org/drawingml/2006/main">
+            <a:r>
+              <a:t/>
+            </a:r>
+          </a:p>
+          <a:p xmlns:a="http://schemas.openxmlformats.org/drawingml/2006/main">
+            <a:r>
+              <a:t>- 生成器不可自评</a:t>
+            </a:r>
+          </a:p>
+          <a:p xmlns:a="http://schemas.openxmlformats.org/drawingml/2006/main">
+            <a:r>
+              <a:t/>
+            </a:r>
+          </a:p>
+          <a:p xmlns:a="http://schemas.openxmlformats.org/drawingml/2006/main">
+            <a:r>
+              <a:t>- 人工判断</a:t>
+            </a:r>
+          </a:p>
+          <a:p xmlns:a="http://schemas.openxmlformats.org/drawingml/2006/main">
+            <a:r>
+              <a:t/>
+            </a:r>
+          </a:p>
+          <a:p xmlns:a="http://schemas.openxmlformats.org/drawingml/2006/main">
+            <a:r>
+              <a:t>- 核验方法与结论</a:t>
+            </a:r>
+          </a:p>
+          <a:p xmlns:a="http://schemas.openxmlformats.org/drawingml/2006/main">
+            <a:r>
+              <a:t/>
+            </a:r>
+          </a:p>
+          <a:p xmlns:a="http://schemas.openxmlformats.org/drawingml/2006/main">
+            <a:r>
+              <a:t>- 共同约束：指标、预算、停止、失败保留；冻结队列不做方法优化。</a:t>
+            </a:r>
+          </a:p>
+          <a:p xmlns:a="http://schemas.openxmlformats.org/drawingml/2006/main">
+            <a:r>
+              <a:t/>
+            </a:r>
+          </a:p>
+          <a:p xmlns:a="http://schemas.openxmlformats.org/drawingml/2006/main">
+            <a:r>
+              <a:t>教师讲述：</a:t>
+            </a:r>
+          </a:p>
+          <a:p xmlns:a="http://schemas.openxmlformats.org/drawingml/2006/main">
+            <a:r>
+              <a:t>只对比共同约束：指标、预算、停止与失败保留。AutoResearch 的候选方法优化不属于本课冻结生成队列；AI Scientist 的端到端链还包括想法、论文与评审，不能据此推断课程执行器拥有相同能力。主题价值、标注分歧与结论外推由研究者判断。</a:t>
+            </a:r>
+          </a:p>
+          <a:p xmlns:a="http://schemas.openxmlformats.org/drawingml/2006/main">
+            <a:r>
+              <a:t/>
+            </a:r>
+          </a:p>
+          <a:p xmlns:a="http://schemas.openxmlformats.org/drawingml/2006/main">
+            <a:r>
+              <a:t>学生动作：</a:t>
+            </a:r>
+          </a:p>
+          <a:p xmlns:a="http://schemas.openxmlformats.org/drawingml/2006/main">
+            <a:r>
+              <a:t>无。</a:t>
+            </a:r>
+          </a:p>
+          <a:p xmlns:a="http://schemas.openxmlformats.org/drawingml/2006/main">
+            <a:r>
+              <a:t/>
+            </a:r>
+          </a:p>
+          <a:p xmlns:a="http://schemas.openxmlformats.org/drawingml/2006/main">
+            <a:r>
+              <a:t>来源与边界：</a:t>
+            </a:r>
+          </a:p>
+          <a:p xmlns:a="http://schemas.openxmlformats.org/drawingml/2006/main">
+            <a:r>
+              <a:t>handout §六·5；Karpathy AutoResearch（commit `228791f`）；Lu et al. 2026（Nature）。</a:t>
+            </a:r>
+          </a:p>
+          <a:p xmlns:a="http://schemas.openxmlformats.org/drawingml/2006/main">
+            <a:r>
+              <a:t/>
+            </a:r>
+          </a:p>
+          <a:p xmlns:a="http://schemas.openxmlformats.org/drawingml/2006/main">
+            <a:r>
+              <a:t>---</a:t>
             </a:r>
           </a:p>
           <a:p xmlns:a="http://schemas.openxmlformats.org/drawingml/2006/main">
@@ -1232,17 +2122,27 @@
           </a:p>
           <a:p xmlns:a="http://schemas.openxmlformats.org/drawingml/2006/main">
             <a:r>
-              <a:t>lessons/lesson-11/slides.md P15</a:t>
-            </a:r>
-          </a:p>
-          <a:p xmlns:a="http://schemas.openxmlformats.org/drawingml/2006/main">
-            <a:r>
-              <a:t>lessons/lesson-11/handout.md</a:t>
-            </a:r>
-          </a:p>
-          <a:p xmlns:a="http://schemas.openxmlformats.org/drawingml/2006/main">
-            <a:r>
-              <a:t>handout §六·5；Karpathy AutoResearch（commit `228791f`）；Lu et al. 2026（Nature）。</a:t>
+              <a:t/>
+            </a:r>
+          </a:p>
+          <a:p xmlns:a="http://schemas.openxmlformats.org/drawingml/2006/main">
+            <a:r>
+              <a:t>- 本课 handout.md 与 slides.md</a:t>
+            </a:r>
+          </a:p>
+          <a:p xmlns:a="http://schemas.openxmlformats.org/drawingml/2006/main">
+            <a:r>
+              <a:t/>
+            </a:r>
+          </a:p>
+          <a:p xmlns:a="http://schemas.openxmlformats.org/drawingml/2006/main">
+            <a:r>
+              <a:t>- ../../course/reading-card-case.md</a:t>
+            </a:r>
+          </a:p>
+          <a:p xmlns:a="http://schemas.openxmlformats.org/drawingml/2006/main">
+            <a:r>
+              <a:t/>
             </a:r>
           </a:p>
           <a:p xmlns:a="http://schemas.openxmlformats.org/drawingml/2006/main">
@@ -1317,37 +2217,147 @@
           <a:lstStyle xmlns:a="http://schemas.openxmlformats.org/drawingml/2006/main"/>
           <a:p xmlns:a="http://schemas.openxmlformats.org/drawingml/2006/main">
             <a:r>
-              <a:t>P16｜把可重复动作改写为受限循环</a:t>
-            </a:r>
-          </a:p>
-          <a:p xmlns:a="http://schemas.openxmlformats.org/drawingml/2006/main">
-            <a:r>
-              <a:t/>
-            </a:r>
-          </a:p>
-          <a:p xmlns:a="http://schemas.openxmlformats.org/drawingml/2006/main">
-            <a:r>
-              <a:t>讲述：先标明自己的动作是冻结队列还是开发集上的优化循环。第一段只完成四约束与执行/失败恢复骨架，保留人工审核点；冻结队列不能强行画方法 Keep / Discard。三种 trace 和短分析可在后续实践补齐。</a:t>
-            </a:r>
-          </a:p>
-          <a:p xmlns:a="http://schemas.openxmlformats.org/drawingml/2006/main">
-            <a:r>
-              <a:t/>
-            </a:r>
-          </a:p>
-          <a:p xmlns:a="http://schemas.openxmlformats.org/drawingml/2006/main">
-            <a:r>
-              <a:t>学生动作：巡视。对每位学生至少问一次：你的循环在哪个位置需要人工确认？</a:t>
-            </a:r>
-          </a:p>
-          <a:p xmlns:a="http://schemas.openxmlformats.org/drawingml/2006/main">
-            <a:r>
-              <a:t/>
-            </a:r>
-          </a:p>
-          <a:p xmlns:a="http://schemas.openxmlformats.org/drawingml/2006/main">
-            <a:r>
-              <a:t>建议时间：10 分钟。</a:t>
+              <a:t>页面：P16 把可重复动作改写为受限循环</a:t>
+            </a:r>
+          </a:p>
+          <a:p xmlns:a="http://schemas.openxmlformats.org/drawingml/2006/main">
+            <a:r>
+              <a:t/>
+            </a:r>
+          </a:p>
+          <a:p xmlns:a="http://schemas.openxmlformats.org/drawingml/2006/main">
+            <a:r>
+              <a:t>讲义位置：本课讲义；见逐页母稿映射表</a:t>
+            </a:r>
+          </a:p>
+          <a:p xmlns:a="http://schemas.openxmlformats.org/drawingml/2006/main">
+            <a:r>
+              <a:t/>
+            </a:r>
+          </a:p>
+          <a:p xmlns:a="http://schemas.openxmlformats.org/drawingml/2006/main">
+            <a:r>
+              <a:t>屏显核对：</a:t>
+            </a:r>
+          </a:p>
+          <a:p xmlns:a="http://schemas.openxmlformats.org/drawingml/2006/main">
+            <a:r>
+              <a:t>把可重复动作改写为受限循环</a:t>
+            </a:r>
+          </a:p>
+          <a:p xmlns:a="http://schemas.openxmlformats.org/drawingml/2006/main">
+            <a:r>
+              <a:t/>
+            </a:r>
+          </a:p>
+          <a:p xmlns:a="http://schemas.openxmlformats.org/drawingml/2006/main">
+            <a:r>
+              <a:t>- 写固定指标与版本</a:t>
+            </a:r>
+          </a:p>
+          <a:p xmlns:a="http://schemas.openxmlformats.org/drawingml/2006/main">
+            <a:r>
+              <a:t/>
+            </a:r>
+          </a:p>
+          <a:p xmlns:a="http://schemas.openxmlformats.org/drawingml/2006/main">
+            <a:r>
+              <a:t>- 写预算和停止触发器</a:t>
+            </a:r>
+          </a:p>
+          <a:p xmlns:a="http://schemas.openxmlformats.org/drawingml/2006/main">
+            <a:r>
+              <a:t/>
+            </a:r>
+          </a:p>
+          <a:p xmlns:a="http://schemas.openxmlformats.org/drawingml/2006/main">
+            <a:r>
+              <a:t>- 区分队列 / 优化，画失败恢复</a:t>
+            </a:r>
+          </a:p>
+          <a:p xmlns:a="http://schemas.openxmlformats.org/drawingml/2006/main">
+            <a:r>
+              <a:t/>
+            </a:r>
+          </a:p>
+          <a:p xmlns:a="http://schemas.openxmlformats.org/drawingml/2006/main">
+            <a:r>
+              <a:t>- 留下正常、无改善、失败 trace</a:t>
+            </a:r>
+          </a:p>
+          <a:p xmlns:a="http://schemas.openxmlformats.org/drawingml/2006/main">
+            <a:r>
+              <a:t/>
+            </a:r>
+          </a:p>
+          <a:p xmlns:a="http://schemas.openxmlformats.org/drawingml/2006/main">
+            <a:r>
+              <a:t>- 课堂最低产出</a:t>
+            </a:r>
+          </a:p>
+          <a:p xmlns:a="http://schemas.openxmlformats.org/drawingml/2006/main">
+            <a:r>
+              <a:t/>
+            </a:r>
+          </a:p>
+          <a:p xmlns:a="http://schemas.openxmlformats.org/drawingml/2006/main">
+            <a:r>
+              <a:t>- 受限循环说明 / 三种 trace / 四约束短分析</a:t>
+            </a:r>
+          </a:p>
+          <a:p xmlns:a="http://schemas.openxmlformats.org/drawingml/2006/main">
+            <a:r>
+              <a:t/>
+            </a:r>
+          </a:p>
+          <a:p xmlns:a="http://schemas.openxmlformats.org/drawingml/2006/main">
+            <a:r>
+              <a:t>教师讲述：</a:t>
+            </a:r>
+          </a:p>
+          <a:p xmlns:a="http://schemas.openxmlformats.org/drawingml/2006/main">
+            <a:r>
+              <a:t>先标明自己的动作是冻结队列还是开发集上的优化循环。第一段只完成四约束与执行/失败恢复骨架，保留人工审核点；冻结队列不能强行画方法 Keep / Discard。三种 trace 和短分析可在后续实践补齐。</a:t>
+            </a:r>
+          </a:p>
+          <a:p xmlns:a="http://schemas.openxmlformats.org/drawingml/2006/main">
+            <a:r>
+              <a:t/>
+            </a:r>
+          </a:p>
+          <a:p xmlns:a="http://schemas.openxmlformats.org/drawingml/2006/main">
+            <a:r>
+              <a:t>学生动作：</a:t>
+            </a:r>
+          </a:p>
+          <a:p xmlns:a="http://schemas.openxmlformats.org/drawingml/2006/main">
+            <a:r>
+              <a:t>巡视。对每位学生至少问一次：你的循环在哪个位置需要人工确认？</a:t>
+            </a:r>
+          </a:p>
+          <a:p xmlns:a="http://schemas.openxmlformats.org/drawingml/2006/main">
+            <a:r>
+              <a:t/>
+            </a:r>
+          </a:p>
+          <a:p xmlns:a="http://schemas.openxmlformats.org/drawingml/2006/main">
+            <a:r>
+              <a:t>来源与边界：</a:t>
+            </a:r>
+          </a:p>
+          <a:p xmlns:a="http://schemas.openxmlformats.org/drawingml/2006/main">
+            <a:r>
+              <a:t>handout §六·1-4；§八 练习 1-8。</a:t>
+            </a:r>
+          </a:p>
+          <a:p xmlns:a="http://schemas.openxmlformats.org/drawingml/2006/main">
+            <a:r>
+              <a:t/>
+            </a:r>
+          </a:p>
+          <a:p xmlns:a="http://schemas.openxmlformats.org/drawingml/2006/main">
+            <a:r>
+              <a:t>---</a:t>
             </a:r>
           </a:p>
           <a:p xmlns:a="http://schemas.openxmlformats.org/drawingml/2006/main">
@@ -1362,17 +2372,27 @@
           </a:p>
           <a:p xmlns:a="http://schemas.openxmlformats.org/drawingml/2006/main">
             <a:r>
-              <a:t>lessons/lesson-11/slides.md P16</a:t>
-            </a:r>
-          </a:p>
-          <a:p xmlns:a="http://schemas.openxmlformats.org/drawingml/2006/main">
-            <a:r>
-              <a:t>lessons/lesson-11/handout.md</a:t>
-            </a:r>
-          </a:p>
-          <a:p xmlns:a="http://schemas.openxmlformats.org/drawingml/2006/main">
-            <a:r>
-              <a:t>handout §六·1-4；§八 练习 1-8。</a:t>
+              <a:t/>
+            </a:r>
+          </a:p>
+          <a:p xmlns:a="http://schemas.openxmlformats.org/drawingml/2006/main">
+            <a:r>
+              <a:t>- 本课 handout.md 与 slides.md</a:t>
+            </a:r>
+          </a:p>
+          <a:p xmlns:a="http://schemas.openxmlformats.org/drawingml/2006/main">
+            <a:r>
+              <a:t/>
+            </a:r>
+          </a:p>
+          <a:p xmlns:a="http://schemas.openxmlformats.org/drawingml/2006/main">
+            <a:r>
+              <a:t>- ../../course/reading-card-case.md</a:t>
+            </a:r>
+          </a:p>
+          <a:p xmlns:a="http://schemas.openxmlformats.org/drawingml/2006/main">
+            <a:r>
+              <a:t/>
             </a:r>
           </a:p>
           <a:p xmlns:a="http://schemas.openxmlformats.org/drawingml/2006/main">
@@ -1447,37 +2467,92 @@
           <a:lstStyle xmlns:a="http://schemas.openxmlformats.org/drawingml/2006/main"/>
           <a:p xmlns:a="http://schemas.openxmlformats.org/drawingml/2006/main">
             <a:r>
-              <a:t>P17｜失败 trace 连接停止与冻结配置恢复</a:t>
-            </a:r>
-          </a:p>
-          <a:p xmlns:a="http://schemas.openxmlformats.org/drawingml/2006/main">
-            <a:r>
-              <a:t/>
-            </a:r>
-          </a:p>
-          <a:p xmlns:a="http://schemas.openxmlformats.org/drawingml/2006/main">
-            <a:r>
-              <a:t>讲述：先用 5 分钟教师中点点评纠正三类共性卡点：把批量运行当优化、执行器自评、回退目标不稳定；再进行 10 分钟个人实践。样例是协议错误触发停止，human_review 表示人工已确认，恢复的是原冻结配置，不是看结果后重写参数。decision 字段记录停止与保留；优化循环可另记 Keep / Discard，但任何决定都不删除记录。</a:t>
-            </a:r>
-          </a:p>
-          <a:p xmlns:a="http://schemas.openxmlformats.org/drawingml/2006/main">
-            <a:r>
-              <a:t/>
-            </a:r>
-          </a:p>
-          <a:p xmlns:a="http://schemas.openxmlformats.org/drawingml/2006/main">
-            <a:r>
-              <a:t>学生动作：把这一页停留在屏幕上。巡视。</a:t>
-            </a:r>
-          </a:p>
-          <a:p xmlns:a="http://schemas.openxmlformats.org/drawingml/2006/main">
-            <a:r>
-              <a:t/>
-            </a:r>
-          </a:p>
-          <a:p xmlns:a="http://schemas.openxmlformats.org/drawingml/2006/main">
-            <a:r>
-              <a:t>建议时间：15 分钟（教师中点点评 5 分钟 + 个人实践 10 分钟）。</a:t>
+              <a:t>页面：P17 恢复以后，先检查四件事</a:t>
+            </a:r>
+          </a:p>
+          <a:p xmlns:a="http://schemas.openxmlformats.org/drawingml/2006/main">
+            <a:r>
+              <a:t/>
+            </a:r>
+          </a:p>
+          <a:p xmlns:a="http://schemas.openxmlformats.org/drawingml/2006/main">
+            <a:r>
+              <a:t>讲义位置：handout.md §六、贯穿案例：把可重复动作改写为受限循环</a:t>
+            </a:r>
+          </a:p>
+          <a:p xmlns:a="http://schemas.openxmlformats.org/drawingml/2006/main">
+            <a:r>
+              <a:t/>
+            </a:r>
+          </a:p>
+          <a:p xmlns:a="http://schemas.openxmlformats.org/drawingml/2006/main">
+            <a:r>
+              <a:t>屏显核对：</a:t>
+            </a:r>
+          </a:p>
+          <a:p xmlns:a="http://schemas.openxmlformats.org/drawingml/2006/main">
+            <a:r>
+              <a:t>失败事件还在吗？</a:t>
+            </a:r>
+          </a:p>
+          <a:p xmlns:a="http://schemas.openxmlformats.org/drawingml/2006/main">
+            <a:r>
+              <a:t>输入和配置改变了吗？</a:t>
+            </a:r>
+          </a:p>
+          <a:p xmlns:a="http://schemas.openxmlformats.org/drawingml/2006/main">
+            <a:r>
+              <a:t>成功任务被重复执行了吗？</a:t>
+            </a:r>
+          </a:p>
+          <a:p xmlns:a="http://schemas.openxmlformats.org/drawingml/2006/main">
+            <a:r>
+              <a:t>预算与停止条件仍然生效吗？</a:t>
+            </a:r>
+          </a:p>
+          <a:p xmlns:a="http://schemas.openxmlformats.org/drawingml/2006/main">
+            <a:r>
+              <a:t/>
+            </a:r>
+          </a:p>
+          <a:p xmlns:a="http://schemas.openxmlformats.org/drawingml/2006/main">
+            <a:r>
+              <a:t>教师讲述：</a:t>
+            </a:r>
+          </a:p>
+          <a:p xmlns:a="http://schemas.openxmlformats.org/drawingml/2006/main">
+            <a:r>
+              <a:t>打开events与state核对四问，展示一次真实恢复。若输入变化，原目录拒绝续跑，应保留旧目录、开启新版本。不要为了让演示成功而清空日志。</a:t>
+            </a:r>
+          </a:p>
+          <a:p xmlns:a="http://schemas.openxmlformats.org/drawingml/2006/main">
+            <a:r>
+              <a:t/>
+            </a:r>
+          </a:p>
+          <a:p xmlns:a="http://schemas.openxmlformats.org/drawingml/2006/main">
+            <a:r>
+              <a:t>学生动作：</a:t>
+            </a:r>
+          </a:p>
+          <a:p xmlns:a="http://schemas.openxmlformats.org/drawingml/2006/main">
+            <a:r>
+              <a:t>在失败trace旁记录恢复依据和仍未解决的问题。</a:t>
+            </a:r>
+          </a:p>
+          <a:p xmlns:a="http://schemas.openxmlformats.org/drawingml/2006/main">
+            <a:r>
+              <a:t/>
+            </a:r>
+          </a:p>
+          <a:p xmlns:a="http://schemas.openxmlformats.org/drawingml/2006/main">
+            <a:r>
+              <a:t>来源与边界：</a:t>
+            </a:r>
+          </a:p>
+          <a:p xmlns:a="http://schemas.openxmlformats.org/drawingml/2006/main">
+            <a:r>
+              <a:t>./handout.md；课堂示例与构造数据见 ../../course/reading-card-case.md</a:t>
             </a:r>
           </a:p>
           <a:p xmlns:a="http://schemas.openxmlformats.org/drawingml/2006/main">
@@ -1492,17 +2567,27 @@
           </a:p>
           <a:p xmlns:a="http://schemas.openxmlformats.org/drawingml/2006/main">
             <a:r>
-              <a:t>lessons/lesson-11/slides.md P17</a:t>
-            </a:r>
-          </a:p>
-          <a:p xmlns:a="http://schemas.openxmlformats.org/drawingml/2006/main">
-            <a:r>
-              <a:t>lessons/lesson-11/handout.md</a:t>
-            </a:r>
-          </a:p>
-          <a:p xmlns:a="http://schemas.openxmlformats.org/drawingml/2006/main">
-            <a:r>
-              <a:t>handout §六·6；§八 练习 1-8；§五·2；第 13 课失败复盘将直接使用这些记录。</a:t>
+              <a:t/>
+            </a:r>
+          </a:p>
+          <a:p xmlns:a="http://schemas.openxmlformats.org/drawingml/2006/main">
+            <a:r>
+              <a:t>- 本课 handout.md 与 slides.md</a:t>
+            </a:r>
+          </a:p>
+          <a:p xmlns:a="http://schemas.openxmlformats.org/drawingml/2006/main">
+            <a:r>
+              <a:t/>
+            </a:r>
+          </a:p>
+          <a:p xmlns:a="http://schemas.openxmlformats.org/drawingml/2006/main">
+            <a:r>
+              <a:t>- ../../course/reading-card-case.md</a:t>
+            </a:r>
+          </a:p>
+          <a:p xmlns:a="http://schemas.openxmlformats.org/drawingml/2006/main">
+            <a:r>
+              <a:t/>
             </a:r>
           </a:p>
           <a:p xmlns:a="http://schemas.openxmlformats.org/drawingml/2006/main">
@@ -1577,37 +2662,197 @@
           <a:lstStyle xmlns:a="http://schemas.openxmlformats.org/drawingml/2006/main"/>
           <a:p xmlns:a="http://schemas.openxmlformats.org/drawingml/2006/main">
             <a:r>
-              <a:t>P18｜同伴只问四个循环边界</a:t>
-            </a:r>
-          </a:p>
-          <a:p xmlns:a="http://schemas.openxmlformats.org/drawingml/2006/main">
-            <a:r>
-              <a:t/>
-            </a:r>
-          </a:p>
-          <a:p xmlns:a="http://schemas.openxmlformats.org/drawingml/2006/main">
-            <a:r>
-              <a:t>讲述：同伴互查只提问题，不替作者决定，不形成共同提交。重点检查四约束是否齐全、停止条件是否含禁止类、审核点是否标出、失败记录是否七字段、是否出现越界表述。同伴反馈由作者自己决定是否采纳，沿用第 8 课同伴组规则。</a:t>
-            </a:r>
-          </a:p>
-          <a:p xmlns:a="http://schemas.openxmlformats.org/drawingml/2006/main">
-            <a:r>
-              <a:t/>
-            </a:r>
-          </a:p>
-          <a:p xmlns:a="http://schemas.openxmlformats.org/drawingml/2006/main">
-            <a:r>
-              <a:t>学生动作：2–3 人互查，作者记录决定与理由；按本页建议时间完成。</a:t>
-            </a:r>
-          </a:p>
-          <a:p xmlns:a="http://schemas.openxmlformats.org/drawingml/2006/main">
-            <a:r>
-              <a:t/>
-            </a:r>
-          </a:p>
-          <a:p xmlns:a="http://schemas.openxmlformats.org/drawingml/2006/main">
-            <a:r>
-              <a:t>建议时间：15 分钟。</a:t>
+              <a:t>页面：P18 同伴只问四个循环边界</a:t>
+            </a:r>
+          </a:p>
+          <a:p xmlns:a="http://schemas.openxmlformats.org/drawingml/2006/main">
+            <a:r>
+              <a:t/>
+            </a:r>
+          </a:p>
+          <a:p xmlns:a="http://schemas.openxmlformats.org/drawingml/2006/main">
+            <a:r>
+              <a:t>讲义位置：本课讲义；见逐页母稿映射表</a:t>
+            </a:r>
+          </a:p>
+          <a:p xmlns:a="http://schemas.openxmlformats.org/drawingml/2006/main">
+            <a:r>
+              <a:t/>
+            </a:r>
+          </a:p>
+          <a:p xmlns:a="http://schemas.openxmlformats.org/drawingml/2006/main">
+            <a:r>
+              <a:t>屏显核对：</a:t>
+            </a:r>
+          </a:p>
+          <a:p xmlns:a="http://schemas.openxmlformats.org/drawingml/2006/main">
+            <a:r>
+              <a:t>同伴只问四个循环边界</a:t>
+            </a:r>
+          </a:p>
+          <a:p xmlns:a="http://schemas.openxmlformats.org/drawingml/2006/main">
+            <a:r>
+              <a:t/>
+            </a:r>
+          </a:p>
+          <a:p xmlns:a="http://schemas.openxmlformats.org/drawingml/2006/main">
+            <a:r>
+              <a:t>- 作者的受限循环说明</a:t>
+            </a:r>
+          </a:p>
+          <a:p xmlns:a="http://schemas.openxmlformats.org/drawingml/2006/main">
+            <a:r>
+              <a:t/>
+            </a:r>
+          </a:p>
+          <a:p xmlns:a="http://schemas.openxmlformats.org/drawingml/2006/main">
+            <a:r>
+              <a:t>- 固定指标与版本</a:t>
+            </a:r>
+          </a:p>
+          <a:p xmlns:a="http://schemas.openxmlformats.org/drawingml/2006/main">
+            <a:r>
+              <a:t/>
+            </a:r>
+          </a:p>
+          <a:p xmlns:a="http://schemas.openxmlformats.org/drawingml/2006/main">
+            <a:r>
+              <a:t>- 预算 / 停止 / 回退</a:t>
+            </a:r>
+          </a:p>
+          <a:p xmlns:a="http://schemas.openxmlformats.org/drawingml/2006/main">
+            <a:r>
+              <a:t/>
+            </a:r>
+          </a:p>
+          <a:p xmlns:a="http://schemas.openxmlformats.org/drawingml/2006/main">
+            <a:r>
+              <a:t>- 人工审核点</a:t>
+            </a:r>
+          </a:p>
+          <a:p xmlns:a="http://schemas.openxmlformats.org/drawingml/2006/main">
+            <a:r>
+              <a:t/>
+            </a:r>
+          </a:p>
+          <a:p xmlns:a="http://schemas.openxmlformats.org/drawingml/2006/main">
+            <a:r>
+              <a:t>- 正常 / 无改善 / 失败 trace</a:t>
+            </a:r>
+          </a:p>
+          <a:p xmlns:a="http://schemas.openxmlformats.org/drawingml/2006/main">
+            <a:r>
+              <a:t/>
+            </a:r>
+          </a:p>
+          <a:p xmlns:a="http://schemas.openxmlformats.org/drawingml/2006/main">
+            <a:r>
+              <a:t>- 同伴提问</a:t>
+            </a:r>
+          </a:p>
+          <a:p xmlns:a="http://schemas.openxmlformats.org/drawingml/2006/main">
+            <a:r>
+              <a:t/>
+            </a:r>
+          </a:p>
+          <a:p xmlns:a="http://schemas.openxmlformats.org/drawingml/2006/main">
+            <a:r>
+              <a:t>- ? 指标会漂移吗</a:t>
+            </a:r>
+          </a:p>
+          <a:p xmlns:a="http://schemas.openxmlformats.org/drawingml/2006/main">
+            <a:r>
+              <a:t/>
+            </a:r>
+          </a:p>
+          <a:p xmlns:a="http://schemas.openxmlformats.org/drawingml/2006/main">
+            <a:r>
+              <a:t>- ? 何时必须停</a:t>
+            </a:r>
+          </a:p>
+          <a:p xmlns:a="http://schemas.openxmlformats.org/drawingml/2006/main">
+            <a:r>
+              <a:t/>
+            </a:r>
+          </a:p>
+          <a:p xmlns:a="http://schemas.openxmlformats.org/drawingml/2006/main">
+            <a:r>
+              <a:t>- ? 失败仍在账本吗</a:t>
+            </a:r>
+          </a:p>
+          <a:p xmlns:a="http://schemas.openxmlformats.org/drawingml/2006/main">
+            <a:r>
+              <a:t/>
+            </a:r>
+          </a:p>
+          <a:p xmlns:a="http://schemas.openxmlformats.org/drawingml/2006/main">
+            <a:r>
+              <a:t>- ? 队列被当成优化吗</a:t>
+            </a:r>
+          </a:p>
+          <a:p xmlns:a="http://schemas.openxmlformats.org/drawingml/2006/main">
+            <a:r>
+              <a:t/>
+            </a:r>
+          </a:p>
+          <a:p xmlns:a="http://schemas.openxmlformats.org/drawingml/2006/main">
+            <a:r>
+              <a:t>- 作者记录 / 决定与理由</a:t>
+            </a:r>
+          </a:p>
+          <a:p xmlns:a="http://schemas.openxmlformats.org/drawingml/2006/main">
+            <a:r>
+              <a:t/>
+            </a:r>
+          </a:p>
+          <a:p xmlns:a="http://schemas.openxmlformats.org/drawingml/2006/main">
+            <a:r>
+              <a:t>教师讲述：</a:t>
+            </a:r>
+          </a:p>
+          <a:p xmlns:a="http://schemas.openxmlformats.org/drawingml/2006/main">
+            <a:r>
+              <a:t>同伴互查只提问题，不替作者决定，不形成共同提交。重点检查四约束是否齐全、停止条件是否含禁止类、审核点是否标出、失败记录是否七字段、是否出现越界表述。同伴反馈由作者自己决定是否采纳，沿用第 8 课同伴组规则。</a:t>
+            </a:r>
+          </a:p>
+          <a:p xmlns:a="http://schemas.openxmlformats.org/drawingml/2006/main">
+            <a:r>
+              <a:t/>
+            </a:r>
+          </a:p>
+          <a:p xmlns:a="http://schemas.openxmlformats.org/drawingml/2006/main">
+            <a:r>
+              <a:t>学生动作：</a:t>
+            </a:r>
+          </a:p>
+          <a:p xmlns:a="http://schemas.openxmlformats.org/drawingml/2006/main">
+            <a:r>
+              <a:t>2–3 人互查，作者记录决定与理由；按本页建议时间完成。</a:t>
+            </a:r>
+          </a:p>
+          <a:p xmlns:a="http://schemas.openxmlformats.org/drawingml/2006/main">
+            <a:r>
+              <a:t/>
+            </a:r>
+          </a:p>
+          <a:p xmlns:a="http://schemas.openxmlformats.org/drawingml/2006/main">
+            <a:r>
+              <a:t>来源与边界：</a:t>
+            </a:r>
+          </a:p>
+          <a:p xmlns:a="http://schemas.openxmlformats.org/drawingml/2006/main">
+            <a:r>
+              <a:t>handout §七 常见错误；第 8 课同伴反馈规则。</a:t>
+            </a:r>
+          </a:p>
+          <a:p xmlns:a="http://schemas.openxmlformats.org/drawingml/2006/main">
+            <a:r>
+              <a:t/>
+            </a:r>
+          </a:p>
+          <a:p xmlns:a="http://schemas.openxmlformats.org/drawingml/2006/main">
+            <a:r>
+              <a:t>---</a:t>
             </a:r>
           </a:p>
           <a:p xmlns:a="http://schemas.openxmlformats.org/drawingml/2006/main">
@@ -1622,17 +2867,27 @@
           </a:p>
           <a:p xmlns:a="http://schemas.openxmlformats.org/drawingml/2006/main">
             <a:r>
-              <a:t>lessons/lesson-11/slides.md P18</a:t>
-            </a:r>
-          </a:p>
-          <a:p xmlns:a="http://schemas.openxmlformats.org/drawingml/2006/main">
-            <a:r>
-              <a:t>lessons/lesson-11/handout.md</a:t>
-            </a:r>
-          </a:p>
-          <a:p xmlns:a="http://schemas.openxmlformats.org/drawingml/2006/main">
-            <a:r>
-              <a:t>handout §七 常见错误；第 8 课同伴反馈规则。</a:t>
+              <a:t/>
+            </a:r>
+          </a:p>
+          <a:p xmlns:a="http://schemas.openxmlformats.org/drawingml/2006/main">
+            <a:r>
+              <a:t>- 本课 handout.md 与 slides.md</a:t>
+            </a:r>
+          </a:p>
+          <a:p xmlns:a="http://schemas.openxmlformats.org/drawingml/2006/main">
+            <a:r>
+              <a:t/>
+            </a:r>
+          </a:p>
+          <a:p xmlns:a="http://schemas.openxmlformats.org/drawingml/2006/main">
+            <a:r>
+              <a:t>- ../../course/reading-card-case.md</a:t>
+            </a:r>
+          </a:p>
+          <a:p xmlns:a="http://schemas.openxmlformats.org/drawingml/2006/main">
+            <a:r>
+              <a:t/>
             </a:r>
           </a:p>
           <a:p xmlns:a="http://schemas.openxmlformats.org/drawingml/2006/main">
@@ -1707,37 +2962,167 @@
           <a:lstStyle xmlns:a="http://schemas.openxmlformats.org/drawingml/2006/main"/>
           <a:p xmlns:a="http://schemas.openxmlformats.org/drawingml/2006/main">
             <a:r>
-              <a:t>P19｜本讲知识点总结</a:t>
-            </a:r>
-          </a:p>
-          <a:p xmlns:a="http://schemas.openxmlformats.org/drawingml/2006/main">
-            <a:r>
-              <a:t/>
-            </a:r>
-          </a:p>
-          <a:p xmlns:a="http://schemas.openxmlformats.org/drawingml/2006/main">
-            <a:r>
-              <a:t>讲述：回收循环结构、约束、失败追踪与人工审核的关系。本页不新增任务。</a:t>
-            </a:r>
-          </a:p>
-          <a:p xmlns:a="http://schemas.openxmlformats.org/drawingml/2006/main">
-            <a:r>
-              <a:t/>
-            </a:r>
-          </a:p>
-          <a:p xmlns:a="http://schemas.openxmlformats.org/drawingml/2006/main">
-            <a:r>
-              <a:t>学生动作：学生用一句话指出自己的循环最可能在哪项约束上失效。</a:t>
-            </a:r>
-          </a:p>
-          <a:p xmlns:a="http://schemas.openxmlformats.org/drawingml/2006/main">
-            <a:r>
-              <a:t/>
-            </a:r>
-          </a:p>
-          <a:p xmlns:a="http://schemas.openxmlformats.org/drawingml/2006/main">
-            <a:r>
-              <a:t>建议时间：2 分钟。</a:t>
+              <a:t>页面：P19 本讲知识点总结</a:t>
+            </a:r>
+          </a:p>
+          <a:p xmlns:a="http://schemas.openxmlformats.org/drawingml/2006/main">
+            <a:r>
+              <a:t/>
+            </a:r>
+          </a:p>
+          <a:p xmlns:a="http://schemas.openxmlformats.org/drawingml/2006/main">
+            <a:r>
+              <a:t>讲义位置：本课讲义；见逐页母稿映射表</a:t>
+            </a:r>
+          </a:p>
+          <a:p xmlns:a="http://schemas.openxmlformats.org/drawingml/2006/main">
+            <a:r>
+              <a:t/>
+            </a:r>
+          </a:p>
+          <a:p xmlns:a="http://schemas.openxmlformats.org/drawingml/2006/main">
+            <a:r>
+              <a:t>屏显核对：</a:t>
+            </a:r>
+          </a:p>
+          <a:p xmlns:a="http://schemas.openxmlformats.org/drawingml/2006/main">
+            <a:r>
+              <a:t>本讲知识点总结</a:t>
+            </a:r>
+          </a:p>
+          <a:p xmlns:a="http://schemas.openxmlformats.org/drawingml/2006/main">
+            <a:r>
+              <a:t/>
+            </a:r>
+          </a:p>
+          <a:p xmlns:a="http://schemas.openxmlformats.org/drawingml/2006/main">
+            <a:r>
+              <a:t>- 冻结指标</a:t>
+            </a:r>
+          </a:p>
+          <a:p xmlns:a="http://schemas.openxmlformats.org/drawingml/2006/main">
+            <a:r>
+              <a:t/>
+            </a:r>
+          </a:p>
+          <a:p xmlns:a="http://schemas.openxmlformats.org/drawingml/2006/main">
+            <a:r>
+              <a:t>- 本讲输入</a:t>
+            </a:r>
+          </a:p>
+          <a:p xmlns:a="http://schemas.openxmlformats.org/drawingml/2006/main">
+            <a:r>
+              <a:t/>
+            </a:r>
+          </a:p>
+          <a:p xmlns:a="http://schemas.openxmlformats.org/drawingml/2006/main">
+            <a:r>
+              <a:t>- 预算 / 停止</a:t>
+            </a:r>
+          </a:p>
+          <a:p xmlns:a="http://schemas.openxmlformats.org/drawingml/2006/main">
+            <a:r>
+              <a:t/>
+            </a:r>
+          </a:p>
+          <a:p xmlns:a="http://schemas.openxmlformats.org/drawingml/2006/main">
+            <a:r>
+              <a:t>- 本讲执行</a:t>
+            </a:r>
+          </a:p>
+          <a:p xmlns:a="http://schemas.openxmlformats.org/drawingml/2006/main">
+            <a:r>
+              <a:t/>
+            </a:r>
+          </a:p>
+          <a:p xmlns:a="http://schemas.openxmlformats.org/drawingml/2006/main">
+            <a:r>
+              <a:t>- 失败保留 / 回退</a:t>
+            </a:r>
+          </a:p>
+          <a:p xmlns:a="http://schemas.openxmlformats.org/drawingml/2006/main">
+            <a:r>
+              <a:t/>
+            </a:r>
+          </a:p>
+          <a:p xmlns:a="http://schemas.openxmlformats.org/drawingml/2006/main">
+            <a:r>
+              <a:t>- 本讲证据</a:t>
+            </a:r>
+          </a:p>
+          <a:p xmlns:a="http://schemas.openxmlformats.org/drawingml/2006/main">
+            <a:r>
+              <a:t/>
+            </a:r>
+          </a:p>
+          <a:p xmlns:a="http://schemas.openxmlformats.org/drawingml/2006/main">
+            <a:r>
+              <a:t>- 交给 L12 设计</a:t>
+            </a:r>
+          </a:p>
+          <a:p xmlns:a="http://schemas.openxmlformats.org/drawingml/2006/main">
+            <a:r>
+              <a:t/>
+            </a:r>
+          </a:p>
+          <a:p xmlns:a="http://schemas.openxmlformats.org/drawingml/2006/main">
+            <a:r>
+              <a:t>- 下一步</a:t>
+            </a:r>
+          </a:p>
+          <a:p xmlns:a="http://schemas.openxmlformats.org/drawingml/2006/main">
+            <a:r>
+              <a:t/>
+            </a:r>
+          </a:p>
+          <a:p xmlns:a="http://schemas.openxmlformats.org/drawingml/2006/main">
+            <a:r>
+              <a:t>教师讲述：</a:t>
+            </a:r>
+          </a:p>
+          <a:p xmlns:a="http://schemas.openxmlformats.org/drawingml/2006/main">
+            <a:r>
+              <a:t>回收循环结构、约束、失败追踪与人工审核的关系。本页不新增任务。</a:t>
+            </a:r>
+          </a:p>
+          <a:p xmlns:a="http://schemas.openxmlformats.org/drawingml/2006/main">
+            <a:r>
+              <a:t/>
+            </a:r>
+          </a:p>
+          <a:p xmlns:a="http://schemas.openxmlformats.org/drawingml/2006/main">
+            <a:r>
+              <a:t>学生动作：</a:t>
+            </a:r>
+          </a:p>
+          <a:p xmlns:a="http://schemas.openxmlformats.org/drawingml/2006/main">
+            <a:r>
+              <a:t>学生用一句话指出自己的循环最可能在哪项约束上失效。</a:t>
+            </a:r>
+          </a:p>
+          <a:p xmlns:a="http://schemas.openxmlformats.org/drawingml/2006/main">
+            <a:r>
+              <a:t/>
+            </a:r>
+          </a:p>
+          <a:p xmlns:a="http://schemas.openxmlformats.org/drawingml/2006/main">
+            <a:r>
+              <a:t>来源与边界：</a:t>
+            </a:r>
+          </a:p>
+          <a:p xmlns:a="http://schemas.openxmlformats.org/drawingml/2006/main">
+            <a:r>
+              <a:t>[handout.md](./handout.md) §二-§五；[teaching-plan.md](./teaching-plan.md) 第四至六节。</a:t>
+            </a:r>
+          </a:p>
+          <a:p xmlns:a="http://schemas.openxmlformats.org/drawingml/2006/main">
+            <a:r>
+              <a:t/>
+            </a:r>
+          </a:p>
+          <a:p xmlns:a="http://schemas.openxmlformats.org/drawingml/2006/main">
+            <a:r>
+              <a:t>---</a:t>
             </a:r>
           </a:p>
           <a:p xmlns:a="http://schemas.openxmlformats.org/drawingml/2006/main">
@@ -1752,17 +3137,27 @@
           </a:p>
           <a:p xmlns:a="http://schemas.openxmlformats.org/drawingml/2006/main">
             <a:r>
-              <a:t>lessons/lesson-11/slides.md P19</a:t>
-            </a:r>
-          </a:p>
-          <a:p xmlns:a="http://schemas.openxmlformats.org/drawingml/2006/main">
-            <a:r>
-              <a:t>lessons/lesson-11/handout.md</a:t>
-            </a:r>
-          </a:p>
-          <a:p xmlns:a="http://schemas.openxmlformats.org/drawingml/2006/main">
-            <a:r>
-              <a:t>[handout.md](./handout.md) §二-§五；[teaching-plan.md](./teaching-plan.md) 第四至六节。</a:t>
+              <a:t/>
+            </a:r>
+          </a:p>
+          <a:p xmlns:a="http://schemas.openxmlformats.org/drawingml/2006/main">
+            <a:r>
+              <a:t>- 本课 handout.md 与 slides.md</a:t>
+            </a:r>
+          </a:p>
+          <a:p xmlns:a="http://schemas.openxmlformats.org/drawingml/2006/main">
+            <a:r>
+              <a:t/>
+            </a:r>
+          </a:p>
+          <a:p xmlns:a="http://schemas.openxmlformats.org/drawingml/2006/main">
+            <a:r>
+              <a:t>- ../../course/reading-card-case.md</a:t>
+            </a:r>
+          </a:p>
+          <a:p xmlns:a="http://schemas.openxmlformats.org/drawingml/2006/main">
+            <a:r>
+              <a:t/>
             </a:r>
           </a:p>
           <a:p xmlns:a="http://schemas.openxmlformats.org/drawingml/2006/main">
@@ -1837,37 +3232,232 @@
           <a:lstStyle xmlns:a="http://schemas.openxmlformats.org/drawingml/2006/main"/>
           <a:p xmlns:a="http://schemas.openxmlformats.org/drawingml/2006/main">
             <a:r>
-              <a:t>P02｜从一次受限执行到冻结运行队列</a:t>
-            </a:r>
-          </a:p>
-          <a:p xmlns:a="http://schemas.openxmlformats.org/drawingml/2006/main">
-            <a:r>
-              <a:t/>
-            </a:r>
-          </a:p>
-          <a:p xmlns:a="http://schemas.openxmlformats.org/drawingml/2006/main">
-            <a:r>
-              <a:t>讲述：回扣第 10 课：受限 Agent 让"Agent 帮忙"可见，但没有回答"能不能反复跑""指标会不会被篡改""失败会不会被删""AutoResearch 那类系统在哪些维度上仍需人工"。本课进入阶段七实验追踪，把受限执行扩展为受限循环。</a:t>
-            </a:r>
-          </a:p>
-          <a:p xmlns:a="http://schemas.openxmlformats.org/drawingml/2006/main">
-            <a:r>
-              <a:t/>
-            </a:r>
-          </a:p>
-          <a:p xmlns:a="http://schemas.openxmlformats.org/drawingml/2006/main">
-            <a:r>
-              <a:t>学生动作：先停 1 分钟：在你现有的受限执行记录里，圈出最缺的一项：指标 / 预算 / 停止 / 回退。然后快问：指标是预先固定的吗？失败能与运行次数对账吗？</a:t>
-            </a:r>
-          </a:p>
-          <a:p xmlns:a="http://schemas.openxmlformats.org/drawingml/2006/main">
-            <a:r>
-              <a:t/>
-            </a:r>
-          </a:p>
-          <a:p xmlns:a="http://schemas.openxmlformats.org/drawingml/2006/main">
-            <a:r>
-              <a:t>建议时间：3 分钟。</a:t>
+              <a:t>页面：P02 从一次受限执行到冻结运行队列</a:t>
+            </a:r>
+          </a:p>
+          <a:p xmlns:a="http://schemas.openxmlformats.org/drawingml/2006/main">
+            <a:r>
+              <a:t/>
+            </a:r>
+          </a:p>
+          <a:p xmlns:a="http://schemas.openxmlformats.org/drawingml/2006/main">
+            <a:r>
+              <a:t>讲义位置：本课讲义；见逐页母稿映射表</a:t>
+            </a:r>
+          </a:p>
+          <a:p xmlns:a="http://schemas.openxmlformats.org/drawingml/2006/main">
+            <a:r>
+              <a:t/>
+            </a:r>
+          </a:p>
+          <a:p xmlns:a="http://schemas.openxmlformats.org/drawingml/2006/main">
+            <a:r>
+              <a:t>屏显核对：</a:t>
+            </a:r>
+          </a:p>
+          <a:p xmlns:a="http://schemas.openxmlformats.org/drawingml/2006/main">
+            <a:r>
+              <a:t>从一次受限执行到冻结运行队列</a:t>
+            </a:r>
+          </a:p>
+          <a:p xmlns:a="http://schemas.openxmlformats.org/drawingml/2006/main">
+            <a:r>
+              <a:t/>
+            </a:r>
+          </a:p>
+          <a:p xmlns:a="http://schemas.openxmlformats.org/drawingml/2006/main">
+            <a:r>
+              <a:t>- task-01</a:t>
+            </a:r>
+          </a:p>
+          <a:p xmlns:a="http://schemas.openxmlformats.org/drawingml/2006/main">
+            <a:r>
+              <a:t/>
+            </a:r>
+          </a:p>
+          <a:p xmlns:a="http://schemas.openxmlformats.org/drawingml/2006/main">
+            <a:r>
+              <a:t>- 契约 + diff</a:t>
+            </a:r>
+          </a:p>
+          <a:p xmlns:a="http://schemas.openxmlformats.org/drawingml/2006/main">
+            <a:r>
+              <a:t/>
+            </a:r>
+          </a:p>
+          <a:p xmlns:a="http://schemas.openxmlformats.org/drawingml/2006/main">
+            <a:r>
+              <a:t>- run-001</a:t>
+            </a:r>
+          </a:p>
+          <a:p xmlns:a="http://schemas.openxmlformats.org/drawingml/2006/main">
+            <a:r>
+              <a:t/>
+            </a:r>
+          </a:p>
+          <a:p xmlns:a="http://schemas.openxmlformats.org/drawingml/2006/main">
+            <a:r>
+              <a:t>- 正常</a:t>
+            </a:r>
+          </a:p>
+          <a:p xmlns:a="http://schemas.openxmlformats.org/drawingml/2006/main">
+            <a:r>
+              <a:t/>
+            </a:r>
+          </a:p>
+          <a:p xmlns:a="http://schemas.openxmlformats.org/drawingml/2006/main">
+            <a:r>
+              <a:t>- run-002</a:t>
+            </a:r>
+          </a:p>
+          <a:p xmlns:a="http://schemas.openxmlformats.org/drawingml/2006/main">
+            <a:r>
+              <a:t/>
+            </a:r>
+          </a:p>
+          <a:p xmlns:a="http://schemas.openxmlformats.org/drawingml/2006/main">
+            <a:r>
+              <a:t>- 无改善</a:t>
+            </a:r>
+          </a:p>
+          <a:p xmlns:a="http://schemas.openxmlformats.org/drawingml/2006/main">
+            <a:r>
+              <a:t/>
+            </a:r>
+          </a:p>
+          <a:p xmlns:a="http://schemas.openxmlformats.org/drawingml/2006/main">
+            <a:r>
+              <a:t>- run-003</a:t>
+            </a:r>
+          </a:p>
+          <a:p xmlns:a="http://schemas.openxmlformats.org/drawingml/2006/main">
+            <a:r>
+              <a:t/>
+            </a:r>
+          </a:p>
+          <a:p xmlns:a="http://schemas.openxmlformats.org/drawingml/2006/main">
+            <a:r>
+              <a:t>- 失败保留</a:t>
+            </a:r>
+          </a:p>
+          <a:p xmlns:a="http://schemas.openxmlformats.org/drawingml/2006/main">
+            <a:r>
+              <a:t/>
+            </a:r>
+          </a:p>
+          <a:p xmlns:a="http://schemas.openxmlformats.org/drawingml/2006/main">
+            <a:r>
+              <a:t>- 循环还缺：固定指标｜预算｜停止条件｜回退</a:t>
+            </a:r>
+          </a:p>
+          <a:p xmlns:a="http://schemas.openxmlformats.org/drawingml/2006/main">
+            <a:r>
+              <a:t/>
+            </a:r>
+          </a:p>
+          <a:p xmlns:a="http://schemas.openxmlformats.org/drawingml/2006/main">
+            <a:r>
+              <a:t>教师讲述：</a:t>
+            </a:r>
+          </a:p>
+          <a:p xmlns:a="http://schemas.openxmlformats.org/drawingml/2006/main">
+            <a:r>
+              <a:t>回扣第 10 课：受限 Agent 让"Agent 帮忙"可见，但没有回答"能不能反复跑""指标会不会被篡改""失败会不会被删""AutoResearch 那类系统在哪些维度上仍需人工"。本课进入阶段七实验追踪，把受限执行扩展为受限循环。</a:t>
+            </a:r>
+          </a:p>
+          <a:p xmlns:a="http://schemas.openxmlformats.org/drawingml/2006/main">
+            <a:r>
+              <a:t/>
+            </a:r>
+          </a:p>
+          <a:p xmlns:a="http://schemas.openxmlformats.org/drawingml/2006/main">
+            <a:r>
+              <a:t>学生动作：</a:t>
+            </a:r>
+          </a:p>
+          <a:p xmlns:a="http://schemas.openxmlformats.org/drawingml/2006/main">
+            <a:r>
+              <a:t>先停 1 分钟：在你现有的受限执行记录里，圈出最缺的一项：指标 / 预算 / 停止 / 回退。然后快问：指标是预先固定的吗？失败能与运行次数对账吗？</a:t>
+            </a:r>
+          </a:p>
+          <a:p xmlns:a="http://schemas.openxmlformats.org/drawingml/2006/main">
+            <a:r>
+              <a:t/>
+            </a:r>
+          </a:p>
+          <a:p xmlns:a="http://schemas.openxmlformats.org/drawingml/2006/main">
+            <a:r>
+              <a:t>本课板书、诊断与串词：</a:t>
+            </a:r>
+          </a:p>
+          <a:p xmlns:a="http://schemas.openxmlformats.org/drawingml/2006/main">
+            <a:r>
+              <a:t>本节替换同类口头提示，不增加既有时段。开场诊断嵌入现有开场/回顾，后续再沿原实践时段操作。</a:t>
+            </a:r>
+          </a:p>
+          <a:p xmlns:a="http://schemas.openxmlformats.org/drawingml/2006/main">
+            <a:r>
+              <a:t/>
+            </a:r>
+          </a:p>
+          <a:p xmlns:a="http://schemas.openxmlformats.org/drawingml/2006/main">
+            <a:r>
+              <a:t>- **板书主线**：固定队列 ≠ 优化循环；任务数 / 尝试数 / 样本数。</a:t>
+            </a:r>
+          </a:p>
+          <a:p xmlns:a="http://schemas.openxmlformats.org/drawingml/2006/main">
+            <a:r>
+              <a:t>- **诊断问题**：恢复一次失败是否增加一个研究样本？</a:t>
+            </a:r>
+          </a:p>
+          <a:p xmlns:a="http://schemas.openxmlformats.org/drawingml/2006/main">
+            <a:r>
+              <a:t>- **预期回答**：没有；只是同一任务的新尝试，旧失败要留存。</a:t>
+            </a:r>
+          </a:p>
+          <a:p xmlns:a="http://schemas.openxmlformats.org/drawingml/2006/main">
+            <a:r>
+              <a:t>- **常见误答后的追问**：如答“重跑直到好结果”，回到预算和停止规则。</a:t>
+            </a:r>
+          </a:p>
+          <a:p xmlns:a="http://schemas.openxmlformats.org/drawingml/2006/main">
+            <a:r>
+              <a:t>- **过渡串词**：“接下来把执行、评价与人工审核组织成一个可追踪工作流。”</a:t>
+            </a:r>
+          </a:p>
+          <a:p xmlns:a="http://schemas.openxmlformats.org/drawingml/2006/main">
+            <a:r>
+              <a:t>- **当堂最小产出**：预算、权限、停止、审核四约束及一次恢复检查。</a:t>
+            </a:r>
+          </a:p>
+          <a:p xmlns:a="http://schemas.openxmlformats.org/drawingml/2006/main">
+            <a:r>
+              <a:t>- **退出记录**：写“已完成的动作、本人项目仍缺的证据/工件、下次补齐位置”。使用教师包时标明课堂方法练习，不能据此宣称本人研究门通过；正式提交课次仍为第 6、9、13、16 课。</a:t>
+            </a:r>
+          </a:p>
+          <a:p xmlns:a="http://schemas.openxmlformats.org/drawingml/2006/main">
+            <a:r>
+              <a:t/>
+            </a:r>
+          </a:p>
+          <a:p xmlns:a="http://schemas.openxmlformats.org/drawingml/2006/main">
+            <a:r>
+              <a:t>来源与边界：</a:t>
+            </a:r>
+          </a:p>
+          <a:p xmlns:a="http://schemas.openxmlformats.org/drawingml/2006/main">
+            <a:r>
+              <a:t>回扣第 10 课讲义与第 9 课实验规格；[AGENTS.md](../../AGENTS.md) 证据标准。</a:t>
+            </a:r>
+          </a:p>
+          <a:p xmlns:a="http://schemas.openxmlformats.org/drawingml/2006/main">
+            <a:r>
+              <a:t/>
+            </a:r>
+          </a:p>
+          <a:p xmlns:a="http://schemas.openxmlformats.org/drawingml/2006/main">
+            <a:r>
+              <a:t>---</a:t>
             </a:r>
           </a:p>
           <a:p xmlns:a="http://schemas.openxmlformats.org/drawingml/2006/main">
@@ -1882,17 +3472,27 @@
           </a:p>
           <a:p xmlns:a="http://schemas.openxmlformats.org/drawingml/2006/main">
             <a:r>
-              <a:t>lessons/lesson-11/slides.md P02</a:t>
-            </a:r>
-          </a:p>
-          <a:p xmlns:a="http://schemas.openxmlformats.org/drawingml/2006/main">
-            <a:r>
-              <a:t>lessons/lesson-11/handout.md</a:t>
-            </a:r>
-          </a:p>
-          <a:p xmlns:a="http://schemas.openxmlformats.org/drawingml/2006/main">
-            <a:r>
-              <a:t>回扣第 10 课讲义与第 9 课实验规格；[AGENTS.md](../../AGENTS.md) 证据标准。</a:t>
+              <a:t/>
+            </a:r>
+          </a:p>
+          <a:p xmlns:a="http://schemas.openxmlformats.org/drawingml/2006/main">
+            <a:r>
+              <a:t>- 本课 handout.md 与 slides.md</a:t>
+            </a:r>
+          </a:p>
+          <a:p xmlns:a="http://schemas.openxmlformats.org/drawingml/2006/main">
+            <a:r>
+              <a:t/>
+            </a:r>
+          </a:p>
+          <a:p xmlns:a="http://schemas.openxmlformats.org/drawingml/2006/main">
+            <a:r>
+              <a:t>- ../../course/reading-card-case.md</a:t>
+            </a:r>
+          </a:p>
+          <a:p xmlns:a="http://schemas.openxmlformats.org/drawingml/2006/main">
+            <a:r>
+              <a:t/>
             </a:r>
           </a:p>
           <a:p xmlns:a="http://schemas.openxmlformats.org/drawingml/2006/main">
@@ -1967,37 +3567,137 @@
           <a:lstStyle xmlns:a="http://schemas.openxmlformats.org/drawingml/2006/main"/>
           <a:p xmlns:a="http://schemas.openxmlformats.org/drawingml/2006/main">
             <a:r>
-              <a:t>P20｜受限循环将升级为最小工作流</a:t>
-            </a:r>
-          </a:p>
-          <a:p xmlns:a="http://schemas.openxmlformats.org/drawingml/2006/main">
-            <a:r>
-              <a:t/>
-            </a:r>
-          </a:p>
-          <a:p xmlns:a="http://schemas.openxmlformats.org/drawingml/2006/main">
-            <a:r>
-              <a:t>讲述：退出卡让学生记录卡点。本课不正式提交。第 12 课会把本课的循环骨架重新组合为个人工作流设计——任务契约、Context、Memory、工具/MCP、权限、Evals、人工审核点会再次出现，但这次是你自己组合而非拆解别人的系统。第 13 课验证门统一检查实验记录与失败保留。</a:t>
-            </a:r>
-          </a:p>
-          <a:p xmlns:a="http://schemas.openxmlformats.org/drawingml/2006/main">
-            <a:r>
-              <a:t/>
-            </a:r>
-          </a:p>
-          <a:p xmlns:a="http://schemas.openxmlformats.org/drawingml/2006/main">
-            <a:r>
-              <a:t>学生动作：学生填写退出卡（2 分钟）。教师收回或学生自留。</a:t>
-            </a:r>
-          </a:p>
-          <a:p xmlns:a="http://schemas.openxmlformats.org/drawingml/2006/main">
-            <a:r>
-              <a:t/>
-            </a:r>
-          </a:p>
-          <a:p xmlns:a="http://schemas.openxmlformats.org/drawingml/2006/main">
-            <a:r>
-              <a:t>建议时间：3 分钟。</a:t>
+              <a:t>页面：P20 受限循环将升级为最小工作流</a:t>
+            </a:r>
+          </a:p>
+          <a:p xmlns:a="http://schemas.openxmlformats.org/drawingml/2006/main">
+            <a:r>
+              <a:t/>
+            </a:r>
+          </a:p>
+          <a:p xmlns:a="http://schemas.openxmlformats.org/drawingml/2006/main">
+            <a:r>
+              <a:t>讲义位置：本课讲义；见逐页母稿映射表</a:t>
+            </a:r>
+          </a:p>
+          <a:p xmlns:a="http://schemas.openxmlformats.org/drawingml/2006/main">
+            <a:r>
+              <a:t/>
+            </a:r>
+          </a:p>
+          <a:p xmlns:a="http://schemas.openxmlformats.org/drawingml/2006/main">
+            <a:r>
+              <a:t>屏显核对：</a:t>
+            </a:r>
+          </a:p>
+          <a:p xmlns:a="http://schemas.openxmlformats.org/drawingml/2006/main">
+            <a:r>
+              <a:t>受限循环将升级为最小工作流</a:t>
+            </a:r>
+          </a:p>
+          <a:p xmlns:a="http://schemas.openxmlformats.org/drawingml/2006/main">
+            <a:r>
+              <a:t/>
+            </a:r>
+          </a:p>
+          <a:p xmlns:a="http://schemas.openxmlformats.org/drawingml/2006/main">
+            <a:r>
+              <a:t>- L10 / 一次执行</a:t>
+            </a:r>
+          </a:p>
+          <a:p xmlns:a="http://schemas.openxmlformats.org/drawingml/2006/main">
+            <a:r>
+              <a:t/>
+            </a:r>
+          </a:p>
+          <a:p xmlns:a="http://schemas.openxmlformats.org/drawingml/2006/main">
+            <a:r>
+              <a:t>- L11 / 冻结循环</a:t>
+            </a:r>
+          </a:p>
+          <a:p xmlns:a="http://schemas.openxmlformats.org/drawingml/2006/main">
+            <a:r>
+              <a:t/>
+            </a:r>
+          </a:p>
+          <a:p xmlns:a="http://schemas.openxmlformats.org/drawingml/2006/main">
+            <a:r>
+              <a:t>- 当前位置 / 输出</a:t>
+            </a:r>
+          </a:p>
+          <a:p xmlns:a="http://schemas.openxmlformats.org/drawingml/2006/main">
+            <a:r>
+              <a:t/>
+            </a:r>
+          </a:p>
+          <a:p xmlns:a="http://schemas.openxmlformats.org/drawingml/2006/main">
+            <a:r>
+              <a:t>- L12 / 最小工作流</a:t>
+            </a:r>
+          </a:p>
+          <a:p xmlns:a="http://schemas.openxmlformats.org/drawingml/2006/main">
+            <a:r>
+              <a:t/>
+            </a:r>
+          </a:p>
+          <a:p xmlns:a="http://schemas.openxmlformats.org/drawingml/2006/main">
+            <a:r>
+              <a:t>- L13 / 评价</a:t>
+            </a:r>
+          </a:p>
+          <a:p xmlns:a="http://schemas.openxmlformats.org/drawingml/2006/main">
+            <a:r>
+              <a:t/>
+            </a:r>
+          </a:p>
+          <a:p xmlns:a="http://schemas.openxmlformats.org/drawingml/2006/main">
+            <a:r>
+              <a:t>- 交给第 12 课：循环说明｜三种 trace｜四约束短分析</a:t>
+            </a:r>
+          </a:p>
+          <a:p xmlns:a="http://schemas.openxmlformats.org/drawingml/2006/main">
+            <a:r>
+              <a:t/>
+            </a:r>
+          </a:p>
+          <a:p xmlns:a="http://schemas.openxmlformats.org/drawingml/2006/main">
+            <a:r>
+              <a:t>教师讲述：</a:t>
+            </a:r>
+          </a:p>
+          <a:p xmlns:a="http://schemas.openxmlformats.org/drawingml/2006/main">
+            <a:r>
+              <a:t>退出卡让学生记录卡点。本课不正式提交。第 12 课会把本课的循环骨架重新组合为个人工作流设计——任务契约、Context、Memory、工具/MCP、权限、Evals、人工审核点会再次出现，但这次是你自己组合而非拆解别人的系统。第 13 课验证门统一检查实验记录与失败保留。</a:t>
+            </a:r>
+          </a:p>
+          <a:p xmlns:a="http://schemas.openxmlformats.org/drawingml/2006/main">
+            <a:r>
+              <a:t/>
+            </a:r>
+          </a:p>
+          <a:p xmlns:a="http://schemas.openxmlformats.org/drawingml/2006/main">
+            <a:r>
+              <a:t>学生动作：</a:t>
+            </a:r>
+          </a:p>
+          <a:p xmlns:a="http://schemas.openxmlformats.org/drawingml/2006/main">
+            <a:r>
+              <a:t>学生填写退出卡（2 分钟）。教师收回或学生自留。</a:t>
+            </a:r>
+          </a:p>
+          <a:p xmlns:a="http://schemas.openxmlformats.org/drawingml/2006/main">
+            <a:r>
+              <a:t/>
+            </a:r>
+          </a:p>
+          <a:p xmlns:a="http://schemas.openxmlformats.org/drawingml/2006/main">
+            <a:r>
+              <a:t>来源与边界：</a:t>
+            </a:r>
+          </a:p>
+          <a:p xmlns:a="http://schemas.openxmlformats.org/drawingml/2006/main">
+            <a:r>
+              <a:t>[assignments.md](../../course/assignments.md) 验证门 Checkpoint 3 在第 13 课后；[syllabus.md](../../course/syllabus.md) 第 12 课主题。</a:t>
             </a:r>
           </a:p>
           <a:p xmlns:a="http://schemas.openxmlformats.org/drawingml/2006/main">
@@ -2012,17 +3712,27 @@
           </a:p>
           <a:p xmlns:a="http://schemas.openxmlformats.org/drawingml/2006/main">
             <a:r>
-              <a:t>lessons/lesson-11/slides.md P20</a:t>
-            </a:r>
-          </a:p>
-          <a:p xmlns:a="http://schemas.openxmlformats.org/drawingml/2006/main">
-            <a:r>
-              <a:t>lessons/lesson-11/handout.md</a:t>
-            </a:r>
-          </a:p>
-          <a:p xmlns:a="http://schemas.openxmlformats.org/drawingml/2006/main">
-            <a:r>
-              <a:t>[assignments.md](../../course/assignments.md) 验证门 Checkpoint 3 在第 13 课后；[syllabus.md](../../course/syllabus.md) 第 12 课主题。</a:t>
+              <a:t/>
+            </a:r>
+          </a:p>
+          <a:p xmlns:a="http://schemas.openxmlformats.org/drawingml/2006/main">
+            <a:r>
+              <a:t>- 本课 handout.md 与 slides.md</a:t>
+            </a:r>
+          </a:p>
+          <a:p xmlns:a="http://schemas.openxmlformats.org/drawingml/2006/main">
+            <a:r>
+              <a:t/>
+            </a:r>
+          </a:p>
+          <a:p xmlns:a="http://schemas.openxmlformats.org/drawingml/2006/main">
+            <a:r>
+              <a:t>- ../../course/reading-card-case.md</a:t>
+            </a:r>
+          </a:p>
+          <a:p xmlns:a="http://schemas.openxmlformats.org/drawingml/2006/main">
+            <a:r>
+              <a:t/>
             </a:r>
           </a:p>
           <a:p xmlns:a="http://schemas.openxmlformats.org/drawingml/2006/main">
@@ -2097,37 +3807,147 @@
           <a:lstStyle xmlns:a="http://schemas.openxmlformats.org/drawingml/2006/main"/>
           <a:p xmlns:a="http://schemas.openxmlformats.org/drawingml/2006/main">
             <a:r>
-              <a:t>P03｜本课形成三件可交给第 12 课的工件</a:t>
-            </a:r>
-          </a:p>
-          <a:p xmlns:a="http://schemas.openxmlformats.org/drawingml/2006/main">
-            <a:r>
-              <a:t/>
-            </a:r>
-          </a:p>
-          <a:p xmlns:a="http://schemas.openxmlformats.org/drawingml/2006/main">
-            <a:r>
-              <a:t>讲述：明确边界：本课目标是建立受限循环说明和失败保留记录，不要求循环在课堂内跑完。本课不是验证门；验证门在第 13 课后，统一检查实验记录与失败保留。本课为第 12 课个人工作流设计直接铺垫——第 12 课会把本课的循环骨架重新组合为服务于学生自己科研动作的工作流。</a:t>
-            </a:r>
-          </a:p>
-          <a:p xmlns:a="http://schemas.openxmlformats.org/drawingml/2006/main">
-            <a:r>
-              <a:t/>
-            </a:r>
-          </a:p>
-          <a:p xmlns:a="http://schemas.openxmlformats.org/drawingml/2006/main">
-            <a:r>
-              <a:t>学生动作：无。</a:t>
-            </a:r>
-          </a:p>
-          <a:p xmlns:a="http://schemas.openxmlformats.org/drawingml/2006/main">
-            <a:r>
-              <a:t/>
-            </a:r>
-          </a:p>
-          <a:p xmlns:a="http://schemas.openxmlformats.org/drawingml/2006/main">
-            <a:r>
-              <a:t>建议时间：2 分钟。</a:t>
+              <a:t>页面：P03 本课形成三件可交给第 12 课的工件</a:t>
+            </a:r>
+          </a:p>
+          <a:p xmlns:a="http://schemas.openxmlformats.org/drawingml/2006/main">
+            <a:r>
+              <a:t/>
+            </a:r>
+          </a:p>
+          <a:p xmlns:a="http://schemas.openxmlformats.org/drawingml/2006/main">
+            <a:r>
+              <a:t>讲义位置：本课讲义；见逐页母稿映射表</a:t>
+            </a:r>
+          </a:p>
+          <a:p xmlns:a="http://schemas.openxmlformats.org/drawingml/2006/main">
+            <a:r>
+              <a:t/>
+            </a:r>
+          </a:p>
+          <a:p xmlns:a="http://schemas.openxmlformats.org/drawingml/2006/main">
+            <a:r>
+              <a:t>屏显核对：</a:t>
+            </a:r>
+          </a:p>
+          <a:p xmlns:a="http://schemas.openxmlformats.org/drawingml/2006/main">
+            <a:r>
+              <a:t>本课形成三件可交给第 12 课的工件</a:t>
+            </a:r>
+          </a:p>
+          <a:p xmlns:a="http://schemas.openxmlformats.org/drawingml/2006/main">
+            <a:r>
+              <a:t/>
+            </a:r>
+          </a:p>
+          <a:p xmlns:a="http://schemas.openxmlformats.org/drawingml/2006/main">
+            <a:r>
+              <a:t>- 受限循环说明</a:t>
+            </a:r>
+          </a:p>
+          <a:p xmlns:a="http://schemas.openxmlformats.org/drawingml/2006/main">
+            <a:r>
+              <a:t/>
+            </a:r>
+          </a:p>
+          <a:p xmlns:a="http://schemas.openxmlformats.org/drawingml/2006/main">
+            <a:r>
+              <a:t>- 固定指标 / 预算 / 停止 / 回退</a:t>
+            </a:r>
+          </a:p>
+          <a:p xmlns:a="http://schemas.openxmlformats.org/drawingml/2006/main">
+            <a:r>
+              <a:t/>
+            </a:r>
+          </a:p>
+          <a:p xmlns:a="http://schemas.openxmlformats.org/drawingml/2006/main">
+            <a:r>
+              <a:t>- 三种运行 trace</a:t>
+            </a:r>
+          </a:p>
+          <a:p xmlns:a="http://schemas.openxmlformats.org/drawingml/2006/main">
+            <a:r>
+              <a:t/>
+            </a:r>
+          </a:p>
+          <a:p xmlns:a="http://schemas.openxmlformats.org/drawingml/2006/main">
+            <a:r>
+              <a:t>- 正常 / 无改善 / 失败</a:t>
+            </a:r>
+          </a:p>
+          <a:p xmlns:a="http://schemas.openxmlformats.org/drawingml/2006/main">
+            <a:r>
+              <a:t/>
+            </a:r>
+          </a:p>
+          <a:p xmlns:a="http://schemas.openxmlformats.org/drawingml/2006/main">
+            <a:r>
+              <a:t>- 四约束短分析</a:t>
+            </a:r>
+          </a:p>
+          <a:p xmlns:a="http://schemas.openxmlformats.org/drawingml/2006/main">
+            <a:r>
+              <a:t/>
+            </a:r>
+          </a:p>
+          <a:p xmlns:a="http://schemas.openxmlformats.org/drawingml/2006/main">
+            <a:r>
+              <a:t>- 何处仍需人工</a:t>
+            </a:r>
+          </a:p>
+          <a:p xmlns:a="http://schemas.openxmlformats.org/drawingml/2006/main">
+            <a:r>
+              <a:t/>
+            </a:r>
+          </a:p>
+          <a:p xmlns:a="http://schemas.openxmlformats.org/drawingml/2006/main">
+            <a:r>
+              <a:t>教师讲述：</a:t>
+            </a:r>
+          </a:p>
+          <a:p xmlns:a="http://schemas.openxmlformats.org/drawingml/2006/main">
+            <a:r>
+              <a:t>明确边界：本课目标是建立受限循环说明和失败保留记录，不要求循环在课堂内跑完。本课不是验证门；验证门在第 13 课后，统一检查实验记录与失败保留。本课为第 12 课个人工作流设计直接铺垫——第 12 课会把本课的循环骨架重新组合为服务于学生自己科研动作的工作流。</a:t>
+            </a:r>
+          </a:p>
+          <a:p xmlns:a="http://schemas.openxmlformats.org/drawingml/2006/main">
+            <a:r>
+              <a:t/>
+            </a:r>
+          </a:p>
+          <a:p xmlns:a="http://schemas.openxmlformats.org/drawingml/2006/main">
+            <a:r>
+              <a:t>学生动作：</a:t>
+            </a:r>
+          </a:p>
+          <a:p xmlns:a="http://schemas.openxmlformats.org/drawingml/2006/main">
+            <a:r>
+              <a:t>无。</a:t>
+            </a:r>
+          </a:p>
+          <a:p xmlns:a="http://schemas.openxmlformats.org/drawingml/2006/main">
+            <a:r>
+              <a:t/>
+            </a:r>
+          </a:p>
+          <a:p xmlns:a="http://schemas.openxmlformats.org/drawingml/2006/main">
+            <a:r>
+              <a:t>来源与边界：</a:t>
+            </a:r>
+          </a:p>
+          <a:p xmlns:a="http://schemas.openxmlformats.org/drawingml/2006/main">
+            <a:r>
+              <a:t>[备课规划.md](../备课规划.md) 第 11 课权威六段；[assignments.md](../../course/assignments.md) 验证门 Checkpoint 3 在第 13 课后。</a:t>
+            </a:r>
+          </a:p>
+          <a:p xmlns:a="http://schemas.openxmlformats.org/drawingml/2006/main">
+            <a:r>
+              <a:t/>
+            </a:r>
+          </a:p>
+          <a:p xmlns:a="http://schemas.openxmlformats.org/drawingml/2006/main">
+            <a:r>
+              <a:t>---</a:t>
             </a:r>
           </a:p>
           <a:p xmlns:a="http://schemas.openxmlformats.org/drawingml/2006/main">
@@ -2142,17 +3962,27 @@
           </a:p>
           <a:p xmlns:a="http://schemas.openxmlformats.org/drawingml/2006/main">
             <a:r>
-              <a:t>lessons/lesson-11/slides.md P03</a:t>
-            </a:r>
-          </a:p>
-          <a:p xmlns:a="http://schemas.openxmlformats.org/drawingml/2006/main">
-            <a:r>
-              <a:t>lessons/lesson-11/handout.md</a:t>
-            </a:r>
-          </a:p>
-          <a:p xmlns:a="http://schemas.openxmlformats.org/drawingml/2006/main">
-            <a:r>
-              <a:t>[备课规划.md](../备课规划.md) 第 11 课权威六段；[assignments.md](../../course/assignments.md) 验证门 Checkpoint 3 在第 13 课后。</a:t>
+              <a:t/>
+            </a:r>
+          </a:p>
+          <a:p xmlns:a="http://schemas.openxmlformats.org/drawingml/2006/main">
+            <a:r>
+              <a:t>- 本课 handout.md 与 slides.md</a:t>
+            </a:r>
+          </a:p>
+          <a:p xmlns:a="http://schemas.openxmlformats.org/drawingml/2006/main">
+            <a:r>
+              <a:t/>
+            </a:r>
+          </a:p>
+          <a:p xmlns:a="http://schemas.openxmlformats.org/drawingml/2006/main">
+            <a:r>
+              <a:t>- ../../course/reading-card-case.md</a:t>
+            </a:r>
+          </a:p>
+          <a:p xmlns:a="http://schemas.openxmlformats.org/drawingml/2006/main">
+            <a:r>
+              <a:t/>
             </a:r>
           </a:p>
           <a:p xmlns:a="http://schemas.openxmlformats.org/drawingml/2006/main">
@@ -2227,37 +4057,197 @@
           <a:lstStyle xmlns:a="http://schemas.openxmlformats.org/drawingml/2006/main"/>
           <a:p xmlns:a="http://schemas.openxmlformats.org/drawingml/2006/main">
             <a:r>
-              <a:t>P04｜循环五步与 Keep / Discard 分支</a:t>
-            </a:r>
-          </a:p>
-          <a:p xmlns:a="http://schemas.openxmlformats.org/drawingml/2006/main">
-            <a:r>
-              <a:t/>
-            </a:r>
-          </a:p>
-          <a:p xmlns:a="http://schemas.openxmlformats.org/drawingml/2006/main">
-            <a:r>
-              <a:t>讲述：本页讲优化循环：候选方法改动在预先隔离的开发集上比较，评价口径、预算和停止规则保持冻结。Keep / Discard 决定是否采用候选改动，不删除失败记录。第 10 页的 120 份输出仅执行已冻结配置，不沿此分支调参。</a:t>
-            </a:r>
-          </a:p>
-          <a:p xmlns:a="http://schemas.openxmlformats.org/drawingml/2006/main">
-            <a:r>
-              <a:t/>
-            </a:r>
-          </a:p>
-          <a:p xmlns:a="http://schemas.openxmlformats.org/drawingml/2006/main">
-            <a:r>
-              <a:t>学生动作：快问：你之前做实验时，假设是先写的还是结果出来后补的？只听回答。</a:t>
-            </a:r>
-          </a:p>
-          <a:p xmlns:a="http://schemas.openxmlformats.org/drawingml/2006/main">
-            <a:r>
-              <a:t/>
-            </a:r>
-          </a:p>
-          <a:p xmlns:a="http://schemas.openxmlformats.org/drawingml/2006/main">
-            <a:r>
-              <a:t>建议时间：3 分钟。</a:t>
+              <a:t>页面：P04 循环五步与 Keep / Discard 分支</a:t>
+            </a:r>
+          </a:p>
+          <a:p xmlns:a="http://schemas.openxmlformats.org/drawingml/2006/main">
+            <a:r>
+              <a:t/>
+            </a:r>
+          </a:p>
+          <a:p xmlns:a="http://schemas.openxmlformats.org/drawingml/2006/main">
+            <a:r>
+              <a:t>讲义位置：本课讲义；见逐页母稿映射表</a:t>
+            </a:r>
+          </a:p>
+          <a:p xmlns:a="http://schemas.openxmlformats.org/drawingml/2006/main">
+            <a:r>
+              <a:t/>
+            </a:r>
+          </a:p>
+          <a:p xmlns:a="http://schemas.openxmlformats.org/drawingml/2006/main">
+            <a:r>
+              <a:t>屏显核对：</a:t>
+            </a:r>
+          </a:p>
+          <a:p xmlns:a="http://schemas.openxmlformats.org/drawingml/2006/main">
+            <a:r>
+              <a:t>循环五步与 Keep / Discard 分支</a:t>
+            </a:r>
+          </a:p>
+          <a:p xmlns:a="http://schemas.openxmlformats.org/drawingml/2006/main">
+            <a:r>
+              <a:t/>
+            </a:r>
+          </a:p>
+          <a:p xmlns:a="http://schemas.openxmlformats.org/drawingml/2006/main">
+            <a:r>
+              <a:t>- 假设</a:t>
+            </a:r>
+          </a:p>
+          <a:p xmlns:a="http://schemas.openxmlformats.org/drawingml/2006/main">
+            <a:r>
+              <a:t/>
+            </a:r>
+          </a:p>
+          <a:p xmlns:a="http://schemas.openxmlformats.org/drawingml/2006/main">
+            <a:r>
+              <a:t>- 运行前写明</a:t>
+            </a:r>
+          </a:p>
+          <a:p xmlns:a="http://schemas.openxmlformats.org/drawingml/2006/main">
+            <a:r>
+              <a:t/>
+            </a:r>
+          </a:p>
+          <a:p xmlns:a="http://schemas.openxmlformats.org/drawingml/2006/main">
+            <a:r>
+              <a:t>- 运行</a:t>
+            </a:r>
+          </a:p>
+          <a:p xmlns:a="http://schemas.openxmlformats.org/drawingml/2006/main">
+            <a:r>
+              <a:t/>
+            </a:r>
+          </a:p>
+          <a:p xmlns:a="http://schemas.openxmlformats.org/drawingml/2006/main">
+            <a:r>
+              <a:t>- 冻结配置</a:t>
+            </a:r>
+          </a:p>
+          <a:p xmlns:a="http://schemas.openxmlformats.org/drawingml/2006/main">
+            <a:r>
+              <a:t/>
+            </a:r>
+          </a:p>
+          <a:p xmlns:a="http://schemas.openxmlformats.org/drawingml/2006/main">
+            <a:r>
+              <a:t>- 度量</a:t>
+            </a:r>
+          </a:p>
+          <a:p xmlns:a="http://schemas.openxmlformats.org/drawingml/2006/main">
+            <a:r>
+              <a:t/>
+            </a:r>
+          </a:p>
+          <a:p xmlns:a="http://schemas.openxmlformats.org/drawingml/2006/main">
+            <a:r>
+              <a:t>- 指标不可改</a:t>
+            </a:r>
+          </a:p>
+          <a:p xmlns:a="http://schemas.openxmlformats.org/drawingml/2006/main">
+            <a:r>
+              <a:t/>
+            </a:r>
+          </a:p>
+          <a:p xmlns:a="http://schemas.openxmlformats.org/drawingml/2006/main">
+            <a:r>
+              <a:t>- 评价</a:t>
+            </a:r>
+          </a:p>
+          <a:p xmlns:a="http://schemas.openxmlformats.org/drawingml/2006/main">
+            <a:r>
+              <a:t/>
+            </a:r>
+          </a:p>
+          <a:p xmlns:a="http://schemas.openxmlformats.org/drawingml/2006/main">
+            <a:r>
+              <a:t>- 人工判断</a:t>
+            </a:r>
+          </a:p>
+          <a:p xmlns:a="http://schemas.openxmlformats.org/drawingml/2006/main">
+            <a:r>
+              <a:t/>
+            </a:r>
+          </a:p>
+          <a:p xmlns:a="http://schemas.openxmlformats.org/drawingml/2006/main">
+            <a:r>
+              <a:t>- Keep / Discard</a:t>
+            </a:r>
+          </a:p>
+          <a:p xmlns:a="http://schemas.openxmlformats.org/drawingml/2006/main">
+            <a:r>
+              <a:t/>
+            </a:r>
+          </a:p>
+          <a:p xmlns:a="http://schemas.openxmlformats.org/drawingml/2006/main">
+            <a:r>
+              <a:t>- 回写或回退</a:t>
+            </a:r>
+          </a:p>
+          <a:p xmlns:a="http://schemas.openxmlformats.org/drawingml/2006/main">
+            <a:r>
+              <a:t/>
+            </a:r>
+          </a:p>
+          <a:p xmlns:a="http://schemas.openxmlformats.org/drawingml/2006/main">
+            <a:r>
+              <a:t>- Discard 回到稳定配置；失败日志留在账本中</a:t>
+            </a:r>
+          </a:p>
+          <a:p xmlns:a="http://schemas.openxmlformats.org/drawingml/2006/main">
+            <a:r>
+              <a:t/>
+            </a:r>
+          </a:p>
+          <a:p xmlns:a="http://schemas.openxmlformats.org/drawingml/2006/main">
+            <a:r>
+              <a:t>教师讲述：</a:t>
+            </a:r>
+          </a:p>
+          <a:p xmlns:a="http://schemas.openxmlformats.org/drawingml/2006/main">
+            <a:r>
+              <a:t>本页讲优化循环：候选方法改动在预先隔离的开发集上比较，评价口径、预算和停止规则保持冻结。Keep / Discard 决定是否采用候选改动，不删除失败记录。第 10 页的 6 份构造输出仅执行已冻结配置，不沿此分支调参。</a:t>
+            </a:r>
+          </a:p>
+          <a:p xmlns:a="http://schemas.openxmlformats.org/drawingml/2006/main">
+            <a:r>
+              <a:t/>
+            </a:r>
+          </a:p>
+          <a:p xmlns:a="http://schemas.openxmlformats.org/drawingml/2006/main">
+            <a:r>
+              <a:t>学生动作：</a:t>
+            </a:r>
+          </a:p>
+          <a:p xmlns:a="http://schemas.openxmlformats.org/drawingml/2006/main">
+            <a:r>
+              <a:t>快问：你之前做实验时，假设是先写的还是结果出来后补的？只听回答。</a:t>
+            </a:r>
+          </a:p>
+          <a:p xmlns:a="http://schemas.openxmlformats.org/drawingml/2006/main">
+            <a:r>
+              <a:t/>
+            </a:r>
+          </a:p>
+          <a:p xmlns:a="http://schemas.openxmlformats.org/drawingml/2006/main">
+            <a:r>
+              <a:t>来源与边界：</a:t>
+            </a:r>
+          </a:p>
+          <a:p xmlns:a="http://schemas.openxmlformats.org/drawingml/2006/main">
+            <a:r>
+              <a:t>handout §二·1；第 1 课 §2.7 工作流何时停止。</a:t>
+            </a:r>
+          </a:p>
+          <a:p xmlns:a="http://schemas.openxmlformats.org/drawingml/2006/main">
+            <a:r>
+              <a:t/>
+            </a:r>
+          </a:p>
+          <a:p xmlns:a="http://schemas.openxmlformats.org/drawingml/2006/main">
+            <a:r>
+              <a:t>---</a:t>
             </a:r>
           </a:p>
           <a:p xmlns:a="http://schemas.openxmlformats.org/drawingml/2006/main">
@@ -2272,17 +4262,27 @@
           </a:p>
           <a:p xmlns:a="http://schemas.openxmlformats.org/drawingml/2006/main">
             <a:r>
-              <a:t>lessons/lesson-11/slides.md P04</a:t>
-            </a:r>
-          </a:p>
-          <a:p xmlns:a="http://schemas.openxmlformats.org/drawingml/2006/main">
-            <a:r>
-              <a:t>lessons/lesson-11/handout.md</a:t>
-            </a:r>
-          </a:p>
-          <a:p xmlns:a="http://schemas.openxmlformats.org/drawingml/2006/main">
-            <a:r>
-              <a:t>handout §二·1；第 1 课 §2.7 工作流何时停止。</a:t>
+              <a:t/>
+            </a:r>
+          </a:p>
+          <a:p xmlns:a="http://schemas.openxmlformats.org/drawingml/2006/main">
+            <a:r>
+              <a:t>- 本课 handout.md 与 slides.md</a:t>
+            </a:r>
+          </a:p>
+          <a:p xmlns:a="http://schemas.openxmlformats.org/drawingml/2006/main">
+            <a:r>
+              <a:t/>
+            </a:r>
+          </a:p>
+          <a:p xmlns:a="http://schemas.openxmlformats.org/drawingml/2006/main">
+            <a:r>
+              <a:t>- ../../course/reading-card-case.md</a:t>
+            </a:r>
+          </a:p>
+          <a:p xmlns:a="http://schemas.openxmlformats.org/drawingml/2006/main">
+            <a:r>
+              <a:t/>
             </a:r>
           </a:p>
           <a:p xmlns:a="http://schemas.openxmlformats.org/drawingml/2006/main">
@@ -2357,37 +4357,187 @@
           <a:lstStyle xmlns:a="http://schemas.openxmlformats.org/drawingml/2006/main"/>
           <a:p xmlns:a="http://schemas.openxmlformats.org/drawingml/2006/main">
             <a:r>
-              <a:t>P05｜适用边界取决于重复性与判断风险</a:t>
-            </a:r>
-          </a:p>
-          <a:p xmlns:a="http://schemas.openxmlformats.org/drawingml/2006/main">
-            <a:r>
-              <a:t/>
-            </a:r>
-          </a:p>
-          <a:p xmlns:a="http://schemas.openxmlformats.org/drawingml/2006/main">
-            <a:r>
-              <a:t>讲述：区分可固定的评价协议与不可交给执行器的判断。指标可以依赖人工建立并复核的基准和盲评，并不因为需要专家标注就排除自动化。研究问题仍在形成、评价持续变化或高风险外部动作应保留人工主导。</a:t>
-            </a:r>
-          </a:p>
-          <a:p xmlns:a="http://schemas.openxmlformats.org/drawingml/2006/main">
-            <a:r>
-              <a:t/>
-            </a:r>
-          </a:p>
-          <a:p xmlns:a="http://schemas.openxmlformats.org/drawingml/2006/main">
-            <a:r>
-              <a:t>学生动作：追问：判断"Agent 自动判断哪篇论文值得深入研究"是否适合改写为循环？为什么？</a:t>
-            </a:r>
-          </a:p>
-          <a:p xmlns:a="http://schemas.openxmlformats.org/drawingml/2006/main">
-            <a:r>
-              <a:t/>
-            </a:r>
-          </a:p>
-          <a:p xmlns:a="http://schemas.openxmlformats.org/drawingml/2006/main">
-            <a:r>
-              <a:t>建议时间：3 分钟。</a:t>
+              <a:t>页面：P05 适用边界取决于重复性与判断风险</a:t>
+            </a:r>
+          </a:p>
+          <a:p xmlns:a="http://schemas.openxmlformats.org/drawingml/2006/main">
+            <a:r>
+              <a:t/>
+            </a:r>
+          </a:p>
+          <a:p xmlns:a="http://schemas.openxmlformats.org/drawingml/2006/main">
+            <a:r>
+              <a:t>讲义位置：本课讲义；见逐页母稿映射表</a:t>
+            </a:r>
+          </a:p>
+          <a:p xmlns:a="http://schemas.openxmlformats.org/drawingml/2006/main">
+            <a:r>
+              <a:t/>
+            </a:r>
+          </a:p>
+          <a:p xmlns:a="http://schemas.openxmlformats.org/drawingml/2006/main">
+            <a:r>
+              <a:t>屏显核对：</a:t>
+            </a:r>
+          </a:p>
+          <a:p xmlns:a="http://schemas.openxmlformats.org/drawingml/2006/main">
+            <a:r>
+              <a:t>适用边界取决于重复性与判断风险</a:t>
+            </a:r>
+          </a:p>
+          <a:p xmlns:a="http://schemas.openxmlformats.org/drawingml/2006/main">
+            <a:r>
+              <a:t/>
+            </a:r>
+          </a:p>
+          <a:p xmlns:a="http://schemas.openxmlformats.org/drawingml/2006/main">
+            <a:r>
+              <a:t>- 适合受限循环</a:t>
+            </a:r>
+          </a:p>
+          <a:p xmlns:a="http://schemas.openxmlformats.org/drawingml/2006/main">
+            <a:r>
+              <a:t/>
+            </a:r>
+          </a:p>
+          <a:p xmlns:a="http://schemas.openxmlformats.org/drawingml/2006/main">
+            <a:r>
+              <a:t>- 保留人工主导</a:t>
+            </a:r>
+          </a:p>
+          <a:p xmlns:a="http://schemas.openxmlformats.org/drawingml/2006/main">
+            <a:r>
+              <a:t/>
+            </a:r>
+          </a:p>
+          <a:p xmlns:a="http://schemas.openxmlformats.org/drawingml/2006/main">
+            <a:r>
+              <a:t>- 输入输出明确</a:t>
+            </a:r>
+          </a:p>
+          <a:p xmlns:a="http://schemas.openxmlformats.org/drawingml/2006/main">
+            <a:r>
+              <a:t/>
+            </a:r>
+          </a:p>
+          <a:p xmlns:a="http://schemas.openxmlformats.org/drawingml/2006/main">
+            <a:r>
+              <a:t>- 评价标准可预先固定</a:t>
+            </a:r>
+          </a:p>
+          <a:p xmlns:a="http://schemas.openxmlformats.org/drawingml/2006/main">
+            <a:r>
+              <a:t/>
+            </a:r>
+          </a:p>
+          <a:p xmlns:a="http://schemas.openxmlformats.org/drawingml/2006/main">
+            <a:r>
+              <a:t>- 失败可检测并回退</a:t>
+            </a:r>
+          </a:p>
+          <a:p xmlns:a="http://schemas.openxmlformats.org/drawingml/2006/main">
+            <a:r>
+              <a:t/>
+            </a:r>
+          </a:p>
+          <a:p xmlns:a="http://schemas.openxmlformats.org/drawingml/2006/main">
+            <a:r>
+              <a:t>- 重复执行有价值</a:t>
+            </a:r>
+          </a:p>
+          <a:p xmlns:a="http://schemas.openxmlformats.org/drawingml/2006/main">
+            <a:r>
+              <a:t/>
+            </a:r>
+          </a:p>
+          <a:p xmlns:a="http://schemas.openxmlformats.org/drawingml/2006/main">
+            <a:r>
+              <a:t>- 研究问题仍在形成</a:t>
+            </a:r>
+          </a:p>
+          <a:p xmlns:a="http://schemas.openxmlformats.org/drawingml/2006/main">
+            <a:r>
+              <a:t/>
+            </a:r>
+          </a:p>
+          <a:p xmlns:a="http://schemas.openxmlformats.org/drawingml/2006/main">
+            <a:r>
+              <a:t>- 评价协议需要不断改写</a:t>
+            </a:r>
+          </a:p>
+          <a:p xmlns:a="http://schemas.openxmlformats.org/drawingml/2006/main">
+            <a:r>
+              <a:t/>
+            </a:r>
+          </a:p>
+          <a:p xmlns:a="http://schemas.openxmlformats.org/drawingml/2006/main">
+            <a:r>
+              <a:t>- 涉及高风险外部动作</a:t>
+            </a:r>
+          </a:p>
+          <a:p xmlns:a="http://schemas.openxmlformats.org/drawingml/2006/main">
+            <a:r>
+              <a:t/>
+            </a:r>
+          </a:p>
+          <a:p xmlns:a="http://schemas.openxmlformats.org/drawingml/2006/main">
+            <a:r>
+              <a:t>- 无法保留失败与审计</a:t>
+            </a:r>
+          </a:p>
+          <a:p xmlns:a="http://schemas.openxmlformats.org/drawingml/2006/main">
+            <a:r>
+              <a:t/>
+            </a:r>
+          </a:p>
+          <a:p xmlns:a="http://schemas.openxmlformats.org/drawingml/2006/main">
+            <a:r>
+              <a:t>教师讲述：</a:t>
+            </a:r>
+          </a:p>
+          <a:p xmlns:a="http://schemas.openxmlformats.org/drawingml/2006/main">
+            <a:r>
+              <a:t>区分可固定的评价协议与不可交给执行器的判断。指标可以依赖人工建立并复核的基准和盲评，并不因为需要专家标注就排除自动化。研究问题仍在形成、评价持续变化或高风险外部动作应保留人工主导。</a:t>
+            </a:r>
+          </a:p>
+          <a:p xmlns:a="http://schemas.openxmlformats.org/drawingml/2006/main">
+            <a:r>
+              <a:t/>
+            </a:r>
+          </a:p>
+          <a:p xmlns:a="http://schemas.openxmlformats.org/drawingml/2006/main">
+            <a:r>
+              <a:t>学生动作：</a:t>
+            </a:r>
+          </a:p>
+          <a:p xmlns:a="http://schemas.openxmlformats.org/drawingml/2006/main">
+            <a:r>
+              <a:t>追问：判断"Agent 自动判断哪篇论文值得深入研究"是否适合改写为循环？为什么？</a:t>
+            </a:r>
+          </a:p>
+          <a:p xmlns:a="http://schemas.openxmlformats.org/drawingml/2006/main">
+            <a:r>
+              <a:t/>
+            </a:r>
+          </a:p>
+          <a:p xmlns:a="http://schemas.openxmlformats.org/drawingml/2006/main">
+            <a:r>
+              <a:t>来源与边界：</a:t>
+            </a:r>
+          </a:p>
+          <a:p xmlns:a="http://schemas.openxmlformats.org/drawingml/2006/main">
+            <a:r>
+              <a:t>handout §二·2-3；Sandve et al. 2013（可复现追踪链）。</a:t>
+            </a:r>
+          </a:p>
+          <a:p xmlns:a="http://schemas.openxmlformats.org/drawingml/2006/main">
+            <a:r>
+              <a:t/>
+            </a:r>
+          </a:p>
+          <a:p xmlns:a="http://schemas.openxmlformats.org/drawingml/2006/main">
+            <a:r>
+              <a:t>---</a:t>
             </a:r>
           </a:p>
           <a:p xmlns:a="http://schemas.openxmlformats.org/drawingml/2006/main">
@@ -2402,17 +4552,27 @@
           </a:p>
           <a:p xmlns:a="http://schemas.openxmlformats.org/drawingml/2006/main">
             <a:r>
-              <a:t>lessons/lesson-11/slides.md P05</a:t>
-            </a:r>
-          </a:p>
-          <a:p xmlns:a="http://schemas.openxmlformats.org/drawingml/2006/main">
-            <a:r>
-              <a:t>lessons/lesson-11/handout.md</a:t>
-            </a:r>
-          </a:p>
-          <a:p xmlns:a="http://schemas.openxmlformats.org/drawingml/2006/main">
-            <a:r>
-              <a:t>handout §二·2-3；Sandve et al. 2013（可复现追踪链）。</a:t>
+              <a:t/>
+            </a:r>
+          </a:p>
+          <a:p xmlns:a="http://schemas.openxmlformats.org/drawingml/2006/main">
+            <a:r>
+              <a:t>- 本课 handout.md 与 slides.md</a:t>
+            </a:r>
+          </a:p>
+          <a:p xmlns:a="http://schemas.openxmlformats.org/drawingml/2006/main">
+            <a:r>
+              <a:t/>
+            </a:r>
+          </a:p>
+          <a:p xmlns:a="http://schemas.openxmlformats.org/drawingml/2006/main">
+            <a:r>
+              <a:t>- ../../course/reading-card-case.md</a:t>
+            </a:r>
+          </a:p>
+          <a:p xmlns:a="http://schemas.openxmlformats.org/drawingml/2006/main">
+            <a:r>
+              <a:t/>
             </a:r>
           </a:p>
           <a:p xmlns:a="http://schemas.openxmlformats.org/drawingml/2006/main">
@@ -2487,37 +4647,197 @@
           <a:lstStyle xmlns:a="http://schemas.openxmlformats.org/drawingml/2006/main"/>
           <a:p xmlns:a="http://schemas.openxmlformats.org/drawingml/2006/main">
             <a:r>
-              <a:t>P06｜指标定义在循环启动前冻结</a:t>
-            </a:r>
-          </a:p>
-          <a:p xmlns:a="http://schemas.openxmlformats.org/drawingml/2006/main">
-            <a:r>
-              <a:t/>
-            </a:r>
-          </a:p>
-          <a:p xmlns:a="http://schemas.openxmlformats.org/drawingml/2006/main">
-            <a:r>
-              <a:t>讲述：固定指标不是"用什么指标"，而是"这个指标怎么算出来，且不可被工作流自身修改"。三个失败模式都是评价协议漂移的常见表现。判断指标是否被篡改：循环运行前后，指标定义文件、rubric 版本号、数据划分是否一致。任何不一致都应触发循环停止并人工审核。</a:t>
-            </a:r>
-          </a:p>
-          <a:p xmlns:a="http://schemas.openxmlformats.org/drawingml/2006/main">
-            <a:r>
-              <a:t/>
-            </a:r>
-          </a:p>
-          <a:p xmlns:a="http://schemas.openxmlformats.org/drawingml/2006/main">
-            <a:r>
-              <a:t>学生动作：无。</a:t>
-            </a:r>
-          </a:p>
-          <a:p xmlns:a="http://schemas.openxmlformats.org/drawingml/2006/main">
-            <a:r>
-              <a:t/>
-            </a:r>
-          </a:p>
-          <a:p xmlns:a="http://schemas.openxmlformats.org/drawingml/2006/main">
-            <a:r>
-              <a:t>建议时间：2 分钟。</a:t>
+              <a:t>页面：P06 指标定义在循环启动前冻结</a:t>
+            </a:r>
+          </a:p>
+          <a:p xmlns:a="http://schemas.openxmlformats.org/drawingml/2006/main">
+            <a:r>
+              <a:t/>
+            </a:r>
+          </a:p>
+          <a:p xmlns:a="http://schemas.openxmlformats.org/drawingml/2006/main">
+            <a:r>
+              <a:t>讲义位置：本课讲义；见逐页母稿映射表</a:t>
+            </a:r>
+          </a:p>
+          <a:p xmlns:a="http://schemas.openxmlformats.org/drawingml/2006/main">
+            <a:r>
+              <a:t/>
+            </a:r>
+          </a:p>
+          <a:p xmlns:a="http://schemas.openxmlformats.org/drawingml/2006/main">
+            <a:r>
+              <a:t>屏显核对：</a:t>
+            </a:r>
+          </a:p>
+          <a:p xmlns:a="http://schemas.openxmlformats.org/drawingml/2006/main">
+            <a:r>
+              <a:t>指标定义在循环启动前冻结</a:t>
+            </a:r>
+          </a:p>
+          <a:p xmlns:a="http://schemas.openxmlformats.org/drawingml/2006/main">
+            <a:r>
+              <a:t/>
+            </a:r>
+          </a:p>
+          <a:p xmlns:a="http://schemas.openxmlformats.org/drawingml/2006/main">
+            <a:r>
+              <a:t>课程虚构教学工件</a:t>
+            </a:r>
+          </a:p>
+          <a:p xmlns:a="http://schemas.openxmlformats.org/drawingml/2006/main">
+            <a:r>
+              <a:t/>
+            </a:r>
+          </a:p>
+          <a:p xmlns:a="http://schemas.openxmlformats.org/drawingml/2006/main">
+            <a:r>
+              <a:t>- metric.yaml｜v1.2</a:t>
+            </a:r>
+          </a:p>
+          <a:p xmlns:a="http://schemas.openxmlformats.org/drawingml/2006/main">
+            <a:r>
+              <a:t/>
+            </a:r>
+          </a:p>
+          <a:p xmlns:a="http://schemas.openxmlformats.org/drawingml/2006/main">
+            <a:r>
+              <a:t>- name: qualifying_condition_omission_rate</a:t>
+            </a:r>
+          </a:p>
+          <a:p xmlns:a="http://schemas.openxmlformats.org/drawingml/2006/main">
+            <a:r>
+              <a:t/>
+            </a:r>
+          </a:p>
+          <a:p xmlns:a="http://schemas.openxmlformats.org/drawingml/2006/main">
+            <a:r>
+              <a:t>- numerator: omitted_gold_conditions</a:t>
+            </a:r>
+          </a:p>
+          <a:p xmlns:a="http://schemas.openxmlformats.org/drawingml/2006/main">
+            <a:r>
+              <a:t/>
+            </a:r>
+          </a:p>
+          <a:p xmlns:a="http://schemas.openxmlformats.org/drawingml/2006/main">
+            <a:r>
+              <a:t>- denominator: gold_conditions</a:t>
+            </a:r>
+          </a:p>
+          <a:p xmlns:a="http://schemas.openxmlformats.org/drawingml/2006/main">
+            <a:r>
+              <a:t/>
+            </a:r>
+          </a:p>
+          <a:p xmlns:a="http://schemas.openxmlformats.org/drawingml/2006/main">
+            <a:r>
+              <a:t>- missing_output: count_as_omission</a:t>
+            </a:r>
+          </a:p>
+          <a:p xmlns:a="http://schemas.openxmlformats.org/drawingml/2006/main">
+            <a:r>
+              <a:t/>
+            </a:r>
+          </a:p>
+          <a:p xmlns:a="http://schemas.openxmlformats.org/drawingml/2006/main">
+            <a:r>
+              <a:t>- rubric: human_gold_v1.2</a:t>
+            </a:r>
+          </a:p>
+          <a:p xmlns:a="http://schemas.openxmlformats.org/drawingml/2006/main">
+            <a:r>
+              <a:t/>
+            </a:r>
+          </a:p>
+          <a:p xmlns:a="http://schemas.openxmlformats.org/drawingml/2006/main">
+            <a:r>
+              <a:t>- 运行期间不可写</a:t>
+            </a:r>
+          </a:p>
+          <a:p xmlns:a="http://schemas.openxmlformats.org/drawingml/2006/main">
+            <a:r>
+              <a:t/>
+            </a:r>
+          </a:p>
+          <a:p xmlns:a="http://schemas.openxmlformats.org/drawingml/2006/main">
+            <a:r>
+              <a:t>- × 不能换更容易的指标</a:t>
+            </a:r>
+          </a:p>
+          <a:p xmlns:a="http://schemas.openxmlformats.org/drawingml/2006/main">
+            <a:r>
+              <a:t/>
+            </a:r>
+          </a:p>
+          <a:p xmlns:a="http://schemas.openxmlformats.org/drawingml/2006/main">
+            <a:r>
+              <a:t>- × 不能删除失败样本</a:t>
+            </a:r>
+          </a:p>
+          <a:p xmlns:a="http://schemas.openxmlformats.org/drawingml/2006/main">
+            <a:r>
+              <a:t/>
+            </a:r>
+          </a:p>
+          <a:p xmlns:a="http://schemas.openxmlformats.org/drawingml/2006/main">
+            <a:r>
+              <a:t>- × 不能改变人工基准</a:t>
+            </a:r>
+          </a:p>
+          <a:p xmlns:a="http://schemas.openxmlformats.org/drawingml/2006/main">
+            <a:r>
+              <a:t/>
+            </a:r>
+          </a:p>
+          <a:p xmlns:a="http://schemas.openxmlformats.org/drawingml/2006/main">
+            <a:r>
+              <a:t>教师讲述：</a:t>
+            </a:r>
+          </a:p>
+          <a:p xmlns:a="http://schemas.openxmlformats.org/drawingml/2006/main">
+            <a:r>
+              <a:t>固定指标不是"用什么指标"，而是"这个指标怎么算出来，且不可被工作流自身修改"。三个失败模式都是评价协议漂移的常见表现。判断指标是否被篡改：循环运行前后，指标定义文件、rubric 版本号、数据划分是否一致。任何不一致都应触发循环停止并人工审核。</a:t>
+            </a:r>
+          </a:p>
+          <a:p xmlns:a="http://schemas.openxmlformats.org/drawingml/2006/main">
+            <a:r>
+              <a:t/>
+            </a:r>
+          </a:p>
+          <a:p xmlns:a="http://schemas.openxmlformats.org/drawingml/2006/main">
+            <a:r>
+              <a:t>学生动作：</a:t>
+            </a:r>
+          </a:p>
+          <a:p xmlns:a="http://schemas.openxmlformats.org/drawingml/2006/main">
+            <a:r>
+              <a:t>无。</a:t>
+            </a:r>
+          </a:p>
+          <a:p xmlns:a="http://schemas.openxmlformats.org/drawingml/2006/main">
+            <a:r>
+              <a:t/>
+            </a:r>
+          </a:p>
+          <a:p xmlns:a="http://schemas.openxmlformats.org/drawingml/2006/main">
+            <a:r>
+              <a:t>来源与边界：</a:t>
+            </a:r>
+          </a:p>
+          <a:p xmlns:a="http://schemas.openxmlformats.org/drawingml/2006/main">
+            <a:r>
+              <a:t>handout §三·1；第 9 课 §三·3 度量标准与标注协议。</a:t>
+            </a:r>
+          </a:p>
+          <a:p xmlns:a="http://schemas.openxmlformats.org/drawingml/2006/main">
+            <a:r>
+              <a:t/>
+            </a:r>
+          </a:p>
+          <a:p xmlns:a="http://schemas.openxmlformats.org/drawingml/2006/main">
+            <a:r>
+              <a:t>---</a:t>
             </a:r>
           </a:p>
           <a:p xmlns:a="http://schemas.openxmlformats.org/drawingml/2006/main">
@@ -2532,17 +4852,27 @@
           </a:p>
           <a:p xmlns:a="http://schemas.openxmlformats.org/drawingml/2006/main">
             <a:r>
-              <a:t>lessons/lesson-11/slides.md P06</a:t>
-            </a:r>
-          </a:p>
-          <a:p xmlns:a="http://schemas.openxmlformats.org/drawingml/2006/main">
-            <a:r>
-              <a:t>lessons/lesson-11/handout.md</a:t>
-            </a:r>
-          </a:p>
-          <a:p xmlns:a="http://schemas.openxmlformats.org/drawingml/2006/main">
-            <a:r>
-              <a:t>handout §三·1；第 9 课 §三·3 度量标准与标注协议。</a:t>
+              <a:t/>
+            </a:r>
+          </a:p>
+          <a:p xmlns:a="http://schemas.openxmlformats.org/drawingml/2006/main">
+            <a:r>
+              <a:t>- 本课 handout.md 与 slides.md</a:t>
+            </a:r>
+          </a:p>
+          <a:p xmlns:a="http://schemas.openxmlformats.org/drawingml/2006/main">
+            <a:r>
+              <a:t/>
+            </a:r>
+          </a:p>
+          <a:p xmlns:a="http://schemas.openxmlformats.org/drawingml/2006/main">
+            <a:r>
+              <a:t>- ../../course/reading-card-case.md</a:t>
+            </a:r>
+          </a:p>
+          <a:p xmlns:a="http://schemas.openxmlformats.org/drawingml/2006/main">
+            <a:r>
+              <a:t/>
             </a:r>
           </a:p>
           <a:p xmlns:a="http://schemas.openxmlformats.org/drawingml/2006/main">
@@ -2617,37 +4947,197 @@
           <a:lstStyle xmlns:a="http://schemas.openxmlformats.org/drawingml/2006/main"/>
           <a:p xmlns:a="http://schemas.openxmlformats.org/drawingml/2006/main">
             <a:r>
-              <a:t>P07｜预算与停止条件写进运行序列</a:t>
-            </a:r>
-          </a:p>
-          <a:p xmlns:a="http://schemas.openxmlformats.org/drawingml/2006/main">
-            <a:r>
-              <a:t/>
-            </a:r>
-          </a:p>
-          <a:p xmlns:a="http://schemas.openxmlformats.org/drawingml/2006/main">
-            <a:r>
-              <a:t>讲述：预算是预先写明的硬上限，而非"大概要花多久"。停止条件在第 9 课是"运行次数与停止规则"，本课扩展为三类触发器。协议性停止指循环本身出了问题（数据污染、配置错误、指标被修改），与结果是否有利无关。禁止的停止是"因为结果不利就停、因为结果有利就停"——这构成隐性 p-hacking。</a:t>
-            </a:r>
-          </a:p>
-          <a:p xmlns:a="http://schemas.openxmlformats.org/drawingml/2006/main">
-            <a:r>
-              <a:t/>
-            </a:r>
-          </a:p>
-          <a:p xmlns:a="http://schemas.openxmlformats.org/drawingml/2006/main">
-            <a:r>
-              <a:t>学生动作：追问：你的循环如果"跑 100 次都没出现显著结果"，应该停还是继续？为什么？</a:t>
-            </a:r>
-          </a:p>
-          <a:p xmlns:a="http://schemas.openxmlformats.org/drawingml/2006/main">
-            <a:r>
-              <a:t/>
-            </a:r>
-          </a:p>
-          <a:p xmlns:a="http://schemas.openxmlformats.org/drawingml/2006/main">
-            <a:r>
-              <a:t>建议时间：3 分钟。</a:t>
+              <a:t>页面：P07 预算与停止条件写进运行序列</a:t>
+            </a:r>
+          </a:p>
+          <a:p xmlns:a="http://schemas.openxmlformats.org/drawingml/2006/main">
+            <a:r>
+              <a:t/>
+            </a:r>
+          </a:p>
+          <a:p xmlns:a="http://schemas.openxmlformats.org/drawingml/2006/main">
+            <a:r>
+              <a:t>讲义位置：本课讲义；见逐页母稿映射表</a:t>
+            </a:r>
+          </a:p>
+          <a:p xmlns:a="http://schemas.openxmlformats.org/drawingml/2006/main">
+            <a:r>
+              <a:t/>
+            </a:r>
+          </a:p>
+          <a:p xmlns:a="http://schemas.openxmlformats.org/drawingml/2006/main">
+            <a:r>
+              <a:t>屏显核对：</a:t>
+            </a:r>
+          </a:p>
+          <a:p xmlns:a="http://schemas.openxmlformats.org/drawingml/2006/main">
+            <a:r>
+              <a:t>预算与停止条件写进运行序列</a:t>
+            </a:r>
+          </a:p>
+          <a:p xmlns:a="http://schemas.openxmlformats.org/drawingml/2006/main">
+            <a:r>
+              <a:t/>
+            </a:r>
+          </a:p>
+          <a:p xmlns:a="http://schemas.openxmlformats.org/drawingml/2006/main">
+            <a:r>
+              <a:t>- 启动</a:t>
+            </a:r>
+          </a:p>
+          <a:p xmlns:a="http://schemas.openxmlformats.org/drawingml/2006/main">
+            <a:r>
+              <a:t/>
+            </a:r>
+          </a:p>
+          <a:p xmlns:a="http://schemas.openxmlformats.org/drawingml/2006/main">
+            <a:r>
+              <a:t>- 冻结承诺</a:t>
+            </a:r>
+          </a:p>
+          <a:p xmlns:a="http://schemas.openxmlformats.org/drawingml/2006/main">
+            <a:r>
+              <a:t/>
+            </a:r>
+          </a:p>
+          <a:p xmlns:a="http://schemas.openxmlformats.org/drawingml/2006/main">
+            <a:r>
+              <a:t>- 预算 1/3</a:t>
+            </a:r>
+          </a:p>
+          <a:p xmlns:a="http://schemas.openxmlformats.org/drawingml/2006/main">
+            <a:r>
+              <a:t/>
+            </a:r>
+          </a:p>
+          <a:p xmlns:a="http://schemas.openxmlformats.org/drawingml/2006/main">
+            <a:r>
+              <a:t>- 调用 / token</a:t>
+            </a:r>
+          </a:p>
+          <a:p xmlns:a="http://schemas.openxmlformats.org/drawingml/2006/main">
+            <a:r>
+              <a:t/>
+            </a:r>
+          </a:p>
+          <a:p xmlns:a="http://schemas.openxmlformats.org/drawingml/2006/main">
+            <a:r>
+              <a:t>- 预算 2/3</a:t>
+            </a:r>
+          </a:p>
+          <a:p xmlns:a="http://schemas.openxmlformats.org/drawingml/2006/main">
+            <a:r>
+              <a:t/>
+            </a:r>
+          </a:p>
+          <a:p xmlns:a="http://schemas.openxmlformats.org/drawingml/2006/main">
+            <a:r>
+              <a:t>- 时间 / 运行数</a:t>
+            </a:r>
+          </a:p>
+          <a:p xmlns:a="http://schemas.openxmlformats.org/drawingml/2006/main">
+            <a:r>
+              <a:t/>
+            </a:r>
+          </a:p>
+          <a:p xmlns:a="http://schemas.openxmlformats.org/drawingml/2006/main">
+            <a:r>
+              <a:t>- 正常停止</a:t>
+            </a:r>
+          </a:p>
+          <a:p xmlns:a="http://schemas.openxmlformats.org/drawingml/2006/main">
+            <a:r>
+              <a:t/>
+            </a:r>
+          </a:p>
+          <a:p xmlns:a="http://schemas.openxmlformats.org/drawingml/2006/main">
+            <a:r>
+              <a:t>- 预算耗尽或队列完成</a:t>
+            </a:r>
+          </a:p>
+          <a:p xmlns:a="http://schemas.openxmlformats.org/drawingml/2006/main">
+            <a:r>
+              <a:t/>
+            </a:r>
+          </a:p>
+          <a:p xmlns:a="http://schemas.openxmlformats.org/drawingml/2006/main">
+            <a:r>
+              <a:t>- 协议性停止</a:t>
+            </a:r>
+          </a:p>
+          <a:p xmlns:a="http://schemas.openxmlformats.org/drawingml/2006/main">
+            <a:r>
+              <a:t/>
+            </a:r>
+          </a:p>
+          <a:p xmlns:a="http://schemas.openxmlformats.org/drawingml/2006/main">
+            <a:r>
+              <a:t>- 指标漂移 / 越权 / 数据异常</a:t>
+            </a:r>
+          </a:p>
+          <a:p xmlns:a="http://schemas.openxmlformats.org/drawingml/2006/main">
+            <a:r>
+              <a:t/>
+            </a:r>
+          </a:p>
+          <a:p xmlns:a="http://schemas.openxmlformats.org/drawingml/2006/main">
+            <a:r>
+              <a:t>- 禁止按结果好坏停止；越权、协议变更或删日志须立即停并记录</a:t>
+            </a:r>
+          </a:p>
+          <a:p xmlns:a="http://schemas.openxmlformats.org/drawingml/2006/main">
+            <a:r>
+              <a:t/>
+            </a:r>
+          </a:p>
+          <a:p xmlns:a="http://schemas.openxmlformats.org/drawingml/2006/main">
+            <a:r>
+              <a:t>教师讲述：</a:t>
+            </a:r>
+          </a:p>
+          <a:p xmlns:a="http://schemas.openxmlformats.org/drawingml/2006/main">
+            <a:r>
+              <a:t>预算是预先写明的硬上限，而非"大概要花多久"。停止条件在第 9 课是"运行次数与停止规则"，本课扩展为三类触发器。协议性停止指循环本身出了问题（数据污染、配置错误、指标被修改），与结果是否有利无关。禁止的停止是"因为结果不利就停、因为结果有利就停"——这构成隐性 p-hacking。</a:t>
+            </a:r>
+          </a:p>
+          <a:p xmlns:a="http://schemas.openxmlformats.org/drawingml/2006/main">
+            <a:r>
+              <a:t/>
+            </a:r>
+          </a:p>
+          <a:p xmlns:a="http://schemas.openxmlformats.org/drawingml/2006/main">
+            <a:r>
+              <a:t>学生动作：</a:t>
+            </a:r>
+          </a:p>
+          <a:p xmlns:a="http://schemas.openxmlformats.org/drawingml/2006/main">
+            <a:r>
+              <a:t>追问：你的循环如果"跑 100 次都没出现显著结果"，应该停还是继续？为什么？</a:t>
+            </a:r>
+          </a:p>
+          <a:p xmlns:a="http://schemas.openxmlformats.org/drawingml/2006/main">
+            <a:r>
+              <a:t/>
+            </a:r>
+          </a:p>
+          <a:p xmlns:a="http://schemas.openxmlformats.org/drawingml/2006/main">
+            <a:r>
+              <a:t>来源与边界：</a:t>
+            </a:r>
+          </a:p>
+          <a:p xmlns:a="http://schemas.openxmlformats.org/drawingml/2006/main">
+            <a:r>
+              <a:t>handout §三·2-3；第 9 课 §三·2 停止条件；第 1 课 §2.7 工作流何时停止。</a:t>
+            </a:r>
+          </a:p>
+          <a:p xmlns:a="http://schemas.openxmlformats.org/drawingml/2006/main">
+            <a:r>
+              <a:t/>
+            </a:r>
+          </a:p>
+          <a:p xmlns:a="http://schemas.openxmlformats.org/drawingml/2006/main">
+            <a:r>
+              <a:t>---</a:t>
             </a:r>
           </a:p>
           <a:p xmlns:a="http://schemas.openxmlformats.org/drawingml/2006/main">
@@ -2662,17 +5152,27 @@
           </a:p>
           <a:p xmlns:a="http://schemas.openxmlformats.org/drawingml/2006/main">
             <a:r>
-              <a:t>lessons/lesson-11/slides.md P07</a:t>
-            </a:r>
-          </a:p>
-          <a:p xmlns:a="http://schemas.openxmlformats.org/drawingml/2006/main">
-            <a:r>
-              <a:t>lessons/lesson-11/handout.md</a:t>
-            </a:r>
-          </a:p>
-          <a:p xmlns:a="http://schemas.openxmlformats.org/drawingml/2006/main">
-            <a:r>
-              <a:t>handout §三·2-3；第 9 课 §三·2 停止条件；第 1 课 §2.7 工作流何时停止。</a:t>
+              <a:t/>
+            </a:r>
+          </a:p>
+          <a:p xmlns:a="http://schemas.openxmlformats.org/drawingml/2006/main">
+            <a:r>
+              <a:t>- 本课 handout.md 与 slides.md</a:t>
+            </a:r>
+          </a:p>
+          <a:p xmlns:a="http://schemas.openxmlformats.org/drawingml/2006/main">
+            <a:r>
+              <a:t/>
+            </a:r>
+          </a:p>
+          <a:p xmlns:a="http://schemas.openxmlformats.org/drawingml/2006/main">
+            <a:r>
+              <a:t>- ../../course/reading-card-case.md</a:t>
+            </a:r>
+          </a:p>
+          <a:p xmlns:a="http://schemas.openxmlformats.org/drawingml/2006/main">
+            <a:r>
+              <a:t/>
             </a:r>
           </a:p>
           <a:p xmlns:a="http://schemas.openxmlformats.org/drawingml/2006/main">
@@ -2747,37 +5247,177 @@
           <a:lstStyle xmlns:a="http://schemas.openxmlformats.org/drawingml/2006/main"/>
           <a:p xmlns:a="http://schemas.openxmlformats.org/drawingml/2006/main">
             <a:r>
-              <a:t>P08｜回退到稳定配置，同时保留失败</a:t>
-            </a:r>
-          </a:p>
-          <a:p xmlns:a="http://schemas.openxmlformats.org/drawingml/2006/main">
-            <a:r>
-              <a:t/>
-            </a:r>
-          </a:p>
-          <a:p xmlns:a="http://schemas.openxmlformats.org/drawingml/2006/main">
-            <a:r>
-              <a:t>讲述：回退机制是循环在失败或停止后的处理路径。关键区分：回退到"最近一次通过人工审核的配置"，不是"上一次看起来不错的配置"——这两者经常被混淆。回退后失败迭代必须保留，并触发研究判断的修订。回退默认需要人工确认，因为回退通常意味着循环未按预期推进。</a:t>
-            </a:r>
-          </a:p>
-          <a:p xmlns:a="http://schemas.openxmlformats.org/drawingml/2006/main">
-            <a:r>
-              <a:t/>
-            </a:r>
-          </a:p>
-          <a:p xmlns:a="http://schemas.openxmlformats.org/drawingml/2006/main">
-            <a:r>
-              <a:t>学生动作：无。</a:t>
-            </a:r>
-          </a:p>
-          <a:p xmlns:a="http://schemas.openxmlformats.org/drawingml/2006/main">
-            <a:r>
-              <a:t/>
-            </a:r>
-          </a:p>
-          <a:p xmlns:a="http://schemas.openxmlformats.org/drawingml/2006/main">
-            <a:r>
-              <a:t>建议时间：2 分钟。</a:t>
+              <a:t>页面：P08 回退到稳定配置，同时保留失败</a:t>
+            </a:r>
+          </a:p>
+          <a:p xmlns:a="http://schemas.openxmlformats.org/drawingml/2006/main">
+            <a:r>
+              <a:t/>
+            </a:r>
+          </a:p>
+          <a:p xmlns:a="http://schemas.openxmlformats.org/drawingml/2006/main">
+            <a:r>
+              <a:t>讲义位置：本课讲义；见逐页母稿映射表</a:t>
+            </a:r>
+          </a:p>
+          <a:p xmlns:a="http://schemas.openxmlformats.org/drawingml/2006/main">
+            <a:r>
+              <a:t/>
+            </a:r>
+          </a:p>
+          <a:p xmlns:a="http://schemas.openxmlformats.org/drawingml/2006/main">
+            <a:r>
+              <a:t>屏显核对：</a:t>
+            </a:r>
+          </a:p>
+          <a:p xmlns:a="http://schemas.openxmlformats.org/drawingml/2006/main">
+            <a:r>
+              <a:t>回退到稳定配置，同时保留失败</a:t>
+            </a:r>
+          </a:p>
+          <a:p xmlns:a="http://schemas.openxmlformats.org/drawingml/2006/main">
+            <a:r>
+              <a:t/>
+            </a:r>
+          </a:p>
+          <a:p xmlns:a="http://schemas.openxmlformats.org/drawingml/2006/main">
+            <a:r>
+              <a:t>- stable-config</a:t>
+            </a:r>
+          </a:p>
+          <a:p xmlns:a="http://schemas.openxmlformats.org/drawingml/2006/main">
+            <a:r>
+              <a:t/>
+            </a:r>
+          </a:p>
+          <a:p xmlns:a="http://schemas.openxmlformats.org/drawingml/2006/main">
+            <a:r>
+              <a:t>- 冻结基线</a:t>
+            </a:r>
+          </a:p>
+          <a:p xmlns:a="http://schemas.openxmlformats.org/drawingml/2006/main">
+            <a:r>
+              <a:t/>
+            </a:r>
+          </a:p>
+          <a:p xmlns:a="http://schemas.openxmlformats.org/drawingml/2006/main">
+            <a:r>
+              <a:t>- candidate-run</a:t>
+            </a:r>
+          </a:p>
+          <a:p xmlns:a="http://schemas.openxmlformats.org/drawingml/2006/main">
+            <a:r>
+              <a:t/>
+            </a:r>
+          </a:p>
+          <a:p xmlns:a="http://schemas.openxmlformats.org/drawingml/2006/main">
+            <a:r>
+              <a:t>- 保持同一指标</a:t>
+            </a:r>
+          </a:p>
+          <a:p xmlns:a="http://schemas.openxmlformats.org/drawingml/2006/main">
+            <a:r>
+              <a:t/>
+            </a:r>
+          </a:p>
+          <a:p xmlns:a="http://schemas.openxmlformats.org/drawingml/2006/main">
+            <a:r>
+              <a:t>- 失败</a:t>
+            </a:r>
+          </a:p>
+          <a:p xmlns:a="http://schemas.openxmlformats.org/drawingml/2006/main">
+            <a:r>
+              <a:t/>
+            </a:r>
+          </a:p>
+          <a:p xmlns:a="http://schemas.openxmlformats.org/drawingml/2006/main">
+            <a:r>
+              <a:t>- 保留 run ID / 日志</a:t>
+            </a:r>
+          </a:p>
+          <a:p xmlns:a="http://schemas.openxmlformats.org/drawingml/2006/main">
+            <a:r>
+              <a:t/>
+            </a:r>
+          </a:p>
+          <a:p xmlns:a="http://schemas.openxmlformats.org/drawingml/2006/main">
+            <a:r>
+              <a:t>- rollback pointer</a:t>
+            </a:r>
+          </a:p>
+          <a:p xmlns:a="http://schemas.openxmlformats.org/drawingml/2006/main">
+            <a:r>
+              <a:t/>
+            </a:r>
+          </a:p>
+          <a:p xmlns:a="http://schemas.openxmlformats.org/drawingml/2006/main">
+            <a:r>
+              <a:t>- 回到稳定版本</a:t>
+            </a:r>
+          </a:p>
+          <a:p xmlns:a="http://schemas.openxmlformats.org/drawingml/2006/main">
+            <a:r>
+              <a:t/>
+            </a:r>
+          </a:p>
+          <a:p xmlns:a="http://schemas.openxmlformats.org/drawingml/2006/main">
+            <a:r>
+              <a:t>- 回退不等于“重跑到成功”或删除失败。</a:t>
+            </a:r>
+          </a:p>
+          <a:p xmlns:a="http://schemas.openxmlformats.org/drawingml/2006/main">
+            <a:r>
+              <a:t/>
+            </a:r>
+          </a:p>
+          <a:p xmlns:a="http://schemas.openxmlformats.org/drawingml/2006/main">
+            <a:r>
+              <a:t>教师讲述：</a:t>
+            </a:r>
+          </a:p>
+          <a:p xmlns:a="http://schemas.openxmlformats.org/drawingml/2006/main">
+            <a:r>
+              <a:t>回退机制是循环在失败或停止后的处理路径。关键区分：回退到"最近一次通过人工审核的配置"，不是"上一次看起来不错的配置"——这两者经常被混淆。回退后失败迭代必须保留，并触发研究判断的修订。回退默认需要人工确认，因为回退通常意味着循环未按预期推进。</a:t>
+            </a:r>
+          </a:p>
+          <a:p xmlns:a="http://schemas.openxmlformats.org/drawingml/2006/main">
+            <a:r>
+              <a:t/>
+            </a:r>
+          </a:p>
+          <a:p xmlns:a="http://schemas.openxmlformats.org/drawingml/2006/main">
+            <a:r>
+              <a:t>学生动作：</a:t>
+            </a:r>
+          </a:p>
+          <a:p xmlns:a="http://schemas.openxmlformats.org/drawingml/2006/main">
+            <a:r>
+              <a:t>无。</a:t>
+            </a:r>
+          </a:p>
+          <a:p xmlns:a="http://schemas.openxmlformats.org/drawingml/2006/main">
+            <a:r>
+              <a:t/>
+            </a:r>
+          </a:p>
+          <a:p xmlns:a="http://schemas.openxmlformats.org/drawingml/2006/main">
+            <a:r>
+              <a:t>来源与边界：</a:t>
+            </a:r>
+          </a:p>
+          <a:p xmlns:a="http://schemas.openxmlformats.org/drawingml/2006/main">
+            <a:r>
+              <a:t>handout §三·4；第 9 课 §三·4 失败预案。</a:t>
+            </a:r>
+          </a:p>
+          <a:p xmlns:a="http://schemas.openxmlformats.org/drawingml/2006/main">
+            <a:r>
+              <a:t/>
+            </a:r>
+          </a:p>
+          <a:p xmlns:a="http://schemas.openxmlformats.org/drawingml/2006/main">
+            <a:r>
+              <a:t>---</a:t>
             </a:r>
           </a:p>
           <a:p xmlns:a="http://schemas.openxmlformats.org/drawingml/2006/main">
@@ -2792,17 +5432,27 @@
           </a:p>
           <a:p xmlns:a="http://schemas.openxmlformats.org/drawingml/2006/main">
             <a:r>
-              <a:t>lessons/lesson-11/slides.md P08</a:t>
-            </a:r>
-          </a:p>
-          <a:p xmlns:a="http://schemas.openxmlformats.org/drawingml/2006/main">
-            <a:r>
-              <a:t>lessons/lesson-11/handout.md</a:t>
-            </a:r>
-          </a:p>
-          <a:p xmlns:a="http://schemas.openxmlformats.org/drawingml/2006/main">
-            <a:r>
-              <a:t>handout §三·4；第 9 课 §三·4 失败预案。</a:t>
+              <a:t/>
+            </a:r>
+          </a:p>
+          <a:p xmlns:a="http://schemas.openxmlformats.org/drawingml/2006/main">
+            <a:r>
+              <a:t>- 本课 handout.md 与 slides.md</a:t>
+            </a:r>
+          </a:p>
+          <a:p xmlns:a="http://schemas.openxmlformats.org/drawingml/2006/main">
+            <a:r>
+              <a:t/>
+            </a:r>
+          </a:p>
+          <a:p xmlns:a="http://schemas.openxmlformats.org/drawingml/2006/main">
+            <a:r>
+              <a:t>- ../../course/reading-card-case.md</a:t>
+            </a:r>
+          </a:p>
+          <a:p xmlns:a="http://schemas.openxmlformats.org/drawingml/2006/main">
+            <a:r>
+              <a:t/>
             </a:r>
           </a:p>
           <a:p xmlns:a="http://schemas.openxmlformats.org/drawingml/2006/main">
@@ -2877,37 +5527,157 @@
           <a:lstStyle xmlns:a="http://schemas.openxmlformats.org/drawingml/2006/main"/>
           <a:p xmlns:a="http://schemas.openxmlformats.org/drawingml/2006/main">
             <a:r>
-              <a:t>P09｜评价协议漂移会让循环失去可比性</a:t>
-            </a:r>
-          </a:p>
-          <a:p xmlns:a="http://schemas.openxmlformats.org/drawingml/2006/main">
-            <a:r>
-              <a:t/>
-            </a:r>
-          </a:p>
-          <a:p xmlns:a="http://schemas.openxmlformats.org/drawingml/2006/main">
-            <a:r>
-              <a:t>讲述：日志中的 auto-switch rubric 是协议漂移的直接证据。停止并拒绝的是协议改动或无效候选，失败日志必须保留；结果不支持本身仍是有效结果，不触发删除、换指标或结果导向停止。0.34 与 0.19 均为教学虚构值，不可作研究结论。</a:t>
-            </a:r>
-          </a:p>
-          <a:p xmlns:a="http://schemas.openxmlformats.org/drawingml/2006/main">
-            <a:r>
-              <a:t/>
-            </a:r>
-          </a:p>
-          <a:p xmlns:a="http://schemas.openxmlformats.org/drawingml/2006/main">
-            <a:r>
-              <a:t>学生动作：让学生指出日志中哪一行暴露了问题。追问：若只看较低的最终分数，是否能发现协议已改变？</a:t>
-            </a:r>
-          </a:p>
-          <a:p xmlns:a="http://schemas.openxmlformats.org/drawingml/2006/main">
-            <a:r>
-              <a:t/>
-            </a:r>
-          </a:p>
-          <a:p xmlns:a="http://schemas.openxmlformats.org/drawingml/2006/main">
-            <a:r>
-              <a:t>建议时间：5 分钟。</a:t>
+              <a:t>页面：P09 评价协议漂移会让循环失去可比性</a:t>
+            </a:r>
+          </a:p>
+          <a:p xmlns:a="http://schemas.openxmlformats.org/drawingml/2006/main">
+            <a:r>
+              <a:t/>
+            </a:r>
+          </a:p>
+          <a:p xmlns:a="http://schemas.openxmlformats.org/drawingml/2006/main">
+            <a:r>
+              <a:t>讲义位置：本课讲义；见逐页母稿映射表</a:t>
+            </a:r>
+          </a:p>
+          <a:p xmlns:a="http://schemas.openxmlformats.org/drawingml/2006/main">
+            <a:r>
+              <a:t/>
+            </a:r>
+          </a:p>
+          <a:p xmlns:a="http://schemas.openxmlformats.org/drawingml/2006/main">
+            <a:r>
+              <a:t>屏显核对：</a:t>
+            </a:r>
+          </a:p>
+          <a:p xmlns:a="http://schemas.openxmlformats.org/drawingml/2006/main">
+            <a:r>
+              <a:t>评价协议漂移会让循环失去可比性</a:t>
+            </a:r>
+          </a:p>
+          <a:p xmlns:a="http://schemas.openxmlformats.org/drawingml/2006/main">
+            <a:r>
+              <a:t/>
+            </a:r>
+          </a:p>
+          <a:p xmlns:a="http://schemas.openxmlformats.org/drawingml/2006/main">
+            <a:r>
+              <a:t>- run-017.log｜虚构记录</a:t>
+            </a:r>
+          </a:p>
+          <a:p xmlns:a="http://schemas.openxmlformats.org/drawingml/2006/main">
+            <a:r>
+              <a:t/>
+            </a:r>
+          </a:p>
+          <a:p xmlns:a="http://schemas.openxmlformats.org/drawingml/2006/main">
+            <a:r>
+              <a:t>- metric_version = human_gold_v1.2</a:t>
+            </a:r>
+          </a:p>
+          <a:p xmlns:a="http://schemas.openxmlformats.org/drawingml/2006/main">
+            <a:r>
+              <a:t/>
+            </a:r>
+          </a:p>
+          <a:p xmlns:a="http://schemas.openxmlformats.org/drawingml/2006/main">
+            <a:r>
+              <a:t>- score = 0.34</a:t>
+            </a:r>
+          </a:p>
+          <a:p xmlns:a="http://schemas.openxmlformats.org/drawingml/2006/main">
+            <a:r>
+              <a:t/>
+            </a:r>
+          </a:p>
+          <a:p xmlns:a="http://schemas.openxmlformats.org/drawingml/2006/main">
+            <a:r>
+              <a:t>- ! auto-switch rubric -&gt; easy-v2</a:t>
+            </a:r>
+          </a:p>
+          <a:p xmlns:a="http://schemas.openxmlformats.org/drawingml/2006/main">
+            <a:r>
+              <a:t/>
+            </a:r>
+          </a:p>
+          <a:p xmlns:a="http://schemas.openxmlformats.org/drawingml/2006/main">
+            <a:r>
+              <a:t>- score = 0.19</a:t>
+            </a:r>
+          </a:p>
+          <a:p xmlns:a="http://schemas.openxmlformats.org/drawingml/2006/main">
+            <a:r>
+              <a:t/>
+            </a:r>
+          </a:p>
+          <a:p xmlns:a="http://schemas.openxmlformats.org/drawingml/2006/main">
+            <a:r>
+              <a:t>- decision = DISCARD_PROTOCOL_CHANGE</a:t>
+            </a:r>
+          </a:p>
+          <a:p xmlns:a="http://schemas.openxmlformats.org/drawingml/2006/main">
+            <a:r>
+              <a:t/>
+            </a:r>
+          </a:p>
+          <a:p xmlns:a="http://schemas.openxmlformats.org/drawingml/2006/main">
+            <a:r>
+              <a:t>- 处置：Discard / 回到冻结协议 / 保留本次失败</a:t>
+            </a:r>
+          </a:p>
+          <a:p xmlns:a="http://schemas.openxmlformats.org/drawingml/2006/main">
+            <a:r>
+              <a:t/>
+            </a:r>
+          </a:p>
+          <a:p xmlns:a="http://schemas.openxmlformats.org/drawingml/2006/main">
+            <a:r>
+              <a:t>教师讲述：</a:t>
+            </a:r>
+          </a:p>
+          <a:p xmlns:a="http://schemas.openxmlformats.org/drawingml/2006/main">
+            <a:r>
+              <a:t>日志中的 auto-switch rubric 是协议漂移的直接证据。停止并拒绝的是协议改动或无效候选，失败日志必须保留；结果不支持本身仍是有效结果，不触发删除、换指标或结果导向停止。0.34 与 0.19 均为教学虚构值，不可作研究结论。</a:t>
+            </a:r>
+          </a:p>
+          <a:p xmlns:a="http://schemas.openxmlformats.org/drawingml/2006/main">
+            <a:r>
+              <a:t/>
+            </a:r>
+          </a:p>
+          <a:p xmlns:a="http://schemas.openxmlformats.org/drawingml/2006/main">
+            <a:r>
+              <a:t>学生动作：</a:t>
+            </a:r>
+          </a:p>
+          <a:p xmlns:a="http://schemas.openxmlformats.org/drawingml/2006/main">
+            <a:r>
+              <a:t>让学生指出日志中哪一行暴露了问题。追问：若只看较低的最终分数，是否能发现协议已改变？</a:t>
+            </a:r>
+          </a:p>
+          <a:p xmlns:a="http://schemas.openxmlformats.org/drawingml/2006/main">
+            <a:r>
+              <a:t/>
+            </a:r>
+          </a:p>
+          <a:p xmlns:a="http://schemas.openxmlformats.org/drawingml/2006/main">
+            <a:r>
+              <a:t>来源与边界：</a:t>
+            </a:r>
+          </a:p>
+          <a:p xmlns:a="http://schemas.openxmlformats.org/drawingml/2006/main">
+            <a:r>
+              <a:t>handout §三·1；第 9 课 §三·3 度量标准。</a:t>
+            </a:r>
+          </a:p>
+          <a:p xmlns:a="http://schemas.openxmlformats.org/drawingml/2006/main">
+            <a:r>
+              <a:t/>
+            </a:r>
+          </a:p>
+          <a:p xmlns:a="http://schemas.openxmlformats.org/drawingml/2006/main">
+            <a:r>
+              <a:t>---</a:t>
             </a:r>
           </a:p>
           <a:p xmlns:a="http://schemas.openxmlformats.org/drawingml/2006/main">
@@ -2922,17 +5692,27 @@
           </a:p>
           <a:p xmlns:a="http://schemas.openxmlformats.org/drawingml/2006/main">
             <a:r>
-              <a:t>lessons/lesson-11/slides.md P09</a:t>
-            </a:r>
-          </a:p>
-          <a:p xmlns:a="http://schemas.openxmlformats.org/drawingml/2006/main">
-            <a:r>
-              <a:t>lessons/lesson-11/handout.md</a:t>
-            </a:r>
-          </a:p>
-          <a:p xmlns:a="http://schemas.openxmlformats.org/drawingml/2006/main">
-            <a:r>
-              <a:t>handout §三·1；第 9 课 §三·3 度量标准。</a:t>
+              <a:t/>
+            </a:r>
+          </a:p>
+          <a:p xmlns:a="http://schemas.openxmlformats.org/drawingml/2006/main">
+            <a:r>
+              <a:t>- 本课 handout.md 与 slides.md</a:t>
+            </a:r>
+          </a:p>
+          <a:p xmlns:a="http://schemas.openxmlformats.org/drawingml/2006/main">
+            <a:r>
+              <a:t/>
+            </a:r>
+          </a:p>
+          <a:p xmlns:a="http://schemas.openxmlformats.org/drawingml/2006/main">
+            <a:r>
+              <a:t>- ../../course/reading-card-case.md</a:t>
+            </a:r>
+          </a:p>
+          <a:p xmlns:a="http://schemas.openxmlformats.org/drawingml/2006/main">
+            <a:r>
+              <a:t/>
             </a:r>
           </a:p>
           <a:p xmlns:a="http://schemas.openxmlformats.org/drawingml/2006/main">
@@ -2988,7 +5768,7 @@
           <p:nvPr/>
         </p:nvPicPr>
         <p:blipFill>
-          <a:blip xmlns:r="http://schemas.openxmlformats.org/officeDocument/2006/relationships" xmlns:a="http://schemas.openxmlformats.org/drawingml/2006/main" r:embed="R7e2a19ea9e6d4fcb">
+          <a:blip xmlns:r="http://schemas.openxmlformats.org/officeDocument/2006/relationships" xmlns:a="http://schemas.openxmlformats.org/drawingml/2006/main" r:embed="Rf316e5d6b82c4841">
             <a:duotone>
               <a:prstClr val="black"/>
               <a:schemeClr val="accent1">
@@ -3166,7 +5946,7 @@
           <p:nvPr/>
         </p:nvPicPr>
         <p:blipFill rotWithShape="1">
-          <a:blip xmlns:r="http://schemas.openxmlformats.org/officeDocument/2006/relationships" xmlns:a="http://schemas.openxmlformats.org/drawingml/2006/main" r:embed="R22bd21bf1f054b98"/>
+          <a:blip xmlns:r="http://schemas.openxmlformats.org/officeDocument/2006/relationships" xmlns:a="http://schemas.openxmlformats.org/drawingml/2006/main" r:embed="Rf775438539824c26"/>
           <a:srcRect xmlns:a="http://schemas.openxmlformats.org/drawingml/2006/main" l="74359" t="0" r="1346" b="0"/>
           <a:stretch xmlns:a="http://schemas.openxmlformats.org/drawingml/2006/main"/>
         </p:blipFill>
@@ -3189,7 +5969,7 @@
           <p:nvPr/>
         </p:nvPicPr>
         <p:blipFill rotWithShape="1">
-          <a:blip xmlns:r="http://schemas.openxmlformats.org/officeDocument/2006/relationships" xmlns:a="http://schemas.openxmlformats.org/drawingml/2006/main" r:embed="Rbc65e38627b74b94">
+          <a:blip xmlns:r="http://schemas.openxmlformats.org/officeDocument/2006/relationships" xmlns:a="http://schemas.openxmlformats.org/drawingml/2006/main" r:embed="R6287557e5d9f4197">
             <a:alphaModFix amt="35000"/>
           </a:blip>
           <a:srcRect xmlns:a="http://schemas.openxmlformats.org/drawingml/2006/main" l="0" t="9831" r="0" b="36385"/>
@@ -3451,7 +6231,7 @@
           <p:nvPr/>
         </p:nvPicPr>
         <p:blipFill>
-          <a:blip xmlns:r="http://schemas.openxmlformats.org/officeDocument/2006/relationships" xmlns:a="http://schemas.openxmlformats.org/drawingml/2006/main" r:embed="R1e60effa69e24918"/>
+          <a:blip xmlns:r="http://schemas.openxmlformats.org/officeDocument/2006/relationships" xmlns:a="http://schemas.openxmlformats.org/drawingml/2006/main" r:embed="Rfd285553960e4a99"/>
           <a:srcRect xmlns:a="http://schemas.openxmlformats.org/drawingml/2006/main" l="0" t="0" r="54251" b="0"/>
           <a:stretch xmlns:a="http://schemas.openxmlformats.org/drawingml/2006/main"/>
         </p:blipFill>
@@ -3708,7 +6488,7 @@
           <p:nvPr/>
         </p:nvPicPr>
         <p:blipFill rotWithShape="1">
-          <a:blip xmlns:r="http://schemas.openxmlformats.org/officeDocument/2006/relationships" xmlns:a="http://schemas.openxmlformats.org/drawingml/2006/main" r:embed="Rc19e4b86da1f43cf"/>
+          <a:blip xmlns:r="http://schemas.openxmlformats.org/officeDocument/2006/relationships" xmlns:a="http://schemas.openxmlformats.org/drawingml/2006/main" r:embed="Rc23c8abb899c4798"/>
           <a:srcRect xmlns:a="http://schemas.openxmlformats.org/drawingml/2006/main" l="0" t="0" r="1346" b="0"/>
           <a:stretch xmlns:a="http://schemas.openxmlformats.org/drawingml/2006/main"/>
         </p:blipFill>
@@ -3891,7 +6671,7 @@
           <p:nvPr/>
         </p:nvPicPr>
         <p:blipFill>
-          <a:blip xmlns:r="http://schemas.openxmlformats.org/officeDocument/2006/relationships" xmlns:a="http://schemas.openxmlformats.org/drawingml/2006/main" r:embed="R45d1740e22464fd2"/>
+          <a:blip xmlns:r="http://schemas.openxmlformats.org/officeDocument/2006/relationships" xmlns:a="http://schemas.openxmlformats.org/drawingml/2006/main" r:embed="R1338b1b8b3804590"/>
           <a:stretch xmlns:a="http://schemas.openxmlformats.org/drawingml/2006/main">
             <a:fillRect l="0" t="0" r="0" b="0"/>
           </a:stretch>
@@ -3987,7 +6767,7 @@
           <p:nvPr/>
         </p:nvPicPr>
         <p:blipFill>
-          <a:blip xmlns:r="http://schemas.openxmlformats.org/officeDocument/2006/relationships" xmlns:a="http://schemas.openxmlformats.org/drawingml/2006/main" r:embed="Rc74311c37af04f09">
+          <a:blip xmlns:r="http://schemas.openxmlformats.org/officeDocument/2006/relationships" xmlns:a="http://schemas.openxmlformats.org/drawingml/2006/main" r:embed="R3362c7305774466d">
             <a:duotone>
               <a:prstClr val="black"/>
               <a:schemeClr val="accent1">
@@ -4154,7 +6934,7 @@
           <p:nvPr/>
         </p:nvPicPr>
         <p:blipFill rotWithShape="1">
-          <a:blip xmlns:r="http://schemas.openxmlformats.org/officeDocument/2006/relationships" xmlns:a="http://schemas.openxmlformats.org/drawingml/2006/main" r:embed="Ra5f93de5d7694006">
+          <a:blip xmlns:r="http://schemas.openxmlformats.org/officeDocument/2006/relationships" xmlns:a="http://schemas.openxmlformats.org/drawingml/2006/main" r:embed="Re8367ac246d34f80">
             <a:alphaModFix amt="20000"/>
             <a:duotone>
               <a:schemeClr val="accent4">
@@ -4252,10 +7032,10 @@
   </p:cSld>
   <p:clrMap bg1="lt1" tx1="dk1" bg2="lt2" tx2="dk2" accent1="accent1" accent2="accent2" accent3="accent3" accent4="accent4" accent5="accent5" accent6="accent6" hlink="hlink" folHlink="folHlink"/>
   <p:sldLayoutIdLst>
-    <p:sldLayoutId xmlns:r="http://schemas.openxmlformats.org/officeDocument/2006/relationships" id="2147483649" r:id="Rda77c6b3fdb24bc2"/>
-    <p:sldLayoutId xmlns:r="http://schemas.openxmlformats.org/officeDocument/2006/relationships" id="2147483650" r:id="Rf445b2bf34f54f70"/>
-    <p:sldLayoutId xmlns:r="http://schemas.openxmlformats.org/officeDocument/2006/relationships" id="2147483651" r:id="Rb5c7b080de67478c"/>
-    <p:sldLayoutId xmlns:r="http://schemas.openxmlformats.org/officeDocument/2006/relationships" id="2147483652" r:id="R7206cbe87be042d5"/>
+    <p:sldLayoutId xmlns:r="http://schemas.openxmlformats.org/officeDocument/2006/relationships" id="2147483649" r:id="R5a61e6ab0c004c9b"/>
+    <p:sldLayoutId xmlns:r="http://schemas.openxmlformats.org/officeDocument/2006/relationships" id="2147483650" r:id="R6900ff3750b74d60"/>
+    <p:sldLayoutId xmlns:r="http://schemas.openxmlformats.org/officeDocument/2006/relationships" id="2147483651" r:id="Rdbe3f7cf5e65454d"/>
+    <p:sldLayoutId xmlns:r="http://schemas.openxmlformats.org/officeDocument/2006/relationships" id="2147483652" r:id="Ra341eb4de2114ce8"/>
   </p:sldLayoutIdLst>
   <p:hf hdr="0" ftr="0" dt="0"/>
   <p:txStyles>
@@ -4908,7 +7688,7 @@
                 <a:ea typeface="微软雅黑"/>
                 <a:cs typeface="微软雅黑"/>
               </a:rPr>
-              <a:t>120 份冻结输出：执行、恢复与独立评价</a:t>
+              <a:t>6 份固定输出：执行、恢复与评价</a:t>
             </a:r>
             <a:endParaRPr/>
           </a:p>
@@ -4944,74 +7724,22 @@
       </p:sp>
       <p:sp>
         <p:nvSpPr>
-          <p:cNvPr id="6" name="brand-header">
-            <a:extLst xmlns:a="http://schemas.openxmlformats.org/drawingml/2006/main">
-              <a:ext uri="{FF2B5EF4-FFF2-40B4-BE49-F238E27FC236}">
-                <a16:creationId xmlns:a16="http://schemas.microsoft.com/office/drawing/2014/main" id="{F76A2FCF-EA68-4A8C-AB7E-0390E7C0FD32}"/>
-              </a:ext>
-            </a:extLst>
-          </p:cNvPr>
-          <p:cNvSpPr>
-            <a:spLocks xmlns:a="http://schemas.openxmlformats.org/drawingml/2006/main" noGrp="1"/>
-          </p:cNvSpPr>
-          <p:nvPr/>
-        </p:nvSpPr>
-        <p:spPr>
-          <a:xfrm xmlns:a="http://schemas.openxmlformats.org/drawingml/2006/main">
-            <a:off x="0" y="0"/>
-            <a:ext cx="11887200" cy="685800"/>
-          </a:xfrm>
-          <a:prstGeom xmlns:a="http://schemas.openxmlformats.org/drawingml/2006/main" prst="rect">
-            <a:avLst/>
-          </a:prstGeom>
-          <a:solidFill xmlns:a="http://schemas.openxmlformats.org/drawingml/2006/main">
-            <a:srgbClr val="C8161E"/>
-          </a:solidFill>
-          <a:ln xmlns:a="http://schemas.openxmlformats.org/drawingml/2006/main" w="0">
-            <a:noFill/>
-          </a:ln>
-        </p:spPr>
-      </p:sp>
-      <p:pic>
-        <p:nvPicPr>
-          <p:cNvPr id="43" name=""/>
-          <p:cNvPicPr>
-            <a:picLocks xmlns:a="http://schemas.openxmlformats.org/drawingml/2006/main" noChangeAspect="1"/>
-          </p:cNvPicPr>
-          <p:nvPr/>
-        </p:nvPicPr>
-        <p:blipFill>
-          <a:blip xmlns:r="http://schemas.openxmlformats.org/officeDocument/2006/relationships" xmlns:a="http://schemas.openxmlformats.org/drawingml/2006/main" r:embed="Re6a3d7f73ee742cc"/>
-          <a:stretch xmlns:a="http://schemas.openxmlformats.org/drawingml/2006/main"/>
-        </p:blipFill>
-        <p:spPr>
-          <a:xfrm xmlns:a="http://schemas.openxmlformats.org/drawingml/2006/main">
-            <a:off x="323850" y="76200"/>
-            <a:ext cx="533400" cy="533400"/>
-          </a:xfrm>
-          <a:prstGeom xmlns:a="http://schemas.openxmlformats.org/drawingml/2006/main" prst="rect">
-            <a:avLst/>
-          </a:prstGeom>
-        </p:spPr>
-      </p:pic>
-      <p:sp>
-        <p:nvSpPr>
-          <p:cNvPr id="8" name="brand-title">
-            <a:extLst xmlns:a="http://schemas.openxmlformats.org/drawingml/2006/main">
-              <a:ext uri="{FF2B5EF4-FFF2-40B4-BE49-F238E27FC236}">
-                <a16:creationId xmlns:a16="http://schemas.microsoft.com/office/drawing/2014/main" id="{C5B6D924-86BA-4623-8222-F52C63C90A76}"/>
-              </a:ext>
-            </a:extLst>
-          </p:cNvPr>
-          <p:cNvSpPr>
-            <a:spLocks xmlns:a="http://schemas.openxmlformats.org/drawingml/2006/main" noGrp="1"/>
-          </p:cNvSpPr>
-          <p:nvPr/>
-        </p:nvSpPr>
-        <p:spPr>
-          <a:xfrm xmlns:a="http://schemas.openxmlformats.org/drawingml/2006/main">
-            <a:off x="1028700" y="66675"/>
-            <a:ext cx="10477500" cy="552450"/>
+          <p:cNvPr id="6" name="content-309">
+            <a:extLst xmlns:a="http://schemas.openxmlformats.org/drawingml/2006/main">
+              <a:ext uri="{FF2B5EF4-FFF2-40B4-BE49-F238E27FC236}">
+                <a16:creationId xmlns:a16="http://schemas.microsoft.com/office/drawing/2014/main" id="{314A3311-7812-482D-B67C-9C46BC8DF90E}"/>
+              </a:ext>
+            </a:extLst>
+          </p:cNvPr>
+          <p:cNvSpPr>
+            <a:spLocks xmlns:a="http://schemas.openxmlformats.org/drawingml/2006/main" noGrp="1"/>
+          </p:cNvSpPr>
+          <p:nvPr/>
+        </p:nvSpPr>
+        <p:spPr>
+          <a:xfrm xmlns:a="http://schemas.openxmlformats.org/drawingml/2006/main">
+            <a:off x="609600" y="1571625"/>
+            <a:ext cx="10972800" cy="432435"/>
           </a:xfrm>
           <a:prstGeom xmlns:a="http://schemas.openxmlformats.org/drawingml/2006/main" prst="rect">
             <a:avLst/>
@@ -5022,7 +7750,7 @@
           </a:ln>
         </p:spPr>
         <p:txBody>
-          <a:bodyPr xmlns:a="http://schemas.openxmlformats.org/drawingml/2006/main" lIns="0" tIns="0" rIns="0" bIns="0" anchor="ctr"/>
+          <a:bodyPr xmlns:a="http://schemas.openxmlformats.org/drawingml/2006/main" lIns="0" tIns="0" rIns="0" bIns="0" anchor="t"/>
           <a:lstStyle xmlns:a="http://schemas.openxmlformats.org/drawingml/2006/main"/>
           <a:p xmlns:a="http://schemas.openxmlformats.org/drawingml/2006/main">
             <a:pPr algn="l">
@@ -5030,9 +7758,9 @@
                 <a:spcPct val="118000"/>
               </a:lnSpc>
               <a:buNone/>
-              <a:defRPr sz="3000" b="1">
-                <a:solidFill>
-                  <a:srgbClr val="FFFFFF"/>
+              <a:defRPr sz="2400" b="0">
+                <a:solidFill>
+                  <a:srgbClr val="27333D"/>
                 </a:solidFill>
                 <a:latin typeface="微软雅黑"/>
                 <a:ea typeface="微软雅黑"/>
@@ -5040,37 +7768,37 @@
               </a:defRPr>
             </a:pPr>
             <a:r>
-              <a:rPr sz="3000" b="1">
-                <a:solidFill>
-                  <a:srgbClr val="FFFFFF"/>
+              <a:rPr sz="2400" b="0">
+                <a:solidFill>
+                  <a:srgbClr val="27333D"/>
                 </a:solidFill>
                 <a:latin typeface="微软雅黑"/>
                 <a:ea typeface="微软雅黑"/>
                 <a:cs typeface="微软雅黑"/>
               </a:rPr>
-              <a:t>120 份冻结输出：执行、恢复与独立评价</a:t>
-            </a:r>
-          </a:p>
-        </p:txBody>
-      </p:sp>
-      <p:sp>
-        <p:nvSpPr>
-          <p:cNvPr id="9" name="source">
-            <a:extLst xmlns:a="http://schemas.openxmlformats.org/drawingml/2006/main">
-              <a:ext uri="{FF2B5EF4-FFF2-40B4-BE49-F238E27FC236}">
-                <a16:creationId xmlns:a16="http://schemas.microsoft.com/office/drawing/2014/main" id="{99B1E462-48B3-4AE9-BE33-5E4346DC5AA0}"/>
-              </a:ext>
-            </a:extLst>
-          </p:cNvPr>
-          <p:cNvSpPr>
-            <a:spLocks xmlns:a="http://schemas.openxmlformats.org/drawingml/2006/main" noGrp="1"/>
-          </p:cNvSpPr>
-          <p:nvPr/>
-        </p:nvSpPr>
-        <p:spPr>
-          <a:xfrm xmlns:a="http://schemas.openxmlformats.org/drawingml/2006/main">
-            <a:off x="609600" y="6067425"/>
-            <a:ext cx="10763250" cy="209550"/>
+              <a:t>3 份源文本 × 2 个条件 = 6 个任务</a:t>
+            </a:r>
+          </a:p>
+        </p:txBody>
+      </p:sp>
+      <p:sp>
+        <p:nvSpPr>
+          <p:cNvPr id="7" name="content-310">
+            <a:extLst xmlns:a="http://schemas.openxmlformats.org/drawingml/2006/main">
+              <a:ext uri="{FF2B5EF4-FFF2-40B4-BE49-F238E27FC236}">
+                <a16:creationId xmlns:a16="http://schemas.microsoft.com/office/drawing/2014/main" id="{81AB527C-512D-432E-959F-576645845852}"/>
+              </a:ext>
+            </a:extLst>
+          </p:cNvPr>
+          <p:cNvSpPr>
+            <a:spLocks xmlns:a="http://schemas.openxmlformats.org/drawingml/2006/main" noGrp="1"/>
+          </p:cNvSpPr>
+          <p:nvPr/>
+        </p:nvSpPr>
+        <p:spPr>
+          <a:xfrm xmlns:a="http://schemas.openxmlformats.org/drawingml/2006/main">
+            <a:off x="609600" y="2261235"/>
+            <a:ext cx="10972800" cy="432435"/>
           </a:xfrm>
           <a:prstGeom xmlns:a="http://schemas.openxmlformats.org/drawingml/2006/main" prst="rect">
             <a:avLst/>
@@ -5089,9 +7817,9 @@
                 <a:spcPct val="118000"/>
               </a:lnSpc>
               <a:buNone/>
-              <a:defRPr sz="1100" b="0">
-                <a:solidFill>
-                  <a:srgbClr val="66727D"/>
+              <a:defRPr sz="2400" b="0">
+                <a:solidFill>
+                  <a:srgbClr val="27333D"/>
                 </a:solidFill>
                 <a:latin typeface="微软雅黑"/>
                 <a:ea typeface="微软雅黑"/>
@@ -5099,37 +7827,37 @@
               </a:defRPr>
             </a:pPr>
             <a:r>
-              <a:rPr sz="1100" b="0">
-                <a:solidFill>
-                  <a:srgbClr val="66727D"/>
+              <a:rPr sz="2400" b="0">
+                <a:solidFill>
+                  <a:srgbClr val="27333D"/>
                 </a:solidFill>
                 <a:latin typeface="微软雅黑"/>
                 <a:ea typeface="微软雅黑"/>
                 <a:cs typeface="微软雅黑"/>
               </a:rPr>
-              <a:t>来源：lesson-11/slides.md；课程工件与讲义见 speaker notes</a:t>
-            </a:r>
-          </a:p>
-        </p:txBody>
-      </p:sp>
-      <p:sp>
-        <p:nvSpPr>
-          <p:cNvPr id="10" name="fiction">
-            <a:extLst xmlns:a="http://schemas.openxmlformats.org/drawingml/2006/main">
-              <a:ext uri="{FF2B5EF4-FFF2-40B4-BE49-F238E27FC236}">
-                <a16:creationId xmlns:a16="http://schemas.microsoft.com/office/drawing/2014/main" id="{8D14E582-E5EB-4F06-8B6C-226F05F0F726}"/>
-              </a:ext>
-            </a:extLst>
-          </p:cNvPr>
-          <p:cNvSpPr>
-            <a:spLocks xmlns:a="http://schemas.openxmlformats.org/drawingml/2006/main" noGrp="1"/>
-          </p:cNvSpPr>
-          <p:nvPr/>
-        </p:nvSpPr>
-        <p:spPr>
-          <a:xfrm xmlns:a="http://schemas.openxmlformats.org/drawingml/2006/main">
-            <a:off x="609600" y="885825"/>
-            <a:ext cx="10572750" cy="314325"/>
+              <a:t>执行：逐项回放固定输出。</a:t>
+            </a:r>
+          </a:p>
+        </p:txBody>
+      </p:sp>
+      <p:sp>
+        <p:nvSpPr>
+          <p:cNvPr id="8" name="content-311">
+            <a:extLst xmlns:a="http://schemas.openxmlformats.org/drawingml/2006/main">
+              <a:ext uri="{FF2B5EF4-FFF2-40B4-BE49-F238E27FC236}">
+                <a16:creationId xmlns:a16="http://schemas.microsoft.com/office/drawing/2014/main" id="{4F5252B0-10E7-41A8-ABA3-2DD2D0221804}"/>
+              </a:ext>
+            </a:extLst>
+          </p:cNvPr>
+          <p:cNvSpPr>
+            <a:spLocks xmlns:a="http://schemas.openxmlformats.org/drawingml/2006/main" noGrp="1"/>
+          </p:cNvSpPr>
+          <p:nvPr/>
+        </p:nvSpPr>
+        <p:spPr>
+          <a:xfrm xmlns:a="http://schemas.openxmlformats.org/drawingml/2006/main">
+            <a:off x="609600" y="2950845"/>
+            <a:ext cx="10972800" cy="432435"/>
           </a:xfrm>
           <a:prstGeom xmlns:a="http://schemas.openxmlformats.org/drawingml/2006/main" prst="rect">
             <a:avLst/>
@@ -5148,9 +7876,9 @@
                 <a:spcPct val="118000"/>
               </a:lnSpc>
               <a:buNone/>
-              <a:defRPr sz="1800" b="0">
-                <a:solidFill>
-                  <a:srgbClr val="A96510"/>
+              <a:defRPr sz="2400" b="0">
+                <a:solidFill>
+                  <a:srgbClr val="27333D"/>
                 </a:solidFill>
                 <a:latin typeface="微软雅黑"/>
                 <a:ea typeface="微软雅黑"/>
@@ -5158,37 +7886,37 @@
               </a:defRPr>
             </a:pPr>
             <a:r>
-              <a:rPr sz="1800" b="0">
-                <a:solidFill>
-                  <a:srgbClr val="A96510"/>
+              <a:rPr sz="2400" b="0">
+                <a:solidFill>
+                  <a:srgbClr val="27333D"/>
                 </a:solidFill>
                 <a:latin typeface="微软雅黑"/>
                 <a:ea typeface="微软雅黑"/>
                 <a:cs typeface="微软雅黑"/>
               </a:rPr>
-              <a:t>课程虚构教学案例</a:t>
-            </a:r>
-          </a:p>
-        </p:txBody>
-      </p:sp>
-      <p:sp>
-        <p:nvSpPr>
-          <p:cNvPr id="11" name="case">
-            <a:extLst xmlns:a="http://schemas.openxmlformats.org/drawingml/2006/main">
-              <a:ext uri="{FF2B5EF4-FFF2-40B4-BE49-F238E27FC236}">
-                <a16:creationId xmlns:a16="http://schemas.microsoft.com/office/drawing/2014/main" id="{2864CBBE-98A0-45D0-B137-1512706FF739}"/>
-              </a:ext>
-            </a:extLst>
-          </p:cNvPr>
-          <p:cNvSpPr>
-            <a:spLocks xmlns:a="http://schemas.openxmlformats.org/drawingml/2006/main" noGrp="1"/>
-          </p:cNvSpPr>
-          <p:nvPr/>
-        </p:nvSpPr>
-        <p:spPr>
-          <a:xfrm xmlns:a="http://schemas.openxmlformats.org/drawingml/2006/main">
-            <a:off x="571500" y="1666875"/>
-            <a:ext cx="1714500" cy="523875"/>
+              <a:t>恢复：只重试未完成项，保留旧失败。</a:t>
+            </a:r>
+          </a:p>
+        </p:txBody>
+      </p:sp>
+      <p:sp>
+        <p:nvSpPr>
+          <p:cNvPr id="9" name="content-312">
+            <a:extLst xmlns:a="http://schemas.openxmlformats.org/drawingml/2006/main">
+              <a:ext uri="{FF2B5EF4-FFF2-40B4-BE49-F238E27FC236}">
+                <a16:creationId xmlns:a16="http://schemas.microsoft.com/office/drawing/2014/main" id="{B2221F60-C3E3-4CF0-8B15-A0C69838E3DA}"/>
+              </a:ext>
+            </a:extLst>
+          </p:cNvPr>
+          <p:cNvSpPr>
+            <a:spLocks xmlns:a="http://schemas.openxmlformats.org/drawingml/2006/main" noGrp="1"/>
+          </p:cNvSpPr>
+          <p:nvPr/>
+        </p:nvSpPr>
+        <p:spPr>
+          <a:xfrm xmlns:a="http://schemas.openxmlformats.org/drawingml/2006/main">
+            <a:off x="609600" y="3640455"/>
+            <a:ext cx="10972800" cy="432435"/>
           </a:xfrm>
           <a:prstGeom xmlns:a="http://schemas.openxmlformats.org/drawingml/2006/main" prst="rect">
             <a:avLst/>
@@ -5202,14 +7930,14 @@
           <a:bodyPr xmlns:a="http://schemas.openxmlformats.org/drawingml/2006/main" lIns="0" tIns="0" rIns="0" bIns="0" anchor="t"/>
           <a:lstStyle xmlns:a="http://schemas.openxmlformats.org/drawingml/2006/main"/>
           <a:p xmlns:a="http://schemas.openxmlformats.org/drawingml/2006/main">
-            <a:pPr algn="ctr">
+            <a:pPr algn="l">
               <a:lnSpc>
                 <a:spcPct val="118000"/>
               </a:lnSpc>
               <a:buNone/>
-              <a:defRPr sz="2400" b="1">
-                <a:solidFill>
-                  <a:srgbClr val="1F4D78"/>
+              <a:defRPr sz="2400" b="0">
+                <a:solidFill>
+                  <a:srgbClr val="27333D"/>
                 </a:solidFill>
                 <a:latin typeface="微软雅黑"/>
                 <a:ea typeface="微软雅黑"/>
@@ -5217,37 +7945,37 @@
               </a:defRPr>
             </a:pPr>
             <a:r>
-              <a:rPr sz="2400" b="1">
-                <a:solidFill>
-                  <a:srgbClr val="1F4D78"/>
+              <a:rPr sz="2400" b="0">
+                <a:solidFill>
+                  <a:srgbClr val="27333D"/>
                 </a:solidFill>
                 <a:latin typeface="微软雅黑"/>
                 <a:ea typeface="微软雅黑"/>
                 <a:cs typeface="微软雅黑"/>
               </a:rPr>
-              <a:t>20 篇论文</a:t>
-            </a:r>
-          </a:p>
-        </p:txBody>
-      </p:sp>
-      <p:sp>
-        <p:nvSpPr>
-          <p:cNvPr id="12" name="a1">
-            <a:extLst xmlns:a="http://schemas.openxmlformats.org/drawingml/2006/main">
-              <a:ext uri="{FF2B5EF4-FFF2-40B4-BE49-F238E27FC236}">
-                <a16:creationId xmlns:a16="http://schemas.microsoft.com/office/drawing/2014/main" id="{C7A00CCE-E50C-42DB-A576-79F9132D6B47}"/>
-              </a:ext>
-            </a:extLst>
-          </p:cNvPr>
-          <p:cNvSpPr>
-            <a:spLocks xmlns:a="http://schemas.openxmlformats.org/drawingml/2006/main" noGrp="1"/>
-          </p:cNvSpPr>
-          <p:nvPr/>
-        </p:nvSpPr>
-        <p:spPr>
-          <a:xfrm xmlns:a="http://schemas.openxmlformats.org/drawingml/2006/main">
-            <a:off x="2333625" y="1762125"/>
-            <a:ext cx="476250" cy="323850"/>
+              <a:t>评价：核验人工标注并汇总遗漏率。</a:t>
+            </a:r>
+          </a:p>
+        </p:txBody>
+      </p:sp>
+      <p:sp>
+        <p:nvSpPr>
+          <p:cNvPr id="10" name="content-313">
+            <a:extLst xmlns:a="http://schemas.openxmlformats.org/drawingml/2006/main">
+              <a:ext uri="{FF2B5EF4-FFF2-40B4-BE49-F238E27FC236}">
+                <a16:creationId xmlns:a16="http://schemas.microsoft.com/office/drawing/2014/main" id="{A305DD4D-EBB6-47AD-88F0-DA0C4E9F8C58}"/>
+              </a:ext>
+            </a:extLst>
+          </p:cNvPr>
+          <p:cNvSpPr>
+            <a:spLocks xmlns:a="http://schemas.openxmlformats.org/drawingml/2006/main" noGrp="1"/>
+          </p:cNvSpPr>
+          <p:nvPr/>
+        </p:nvSpPr>
+        <p:spPr>
+          <a:xfrm xmlns:a="http://schemas.openxmlformats.org/drawingml/2006/main">
+            <a:off x="609600" y="4330065"/>
+            <a:ext cx="10972800" cy="432435"/>
           </a:xfrm>
           <a:prstGeom xmlns:a="http://schemas.openxmlformats.org/drawingml/2006/main" prst="rect">
             <a:avLst/>
@@ -5258,17 +7986,17 @@
           </a:ln>
         </p:spPr>
         <p:txBody>
-          <a:bodyPr xmlns:a="http://schemas.openxmlformats.org/drawingml/2006/main" lIns="0" tIns="0" rIns="0" bIns="0" anchor="ctr"/>
-          <a:lstStyle xmlns:a="http://schemas.openxmlformats.org/drawingml/2006/main"/>
-          <a:p xmlns:a="http://schemas.openxmlformats.org/drawingml/2006/main">
-            <a:pPr algn="ctr">
+          <a:bodyPr xmlns:a="http://schemas.openxmlformats.org/drawingml/2006/main" lIns="0" tIns="0" rIns="0" bIns="0" anchor="t"/>
+          <a:lstStyle xmlns:a="http://schemas.openxmlformats.org/drawingml/2006/main"/>
+          <a:p xmlns:a="http://schemas.openxmlformats.org/drawingml/2006/main">
+            <a:pPr algn="l">
               <a:lnSpc>
                 <a:spcPct val="118000"/>
               </a:lnSpc>
               <a:buNone/>
               <a:defRPr sz="2400" b="0">
                 <a:solidFill>
-                  <a:srgbClr val="66727D"/>
+                  <a:srgbClr val="1F4D78"/>
                 </a:solidFill>
                 <a:latin typeface="微软雅黑"/>
                 <a:ea typeface="微软雅黑"/>
@@ -5278,1400 +8006,13 @@
             <a:r>
               <a:rPr sz="2400" b="0">
                 <a:solidFill>
-                  <a:srgbClr val="66727D"/>
+                  <a:srgbClr val="1F4D78"/>
                 </a:solidFill>
                 <a:latin typeface="微软雅黑"/>
                 <a:ea typeface="微软雅黑"/>
                 <a:cs typeface="微软雅黑"/>
               </a:rPr>
-              <a:t>→</a:t>
-            </a:r>
-          </a:p>
-        </p:txBody>
-      </p:sp>
-      <p:sp>
-        <p:nvSpPr>
-          <p:cNvPr id="13" name="conds">
-            <a:extLst xmlns:a="http://schemas.openxmlformats.org/drawingml/2006/main">
-              <a:ext uri="{FF2B5EF4-FFF2-40B4-BE49-F238E27FC236}">
-                <a16:creationId xmlns:a16="http://schemas.microsoft.com/office/drawing/2014/main" id="{51D5F5A4-53FB-424D-95C4-89C36C7534CC}"/>
-              </a:ext>
-            </a:extLst>
-          </p:cNvPr>
-          <p:cNvSpPr>
-            <a:spLocks xmlns:a="http://schemas.openxmlformats.org/drawingml/2006/main" noGrp="1"/>
-          </p:cNvSpPr>
-          <p:nvPr/>
-        </p:nvSpPr>
-        <p:spPr>
-          <a:xfrm xmlns:a="http://schemas.openxmlformats.org/drawingml/2006/main">
-            <a:off x="2857500" y="1666875"/>
-            <a:ext cx="2381250" cy="523875"/>
-          </a:xfrm>
-          <a:prstGeom xmlns:a="http://schemas.openxmlformats.org/drawingml/2006/main" prst="rect">
-            <a:avLst/>
-          </a:prstGeom>
-          <a:noFill xmlns:a="http://schemas.openxmlformats.org/drawingml/2006/main"/>
-          <a:ln xmlns:a="http://schemas.openxmlformats.org/drawingml/2006/main" w="0">
-            <a:noFill/>
-          </a:ln>
-        </p:spPr>
-        <p:txBody>
-          <a:bodyPr xmlns:a="http://schemas.openxmlformats.org/drawingml/2006/main" lIns="0" tIns="0" rIns="0" bIns="0" anchor="t"/>
-          <a:lstStyle xmlns:a="http://schemas.openxmlformats.org/drawingml/2006/main"/>
-          <a:p xmlns:a="http://schemas.openxmlformats.org/drawingml/2006/main">
-            <a:pPr algn="ctr">
-              <a:lnSpc>
-                <a:spcPct val="118000"/>
-              </a:lnSpc>
-              <a:buNone/>
-              <a:defRPr sz="2200" b="1">
-                <a:solidFill>
-                  <a:srgbClr val="1F4D78"/>
-                </a:solidFill>
-                <a:latin typeface="微软雅黑"/>
-                <a:ea typeface="微软雅黑"/>
-                <a:cs typeface="微软雅黑"/>
-              </a:defRPr>
-            </a:pPr>
-            <a:r>
-              <a:rPr sz="2200" b="1">
-                <a:solidFill>
-                  <a:srgbClr val="1F4D78"/>
-                </a:solidFill>
-                <a:latin typeface="微软雅黑"/>
-                <a:ea typeface="微软雅黑"/>
-                <a:cs typeface="微软雅黑"/>
-              </a:rPr>
-              <a:t>阅读卡 / 自由摘要</a:t>
-            </a:r>
-          </a:p>
-        </p:txBody>
-      </p:sp>
-      <p:sp>
-        <p:nvSpPr>
-          <p:cNvPr id="14" name="a2">
-            <a:extLst xmlns:a="http://schemas.openxmlformats.org/drawingml/2006/main">
-              <a:ext uri="{FF2B5EF4-FFF2-40B4-BE49-F238E27FC236}">
-                <a16:creationId xmlns:a16="http://schemas.microsoft.com/office/drawing/2014/main" id="{3181935E-B808-4B10-AB82-857DD0E16881}"/>
-              </a:ext>
-            </a:extLst>
-          </p:cNvPr>
-          <p:cNvSpPr>
-            <a:spLocks xmlns:a="http://schemas.openxmlformats.org/drawingml/2006/main" noGrp="1"/>
-          </p:cNvSpPr>
-          <p:nvPr/>
-        </p:nvSpPr>
-        <p:spPr>
-          <a:xfrm xmlns:a="http://schemas.openxmlformats.org/drawingml/2006/main">
-            <a:off x="5286375" y="1762125"/>
-            <a:ext cx="476250" cy="323850"/>
-          </a:xfrm>
-          <a:prstGeom xmlns:a="http://schemas.openxmlformats.org/drawingml/2006/main" prst="rect">
-            <a:avLst/>
-          </a:prstGeom>
-          <a:noFill xmlns:a="http://schemas.openxmlformats.org/drawingml/2006/main"/>
-          <a:ln xmlns:a="http://schemas.openxmlformats.org/drawingml/2006/main" w="0">
-            <a:noFill/>
-          </a:ln>
-        </p:spPr>
-        <p:txBody>
-          <a:bodyPr xmlns:a="http://schemas.openxmlformats.org/drawingml/2006/main" lIns="0" tIns="0" rIns="0" bIns="0" anchor="ctr"/>
-          <a:lstStyle xmlns:a="http://schemas.openxmlformats.org/drawingml/2006/main"/>
-          <a:p xmlns:a="http://schemas.openxmlformats.org/drawingml/2006/main">
-            <a:pPr algn="ctr">
-              <a:lnSpc>
-                <a:spcPct val="118000"/>
-              </a:lnSpc>
-              <a:buNone/>
-              <a:defRPr sz="2400" b="0">
-                <a:solidFill>
-                  <a:srgbClr val="66727D"/>
-                </a:solidFill>
-                <a:latin typeface="微软雅黑"/>
-                <a:ea typeface="微软雅黑"/>
-                <a:cs typeface="微软雅黑"/>
-              </a:defRPr>
-            </a:pPr>
-            <a:r>
-              <a:rPr sz="2400" b="0">
-                <a:solidFill>
-                  <a:srgbClr val="66727D"/>
-                </a:solidFill>
-                <a:latin typeface="微软雅黑"/>
-                <a:ea typeface="微软雅黑"/>
-                <a:cs typeface="微软雅黑"/>
-              </a:rPr>
-              <a:t>→</a:t>
-            </a:r>
-          </a:p>
-        </p:txBody>
-      </p:sp>
-      <p:sp>
-        <p:nvSpPr>
-          <p:cNvPr id="15" name="runs">
-            <a:extLst xmlns:a="http://schemas.openxmlformats.org/drawingml/2006/main">
-              <a:ext uri="{FF2B5EF4-FFF2-40B4-BE49-F238E27FC236}">
-                <a16:creationId xmlns:a16="http://schemas.microsoft.com/office/drawing/2014/main" id="{4FC68267-076E-4D4F-82D8-5460547DF847}"/>
-              </a:ext>
-            </a:extLst>
-          </p:cNvPr>
-          <p:cNvSpPr>
-            <a:spLocks xmlns:a="http://schemas.openxmlformats.org/drawingml/2006/main" noGrp="1"/>
-          </p:cNvSpPr>
-          <p:nvPr/>
-        </p:nvSpPr>
-        <p:spPr>
-          <a:xfrm xmlns:a="http://schemas.openxmlformats.org/drawingml/2006/main">
-            <a:off x="5810250" y="1524000"/>
-            <a:ext cx="2190750" cy="857250"/>
-          </a:xfrm>
-          <a:prstGeom xmlns:a="http://schemas.openxmlformats.org/drawingml/2006/main" prst="rect">
-            <a:avLst/>
-          </a:prstGeom>
-          <a:noFill xmlns:a="http://schemas.openxmlformats.org/drawingml/2006/main"/>
-          <a:ln xmlns:a="http://schemas.openxmlformats.org/drawingml/2006/main" w="0">
-            <a:noFill/>
-          </a:ln>
-        </p:spPr>
-        <p:txBody>
-          <a:bodyPr xmlns:a="http://schemas.openxmlformats.org/drawingml/2006/main" lIns="0" tIns="0" rIns="0" bIns="0" anchor="t"/>
-          <a:lstStyle xmlns:a="http://schemas.openxmlformats.org/drawingml/2006/main"/>
-          <a:p xmlns:a="http://schemas.openxmlformats.org/drawingml/2006/main">
-            <a:pPr algn="ctr">
-              <a:lnSpc>
-                <a:spcPct val="118000"/>
-              </a:lnSpc>
-              <a:buNone/>
-              <a:defRPr sz="2400" b="1">
-                <a:solidFill>
-                  <a:srgbClr val="1F4D78"/>
-                </a:solidFill>
-                <a:latin typeface="微软雅黑"/>
-                <a:ea typeface="微软雅黑"/>
-                <a:cs typeface="微软雅黑"/>
-              </a:defRPr>
-            </a:pPr>
-            <a:r>
-              <a:rPr sz="2400" b="1">
-                <a:solidFill>
-                  <a:srgbClr val="1F4D78"/>
-                </a:solidFill>
-                <a:latin typeface="微软雅黑"/>
-                <a:ea typeface="微软雅黑"/>
-                <a:cs typeface="微软雅黑"/>
-              </a:rPr>
-              <a:t>各运行 3 次</a:t>
-            </a:r>
-          </a:p>
-          <a:p xmlns:a="http://schemas.openxmlformats.org/drawingml/2006/main">
-            <a:pPr algn="ctr">
-              <a:lnSpc>
-                <a:spcPct val="118000"/>
-              </a:lnSpc>
-              <a:buNone/>
-              <a:defRPr sz="2400" b="1">
-                <a:solidFill>
-                  <a:srgbClr val="1F4D78"/>
-                </a:solidFill>
-                <a:latin typeface="微软雅黑"/>
-                <a:ea typeface="微软雅黑"/>
-                <a:cs typeface="微软雅黑"/>
-              </a:defRPr>
-            </a:pPr>
-            <a:r>
-              <a:rPr sz="2400" b="1">
-                <a:solidFill>
-                  <a:srgbClr val="1F4D78"/>
-                </a:solidFill>
-                <a:latin typeface="微软雅黑"/>
-                <a:ea typeface="微软雅黑"/>
-                <a:cs typeface="微软雅黑"/>
-              </a:rPr>
-              <a:t>共 120 输出</a:t>
-            </a:r>
-          </a:p>
-        </p:txBody>
-      </p:sp>
-      <p:sp>
-        <p:nvSpPr>
-          <p:cNvPr id="16" name="a3">
-            <a:extLst xmlns:a="http://schemas.openxmlformats.org/drawingml/2006/main">
-              <a:ext uri="{FF2B5EF4-FFF2-40B4-BE49-F238E27FC236}">
-                <a16:creationId xmlns:a16="http://schemas.microsoft.com/office/drawing/2014/main" id="{B1EF2E4C-D87B-48F1-B3A3-D6C95955109B}"/>
-              </a:ext>
-            </a:extLst>
-          </p:cNvPr>
-          <p:cNvSpPr>
-            <a:spLocks xmlns:a="http://schemas.openxmlformats.org/drawingml/2006/main" noGrp="1"/>
-          </p:cNvSpPr>
-          <p:nvPr/>
-        </p:nvSpPr>
-        <p:spPr>
-          <a:xfrm xmlns:a="http://schemas.openxmlformats.org/drawingml/2006/main">
-            <a:off x="8048625" y="1762125"/>
-            <a:ext cx="476250" cy="323850"/>
-          </a:xfrm>
-          <a:prstGeom xmlns:a="http://schemas.openxmlformats.org/drawingml/2006/main" prst="rect">
-            <a:avLst/>
-          </a:prstGeom>
-          <a:noFill xmlns:a="http://schemas.openxmlformats.org/drawingml/2006/main"/>
-          <a:ln xmlns:a="http://schemas.openxmlformats.org/drawingml/2006/main" w="0">
-            <a:noFill/>
-          </a:ln>
-        </p:spPr>
-        <p:txBody>
-          <a:bodyPr xmlns:a="http://schemas.openxmlformats.org/drawingml/2006/main" lIns="0" tIns="0" rIns="0" bIns="0" anchor="ctr"/>
-          <a:lstStyle xmlns:a="http://schemas.openxmlformats.org/drawingml/2006/main"/>
-          <a:p xmlns:a="http://schemas.openxmlformats.org/drawingml/2006/main">
-            <a:pPr algn="ctr">
-              <a:lnSpc>
-                <a:spcPct val="118000"/>
-              </a:lnSpc>
-              <a:buNone/>
-              <a:defRPr sz="2400" b="0">
-                <a:solidFill>
-                  <a:srgbClr val="66727D"/>
-                </a:solidFill>
-                <a:latin typeface="微软雅黑"/>
-                <a:ea typeface="微软雅黑"/>
-                <a:cs typeface="微软雅黑"/>
-              </a:defRPr>
-            </a:pPr>
-            <a:r>
-              <a:rPr sz="2400" b="0">
-                <a:solidFill>
-                  <a:srgbClr val="66727D"/>
-                </a:solidFill>
-                <a:latin typeface="微软雅黑"/>
-                <a:ea typeface="微软雅黑"/>
-                <a:cs typeface="微软雅黑"/>
-              </a:rPr>
-              <a:t>→</a:t>
-            </a:r>
-          </a:p>
-        </p:txBody>
-      </p:sp>
-      <p:sp>
-        <p:nvSpPr>
-          <p:cNvPr id="17" name="eval">
-            <a:extLst xmlns:a="http://schemas.openxmlformats.org/drawingml/2006/main">
-              <a:ext uri="{FF2B5EF4-FFF2-40B4-BE49-F238E27FC236}">
-                <a16:creationId xmlns:a16="http://schemas.microsoft.com/office/drawing/2014/main" id="{863B0647-29B2-41AC-89C0-E2F0ECCB1286}"/>
-              </a:ext>
-            </a:extLst>
-          </p:cNvPr>
-          <p:cNvSpPr>
-            <a:spLocks xmlns:a="http://schemas.openxmlformats.org/drawingml/2006/main" noGrp="1"/>
-          </p:cNvSpPr>
-          <p:nvPr/>
-        </p:nvSpPr>
-        <p:spPr>
-          <a:xfrm xmlns:a="http://schemas.openxmlformats.org/drawingml/2006/main">
-            <a:off x="8572500" y="1666875"/>
-            <a:ext cx="2857500" cy="523875"/>
-          </a:xfrm>
-          <a:prstGeom xmlns:a="http://schemas.openxmlformats.org/drawingml/2006/main" prst="rect">
-            <a:avLst/>
-          </a:prstGeom>
-          <a:noFill xmlns:a="http://schemas.openxmlformats.org/drawingml/2006/main"/>
-          <a:ln xmlns:a="http://schemas.openxmlformats.org/drawingml/2006/main" w="0">
-            <a:noFill/>
-          </a:ln>
-        </p:spPr>
-        <p:txBody>
-          <a:bodyPr xmlns:a="http://schemas.openxmlformats.org/drawingml/2006/main" lIns="0" tIns="0" rIns="0" bIns="0" anchor="t"/>
-          <a:lstStyle xmlns:a="http://schemas.openxmlformats.org/drawingml/2006/main"/>
-          <a:p xmlns:a="http://schemas.openxmlformats.org/drawingml/2006/main">
-            <a:pPr algn="ctr">
-              <a:lnSpc>
-                <a:spcPct val="118000"/>
-              </a:lnSpc>
-              <a:buNone/>
-              <a:defRPr sz="2200" b="1">
-                <a:solidFill>
-                  <a:srgbClr val="2E7D5B"/>
-                </a:solidFill>
-                <a:latin typeface="微软雅黑"/>
-                <a:ea typeface="微软雅黑"/>
-                <a:cs typeface="微软雅黑"/>
-              </a:defRPr>
-            </a:pPr>
-            <a:r>
-              <a:rPr sz="2200" b="1">
-                <a:solidFill>
-                  <a:srgbClr val="2E7D5B"/>
-                </a:solidFill>
-                <a:latin typeface="微软雅黑"/>
-                <a:ea typeface="微软雅黑"/>
-                <a:cs typeface="微软雅黑"/>
-              </a:rPr>
-              <a:t>独立人工基准评价</a:t>
-            </a:r>
-          </a:p>
-        </p:txBody>
-      </p:sp>
-      <p:sp>
-        <p:nvSpPr>
-          <p:cNvPr id="18" name="sep">
-            <a:extLst xmlns:a="http://schemas.openxmlformats.org/drawingml/2006/main">
-              <a:ext uri="{FF2B5EF4-FFF2-40B4-BE49-F238E27FC236}">
-                <a16:creationId xmlns:a16="http://schemas.microsoft.com/office/drawing/2014/main" id="{A2060D24-06FC-47E0-853E-204CCFFCD1E4}"/>
-              </a:ext>
-            </a:extLst>
-          </p:cNvPr>
-          <p:cNvSpPr>
-            <a:spLocks xmlns:a="http://schemas.openxmlformats.org/drawingml/2006/main" noGrp="1"/>
-          </p:cNvSpPr>
-          <p:nvPr/>
-        </p:nvSpPr>
-        <p:spPr>
-          <a:xfrm xmlns:a="http://schemas.openxmlformats.org/drawingml/2006/main">
-            <a:off x="609600" y="2762250"/>
-            <a:ext cx="10953750" cy="14288"/>
-          </a:xfrm>
-          <a:prstGeom xmlns:a="http://schemas.openxmlformats.org/drawingml/2006/main" prst="rect">
-            <a:avLst/>
-          </a:prstGeom>
-          <a:solidFill xmlns:a="http://schemas.openxmlformats.org/drawingml/2006/main">
-            <a:srgbClr val="CDD5DB"/>
-          </a:solidFill>
-          <a:ln xmlns:a="http://schemas.openxmlformats.org/drawingml/2006/main" w="0">
-            <a:noFill/>
-          </a:ln>
-        </p:spPr>
-      </p:sp>
-      <p:sp>
-        <p:nvSpPr>
-          <p:cNvPr id="19" name="chain-line-0">
-            <a:extLst xmlns:a="http://schemas.openxmlformats.org/drawingml/2006/main">
-              <a:ext uri="{FF2B5EF4-FFF2-40B4-BE49-F238E27FC236}">
-                <a16:creationId xmlns:a16="http://schemas.microsoft.com/office/drawing/2014/main" id="{32950FBC-D1AA-4AE5-829E-78763818B616}"/>
-              </a:ext>
-            </a:extLst>
-          </p:cNvPr>
-          <p:cNvSpPr>
-            <a:spLocks xmlns:a="http://schemas.openxmlformats.org/drawingml/2006/main" noGrp="1"/>
-          </p:cNvSpPr>
-          <p:nvPr/>
-        </p:nvSpPr>
-        <p:spPr>
-          <a:xfrm xmlns:a="http://schemas.openxmlformats.org/drawingml/2006/main">
-            <a:off x="714375" y="4057650"/>
-            <a:ext cx="1714500" cy="14288"/>
-          </a:xfrm>
-          <a:prstGeom xmlns:a="http://schemas.openxmlformats.org/drawingml/2006/main" prst="rect">
-            <a:avLst/>
-          </a:prstGeom>
-          <a:solidFill xmlns:a="http://schemas.openxmlformats.org/drawingml/2006/main">
-            <a:srgbClr val="1F4D78"/>
-          </a:solidFill>
-          <a:ln xmlns:a="http://schemas.openxmlformats.org/drawingml/2006/main" w="0">
-            <a:noFill/>
-          </a:ln>
-        </p:spPr>
-      </p:sp>
-      <p:sp>
-        <p:nvSpPr>
-          <p:cNvPr id="20" name="chain-0">
-            <a:extLst xmlns:a="http://schemas.openxmlformats.org/drawingml/2006/main">
-              <a:ext uri="{FF2B5EF4-FFF2-40B4-BE49-F238E27FC236}">
-                <a16:creationId xmlns:a16="http://schemas.microsoft.com/office/drawing/2014/main" id="{DDC931FA-B36F-431D-87C8-492CF2F43D02}"/>
-              </a:ext>
-            </a:extLst>
-          </p:cNvPr>
-          <p:cNvSpPr>
-            <a:spLocks xmlns:a="http://schemas.openxmlformats.org/drawingml/2006/main" noGrp="1"/>
-          </p:cNvSpPr>
-          <p:nvPr/>
-        </p:nvSpPr>
-        <p:spPr>
-          <a:xfrm xmlns:a="http://schemas.openxmlformats.org/drawingml/2006/main">
-            <a:off x="714375" y="3333750"/>
-            <a:ext cx="1714500" cy="666750"/>
-          </a:xfrm>
-          <a:prstGeom xmlns:a="http://schemas.openxmlformats.org/drawingml/2006/main" prst="rect">
-            <a:avLst/>
-          </a:prstGeom>
-          <a:noFill xmlns:a="http://schemas.openxmlformats.org/drawingml/2006/main"/>
-          <a:ln xmlns:a="http://schemas.openxmlformats.org/drawingml/2006/main" w="0">
-            <a:noFill/>
-          </a:ln>
-        </p:spPr>
-        <p:txBody>
-          <a:bodyPr xmlns:a="http://schemas.openxmlformats.org/drawingml/2006/main" lIns="0" tIns="0" rIns="0" bIns="0" anchor="ctr"/>
-          <a:lstStyle xmlns:a="http://schemas.openxmlformats.org/drawingml/2006/main"/>
-          <a:p xmlns:a="http://schemas.openxmlformats.org/drawingml/2006/main">
-            <a:pPr algn="ctr">
-              <a:lnSpc>
-                <a:spcPct val="118000"/>
-              </a:lnSpc>
-              <a:buNone/>
-              <a:defRPr sz="2200" b="0">
-                <a:solidFill>
-                  <a:srgbClr val="1F4D78"/>
-                </a:solidFill>
-                <a:latin typeface="微软雅黑"/>
-                <a:ea typeface="微软雅黑"/>
-                <a:cs typeface="微软雅黑"/>
-              </a:defRPr>
-            </a:pPr>
-            <a:r>
-              <a:rPr sz="2200" b="0">
-                <a:solidFill>
-                  <a:srgbClr val="1F4D78"/>
-                </a:solidFill>
-                <a:latin typeface="微软雅黑"/>
-                <a:ea typeface="微软雅黑"/>
-                <a:cs typeface="微软雅黑"/>
-              </a:rPr>
-              <a:t>配置冻结</a:t>
-            </a:r>
-          </a:p>
-        </p:txBody>
-      </p:sp>
-      <p:sp>
-        <p:nvSpPr>
-          <p:cNvPr id="21" name="chain-arrow-0">
-            <a:extLst xmlns:a="http://schemas.openxmlformats.org/drawingml/2006/main">
-              <a:ext uri="{FF2B5EF4-FFF2-40B4-BE49-F238E27FC236}">
-                <a16:creationId xmlns:a16="http://schemas.microsoft.com/office/drawing/2014/main" id="{F4158655-9046-4D8A-A57C-089E11469381}"/>
-              </a:ext>
-            </a:extLst>
-          </p:cNvPr>
-          <p:cNvSpPr>
-            <a:spLocks xmlns:a="http://schemas.openxmlformats.org/drawingml/2006/main" noGrp="1"/>
-          </p:cNvSpPr>
-          <p:nvPr/>
-        </p:nvSpPr>
-        <p:spPr>
-          <a:xfrm xmlns:a="http://schemas.openxmlformats.org/drawingml/2006/main">
-            <a:off x="2428875" y="3505200"/>
-            <a:ext cx="500063" cy="323850"/>
-          </a:xfrm>
-          <a:prstGeom xmlns:a="http://schemas.openxmlformats.org/drawingml/2006/main" prst="rect">
-            <a:avLst/>
-          </a:prstGeom>
-          <a:noFill xmlns:a="http://schemas.openxmlformats.org/drawingml/2006/main"/>
-          <a:ln xmlns:a="http://schemas.openxmlformats.org/drawingml/2006/main" w="0">
-            <a:noFill/>
-          </a:ln>
-        </p:spPr>
-        <p:txBody>
-          <a:bodyPr xmlns:a="http://schemas.openxmlformats.org/drawingml/2006/main" lIns="0" tIns="0" rIns="0" bIns="0" anchor="ctr"/>
-          <a:lstStyle xmlns:a="http://schemas.openxmlformats.org/drawingml/2006/main"/>
-          <a:p xmlns:a="http://schemas.openxmlformats.org/drawingml/2006/main">
-            <a:pPr algn="ctr">
-              <a:lnSpc>
-                <a:spcPct val="118000"/>
-              </a:lnSpc>
-              <a:buNone/>
-              <a:defRPr sz="2400" b="0">
-                <a:solidFill>
-                  <a:srgbClr val="1F4D78"/>
-                </a:solidFill>
-                <a:latin typeface="微软雅黑"/>
-                <a:ea typeface="微软雅黑"/>
-                <a:cs typeface="微软雅黑"/>
-              </a:defRPr>
-            </a:pPr>
-            <a:r>
-              <a:rPr sz="2400" b="0">
-                <a:solidFill>
-                  <a:srgbClr val="1F4D78"/>
-                </a:solidFill>
-                <a:latin typeface="微软雅黑"/>
-                <a:ea typeface="微软雅黑"/>
-                <a:cs typeface="微软雅黑"/>
-              </a:rPr>
-              <a:t>→</a:t>
-            </a:r>
-          </a:p>
-        </p:txBody>
-      </p:sp>
-      <p:sp>
-        <p:nvSpPr>
-          <p:cNvPr id="22" name="chain-sub-0">
-            <a:extLst xmlns:a="http://schemas.openxmlformats.org/drawingml/2006/main">
-              <a:ext uri="{FF2B5EF4-FFF2-40B4-BE49-F238E27FC236}">
-                <a16:creationId xmlns:a16="http://schemas.microsoft.com/office/drawing/2014/main" id="{099D8C70-86D3-4BB7-8CAB-46F13324D610}"/>
-              </a:ext>
-            </a:extLst>
-          </p:cNvPr>
-          <p:cNvSpPr>
-            <a:spLocks xmlns:a="http://schemas.openxmlformats.org/drawingml/2006/main" noGrp="1"/>
-          </p:cNvSpPr>
-          <p:nvPr/>
-        </p:nvSpPr>
-        <p:spPr>
-          <a:xfrm xmlns:a="http://schemas.openxmlformats.org/drawingml/2006/main">
-            <a:off x="714375" y="4210050"/>
-            <a:ext cx="1714500" cy="571500"/>
-          </a:xfrm>
-          <a:prstGeom xmlns:a="http://schemas.openxmlformats.org/drawingml/2006/main" prst="rect">
-            <a:avLst/>
-          </a:prstGeom>
-          <a:noFill xmlns:a="http://schemas.openxmlformats.org/drawingml/2006/main"/>
-          <a:ln xmlns:a="http://schemas.openxmlformats.org/drawingml/2006/main" w="0">
-            <a:noFill/>
-          </a:ln>
-        </p:spPr>
-        <p:txBody>
-          <a:bodyPr xmlns:a="http://schemas.openxmlformats.org/drawingml/2006/main" lIns="0" tIns="0" rIns="0" bIns="0" anchor="t"/>
-          <a:lstStyle xmlns:a="http://schemas.openxmlformats.org/drawingml/2006/main"/>
-          <a:p xmlns:a="http://schemas.openxmlformats.org/drawingml/2006/main">
-            <a:pPr algn="ctr">
-              <a:lnSpc>
-                <a:spcPct val="118000"/>
-              </a:lnSpc>
-              <a:buNone/>
-              <a:defRPr sz="2000" b="0">
-                <a:solidFill>
-                  <a:srgbClr val="66727D"/>
-                </a:solidFill>
-                <a:latin typeface="微软雅黑"/>
-                <a:ea typeface="微软雅黑"/>
-                <a:cs typeface="微软雅黑"/>
-              </a:defRPr>
-            </a:pPr>
-            <a:r>
-              <a:rPr sz="2000" b="0">
-                <a:solidFill>
-                  <a:srgbClr val="66727D"/>
-                </a:solidFill>
-                <a:latin typeface="微软雅黑"/>
-                <a:ea typeface="微软雅黑"/>
-                <a:cs typeface="微软雅黑"/>
-              </a:rPr>
-              <a:t>模型 / prompt</a:t>
-            </a:r>
-          </a:p>
-        </p:txBody>
-      </p:sp>
-      <p:sp>
-        <p:nvSpPr>
-          <p:cNvPr id="23" name="chain-line-1">
-            <a:extLst xmlns:a="http://schemas.openxmlformats.org/drawingml/2006/main">
-              <a:ext uri="{FF2B5EF4-FFF2-40B4-BE49-F238E27FC236}">
-                <a16:creationId xmlns:a16="http://schemas.microsoft.com/office/drawing/2014/main" id="{4D3A69C5-E313-4D19-9A8E-87FB634316A2}"/>
-              </a:ext>
-            </a:extLst>
-          </p:cNvPr>
-          <p:cNvSpPr>
-            <a:spLocks xmlns:a="http://schemas.openxmlformats.org/drawingml/2006/main" noGrp="1"/>
-          </p:cNvSpPr>
-          <p:nvPr/>
-        </p:nvSpPr>
-        <p:spPr>
-          <a:xfrm xmlns:a="http://schemas.openxmlformats.org/drawingml/2006/main">
-            <a:off x="2928938" y="4057650"/>
-            <a:ext cx="1714500" cy="14288"/>
-          </a:xfrm>
-          <a:prstGeom xmlns:a="http://schemas.openxmlformats.org/drawingml/2006/main" prst="rect">
-            <a:avLst/>
-          </a:prstGeom>
-          <a:solidFill xmlns:a="http://schemas.openxmlformats.org/drawingml/2006/main">
-            <a:srgbClr val="1F4D78"/>
-          </a:solidFill>
-          <a:ln xmlns:a="http://schemas.openxmlformats.org/drawingml/2006/main" w="0">
-            <a:noFill/>
-          </a:ln>
-        </p:spPr>
-      </p:sp>
-      <p:sp>
-        <p:nvSpPr>
-          <p:cNvPr id="24" name="chain-1">
-            <a:extLst xmlns:a="http://schemas.openxmlformats.org/drawingml/2006/main">
-              <a:ext uri="{FF2B5EF4-FFF2-40B4-BE49-F238E27FC236}">
-                <a16:creationId xmlns:a16="http://schemas.microsoft.com/office/drawing/2014/main" id="{39E6F569-2D63-45C3-A5A9-35A6AA8A64D9}"/>
-              </a:ext>
-            </a:extLst>
-          </p:cNvPr>
-          <p:cNvSpPr>
-            <a:spLocks xmlns:a="http://schemas.openxmlformats.org/drawingml/2006/main" noGrp="1"/>
-          </p:cNvSpPr>
-          <p:nvPr/>
-        </p:nvSpPr>
-        <p:spPr>
-          <a:xfrm xmlns:a="http://schemas.openxmlformats.org/drawingml/2006/main">
-            <a:off x="2928938" y="3333750"/>
-            <a:ext cx="1714500" cy="666750"/>
-          </a:xfrm>
-          <a:prstGeom xmlns:a="http://schemas.openxmlformats.org/drawingml/2006/main" prst="rect">
-            <a:avLst/>
-          </a:prstGeom>
-          <a:noFill xmlns:a="http://schemas.openxmlformats.org/drawingml/2006/main"/>
-          <a:ln xmlns:a="http://schemas.openxmlformats.org/drawingml/2006/main" w="0">
-            <a:noFill/>
-          </a:ln>
-        </p:spPr>
-        <p:txBody>
-          <a:bodyPr xmlns:a="http://schemas.openxmlformats.org/drawingml/2006/main" lIns="0" tIns="0" rIns="0" bIns="0" anchor="ctr"/>
-          <a:lstStyle xmlns:a="http://schemas.openxmlformats.org/drawingml/2006/main"/>
-          <a:p xmlns:a="http://schemas.openxmlformats.org/drawingml/2006/main">
-            <a:pPr algn="ctr">
-              <a:lnSpc>
-                <a:spcPct val="118000"/>
-              </a:lnSpc>
-              <a:buNone/>
-              <a:defRPr sz="2200" b="0">
-                <a:solidFill>
-                  <a:srgbClr val="1F4D78"/>
-                </a:solidFill>
-                <a:latin typeface="微软雅黑"/>
-                <a:ea typeface="微软雅黑"/>
-                <a:cs typeface="微软雅黑"/>
-              </a:defRPr>
-            </a:pPr>
-            <a:r>
-              <a:rPr sz="2200" b="0">
-                <a:solidFill>
-                  <a:srgbClr val="1F4D78"/>
-                </a:solidFill>
-                <a:latin typeface="微软雅黑"/>
-                <a:ea typeface="微软雅黑"/>
-                <a:cs typeface="微软雅黑"/>
-              </a:rPr>
-              <a:t>队列运行</a:t>
-            </a:r>
-          </a:p>
-        </p:txBody>
-      </p:sp>
-      <p:sp>
-        <p:nvSpPr>
-          <p:cNvPr id="25" name="chain-arrow-1">
-            <a:extLst xmlns:a="http://schemas.openxmlformats.org/drawingml/2006/main">
-              <a:ext uri="{FF2B5EF4-FFF2-40B4-BE49-F238E27FC236}">
-                <a16:creationId xmlns:a16="http://schemas.microsoft.com/office/drawing/2014/main" id="{EAC799CD-D304-46CE-8CBE-4D952B7CBF66}"/>
-              </a:ext>
-            </a:extLst>
-          </p:cNvPr>
-          <p:cNvSpPr>
-            <a:spLocks xmlns:a="http://schemas.openxmlformats.org/drawingml/2006/main" noGrp="1"/>
-          </p:cNvSpPr>
-          <p:nvPr/>
-        </p:nvSpPr>
-        <p:spPr>
-          <a:xfrm xmlns:a="http://schemas.openxmlformats.org/drawingml/2006/main">
-            <a:off x="4643438" y="3505200"/>
-            <a:ext cx="500063" cy="323850"/>
-          </a:xfrm>
-          <a:prstGeom xmlns:a="http://schemas.openxmlformats.org/drawingml/2006/main" prst="rect">
-            <a:avLst/>
-          </a:prstGeom>
-          <a:noFill xmlns:a="http://schemas.openxmlformats.org/drawingml/2006/main"/>
-          <a:ln xmlns:a="http://schemas.openxmlformats.org/drawingml/2006/main" w="0">
-            <a:noFill/>
-          </a:ln>
-        </p:spPr>
-        <p:txBody>
-          <a:bodyPr xmlns:a="http://schemas.openxmlformats.org/drawingml/2006/main" lIns="0" tIns="0" rIns="0" bIns="0" anchor="ctr"/>
-          <a:lstStyle xmlns:a="http://schemas.openxmlformats.org/drawingml/2006/main"/>
-          <a:p xmlns:a="http://schemas.openxmlformats.org/drawingml/2006/main">
-            <a:pPr algn="ctr">
-              <a:lnSpc>
-                <a:spcPct val="118000"/>
-              </a:lnSpc>
-              <a:buNone/>
-              <a:defRPr sz="2400" b="0">
-                <a:solidFill>
-                  <a:srgbClr val="1F4D78"/>
-                </a:solidFill>
-                <a:latin typeface="微软雅黑"/>
-                <a:ea typeface="微软雅黑"/>
-                <a:cs typeface="微软雅黑"/>
-              </a:defRPr>
-            </a:pPr>
-            <a:r>
-              <a:rPr sz="2400" b="0">
-                <a:solidFill>
-                  <a:srgbClr val="1F4D78"/>
-                </a:solidFill>
-                <a:latin typeface="微软雅黑"/>
-                <a:ea typeface="微软雅黑"/>
-                <a:cs typeface="微软雅黑"/>
-              </a:rPr>
-              <a:t>→</a:t>
-            </a:r>
-          </a:p>
-        </p:txBody>
-      </p:sp>
-      <p:sp>
-        <p:nvSpPr>
-          <p:cNvPr id="26" name="chain-sub-1">
-            <a:extLst xmlns:a="http://schemas.openxmlformats.org/drawingml/2006/main">
-              <a:ext uri="{FF2B5EF4-FFF2-40B4-BE49-F238E27FC236}">
-                <a16:creationId xmlns:a16="http://schemas.microsoft.com/office/drawing/2014/main" id="{6F7FDBD6-6284-4BDA-A434-5D8A9FE6B350}"/>
-              </a:ext>
-            </a:extLst>
-          </p:cNvPr>
-          <p:cNvSpPr>
-            <a:spLocks xmlns:a="http://schemas.openxmlformats.org/drawingml/2006/main" noGrp="1"/>
-          </p:cNvSpPr>
-          <p:nvPr/>
-        </p:nvSpPr>
-        <p:spPr>
-          <a:xfrm xmlns:a="http://schemas.openxmlformats.org/drawingml/2006/main">
-            <a:off x="2928938" y="4210050"/>
-            <a:ext cx="1714500" cy="571500"/>
-          </a:xfrm>
-          <a:prstGeom xmlns:a="http://schemas.openxmlformats.org/drawingml/2006/main" prst="rect">
-            <a:avLst/>
-          </a:prstGeom>
-          <a:noFill xmlns:a="http://schemas.openxmlformats.org/drawingml/2006/main"/>
-          <a:ln xmlns:a="http://schemas.openxmlformats.org/drawingml/2006/main" w="0">
-            <a:noFill/>
-          </a:ln>
-        </p:spPr>
-        <p:txBody>
-          <a:bodyPr xmlns:a="http://schemas.openxmlformats.org/drawingml/2006/main" lIns="0" tIns="0" rIns="0" bIns="0" anchor="t"/>
-          <a:lstStyle xmlns:a="http://schemas.openxmlformats.org/drawingml/2006/main"/>
-          <a:p xmlns:a="http://schemas.openxmlformats.org/drawingml/2006/main">
-            <a:pPr algn="ctr">
-              <a:lnSpc>
-                <a:spcPct val="118000"/>
-              </a:lnSpc>
-              <a:buNone/>
-              <a:defRPr sz="2000" b="0">
-                <a:solidFill>
-                  <a:srgbClr val="66727D"/>
-                </a:solidFill>
-                <a:latin typeface="微软雅黑"/>
-                <a:ea typeface="微软雅黑"/>
-                <a:cs typeface="微软雅黑"/>
-              </a:defRPr>
-            </a:pPr>
-            <a:r>
-              <a:rPr sz="2000" b="0">
-                <a:solidFill>
-                  <a:srgbClr val="66727D"/>
-                </a:solidFill>
-                <a:latin typeface="微软雅黑"/>
-                <a:ea typeface="微软雅黑"/>
-                <a:cs typeface="微软雅黑"/>
-              </a:rPr>
-              <a:t>20 × 2 × 3</a:t>
-            </a:r>
-          </a:p>
-        </p:txBody>
-      </p:sp>
-      <p:sp>
-        <p:nvSpPr>
-          <p:cNvPr id="27" name="chain-line-2">
-            <a:extLst xmlns:a="http://schemas.openxmlformats.org/drawingml/2006/main">
-              <a:ext uri="{FF2B5EF4-FFF2-40B4-BE49-F238E27FC236}">
-                <a16:creationId xmlns:a16="http://schemas.microsoft.com/office/drawing/2014/main" id="{60DB6156-C144-4ACC-A13B-6963C0D168CD}"/>
-              </a:ext>
-            </a:extLst>
-          </p:cNvPr>
-          <p:cNvSpPr>
-            <a:spLocks xmlns:a="http://schemas.openxmlformats.org/drawingml/2006/main" noGrp="1"/>
-          </p:cNvSpPr>
-          <p:nvPr/>
-        </p:nvSpPr>
-        <p:spPr>
-          <a:xfrm xmlns:a="http://schemas.openxmlformats.org/drawingml/2006/main">
-            <a:off x="5143500" y="4057650"/>
-            <a:ext cx="1714500" cy="14288"/>
-          </a:xfrm>
-          <a:prstGeom xmlns:a="http://schemas.openxmlformats.org/drawingml/2006/main" prst="rect">
-            <a:avLst/>
-          </a:prstGeom>
-          <a:solidFill xmlns:a="http://schemas.openxmlformats.org/drawingml/2006/main">
-            <a:srgbClr val="1F4D78"/>
-          </a:solidFill>
-          <a:ln xmlns:a="http://schemas.openxmlformats.org/drawingml/2006/main" w="0">
-            <a:noFill/>
-          </a:ln>
-        </p:spPr>
-      </p:sp>
-      <p:sp>
-        <p:nvSpPr>
-          <p:cNvPr id="28" name="chain-2">
-            <a:extLst xmlns:a="http://schemas.openxmlformats.org/drawingml/2006/main">
-              <a:ext uri="{FF2B5EF4-FFF2-40B4-BE49-F238E27FC236}">
-                <a16:creationId xmlns:a16="http://schemas.microsoft.com/office/drawing/2014/main" id="{876CC3A4-D2B3-417B-8791-02508EE5975C}"/>
-              </a:ext>
-            </a:extLst>
-          </p:cNvPr>
-          <p:cNvSpPr>
-            <a:spLocks xmlns:a="http://schemas.openxmlformats.org/drawingml/2006/main" noGrp="1"/>
-          </p:cNvSpPr>
-          <p:nvPr/>
-        </p:nvSpPr>
-        <p:spPr>
-          <a:xfrm xmlns:a="http://schemas.openxmlformats.org/drawingml/2006/main">
-            <a:off x="5143500" y="3333750"/>
-            <a:ext cx="1714500" cy="666750"/>
-          </a:xfrm>
-          <a:prstGeom xmlns:a="http://schemas.openxmlformats.org/drawingml/2006/main" prst="rect">
-            <a:avLst/>
-          </a:prstGeom>
-          <a:noFill xmlns:a="http://schemas.openxmlformats.org/drawingml/2006/main"/>
-          <a:ln xmlns:a="http://schemas.openxmlformats.org/drawingml/2006/main" w="0">
-            <a:noFill/>
-          </a:ln>
-        </p:spPr>
-        <p:txBody>
-          <a:bodyPr xmlns:a="http://schemas.openxmlformats.org/drawingml/2006/main" lIns="0" tIns="0" rIns="0" bIns="0" anchor="ctr"/>
-          <a:lstStyle xmlns:a="http://schemas.openxmlformats.org/drawingml/2006/main"/>
-          <a:p xmlns:a="http://schemas.openxmlformats.org/drawingml/2006/main">
-            <a:pPr algn="ctr">
-              <a:lnSpc>
-                <a:spcPct val="118000"/>
-              </a:lnSpc>
-              <a:buNone/>
-              <a:defRPr sz="2200" b="0">
-                <a:solidFill>
-                  <a:srgbClr val="1F4D78"/>
-                </a:solidFill>
-                <a:latin typeface="微软雅黑"/>
-                <a:ea typeface="微软雅黑"/>
-                <a:cs typeface="微软雅黑"/>
-              </a:defRPr>
-            </a:pPr>
-            <a:r>
-              <a:rPr sz="2200" b="0">
-                <a:solidFill>
-                  <a:srgbClr val="1F4D78"/>
-                </a:solidFill>
-                <a:latin typeface="微软雅黑"/>
-                <a:ea typeface="微软雅黑"/>
-                <a:cs typeface="微软雅黑"/>
-              </a:rPr>
-              <a:t>失败恢复</a:t>
-            </a:r>
-          </a:p>
-        </p:txBody>
-      </p:sp>
-      <p:sp>
-        <p:nvSpPr>
-          <p:cNvPr id="29" name="chain-arrow-2">
-            <a:extLst xmlns:a="http://schemas.openxmlformats.org/drawingml/2006/main">
-              <a:ext uri="{FF2B5EF4-FFF2-40B4-BE49-F238E27FC236}">
-                <a16:creationId xmlns:a16="http://schemas.microsoft.com/office/drawing/2014/main" id="{056BEAF3-8DB6-407A-B420-D9B440691532}"/>
-              </a:ext>
-            </a:extLst>
-          </p:cNvPr>
-          <p:cNvSpPr>
-            <a:spLocks xmlns:a="http://schemas.openxmlformats.org/drawingml/2006/main" noGrp="1"/>
-          </p:cNvSpPr>
-          <p:nvPr/>
-        </p:nvSpPr>
-        <p:spPr>
-          <a:xfrm xmlns:a="http://schemas.openxmlformats.org/drawingml/2006/main">
-            <a:off x="6858000" y="3505200"/>
-            <a:ext cx="500063" cy="323850"/>
-          </a:xfrm>
-          <a:prstGeom xmlns:a="http://schemas.openxmlformats.org/drawingml/2006/main" prst="rect">
-            <a:avLst/>
-          </a:prstGeom>
-          <a:noFill xmlns:a="http://schemas.openxmlformats.org/drawingml/2006/main"/>
-          <a:ln xmlns:a="http://schemas.openxmlformats.org/drawingml/2006/main" w="0">
-            <a:noFill/>
-          </a:ln>
-        </p:spPr>
-        <p:txBody>
-          <a:bodyPr xmlns:a="http://schemas.openxmlformats.org/drawingml/2006/main" lIns="0" tIns="0" rIns="0" bIns="0" anchor="ctr"/>
-          <a:lstStyle xmlns:a="http://schemas.openxmlformats.org/drawingml/2006/main"/>
-          <a:p xmlns:a="http://schemas.openxmlformats.org/drawingml/2006/main">
-            <a:pPr algn="ctr">
-              <a:lnSpc>
-                <a:spcPct val="118000"/>
-              </a:lnSpc>
-              <a:buNone/>
-              <a:defRPr sz="2400" b="0">
-                <a:solidFill>
-                  <a:srgbClr val="1F4D78"/>
-                </a:solidFill>
-                <a:latin typeface="微软雅黑"/>
-                <a:ea typeface="微软雅黑"/>
-                <a:cs typeface="微软雅黑"/>
-              </a:defRPr>
-            </a:pPr>
-            <a:r>
-              <a:rPr sz="2400" b="0">
-                <a:solidFill>
-                  <a:srgbClr val="1F4D78"/>
-                </a:solidFill>
-                <a:latin typeface="微软雅黑"/>
-                <a:ea typeface="微软雅黑"/>
-                <a:cs typeface="微软雅黑"/>
-              </a:rPr>
-              <a:t>→</a:t>
-            </a:r>
-          </a:p>
-        </p:txBody>
-      </p:sp>
-      <p:sp>
-        <p:nvSpPr>
-          <p:cNvPr id="30" name="chain-sub-2">
-            <a:extLst xmlns:a="http://schemas.openxmlformats.org/drawingml/2006/main">
-              <a:ext uri="{FF2B5EF4-FFF2-40B4-BE49-F238E27FC236}">
-                <a16:creationId xmlns:a16="http://schemas.microsoft.com/office/drawing/2014/main" id="{243192A4-EE05-42F4-A65D-0D3BE1D44208}"/>
-              </a:ext>
-            </a:extLst>
-          </p:cNvPr>
-          <p:cNvSpPr>
-            <a:spLocks xmlns:a="http://schemas.openxmlformats.org/drawingml/2006/main" noGrp="1"/>
-          </p:cNvSpPr>
-          <p:nvPr/>
-        </p:nvSpPr>
-        <p:spPr>
-          <a:xfrm xmlns:a="http://schemas.openxmlformats.org/drawingml/2006/main">
-            <a:off x="5143500" y="4210050"/>
-            <a:ext cx="1714500" cy="571500"/>
-          </a:xfrm>
-          <a:prstGeom xmlns:a="http://schemas.openxmlformats.org/drawingml/2006/main" prst="rect">
-            <a:avLst/>
-          </a:prstGeom>
-          <a:noFill xmlns:a="http://schemas.openxmlformats.org/drawingml/2006/main"/>
-          <a:ln xmlns:a="http://schemas.openxmlformats.org/drawingml/2006/main" w="0">
-            <a:noFill/>
-          </a:ln>
-        </p:spPr>
-        <p:txBody>
-          <a:bodyPr xmlns:a="http://schemas.openxmlformats.org/drawingml/2006/main" lIns="0" tIns="0" rIns="0" bIns="0" anchor="t"/>
-          <a:lstStyle xmlns:a="http://schemas.openxmlformats.org/drawingml/2006/main"/>
-          <a:p xmlns:a="http://schemas.openxmlformats.org/drawingml/2006/main">
-            <a:pPr algn="ctr">
-              <a:lnSpc>
-                <a:spcPct val="118000"/>
-              </a:lnSpc>
-              <a:buNone/>
-              <a:defRPr sz="2000" b="0">
-                <a:solidFill>
-                  <a:srgbClr val="66727D"/>
-                </a:solidFill>
-                <a:latin typeface="微软雅黑"/>
-                <a:ea typeface="微软雅黑"/>
-                <a:cs typeface="微软雅黑"/>
-              </a:defRPr>
-            </a:pPr>
-            <a:r>
-              <a:rPr sz="2000" b="0">
-                <a:solidFill>
-                  <a:srgbClr val="66727D"/>
-                </a:solidFill>
-                <a:latin typeface="微软雅黑"/>
-                <a:ea typeface="微软雅黑"/>
-                <a:cs typeface="微软雅黑"/>
-              </a:rPr>
-              <a:t>留痕 / 人工停止</a:t>
-            </a:r>
-          </a:p>
-        </p:txBody>
-      </p:sp>
-      <p:sp>
-        <p:nvSpPr>
-          <p:cNvPr id="31" name="chain-line-3">
-            <a:extLst xmlns:a="http://schemas.openxmlformats.org/drawingml/2006/main">
-              <a:ext uri="{FF2B5EF4-FFF2-40B4-BE49-F238E27FC236}">
-                <a16:creationId xmlns:a16="http://schemas.microsoft.com/office/drawing/2014/main" id="{8796F0C3-2AE4-48E6-BA19-186FFBFD7921}"/>
-              </a:ext>
-            </a:extLst>
-          </p:cNvPr>
-          <p:cNvSpPr>
-            <a:spLocks xmlns:a="http://schemas.openxmlformats.org/drawingml/2006/main" noGrp="1"/>
-          </p:cNvSpPr>
-          <p:nvPr/>
-        </p:nvSpPr>
-        <p:spPr>
-          <a:xfrm xmlns:a="http://schemas.openxmlformats.org/drawingml/2006/main">
-            <a:off x="7358063" y="4057650"/>
-            <a:ext cx="1714500" cy="14288"/>
-          </a:xfrm>
-          <a:prstGeom xmlns:a="http://schemas.openxmlformats.org/drawingml/2006/main" prst="rect">
-            <a:avLst/>
-          </a:prstGeom>
-          <a:solidFill xmlns:a="http://schemas.openxmlformats.org/drawingml/2006/main">
-            <a:srgbClr val="1F4D78"/>
-          </a:solidFill>
-          <a:ln xmlns:a="http://schemas.openxmlformats.org/drawingml/2006/main" w="0">
-            <a:noFill/>
-          </a:ln>
-        </p:spPr>
-      </p:sp>
-      <p:sp>
-        <p:nvSpPr>
-          <p:cNvPr id="32" name="chain-3">
-            <a:extLst xmlns:a="http://schemas.openxmlformats.org/drawingml/2006/main">
-              <a:ext uri="{FF2B5EF4-FFF2-40B4-BE49-F238E27FC236}">
-                <a16:creationId xmlns:a16="http://schemas.microsoft.com/office/drawing/2014/main" id="{1F3C37CE-C1EC-456C-BDF8-6360F8281949}"/>
-              </a:ext>
-            </a:extLst>
-          </p:cNvPr>
-          <p:cNvSpPr>
-            <a:spLocks xmlns:a="http://schemas.openxmlformats.org/drawingml/2006/main" noGrp="1"/>
-          </p:cNvSpPr>
-          <p:nvPr/>
-        </p:nvSpPr>
-        <p:spPr>
-          <a:xfrm xmlns:a="http://schemas.openxmlformats.org/drawingml/2006/main">
-            <a:off x="7358063" y="3333750"/>
-            <a:ext cx="1714500" cy="666750"/>
-          </a:xfrm>
-          <a:prstGeom xmlns:a="http://schemas.openxmlformats.org/drawingml/2006/main" prst="rect">
-            <a:avLst/>
-          </a:prstGeom>
-          <a:noFill xmlns:a="http://schemas.openxmlformats.org/drawingml/2006/main"/>
-          <a:ln xmlns:a="http://schemas.openxmlformats.org/drawingml/2006/main" w="0">
-            <a:noFill/>
-          </a:ln>
-        </p:spPr>
-        <p:txBody>
-          <a:bodyPr xmlns:a="http://schemas.openxmlformats.org/drawingml/2006/main" lIns="0" tIns="0" rIns="0" bIns="0" anchor="ctr"/>
-          <a:lstStyle xmlns:a="http://schemas.openxmlformats.org/drawingml/2006/main"/>
-          <a:p xmlns:a="http://schemas.openxmlformats.org/drawingml/2006/main">
-            <a:pPr algn="ctr">
-              <a:lnSpc>
-                <a:spcPct val="118000"/>
-              </a:lnSpc>
-              <a:buNone/>
-              <a:defRPr sz="2200" b="0">
-                <a:solidFill>
-                  <a:srgbClr val="1F4D78"/>
-                </a:solidFill>
-                <a:latin typeface="微软雅黑"/>
-                <a:ea typeface="微软雅黑"/>
-                <a:cs typeface="微软雅黑"/>
-              </a:defRPr>
-            </a:pPr>
-            <a:r>
-              <a:rPr sz="2200" b="0">
-                <a:solidFill>
-                  <a:srgbClr val="1F4D78"/>
-                </a:solidFill>
-                <a:latin typeface="微软雅黑"/>
-                <a:ea typeface="微软雅黑"/>
-                <a:cs typeface="微软雅黑"/>
-              </a:rPr>
-              <a:t>原始输出</a:t>
-            </a:r>
-          </a:p>
-        </p:txBody>
-      </p:sp>
-      <p:sp>
-        <p:nvSpPr>
-          <p:cNvPr id="33" name="chain-arrow-3">
-            <a:extLst xmlns:a="http://schemas.openxmlformats.org/drawingml/2006/main">
-              <a:ext uri="{FF2B5EF4-FFF2-40B4-BE49-F238E27FC236}">
-                <a16:creationId xmlns:a16="http://schemas.microsoft.com/office/drawing/2014/main" id="{8A9A13F2-A901-4ADC-A847-698DBA7E3D34}"/>
-              </a:ext>
-            </a:extLst>
-          </p:cNvPr>
-          <p:cNvSpPr>
-            <a:spLocks xmlns:a="http://schemas.openxmlformats.org/drawingml/2006/main" noGrp="1"/>
-          </p:cNvSpPr>
-          <p:nvPr/>
-        </p:nvSpPr>
-        <p:spPr>
-          <a:xfrm xmlns:a="http://schemas.openxmlformats.org/drawingml/2006/main">
-            <a:off x="9072563" y="3505200"/>
-            <a:ext cx="500063" cy="323850"/>
-          </a:xfrm>
-          <a:prstGeom xmlns:a="http://schemas.openxmlformats.org/drawingml/2006/main" prst="rect">
-            <a:avLst/>
-          </a:prstGeom>
-          <a:noFill xmlns:a="http://schemas.openxmlformats.org/drawingml/2006/main"/>
-          <a:ln xmlns:a="http://schemas.openxmlformats.org/drawingml/2006/main" w="0">
-            <a:noFill/>
-          </a:ln>
-        </p:spPr>
-        <p:txBody>
-          <a:bodyPr xmlns:a="http://schemas.openxmlformats.org/drawingml/2006/main" lIns="0" tIns="0" rIns="0" bIns="0" anchor="ctr"/>
-          <a:lstStyle xmlns:a="http://schemas.openxmlformats.org/drawingml/2006/main"/>
-          <a:p xmlns:a="http://schemas.openxmlformats.org/drawingml/2006/main">
-            <a:pPr algn="ctr">
-              <a:lnSpc>
-                <a:spcPct val="118000"/>
-              </a:lnSpc>
-              <a:buNone/>
-              <a:defRPr sz="2400" b="0">
-                <a:solidFill>
-                  <a:srgbClr val="1F4D78"/>
-                </a:solidFill>
-                <a:latin typeface="微软雅黑"/>
-                <a:ea typeface="微软雅黑"/>
-                <a:cs typeface="微软雅黑"/>
-              </a:defRPr>
-            </a:pPr>
-            <a:r>
-              <a:rPr sz="2400" b="0">
-                <a:solidFill>
-                  <a:srgbClr val="1F4D78"/>
-                </a:solidFill>
-                <a:latin typeface="微软雅黑"/>
-                <a:ea typeface="微软雅黑"/>
-                <a:cs typeface="微软雅黑"/>
-              </a:rPr>
-              <a:t>→</a:t>
-            </a:r>
-          </a:p>
-        </p:txBody>
-      </p:sp>
-      <p:sp>
-        <p:nvSpPr>
-          <p:cNvPr id="34" name="chain-sub-3">
-            <a:extLst xmlns:a="http://schemas.openxmlformats.org/drawingml/2006/main">
-              <a:ext uri="{FF2B5EF4-FFF2-40B4-BE49-F238E27FC236}">
-                <a16:creationId xmlns:a16="http://schemas.microsoft.com/office/drawing/2014/main" id="{9329C75D-B494-4828-82BC-842325B9F3E0}"/>
-              </a:ext>
-            </a:extLst>
-          </p:cNvPr>
-          <p:cNvSpPr>
-            <a:spLocks xmlns:a="http://schemas.openxmlformats.org/drawingml/2006/main" noGrp="1"/>
-          </p:cNvSpPr>
-          <p:nvPr/>
-        </p:nvSpPr>
-        <p:spPr>
-          <a:xfrm xmlns:a="http://schemas.openxmlformats.org/drawingml/2006/main">
-            <a:off x="7358063" y="4210050"/>
-            <a:ext cx="1714500" cy="571500"/>
-          </a:xfrm>
-          <a:prstGeom xmlns:a="http://schemas.openxmlformats.org/drawingml/2006/main" prst="rect">
-            <a:avLst/>
-          </a:prstGeom>
-          <a:noFill xmlns:a="http://schemas.openxmlformats.org/drawingml/2006/main"/>
-          <a:ln xmlns:a="http://schemas.openxmlformats.org/drawingml/2006/main" w="0">
-            <a:noFill/>
-          </a:ln>
-        </p:spPr>
-        <p:txBody>
-          <a:bodyPr xmlns:a="http://schemas.openxmlformats.org/drawingml/2006/main" lIns="0" tIns="0" rIns="0" bIns="0" anchor="t"/>
-          <a:lstStyle xmlns:a="http://schemas.openxmlformats.org/drawingml/2006/main"/>
-          <a:p xmlns:a="http://schemas.openxmlformats.org/drawingml/2006/main">
-            <a:pPr algn="ctr">
-              <a:lnSpc>
-                <a:spcPct val="118000"/>
-              </a:lnSpc>
-              <a:buNone/>
-              <a:defRPr sz="2000" b="0">
-                <a:solidFill>
-                  <a:srgbClr val="66727D"/>
-                </a:solidFill>
-                <a:latin typeface="微软雅黑"/>
-                <a:ea typeface="微软雅黑"/>
-                <a:cs typeface="微软雅黑"/>
-              </a:defRPr>
-            </a:pPr>
-            <a:r>
-              <a:rPr sz="2000" b="0">
-                <a:solidFill>
-                  <a:srgbClr val="66727D"/>
-                </a:solidFill>
-                <a:latin typeface="微软雅黑"/>
-                <a:ea typeface="微软雅黑"/>
-                <a:cs typeface="微软雅黑"/>
-              </a:rPr>
-              <a:t>全部留痕</a:t>
-            </a:r>
-          </a:p>
-        </p:txBody>
-      </p:sp>
-      <p:sp>
-        <p:nvSpPr>
-          <p:cNvPr id="35" name="chain-line-4">
-            <a:extLst xmlns:a="http://schemas.openxmlformats.org/drawingml/2006/main">
-              <a:ext uri="{FF2B5EF4-FFF2-40B4-BE49-F238E27FC236}">
-                <a16:creationId xmlns:a16="http://schemas.microsoft.com/office/drawing/2014/main" id="{F7320817-9A9D-4AD7-86E8-D5C8F8B73A89}"/>
-              </a:ext>
-            </a:extLst>
-          </p:cNvPr>
-          <p:cNvSpPr>
-            <a:spLocks xmlns:a="http://schemas.openxmlformats.org/drawingml/2006/main" noGrp="1"/>
-          </p:cNvSpPr>
-          <p:nvPr/>
-        </p:nvSpPr>
-        <p:spPr>
-          <a:xfrm xmlns:a="http://schemas.openxmlformats.org/drawingml/2006/main">
-            <a:off x="9572625" y="4057650"/>
-            <a:ext cx="1714500" cy="14288"/>
-          </a:xfrm>
-          <a:prstGeom xmlns:a="http://schemas.openxmlformats.org/drawingml/2006/main" prst="rect">
-            <a:avLst/>
-          </a:prstGeom>
-          <a:solidFill xmlns:a="http://schemas.openxmlformats.org/drawingml/2006/main">
-            <a:srgbClr val="1F4D78"/>
-          </a:solidFill>
-          <a:ln xmlns:a="http://schemas.openxmlformats.org/drawingml/2006/main" w="0">
-            <a:noFill/>
-          </a:ln>
-        </p:spPr>
-      </p:sp>
-      <p:sp>
-        <p:nvSpPr>
-          <p:cNvPr id="36" name="chain-4">
-            <a:extLst xmlns:a="http://schemas.openxmlformats.org/drawingml/2006/main">
-              <a:ext uri="{FF2B5EF4-FFF2-40B4-BE49-F238E27FC236}">
-                <a16:creationId xmlns:a16="http://schemas.microsoft.com/office/drawing/2014/main" id="{9CCC8FC4-5106-46FE-887B-96205BBE9F93}"/>
-              </a:ext>
-            </a:extLst>
-          </p:cNvPr>
-          <p:cNvSpPr>
-            <a:spLocks xmlns:a="http://schemas.openxmlformats.org/drawingml/2006/main" noGrp="1"/>
-          </p:cNvSpPr>
-          <p:nvPr/>
-        </p:nvSpPr>
-        <p:spPr>
-          <a:xfrm xmlns:a="http://schemas.openxmlformats.org/drawingml/2006/main">
-            <a:off x="9572625" y="3333750"/>
-            <a:ext cx="1714500" cy="666750"/>
-          </a:xfrm>
-          <a:prstGeom xmlns:a="http://schemas.openxmlformats.org/drawingml/2006/main" prst="rect">
-            <a:avLst/>
-          </a:prstGeom>
-          <a:noFill xmlns:a="http://schemas.openxmlformats.org/drawingml/2006/main"/>
-          <a:ln xmlns:a="http://schemas.openxmlformats.org/drawingml/2006/main" w="0">
-            <a:noFill/>
-          </a:ln>
-        </p:spPr>
-        <p:txBody>
-          <a:bodyPr xmlns:a="http://schemas.openxmlformats.org/drawingml/2006/main" lIns="0" tIns="0" rIns="0" bIns="0" anchor="ctr"/>
-          <a:lstStyle xmlns:a="http://schemas.openxmlformats.org/drawingml/2006/main"/>
-          <a:p xmlns:a="http://schemas.openxmlformats.org/drawingml/2006/main">
-            <a:pPr algn="ctr">
-              <a:lnSpc>
-                <a:spcPct val="118000"/>
-              </a:lnSpc>
-              <a:buNone/>
-              <a:defRPr sz="2200" b="0">
-                <a:solidFill>
-                  <a:srgbClr val="1F4D78"/>
-                </a:solidFill>
-                <a:latin typeface="微软雅黑"/>
-                <a:ea typeface="微软雅黑"/>
-                <a:cs typeface="微软雅黑"/>
-              </a:defRPr>
-            </a:pPr>
-            <a:r>
-              <a:rPr sz="2200" b="0">
-                <a:solidFill>
-                  <a:srgbClr val="1F4D78"/>
-                </a:solidFill>
-                <a:latin typeface="微软雅黑"/>
-                <a:ea typeface="微软雅黑"/>
-                <a:cs typeface="微软雅黑"/>
-              </a:rPr>
-              <a:t>独立评价</a:t>
-            </a:r>
-          </a:p>
-        </p:txBody>
-      </p:sp>
-      <p:sp>
-        <p:nvSpPr>
-          <p:cNvPr id="37" name="chain-sub-4">
-            <a:extLst xmlns:a="http://schemas.openxmlformats.org/drawingml/2006/main">
-              <a:ext uri="{FF2B5EF4-FFF2-40B4-BE49-F238E27FC236}">
-                <a16:creationId xmlns:a16="http://schemas.microsoft.com/office/drawing/2014/main" id="{37C7A5EE-6D87-4343-8784-CE3814CA9164}"/>
-              </a:ext>
-            </a:extLst>
-          </p:cNvPr>
-          <p:cNvSpPr>
-            <a:spLocks xmlns:a="http://schemas.openxmlformats.org/drawingml/2006/main" noGrp="1"/>
-          </p:cNvSpPr>
-          <p:nvPr/>
-        </p:nvSpPr>
-        <p:spPr>
-          <a:xfrm xmlns:a="http://schemas.openxmlformats.org/drawingml/2006/main">
-            <a:off x="9572625" y="4210050"/>
-            <a:ext cx="1714500" cy="571500"/>
-          </a:xfrm>
-          <a:prstGeom xmlns:a="http://schemas.openxmlformats.org/drawingml/2006/main" prst="rect">
-            <a:avLst/>
-          </a:prstGeom>
-          <a:noFill xmlns:a="http://schemas.openxmlformats.org/drawingml/2006/main"/>
-          <a:ln xmlns:a="http://schemas.openxmlformats.org/drawingml/2006/main" w="0">
-            <a:noFill/>
-          </a:ln>
-        </p:spPr>
-        <p:txBody>
-          <a:bodyPr xmlns:a="http://schemas.openxmlformats.org/drawingml/2006/main" lIns="0" tIns="0" rIns="0" bIns="0" anchor="t"/>
-          <a:lstStyle xmlns:a="http://schemas.openxmlformats.org/drawingml/2006/main"/>
-          <a:p xmlns:a="http://schemas.openxmlformats.org/drawingml/2006/main">
-            <a:pPr algn="ctr">
-              <a:lnSpc>
-                <a:spcPct val="118000"/>
-              </a:lnSpc>
-              <a:buNone/>
-              <a:defRPr sz="2000" b="0">
-                <a:solidFill>
-                  <a:srgbClr val="66727D"/>
-                </a:solidFill>
-                <a:latin typeface="微软雅黑"/>
-                <a:ea typeface="微软雅黑"/>
-                <a:cs typeface="微软雅黑"/>
-              </a:defRPr>
-            </a:pPr>
-            <a:r>
-              <a:rPr sz="2000" b="0">
-                <a:solidFill>
-                  <a:srgbClr val="66727D"/>
-                </a:solidFill>
-                <a:latin typeface="微软雅黑"/>
-                <a:ea typeface="微软雅黑"/>
-                <a:cs typeface="微软雅黑"/>
-              </a:rPr>
-              <a:t>人工基准 / 盲评</a:t>
-            </a:r>
-          </a:p>
-        </p:txBody>
-      </p:sp>
-      <p:sp>
-        <p:nvSpPr>
-          <p:cNvPr id="39" name="queue-boundary">
-            <a:extLst xmlns:a="http://schemas.openxmlformats.org/drawingml/2006/main">
-              <a:ext uri="{FF2B5EF4-FFF2-40B4-BE49-F238E27FC236}">
-                <a16:creationId xmlns:a16="http://schemas.microsoft.com/office/drawing/2014/main" id="{880E9D8B-687D-4926-A0CE-F614314210BD}"/>
-              </a:ext>
-            </a:extLst>
-          </p:cNvPr>
-          <p:cNvSpPr>
-            <a:spLocks xmlns:a="http://schemas.openxmlformats.org/drawingml/2006/main" noGrp="1"/>
-          </p:cNvSpPr>
-          <p:nvPr/>
-        </p:nvSpPr>
-        <p:spPr>
-          <a:xfrm xmlns:a="http://schemas.openxmlformats.org/drawingml/2006/main">
-            <a:off x="1428750" y="5191125"/>
-            <a:ext cx="9334500" cy="457200"/>
-          </a:xfrm>
-          <a:prstGeom xmlns:a="http://schemas.openxmlformats.org/drawingml/2006/main" prst="rect">
-            <a:avLst/>
-          </a:prstGeom>
-          <a:noFill xmlns:a="http://schemas.openxmlformats.org/drawingml/2006/main"/>
-          <a:ln xmlns:a="http://schemas.openxmlformats.org/drawingml/2006/main" w="0">
-            <a:noFill/>
-          </a:ln>
-        </p:spPr>
-        <p:txBody>
-          <a:bodyPr xmlns:a="http://schemas.openxmlformats.org/drawingml/2006/main" lIns="0" tIns="0" rIns="0" bIns="0" anchor="t"/>
-          <a:lstStyle xmlns:a="http://schemas.openxmlformats.org/drawingml/2006/main"/>
-          <a:p xmlns:a="http://schemas.openxmlformats.org/drawingml/2006/main">
-            <a:pPr algn="ctr">
-              <a:lnSpc>
-                <a:spcPct val="118000"/>
-              </a:lnSpc>
-              <a:buNone/>
-              <a:defRPr sz="2200" b="0">
-                <a:solidFill>
-                  <a:srgbClr val="1F4D78"/>
-                </a:solidFill>
-                <a:latin typeface="微软雅黑"/>
-                <a:ea typeface="微软雅黑"/>
-                <a:cs typeface="微软雅黑"/>
-              </a:defRPr>
-            </a:pPr>
-            <a:r>
-              <a:rPr sz="2200" b="0">
-                <a:solidFill>
-                  <a:srgbClr val="1F4D78"/>
-                </a:solidFill>
-                <a:latin typeface="微软雅黑"/>
-                <a:ea typeface="微软雅黑"/>
-                <a:cs typeface="微软雅黑"/>
-              </a:rPr>
-              <a:t>配置全程冻结；评价结果不回流调参。</a:t>
+              <a:t>固定队列展示执行控制，不自动构成优化循环。</a:t>
             </a:r>
           </a:p>
         </p:txBody>
@@ -6739,7 +8080,7 @@
                 <a:ea typeface="微软雅黑"/>
                 <a:cs typeface="微软雅黑"/>
               </a:rPr>
-              <a:t>失败保留需要一张完整运行账本</a:t>
+              <a:t>失败与恢复保存在同一本账中</a:t>
             </a:r>
             <a:endParaRPr/>
           </a:p>
@@ -6773,76 +8114,346 @@
           </a:p>
         </p:txBody>
       </p:sp>
-      <p:sp>
-        <p:nvSpPr>
-          <p:cNvPr id="6" name="brand-header">
-            <a:extLst xmlns:a="http://schemas.openxmlformats.org/drawingml/2006/main">
-              <a:ext uri="{FF2B5EF4-FFF2-40B4-BE49-F238E27FC236}">
-                <a16:creationId xmlns:a16="http://schemas.microsoft.com/office/drawing/2014/main" id="{9A345A71-A642-498C-B7D6-C5A10F1F74C3}"/>
-              </a:ext>
-            </a:extLst>
-          </p:cNvPr>
-          <p:cNvSpPr>
-            <a:spLocks xmlns:a="http://schemas.openxmlformats.org/drawingml/2006/main" noGrp="1"/>
-          </p:cNvSpPr>
-          <p:nvPr/>
-        </p:nvSpPr>
-        <p:spPr>
-          <a:xfrm xmlns:a="http://schemas.openxmlformats.org/drawingml/2006/main">
-            <a:off x="0" y="0"/>
-            <a:ext cx="11887200" cy="685800"/>
-          </a:xfrm>
-          <a:prstGeom xmlns:a="http://schemas.openxmlformats.org/drawingml/2006/main" prst="rect">
-            <a:avLst/>
-          </a:prstGeom>
-          <a:solidFill xmlns:a="http://schemas.openxmlformats.org/drawingml/2006/main">
-            <a:srgbClr val="C8161E"/>
-          </a:solidFill>
-          <a:ln xmlns:a="http://schemas.openxmlformats.org/drawingml/2006/main" w="0">
-            <a:noFill/>
-          </a:ln>
-        </p:spPr>
-      </p:sp>
-      <p:pic>
-        <p:nvPicPr>
-          <p:cNvPr id="30" name=""/>
-          <p:cNvPicPr>
-            <a:picLocks xmlns:a="http://schemas.openxmlformats.org/drawingml/2006/main" noChangeAspect="1"/>
-          </p:cNvPicPr>
-          <p:nvPr/>
-        </p:nvPicPr>
-        <p:blipFill>
-          <a:blip xmlns:r="http://schemas.openxmlformats.org/officeDocument/2006/relationships" xmlns:a="http://schemas.openxmlformats.org/drawingml/2006/main" r:embed="R4e059fbce28547b7"/>
-          <a:stretch xmlns:a="http://schemas.openxmlformats.org/drawingml/2006/main"/>
-        </p:blipFill>
-        <p:spPr>
-          <a:xfrm xmlns:a="http://schemas.openxmlformats.org/drawingml/2006/main">
-            <a:off x="323850" y="76200"/>
-            <a:ext cx="533400" cy="533400"/>
-          </a:xfrm>
-          <a:prstGeom xmlns:a="http://schemas.openxmlformats.org/drawingml/2006/main" prst="rect">
-            <a:avLst/>
-          </a:prstGeom>
-        </p:spPr>
-      </p:pic>
-      <p:sp>
-        <p:nvSpPr>
-          <p:cNvPr id="8" name="brand-title">
-            <a:extLst xmlns:a="http://schemas.openxmlformats.org/drawingml/2006/main">
-              <a:ext uri="{FF2B5EF4-FFF2-40B4-BE49-F238E27FC236}">
-                <a16:creationId xmlns:a16="http://schemas.microsoft.com/office/drawing/2014/main" id="{9DAE3D05-D7C8-4409-9787-C60589CCF936}"/>
-              </a:ext>
-            </a:extLst>
-          </p:cNvPr>
-          <p:cNvSpPr>
-            <a:spLocks xmlns:a="http://schemas.openxmlformats.org/drawingml/2006/main" noGrp="1"/>
-          </p:cNvSpPr>
-          <p:nvPr/>
-        </p:nvSpPr>
-        <p:spPr>
-          <a:xfrm xmlns:a="http://schemas.openxmlformats.org/drawingml/2006/main">
-            <a:off x="1028700" y="66675"/>
-            <a:ext cx="10477500" cy="552450"/>
+      <p:graphicFrame>
+        <p:nvGraphicFramePr>
+          <p:cNvPr id="10" name="native-table-314"/>
+          <p:cNvGraphicFramePr/>
+          <p:nvPr/>
+        </p:nvGraphicFramePr>
+        <p:xfrm>
+          <a:off xmlns:a="http://schemas.openxmlformats.org/drawingml/2006/main" x="609600" y="1476375"/>
+          <a:ext xmlns:a="http://schemas.openxmlformats.org/drawingml/2006/main" cx="10972800" cy="3257550"/>
+        </p:xfrm>
+        <a:graphic xmlns:a="http://schemas.openxmlformats.org/drawingml/2006/main">
+          <a:graphicData uri="http://schemas.openxmlformats.org/drawingml/2006/table">
+            <a:tbl>
+              <a:tblPr/>
+              <a:tblGrid>
+                <a:gridCol w="2781300"/>
+                <a:gridCol w="8191500"/>
+              </a:tblGrid>
+              <a:tr h="542925">
+                <a:tc>
+                  <a:txBody>
+                    <a:bodyPr/>
+                    <a:lstStyle/>
+                    <a:p>
+                      <a:r>
+                        <a:rPr sz="2000" b="1">
+                          <a:solidFill>
+                            <a:srgbClr val="1F4D78"/>
+                          </a:solidFill>
+                          <a:latin typeface="微软雅黑"/>
+                          <a:ea typeface="微软雅黑"/>
+                          <a:cs typeface="微软雅黑"/>
+                        </a:rPr>
+                        <a:t>实际记录</a:t>
+                      </a:r>
+                    </a:p>
+                  </a:txBody>
+                  <a:tcPr marL="123825" marR="123825" marT="85725" marB="85725" anchor="ctr">
+                    <a:solidFill>
+                      <a:srgbClr val="F4F6F8"/>
+                    </a:solidFill>
+                  </a:tcPr>
+                </a:tc>
+                <a:tc>
+                  <a:txBody>
+                    <a:bodyPr/>
+                    <a:lstStyle/>
+                    <a:p>
+                      <a:r>
+                        <a:rPr sz="2000" b="1">
+                          <a:solidFill>
+                            <a:srgbClr val="1F4D78"/>
+                          </a:solidFill>
+                          <a:latin typeface="微软雅黑"/>
+                          <a:ea typeface="微软雅黑"/>
+                          <a:cs typeface="微软雅黑"/>
+                        </a:rPr>
+                        <a:t>回答的问题</a:t>
+                      </a:r>
+                    </a:p>
+                  </a:txBody>
+                  <a:tcPr marL="123825" marR="123825" marT="85725" marB="85725" anchor="ctr">
+                    <a:solidFill>
+                      <a:srgbClr val="F4F6F8"/>
+                    </a:solidFill>
+                  </a:tcPr>
+                </a:tc>
+              </a:tr>
+              <a:tr h="542925">
+                <a:tc>
+                  <a:txBody>
+                    <a:bodyPr/>
+                    <a:lstStyle/>
+                    <a:p>
+                      <a:r>
+                        <a:rPr sz="2000">
+                          <a:solidFill>
+                            <a:srgbClr val="27333D"/>
+                          </a:solidFill>
+                          <a:latin typeface="微软雅黑"/>
+                          <a:ea typeface="微软雅黑"/>
+                          <a:cs typeface="微软雅黑"/>
+                        </a:rPr>
+                        <a:t>job_id</a:t>
+                      </a:r>
+                    </a:p>
+                  </a:txBody>
+                  <a:tcPr marL="123825" marR="123825" marT="85725" marB="85725" anchor="ctr">
+                    <a:solidFill>
+                      <a:srgbClr val="FFFFFF"/>
+                    </a:solidFill>
+                  </a:tcPr>
+                </a:tc>
+                <a:tc>
+                  <a:txBody>
+                    <a:bodyPr/>
+                    <a:lstStyle/>
+                    <a:p>
+                      <a:r>
+                        <a:rPr sz="2000">
+                          <a:solidFill>
+                            <a:srgbClr val="27333D"/>
+                          </a:solidFill>
+                          <a:latin typeface="微软雅黑"/>
+                          <a:ea typeface="微软雅黑"/>
+                          <a:cs typeface="微软雅黑"/>
+                        </a:rPr>
+                        <a:t>哪个固定任务，如 T02-card</a:t>
+                      </a:r>
+                    </a:p>
+                  </a:txBody>
+                  <a:tcPr marL="123825" marR="123825" marT="85725" marB="85725" anchor="ctr">
+                    <a:solidFill>
+                      <a:srgbClr val="FFFFFF"/>
+                    </a:solidFill>
+                  </a:tcPr>
+                </a:tc>
+              </a:tr>
+              <a:tr h="542925">
+                <a:tc>
+                  <a:txBody>
+                    <a:bodyPr/>
+                    <a:lstStyle/>
+                    <a:p>
+                      <a:r>
+                        <a:rPr sz="2000">
+                          <a:solidFill>
+                            <a:srgbClr val="27333D"/>
+                          </a:solidFill>
+                          <a:latin typeface="微软雅黑"/>
+                          <a:ea typeface="微软雅黑"/>
+                          <a:cs typeface="微软雅黑"/>
+                        </a:rPr>
+                        <a:t>run_id</a:t>
+                      </a:r>
+                    </a:p>
+                  </a:txBody>
+                  <a:tcPr marL="123825" marR="123825" marT="85725" marB="85725" anchor="ctr">
+                    <a:solidFill>
+                      <a:srgbClr val="FFFFFF"/>
+                    </a:solidFill>
+                  </a:tcPr>
+                </a:tc>
+                <a:tc>
+                  <a:txBody>
+                    <a:bodyPr/>
+                    <a:lstStyle/>
+                    <a:p>
+                      <a:r>
+                        <a:rPr sz="2000">
+                          <a:solidFill>
+                            <a:srgbClr val="27333D"/>
+                          </a:solidFill>
+                          <a:latin typeface="微软雅黑"/>
+                          <a:ea typeface="微软雅黑"/>
+                          <a:cs typeface="微软雅黑"/>
+                        </a:rPr>
+                        <a:t>哪次执行，如 run-003、run-004</a:t>
+                      </a:r>
+                    </a:p>
+                  </a:txBody>
+                  <a:tcPr marL="123825" marR="123825" marT="85725" marB="85725" anchor="ctr">
+                    <a:solidFill>
+                      <a:srgbClr val="FFFFFF"/>
+                    </a:solidFill>
+                  </a:tcPr>
+                </a:tc>
+              </a:tr>
+              <a:tr h="542925">
+                <a:tc>
+                  <a:txBody>
+                    <a:bodyPr/>
+                    <a:lstStyle/>
+                    <a:p>
+                      <a:r>
+                        <a:rPr sz="2000">
+                          <a:solidFill>
+                            <a:srgbClr val="27333D"/>
+                          </a:solidFill>
+                          <a:latin typeface="微软雅黑"/>
+                          <a:ea typeface="微软雅黑"/>
+                          <a:cs typeface="微软雅黑"/>
+                        </a:rPr>
+                        <a:t>event</a:t>
+                      </a:r>
+                    </a:p>
+                  </a:txBody>
+                  <a:tcPr marL="123825" marR="123825" marT="85725" marB="85725" anchor="ctr">
+                    <a:solidFill>
+                      <a:srgbClr val="FFFFFF"/>
+                    </a:solidFill>
+                  </a:tcPr>
+                </a:tc>
+                <a:tc>
+                  <a:txBody>
+                    <a:bodyPr/>
+                    <a:lstStyle/>
+                    <a:p>
+                      <a:r>
+                        <a:rPr sz="2000">
+                          <a:solidFill>
+                            <a:srgbClr val="27333D"/>
+                          </a:solidFill>
+                          <a:latin typeface="微软雅黑"/>
+                          <a:ea typeface="微软雅黑"/>
+                          <a:cs typeface="微软雅黑"/>
+                        </a:rPr>
+                        <a:t>controlled_failure 或 replayed</a:t>
+                      </a:r>
+                    </a:p>
+                  </a:txBody>
+                  <a:tcPr marL="123825" marR="123825" marT="85725" marB="85725" anchor="ctr">
+                    <a:solidFill>
+                      <a:srgbClr val="FFFFFF"/>
+                    </a:solidFill>
+                  </a:tcPr>
+                </a:tc>
+              </a:tr>
+              <a:tr h="542925">
+                <a:tc>
+                  <a:txBody>
+                    <a:bodyPr/>
+                    <a:lstStyle/>
+                    <a:p>
+                      <a:r>
+                        <a:rPr sz="2000">
+                          <a:solidFill>
+                            <a:srgbClr val="27333D"/>
+                          </a:solidFill>
+                          <a:latin typeface="微软雅黑"/>
+                          <a:ea typeface="微软雅黑"/>
+                          <a:cs typeface="微软雅黑"/>
+                        </a:rPr>
+                        <a:t>state.json</a:t>
+                      </a:r>
+                    </a:p>
+                  </a:txBody>
+                  <a:tcPr marL="123825" marR="123825" marT="85725" marB="85725" anchor="ctr">
+                    <a:solidFill>
+                      <a:srgbClr val="FFFFFF"/>
+                    </a:solidFill>
+                  </a:tcPr>
+                </a:tc>
+                <a:tc>
+                  <a:txBody>
+                    <a:bodyPr/>
+                    <a:lstStyle/>
+                    <a:p>
+                      <a:r>
+                        <a:rPr sz="2000">
+                          <a:solidFill>
+                            <a:srgbClr val="27333D"/>
+                          </a:solidFill>
+                          <a:latin typeface="微软雅黑"/>
+                          <a:ea typeface="微软雅黑"/>
+                          <a:cs typeface="微软雅黑"/>
+                        </a:rPr>
+                        <a:t>已完成任务与累计尝试次数</a:t>
+                      </a:r>
+                    </a:p>
+                  </a:txBody>
+                  <a:tcPr marL="123825" marR="123825" marT="85725" marB="85725" anchor="ctr">
+                    <a:solidFill>
+                      <a:srgbClr val="FFFFFF"/>
+                    </a:solidFill>
+                  </a:tcPr>
+                </a:tc>
+              </a:tr>
+              <a:tr h="542925">
+                <a:tc>
+                  <a:txBody>
+                    <a:bodyPr/>
+                    <a:lstStyle/>
+                    <a:p>
+                      <a:r>
+                        <a:rPr sz="2000">
+                          <a:solidFill>
+                            <a:srgbClr val="27333D"/>
+                          </a:solidFill>
+                          <a:latin typeface="微软雅黑"/>
+                          <a:ea typeface="微软雅黑"/>
+                          <a:cs typeface="微软雅黑"/>
+                        </a:rPr>
+                        <a:t>input-identity.json</a:t>
+                      </a:r>
+                    </a:p>
+                  </a:txBody>
+                  <a:tcPr marL="123825" marR="123825" marT="85725" marB="85725" anchor="ctr">
+                    <a:solidFill>
+                      <a:srgbClr val="FFFFFF"/>
+                    </a:solidFill>
+                  </a:tcPr>
+                </a:tc>
+                <a:tc>
+                  <a:txBody>
+                    <a:bodyPr/>
+                    <a:lstStyle/>
+                    <a:p>
+                      <a:r>
+                        <a:rPr sz="2000">
+                          <a:solidFill>
+                            <a:srgbClr val="27333D"/>
+                          </a:solidFill>
+                          <a:latin typeface="微软雅黑"/>
+                          <a:ea typeface="微软雅黑"/>
+                          <a:cs typeface="微软雅黑"/>
+                        </a:rPr>
+                        <a:t>输入与配置是否仍为同一版本</a:t>
+                      </a:r>
+                    </a:p>
+                  </a:txBody>
+                  <a:tcPr marL="123825" marR="123825" marT="85725" marB="85725" anchor="ctr">
+                    <a:solidFill>
+                      <a:srgbClr val="FFFFFF"/>
+                    </a:solidFill>
+                  </a:tcPr>
+                </a:tc>
+              </a:tr>
+            </a:tbl>
+          </a:graphicData>
+        </a:graphic>
+      </p:graphicFrame>
+      <p:sp>
+        <p:nvSpPr>
+          <p:cNvPr id="7" name="content-315">
+            <a:extLst xmlns:a="http://schemas.openxmlformats.org/drawingml/2006/main">
+              <a:ext uri="{FF2B5EF4-FFF2-40B4-BE49-F238E27FC236}">
+                <a16:creationId xmlns:a16="http://schemas.microsoft.com/office/drawing/2014/main" id="{5EC71F2D-06F3-438D-B4EE-F28C7E909A99}"/>
+              </a:ext>
+            </a:extLst>
+          </p:cNvPr>
+          <p:cNvSpPr>
+            <a:spLocks xmlns:a="http://schemas.openxmlformats.org/drawingml/2006/main" noGrp="1"/>
+          </p:cNvSpPr>
+          <p:nvPr/>
+        </p:nvSpPr>
+        <p:spPr>
+          <a:xfrm xmlns:a="http://schemas.openxmlformats.org/drawingml/2006/main">
+            <a:off x="609600" y="5019675"/>
+            <a:ext cx="10972800" cy="386715"/>
           </a:xfrm>
           <a:prstGeom xmlns:a="http://schemas.openxmlformats.org/drawingml/2006/main" prst="rect">
             <a:avLst/>
@@ -6853,7 +8464,7 @@
           </a:ln>
         </p:spPr>
         <p:txBody>
-          <a:bodyPr xmlns:a="http://schemas.openxmlformats.org/drawingml/2006/main" lIns="0" tIns="0" rIns="0" bIns="0" anchor="ctr"/>
+          <a:bodyPr xmlns:a="http://schemas.openxmlformats.org/drawingml/2006/main" lIns="0" tIns="0" rIns="0" bIns="0" anchor="t"/>
           <a:lstStyle xmlns:a="http://schemas.openxmlformats.org/drawingml/2006/main"/>
           <a:p xmlns:a="http://schemas.openxmlformats.org/drawingml/2006/main">
             <a:pPr algn="l">
@@ -6861,9 +8472,9 @@
                 <a:spcPct val="118000"/>
               </a:lnSpc>
               <a:buNone/>
-              <a:defRPr sz="3000" b="1">
-                <a:solidFill>
-                  <a:srgbClr val="FFFFFF"/>
+              <a:defRPr sz="2100" b="0">
+                <a:solidFill>
+                  <a:srgbClr val="27333D"/>
                 </a:solidFill>
                 <a:latin typeface="微软雅黑"/>
                 <a:ea typeface="微软雅黑"/>
@@ -6871,873 +8482,15 @@
               </a:defRPr>
             </a:pPr>
             <a:r>
-              <a:rPr sz="3000" b="1">
-                <a:solidFill>
-                  <a:srgbClr val="FFFFFF"/>
+              <a:rPr sz="2100" b="0">
+                <a:solidFill>
+                  <a:srgbClr val="27333D"/>
                 </a:solidFill>
                 <a:latin typeface="微软雅黑"/>
                 <a:ea typeface="微软雅黑"/>
                 <a:cs typeface="微软雅黑"/>
               </a:rPr>
-              <a:t>失败保留需要一张完整运行账本</a:t>
-            </a:r>
-          </a:p>
-        </p:txBody>
-      </p:sp>
-      <p:sp>
-        <p:nvSpPr>
-          <p:cNvPr id="9" name="source">
-            <a:extLst xmlns:a="http://schemas.openxmlformats.org/drawingml/2006/main">
-              <a:ext uri="{FF2B5EF4-FFF2-40B4-BE49-F238E27FC236}">
-                <a16:creationId xmlns:a16="http://schemas.microsoft.com/office/drawing/2014/main" id="{3576F77D-2823-473C-906E-863281901682}"/>
-              </a:ext>
-            </a:extLst>
-          </p:cNvPr>
-          <p:cNvSpPr>
-            <a:spLocks xmlns:a="http://schemas.openxmlformats.org/drawingml/2006/main" noGrp="1"/>
-          </p:cNvSpPr>
-          <p:nvPr/>
-        </p:nvSpPr>
-        <p:spPr>
-          <a:xfrm xmlns:a="http://schemas.openxmlformats.org/drawingml/2006/main">
-            <a:off x="609600" y="6067425"/>
-            <a:ext cx="10763250" cy="209550"/>
-          </a:xfrm>
-          <a:prstGeom xmlns:a="http://schemas.openxmlformats.org/drawingml/2006/main" prst="rect">
-            <a:avLst/>
-          </a:prstGeom>
-          <a:noFill xmlns:a="http://schemas.openxmlformats.org/drawingml/2006/main"/>
-          <a:ln xmlns:a="http://schemas.openxmlformats.org/drawingml/2006/main" w="0">
-            <a:noFill/>
-          </a:ln>
-        </p:spPr>
-        <p:txBody>
-          <a:bodyPr xmlns:a="http://schemas.openxmlformats.org/drawingml/2006/main" lIns="0" tIns="0" rIns="0" bIns="0" anchor="t"/>
-          <a:lstStyle xmlns:a="http://schemas.openxmlformats.org/drawingml/2006/main"/>
-          <a:p xmlns:a="http://schemas.openxmlformats.org/drawingml/2006/main">
-            <a:pPr algn="l">
-              <a:lnSpc>
-                <a:spcPct val="118000"/>
-              </a:lnSpc>
-              <a:buNone/>
-              <a:defRPr sz="1100" b="0">
-                <a:solidFill>
-                  <a:srgbClr val="66727D"/>
-                </a:solidFill>
-                <a:latin typeface="微软雅黑"/>
-                <a:ea typeface="微软雅黑"/>
-                <a:cs typeface="微软雅黑"/>
-              </a:defRPr>
-            </a:pPr>
-            <a:r>
-              <a:rPr sz="1100" b="0">
-                <a:solidFill>
-                  <a:srgbClr val="66727D"/>
-                </a:solidFill>
-                <a:latin typeface="微软雅黑"/>
-                <a:ea typeface="微软雅黑"/>
-                <a:cs typeface="微软雅黑"/>
-              </a:rPr>
-              <a:t>来源：lesson-11/slides.md；课程工件与讲义见 speaker notes</a:t>
-            </a:r>
-          </a:p>
-        </p:txBody>
-      </p:sp>
-      <p:sp>
-        <p:nvSpPr>
-          <p:cNvPr id="10" name="m-label-0">
-            <a:extLst xmlns:a="http://schemas.openxmlformats.org/drawingml/2006/main">
-              <a:ext uri="{FF2B5EF4-FFF2-40B4-BE49-F238E27FC236}">
-                <a16:creationId xmlns:a16="http://schemas.microsoft.com/office/drawing/2014/main" id="{1205D472-BC2E-44BC-B7AE-AAA7B9DD8A43}"/>
-              </a:ext>
-            </a:extLst>
-          </p:cNvPr>
-          <p:cNvSpPr>
-            <a:spLocks xmlns:a="http://schemas.openxmlformats.org/drawingml/2006/main" noGrp="1"/>
-          </p:cNvSpPr>
-          <p:nvPr/>
-        </p:nvSpPr>
-        <p:spPr>
-          <a:xfrm xmlns:a="http://schemas.openxmlformats.org/drawingml/2006/main">
-            <a:off x="609600" y="1524000"/>
-            <a:ext cx="2381250" cy="704850"/>
-          </a:xfrm>
-          <a:prstGeom xmlns:a="http://schemas.openxmlformats.org/drawingml/2006/main" prst="rect">
-            <a:avLst/>
-          </a:prstGeom>
-          <a:noFill xmlns:a="http://schemas.openxmlformats.org/drawingml/2006/main"/>
-          <a:ln xmlns:a="http://schemas.openxmlformats.org/drawingml/2006/main" w="0">
-            <a:noFill/>
-          </a:ln>
-        </p:spPr>
-        <p:txBody>
-          <a:bodyPr xmlns:a="http://schemas.openxmlformats.org/drawingml/2006/main" lIns="0" tIns="0" rIns="0" bIns="0" anchor="ctr"/>
-          <a:lstStyle xmlns:a="http://schemas.openxmlformats.org/drawingml/2006/main"/>
-          <a:p xmlns:a="http://schemas.openxmlformats.org/drawingml/2006/main">
-            <a:pPr algn="l">
-              <a:lnSpc>
-                <a:spcPct val="118000"/>
-              </a:lnSpc>
-              <a:buNone/>
-              <a:defRPr sz="2000" b="1">
-                <a:solidFill>
-                  <a:srgbClr val="1F4D78"/>
-                </a:solidFill>
-                <a:latin typeface="微软雅黑"/>
-                <a:ea typeface="微软雅黑"/>
-                <a:cs typeface="微软雅黑"/>
-              </a:defRPr>
-            </a:pPr>
-            <a:r>
-              <a:rPr sz="2000" b="1">
-                <a:solidFill>
-                  <a:srgbClr val="1F4D78"/>
-                </a:solidFill>
-                <a:latin typeface="微软雅黑"/>
-                <a:ea typeface="微软雅黑"/>
-                <a:cs typeface="微软雅黑"/>
-              </a:rPr>
-              <a:t>run-001</a:t>
-            </a:r>
-          </a:p>
-        </p:txBody>
-      </p:sp>
-      <p:sp>
-        <p:nvSpPr>
-          <p:cNvPr id="11" name="m-value-0">
-            <a:extLst xmlns:a="http://schemas.openxmlformats.org/drawingml/2006/main">
-              <a:ext uri="{FF2B5EF4-FFF2-40B4-BE49-F238E27FC236}">
-                <a16:creationId xmlns:a16="http://schemas.microsoft.com/office/drawing/2014/main" id="{6D92CADF-7C0D-47AE-BED4-3C51B773C394}"/>
-              </a:ext>
-            </a:extLst>
-          </p:cNvPr>
-          <p:cNvSpPr>
-            <a:spLocks xmlns:a="http://schemas.openxmlformats.org/drawingml/2006/main" noGrp="1"/>
-          </p:cNvSpPr>
-          <p:nvPr/>
-        </p:nvSpPr>
-        <p:spPr>
-          <a:xfrm xmlns:a="http://schemas.openxmlformats.org/drawingml/2006/main">
-            <a:off x="3162300" y="1524000"/>
-            <a:ext cx="8420100" cy="704850"/>
-          </a:xfrm>
-          <a:prstGeom xmlns:a="http://schemas.openxmlformats.org/drawingml/2006/main" prst="rect">
-            <a:avLst/>
-          </a:prstGeom>
-          <a:noFill xmlns:a="http://schemas.openxmlformats.org/drawingml/2006/main"/>
-          <a:ln xmlns:a="http://schemas.openxmlformats.org/drawingml/2006/main" w="0">
-            <a:noFill/>
-          </a:ln>
-        </p:spPr>
-        <p:txBody>
-          <a:bodyPr xmlns:a="http://schemas.openxmlformats.org/drawingml/2006/main" lIns="0" tIns="0" rIns="0" bIns="0" anchor="ctr"/>
-          <a:lstStyle xmlns:a="http://schemas.openxmlformats.org/drawingml/2006/main"/>
-          <a:p xmlns:a="http://schemas.openxmlformats.org/drawingml/2006/main">
-            <a:pPr algn="l">
-              <a:lnSpc>
-                <a:spcPct val="118000"/>
-              </a:lnSpc>
-              <a:buNone/>
-              <a:defRPr sz="2200" b="0">
-                <a:solidFill>
-                  <a:srgbClr val="27333D"/>
-                </a:solidFill>
-                <a:latin typeface="微软雅黑"/>
-                <a:ea typeface="微软雅黑"/>
-                <a:cs typeface="微软雅黑"/>
-              </a:defRPr>
-            </a:pPr>
-            <a:r>
-              <a:rPr sz="2200" b="0">
-                <a:solidFill>
-                  <a:srgbClr val="27333D"/>
-                </a:solidFill>
-                <a:latin typeface="微软雅黑"/>
-                <a:ea typeface="微软雅黑"/>
-                <a:cs typeface="微软雅黑"/>
-              </a:rPr>
-              <a:t>正常｜执行有效｜保留输出</a:t>
-            </a:r>
-          </a:p>
-        </p:txBody>
-      </p:sp>
-      <p:sp>
-        <p:nvSpPr>
-          <p:cNvPr id="12" name="m-rule-0">
-            <a:extLst xmlns:a="http://schemas.openxmlformats.org/drawingml/2006/main">
-              <a:ext uri="{FF2B5EF4-FFF2-40B4-BE49-F238E27FC236}">
-                <a16:creationId xmlns:a16="http://schemas.microsoft.com/office/drawing/2014/main" id="{A1958D45-FCD8-462C-872A-7D25EDFD2F61}"/>
-              </a:ext>
-            </a:extLst>
-          </p:cNvPr>
-          <p:cNvSpPr>
-            <a:spLocks xmlns:a="http://schemas.openxmlformats.org/drawingml/2006/main" noGrp="1"/>
-          </p:cNvSpPr>
-          <p:nvPr/>
-        </p:nvSpPr>
-        <p:spPr>
-          <a:xfrm xmlns:a="http://schemas.openxmlformats.org/drawingml/2006/main">
-            <a:off x="609600" y="2228850"/>
-            <a:ext cx="10972800" cy="14288"/>
-          </a:xfrm>
-          <a:prstGeom xmlns:a="http://schemas.openxmlformats.org/drawingml/2006/main" prst="rect">
-            <a:avLst/>
-          </a:prstGeom>
-          <a:solidFill xmlns:a="http://schemas.openxmlformats.org/drawingml/2006/main">
-            <a:srgbClr val="CDD5DB"/>
-          </a:solidFill>
-          <a:ln xmlns:a="http://schemas.openxmlformats.org/drawingml/2006/main" w="0">
-            <a:noFill/>
-          </a:ln>
-        </p:spPr>
-      </p:sp>
-      <p:sp>
-        <p:nvSpPr>
-          <p:cNvPr id="13" name="m-label-1">
-            <a:extLst xmlns:a="http://schemas.openxmlformats.org/drawingml/2006/main">
-              <a:ext uri="{FF2B5EF4-FFF2-40B4-BE49-F238E27FC236}">
-                <a16:creationId xmlns:a16="http://schemas.microsoft.com/office/drawing/2014/main" id="{70BD9184-544C-4C81-B205-78EFFAB85AD6}"/>
-              </a:ext>
-            </a:extLst>
-          </p:cNvPr>
-          <p:cNvSpPr>
-            <a:spLocks xmlns:a="http://schemas.openxmlformats.org/drawingml/2006/main" noGrp="1"/>
-          </p:cNvSpPr>
-          <p:nvPr/>
-        </p:nvSpPr>
-        <p:spPr>
-          <a:xfrm xmlns:a="http://schemas.openxmlformats.org/drawingml/2006/main">
-            <a:off x="609600" y="2266950"/>
-            <a:ext cx="2381250" cy="704850"/>
-          </a:xfrm>
-          <a:prstGeom xmlns:a="http://schemas.openxmlformats.org/drawingml/2006/main" prst="rect">
-            <a:avLst/>
-          </a:prstGeom>
-          <a:noFill xmlns:a="http://schemas.openxmlformats.org/drawingml/2006/main"/>
-          <a:ln xmlns:a="http://schemas.openxmlformats.org/drawingml/2006/main" w="0">
-            <a:noFill/>
-          </a:ln>
-        </p:spPr>
-        <p:txBody>
-          <a:bodyPr xmlns:a="http://schemas.openxmlformats.org/drawingml/2006/main" lIns="0" tIns="0" rIns="0" bIns="0" anchor="ctr"/>
-          <a:lstStyle xmlns:a="http://schemas.openxmlformats.org/drawingml/2006/main"/>
-          <a:p xmlns:a="http://schemas.openxmlformats.org/drawingml/2006/main">
-            <a:pPr algn="l">
-              <a:lnSpc>
-                <a:spcPct val="118000"/>
-              </a:lnSpc>
-              <a:buNone/>
-              <a:defRPr sz="2000" b="1">
-                <a:solidFill>
-                  <a:srgbClr val="1F4D78"/>
-                </a:solidFill>
-                <a:latin typeface="微软雅黑"/>
-                <a:ea typeface="微软雅黑"/>
-                <a:cs typeface="微软雅黑"/>
-              </a:defRPr>
-            </a:pPr>
-            <a:r>
-              <a:rPr sz="2000" b="1">
-                <a:solidFill>
-                  <a:srgbClr val="1F4D78"/>
-                </a:solidFill>
-                <a:latin typeface="微软雅黑"/>
-                <a:ea typeface="微软雅黑"/>
-                <a:cs typeface="微软雅黑"/>
-              </a:rPr>
-              <a:t>run-002</a:t>
-            </a:r>
-          </a:p>
-        </p:txBody>
-      </p:sp>
-      <p:sp>
-        <p:nvSpPr>
-          <p:cNvPr id="14" name="m-value-1">
-            <a:extLst xmlns:a="http://schemas.openxmlformats.org/drawingml/2006/main">
-              <a:ext uri="{FF2B5EF4-FFF2-40B4-BE49-F238E27FC236}">
-                <a16:creationId xmlns:a16="http://schemas.microsoft.com/office/drawing/2014/main" id="{3F524DD2-05B4-4A48-8EAE-7D010951817E}"/>
-              </a:ext>
-            </a:extLst>
-          </p:cNvPr>
-          <p:cNvSpPr>
-            <a:spLocks xmlns:a="http://schemas.openxmlformats.org/drawingml/2006/main" noGrp="1"/>
-          </p:cNvSpPr>
-          <p:nvPr/>
-        </p:nvSpPr>
-        <p:spPr>
-          <a:xfrm xmlns:a="http://schemas.openxmlformats.org/drawingml/2006/main">
-            <a:off x="3162300" y="2266950"/>
-            <a:ext cx="8420100" cy="704850"/>
-          </a:xfrm>
-          <a:prstGeom xmlns:a="http://schemas.openxmlformats.org/drawingml/2006/main" prst="rect">
-            <a:avLst/>
-          </a:prstGeom>
-          <a:noFill xmlns:a="http://schemas.openxmlformats.org/drawingml/2006/main"/>
-          <a:ln xmlns:a="http://schemas.openxmlformats.org/drawingml/2006/main" w="0">
-            <a:noFill/>
-          </a:ln>
-        </p:spPr>
-        <p:txBody>
-          <a:bodyPr xmlns:a="http://schemas.openxmlformats.org/drawingml/2006/main" lIns="0" tIns="0" rIns="0" bIns="0" anchor="ctr"/>
-          <a:lstStyle xmlns:a="http://schemas.openxmlformats.org/drawingml/2006/main"/>
-          <a:p xmlns:a="http://schemas.openxmlformats.org/drawingml/2006/main">
-            <a:pPr algn="l">
-              <a:lnSpc>
-                <a:spcPct val="118000"/>
-              </a:lnSpc>
-              <a:buNone/>
-              <a:defRPr sz="2200" b="0">
-                <a:solidFill>
-                  <a:srgbClr val="27333D"/>
-                </a:solidFill>
-                <a:latin typeface="微软雅黑"/>
-                <a:ea typeface="微软雅黑"/>
-                <a:cs typeface="微软雅黑"/>
-              </a:defRPr>
-            </a:pPr>
-            <a:r>
-              <a:rPr sz="2200" b="0">
-                <a:solidFill>
-                  <a:srgbClr val="27333D"/>
-                </a:solidFill>
-                <a:latin typeface="微软雅黑"/>
-                <a:ea typeface="微软雅黑"/>
-                <a:cs typeface="微软雅黑"/>
-              </a:rPr>
-              <a:t>结果不支持｜执行有效｜保留输出</a:t>
-            </a:r>
-          </a:p>
-        </p:txBody>
-      </p:sp>
-      <p:sp>
-        <p:nvSpPr>
-          <p:cNvPr id="15" name="m-rule-1">
-            <a:extLst xmlns:a="http://schemas.openxmlformats.org/drawingml/2006/main">
-              <a:ext uri="{FF2B5EF4-FFF2-40B4-BE49-F238E27FC236}">
-                <a16:creationId xmlns:a16="http://schemas.microsoft.com/office/drawing/2014/main" id="{44EE04D3-971C-4218-9030-DCEBDCB93066}"/>
-              </a:ext>
-            </a:extLst>
-          </p:cNvPr>
-          <p:cNvSpPr>
-            <a:spLocks xmlns:a="http://schemas.openxmlformats.org/drawingml/2006/main" noGrp="1"/>
-          </p:cNvSpPr>
-          <p:nvPr/>
-        </p:nvSpPr>
-        <p:spPr>
-          <a:xfrm xmlns:a="http://schemas.openxmlformats.org/drawingml/2006/main">
-            <a:off x="609600" y="2971800"/>
-            <a:ext cx="10972800" cy="14288"/>
-          </a:xfrm>
-          <a:prstGeom xmlns:a="http://schemas.openxmlformats.org/drawingml/2006/main" prst="rect">
-            <a:avLst/>
-          </a:prstGeom>
-          <a:solidFill xmlns:a="http://schemas.openxmlformats.org/drawingml/2006/main">
-            <a:srgbClr val="CDD5DB"/>
-          </a:solidFill>
-          <a:ln xmlns:a="http://schemas.openxmlformats.org/drawingml/2006/main" w="0">
-            <a:noFill/>
-          </a:ln>
-        </p:spPr>
-      </p:sp>
-      <p:sp>
-        <p:nvSpPr>
-          <p:cNvPr id="16" name="m-label-2">
-            <a:extLst xmlns:a="http://schemas.openxmlformats.org/drawingml/2006/main">
-              <a:ext uri="{FF2B5EF4-FFF2-40B4-BE49-F238E27FC236}">
-                <a16:creationId xmlns:a16="http://schemas.microsoft.com/office/drawing/2014/main" id="{7CD43D78-F66F-473C-9E2C-C7C81F7EB230}"/>
-              </a:ext>
-            </a:extLst>
-          </p:cNvPr>
-          <p:cNvSpPr>
-            <a:spLocks xmlns:a="http://schemas.openxmlformats.org/drawingml/2006/main" noGrp="1"/>
-          </p:cNvSpPr>
-          <p:nvPr/>
-        </p:nvSpPr>
-        <p:spPr>
-          <a:xfrm xmlns:a="http://schemas.openxmlformats.org/drawingml/2006/main">
-            <a:off x="609600" y="3009900"/>
-            <a:ext cx="2381250" cy="704850"/>
-          </a:xfrm>
-          <a:prstGeom xmlns:a="http://schemas.openxmlformats.org/drawingml/2006/main" prst="rect">
-            <a:avLst/>
-          </a:prstGeom>
-          <a:noFill xmlns:a="http://schemas.openxmlformats.org/drawingml/2006/main"/>
-          <a:ln xmlns:a="http://schemas.openxmlformats.org/drawingml/2006/main" w="0">
-            <a:noFill/>
-          </a:ln>
-        </p:spPr>
-        <p:txBody>
-          <a:bodyPr xmlns:a="http://schemas.openxmlformats.org/drawingml/2006/main" lIns="0" tIns="0" rIns="0" bIns="0" anchor="ctr"/>
-          <a:lstStyle xmlns:a="http://schemas.openxmlformats.org/drawingml/2006/main"/>
-          <a:p xmlns:a="http://schemas.openxmlformats.org/drawingml/2006/main">
-            <a:pPr algn="l">
-              <a:lnSpc>
-                <a:spcPct val="118000"/>
-              </a:lnSpc>
-              <a:buNone/>
-              <a:defRPr sz="2000" b="1">
-                <a:solidFill>
-                  <a:srgbClr val="1F4D78"/>
-                </a:solidFill>
-                <a:latin typeface="微软雅黑"/>
-                <a:ea typeface="微软雅黑"/>
-                <a:cs typeface="微软雅黑"/>
-              </a:defRPr>
-            </a:pPr>
-            <a:r>
-              <a:rPr sz="2000" b="1">
-                <a:solidFill>
-                  <a:srgbClr val="1F4D78"/>
-                </a:solidFill>
-                <a:latin typeface="微软雅黑"/>
-                <a:ea typeface="微软雅黑"/>
-                <a:cs typeface="微软雅黑"/>
-              </a:rPr>
-              <a:t>run-003</a:t>
-            </a:r>
-          </a:p>
-        </p:txBody>
-      </p:sp>
-      <p:sp>
-        <p:nvSpPr>
-          <p:cNvPr id="17" name="m-value-2">
-            <a:extLst xmlns:a="http://schemas.openxmlformats.org/drawingml/2006/main">
-              <a:ext uri="{FF2B5EF4-FFF2-40B4-BE49-F238E27FC236}">
-                <a16:creationId xmlns:a16="http://schemas.microsoft.com/office/drawing/2014/main" id="{8C84ED35-152E-40A5-9594-F0571EDB04A4}"/>
-              </a:ext>
-            </a:extLst>
-          </p:cNvPr>
-          <p:cNvSpPr>
-            <a:spLocks xmlns:a="http://schemas.openxmlformats.org/drawingml/2006/main" noGrp="1"/>
-          </p:cNvSpPr>
-          <p:nvPr/>
-        </p:nvSpPr>
-        <p:spPr>
-          <a:xfrm xmlns:a="http://schemas.openxmlformats.org/drawingml/2006/main">
-            <a:off x="3162300" y="3009900"/>
-            <a:ext cx="8420100" cy="704850"/>
-          </a:xfrm>
-          <a:prstGeom xmlns:a="http://schemas.openxmlformats.org/drawingml/2006/main" prst="rect">
-            <a:avLst/>
-          </a:prstGeom>
-          <a:noFill xmlns:a="http://schemas.openxmlformats.org/drawingml/2006/main"/>
-          <a:ln xmlns:a="http://schemas.openxmlformats.org/drawingml/2006/main" w="0">
-            <a:noFill/>
-          </a:ln>
-        </p:spPr>
-        <p:txBody>
-          <a:bodyPr xmlns:a="http://schemas.openxmlformats.org/drawingml/2006/main" lIns="0" tIns="0" rIns="0" bIns="0" anchor="ctr"/>
-          <a:lstStyle xmlns:a="http://schemas.openxmlformats.org/drawingml/2006/main"/>
-          <a:p xmlns:a="http://schemas.openxmlformats.org/drawingml/2006/main">
-            <a:pPr algn="l">
-              <a:lnSpc>
-                <a:spcPct val="118000"/>
-              </a:lnSpc>
-              <a:buNone/>
-              <a:defRPr sz="2200" b="0">
-                <a:solidFill>
-                  <a:srgbClr val="27333D"/>
-                </a:solidFill>
-                <a:latin typeface="微软雅黑"/>
-                <a:ea typeface="微软雅黑"/>
-                <a:cs typeface="微软雅黑"/>
-              </a:defRPr>
-            </a:pPr>
-            <a:r>
-              <a:rPr sz="2200" b="0">
-                <a:solidFill>
-                  <a:srgbClr val="27333D"/>
-                </a:solidFill>
-                <a:latin typeface="微软雅黑"/>
-                <a:ea typeface="微软雅黑"/>
-                <a:cs typeface="微软雅黑"/>
-              </a:rPr>
-              <a:t>超时｜记录失败｜人工确认恢复</a:t>
-            </a:r>
-          </a:p>
-        </p:txBody>
-      </p:sp>
-      <p:sp>
-        <p:nvSpPr>
-          <p:cNvPr id="18" name="m-rule-2">
-            <a:extLst xmlns:a="http://schemas.openxmlformats.org/drawingml/2006/main">
-              <a:ext uri="{FF2B5EF4-FFF2-40B4-BE49-F238E27FC236}">
-                <a16:creationId xmlns:a16="http://schemas.microsoft.com/office/drawing/2014/main" id="{7CA18E95-0A94-46C8-BE03-F229292427A6}"/>
-              </a:ext>
-            </a:extLst>
-          </p:cNvPr>
-          <p:cNvSpPr>
-            <a:spLocks xmlns:a="http://schemas.openxmlformats.org/drawingml/2006/main" noGrp="1"/>
-          </p:cNvSpPr>
-          <p:nvPr/>
-        </p:nvSpPr>
-        <p:spPr>
-          <a:xfrm xmlns:a="http://schemas.openxmlformats.org/drawingml/2006/main">
-            <a:off x="609600" y="3714750"/>
-            <a:ext cx="10972800" cy="14288"/>
-          </a:xfrm>
-          <a:prstGeom xmlns:a="http://schemas.openxmlformats.org/drawingml/2006/main" prst="rect">
-            <a:avLst/>
-          </a:prstGeom>
-          <a:solidFill xmlns:a="http://schemas.openxmlformats.org/drawingml/2006/main">
-            <a:srgbClr val="CDD5DB"/>
-          </a:solidFill>
-          <a:ln xmlns:a="http://schemas.openxmlformats.org/drawingml/2006/main" w="0">
-            <a:noFill/>
-          </a:ln>
-        </p:spPr>
-      </p:sp>
-      <p:sp>
-        <p:nvSpPr>
-          <p:cNvPr id="19" name="m-label-3">
-            <a:extLst xmlns:a="http://schemas.openxmlformats.org/drawingml/2006/main">
-              <a:ext uri="{FF2B5EF4-FFF2-40B4-BE49-F238E27FC236}">
-                <a16:creationId xmlns:a16="http://schemas.microsoft.com/office/drawing/2014/main" id="{80AE385A-A283-4D7C-8D88-589FFC3B1A81}"/>
-              </a:ext>
-            </a:extLst>
-          </p:cNvPr>
-          <p:cNvSpPr>
-            <a:spLocks xmlns:a="http://schemas.openxmlformats.org/drawingml/2006/main" noGrp="1"/>
-          </p:cNvSpPr>
-          <p:nvPr/>
-        </p:nvSpPr>
-        <p:spPr>
-          <a:xfrm xmlns:a="http://schemas.openxmlformats.org/drawingml/2006/main">
-            <a:off x="609600" y="3752850"/>
-            <a:ext cx="2381250" cy="704850"/>
-          </a:xfrm>
-          <a:prstGeom xmlns:a="http://schemas.openxmlformats.org/drawingml/2006/main" prst="rect">
-            <a:avLst/>
-          </a:prstGeom>
-          <a:noFill xmlns:a="http://schemas.openxmlformats.org/drawingml/2006/main"/>
-          <a:ln xmlns:a="http://schemas.openxmlformats.org/drawingml/2006/main" w="0">
-            <a:noFill/>
-          </a:ln>
-        </p:spPr>
-        <p:txBody>
-          <a:bodyPr xmlns:a="http://schemas.openxmlformats.org/drawingml/2006/main" lIns="0" tIns="0" rIns="0" bIns="0" anchor="ctr"/>
-          <a:lstStyle xmlns:a="http://schemas.openxmlformats.org/drawingml/2006/main"/>
-          <a:p xmlns:a="http://schemas.openxmlformats.org/drawingml/2006/main">
-            <a:pPr algn="l">
-              <a:lnSpc>
-                <a:spcPct val="118000"/>
-              </a:lnSpc>
-              <a:buNone/>
-              <a:defRPr sz="2000" b="1">
-                <a:solidFill>
-                  <a:srgbClr val="1F4D78"/>
-                </a:solidFill>
-                <a:latin typeface="微软雅黑"/>
-                <a:ea typeface="微软雅黑"/>
-                <a:cs typeface="微软雅黑"/>
-              </a:defRPr>
-            </a:pPr>
-            <a:r>
-              <a:rPr sz="2000" b="1">
-                <a:solidFill>
-                  <a:srgbClr val="1F4D78"/>
-                </a:solidFill>
-                <a:latin typeface="微软雅黑"/>
-                <a:ea typeface="微软雅黑"/>
-                <a:cs typeface="微软雅黑"/>
-              </a:rPr>
-              <a:t>run-004</a:t>
-            </a:r>
-          </a:p>
-        </p:txBody>
-      </p:sp>
-      <p:sp>
-        <p:nvSpPr>
-          <p:cNvPr id="20" name="m-value-3">
-            <a:extLst xmlns:a="http://schemas.openxmlformats.org/drawingml/2006/main">
-              <a:ext uri="{FF2B5EF4-FFF2-40B4-BE49-F238E27FC236}">
-                <a16:creationId xmlns:a16="http://schemas.microsoft.com/office/drawing/2014/main" id="{191F64FE-8531-4ABA-B773-93227AEC34EF}"/>
-              </a:ext>
-            </a:extLst>
-          </p:cNvPr>
-          <p:cNvSpPr>
-            <a:spLocks xmlns:a="http://schemas.openxmlformats.org/drawingml/2006/main" noGrp="1"/>
-          </p:cNvSpPr>
-          <p:nvPr/>
-        </p:nvSpPr>
-        <p:spPr>
-          <a:xfrm xmlns:a="http://schemas.openxmlformats.org/drawingml/2006/main">
-            <a:off x="3162300" y="3752850"/>
-            <a:ext cx="8420100" cy="704850"/>
-          </a:xfrm>
-          <a:prstGeom xmlns:a="http://schemas.openxmlformats.org/drawingml/2006/main" prst="rect">
-            <a:avLst/>
-          </a:prstGeom>
-          <a:noFill xmlns:a="http://schemas.openxmlformats.org/drawingml/2006/main"/>
-          <a:ln xmlns:a="http://schemas.openxmlformats.org/drawingml/2006/main" w="0">
-            <a:noFill/>
-          </a:ln>
-        </p:spPr>
-        <p:txBody>
-          <a:bodyPr xmlns:a="http://schemas.openxmlformats.org/drawingml/2006/main" lIns="0" tIns="0" rIns="0" bIns="0" anchor="ctr"/>
-          <a:lstStyle xmlns:a="http://schemas.openxmlformats.org/drawingml/2006/main"/>
-          <a:p xmlns:a="http://schemas.openxmlformats.org/drawingml/2006/main">
-            <a:pPr algn="l">
-              <a:lnSpc>
-                <a:spcPct val="118000"/>
-              </a:lnSpc>
-              <a:buNone/>
-              <a:defRPr sz="2200" b="0">
-                <a:solidFill>
-                  <a:srgbClr val="27333D"/>
-                </a:solidFill>
-                <a:latin typeface="微软雅黑"/>
-                <a:ea typeface="微软雅黑"/>
-                <a:cs typeface="微软雅黑"/>
-              </a:defRPr>
-            </a:pPr>
-            <a:r>
-              <a:rPr sz="2200" b="0">
-                <a:solidFill>
-                  <a:srgbClr val="27333D"/>
-                </a:solidFill>
-                <a:latin typeface="微软雅黑"/>
-                <a:ea typeface="微软雅黑"/>
-                <a:cs typeface="微软雅黑"/>
-              </a:rPr>
-              <a:t>协议漂移｜停止｜恢复冻结配置</a:t>
-            </a:r>
-          </a:p>
-        </p:txBody>
-      </p:sp>
-      <p:sp>
-        <p:nvSpPr>
-          <p:cNvPr id="21" name="m-rule-3">
-            <a:extLst xmlns:a="http://schemas.openxmlformats.org/drawingml/2006/main">
-              <a:ext uri="{FF2B5EF4-FFF2-40B4-BE49-F238E27FC236}">
-                <a16:creationId xmlns:a16="http://schemas.microsoft.com/office/drawing/2014/main" id="{AA25EF2A-9097-4400-8F12-3C7755CE8BFB}"/>
-              </a:ext>
-            </a:extLst>
-          </p:cNvPr>
-          <p:cNvSpPr>
-            <a:spLocks xmlns:a="http://schemas.openxmlformats.org/drawingml/2006/main" noGrp="1"/>
-          </p:cNvSpPr>
-          <p:nvPr/>
-        </p:nvSpPr>
-        <p:spPr>
-          <a:xfrm xmlns:a="http://schemas.openxmlformats.org/drawingml/2006/main">
-            <a:off x="609600" y="4457700"/>
-            <a:ext cx="10972800" cy="14288"/>
-          </a:xfrm>
-          <a:prstGeom xmlns:a="http://schemas.openxmlformats.org/drawingml/2006/main" prst="rect">
-            <a:avLst/>
-          </a:prstGeom>
-          <a:solidFill xmlns:a="http://schemas.openxmlformats.org/drawingml/2006/main">
-            <a:srgbClr val="CDD5DB"/>
-          </a:solidFill>
-          <a:ln xmlns:a="http://schemas.openxmlformats.org/drawingml/2006/main" w="0">
-            <a:noFill/>
-          </a:ln>
-        </p:spPr>
-      </p:sp>
-      <p:sp>
-        <p:nvSpPr>
-          <p:cNvPr id="22" name="m-label-4">
-            <a:extLst xmlns:a="http://schemas.openxmlformats.org/drawingml/2006/main">
-              <a:ext uri="{FF2B5EF4-FFF2-40B4-BE49-F238E27FC236}">
-                <a16:creationId xmlns:a16="http://schemas.microsoft.com/office/drawing/2014/main" id="{FD10EBE4-E711-4053-AA6F-4241CB20B920}"/>
-              </a:ext>
-            </a:extLst>
-          </p:cNvPr>
-          <p:cNvSpPr>
-            <a:spLocks xmlns:a="http://schemas.openxmlformats.org/drawingml/2006/main" noGrp="1"/>
-          </p:cNvSpPr>
-          <p:nvPr/>
-        </p:nvSpPr>
-        <p:spPr>
-          <a:xfrm xmlns:a="http://schemas.openxmlformats.org/drawingml/2006/main">
-            <a:off x="609600" y="4495800"/>
-            <a:ext cx="2381250" cy="704850"/>
-          </a:xfrm>
-          <a:prstGeom xmlns:a="http://schemas.openxmlformats.org/drawingml/2006/main" prst="rect">
-            <a:avLst/>
-          </a:prstGeom>
-          <a:noFill xmlns:a="http://schemas.openxmlformats.org/drawingml/2006/main"/>
-          <a:ln xmlns:a="http://schemas.openxmlformats.org/drawingml/2006/main" w="0">
-            <a:noFill/>
-          </a:ln>
-        </p:spPr>
-        <p:txBody>
-          <a:bodyPr xmlns:a="http://schemas.openxmlformats.org/drawingml/2006/main" lIns="0" tIns="0" rIns="0" bIns="0" anchor="ctr"/>
-          <a:lstStyle xmlns:a="http://schemas.openxmlformats.org/drawingml/2006/main"/>
-          <a:p xmlns:a="http://schemas.openxmlformats.org/drawingml/2006/main">
-            <a:pPr algn="l">
-              <a:lnSpc>
-                <a:spcPct val="118000"/>
-              </a:lnSpc>
-              <a:buNone/>
-              <a:defRPr sz="2000" b="1">
-                <a:solidFill>
-                  <a:srgbClr val="C8161E"/>
-                </a:solidFill>
-                <a:latin typeface="微软雅黑"/>
-                <a:ea typeface="微软雅黑"/>
-                <a:cs typeface="微软雅黑"/>
-              </a:defRPr>
-            </a:pPr>
-            <a:r>
-              <a:rPr sz="2000" b="1">
-                <a:solidFill>
-                  <a:srgbClr val="C8161E"/>
-                </a:solidFill>
-                <a:latin typeface="微软雅黑"/>
-                <a:ea typeface="微软雅黑"/>
-                <a:cs typeface="微软雅黑"/>
-              </a:rPr>
-              <a:t>数账</a:t>
-            </a:r>
-          </a:p>
-        </p:txBody>
-      </p:sp>
-      <p:sp>
-        <p:nvSpPr>
-          <p:cNvPr id="23" name="m-value-4">
-            <a:extLst xmlns:a="http://schemas.openxmlformats.org/drawingml/2006/main">
-              <a:ext uri="{FF2B5EF4-FFF2-40B4-BE49-F238E27FC236}">
-                <a16:creationId xmlns:a16="http://schemas.microsoft.com/office/drawing/2014/main" id="{E0E37ED4-E3D2-4147-BC50-32C1710CFD80}"/>
-              </a:ext>
-            </a:extLst>
-          </p:cNvPr>
-          <p:cNvSpPr>
-            <a:spLocks xmlns:a="http://schemas.openxmlformats.org/drawingml/2006/main" noGrp="1"/>
-          </p:cNvSpPr>
-          <p:nvPr/>
-        </p:nvSpPr>
-        <p:spPr>
-          <a:xfrm xmlns:a="http://schemas.openxmlformats.org/drawingml/2006/main">
-            <a:off x="3162300" y="4495800"/>
-            <a:ext cx="8420100" cy="704850"/>
-          </a:xfrm>
-          <a:prstGeom xmlns:a="http://schemas.openxmlformats.org/drawingml/2006/main" prst="rect">
-            <a:avLst/>
-          </a:prstGeom>
-          <a:noFill xmlns:a="http://schemas.openxmlformats.org/drawingml/2006/main"/>
-          <a:ln xmlns:a="http://schemas.openxmlformats.org/drawingml/2006/main" w="0">
-            <a:noFill/>
-          </a:ln>
-        </p:spPr>
-        <p:txBody>
-          <a:bodyPr xmlns:a="http://schemas.openxmlformats.org/drawingml/2006/main" lIns="0" tIns="0" rIns="0" bIns="0" anchor="ctr"/>
-          <a:lstStyle xmlns:a="http://schemas.openxmlformats.org/drawingml/2006/main"/>
-          <a:p xmlns:a="http://schemas.openxmlformats.org/drawingml/2006/main">
-            <a:pPr algn="l">
-              <a:lnSpc>
-                <a:spcPct val="118000"/>
-              </a:lnSpc>
-              <a:buNone/>
-              <a:defRPr sz="2200" b="0">
-                <a:solidFill>
-                  <a:srgbClr val="27333D"/>
-                </a:solidFill>
-                <a:latin typeface="微软雅黑"/>
-                <a:ea typeface="微软雅黑"/>
-                <a:cs typeface="微软雅黑"/>
-              </a:defRPr>
-            </a:pPr>
-            <a:r>
-              <a:rPr sz="2200" b="0">
-                <a:solidFill>
-                  <a:srgbClr val="27333D"/>
-                </a:solidFill>
-                <a:latin typeface="微软雅黑"/>
-                <a:ea typeface="微软雅黑"/>
-                <a:cs typeface="微软雅黑"/>
-              </a:rPr>
-              <a:t>有效运行（含不利结果）+ 技术失败 = 全部运行</a:t>
-            </a:r>
-          </a:p>
-        </p:txBody>
-      </p:sp>
-      <p:sp>
-        <p:nvSpPr>
-          <p:cNvPr id="24" name="m-rule-4">
-            <a:extLst xmlns:a="http://schemas.openxmlformats.org/drawingml/2006/main">
-              <a:ext uri="{FF2B5EF4-FFF2-40B4-BE49-F238E27FC236}">
-                <a16:creationId xmlns:a16="http://schemas.microsoft.com/office/drawing/2014/main" id="{807186E3-6A83-4DE8-ACA8-0C391322DE74}"/>
-              </a:ext>
-            </a:extLst>
-          </p:cNvPr>
-          <p:cNvSpPr>
-            <a:spLocks xmlns:a="http://schemas.openxmlformats.org/drawingml/2006/main" noGrp="1"/>
-          </p:cNvSpPr>
-          <p:nvPr/>
-        </p:nvSpPr>
-        <p:spPr>
-          <a:xfrm xmlns:a="http://schemas.openxmlformats.org/drawingml/2006/main">
-            <a:off x="609600" y="5200650"/>
-            <a:ext cx="10972800" cy="14288"/>
-          </a:xfrm>
-          <a:prstGeom xmlns:a="http://schemas.openxmlformats.org/drawingml/2006/main" prst="rect">
-            <a:avLst/>
-          </a:prstGeom>
-          <a:solidFill xmlns:a="http://schemas.openxmlformats.org/drawingml/2006/main">
-            <a:srgbClr val="CDD5DB"/>
-          </a:solidFill>
-          <a:ln xmlns:a="http://schemas.openxmlformats.org/drawingml/2006/main" w="0">
-            <a:noFill/>
-          </a:ln>
-        </p:spPr>
-      </p:sp>
-      <p:sp>
-        <p:nvSpPr>
-          <p:cNvPr id="26" name="fiction">
-            <a:extLst xmlns:a="http://schemas.openxmlformats.org/drawingml/2006/main">
-              <a:ext uri="{FF2B5EF4-FFF2-40B4-BE49-F238E27FC236}">
-                <a16:creationId xmlns:a16="http://schemas.microsoft.com/office/drawing/2014/main" id="{66E6E1F0-64A2-46EF-B889-4F0954B3915D}"/>
-              </a:ext>
-            </a:extLst>
-          </p:cNvPr>
-          <p:cNvSpPr>
-            <a:spLocks xmlns:a="http://schemas.openxmlformats.org/drawingml/2006/main" noGrp="1"/>
-          </p:cNvSpPr>
-          <p:nvPr/>
-        </p:nvSpPr>
-        <p:spPr>
-          <a:xfrm xmlns:a="http://schemas.openxmlformats.org/drawingml/2006/main">
-            <a:off x="609600" y="885825"/>
-            <a:ext cx="10572750" cy="314325"/>
-          </a:xfrm>
-          <a:prstGeom xmlns:a="http://schemas.openxmlformats.org/drawingml/2006/main" prst="rect">
-            <a:avLst/>
-          </a:prstGeom>
-          <a:noFill xmlns:a="http://schemas.openxmlformats.org/drawingml/2006/main"/>
-          <a:ln xmlns:a="http://schemas.openxmlformats.org/drawingml/2006/main" w="0">
-            <a:noFill/>
-          </a:ln>
-        </p:spPr>
-        <p:txBody>
-          <a:bodyPr xmlns:a="http://schemas.openxmlformats.org/drawingml/2006/main" lIns="0" tIns="0" rIns="0" bIns="0" anchor="t"/>
-          <a:lstStyle xmlns:a="http://schemas.openxmlformats.org/drawingml/2006/main"/>
-          <a:p xmlns:a="http://schemas.openxmlformats.org/drawingml/2006/main">
-            <a:pPr algn="l">
-              <a:lnSpc>
-                <a:spcPct val="118000"/>
-              </a:lnSpc>
-              <a:buNone/>
-              <a:defRPr sz="1800" b="0">
-                <a:solidFill>
-                  <a:srgbClr val="A96510"/>
-                </a:solidFill>
-                <a:latin typeface="微软雅黑"/>
-                <a:ea typeface="微软雅黑"/>
-                <a:cs typeface="微软雅黑"/>
-              </a:defRPr>
-            </a:pPr>
-            <a:r>
-              <a:rPr sz="1800" b="0">
-                <a:solidFill>
-                  <a:srgbClr val="A96510"/>
-                </a:solidFill>
-                <a:latin typeface="微软雅黑"/>
-                <a:ea typeface="微软雅黑"/>
-                <a:cs typeface="微软雅黑"/>
-              </a:rPr>
-              <a:t>课程虚构教学工件</a:t>
+              <a:t>同一任务恢复时产生新 run_id，旧失败保留。</a:t>
             </a:r>
           </a:p>
         </p:txBody>
@@ -7878,7 +8631,7 @@
           <p:nvPr/>
         </p:nvPicPr>
         <p:blipFill>
-          <a:blip xmlns:r="http://schemas.openxmlformats.org/officeDocument/2006/relationships" xmlns:a="http://schemas.openxmlformats.org/drawingml/2006/main" r:embed="Re007e5ea75b24b96"/>
+          <a:blip xmlns:r="http://schemas.openxmlformats.org/officeDocument/2006/relationships" xmlns:a="http://schemas.openxmlformats.org/drawingml/2006/main" r:embed="R72883546515a42b6"/>
           <a:stretch xmlns:a="http://schemas.openxmlformats.org/drawingml/2006/main"/>
         </p:blipFill>
         <p:spPr>
@@ -8765,7 +9518,7 @@
           <p:nvPr/>
         </p:nvPicPr>
         <p:blipFill>
-          <a:blip xmlns:r="http://schemas.openxmlformats.org/officeDocument/2006/relationships" xmlns:a="http://schemas.openxmlformats.org/drawingml/2006/main" r:embed="R8dc49a4c51b040d4"/>
+          <a:blip xmlns:r="http://schemas.openxmlformats.org/officeDocument/2006/relationships" xmlns:a="http://schemas.openxmlformats.org/drawingml/2006/main" r:embed="R500f6be76c0e4d7f"/>
           <a:stretch xmlns:a="http://schemas.openxmlformats.org/drawingml/2006/main"/>
         </p:blipFill>
         <p:spPr>
@@ -9920,7 +10673,7 @@
           <p:nvPr/>
         </p:nvPicPr>
         <p:blipFill>
-          <a:blip xmlns:r="http://schemas.openxmlformats.org/officeDocument/2006/relationships" xmlns:a="http://schemas.openxmlformats.org/drawingml/2006/main" r:embed="R3c5ec5b18bc2433a"/>
+          <a:blip xmlns:r="http://schemas.openxmlformats.org/officeDocument/2006/relationships" xmlns:a="http://schemas.openxmlformats.org/drawingml/2006/main" r:embed="R57be1362c6c64238"/>
           <a:stretch xmlns:a="http://schemas.openxmlformats.org/drawingml/2006/main"/>
         </p:blipFill>
         <p:spPr>
@@ -10807,7 +11560,7 @@
           <p:nvPr/>
         </p:nvPicPr>
         <p:blipFill>
-          <a:blip xmlns:r="http://schemas.openxmlformats.org/officeDocument/2006/relationships" xmlns:a="http://schemas.openxmlformats.org/drawingml/2006/main" r:embed="Reecfe6c616c74b9e"/>
+          <a:blip xmlns:r="http://schemas.openxmlformats.org/officeDocument/2006/relationships" xmlns:a="http://schemas.openxmlformats.org/drawingml/2006/main" r:embed="Ra823f52624cf4c89"/>
           <a:stretch xmlns:a="http://schemas.openxmlformats.org/drawingml/2006/main"/>
         </p:blipFill>
         <p:spPr>
@@ -11902,7 +12655,7 @@
           <p:nvPr/>
         </p:nvPicPr>
         <p:blipFill>
-          <a:blip xmlns:r="http://schemas.openxmlformats.org/officeDocument/2006/relationships" xmlns:a="http://schemas.openxmlformats.org/drawingml/2006/main" r:embed="Rc351bb2c6b614a4e"/>
+          <a:blip xmlns:r="http://schemas.openxmlformats.org/officeDocument/2006/relationships" xmlns:a="http://schemas.openxmlformats.org/drawingml/2006/main" r:embed="Rae4d7d701cea42fe"/>
           <a:stretch xmlns:a="http://schemas.openxmlformats.org/drawingml/2006/main"/>
         </p:blipFill>
         <p:spPr>
@@ -12868,7 +13621,7 @@
                 <a:ea typeface="微软雅黑"/>
                 <a:cs typeface="微软雅黑"/>
               </a:rPr>
-              <a:t>失败 trace 连接停止与冻结配置恢复</a:t>
+              <a:t>恢复以后，先检查四件事</a:t>
             </a:r>
             <a:endParaRPr/>
           </a:p>
@@ -12904,74 +13657,22 @@
       </p:sp>
       <p:sp>
         <p:nvSpPr>
-          <p:cNvPr id="6" name="brand-header">
-            <a:extLst xmlns:a="http://schemas.openxmlformats.org/drawingml/2006/main">
-              <a:ext uri="{FF2B5EF4-FFF2-40B4-BE49-F238E27FC236}">
-                <a16:creationId xmlns:a16="http://schemas.microsoft.com/office/drawing/2014/main" id="{2FB1173E-89B0-4C38-BEF8-42CBF7BDC09B}"/>
-              </a:ext>
-            </a:extLst>
-          </p:cNvPr>
-          <p:cNvSpPr>
-            <a:spLocks xmlns:a="http://schemas.openxmlformats.org/drawingml/2006/main" noGrp="1"/>
-          </p:cNvSpPr>
-          <p:nvPr/>
-        </p:nvSpPr>
-        <p:spPr>
-          <a:xfrm xmlns:a="http://schemas.openxmlformats.org/drawingml/2006/main">
-            <a:off x="0" y="0"/>
-            <a:ext cx="11887200" cy="685800"/>
-          </a:xfrm>
-          <a:prstGeom xmlns:a="http://schemas.openxmlformats.org/drawingml/2006/main" prst="rect">
-            <a:avLst/>
-          </a:prstGeom>
-          <a:solidFill xmlns:a="http://schemas.openxmlformats.org/drawingml/2006/main">
-            <a:srgbClr val="C8161E"/>
-          </a:solidFill>
-          <a:ln xmlns:a="http://schemas.openxmlformats.org/drawingml/2006/main" w="0">
-            <a:noFill/>
-          </a:ln>
-        </p:spPr>
-      </p:sp>
-      <p:pic>
-        <p:nvPicPr>
-          <p:cNvPr id="24" name=""/>
-          <p:cNvPicPr>
-            <a:picLocks xmlns:a="http://schemas.openxmlformats.org/drawingml/2006/main" noChangeAspect="1"/>
-          </p:cNvPicPr>
-          <p:nvPr/>
-        </p:nvPicPr>
-        <p:blipFill>
-          <a:blip xmlns:r="http://schemas.openxmlformats.org/officeDocument/2006/relationships" xmlns:a="http://schemas.openxmlformats.org/drawingml/2006/main" r:embed="R567768211c9e4c3b"/>
-          <a:stretch xmlns:a="http://schemas.openxmlformats.org/drawingml/2006/main"/>
-        </p:blipFill>
-        <p:spPr>
-          <a:xfrm xmlns:a="http://schemas.openxmlformats.org/drawingml/2006/main">
-            <a:off x="323850" y="76200"/>
-            <a:ext cx="533400" cy="533400"/>
-          </a:xfrm>
-          <a:prstGeom xmlns:a="http://schemas.openxmlformats.org/drawingml/2006/main" prst="rect">
-            <a:avLst/>
-          </a:prstGeom>
-        </p:spPr>
-      </p:pic>
-      <p:sp>
-        <p:nvSpPr>
-          <p:cNvPr id="8" name="brand-title">
-            <a:extLst xmlns:a="http://schemas.openxmlformats.org/drawingml/2006/main">
-              <a:ext uri="{FF2B5EF4-FFF2-40B4-BE49-F238E27FC236}">
-                <a16:creationId xmlns:a16="http://schemas.microsoft.com/office/drawing/2014/main" id="{3DB653CD-F43F-4B80-A8D1-E3121B8AC7ED}"/>
-              </a:ext>
-            </a:extLst>
-          </p:cNvPr>
-          <p:cNvSpPr>
-            <a:spLocks xmlns:a="http://schemas.openxmlformats.org/drawingml/2006/main" noGrp="1"/>
-          </p:cNvSpPr>
-          <p:nvPr/>
-        </p:nvSpPr>
-        <p:spPr>
-          <a:xfrm xmlns:a="http://schemas.openxmlformats.org/drawingml/2006/main">
-            <a:off x="1028700" y="66675"/>
-            <a:ext cx="10477500" cy="552450"/>
+          <p:cNvPr id="6" name="content-316">
+            <a:extLst xmlns:a="http://schemas.openxmlformats.org/drawingml/2006/main">
+              <a:ext uri="{FF2B5EF4-FFF2-40B4-BE49-F238E27FC236}">
+                <a16:creationId xmlns:a16="http://schemas.microsoft.com/office/drawing/2014/main" id="{6B6C8C28-3EF9-47E9-BC44-9646318BF880}"/>
+              </a:ext>
+            </a:extLst>
+          </p:cNvPr>
+          <p:cNvSpPr>
+            <a:spLocks xmlns:a="http://schemas.openxmlformats.org/drawingml/2006/main" noGrp="1"/>
+          </p:cNvSpPr>
+          <p:nvPr/>
+        </p:nvSpPr>
+        <p:spPr>
+          <a:xfrm xmlns:a="http://schemas.openxmlformats.org/drawingml/2006/main">
+            <a:off x="609600" y="1571625"/>
+            <a:ext cx="10972800" cy="432435"/>
           </a:xfrm>
           <a:prstGeom xmlns:a="http://schemas.openxmlformats.org/drawingml/2006/main" prst="rect">
             <a:avLst/>
@@ -12982,7 +13683,7 @@
           </a:ln>
         </p:spPr>
         <p:txBody>
-          <a:bodyPr xmlns:a="http://schemas.openxmlformats.org/drawingml/2006/main" lIns="0" tIns="0" rIns="0" bIns="0" anchor="ctr"/>
+          <a:bodyPr xmlns:a="http://schemas.openxmlformats.org/drawingml/2006/main" lIns="0" tIns="0" rIns="0" bIns="0" anchor="t"/>
           <a:lstStyle xmlns:a="http://schemas.openxmlformats.org/drawingml/2006/main"/>
           <a:p xmlns:a="http://schemas.openxmlformats.org/drawingml/2006/main">
             <a:pPr algn="l">
@@ -12990,9 +13691,9 @@
                 <a:spcPct val="118000"/>
               </a:lnSpc>
               <a:buNone/>
-              <a:defRPr sz="3000" b="1">
-                <a:solidFill>
-                  <a:srgbClr val="FFFFFF"/>
+              <a:defRPr sz="2400" b="0">
+                <a:solidFill>
+                  <a:srgbClr val="27333D"/>
                 </a:solidFill>
                 <a:latin typeface="微软雅黑"/>
                 <a:ea typeface="微软雅黑"/>
@@ -13000,37 +13701,37 @@
               </a:defRPr>
             </a:pPr>
             <a:r>
-              <a:rPr sz="3000" b="1">
-                <a:solidFill>
-                  <a:srgbClr val="FFFFFF"/>
+              <a:rPr sz="2400" b="0">
+                <a:solidFill>
+                  <a:srgbClr val="27333D"/>
                 </a:solidFill>
                 <a:latin typeface="微软雅黑"/>
                 <a:ea typeface="微软雅黑"/>
                 <a:cs typeface="微软雅黑"/>
               </a:rPr>
-              <a:t>失败 trace 连接停止与冻结配置恢复</a:t>
-            </a:r>
-          </a:p>
-        </p:txBody>
-      </p:sp>
-      <p:sp>
-        <p:nvSpPr>
-          <p:cNvPr id="9" name="source">
-            <a:extLst xmlns:a="http://schemas.openxmlformats.org/drawingml/2006/main">
-              <a:ext uri="{FF2B5EF4-FFF2-40B4-BE49-F238E27FC236}">
-                <a16:creationId xmlns:a16="http://schemas.microsoft.com/office/drawing/2014/main" id="{EF4E13FB-2C2B-47CE-8F4A-33ADA74114D4}"/>
-              </a:ext>
-            </a:extLst>
-          </p:cNvPr>
-          <p:cNvSpPr>
-            <a:spLocks xmlns:a="http://schemas.openxmlformats.org/drawingml/2006/main" noGrp="1"/>
-          </p:cNvSpPr>
-          <p:nvPr/>
-        </p:nvSpPr>
-        <p:spPr>
-          <a:xfrm xmlns:a="http://schemas.openxmlformats.org/drawingml/2006/main">
-            <a:off x="609600" y="6067425"/>
-            <a:ext cx="10763250" cy="209550"/>
+              <a:t>失败事件还在吗？</a:t>
+            </a:r>
+          </a:p>
+        </p:txBody>
+      </p:sp>
+      <p:sp>
+        <p:nvSpPr>
+          <p:cNvPr id="7" name="content-317">
+            <a:extLst xmlns:a="http://schemas.openxmlformats.org/drawingml/2006/main">
+              <a:ext uri="{FF2B5EF4-FFF2-40B4-BE49-F238E27FC236}">
+                <a16:creationId xmlns:a16="http://schemas.microsoft.com/office/drawing/2014/main" id="{24EC9AF8-D6F0-4811-A999-57DD6E916284}"/>
+              </a:ext>
+            </a:extLst>
+          </p:cNvPr>
+          <p:cNvSpPr>
+            <a:spLocks xmlns:a="http://schemas.openxmlformats.org/drawingml/2006/main" noGrp="1"/>
+          </p:cNvSpPr>
+          <p:nvPr/>
+        </p:nvSpPr>
+        <p:spPr>
+          <a:xfrm xmlns:a="http://schemas.openxmlformats.org/drawingml/2006/main">
+            <a:off x="609600" y="2261235"/>
+            <a:ext cx="10972800" cy="432435"/>
           </a:xfrm>
           <a:prstGeom xmlns:a="http://schemas.openxmlformats.org/drawingml/2006/main" prst="rect">
             <a:avLst/>
@@ -13049,9 +13750,9 @@
                 <a:spcPct val="118000"/>
               </a:lnSpc>
               <a:buNone/>
-              <a:defRPr sz="1100" b="0">
-                <a:solidFill>
-                  <a:srgbClr val="66727D"/>
+              <a:defRPr sz="2400" b="0">
+                <a:solidFill>
+                  <a:srgbClr val="27333D"/>
                 </a:solidFill>
                 <a:latin typeface="微软雅黑"/>
                 <a:ea typeface="微软雅黑"/>
@@ -13059,97 +13760,37 @@
               </a:defRPr>
             </a:pPr>
             <a:r>
-              <a:rPr sz="1100" b="0">
-                <a:solidFill>
-                  <a:srgbClr val="66727D"/>
+              <a:rPr sz="2400" b="0">
+                <a:solidFill>
+                  <a:srgbClr val="27333D"/>
                 </a:solidFill>
                 <a:latin typeface="微软雅黑"/>
                 <a:ea typeface="微软雅黑"/>
                 <a:cs typeface="微软雅黑"/>
               </a:rPr>
-              <a:t>来源：lesson-11/slides.md；课程工件与讲义见 speaker notes</a:t>
-            </a:r>
-          </a:p>
-        </p:txBody>
-      </p:sp>
-      <p:sp>
-        <p:nvSpPr>
-          <p:cNvPr id="10" name="doc-10-bg">
-            <a:extLst xmlns:a="http://schemas.openxmlformats.org/drawingml/2006/main">
-              <a:ext uri="{FF2B5EF4-FFF2-40B4-BE49-F238E27FC236}">
-                <a16:creationId xmlns:a16="http://schemas.microsoft.com/office/drawing/2014/main" id="{762DE5CE-3E3F-4FD8-96C8-22C9D7B30667}"/>
-              </a:ext>
-            </a:extLst>
-          </p:cNvPr>
-          <p:cNvSpPr>
-            <a:spLocks xmlns:a="http://schemas.openxmlformats.org/drawingml/2006/main" noGrp="1"/>
-          </p:cNvSpPr>
-          <p:nvPr/>
-        </p:nvSpPr>
-        <p:spPr>
-          <a:xfrm xmlns:a="http://schemas.openxmlformats.org/drawingml/2006/main">
-            <a:off x="666750" y="1381125"/>
-            <a:ext cx="7239000" cy="4095750"/>
-          </a:xfrm>
-          <a:prstGeom xmlns:a="http://schemas.openxmlformats.org/drawingml/2006/main" prst="rect">
-            <a:avLst/>
-          </a:prstGeom>
-          <a:solidFill xmlns:a="http://schemas.openxmlformats.org/drawingml/2006/main">
-            <a:srgbClr val="F4F6F8"/>
-          </a:solidFill>
-          <a:ln xmlns:a="http://schemas.openxmlformats.org/drawingml/2006/main" w="0">
-            <a:noFill/>
-          </a:ln>
-        </p:spPr>
-      </p:sp>
-      <p:sp>
-        <p:nvSpPr>
-          <p:cNvPr id="11" name="doc-10-title-bg">
-            <a:extLst xmlns:a="http://schemas.openxmlformats.org/drawingml/2006/main">
-              <a:ext uri="{FF2B5EF4-FFF2-40B4-BE49-F238E27FC236}">
-                <a16:creationId xmlns:a16="http://schemas.microsoft.com/office/drawing/2014/main" id="{6C8DB9D6-BD3F-420B-B598-601C6700762E}"/>
-              </a:ext>
-            </a:extLst>
-          </p:cNvPr>
-          <p:cNvSpPr>
-            <a:spLocks xmlns:a="http://schemas.openxmlformats.org/drawingml/2006/main" noGrp="1"/>
-          </p:cNvSpPr>
-          <p:nvPr/>
-        </p:nvSpPr>
-        <p:spPr>
-          <a:xfrm xmlns:a="http://schemas.openxmlformats.org/drawingml/2006/main">
-            <a:off x="666750" y="1381125"/>
-            <a:ext cx="4286250" cy="323850"/>
-          </a:xfrm>
-          <a:prstGeom xmlns:a="http://schemas.openxmlformats.org/drawingml/2006/main" prst="rect">
-            <a:avLst/>
-          </a:prstGeom>
-          <a:solidFill xmlns:a="http://schemas.openxmlformats.org/drawingml/2006/main">
-            <a:srgbClr val="1F4D78"/>
-          </a:solidFill>
-          <a:ln xmlns:a="http://schemas.openxmlformats.org/drawingml/2006/main" w="0">
-            <a:noFill/>
-          </a:ln>
-        </p:spPr>
-      </p:sp>
-      <p:sp>
-        <p:nvSpPr>
-          <p:cNvPr id="12" name="doc-10-title">
-            <a:extLst xmlns:a="http://schemas.openxmlformats.org/drawingml/2006/main">
-              <a:ext uri="{FF2B5EF4-FFF2-40B4-BE49-F238E27FC236}">
-                <a16:creationId xmlns:a16="http://schemas.microsoft.com/office/drawing/2014/main" id="{5B0F690E-31D1-4B3B-855D-0AEA8DDF9BC8}"/>
-              </a:ext>
-            </a:extLst>
-          </p:cNvPr>
-          <p:cNvSpPr>
-            <a:spLocks xmlns:a="http://schemas.openxmlformats.org/drawingml/2006/main" noGrp="1"/>
-          </p:cNvSpPr>
-          <p:nvPr/>
-        </p:nvSpPr>
-        <p:spPr>
-          <a:xfrm xmlns:a="http://schemas.openxmlformats.org/drawingml/2006/main">
-            <a:off x="742950" y="1400175"/>
-            <a:ext cx="4133850" cy="285750"/>
+              <a:t>输入和配置改变了吗？</a:t>
+            </a:r>
+          </a:p>
+        </p:txBody>
+      </p:sp>
+      <p:sp>
+        <p:nvSpPr>
+          <p:cNvPr id="8" name="content-318">
+            <a:extLst xmlns:a="http://schemas.openxmlformats.org/drawingml/2006/main">
+              <a:ext uri="{FF2B5EF4-FFF2-40B4-BE49-F238E27FC236}">
+                <a16:creationId xmlns:a16="http://schemas.microsoft.com/office/drawing/2014/main" id="{53D59AD8-172D-4C8B-A8EC-A9F31D850131}"/>
+              </a:ext>
+            </a:extLst>
+          </p:cNvPr>
+          <p:cNvSpPr>
+            <a:spLocks xmlns:a="http://schemas.openxmlformats.org/drawingml/2006/main" noGrp="1"/>
+          </p:cNvSpPr>
+          <p:nvPr/>
+        </p:nvSpPr>
+        <p:spPr>
+          <a:xfrm xmlns:a="http://schemas.openxmlformats.org/drawingml/2006/main">
+            <a:off x="609600" y="2950845"/>
+            <a:ext cx="10972800" cy="432435"/>
           </a:xfrm>
           <a:prstGeom xmlns:a="http://schemas.openxmlformats.org/drawingml/2006/main" prst="rect">
             <a:avLst/>
@@ -13160,7 +13801,7 @@
           </a:ln>
         </p:spPr>
         <p:txBody>
-          <a:bodyPr xmlns:a="http://schemas.openxmlformats.org/drawingml/2006/main" lIns="0" tIns="0" rIns="0" bIns="0" anchor="ctr"/>
+          <a:bodyPr xmlns:a="http://schemas.openxmlformats.org/drawingml/2006/main" lIns="0" tIns="0" rIns="0" bIns="0" anchor="t"/>
           <a:lstStyle xmlns:a="http://schemas.openxmlformats.org/drawingml/2006/main"/>
           <a:p xmlns:a="http://schemas.openxmlformats.org/drawingml/2006/main">
             <a:pPr algn="l">
@@ -13168,9 +13809,9 @@
                 <a:spcPct val="118000"/>
               </a:lnSpc>
               <a:buNone/>
-              <a:defRPr sz="1800" b="1">
-                <a:solidFill>
-                  <a:srgbClr val="FFFFFF"/>
+              <a:defRPr sz="2400" b="0">
+                <a:solidFill>
+                  <a:srgbClr val="27333D"/>
                 </a:solidFill>
                 <a:latin typeface="微软雅黑"/>
                 <a:ea typeface="微软雅黑"/>
@@ -13178,37 +13819,37 @@
               </a:defRPr>
             </a:pPr>
             <a:r>
-              <a:rPr sz="1800" b="1">
-                <a:solidFill>
-                  <a:srgbClr val="FFFFFF"/>
+              <a:rPr sz="2400" b="0">
+                <a:solidFill>
+                  <a:srgbClr val="27333D"/>
                 </a:solidFill>
                 <a:latin typeface="微软雅黑"/>
                 <a:ea typeface="微软雅黑"/>
                 <a:cs typeface="微软雅黑"/>
               </a:rPr>
-              <a:t>failure-log.md｜课程虚构记录</a:t>
-            </a:r>
-          </a:p>
-        </p:txBody>
-      </p:sp>
-      <p:sp>
-        <p:nvSpPr>
-          <p:cNvPr id="13" name="doc-10-line-0">
-            <a:extLst xmlns:a="http://schemas.openxmlformats.org/drawingml/2006/main">
-              <a:ext uri="{FF2B5EF4-FFF2-40B4-BE49-F238E27FC236}">
-                <a16:creationId xmlns:a16="http://schemas.microsoft.com/office/drawing/2014/main" id="{E548C0B9-7D1B-41FD-8D88-F498BF42C587}"/>
-              </a:ext>
-            </a:extLst>
-          </p:cNvPr>
-          <p:cNvSpPr>
-            <a:spLocks xmlns:a="http://schemas.openxmlformats.org/drawingml/2006/main" noGrp="1"/>
-          </p:cNvSpPr>
-          <p:nvPr/>
-        </p:nvSpPr>
-        <p:spPr>
-          <a:xfrm xmlns:a="http://schemas.openxmlformats.org/drawingml/2006/main">
-            <a:off x="895350" y="1876425"/>
-            <a:ext cx="6781800" cy="558800"/>
+              <a:t>成功任务被重复执行了吗？</a:t>
+            </a:r>
+          </a:p>
+        </p:txBody>
+      </p:sp>
+      <p:sp>
+        <p:nvSpPr>
+          <p:cNvPr id="9" name="content-319">
+            <a:extLst xmlns:a="http://schemas.openxmlformats.org/drawingml/2006/main">
+              <a:ext uri="{FF2B5EF4-FFF2-40B4-BE49-F238E27FC236}">
+                <a16:creationId xmlns:a16="http://schemas.microsoft.com/office/drawing/2014/main" id="{C66C2D57-9AF1-4B92-8AB2-263ACC6C062E}"/>
+              </a:ext>
+            </a:extLst>
+          </p:cNvPr>
+          <p:cNvSpPr>
+            <a:spLocks xmlns:a="http://schemas.openxmlformats.org/drawingml/2006/main" noGrp="1"/>
+          </p:cNvSpPr>
+          <p:nvPr/>
+        </p:nvSpPr>
+        <p:spPr>
+          <a:xfrm xmlns:a="http://schemas.openxmlformats.org/drawingml/2006/main">
+            <a:off x="609600" y="3640455"/>
+            <a:ext cx="10972800" cy="432435"/>
           </a:xfrm>
           <a:prstGeom xmlns:a="http://schemas.openxmlformats.org/drawingml/2006/main" prst="rect">
             <a:avLst/>
@@ -13219,7 +13860,7 @@
           </a:ln>
         </p:spPr>
         <p:txBody>
-          <a:bodyPr xmlns:a="http://schemas.openxmlformats.org/drawingml/2006/main" lIns="0" tIns="0" rIns="0" bIns="0" anchor="ctr"/>
+          <a:bodyPr xmlns:a="http://schemas.openxmlformats.org/drawingml/2006/main" lIns="0" tIns="0" rIns="0" bIns="0" anchor="t"/>
           <a:lstStyle xmlns:a="http://schemas.openxmlformats.org/drawingml/2006/main"/>
           <a:p xmlns:a="http://schemas.openxmlformats.org/drawingml/2006/main">
             <a:pPr algn="l">
@@ -13227,9 +13868,9 @@
                 <a:spcPct val="118000"/>
               </a:lnSpc>
               <a:buNone/>
-              <a:defRPr sz="2200" b="0">
-                <a:solidFill>
-                  <a:srgbClr val="27333D"/>
+              <a:defRPr sz="2400" b="0">
+                <a:solidFill>
+                  <a:srgbClr val="1F4D78"/>
                 </a:solidFill>
                 <a:latin typeface="微软雅黑"/>
                 <a:ea typeface="微软雅黑"/>
@@ -13237,396 +13878,15 @@
               </a:defRPr>
             </a:pPr>
             <a:r>
-              <a:rPr sz="2200" b="0">
-                <a:solidFill>
-                  <a:srgbClr val="27333D"/>
+              <a:rPr sz="2400" b="0">
+                <a:solidFill>
+                  <a:srgbClr val="1F4D78"/>
                 </a:solidFill>
                 <a:latin typeface="微软雅黑"/>
                 <a:ea typeface="微软雅黑"/>
                 <a:cs typeface="微软雅黑"/>
               </a:rPr>
-              <a:t>run_id: exp01-iter07｜H1</a:t>
-            </a:r>
-          </a:p>
-        </p:txBody>
-      </p:sp>
-      <p:sp>
-        <p:nvSpPr>
-          <p:cNvPr id="14" name="doc-10-line-1">
-            <a:extLst xmlns:a="http://schemas.openxmlformats.org/drawingml/2006/main">
-              <a:ext uri="{FF2B5EF4-FFF2-40B4-BE49-F238E27FC236}">
-                <a16:creationId xmlns:a16="http://schemas.microsoft.com/office/drawing/2014/main" id="{6ECBC78D-D2E2-470B-86D8-72F21BF0F3E5}"/>
-              </a:ext>
-            </a:extLst>
-          </p:cNvPr>
-          <p:cNvSpPr>
-            <a:spLocks xmlns:a="http://schemas.openxmlformats.org/drawingml/2006/main" noGrp="1"/>
-          </p:cNvSpPr>
-          <p:nvPr/>
-        </p:nvSpPr>
-        <p:spPr>
-          <a:xfrm xmlns:a="http://schemas.openxmlformats.org/drawingml/2006/main">
-            <a:off x="895350" y="2444750"/>
-            <a:ext cx="6781800" cy="558800"/>
-          </a:xfrm>
-          <a:prstGeom xmlns:a="http://schemas.openxmlformats.org/drawingml/2006/main" prst="rect">
-            <a:avLst/>
-          </a:prstGeom>
-          <a:noFill xmlns:a="http://schemas.openxmlformats.org/drawingml/2006/main"/>
-          <a:ln xmlns:a="http://schemas.openxmlformats.org/drawingml/2006/main" w="0">
-            <a:noFill/>
-          </a:ln>
-        </p:spPr>
-        <p:txBody>
-          <a:bodyPr xmlns:a="http://schemas.openxmlformats.org/drawingml/2006/main" lIns="0" tIns="0" rIns="0" bIns="0" anchor="ctr"/>
-          <a:lstStyle xmlns:a="http://schemas.openxmlformats.org/drawingml/2006/main"/>
-          <a:p xmlns:a="http://schemas.openxmlformats.org/drawingml/2006/main">
-            <a:pPr algn="l">
-              <a:lnSpc>
-                <a:spcPct val="118000"/>
-              </a:lnSpc>
-              <a:buNone/>
-              <a:defRPr sz="2200" b="0">
-                <a:solidFill>
-                  <a:srgbClr val="27333D"/>
-                </a:solidFill>
-                <a:latin typeface="微软雅黑"/>
-                <a:ea typeface="微软雅黑"/>
-                <a:cs typeface="微软雅黑"/>
-              </a:defRPr>
-            </a:pPr>
-            <a:r>
-              <a:rPr sz="2200" b="0">
-                <a:solidFill>
-                  <a:srgbClr val="27333D"/>
-                </a:solidFill>
-                <a:latin typeface="微软雅黑"/>
-                <a:ea typeface="微软雅黑"/>
-                <a:cs typeface="微软雅黑"/>
-              </a:rPr>
-              <a:t>failure: metric protocol mismatch</a:t>
-            </a:r>
-          </a:p>
-        </p:txBody>
-      </p:sp>
-      <p:sp>
-        <p:nvSpPr>
-          <p:cNvPr id="15" name="doc-10-line-2">
-            <a:extLst xmlns:a="http://schemas.openxmlformats.org/drawingml/2006/main">
-              <a:ext uri="{FF2B5EF4-FFF2-40B4-BE49-F238E27FC236}">
-                <a16:creationId xmlns:a16="http://schemas.microsoft.com/office/drawing/2014/main" id="{A250CDD6-B091-410C-A9EB-12B456305116}"/>
-              </a:ext>
-            </a:extLst>
-          </p:cNvPr>
-          <p:cNvSpPr>
-            <a:spLocks xmlns:a="http://schemas.openxmlformats.org/drawingml/2006/main" noGrp="1"/>
-          </p:cNvSpPr>
-          <p:nvPr/>
-        </p:nvSpPr>
-        <p:spPr>
-          <a:xfrm xmlns:a="http://schemas.openxmlformats.org/drawingml/2006/main">
-            <a:off x="895350" y="3013075"/>
-            <a:ext cx="6781800" cy="558800"/>
-          </a:xfrm>
-          <a:prstGeom xmlns:a="http://schemas.openxmlformats.org/drawingml/2006/main" prst="rect">
-            <a:avLst/>
-          </a:prstGeom>
-          <a:noFill xmlns:a="http://schemas.openxmlformats.org/drawingml/2006/main"/>
-          <a:ln xmlns:a="http://schemas.openxmlformats.org/drawingml/2006/main" w="0">
-            <a:noFill/>
-          </a:ln>
-        </p:spPr>
-        <p:txBody>
-          <a:bodyPr xmlns:a="http://schemas.openxmlformats.org/drawingml/2006/main" lIns="0" tIns="0" rIns="0" bIns="0" anchor="ctr"/>
-          <a:lstStyle xmlns:a="http://schemas.openxmlformats.org/drawingml/2006/main"/>
-          <a:p xmlns:a="http://schemas.openxmlformats.org/drawingml/2006/main">
-            <a:pPr algn="l">
-              <a:lnSpc>
-                <a:spcPct val="118000"/>
-              </a:lnSpc>
-              <a:buNone/>
-              <a:defRPr sz="2200" b="0">
-                <a:solidFill>
-                  <a:srgbClr val="27333D"/>
-                </a:solidFill>
-                <a:latin typeface="微软雅黑"/>
-                <a:ea typeface="微软雅黑"/>
-                <a:cs typeface="微软雅黑"/>
-              </a:defRPr>
-            </a:pPr>
-            <a:r>
-              <a:rPr sz="2200" b="0">
-                <a:solidFill>
-                  <a:srgbClr val="27333D"/>
-                </a:solidFill>
-                <a:latin typeface="微软雅黑"/>
-                <a:ea typeface="微软雅黑"/>
-                <a:cs typeface="微软雅黑"/>
-              </a:rPr>
-              <a:t>stop: protocol change detected</a:t>
-            </a:r>
-          </a:p>
-        </p:txBody>
-      </p:sp>
-      <p:sp>
-        <p:nvSpPr>
-          <p:cNvPr id="16" name="doc-10-line-3">
-            <a:extLst xmlns:a="http://schemas.openxmlformats.org/drawingml/2006/main">
-              <a:ext uri="{FF2B5EF4-FFF2-40B4-BE49-F238E27FC236}">
-                <a16:creationId xmlns:a16="http://schemas.microsoft.com/office/drawing/2014/main" id="{98D14DBA-E92F-410B-A1F7-145FB0516D07}"/>
-              </a:ext>
-            </a:extLst>
-          </p:cNvPr>
-          <p:cNvSpPr>
-            <a:spLocks xmlns:a="http://schemas.openxmlformats.org/drawingml/2006/main" noGrp="1"/>
-          </p:cNvSpPr>
-          <p:nvPr/>
-        </p:nvSpPr>
-        <p:spPr>
-          <a:xfrm xmlns:a="http://schemas.openxmlformats.org/drawingml/2006/main">
-            <a:off x="895350" y="3581400"/>
-            <a:ext cx="6781800" cy="558800"/>
-          </a:xfrm>
-          <a:prstGeom xmlns:a="http://schemas.openxmlformats.org/drawingml/2006/main" prst="rect">
-            <a:avLst/>
-          </a:prstGeom>
-          <a:noFill xmlns:a="http://schemas.openxmlformats.org/drawingml/2006/main"/>
-          <a:ln xmlns:a="http://schemas.openxmlformats.org/drawingml/2006/main" w="0">
-            <a:noFill/>
-          </a:ln>
-        </p:spPr>
-        <p:txBody>
-          <a:bodyPr xmlns:a="http://schemas.openxmlformats.org/drawingml/2006/main" lIns="0" tIns="0" rIns="0" bIns="0" anchor="ctr"/>
-          <a:lstStyle xmlns:a="http://schemas.openxmlformats.org/drawingml/2006/main"/>
-          <a:p xmlns:a="http://schemas.openxmlformats.org/drawingml/2006/main">
-            <a:pPr algn="l">
-              <a:lnSpc>
-                <a:spcPct val="118000"/>
-              </a:lnSpc>
-              <a:buNone/>
-              <a:defRPr sz="2200" b="0">
-                <a:solidFill>
-                  <a:srgbClr val="27333D"/>
-                </a:solidFill>
-                <a:latin typeface="微软雅黑"/>
-                <a:ea typeface="微软雅黑"/>
-                <a:cs typeface="微软雅黑"/>
-              </a:defRPr>
-            </a:pPr>
-            <a:r>
-              <a:rPr sz="2200" b="0">
-                <a:solidFill>
-                  <a:srgbClr val="27333D"/>
-                </a:solidFill>
-                <a:latin typeface="微软雅黑"/>
-                <a:ea typeface="微软雅黑"/>
-                <a:cs typeface="微软雅黑"/>
-              </a:rPr>
-              <a:t>rollback: frozen-config-v1</a:t>
-            </a:r>
-          </a:p>
-        </p:txBody>
-      </p:sp>
-      <p:sp>
-        <p:nvSpPr>
-          <p:cNvPr id="17" name="doc-10-line-4">
-            <a:extLst xmlns:a="http://schemas.openxmlformats.org/drawingml/2006/main">
-              <a:ext uri="{FF2B5EF4-FFF2-40B4-BE49-F238E27FC236}">
-                <a16:creationId xmlns:a16="http://schemas.microsoft.com/office/drawing/2014/main" id="{1DDF6AA6-E46A-4F8D-B627-EBC0DDDB1EC4}"/>
-              </a:ext>
-            </a:extLst>
-          </p:cNvPr>
-          <p:cNvSpPr>
-            <a:spLocks xmlns:a="http://schemas.openxmlformats.org/drawingml/2006/main" noGrp="1"/>
-          </p:cNvSpPr>
-          <p:nvPr/>
-        </p:nvSpPr>
-        <p:spPr>
-          <a:xfrm xmlns:a="http://schemas.openxmlformats.org/drawingml/2006/main">
-            <a:off x="895350" y="4149725"/>
-            <a:ext cx="6781800" cy="558800"/>
-          </a:xfrm>
-          <a:prstGeom xmlns:a="http://schemas.openxmlformats.org/drawingml/2006/main" prst="rect">
-            <a:avLst/>
-          </a:prstGeom>
-          <a:noFill xmlns:a="http://schemas.openxmlformats.org/drawingml/2006/main"/>
-          <a:ln xmlns:a="http://schemas.openxmlformats.org/drawingml/2006/main" w="0">
-            <a:noFill/>
-          </a:ln>
-        </p:spPr>
-        <p:txBody>
-          <a:bodyPr xmlns:a="http://schemas.openxmlformats.org/drawingml/2006/main" lIns="0" tIns="0" rIns="0" bIns="0" anchor="ctr"/>
-          <a:lstStyle xmlns:a="http://schemas.openxmlformats.org/drawingml/2006/main"/>
-          <a:p xmlns:a="http://schemas.openxmlformats.org/drawingml/2006/main">
-            <a:pPr algn="l">
-              <a:lnSpc>
-                <a:spcPct val="118000"/>
-              </a:lnSpc>
-              <a:buNone/>
-              <a:defRPr sz="2200" b="0">
-                <a:solidFill>
-                  <a:srgbClr val="27333D"/>
-                </a:solidFill>
-                <a:latin typeface="微软雅黑"/>
-                <a:ea typeface="微软雅黑"/>
-                <a:cs typeface="微软雅黑"/>
-              </a:defRPr>
-            </a:pPr>
-            <a:r>
-              <a:rPr sz="2200" b="0">
-                <a:solidFill>
-                  <a:srgbClr val="27333D"/>
-                </a:solidFill>
-                <a:latin typeface="微软雅黑"/>
-                <a:ea typeface="微软雅黑"/>
-                <a:cs typeface="微软雅黑"/>
-              </a:rPr>
-              <a:t>human_review: confirmed</a:t>
-            </a:r>
-          </a:p>
-        </p:txBody>
-      </p:sp>
-      <p:sp>
-        <p:nvSpPr>
-          <p:cNvPr id="18" name="doc-10-line-5">
-            <a:extLst xmlns:a="http://schemas.openxmlformats.org/drawingml/2006/main">
-              <a:ext uri="{FF2B5EF4-FFF2-40B4-BE49-F238E27FC236}">
-                <a16:creationId xmlns:a16="http://schemas.microsoft.com/office/drawing/2014/main" id="{A007DB37-ABA8-4442-AF92-B882FB2CC452}"/>
-              </a:ext>
-            </a:extLst>
-          </p:cNvPr>
-          <p:cNvSpPr>
-            <a:spLocks xmlns:a="http://schemas.openxmlformats.org/drawingml/2006/main" noGrp="1"/>
-          </p:cNvSpPr>
-          <p:nvPr/>
-        </p:nvSpPr>
-        <p:spPr>
-          <a:xfrm xmlns:a="http://schemas.openxmlformats.org/drawingml/2006/main">
-            <a:off x="895350" y="4718050"/>
-            <a:ext cx="6781800" cy="558800"/>
-          </a:xfrm>
-          <a:prstGeom xmlns:a="http://schemas.openxmlformats.org/drawingml/2006/main" prst="rect">
-            <a:avLst/>
-          </a:prstGeom>
-          <a:noFill xmlns:a="http://schemas.openxmlformats.org/drawingml/2006/main"/>
-          <a:ln xmlns:a="http://schemas.openxmlformats.org/drawingml/2006/main" w="0">
-            <a:noFill/>
-          </a:ln>
-        </p:spPr>
-        <p:txBody>
-          <a:bodyPr xmlns:a="http://schemas.openxmlformats.org/drawingml/2006/main" lIns="0" tIns="0" rIns="0" bIns="0" anchor="ctr"/>
-          <a:lstStyle xmlns:a="http://schemas.openxmlformats.org/drawingml/2006/main"/>
-          <a:p xmlns:a="http://schemas.openxmlformats.org/drawingml/2006/main">
-            <a:pPr algn="l">
-              <a:lnSpc>
-                <a:spcPct val="118000"/>
-              </a:lnSpc>
-              <a:buNone/>
-              <a:defRPr sz="2200" b="0">
-                <a:solidFill>
-                  <a:srgbClr val="27333D"/>
-                </a:solidFill>
-                <a:latin typeface="微软雅黑"/>
-                <a:ea typeface="微软雅黑"/>
-                <a:cs typeface="微软雅黑"/>
-              </a:defRPr>
-            </a:pPr>
-            <a:r>
-              <a:rPr sz="2200" b="0">
-                <a:solidFill>
-                  <a:srgbClr val="27333D"/>
-                </a:solidFill>
-                <a:latin typeface="微软雅黑"/>
-                <a:ea typeface="微软雅黑"/>
-                <a:cs typeface="微软雅黑"/>
-              </a:rPr>
-              <a:t>decision: stop; retain failed run</a:t>
-            </a:r>
-          </a:p>
-        </p:txBody>
-      </p:sp>
-      <p:sp>
-        <p:nvSpPr>
-          <p:cNvPr id="19" name="keep">
-            <a:extLst xmlns:a="http://schemas.openxmlformats.org/drawingml/2006/main">
-              <a:ext uri="{FF2B5EF4-FFF2-40B4-BE49-F238E27FC236}">
-                <a16:creationId xmlns:a16="http://schemas.microsoft.com/office/drawing/2014/main" id="{4F587CF5-55DD-4E52-9BEA-0E62797A7002}"/>
-              </a:ext>
-            </a:extLst>
-          </p:cNvPr>
-          <p:cNvSpPr>
-            <a:spLocks xmlns:a="http://schemas.openxmlformats.org/drawingml/2006/main" noGrp="1"/>
-          </p:cNvSpPr>
-          <p:nvPr/>
-        </p:nvSpPr>
-        <p:spPr>
-          <a:xfrm xmlns:a="http://schemas.openxmlformats.org/drawingml/2006/main">
-            <a:off x="8334375" y="2381250"/>
-            <a:ext cx="2762250" cy="1428750"/>
-          </a:xfrm>
-          <a:prstGeom xmlns:a="http://schemas.openxmlformats.org/drawingml/2006/main" prst="rect">
-            <a:avLst/>
-          </a:prstGeom>
-          <a:noFill xmlns:a="http://schemas.openxmlformats.org/drawingml/2006/main"/>
-          <a:ln xmlns:a="http://schemas.openxmlformats.org/drawingml/2006/main" w="0">
-            <a:noFill/>
-          </a:ln>
-        </p:spPr>
-        <p:txBody>
-          <a:bodyPr xmlns:a="http://schemas.openxmlformats.org/drawingml/2006/main" lIns="0" tIns="0" rIns="0" bIns="0" anchor="t"/>
-          <a:lstStyle xmlns:a="http://schemas.openxmlformats.org/drawingml/2006/main"/>
-          <a:p xmlns:a="http://schemas.openxmlformats.org/drawingml/2006/main">
-            <a:pPr algn="ctr">
-              <a:lnSpc>
-                <a:spcPct val="118000"/>
-              </a:lnSpc>
-              <a:buNone/>
-              <a:defRPr sz="2600" b="1">
-                <a:solidFill>
-                  <a:srgbClr val="2E7D5B"/>
-                </a:solidFill>
-                <a:latin typeface="微软雅黑"/>
-                <a:ea typeface="微软雅黑"/>
-                <a:cs typeface="微软雅黑"/>
-              </a:defRPr>
-            </a:pPr>
-            <a:r>
-              <a:rPr sz="2600" b="1">
-                <a:solidFill>
-                  <a:srgbClr val="2E7D5B"/>
-                </a:solidFill>
-                <a:latin typeface="微软雅黑"/>
-                <a:ea typeface="微软雅黑"/>
-                <a:cs typeface="微软雅黑"/>
-              </a:rPr>
-              <a:t>失败记录保留</a:t>
-            </a:r>
-          </a:p>
-          <a:p xmlns:a="http://schemas.openxmlformats.org/drawingml/2006/main">
-            <a:pPr algn="ctr">
-              <a:lnSpc>
-                <a:spcPct val="118000"/>
-              </a:lnSpc>
-              <a:buNone/>
-              <a:defRPr sz="2600" b="1">
-                <a:solidFill>
-                  <a:srgbClr val="2E7D5B"/>
-                </a:solidFill>
-                <a:latin typeface="微软雅黑"/>
-                <a:ea typeface="微软雅黑"/>
-                <a:cs typeface="微软雅黑"/>
-              </a:defRPr>
-            </a:pPr>
-            <a:r>
-              <a:rPr sz="2600" b="1">
-                <a:solidFill>
-                  <a:srgbClr val="2E7D5B"/>
-                </a:solidFill>
-                <a:latin typeface="微软雅黑"/>
-                <a:ea typeface="微软雅黑"/>
-                <a:cs typeface="微软雅黑"/>
-              </a:rPr>
-              <a:t>恢复原冻结配置</a:t>
+              <a:t>预算与停止条件仍然生效吗？</a:t>
             </a:r>
           </a:p>
         </p:txBody>
@@ -13767,7 +14027,7 @@
           <p:nvPr/>
         </p:nvPicPr>
         <p:blipFill>
-          <a:blip xmlns:r="http://schemas.openxmlformats.org/officeDocument/2006/relationships" xmlns:a="http://schemas.openxmlformats.org/drawingml/2006/main" r:embed="Ra0ff7f4d3fc84eef"/>
+          <a:blip xmlns:r="http://schemas.openxmlformats.org/officeDocument/2006/relationships" xmlns:a="http://schemas.openxmlformats.org/drawingml/2006/main" r:embed="R74c26196148c451b"/>
           <a:stretch xmlns:a="http://schemas.openxmlformats.org/drawingml/2006/main"/>
         </p:blipFill>
         <p:spPr>
@@ -14770,7 +15030,7 @@
           <p:nvPr/>
         </p:nvPicPr>
         <p:blipFill>
-          <a:blip xmlns:r="http://schemas.openxmlformats.org/officeDocument/2006/relationships" xmlns:a="http://schemas.openxmlformats.org/drawingml/2006/main" r:embed="R3301b66dbf364e13"/>
+          <a:blip xmlns:r="http://schemas.openxmlformats.org/officeDocument/2006/relationships" xmlns:a="http://schemas.openxmlformats.org/drawingml/2006/main" r:embed="Rb392a6e8c1524c42"/>
           <a:stretch xmlns:a="http://schemas.openxmlformats.org/drawingml/2006/main"/>
         </p:blipFill>
         <p:spPr>
@@ -15806,7 +16066,7 @@
           <p:nvPr/>
         </p:nvPicPr>
         <p:blipFill>
-          <a:blip xmlns:r="http://schemas.openxmlformats.org/officeDocument/2006/relationships" xmlns:a="http://schemas.openxmlformats.org/drawingml/2006/main" r:embed="R0865613b385e4c6c"/>
+          <a:blip xmlns:r="http://schemas.openxmlformats.org/officeDocument/2006/relationships" xmlns:a="http://schemas.openxmlformats.org/drawingml/2006/main" r:embed="R2d54222defbf40e5"/>
           <a:stretch xmlns:a="http://schemas.openxmlformats.org/drawingml/2006/main"/>
         </p:blipFill>
         <p:spPr>
@@ -16901,7 +17161,7 @@
           <p:nvPr/>
         </p:nvPicPr>
         <p:blipFill>
-          <a:blip xmlns:r="http://schemas.openxmlformats.org/officeDocument/2006/relationships" xmlns:a="http://schemas.openxmlformats.org/drawingml/2006/main" r:embed="R4a03f87a7c6a4320"/>
+          <a:blip xmlns:r="http://schemas.openxmlformats.org/officeDocument/2006/relationships" xmlns:a="http://schemas.openxmlformats.org/drawingml/2006/main" r:embed="R7c79cec7ec3240e0"/>
           <a:stretch xmlns:a="http://schemas.openxmlformats.org/drawingml/2006/main"/>
         </p:blipFill>
         <p:spPr>
@@ -17927,7 +18187,7 @@
           <p:nvPr/>
         </p:nvPicPr>
         <p:blipFill>
-          <a:blip xmlns:r="http://schemas.openxmlformats.org/officeDocument/2006/relationships" xmlns:a="http://schemas.openxmlformats.org/drawingml/2006/main" r:embed="Rca211510f54b432c"/>
+          <a:blip xmlns:r="http://schemas.openxmlformats.org/officeDocument/2006/relationships" xmlns:a="http://schemas.openxmlformats.org/drawingml/2006/main" r:embed="Ra8cbc61490474444"/>
           <a:stretch xmlns:a="http://schemas.openxmlformats.org/drawingml/2006/main"/>
         </p:blipFill>
         <p:spPr>
@@ -18756,7 +19016,7 @@
           <p:nvPr/>
         </p:nvPicPr>
         <p:blipFill>
-          <a:blip xmlns:r="http://schemas.openxmlformats.org/officeDocument/2006/relationships" xmlns:a="http://schemas.openxmlformats.org/drawingml/2006/main" r:embed="Rb9df01cd71344ed4"/>
+          <a:blip xmlns:r="http://schemas.openxmlformats.org/officeDocument/2006/relationships" xmlns:a="http://schemas.openxmlformats.org/drawingml/2006/main" r:embed="R92869e6c57f441d8"/>
           <a:stretch xmlns:a="http://schemas.openxmlformats.org/drawingml/2006/main"/>
         </p:blipFill>
         <p:spPr>
@@ -20058,7 +20318,7 @@
           <p:nvPr/>
         </p:nvPicPr>
         <p:blipFill>
-          <a:blip xmlns:r="http://schemas.openxmlformats.org/officeDocument/2006/relationships" xmlns:a="http://schemas.openxmlformats.org/drawingml/2006/main" r:embed="R8b492c3ef4914888"/>
+          <a:blip xmlns:r="http://schemas.openxmlformats.org/officeDocument/2006/relationships" xmlns:a="http://schemas.openxmlformats.org/drawingml/2006/main" r:embed="R2ace865782b2423a"/>
           <a:stretch xmlns:a="http://schemas.openxmlformats.org/drawingml/2006/main"/>
         </p:blipFill>
         <p:spPr>
@@ -20938,14 +21198,14 @@
       </p:sp>
       <p:pic>
         <p:nvPicPr>
-          <p:cNvPr id="27" name=""/>
+          <p:cNvPr id="28" name=""/>
           <p:cNvPicPr>
             <a:picLocks xmlns:a="http://schemas.openxmlformats.org/drawingml/2006/main" noChangeAspect="1"/>
           </p:cNvPicPr>
           <p:nvPr/>
         </p:nvPicPr>
         <p:blipFill>
-          <a:blip xmlns:r="http://schemas.openxmlformats.org/officeDocument/2006/relationships" xmlns:a="http://schemas.openxmlformats.org/drawingml/2006/main" r:embed="R618ca08bcae44709"/>
+          <a:blip xmlns:r="http://schemas.openxmlformats.org/officeDocument/2006/relationships" xmlns:a="http://schemas.openxmlformats.org/drawingml/2006/main" r:embed="R6e9d8378f95f4eb1"/>
           <a:stretch xmlns:a="http://schemas.openxmlformats.org/drawingml/2006/main"/>
         </p:blipFill>
         <p:spPr>
@@ -21921,7 +22181,7 @@
           <p:nvPr/>
         </p:nvPicPr>
         <p:blipFill>
-          <a:blip xmlns:r="http://schemas.openxmlformats.org/officeDocument/2006/relationships" xmlns:a="http://schemas.openxmlformats.org/drawingml/2006/main" r:embed="R2693de53bd764c04"/>
+          <a:blip xmlns:r="http://schemas.openxmlformats.org/officeDocument/2006/relationships" xmlns:a="http://schemas.openxmlformats.org/drawingml/2006/main" r:embed="R32fe3fbd667046fb"/>
           <a:stretch xmlns:a="http://schemas.openxmlformats.org/drawingml/2006/main"/>
         </p:blipFill>
         <p:spPr>
@@ -23223,7 +23483,7 @@
           <p:nvPr/>
         </p:nvPicPr>
         <p:blipFill>
-          <a:blip xmlns:r="http://schemas.openxmlformats.org/officeDocument/2006/relationships" xmlns:a="http://schemas.openxmlformats.org/drawingml/2006/main" r:embed="R1547e6306d6143a6"/>
+          <a:blip xmlns:r="http://schemas.openxmlformats.org/officeDocument/2006/relationships" xmlns:a="http://schemas.openxmlformats.org/drawingml/2006/main" r:embed="Rbf2792b98cdc4b64"/>
           <a:stretch xmlns:a="http://schemas.openxmlformats.org/drawingml/2006/main"/>
         </p:blipFill>
         <p:spPr>
@@ -24318,7 +24578,7 @@
           <p:nvPr/>
         </p:nvPicPr>
         <p:blipFill>
-          <a:blip xmlns:r="http://schemas.openxmlformats.org/officeDocument/2006/relationships" xmlns:a="http://schemas.openxmlformats.org/drawingml/2006/main" r:embed="R82c4a0703cee482b"/>
+          <a:blip xmlns:r="http://schemas.openxmlformats.org/officeDocument/2006/relationships" xmlns:a="http://schemas.openxmlformats.org/drawingml/2006/main" r:embed="R9076c19fa5d449b3"/>
           <a:stretch xmlns:a="http://schemas.openxmlformats.org/drawingml/2006/main"/>
         </p:blipFill>
         <p:spPr>

--- a/lessons/lesson-11/slides.pptx
+++ b/lessons/lesson-11/slides.pptx
@@ -417,7 +417,12 @@
           </a:p>
           <a:p xmlns:a="http://schemas.openxmlformats.org/drawingml/2006/main">
             <a:r>
-              <a:t>讲义位置：本课讲义；见逐页母稿映射表</a:t>
+              <a:t>讲述与校准：</a:t>
+            </a:r>
+          </a:p>
+          <a:p xmlns:a="http://schemas.openxmlformats.org/drawingml/2006/main">
+            <a:r>
+              <a:t>开场放下第 10 课的受限执行记录。第 10 课已让 Agent 在受限权限下跑通一次，但"能跑通"和"可重复运行、可被评价、可被回退"之间还有距离。本课把受限执行扩展为实验自动化循环，并拆解 AutoResearch / AI Scientist 两类系统作为分析对象。</a:t>
             </a:r>
           </a:p>
           <a:p xmlns:a="http://schemas.openxmlformats.org/drawingml/2006/main">
@@ -427,12 +432,12 @@
           </a:p>
           <a:p xmlns:a="http://schemas.openxmlformats.org/drawingml/2006/main">
             <a:r>
-              <a:t>屏显核对：</a:t>
-            </a:r>
-          </a:p>
-          <a:p xmlns:a="http://schemas.openxmlformats.org/drawingml/2006/main">
-            <a:r>
-              <a:t>第11讲 实验自动化与 AutoResearch 循环</a:t>
+              <a:t>学生动作：</a:t>
+            </a:r>
+          </a:p>
+          <a:p xmlns:a="http://schemas.openxmlformats.org/drawingml/2006/main">
+            <a:r>
+              <a:t>不展开课程行政信息，直接进入下一页回扣。</a:t>
             </a:r>
           </a:p>
           <a:p xmlns:a="http://schemas.openxmlformats.org/drawingml/2006/main">
@@ -442,12 +447,7 @@
           </a:p>
           <a:p xmlns:a="http://schemas.openxmlformats.org/drawingml/2006/main">
             <a:r>
-              <a:t>教师讲述：</a:t>
-            </a:r>
-          </a:p>
-          <a:p xmlns:a="http://schemas.openxmlformats.org/drawingml/2006/main">
-            <a:r>
-              <a:t>开场放下第 10 课的受限执行记录。第 10 课已让 Agent 在受限权限下跑通一次，但"能跑通"和"可重复运行、可被评价、可被回退"之间还有距离。本课把受限执行扩展为实验自动化循环，并拆解 AutoResearch / AI Scientist 两类系统作为分析对象。</a:t>
+              <a:t>课堂安排：按本稿下方 90 分钟教学路由安排；此页不另占独立时段。</a:t>
             </a:r>
           </a:p>
           <a:p xmlns:a="http://schemas.openxmlformats.org/drawingml/2006/main">
@@ -457,12 +457,12 @@
           </a:p>
           <a:p xmlns:a="http://schemas.openxmlformats.org/drawingml/2006/main">
             <a:r>
-              <a:t>学生动作：</a:t>
-            </a:r>
-          </a:p>
-          <a:p xmlns:a="http://schemas.openxmlformats.org/drawingml/2006/main">
-            <a:r>
-              <a:t>不展开课程行政信息，直接进入下一页回扣。</a:t>
+              <a:t>[Sources]</a:t>
+            </a:r>
+          </a:p>
+          <a:p xmlns:a="http://schemas.openxmlformats.org/drawingml/2006/main">
+            <a:r>
+              <a:t>课程信息以 [syllabus.md](../../course/syllabus.md) 为准；备课规划 [第 11 课](../备课规划.md) 权威六段。</a:t>
             </a:r>
           </a:p>
           <a:p xmlns:a="http://schemas.openxmlformats.org/drawingml/2006/main">
@@ -472,57 +472,7 @@
           </a:p>
           <a:p xmlns:a="http://schemas.openxmlformats.org/drawingml/2006/main">
             <a:r>
-              <a:t>来源与边界：</a:t>
-            </a:r>
-          </a:p>
-          <a:p xmlns:a="http://schemas.openxmlformats.org/drawingml/2006/main">
-            <a:r>
-              <a:t>课程信息以 [syllabus.md](../../course/syllabus.md) 为准；备课规划 [第 11 课](../备课规划.md) 权威六段。</a:t>
-            </a:r>
-          </a:p>
-          <a:p xmlns:a="http://schemas.openxmlformats.org/drawingml/2006/main">
-            <a:r>
-              <a:t/>
-            </a:r>
-          </a:p>
-          <a:p xmlns:a="http://schemas.openxmlformats.org/drawingml/2006/main">
-            <a:r>
-              <a:t>---</a:t>
-            </a:r>
-          </a:p>
-          <a:p xmlns:a="http://schemas.openxmlformats.org/drawingml/2006/main">
-            <a:r>
-              <a:t/>
-            </a:r>
-          </a:p>
-          <a:p xmlns:a="http://schemas.openxmlformats.org/drawingml/2006/main">
-            <a:r>
-              <a:t>[Sources]</a:t>
-            </a:r>
-          </a:p>
-          <a:p xmlns:a="http://schemas.openxmlformats.org/drawingml/2006/main">
-            <a:r>
-              <a:t/>
-            </a:r>
-          </a:p>
-          <a:p xmlns:a="http://schemas.openxmlformats.org/drawingml/2006/main">
-            <a:r>
-              <a:t>- 本课 handout.md 与 slides.md</a:t>
-            </a:r>
-          </a:p>
-          <a:p xmlns:a="http://schemas.openxmlformats.org/drawingml/2006/main">
-            <a:r>
-              <a:t/>
-            </a:r>
-          </a:p>
-          <a:p xmlns:a="http://schemas.openxmlformats.org/drawingml/2006/main">
-            <a:r>
-              <a:t>- ../../course/reading-card-case.md</a:t>
-            </a:r>
-          </a:p>
-          <a:p xmlns:a="http://schemas.openxmlformats.org/drawingml/2006/main">
-            <a:r>
-              <a:t/>
+              <a:t>本课 handout.md、judgment-task.md；../../course/judgment-path.md。</a:t>
             </a:r>
           </a:p>
           <a:p xmlns:a="http://schemas.openxmlformats.org/drawingml/2006/main">
@@ -607,7 +557,12 @@
           </a:p>
           <a:p xmlns:a="http://schemas.openxmlformats.org/drawingml/2006/main">
             <a:r>
-              <a:t>讲义位置：handout.md §六、贯穿案例：把可重复动作改写为受限循环</a:t>
+              <a:t>讲述与校准：</a:t>
+            </a:r>
+          </a:p>
+          <a:p xmlns:a="http://schemas.openxmlformats.org/drawingml/2006/main">
+            <a:r>
+              <a:t>打开实际小包，先指出任务清单。若任务不生成新候选、不据评价更新下一轮，就不能把它叫自主研究优化。随后用已有系统分析说明优化循环额外需要什么。</a:t>
             </a:r>
           </a:p>
           <a:p xmlns:a="http://schemas.openxmlformats.org/drawingml/2006/main">
@@ -617,12 +572,12 @@
           </a:p>
           <a:p xmlns:a="http://schemas.openxmlformats.org/drawingml/2006/main">
             <a:r>
-              <a:t>屏显核对：</a:t>
-            </a:r>
-          </a:p>
-          <a:p xmlns:a="http://schemas.openxmlformats.org/drawingml/2006/main">
-            <a:r>
-              <a:t>3 份源文本 × 2 个条件 = 6 个任务</a:t>
+              <a:t>学生动作：</a:t>
+            </a:r>
+          </a:p>
+          <a:p xmlns:a="http://schemas.openxmlformats.org/drawingml/2006/main">
+            <a:r>
+              <a:t>学生指出这个流程缺少哪一步才会成为优化循环。</a:t>
             </a:r>
           </a:p>
           <a:p xmlns:a="http://schemas.openxmlformats.org/drawingml/2006/main">
@@ -632,17 +587,7 @@
           </a:p>
           <a:p xmlns:a="http://schemas.openxmlformats.org/drawingml/2006/main">
             <a:r>
-              <a:t>执行：逐项回放固定输出。</a:t>
-            </a:r>
-          </a:p>
-          <a:p xmlns:a="http://schemas.openxmlformats.org/drawingml/2006/main">
-            <a:r>
-              <a:t>恢复：只重试未完成项，保留旧失败。</a:t>
-            </a:r>
-          </a:p>
-          <a:p xmlns:a="http://schemas.openxmlformats.org/drawingml/2006/main">
-            <a:r>
-              <a:t>评价：核验人工标注并汇总遗漏率。</a:t>
+              <a:t>课堂安排：按本稿下方 90 分钟教学路由安排；此页不另占独立时段。</a:t>
             </a:r>
           </a:p>
           <a:p xmlns:a="http://schemas.openxmlformats.org/drawingml/2006/main">
@@ -652,7 +597,12 @@
           </a:p>
           <a:p xmlns:a="http://schemas.openxmlformats.org/drawingml/2006/main">
             <a:r>
-              <a:t>固定队列展示执行控制，不自动构成优化循环。</a:t>
+              <a:t>[Sources]</a:t>
+            </a:r>
+          </a:p>
+          <a:p xmlns:a="http://schemas.openxmlformats.org/drawingml/2006/main">
+            <a:r>
+              <a:t>./handout.md；课堂示例与构造数据见 ../../course/reading-card-case.md</a:t>
             </a:r>
           </a:p>
           <a:p xmlns:a="http://schemas.openxmlformats.org/drawingml/2006/main">
@@ -662,77 +612,7 @@
           </a:p>
           <a:p xmlns:a="http://schemas.openxmlformats.org/drawingml/2006/main">
             <a:r>
-              <a:t>教师讲述：</a:t>
-            </a:r>
-          </a:p>
-          <a:p xmlns:a="http://schemas.openxmlformats.org/drawingml/2006/main">
-            <a:r>
-              <a:t>打开实际小包，先指出任务清单。若任务不生成新候选、不据评价更新下一轮，就不能把它叫自主研究优化。随后用已有系统分析说明优化循环额外需要什么。</a:t>
-            </a:r>
-          </a:p>
-          <a:p xmlns:a="http://schemas.openxmlformats.org/drawingml/2006/main">
-            <a:r>
-              <a:t/>
-            </a:r>
-          </a:p>
-          <a:p xmlns:a="http://schemas.openxmlformats.org/drawingml/2006/main">
-            <a:r>
-              <a:t>学生动作：</a:t>
-            </a:r>
-          </a:p>
-          <a:p xmlns:a="http://schemas.openxmlformats.org/drawingml/2006/main">
-            <a:r>
-              <a:t>学生指出这个流程缺少哪一步才会成为优化循环。</a:t>
-            </a:r>
-          </a:p>
-          <a:p xmlns:a="http://schemas.openxmlformats.org/drawingml/2006/main">
-            <a:r>
-              <a:t/>
-            </a:r>
-          </a:p>
-          <a:p xmlns:a="http://schemas.openxmlformats.org/drawingml/2006/main">
-            <a:r>
-              <a:t>来源与边界：</a:t>
-            </a:r>
-          </a:p>
-          <a:p xmlns:a="http://schemas.openxmlformats.org/drawingml/2006/main">
-            <a:r>
-              <a:t>./handout.md；课堂示例与构造数据见 ../../course/reading-card-case.md</a:t>
-            </a:r>
-          </a:p>
-          <a:p xmlns:a="http://schemas.openxmlformats.org/drawingml/2006/main">
-            <a:r>
-              <a:t/>
-            </a:r>
-          </a:p>
-          <a:p xmlns:a="http://schemas.openxmlformats.org/drawingml/2006/main">
-            <a:r>
-              <a:t>[Sources]</a:t>
-            </a:r>
-          </a:p>
-          <a:p xmlns:a="http://schemas.openxmlformats.org/drawingml/2006/main">
-            <a:r>
-              <a:t/>
-            </a:r>
-          </a:p>
-          <a:p xmlns:a="http://schemas.openxmlformats.org/drawingml/2006/main">
-            <a:r>
-              <a:t>- 本课 handout.md 与 slides.md</a:t>
-            </a:r>
-          </a:p>
-          <a:p xmlns:a="http://schemas.openxmlformats.org/drawingml/2006/main">
-            <a:r>
-              <a:t/>
-            </a:r>
-          </a:p>
-          <a:p xmlns:a="http://schemas.openxmlformats.org/drawingml/2006/main">
-            <a:r>
-              <a:t>- ../../course/reading-card-case.md</a:t>
-            </a:r>
-          </a:p>
-          <a:p xmlns:a="http://schemas.openxmlformats.org/drawingml/2006/main">
-            <a:r>
-              <a:t/>
+              <a:t>本课 handout.md、judgment-task.md；../../course/judgment-path.md。</a:t>
             </a:r>
           </a:p>
           <a:p xmlns:a="http://schemas.openxmlformats.org/drawingml/2006/main">
@@ -817,7 +697,12 @@
           </a:p>
           <a:p xmlns:a="http://schemas.openxmlformats.org/drawingml/2006/main">
             <a:r>
-              <a:t>讲义位置：handout.md §六、贯穿案例：把可重复动作改写为受限循环</a:t>
+              <a:t>讲述与校准：</a:t>
+            </a:r>
+          </a:p>
+          <a:p xmlns:a="http://schemas.openxmlformats.org/drawingml/2006/main">
+            <a:r>
+              <a:t>执行带fault-once的回放，预期在T02-card停住；去掉该选项再运行。让学生对照实际ID，课堂不写死虚构run-003。成功任务不能再生成重复记录。</a:t>
             </a:r>
           </a:p>
           <a:p xmlns:a="http://schemas.openxmlformats.org/drawingml/2006/main">
@@ -827,42 +712,12 @@
           </a:p>
           <a:p xmlns:a="http://schemas.openxmlformats.org/drawingml/2006/main">
             <a:r>
-              <a:t>屏显核对：</a:t>
-            </a:r>
-          </a:p>
-          <a:p xmlns:a="http://schemas.openxmlformats.org/drawingml/2006/main">
-            <a:r>
-              <a:t>| 实际记录 | 回答的问题 |</a:t>
-            </a:r>
-          </a:p>
-          <a:p xmlns:a="http://schemas.openxmlformats.org/drawingml/2006/main">
-            <a:r>
-              <a:t>| --- | --- |</a:t>
-            </a:r>
-          </a:p>
-          <a:p xmlns:a="http://schemas.openxmlformats.org/drawingml/2006/main">
-            <a:r>
-              <a:t>| job_id | 哪个固定任务，如 T02-card |</a:t>
-            </a:r>
-          </a:p>
-          <a:p xmlns:a="http://schemas.openxmlformats.org/drawingml/2006/main">
-            <a:r>
-              <a:t>| run_id | 哪次执行，如 run-003、run-004 |</a:t>
-            </a:r>
-          </a:p>
-          <a:p xmlns:a="http://schemas.openxmlformats.org/drawingml/2006/main">
-            <a:r>
-              <a:t>| event | controlled_failure 或 replayed |</a:t>
-            </a:r>
-          </a:p>
-          <a:p xmlns:a="http://schemas.openxmlformats.org/drawingml/2006/main">
-            <a:r>
-              <a:t>| state.json | 已完成任务与累计尝试次数 |</a:t>
-            </a:r>
-          </a:p>
-          <a:p xmlns:a="http://schemas.openxmlformats.org/drawingml/2006/main">
-            <a:r>
-              <a:t>| input-identity.json | 输入与配置是否仍为同一版本 |</a:t>
+              <a:t>学生动作：</a:t>
+            </a:r>
+          </a:p>
+          <a:p xmlns:a="http://schemas.openxmlformats.org/drawingml/2006/main">
+            <a:r>
+              <a:t>找到同一任务的失败和成功事件，说明它们为什么不是两个独立样本。</a:t>
             </a:r>
           </a:p>
           <a:p xmlns:a="http://schemas.openxmlformats.org/drawingml/2006/main">
@@ -872,7 +727,7 @@
           </a:p>
           <a:p xmlns:a="http://schemas.openxmlformats.org/drawingml/2006/main">
             <a:r>
-              <a:t>同一任务恢复时产生新 run_id，旧失败保留。</a:t>
+              <a:t>课堂安排：按本稿下方 90 分钟教学路由安排；此页不另占独立时段。</a:t>
             </a:r>
           </a:p>
           <a:p xmlns:a="http://schemas.openxmlformats.org/drawingml/2006/main">
@@ -882,12 +737,12 @@
           </a:p>
           <a:p xmlns:a="http://schemas.openxmlformats.org/drawingml/2006/main">
             <a:r>
-              <a:t>教师讲述：</a:t>
-            </a:r>
-          </a:p>
-          <a:p xmlns:a="http://schemas.openxmlformats.org/drawingml/2006/main">
-            <a:r>
-              <a:t>执行带fault-once的回放，预期在T02-card停住；去掉该选项再运行。让学生对照实际ID，课堂不写死虚构run-003。成功任务不能再生成重复记录。</a:t>
+              <a:t>[Sources]</a:t>
+            </a:r>
+          </a:p>
+          <a:p xmlns:a="http://schemas.openxmlformats.org/drawingml/2006/main">
+            <a:r>
+              <a:t>./handout.md；课堂示例与构造数据见 ../../course/reading-card-case.md</a:t>
             </a:r>
           </a:p>
           <a:p xmlns:a="http://schemas.openxmlformats.org/drawingml/2006/main">
@@ -897,62 +752,7 @@
           </a:p>
           <a:p xmlns:a="http://schemas.openxmlformats.org/drawingml/2006/main">
             <a:r>
-              <a:t>学生动作：</a:t>
-            </a:r>
-          </a:p>
-          <a:p xmlns:a="http://schemas.openxmlformats.org/drawingml/2006/main">
-            <a:r>
-              <a:t>找到同一任务的失败和成功事件，说明它们为什么不是两个独立样本。</a:t>
-            </a:r>
-          </a:p>
-          <a:p xmlns:a="http://schemas.openxmlformats.org/drawingml/2006/main">
-            <a:r>
-              <a:t/>
-            </a:r>
-          </a:p>
-          <a:p xmlns:a="http://schemas.openxmlformats.org/drawingml/2006/main">
-            <a:r>
-              <a:t>来源与边界：</a:t>
-            </a:r>
-          </a:p>
-          <a:p xmlns:a="http://schemas.openxmlformats.org/drawingml/2006/main">
-            <a:r>
-              <a:t>./handout.md；课堂示例与构造数据见 ../../course/reading-card-case.md</a:t>
-            </a:r>
-          </a:p>
-          <a:p xmlns:a="http://schemas.openxmlformats.org/drawingml/2006/main">
-            <a:r>
-              <a:t/>
-            </a:r>
-          </a:p>
-          <a:p xmlns:a="http://schemas.openxmlformats.org/drawingml/2006/main">
-            <a:r>
-              <a:t>[Sources]</a:t>
-            </a:r>
-          </a:p>
-          <a:p xmlns:a="http://schemas.openxmlformats.org/drawingml/2006/main">
-            <a:r>
-              <a:t/>
-            </a:r>
-          </a:p>
-          <a:p xmlns:a="http://schemas.openxmlformats.org/drawingml/2006/main">
-            <a:r>
-              <a:t>- 本课 handout.md 与 slides.md</a:t>
-            </a:r>
-          </a:p>
-          <a:p xmlns:a="http://schemas.openxmlformats.org/drawingml/2006/main">
-            <a:r>
-              <a:t/>
-            </a:r>
-          </a:p>
-          <a:p xmlns:a="http://schemas.openxmlformats.org/drawingml/2006/main">
-            <a:r>
-              <a:t>- ../../course/reading-card-case.md</a:t>
-            </a:r>
-          </a:p>
-          <a:p xmlns:a="http://schemas.openxmlformats.org/drawingml/2006/main">
-            <a:r>
-              <a:t/>
+              <a:t>本课 handout.md、judgment-task.md；../../course/judgment-path.md。</a:t>
             </a:r>
           </a:p>
           <a:p xmlns:a="http://schemas.openxmlformats.org/drawingml/2006/main">
@@ -1037,7 +837,12 @@
           </a:p>
           <a:p xmlns:a="http://schemas.openxmlformats.org/drawingml/2006/main">
             <a:r>
-              <a:t>讲义位置：本课讲义；见逐页母稿映射表</a:t>
+              <a:t>讲述与校准：</a:t>
+            </a:r>
+          </a:p>
+          <a:p xmlns:a="http://schemas.openxmlformats.org/drawingml/2006/main">
+            <a:r>
+              <a:t>本轮系统边界短分析与 P14/P15 共 4 分钟，完整系统比较为按需参考；RSI 补充案例占原 10 分钟短分析中的 6 分钟，不新增活动。</a:t>
             </a:r>
           </a:p>
           <a:p xmlns:a="http://schemas.openxmlformats.org/drawingml/2006/main">
@@ -1047,12 +852,7 @@
           </a:p>
           <a:p xmlns:a="http://schemas.openxmlformats.org/drawingml/2006/main">
             <a:r>
-              <a:t>屏显核对：</a:t>
-            </a:r>
-          </a:p>
-          <a:p xmlns:a="http://schemas.openxmlformats.org/drawingml/2006/main">
-            <a:r>
-              <a:t>AutoResearch 与 AI Scientist 的系统主链</a:t>
+              <a:t>用第 1 课 §四·2 的 Agent Workflow 八部分框架拆解这两类系统。它们是分析对象，不是结论外推的依据——要看清的是每个维度上"哪些已由系统处理、哪些仍需人工判断"，而不是断言"AI 已能自主科研"。AI Scientist 报告的是特定 ML 研究设置下的系统表现：三篇送审稿中一篇评分超过工作坊平均接收阈值，但按预设协议撤回；工作坊接收率为 70%，研究团队内部判断三篇均未达到 ICLR 主会标准。这不等于顶会正式接收，也不适用于所有学科。</a:t>
             </a:r>
           </a:p>
           <a:p xmlns:a="http://schemas.openxmlformats.org/drawingml/2006/main">
@@ -1062,7 +862,12 @@
           </a:p>
           <a:p xmlns:a="http://schemas.openxmlformats.org/drawingml/2006/main">
             <a:r>
-              <a:t>- AutoResearch｜最小循环</a:t>
+              <a:t>学生动作：</a:t>
+            </a:r>
+          </a:p>
+          <a:p xmlns:a="http://schemas.openxmlformats.org/drawingml/2006/main">
+            <a:r>
+              <a:t>无。</a:t>
             </a:r>
           </a:p>
           <a:p xmlns:a="http://schemas.openxmlformats.org/drawingml/2006/main">
@@ -1072,7 +877,7 @@
           </a:p>
           <a:p xmlns:a="http://schemas.openxmlformats.org/drawingml/2006/main">
             <a:r>
-              <a:t>- AI Scientist｜端到端链</a:t>
+              <a:t>课堂安排：按本稿下方 90 分钟教学路由安排；此页不另占独立时段。</a:t>
             </a:r>
           </a:p>
           <a:p xmlns:a="http://schemas.openxmlformats.org/drawingml/2006/main">
@@ -1082,7 +887,12 @@
           </a:p>
           <a:p xmlns:a="http://schemas.openxmlformats.org/drawingml/2006/main">
             <a:r>
-              <a:t>- 程序改动</a:t>
+              <a:t>[Sources]</a:t>
+            </a:r>
+          </a:p>
+          <a:p xmlns:a="http://schemas.openxmlformats.org/drawingml/2006/main">
+            <a:r>
+              <a:t>Lu, C. et al. "Towards end-to-end automation of AI research." *Nature* (2026). DOI: [10.1038/s41586-026-10265-5](https://www.nature.com/articles/s41586-026-10265-5)。**不外推为通用自主科研能力**。Karpathy. [*AutoResearch* commit `228791f`](https://github.com/karpathy/autoresearch/tree/228791fb499afffb54b46200aca536f79142f117)。Huang et al. MLAgentBench, ICML 2024（评价方法参考）。</a:t>
             </a:r>
           </a:p>
           <a:p xmlns:a="http://schemas.openxmlformats.org/drawingml/2006/main">
@@ -1092,177 +902,7 @@
           </a:p>
           <a:p xmlns:a="http://schemas.openxmlformats.org/drawingml/2006/main">
             <a:r>
-              <a:t>- 单指标评价</a:t>
-            </a:r>
-          </a:p>
-          <a:p xmlns:a="http://schemas.openxmlformats.org/drawingml/2006/main">
-            <a:r>
-              <a:t/>
-            </a:r>
-          </a:p>
-          <a:p xmlns:a="http://schemas.openxmlformats.org/drawingml/2006/main">
-            <a:r>
-              <a:t>- Keep / Discard</a:t>
-            </a:r>
-          </a:p>
-          <a:p xmlns:a="http://schemas.openxmlformats.org/drawingml/2006/main">
-            <a:r>
-              <a:t/>
-            </a:r>
-          </a:p>
-          <a:p xmlns:a="http://schemas.openxmlformats.org/drawingml/2006/main">
-            <a:r>
-              <a:t>- 回到稳定版本</a:t>
-            </a:r>
-          </a:p>
-          <a:p xmlns:a="http://schemas.openxmlformats.org/drawingml/2006/main">
-            <a:r>
-              <a:t/>
-            </a:r>
-          </a:p>
-          <a:p xmlns:a="http://schemas.openxmlformats.org/drawingml/2006/main">
-            <a:r>
-              <a:t>- 想法生成</a:t>
-            </a:r>
-          </a:p>
-          <a:p xmlns:a="http://schemas.openxmlformats.org/drawingml/2006/main">
-            <a:r>
-              <a:t/>
-            </a:r>
-          </a:p>
-          <a:p xmlns:a="http://schemas.openxmlformats.org/drawingml/2006/main">
-            <a:r>
-              <a:t>- 实现与实验</a:t>
-            </a:r>
-          </a:p>
-          <a:p xmlns:a="http://schemas.openxmlformats.org/drawingml/2006/main">
-            <a:r>
-              <a:t/>
-            </a:r>
-          </a:p>
-          <a:p xmlns:a="http://schemas.openxmlformats.org/drawingml/2006/main">
-            <a:r>
-              <a:t>- 结果分析</a:t>
-            </a:r>
-          </a:p>
-          <a:p xmlns:a="http://schemas.openxmlformats.org/drawingml/2006/main">
-            <a:r>
-              <a:t/>
-            </a:r>
-          </a:p>
-          <a:p xmlns:a="http://schemas.openxmlformats.org/drawingml/2006/main">
-            <a:r>
-              <a:t>- 论文与评审</a:t>
-            </a:r>
-          </a:p>
-          <a:p xmlns:a="http://schemas.openxmlformats.org/drawingml/2006/main">
-            <a:r>
-              <a:t/>
-            </a:r>
-          </a:p>
-          <a:p xmlns:a="http://schemas.openxmlformats.org/drawingml/2006/main">
-            <a:r>
-              <a:t>教师讲述：</a:t>
-            </a:r>
-          </a:p>
-          <a:p xmlns:a="http://schemas.openxmlformats.org/drawingml/2006/main">
-            <a:r>
-              <a:t>用第 1 课 §四·2 的 Agent Workflow 八部分框架拆解这两类系统。它们是分析对象，不是结论外推的依据——要看清的是每个维度上"哪些已由系统处理、哪些仍需人工判断"，而不是断言"AI 已能自主科研"。AI Scientist 报告的是特定 ML 研究设置下的系统表现：三篇送审稿中一篇评分超过工作坊平均接收阈值，但按预设协议撤回；工作坊接收率为 70%，研究团队内部判断三篇均未达到 ICLR 主会标准。这不等于顶会正式接收，也不适用于所有学科。</a:t>
-            </a:r>
-          </a:p>
-          <a:p xmlns:a="http://schemas.openxmlformats.org/drawingml/2006/main">
-            <a:r>
-              <a:t/>
-            </a:r>
-          </a:p>
-          <a:p xmlns:a="http://schemas.openxmlformats.org/drawingml/2006/main">
-            <a:r>
-              <a:t>学生动作：</a:t>
-            </a:r>
-          </a:p>
-          <a:p xmlns:a="http://schemas.openxmlformats.org/drawingml/2006/main">
-            <a:r>
-              <a:t>无。</a:t>
-            </a:r>
-          </a:p>
-          <a:p xmlns:a="http://schemas.openxmlformats.org/drawingml/2006/main">
-            <a:r>
-              <a:t/>
-            </a:r>
-          </a:p>
-          <a:p xmlns:a="http://schemas.openxmlformats.org/drawingml/2006/main">
-            <a:r>
-              <a:t>来源与边界：</a:t>
-            </a:r>
-          </a:p>
-          <a:p xmlns:a="http://schemas.openxmlformats.org/drawingml/2006/main">
-            <a:r>
-              <a:t>Lu, C. et al. "Towards end-to-end automation of AI research." *Nature* (2026). DOI: [10.1038/s41586-026-10265-5](https://www.nature.com/articles/s41586-026-10265-5)。**不外推为通用自主科研能力**。Karpathy. [*AutoResearch* commit `228791f`](https://github.com/karpathy/autoresearch/tree/228791fb499afffb54b46200aca536f79142f117)。Huang et al. MLAgentBench, ICML 2024（评价方法参考）。</a:t>
-            </a:r>
-          </a:p>
-          <a:p xmlns:a="http://schemas.openxmlformats.org/drawingml/2006/main">
-            <a:r>
-              <a:t/>
-            </a:r>
-          </a:p>
-          <a:p xmlns:a="http://schemas.openxmlformats.org/drawingml/2006/main">
-            <a:r>
-              <a:t>---</a:t>
-            </a:r>
-          </a:p>
-          <a:p xmlns:a="http://schemas.openxmlformats.org/drawingml/2006/main">
-            <a:r>
-              <a:t/>
-            </a:r>
-          </a:p>
-          <a:p xmlns:a="http://schemas.openxmlformats.org/drawingml/2006/main">
-            <a:r>
-              <a:t>[Sources]</a:t>
-            </a:r>
-          </a:p>
-          <a:p xmlns:a="http://schemas.openxmlformats.org/drawingml/2006/main">
-            <a:r>
-              <a:t/>
-            </a:r>
-          </a:p>
-          <a:p xmlns:a="http://schemas.openxmlformats.org/drawingml/2006/main">
-            <a:r>
-              <a:t>- https://www.nature.com/articles/s41586-026-10265-5</a:t>
-            </a:r>
-          </a:p>
-          <a:p xmlns:a="http://schemas.openxmlformats.org/drawingml/2006/main">
-            <a:r>
-              <a:t/>
-            </a:r>
-          </a:p>
-          <a:p xmlns:a="http://schemas.openxmlformats.org/drawingml/2006/main">
-            <a:r>
-              <a:t>- https://github.com/karpathy/autoresearch/tree/228791fb499afffb54b46200aca536f79142f117</a:t>
-            </a:r>
-          </a:p>
-          <a:p xmlns:a="http://schemas.openxmlformats.org/drawingml/2006/main">
-            <a:r>
-              <a:t/>
-            </a:r>
-          </a:p>
-          <a:p xmlns:a="http://schemas.openxmlformats.org/drawingml/2006/main">
-            <a:r>
-              <a:t>- 本课 handout.md 与 slides.md</a:t>
-            </a:r>
-          </a:p>
-          <a:p xmlns:a="http://schemas.openxmlformats.org/drawingml/2006/main">
-            <a:r>
-              <a:t/>
-            </a:r>
-          </a:p>
-          <a:p xmlns:a="http://schemas.openxmlformats.org/drawingml/2006/main">
-            <a:r>
-              <a:t>- ../../course/reading-card-case.md</a:t>
-            </a:r>
-          </a:p>
-          <a:p xmlns:a="http://schemas.openxmlformats.org/drawingml/2006/main">
-            <a:r>
-              <a:t/>
+              <a:t>本课 handout.md、judgment-task.md；../../course/judgment-path.md。</a:t>
             </a:r>
           </a:p>
           <a:p xmlns:a="http://schemas.openxmlformats.org/drawingml/2006/main">
@@ -1337,7 +977,7 @@
           <a:lstStyle xmlns:a="http://schemas.openxmlformats.org/drawingml/2006/main"/>
           <a:p xmlns:a="http://schemas.openxmlformats.org/drawingml/2006/main">
             <a:r>
-              <a:t>页面：P13 八维比较的主轴是人工判断</a:t>
+              <a:t>页面：P13 固定协议下，选优分数仍会乐观</a:t>
             </a:r>
           </a:p>
           <a:p xmlns:a="http://schemas.openxmlformats.org/drawingml/2006/main">
@@ -1347,7 +987,12 @@
           </a:p>
           <a:p xmlns:a="http://schemas.openxmlformats.org/drawingml/2006/main">
             <a:r>
-              <a:t>讲义位置：本课讲义；见逐页母稿映射表</a:t>
+              <a:t>讲述与校准：</a:t>
+            </a:r>
+          </a:p>
+          <a:p xmlns:a="http://schemas.openxmlformats.org/drawingml/2006/main">
+            <a:r>
+              <a:t>本页是合成环境上的实际 CPU 实验，500 次独立重复、2000 次 bootstrap，非 Dream-RSI 或工业任务实测。6 分钟完成协议完整性与选优反例诊断：指标、预算和完整日志都没有改变，但历史成绩参与选择。最终评价在冻结后揭示。等质量真值全部 0.65，因此真实选择损失为零；不能把乐观偏差直接解释为选错。完整八维系统比较留作原有按需参考。</a:t>
             </a:r>
           </a:p>
           <a:p xmlns:a="http://schemas.openxmlformats.org/drawingml/2006/main">
@@ -1357,12 +1002,7 @@
           </a:p>
           <a:p xmlns:a="http://schemas.openxmlformats.org/drawingml/2006/main">
             <a:r>
-              <a:t>屏显核对：</a:t>
-            </a:r>
-          </a:p>
-          <a:p xmlns:a="http://schemas.openxmlformats.org/drawingml/2006/main">
-            <a:r>
-              <a:t>八维比较的主轴是人工判断</a:t>
+              <a:t>判断历史反馈与最终证据的用途；其他系统维度保留在讲义参考，不在本页展开。</a:t>
             </a:r>
           </a:p>
           <a:p xmlns:a="http://schemas.openxmlformats.org/drawingml/2006/main">
@@ -1372,7 +1012,12 @@
           </a:p>
           <a:p xmlns:a="http://schemas.openxmlformats.org/drawingml/2006/main">
             <a:r>
-              <a:t>- 任务契约</a:t>
+              <a:t>学生动作：</a:t>
+            </a:r>
+          </a:p>
+          <a:p xmlns:a="http://schemas.openxmlformats.org/drawingml/2006/main">
+            <a:r>
+              <a:t>指出哪份证据参与选择；解释为何真实损失为零而历史分数仍乐观。</a:t>
             </a:r>
           </a:p>
           <a:p xmlns:a="http://schemas.openxmlformats.org/drawingml/2006/main">
@@ -1382,7 +1027,7 @@
           </a:p>
           <a:p xmlns:a="http://schemas.openxmlformats.org/drawingml/2006/main">
             <a:r>
-              <a:t>- 目标能否预先固定？</a:t>
+              <a:t>课堂安排：按本稿下方 90 分钟教学路由安排；此页不另占独立时段。</a:t>
             </a:r>
           </a:p>
           <a:p xmlns:a="http://schemas.openxmlformats.org/drawingml/2006/main">
@@ -1392,7 +1037,12 @@
           </a:p>
           <a:p xmlns:a="http://schemas.openxmlformats.org/drawingml/2006/main">
             <a:r>
-              <a:t>- Context / 状态</a:t>
+              <a:t>[Sources]</a:t>
+            </a:r>
+          </a:p>
+          <a:p xmlns:a="http://schemas.openxmlformats.org/drawingml/2006/main">
+            <a:r>
+              <a:t>[RSI 案例](assets/rsi-selection-case/README.md#validation-gate)、recorded/summary.json；合成环境实际运行，不是工业实验。</a:t>
             </a:r>
           </a:p>
           <a:p xmlns:a="http://schemas.openxmlformats.org/drawingml/2006/main">
@@ -1402,177 +1052,7 @@
           </a:p>
           <a:p xmlns:a="http://schemas.openxmlformats.org/drawingml/2006/main">
             <a:r>
-              <a:t>- 输入与中间工件能否追溯？</a:t>
-            </a:r>
-          </a:p>
-          <a:p xmlns:a="http://schemas.openxmlformats.org/drawingml/2006/main">
-            <a:r>
-              <a:t/>
-            </a:r>
-          </a:p>
-          <a:p xmlns:a="http://schemas.openxmlformats.org/drawingml/2006/main">
-            <a:r>
-              <a:t>- 工具与权限</a:t>
-            </a:r>
-          </a:p>
-          <a:p xmlns:a="http://schemas.openxmlformats.org/drawingml/2006/main">
-            <a:r>
-              <a:t/>
-            </a:r>
-          </a:p>
-          <a:p xmlns:a="http://schemas.openxmlformats.org/drawingml/2006/main">
-            <a:r>
-              <a:t>- 哪些外部动作必须确认？</a:t>
-            </a:r>
-          </a:p>
-          <a:p xmlns:a="http://schemas.openxmlformats.org/drawingml/2006/main">
-            <a:r>
-              <a:t/>
-            </a:r>
-          </a:p>
-          <a:p xmlns:a="http://schemas.openxmlformats.org/drawingml/2006/main">
-            <a:r>
-              <a:t>- 执行与追踪</a:t>
-            </a:r>
-          </a:p>
-          <a:p xmlns:a="http://schemas.openxmlformats.org/drawingml/2006/main">
-            <a:r>
-              <a:t/>
-            </a:r>
-          </a:p>
-          <a:p xmlns:a="http://schemas.openxmlformats.org/drawingml/2006/main">
-            <a:r>
-              <a:t>- 失败是否完整保留？</a:t>
-            </a:r>
-          </a:p>
-          <a:p xmlns:a="http://schemas.openxmlformats.org/drawingml/2006/main">
-            <a:r>
-              <a:t/>
-            </a:r>
-          </a:p>
-          <a:p xmlns:a="http://schemas.openxmlformats.org/drawingml/2006/main">
-            <a:r>
-              <a:t>- Evals</a:t>
-            </a:r>
-          </a:p>
-          <a:p xmlns:a="http://schemas.openxmlformats.org/drawingml/2006/main">
-            <a:r>
-              <a:t/>
-            </a:r>
-          </a:p>
-          <a:p xmlns:a="http://schemas.openxmlformats.org/drawingml/2006/main">
-            <a:r>
-              <a:t>- 评价器是否独立？</a:t>
-            </a:r>
-          </a:p>
-          <a:p xmlns:a="http://schemas.openxmlformats.org/drawingml/2006/main">
-            <a:r>
-              <a:t/>
-            </a:r>
-          </a:p>
-          <a:p xmlns:a="http://schemas.openxmlformats.org/drawingml/2006/main">
-            <a:r>
-              <a:t>- 人工判断</a:t>
-            </a:r>
-          </a:p>
-          <a:p xmlns:a="http://schemas.openxmlformats.org/drawingml/2006/main">
-            <a:r>
-              <a:t/>
-            </a:r>
-          </a:p>
-          <a:p xmlns:a="http://schemas.openxmlformats.org/drawingml/2006/main">
-            <a:r>
-              <a:t>- 方法、证据与结论由谁决定？</a:t>
-            </a:r>
-          </a:p>
-          <a:p xmlns:a="http://schemas.openxmlformats.org/drawingml/2006/main">
-            <a:r>
-              <a:t/>
-            </a:r>
-          </a:p>
-          <a:p xmlns:a="http://schemas.openxmlformats.org/drawingml/2006/main">
-            <a:r>
-              <a:t>教师讲述：</a:t>
-            </a:r>
-          </a:p>
-          <a:p xmlns:a="http://schemas.openxmlformats.org/drawingml/2006/main">
-            <a:r>
-              <a:t>逐维度拆解 AI Scientist。Evals 维度上，自动评审能发现部分问题，但不替代真实同行共识——模型评审不等于同行评审。失败恢复维度上，系统对失败有处理逻辑，但选择性保留的风险存在。每个维度都回答"哪些已由系统处理、哪些仍需人工判断"。</a:t>
-            </a:r>
-          </a:p>
-          <a:p xmlns:a="http://schemas.openxmlformats.org/drawingml/2006/main">
-            <a:r>
-              <a:t/>
-            </a:r>
-          </a:p>
-          <a:p xmlns:a="http://schemas.openxmlformats.org/drawingml/2006/main">
-            <a:r>
-              <a:t>学生动作：</a:t>
-            </a:r>
-          </a:p>
-          <a:p xmlns:a="http://schemas.openxmlformats.org/drawingml/2006/main">
-            <a:r>
-              <a:t>让学生指出八维中哪个维度"仍需人工判断"最难判断。</a:t>
-            </a:r>
-          </a:p>
-          <a:p xmlns:a="http://schemas.openxmlformats.org/drawingml/2006/main">
-            <a:r>
-              <a:t/>
-            </a:r>
-          </a:p>
-          <a:p xmlns:a="http://schemas.openxmlformats.org/drawingml/2006/main">
-            <a:r>
-              <a:t>来源与边界：</a:t>
-            </a:r>
-          </a:p>
-          <a:p xmlns:a="http://schemas.openxmlformats.org/drawingml/2006/main">
-            <a:r>
-              <a:t>handout §四·2；第 1 课 §四·2 Agent Workflow 八部分框架。Lu et al. 2026（Nature，DOI 同 P12）。</a:t>
-            </a:r>
-          </a:p>
-          <a:p xmlns:a="http://schemas.openxmlformats.org/drawingml/2006/main">
-            <a:r>
-              <a:t/>
-            </a:r>
-          </a:p>
-          <a:p xmlns:a="http://schemas.openxmlformats.org/drawingml/2006/main">
-            <a:r>
-              <a:t>---</a:t>
-            </a:r>
-          </a:p>
-          <a:p xmlns:a="http://schemas.openxmlformats.org/drawingml/2006/main">
-            <a:r>
-              <a:t/>
-            </a:r>
-          </a:p>
-          <a:p xmlns:a="http://schemas.openxmlformats.org/drawingml/2006/main">
-            <a:r>
-              <a:t>[Sources]</a:t>
-            </a:r>
-          </a:p>
-          <a:p xmlns:a="http://schemas.openxmlformats.org/drawingml/2006/main">
-            <a:r>
-              <a:t/>
-            </a:r>
-          </a:p>
-          <a:p xmlns:a="http://schemas.openxmlformats.org/drawingml/2006/main">
-            <a:r>
-              <a:t>- 本课 handout.md 与 slides.md</a:t>
-            </a:r>
-          </a:p>
-          <a:p xmlns:a="http://schemas.openxmlformats.org/drawingml/2006/main">
-            <a:r>
-              <a:t/>
-            </a:r>
-          </a:p>
-          <a:p xmlns:a="http://schemas.openxmlformats.org/drawingml/2006/main">
-            <a:r>
-              <a:t>- ../../course/reading-card-case.md</a:t>
-            </a:r>
-          </a:p>
-          <a:p xmlns:a="http://schemas.openxmlformats.org/drawingml/2006/main">
-            <a:r>
-              <a:t/>
+              <a:t>本课 handout.md、judgment-task.md；../../course/judgment-path.md。</a:t>
             </a:r>
           </a:p>
           <a:p xmlns:a="http://schemas.openxmlformats.org/drawingml/2006/main">
@@ -1657,7 +1137,12 @@
           </a:p>
           <a:p xmlns:a="http://schemas.openxmlformats.org/drawingml/2006/main">
             <a:r>
-              <a:t>讲义位置：本课讲义；见逐页母稿映射表</a:t>
+              <a:t>讲述与校准：</a:t>
+            </a:r>
+          </a:p>
+          <a:p xmlns:a="http://schemas.openxmlformats.org/drawingml/2006/main">
+            <a:r>
+              <a:t>与 P12/P15 合计 4 分钟；保留受限循环与人工判断边界。RSI 受控结果不外推为系统级自我改进或工业迁移。</a:t>
             </a:r>
           </a:p>
           <a:p xmlns:a="http://schemas.openxmlformats.org/drawingml/2006/main">
@@ -1667,12 +1152,7 @@
           </a:p>
           <a:p xmlns:a="http://schemas.openxmlformats.org/drawingml/2006/main">
             <a:r>
-              <a:t>屏显核对：</a:t>
-            </a:r>
-          </a:p>
-          <a:p xmlns:a="http://schemas.openxmlformats.org/drawingml/2006/main">
-            <a:r>
-              <a:t>系统边界决定哪些表述可以成立</a:t>
+              <a:t>两个边界判断贯穿本课。AI Scientist 只在特定 ML 设置下验证，不外推为通用自主科研。自动评审只作循环内部 Evals，不替代同行共识。不外推清单中的表述都超出了来源证据的适用范围。在作业或 slides 中出现类似表述，都应标记为越界并改写为带边界的形式。</a:t>
             </a:r>
           </a:p>
           <a:p xmlns:a="http://schemas.openxmlformats.org/drawingml/2006/main">
@@ -1682,7 +1162,12 @@
           </a:p>
           <a:p xmlns:a="http://schemas.openxmlformats.org/drawingml/2006/main">
             <a:r>
-              <a:t>- 证据不支持的外推</a:t>
+              <a:t>学生动作：</a:t>
+            </a:r>
+          </a:p>
+          <a:p xmlns:a="http://schemas.openxmlformats.org/drawingml/2006/main">
+            <a:r>
+              <a:t>让学生检查自己第 10 课的 AI 使用记录中是否出现过清单中的表述。</a:t>
             </a:r>
           </a:p>
           <a:p xmlns:a="http://schemas.openxmlformats.org/drawingml/2006/main">
@@ -1692,7 +1177,7 @@
           </a:p>
           <a:p xmlns:a="http://schemas.openxmlformats.org/drawingml/2006/main">
             <a:r>
-              <a:t>- 当前可成立</a:t>
+              <a:t>课堂安排：按本稿下方 90 分钟教学路由安排；此页不另占独立时段。</a:t>
             </a:r>
           </a:p>
           <a:p xmlns:a="http://schemas.openxmlformats.org/drawingml/2006/main">
@@ -1702,7 +1187,12 @@
           </a:p>
           <a:p xmlns:a="http://schemas.openxmlformats.org/drawingml/2006/main">
             <a:r>
-              <a:t>- “自动完成完整科研”</a:t>
+              <a:t>[Sources]</a:t>
+            </a:r>
+          </a:p>
+          <a:p xmlns:a="http://schemas.openxmlformats.org/drawingml/2006/main">
+            <a:r>
+              <a:t>handout §四·3-4；[AGENTS.md](../../AGENTS.md) 证据标准（关键结论至少绑定一项可核验直接证据）。</a:t>
             </a:r>
           </a:p>
           <a:p xmlns:a="http://schemas.openxmlformats.org/drawingml/2006/main">
@@ -1712,157 +1202,7 @@
           </a:p>
           <a:p xmlns:a="http://schemas.openxmlformats.org/drawingml/2006/main">
             <a:r>
-              <a:t>- “自动评审替代同行”</a:t>
-            </a:r>
-          </a:p>
-          <a:p xmlns:a="http://schemas.openxmlformats.org/drawingml/2006/main">
-            <a:r>
-              <a:t/>
-            </a:r>
-          </a:p>
-          <a:p xmlns:a="http://schemas.openxmlformats.org/drawingml/2006/main">
-            <a:r>
-              <a:t>- “端到端适用于所有学科”</a:t>
-            </a:r>
-          </a:p>
-          <a:p xmlns:a="http://schemas.openxmlformats.org/drawingml/2006/main">
-            <a:r>
-              <a:t/>
-            </a:r>
-          </a:p>
-          <a:p xmlns:a="http://schemas.openxmlformats.org/drawingml/2006/main">
-            <a:r>
-              <a:t>- “失败可以自动删除”</a:t>
-            </a:r>
-          </a:p>
-          <a:p xmlns:a="http://schemas.openxmlformats.org/drawingml/2006/main">
-            <a:r>
-              <a:t/>
-            </a:r>
-          </a:p>
-          <a:p xmlns:a="http://schemas.openxmlformats.org/drawingml/2006/main">
-            <a:r>
-              <a:t>- 可分析系统组件与边界</a:t>
-            </a:r>
-          </a:p>
-          <a:p xmlns:a="http://schemas.openxmlformats.org/drawingml/2006/main">
-            <a:r>
-              <a:t/>
-            </a:r>
-          </a:p>
-          <a:p xmlns:a="http://schemas.openxmlformats.org/drawingml/2006/main">
-            <a:r>
-              <a:t>- 可复用受限循环骨架</a:t>
-            </a:r>
-          </a:p>
-          <a:p xmlns:a="http://schemas.openxmlformats.org/drawingml/2006/main">
-            <a:r>
-              <a:t/>
-            </a:r>
-          </a:p>
-          <a:p xmlns:a="http://schemas.openxmlformats.org/drawingml/2006/main">
-            <a:r>
-              <a:t>- 需人工核验方法与结论</a:t>
-            </a:r>
-          </a:p>
-          <a:p xmlns:a="http://schemas.openxmlformats.org/drawingml/2006/main">
-            <a:r>
-              <a:t/>
-            </a:r>
-          </a:p>
-          <a:p xmlns:a="http://schemas.openxmlformats.org/drawingml/2006/main">
-            <a:r>
-              <a:t>- 失败进入可审计记录</a:t>
-            </a:r>
-          </a:p>
-          <a:p xmlns:a="http://schemas.openxmlformats.org/drawingml/2006/main">
-            <a:r>
-              <a:t/>
-            </a:r>
-          </a:p>
-          <a:p xmlns:a="http://schemas.openxmlformats.org/drawingml/2006/main">
-            <a:r>
-              <a:t>教师讲述：</a:t>
-            </a:r>
-          </a:p>
-          <a:p xmlns:a="http://schemas.openxmlformats.org/drawingml/2006/main">
-            <a:r>
-              <a:t>两个边界判断贯穿本课。AI Scientist 只在特定 ML 设置下验证，不外推为通用自主科研。自动评审只作循环内部 Evals，不替代同行共识。不外推清单中的表述都超出了来源证据的适用范围。在作业或 slides 中出现类似表述，都应标记为越界并改写为带边界的形式。</a:t>
-            </a:r>
-          </a:p>
-          <a:p xmlns:a="http://schemas.openxmlformats.org/drawingml/2006/main">
-            <a:r>
-              <a:t/>
-            </a:r>
-          </a:p>
-          <a:p xmlns:a="http://schemas.openxmlformats.org/drawingml/2006/main">
-            <a:r>
-              <a:t>学生动作：</a:t>
-            </a:r>
-          </a:p>
-          <a:p xmlns:a="http://schemas.openxmlformats.org/drawingml/2006/main">
-            <a:r>
-              <a:t>让学生检查自己第 10 课的 AI 使用记录中是否出现过清单中的表述。</a:t>
-            </a:r>
-          </a:p>
-          <a:p xmlns:a="http://schemas.openxmlformats.org/drawingml/2006/main">
-            <a:r>
-              <a:t/>
-            </a:r>
-          </a:p>
-          <a:p xmlns:a="http://schemas.openxmlformats.org/drawingml/2006/main">
-            <a:r>
-              <a:t>来源与边界：</a:t>
-            </a:r>
-          </a:p>
-          <a:p xmlns:a="http://schemas.openxmlformats.org/drawingml/2006/main">
-            <a:r>
-              <a:t>handout §四·3-4；[AGENTS.md](../../AGENTS.md) 证据标准（关键结论至少绑定一项可核验直接证据）。</a:t>
-            </a:r>
-          </a:p>
-          <a:p xmlns:a="http://schemas.openxmlformats.org/drawingml/2006/main">
-            <a:r>
-              <a:t/>
-            </a:r>
-          </a:p>
-          <a:p xmlns:a="http://schemas.openxmlformats.org/drawingml/2006/main">
-            <a:r>
-              <a:t>---</a:t>
-            </a:r>
-          </a:p>
-          <a:p xmlns:a="http://schemas.openxmlformats.org/drawingml/2006/main">
-            <a:r>
-              <a:t/>
-            </a:r>
-          </a:p>
-          <a:p xmlns:a="http://schemas.openxmlformats.org/drawingml/2006/main">
-            <a:r>
-              <a:t>[Sources]</a:t>
-            </a:r>
-          </a:p>
-          <a:p xmlns:a="http://schemas.openxmlformats.org/drawingml/2006/main">
-            <a:r>
-              <a:t/>
-            </a:r>
-          </a:p>
-          <a:p xmlns:a="http://schemas.openxmlformats.org/drawingml/2006/main">
-            <a:r>
-              <a:t>- 本课 handout.md 与 slides.md</a:t>
-            </a:r>
-          </a:p>
-          <a:p xmlns:a="http://schemas.openxmlformats.org/drawingml/2006/main">
-            <a:r>
-              <a:t/>
-            </a:r>
-          </a:p>
-          <a:p xmlns:a="http://schemas.openxmlformats.org/drawingml/2006/main">
-            <a:r>
-              <a:t>- ../../course/reading-card-case.md</a:t>
-            </a:r>
-          </a:p>
-          <a:p xmlns:a="http://schemas.openxmlformats.org/drawingml/2006/main">
-            <a:r>
-              <a:t/>
+              <a:t>本课 handout.md、judgment-task.md；../../course/judgment-path.md。</a:t>
             </a:r>
           </a:p>
           <a:p xmlns:a="http://schemas.openxmlformats.org/drawingml/2006/main">
@@ -1947,7 +1287,12 @@
           </a:p>
           <a:p xmlns:a="http://schemas.openxmlformats.org/drawingml/2006/main">
             <a:r>
-              <a:t>讲义位置：本课讲义；见逐页母稿映射表</a:t>
+              <a:t>讲述与校准：</a:t>
+            </a:r>
+          </a:p>
+          <a:p xmlns:a="http://schemas.openxmlformats.org/drawingml/2006/main">
+            <a:r>
+              <a:t>P12/P14/P15 系统边界共 4 分钟；生成器不可自评与反复选优后的独立最终评价是相关但不同的检查。</a:t>
             </a:r>
           </a:p>
           <a:p xmlns:a="http://schemas.openxmlformats.org/drawingml/2006/main">
@@ -1957,12 +1302,7 @@
           </a:p>
           <a:p xmlns:a="http://schemas.openxmlformats.org/drawingml/2006/main">
             <a:r>
-              <a:t>屏显核对：</a:t>
-            </a:r>
-          </a:p>
-          <a:p xmlns:a="http://schemas.openxmlformats.org/drawingml/2006/main">
-            <a:r>
-              <a:t>同一工作流映射到两个分析对象</a:t>
+              <a:t>只对比共同约束：指标、预算、停止与失败保留。AutoResearch 的候选方法优化不属于本课冻结生成队列；AI Scientist 的端到端链还包括想法、论文与评审，不能据此推断课程执行器拥有相同能力。主题价值、标注分歧与结论外推由研究者判断。</a:t>
             </a:r>
           </a:p>
           <a:p xmlns:a="http://schemas.openxmlformats.org/drawingml/2006/main">
@@ -1972,7 +1312,12 @@
           </a:p>
           <a:p xmlns:a="http://schemas.openxmlformats.org/drawingml/2006/main">
             <a:r>
-              <a:t>- 任务契约</a:t>
+              <a:t>学生动作：</a:t>
+            </a:r>
+          </a:p>
+          <a:p xmlns:a="http://schemas.openxmlformats.org/drawingml/2006/main">
+            <a:r>
+              <a:t>无。</a:t>
             </a:r>
           </a:p>
           <a:p xmlns:a="http://schemas.openxmlformats.org/drawingml/2006/main">
@@ -1982,7 +1327,7 @@
           </a:p>
           <a:p xmlns:a="http://schemas.openxmlformats.org/drawingml/2006/main">
             <a:r>
-              <a:t>- 先写清边界</a:t>
+              <a:t>课堂安排：按本稿下方 90 分钟教学路由安排；此页不另占独立时段。</a:t>
             </a:r>
           </a:p>
           <a:p xmlns:a="http://schemas.openxmlformats.org/drawingml/2006/main">
@@ -1992,7 +1337,12 @@
           </a:p>
           <a:p xmlns:a="http://schemas.openxmlformats.org/drawingml/2006/main">
             <a:r>
-              <a:t>- 执行循环</a:t>
+              <a:t>[Sources]</a:t>
+            </a:r>
+          </a:p>
+          <a:p xmlns:a="http://schemas.openxmlformats.org/drawingml/2006/main">
+            <a:r>
+              <a:t>handout §六·5；Karpathy AutoResearch（commit `228791f`）；Lu et al. 2026（Nature）。</a:t>
             </a:r>
           </a:p>
           <a:p xmlns:a="http://schemas.openxmlformats.org/drawingml/2006/main">
@@ -2002,147 +1352,7 @@
           </a:p>
           <a:p xmlns:a="http://schemas.openxmlformats.org/drawingml/2006/main">
             <a:r>
-              <a:t>- 冻结队列 / 优化</a:t>
-            </a:r>
-          </a:p>
-          <a:p xmlns:a="http://schemas.openxmlformats.org/drawingml/2006/main">
-            <a:r>
-              <a:t/>
-            </a:r>
-          </a:p>
-          <a:p xmlns:a="http://schemas.openxmlformats.org/drawingml/2006/main">
-            <a:r>
-              <a:t>- 独立 Evals</a:t>
-            </a:r>
-          </a:p>
-          <a:p xmlns:a="http://schemas.openxmlformats.org/drawingml/2006/main">
-            <a:r>
-              <a:t/>
-            </a:r>
-          </a:p>
-          <a:p xmlns:a="http://schemas.openxmlformats.org/drawingml/2006/main">
-            <a:r>
-              <a:t>- 生成器不可自评</a:t>
-            </a:r>
-          </a:p>
-          <a:p xmlns:a="http://schemas.openxmlformats.org/drawingml/2006/main">
-            <a:r>
-              <a:t/>
-            </a:r>
-          </a:p>
-          <a:p xmlns:a="http://schemas.openxmlformats.org/drawingml/2006/main">
-            <a:r>
-              <a:t>- 人工判断</a:t>
-            </a:r>
-          </a:p>
-          <a:p xmlns:a="http://schemas.openxmlformats.org/drawingml/2006/main">
-            <a:r>
-              <a:t/>
-            </a:r>
-          </a:p>
-          <a:p xmlns:a="http://schemas.openxmlformats.org/drawingml/2006/main">
-            <a:r>
-              <a:t>- 核验方法与结论</a:t>
-            </a:r>
-          </a:p>
-          <a:p xmlns:a="http://schemas.openxmlformats.org/drawingml/2006/main">
-            <a:r>
-              <a:t/>
-            </a:r>
-          </a:p>
-          <a:p xmlns:a="http://schemas.openxmlformats.org/drawingml/2006/main">
-            <a:r>
-              <a:t>- 共同约束：指标、预算、停止、失败保留；冻结队列不做方法优化。</a:t>
-            </a:r>
-          </a:p>
-          <a:p xmlns:a="http://schemas.openxmlformats.org/drawingml/2006/main">
-            <a:r>
-              <a:t/>
-            </a:r>
-          </a:p>
-          <a:p xmlns:a="http://schemas.openxmlformats.org/drawingml/2006/main">
-            <a:r>
-              <a:t>教师讲述：</a:t>
-            </a:r>
-          </a:p>
-          <a:p xmlns:a="http://schemas.openxmlformats.org/drawingml/2006/main">
-            <a:r>
-              <a:t>只对比共同约束：指标、预算、停止与失败保留。AutoResearch 的候选方法优化不属于本课冻结生成队列；AI Scientist 的端到端链还包括想法、论文与评审，不能据此推断课程执行器拥有相同能力。主题价值、标注分歧与结论外推由研究者判断。</a:t>
-            </a:r>
-          </a:p>
-          <a:p xmlns:a="http://schemas.openxmlformats.org/drawingml/2006/main">
-            <a:r>
-              <a:t/>
-            </a:r>
-          </a:p>
-          <a:p xmlns:a="http://schemas.openxmlformats.org/drawingml/2006/main">
-            <a:r>
-              <a:t>学生动作：</a:t>
-            </a:r>
-          </a:p>
-          <a:p xmlns:a="http://schemas.openxmlformats.org/drawingml/2006/main">
-            <a:r>
-              <a:t>无。</a:t>
-            </a:r>
-          </a:p>
-          <a:p xmlns:a="http://schemas.openxmlformats.org/drawingml/2006/main">
-            <a:r>
-              <a:t/>
-            </a:r>
-          </a:p>
-          <a:p xmlns:a="http://schemas.openxmlformats.org/drawingml/2006/main">
-            <a:r>
-              <a:t>来源与边界：</a:t>
-            </a:r>
-          </a:p>
-          <a:p xmlns:a="http://schemas.openxmlformats.org/drawingml/2006/main">
-            <a:r>
-              <a:t>handout §六·5；Karpathy AutoResearch（commit `228791f`）；Lu et al. 2026（Nature）。</a:t>
-            </a:r>
-          </a:p>
-          <a:p xmlns:a="http://schemas.openxmlformats.org/drawingml/2006/main">
-            <a:r>
-              <a:t/>
-            </a:r>
-          </a:p>
-          <a:p xmlns:a="http://schemas.openxmlformats.org/drawingml/2006/main">
-            <a:r>
-              <a:t>---</a:t>
-            </a:r>
-          </a:p>
-          <a:p xmlns:a="http://schemas.openxmlformats.org/drawingml/2006/main">
-            <a:r>
-              <a:t/>
-            </a:r>
-          </a:p>
-          <a:p xmlns:a="http://schemas.openxmlformats.org/drawingml/2006/main">
-            <a:r>
-              <a:t>[Sources]</a:t>
-            </a:r>
-          </a:p>
-          <a:p xmlns:a="http://schemas.openxmlformats.org/drawingml/2006/main">
-            <a:r>
-              <a:t/>
-            </a:r>
-          </a:p>
-          <a:p xmlns:a="http://schemas.openxmlformats.org/drawingml/2006/main">
-            <a:r>
-              <a:t>- 本课 handout.md 与 slides.md</a:t>
-            </a:r>
-          </a:p>
-          <a:p xmlns:a="http://schemas.openxmlformats.org/drawingml/2006/main">
-            <a:r>
-              <a:t/>
-            </a:r>
-          </a:p>
-          <a:p xmlns:a="http://schemas.openxmlformats.org/drawingml/2006/main">
-            <a:r>
-              <a:t>- ../../course/reading-card-case.md</a:t>
-            </a:r>
-          </a:p>
-          <a:p xmlns:a="http://schemas.openxmlformats.org/drawingml/2006/main">
-            <a:r>
-              <a:t/>
+              <a:t>本课 handout.md、judgment-task.md；../../course/judgment-path.md。</a:t>
             </a:r>
           </a:p>
           <a:p xmlns:a="http://schemas.openxmlformats.org/drawingml/2006/main">
@@ -2217,7 +1427,7 @@
           <a:lstStyle xmlns:a="http://schemas.openxmlformats.org/drawingml/2006/main"/>
           <a:p xmlns:a="http://schemas.openxmlformats.org/drawingml/2006/main">
             <a:r>
-              <a:t>页面：P16 把可重复动作改写为受限循环</a:t>
+              <a:t>页面：P16 本人项目：决定、核验与回写</a:t>
             </a:r>
           </a:p>
           <a:p xmlns:a="http://schemas.openxmlformats.org/drawingml/2006/main">
@@ -2227,7 +1437,12 @@
           </a:p>
           <a:p xmlns:a="http://schemas.openxmlformats.org/drawingml/2006/main">
             <a:r>
-              <a:t>讲义位置：本课讲义；见逐页母稿映射表</a:t>
+              <a:t>讲述与校准：</a:t>
+            </a:r>
+          </a:p>
+          <a:p xmlns:a="http://schemas.openxmlformats.org/drawingml/2006/main">
+            <a:r>
+              <a:t>第一段作决定并查证据；中点处理共性卡点；第二段实际回写并验证。技术失败在配置/输入未变时可恢复，成功任务不重复；更改输入须新版本新目录。无改善/负结果是评价事实，不是运行故障；保留并据协议决定停止或下一轮。固定指标仍可能因反复选优乐观，RSI 作为该问题的补充，不要求再做一个项目。</a:t>
             </a:r>
           </a:p>
           <a:p xmlns:a="http://schemas.openxmlformats.org/drawingml/2006/main">
@@ -2237,12 +1452,12 @@
           </a:p>
           <a:p xmlns:a="http://schemas.openxmlformats.org/drawingml/2006/main">
             <a:r>
-              <a:t>屏显核对：</a:t>
-            </a:r>
-          </a:p>
-          <a:p xmlns:a="http://schemas.openxmlformats.org/drawingml/2006/main">
-            <a:r>
-              <a:t>把可重复动作改写为受限循环</a:t>
+              <a:t>学生动作：</a:t>
+            </a:r>
+          </a:p>
+          <a:p xmlns:a="http://schemas.openxmlformats.org/drawingml/2006/main">
+            <a:r>
+              <a:t>在同一微型项目执行 changed.py，使用 execute --fault-once；检查失败后状态，人工批准后恢复，比对 run_id 与完成任务，解释预算耗尽、完成或停止决定。</a:t>
             </a:r>
           </a:p>
           <a:p xmlns:a="http://schemas.openxmlformats.org/drawingml/2006/main">
@@ -2252,7 +1467,7 @@
           </a:p>
           <a:p xmlns:a="http://schemas.openxmlformats.org/drawingml/2006/main">
             <a:r>
-              <a:t>- 写固定指标与版本</a:t>
+              <a:t>课堂安排：按本稿下方 90 分钟教学路由安排；此页不另占独立时段。</a:t>
             </a:r>
           </a:p>
           <a:p xmlns:a="http://schemas.openxmlformats.org/drawingml/2006/main">
@@ -2262,7 +1477,12 @@
           </a:p>
           <a:p xmlns:a="http://schemas.openxmlformats.org/drawingml/2006/main">
             <a:r>
-              <a:t>- 写预算和停止触发器</a:t>
+              <a:t>[Sources]</a:t>
+            </a:r>
+          </a:p>
+          <a:p xmlns:a="http://schemas.openxmlformats.org/drawingml/2006/main">
+            <a:r>
+              <a:t>handout §六·1-4；§八 练习 1-8。</a:t>
             </a:r>
           </a:p>
           <a:p xmlns:a="http://schemas.openxmlformats.org/drawingml/2006/main">
@@ -2272,127 +1492,7 @@
           </a:p>
           <a:p xmlns:a="http://schemas.openxmlformats.org/drawingml/2006/main">
             <a:r>
-              <a:t>- 区分队列 / 优化，画失败恢复</a:t>
-            </a:r>
-          </a:p>
-          <a:p xmlns:a="http://schemas.openxmlformats.org/drawingml/2006/main">
-            <a:r>
-              <a:t/>
-            </a:r>
-          </a:p>
-          <a:p xmlns:a="http://schemas.openxmlformats.org/drawingml/2006/main">
-            <a:r>
-              <a:t>- 留下正常、无改善、失败 trace</a:t>
-            </a:r>
-          </a:p>
-          <a:p xmlns:a="http://schemas.openxmlformats.org/drawingml/2006/main">
-            <a:r>
-              <a:t/>
-            </a:r>
-          </a:p>
-          <a:p xmlns:a="http://schemas.openxmlformats.org/drawingml/2006/main">
-            <a:r>
-              <a:t>- 课堂最低产出</a:t>
-            </a:r>
-          </a:p>
-          <a:p xmlns:a="http://schemas.openxmlformats.org/drawingml/2006/main">
-            <a:r>
-              <a:t/>
-            </a:r>
-          </a:p>
-          <a:p xmlns:a="http://schemas.openxmlformats.org/drawingml/2006/main">
-            <a:r>
-              <a:t>- 受限循环说明 / 三种 trace / 四约束短分析</a:t>
-            </a:r>
-          </a:p>
-          <a:p xmlns:a="http://schemas.openxmlformats.org/drawingml/2006/main">
-            <a:r>
-              <a:t/>
-            </a:r>
-          </a:p>
-          <a:p xmlns:a="http://schemas.openxmlformats.org/drawingml/2006/main">
-            <a:r>
-              <a:t>教师讲述：</a:t>
-            </a:r>
-          </a:p>
-          <a:p xmlns:a="http://schemas.openxmlformats.org/drawingml/2006/main">
-            <a:r>
-              <a:t>先标明自己的动作是冻结队列还是开发集上的优化循环。第一段只完成四约束与执行/失败恢复骨架，保留人工审核点；冻结队列不能强行画方法 Keep / Discard。三种 trace 和短分析可在后续实践补齐。</a:t>
-            </a:r>
-          </a:p>
-          <a:p xmlns:a="http://schemas.openxmlformats.org/drawingml/2006/main">
-            <a:r>
-              <a:t/>
-            </a:r>
-          </a:p>
-          <a:p xmlns:a="http://schemas.openxmlformats.org/drawingml/2006/main">
-            <a:r>
-              <a:t>学生动作：</a:t>
-            </a:r>
-          </a:p>
-          <a:p xmlns:a="http://schemas.openxmlformats.org/drawingml/2006/main">
-            <a:r>
-              <a:t>巡视。对每位学生至少问一次：你的循环在哪个位置需要人工确认？</a:t>
-            </a:r>
-          </a:p>
-          <a:p xmlns:a="http://schemas.openxmlformats.org/drawingml/2006/main">
-            <a:r>
-              <a:t/>
-            </a:r>
-          </a:p>
-          <a:p xmlns:a="http://schemas.openxmlformats.org/drawingml/2006/main">
-            <a:r>
-              <a:t>来源与边界：</a:t>
-            </a:r>
-          </a:p>
-          <a:p xmlns:a="http://schemas.openxmlformats.org/drawingml/2006/main">
-            <a:r>
-              <a:t>handout §六·1-4；§八 练习 1-8。</a:t>
-            </a:r>
-          </a:p>
-          <a:p xmlns:a="http://schemas.openxmlformats.org/drawingml/2006/main">
-            <a:r>
-              <a:t/>
-            </a:r>
-          </a:p>
-          <a:p xmlns:a="http://schemas.openxmlformats.org/drawingml/2006/main">
-            <a:r>
-              <a:t>---</a:t>
-            </a:r>
-          </a:p>
-          <a:p xmlns:a="http://schemas.openxmlformats.org/drawingml/2006/main">
-            <a:r>
-              <a:t/>
-            </a:r>
-          </a:p>
-          <a:p xmlns:a="http://schemas.openxmlformats.org/drawingml/2006/main">
-            <a:r>
-              <a:t>[Sources]</a:t>
-            </a:r>
-          </a:p>
-          <a:p xmlns:a="http://schemas.openxmlformats.org/drawingml/2006/main">
-            <a:r>
-              <a:t/>
-            </a:r>
-          </a:p>
-          <a:p xmlns:a="http://schemas.openxmlformats.org/drawingml/2006/main">
-            <a:r>
-              <a:t>- 本课 handout.md 与 slides.md</a:t>
-            </a:r>
-          </a:p>
-          <a:p xmlns:a="http://schemas.openxmlformats.org/drawingml/2006/main">
-            <a:r>
-              <a:t/>
-            </a:r>
-          </a:p>
-          <a:p xmlns:a="http://schemas.openxmlformats.org/drawingml/2006/main">
-            <a:r>
-              <a:t>- ../../course/reading-card-case.md</a:t>
-            </a:r>
-          </a:p>
-          <a:p xmlns:a="http://schemas.openxmlformats.org/drawingml/2006/main">
-            <a:r>
-              <a:t/>
+              <a:t>本课 handout.md、judgment-task.md；../../course/judgment-path.md。教学构造仅用于方法判断；本人结果以实际记录为准。</a:t>
             </a:r>
           </a:p>
           <a:p xmlns:a="http://schemas.openxmlformats.org/drawingml/2006/main">
@@ -2477,7 +1577,12 @@
           </a:p>
           <a:p xmlns:a="http://schemas.openxmlformats.org/drawingml/2006/main">
             <a:r>
-              <a:t>讲义位置：handout.md §六、贯穿案例：把可重复动作改写为受限循环</a:t>
+              <a:t>讲述与校准：</a:t>
+            </a:r>
+          </a:p>
+          <a:p xmlns:a="http://schemas.openxmlformats.org/drawingml/2006/main">
+            <a:r>
+              <a:t>打开events与state核对四问，展示一次真实恢复。若输入变化，原目录拒绝续跑，应保留旧目录、开启新版本。不要为了让演示成功而清空日志。</a:t>
             </a:r>
           </a:p>
           <a:p xmlns:a="http://schemas.openxmlformats.org/drawingml/2006/main">
@@ -2487,27 +1592,12 @@
           </a:p>
           <a:p xmlns:a="http://schemas.openxmlformats.org/drawingml/2006/main">
             <a:r>
-              <a:t>屏显核对：</a:t>
-            </a:r>
-          </a:p>
-          <a:p xmlns:a="http://schemas.openxmlformats.org/drawingml/2006/main">
-            <a:r>
-              <a:t>失败事件还在吗？</a:t>
-            </a:r>
-          </a:p>
-          <a:p xmlns:a="http://schemas.openxmlformats.org/drawingml/2006/main">
-            <a:r>
-              <a:t>输入和配置改变了吗？</a:t>
-            </a:r>
-          </a:p>
-          <a:p xmlns:a="http://schemas.openxmlformats.org/drawingml/2006/main">
-            <a:r>
-              <a:t>成功任务被重复执行了吗？</a:t>
-            </a:r>
-          </a:p>
-          <a:p xmlns:a="http://schemas.openxmlformats.org/drawingml/2006/main">
-            <a:r>
-              <a:t>预算与停止条件仍然生效吗？</a:t>
+              <a:t>学生动作：</a:t>
+            </a:r>
+          </a:p>
+          <a:p xmlns:a="http://schemas.openxmlformats.org/drawingml/2006/main">
+            <a:r>
+              <a:t>在失败trace旁记录恢复依据和仍未解决的问题。</a:t>
             </a:r>
           </a:p>
           <a:p xmlns:a="http://schemas.openxmlformats.org/drawingml/2006/main">
@@ -2517,12 +1607,7 @@
           </a:p>
           <a:p xmlns:a="http://schemas.openxmlformats.org/drawingml/2006/main">
             <a:r>
-              <a:t>教师讲述：</a:t>
-            </a:r>
-          </a:p>
-          <a:p xmlns:a="http://schemas.openxmlformats.org/drawingml/2006/main">
-            <a:r>
-              <a:t>打开events与state核对四问，展示一次真实恢复。若输入变化，原目录拒绝续跑，应保留旧目录、开启新版本。不要为了让演示成功而清空日志。</a:t>
+              <a:t>课堂安排：按本稿下方 90 分钟教学路由安排；此页不另占独立时段。</a:t>
             </a:r>
           </a:p>
           <a:p xmlns:a="http://schemas.openxmlformats.org/drawingml/2006/main">
@@ -2532,12 +1617,12 @@
           </a:p>
           <a:p xmlns:a="http://schemas.openxmlformats.org/drawingml/2006/main">
             <a:r>
-              <a:t>学生动作：</a:t>
-            </a:r>
-          </a:p>
-          <a:p xmlns:a="http://schemas.openxmlformats.org/drawingml/2006/main">
-            <a:r>
-              <a:t>在失败trace旁记录恢复依据和仍未解决的问题。</a:t>
+              <a:t>[Sources]</a:t>
+            </a:r>
+          </a:p>
+          <a:p xmlns:a="http://schemas.openxmlformats.org/drawingml/2006/main">
+            <a:r>
+              <a:t>./handout.md；课堂示例与构造数据见 ../../course/reading-card-case.md</a:t>
             </a:r>
           </a:p>
           <a:p xmlns:a="http://schemas.openxmlformats.org/drawingml/2006/main">
@@ -2547,47 +1632,7 @@
           </a:p>
           <a:p xmlns:a="http://schemas.openxmlformats.org/drawingml/2006/main">
             <a:r>
-              <a:t>来源与边界：</a:t>
-            </a:r>
-          </a:p>
-          <a:p xmlns:a="http://schemas.openxmlformats.org/drawingml/2006/main">
-            <a:r>
-              <a:t>./handout.md；课堂示例与构造数据见 ../../course/reading-card-case.md</a:t>
-            </a:r>
-          </a:p>
-          <a:p xmlns:a="http://schemas.openxmlformats.org/drawingml/2006/main">
-            <a:r>
-              <a:t/>
-            </a:r>
-          </a:p>
-          <a:p xmlns:a="http://schemas.openxmlformats.org/drawingml/2006/main">
-            <a:r>
-              <a:t>[Sources]</a:t>
-            </a:r>
-          </a:p>
-          <a:p xmlns:a="http://schemas.openxmlformats.org/drawingml/2006/main">
-            <a:r>
-              <a:t/>
-            </a:r>
-          </a:p>
-          <a:p xmlns:a="http://schemas.openxmlformats.org/drawingml/2006/main">
-            <a:r>
-              <a:t>- 本课 handout.md 与 slides.md</a:t>
-            </a:r>
-          </a:p>
-          <a:p xmlns:a="http://schemas.openxmlformats.org/drawingml/2006/main">
-            <a:r>
-              <a:t/>
-            </a:r>
-          </a:p>
-          <a:p xmlns:a="http://schemas.openxmlformats.org/drawingml/2006/main">
-            <a:r>
-              <a:t>- ../../course/reading-card-case.md</a:t>
-            </a:r>
-          </a:p>
-          <a:p xmlns:a="http://schemas.openxmlformats.org/drawingml/2006/main">
-            <a:r>
-              <a:t/>
+              <a:t>本课 handout.md、judgment-task.md；../../course/judgment-path.md。</a:t>
             </a:r>
           </a:p>
           <a:p xmlns:a="http://schemas.openxmlformats.org/drawingml/2006/main">
@@ -2672,7 +1717,12 @@
           </a:p>
           <a:p xmlns:a="http://schemas.openxmlformats.org/drawingml/2006/main">
             <a:r>
-              <a:t>讲义位置：本课讲义；见逐页母稿映射表</a:t>
+              <a:t>讲述与校准：</a:t>
+            </a:r>
+          </a:p>
+          <a:p xmlns:a="http://schemas.openxmlformats.org/drawingml/2006/main">
+            <a:r>
+              <a:t>同伴互查只提问题，不替作者决定，不形成共同提交。重点检查四约束是否齐全、停止条件是否含禁止类、审核点是否标出、失败记录是否七字段、是否出现越界表述。同伴反馈由作者自己决定是否采纳，沿用第 8 课同伴组规则。</a:t>
             </a:r>
           </a:p>
           <a:p xmlns:a="http://schemas.openxmlformats.org/drawingml/2006/main">
@@ -2682,12 +1732,12 @@
           </a:p>
           <a:p xmlns:a="http://schemas.openxmlformats.org/drawingml/2006/main">
             <a:r>
-              <a:t>屏显核对：</a:t>
-            </a:r>
-          </a:p>
-          <a:p xmlns:a="http://schemas.openxmlformats.org/drawingml/2006/main">
-            <a:r>
-              <a:t>同伴只问四个循环边界</a:t>
+              <a:t>学生动作：</a:t>
+            </a:r>
+          </a:p>
+          <a:p xmlns:a="http://schemas.openxmlformats.org/drawingml/2006/main">
+            <a:r>
+              <a:t>2–3 人互查，作者记录决定与理由；按本页建议时间完成。</a:t>
             </a:r>
           </a:p>
           <a:p xmlns:a="http://schemas.openxmlformats.org/drawingml/2006/main">
@@ -2697,7 +1747,7 @@
           </a:p>
           <a:p xmlns:a="http://schemas.openxmlformats.org/drawingml/2006/main">
             <a:r>
-              <a:t>- 作者的受限循环说明</a:t>
+              <a:t>课堂安排：按本稿下方 90 分钟教学路由安排；此页不另占独立时段。</a:t>
             </a:r>
           </a:p>
           <a:p xmlns:a="http://schemas.openxmlformats.org/drawingml/2006/main">
@@ -2707,7 +1757,12 @@
           </a:p>
           <a:p xmlns:a="http://schemas.openxmlformats.org/drawingml/2006/main">
             <a:r>
-              <a:t>- 固定指标与版本</a:t>
+              <a:t>[Sources]</a:t>
+            </a:r>
+          </a:p>
+          <a:p xmlns:a="http://schemas.openxmlformats.org/drawingml/2006/main">
+            <a:r>
+              <a:t>handout §七 常见错误；第 8 课同伴反馈规则。</a:t>
             </a:r>
           </a:p>
           <a:p xmlns:a="http://schemas.openxmlformats.org/drawingml/2006/main">
@@ -2717,177 +1772,7 @@
           </a:p>
           <a:p xmlns:a="http://schemas.openxmlformats.org/drawingml/2006/main">
             <a:r>
-              <a:t>- 预算 / 停止 / 回退</a:t>
-            </a:r>
-          </a:p>
-          <a:p xmlns:a="http://schemas.openxmlformats.org/drawingml/2006/main">
-            <a:r>
-              <a:t/>
-            </a:r>
-          </a:p>
-          <a:p xmlns:a="http://schemas.openxmlformats.org/drawingml/2006/main">
-            <a:r>
-              <a:t>- 人工审核点</a:t>
-            </a:r>
-          </a:p>
-          <a:p xmlns:a="http://schemas.openxmlformats.org/drawingml/2006/main">
-            <a:r>
-              <a:t/>
-            </a:r>
-          </a:p>
-          <a:p xmlns:a="http://schemas.openxmlformats.org/drawingml/2006/main">
-            <a:r>
-              <a:t>- 正常 / 无改善 / 失败 trace</a:t>
-            </a:r>
-          </a:p>
-          <a:p xmlns:a="http://schemas.openxmlformats.org/drawingml/2006/main">
-            <a:r>
-              <a:t/>
-            </a:r>
-          </a:p>
-          <a:p xmlns:a="http://schemas.openxmlformats.org/drawingml/2006/main">
-            <a:r>
-              <a:t>- 同伴提问</a:t>
-            </a:r>
-          </a:p>
-          <a:p xmlns:a="http://schemas.openxmlformats.org/drawingml/2006/main">
-            <a:r>
-              <a:t/>
-            </a:r>
-          </a:p>
-          <a:p xmlns:a="http://schemas.openxmlformats.org/drawingml/2006/main">
-            <a:r>
-              <a:t>- ? 指标会漂移吗</a:t>
-            </a:r>
-          </a:p>
-          <a:p xmlns:a="http://schemas.openxmlformats.org/drawingml/2006/main">
-            <a:r>
-              <a:t/>
-            </a:r>
-          </a:p>
-          <a:p xmlns:a="http://schemas.openxmlformats.org/drawingml/2006/main">
-            <a:r>
-              <a:t>- ? 何时必须停</a:t>
-            </a:r>
-          </a:p>
-          <a:p xmlns:a="http://schemas.openxmlformats.org/drawingml/2006/main">
-            <a:r>
-              <a:t/>
-            </a:r>
-          </a:p>
-          <a:p xmlns:a="http://schemas.openxmlformats.org/drawingml/2006/main">
-            <a:r>
-              <a:t>- ? 失败仍在账本吗</a:t>
-            </a:r>
-          </a:p>
-          <a:p xmlns:a="http://schemas.openxmlformats.org/drawingml/2006/main">
-            <a:r>
-              <a:t/>
-            </a:r>
-          </a:p>
-          <a:p xmlns:a="http://schemas.openxmlformats.org/drawingml/2006/main">
-            <a:r>
-              <a:t>- ? 队列被当成优化吗</a:t>
-            </a:r>
-          </a:p>
-          <a:p xmlns:a="http://schemas.openxmlformats.org/drawingml/2006/main">
-            <a:r>
-              <a:t/>
-            </a:r>
-          </a:p>
-          <a:p xmlns:a="http://schemas.openxmlformats.org/drawingml/2006/main">
-            <a:r>
-              <a:t>- 作者记录 / 决定与理由</a:t>
-            </a:r>
-          </a:p>
-          <a:p xmlns:a="http://schemas.openxmlformats.org/drawingml/2006/main">
-            <a:r>
-              <a:t/>
-            </a:r>
-          </a:p>
-          <a:p xmlns:a="http://schemas.openxmlformats.org/drawingml/2006/main">
-            <a:r>
-              <a:t>教师讲述：</a:t>
-            </a:r>
-          </a:p>
-          <a:p xmlns:a="http://schemas.openxmlformats.org/drawingml/2006/main">
-            <a:r>
-              <a:t>同伴互查只提问题，不替作者决定，不形成共同提交。重点检查四约束是否齐全、停止条件是否含禁止类、审核点是否标出、失败记录是否七字段、是否出现越界表述。同伴反馈由作者自己决定是否采纳，沿用第 8 课同伴组规则。</a:t>
-            </a:r>
-          </a:p>
-          <a:p xmlns:a="http://schemas.openxmlformats.org/drawingml/2006/main">
-            <a:r>
-              <a:t/>
-            </a:r>
-          </a:p>
-          <a:p xmlns:a="http://schemas.openxmlformats.org/drawingml/2006/main">
-            <a:r>
-              <a:t>学生动作：</a:t>
-            </a:r>
-          </a:p>
-          <a:p xmlns:a="http://schemas.openxmlformats.org/drawingml/2006/main">
-            <a:r>
-              <a:t>2–3 人互查，作者记录决定与理由；按本页建议时间完成。</a:t>
-            </a:r>
-          </a:p>
-          <a:p xmlns:a="http://schemas.openxmlformats.org/drawingml/2006/main">
-            <a:r>
-              <a:t/>
-            </a:r>
-          </a:p>
-          <a:p xmlns:a="http://schemas.openxmlformats.org/drawingml/2006/main">
-            <a:r>
-              <a:t>来源与边界：</a:t>
-            </a:r>
-          </a:p>
-          <a:p xmlns:a="http://schemas.openxmlformats.org/drawingml/2006/main">
-            <a:r>
-              <a:t>handout §七 常见错误；第 8 课同伴反馈规则。</a:t>
-            </a:r>
-          </a:p>
-          <a:p xmlns:a="http://schemas.openxmlformats.org/drawingml/2006/main">
-            <a:r>
-              <a:t/>
-            </a:r>
-          </a:p>
-          <a:p xmlns:a="http://schemas.openxmlformats.org/drawingml/2006/main">
-            <a:r>
-              <a:t>---</a:t>
-            </a:r>
-          </a:p>
-          <a:p xmlns:a="http://schemas.openxmlformats.org/drawingml/2006/main">
-            <a:r>
-              <a:t/>
-            </a:r>
-          </a:p>
-          <a:p xmlns:a="http://schemas.openxmlformats.org/drawingml/2006/main">
-            <a:r>
-              <a:t>[Sources]</a:t>
-            </a:r>
-          </a:p>
-          <a:p xmlns:a="http://schemas.openxmlformats.org/drawingml/2006/main">
-            <a:r>
-              <a:t/>
-            </a:r>
-          </a:p>
-          <a:p xmlns:a="http://schemas.openxmlformats.org/drawingml/2006/main">
-            <a:r>
-              <a:t>- 本课 handout.md 与 slides.md</a:t>
-            </a:r>
-          </a:p>
-          <a:p xmlns:a="http://schemas.openxmlformats.org/drawingml/2006/main">
-            <a:r>
-              <a:t/>
-            </a:r>
-          </a:p>
-          <a:p xmlns:a="http://schemas.openxmlformats.org/drawingml/2006/main">
-            <a:r>
-              <a:t>- ../../course/reading-card-case.md</a:t>
-            </a:r>
-          </a:p>
-          <a:p xmlns:a="http://schemas.openxmlformats.org/drawingml/2006/main">
-            <a:r>
-              <a:t/>
+              <a:t>本课 handout.md、judgment-task.md；../../course/judgment-path.md。</a:t>
             </a:r>
           </a:p>
           <a:p xmlns:a="http://schemas.openxmlformats.org/drawingml/2006/main">
@@ -2972,7 +1857,12 @@
           </a:p>
           <a:p xmlns:a="http://schemas.openxmlformats.org/drawingml/2006/main">
             <a:r>
-              <a:t>讲义位置：本课讲义；见逐页母稿映射表</a:t>
+              <a:t>讲述与校准：</a:t>
+            </a:r>
+          </a:p>
+          <a:p xmlns:a="http://schemas.openxmlformats.org/drawingml/2006/main">
+            <a:r>
+              <a:t>回收循环结构、约束、失败追踪与人工审核的关系。本页不新增任务。</a:t>
             </a:r>
           </a:p>
           <a:p xmlns:a="http://schemas.openxmlformats.org/drawingml/2006/main">
@@ -2982,12 +1872,12 @@
           </a:p>
           <a:p xmlns:a="http://schemas.openxmlformats.org/drawingml/2006/main">
             <a:r>
-              <a:t>屏显核对：</a:t>
-            </a:r>
-          </a:p>
-          <a:p xmlns:a="http://schemas.openxmlformats.org/drawingml/2006/main">
-            <a:r>
-              <a:t>本讲知识点总结</a:t>
+              <a:t>学生动作：</a:t>
+            </a:r>
+          </a:p>
+          <a:p xmlns:a="http://schemas.openxmlformats.org/drawingml/2006/main">
+            <a:r>
+              <a:t>学生用一句话指出自己的循环最可能在哪项约束上失效。</a:t>
             </a:r>
           </a:p>
           <a:p xmlns:a="http://schemas.openxmlformats.org/drawingml/2006/main">
@@ -2997,7 +1887,7 @@
           </a:p>
           <a:p xmlns:a="http://schemas.openxmlformats.org/drawingml/2006/main">
             <a:r>
-              <a:t>- 冻结指标</a:t>
+              <a:t>课堂安排：按本稿下方 90 分钟教学路由安排；此页不另占独立时段。</a:t>
             </a:r>
           </a:p>
           <a:p xmlns:a="http://schemas.openxmlformats.org/drawingml/2006/main">
@@ -3007,7 +1897,12 @@
           </a:p>
           <a:p xmlns:a="http://schemas.openxmlformats.org/drawingml/2006/main">
             <a:r>
-              <a:t>- 本讲输入</a:t>
+              <a:t>[Sources]</a:t>
+            </a:r>
+          </a:p>
+          <a:p xmlns:a="http://schemas.openxmlformats.org/drawingml/2006/main">
+            <a:r>
+              <a:t>[handout.md](./handout.md) §二-§五；[teaching-plan.md](./teaching-plan.md) 第四至六节。</a:t>
             </a:r>
           </a:p>
           <a:p xmlns:a="http://schemas.openxmlformats.org/drawingml/2006/main">
@@ -3017,147 +1912,7 @@
           </a:p>
           <a:p xmlns:a="http://schemas.openxmlformats.org/drawingml/2006/main">
             <a:r>
-              <a:t>- 预算 / 停止</a:t>
-            </a:r>
-          </a:p>
-          <a:p xmlns:a="http://schemas.openxmlformats.org/drawingml/2006/main">
-            <a:r>
-              <a:t/>
-            </a:r>
-          </a:p>
-          <a:p xmlns:a="http://schemas.openxmlformats.org/drawingml/2006/main">
-            <a:r>
-              <a:t>- 本讲执行</a:t>
-            </a:r>
-          </a:p>
-          <a:p xmlns:a="http://schemas.openxmlformats.org/drawingml/2006/main">
-            <a:r>
-              <a:t/>
-            </a:r>
-          </a:p>
-          <a:p xmlns:a="http://schemas.openxmlformats.org/drawingml/2006/main">
-            <a:r>
-              <a:t>- 失败保留 / 回退</a:t>
-            </a:r>
-          </a:p>
-          <a:p xmlns:a="http://schemas.openxmlformats.org/drawingml/2006/main">
-            <a:r>
-              <a:t/>
-            </a:r>
-          </a:p>
-          <a:p xmlns:a="http://schemas.openxmlformats.org/drawingml/2006/main">
-            <a:r>
-              <a:t>- 本讲证据</a:t>
-            </a:r>
-          </a:p>
-          <a:p xmlns:a="http://schemas.openxmlformats.org/drawingml/2006/main">
-            <a:r>
-              <a:t/>
-            </a:r>
-          </a:p>
-          <a:p xmlns:a="http://schemas.openxmlformats.org/drawingml/2006/main">
-            <a:r>
-              <a:t>- 交给 L12 设计</a:t>
-            </a:r>
-          </a:p>
-          <a:p xmlns:a="http://schemas.openxmlformats.org/drawingml/2006/main">
-            <a:r>
-              <a:t/>
-            </a:r>
-          </a:p>
-          <a:p xmlns:a="http://schemas.openxmlformats.org/drawingml/2006/main">
-            <a:r>
-              <a:t>- 下一步</a:t>
-            </a:r>
-          </a:p>
-          <a:p xmlns:a="http://schemas.openxmlformats.org/drawingml/2006/main">
-            <a:r>
-              <a:t/>
-            </a:r>
-          </a:p>
-          <a:p xmlns:a="http://schemas.openxmlformats.org/drawingml/2006/main">
-            <a:r>
-              <a:t>教师讲述：</a:t>
-            </a:r>
-          </a:p>
-          <a:p xmlns:a="http://schemas.openxmlformats.org/drawingml/2006/main">
-            <a:r>
-              <a:t>回收循环结构、约束、失败追踪与人工审核的关系。本页不新增任务。</a:t>
-            </a:r>
-          </a:p>
-          <a:p xmlns:a="http://schemas.openxmlformats.org/drawingml/2006/main">
-            <a:r>
-              <a:t/>
-            </a:r>
-          </a:p>
-          <a:p xmlns:a="http://schemas.openxmlformats.org/drawingml/2006/main">
-            <a:r>
-              <a:t>学生动作：</a:t>
-            </a:r>
-          </a:p>
-          <a:p xmlns:a="http://schemas.openxmlformats.org/drawingml/2006/main">
-            <a:r>
-              <a:t>学生用一句话指出自己的循环最可能在哪项约束上失效。</a:t>
-            </a:r>
-          </a:p>
-          <a:p xmlns:a="http://schemas.openxmlformats.org/drawingml/2006/main">
-            <a:r>
-              <a:t/>
-            </a:r>
-          </a:p>
-          <a:p xmlns:a="http://schemas.openxmlformats.org/drawingml/2006/main">
-            <a:r>
-              <a:t>来源与边界：</a:t>
-            </a:r>
-          </a:p>
-          <a:p xmlns:a="http://schemas.openxmlformats.org/drawingml/2006/main">
-            <a:r>
-              <a:t>[handout.md](./handout.md) §二-§五；[teaching-plan.md](./teaching-plan.md) 第四至六节。</a:t>
-            </a:r>
-          </a:p>
-          <a:p xmlns:a="http://schemas.openxmlformats.org/drawingml/2006/main">
-            <a:r>
-              <a:t/>
-            </a:r>
-          </a:p>
-          <a:p xmlns:a="http://schemas.openxmlformats.org/drawingml/2006/main">
-            <a:r>
-              <a:t>---</a:t>
-            </a:r>
-          </a:p>
-          <a:p xmlns:a="http://schemas.openxmlformats.org/drawingml/2006/main">
-            <a:r>
-              <a:t/>
-            </a:r>
-          </a:p>
-          <a:p xmlns:a="http://schemas.openxmlformats.org/drawingml/2006/main">
-            <a:r>
-              <a:t>[Sources]</a:t>
-            </a:r>
-          </a:p>
-          <a:p xmlns:a="http://schemas.openxmlformats.org/drawingml/2006/main">
-            <a:r>
-              <a:t/>
-            </a:r>
-          </a:p>
-          <a:p xmlns:a="http://schemas.openxmlformats.org/drawingml/2006/main">
-            <a:r>
-              <a:t>- 本课 handout.md 与 slides.md</a:t>
-            </a:r>
-          </a:p>
-          <a:p xmlns:a="http://schemas.openxmlformats.org/drawingml/2006/main">
-            <a:r>
-              <a:t/>
-            </a:r>
-          </a:p>
-          <a:p xmlns:a="http://schemas.openxmlformats.org/drawingml/2006/main">
-            <a:r>
-              <a:t>- ../../course/reading-card-case.md</a:t>
-            </a:r>
-          </a:p>
-          <a:p xmlns:a="http://schemas.openxmlformats.org/drawingml/2006/main">
-            <a:r>
-              <a:t/>
+              <a:t>本课 handout.md、judgment-task.md；../../course/judgment-path.md。</a:t>
             </a:r>
           </a:p>
           <a:p xmlns:a="http://schemas.openxmlformats.org/drawingml/2006/main">
@@ -3242,7 +1997,12 @@
           </a:p>
           <a:p xmlns:a="http://schemas.openxmlformats.org/drawingml/2006/main">
             <a:r>
-              <a:t>讲义位置：本课讲义；见逐页母稿映射表</a:t>
+              <a:t>讲述与校准：</a:t>
+            </a:r>
+          </a:p>
+          <a:p xmlns:a="http://schemas.openxmlformats.org/drawingml/2006/main">
+            <a:r>
+              <a:t>回扣第 10 课：受限 Agent 让"Agent 帮忙"可见，但没有回答"能不能反复跑""指标会不会被篡改""失败会不会被删""AutoResearch 那类系统在哪些维度上仍需人工"。本课进入阶段七实验追踪，把受限执行扩展为受限循环。</a:t>
             </a:r>
           </a:p>
           <a:p xmlns:a="http://schemas.openxmlformats.org/drawingml/2006/main">
@@ -3252,12 +2012,12 @@
           </a:p>
           <a:p xmlns:a="http://schemas.openxmlformats.org/drawingml/2006/main">
             <a:r>
-              <a:t>屏显核对：</a:t>
-            </a:r>
-          </a:p>
-          <a:p xmlns:a="http://schemas.openxmlformats.org/drawingml/2006/main">
-            <a:r>
-              <a:t>从一次受限执行到冻结运行队列</a:t>
+              <a:t>学生动作：</a:t>
+            </a:r>
+          </a:p>
+          <a:p xmlns:a="http://schemas.openxmlformats.org/drawingml/2006/main">
+            <a:r>
+              <a:t>先停 1 分钟：在你现有的受限执行记录里，圈出最缺的一项：指标 / 预算 / 停止 / 回退。然后快问：指标是预先固定的吗？失败能与运行次数对账吗？</a:t>
             </a:r>
           </a:p>
           <a:p xmlns:a="http://schemas.openxmlformats.org/drawingml/2006/main">
@@ -3267,7 +2027,7 @@
           </a:p>
           <a:p xmlns:a="http://schemas.openxmlformats.org/drawingml/2006/main">
             <a:r>
-              <a:t>- task-01</a:t>
+              <a:t>课堂安排：按本稿下方 90 分钟教学路由安排；此页不另占独立时段。</a:t>
             </a:r>
           </a:p>
           <a:p xmlns:a="http://schemas.openxmlformats.org/drawingml/2006/main">
@@ -3277,7 +2037,12 @@
           </a:p>
           <a:p xmlns:a="http://schemas.openxmlformats.org/drawingml/2006/main">
             <a:r>
-              <a:t>- 契约 + diff</a:t>
+              <a:t>[Sources]</a:t>
+            </a:r>
+          </a:p>
+          <a:p xmlns:a="http://schemas.openxmlformats.org/drawingml/2006/main">
+            <a:r>
+              <a:t>回扣第 10 课讲义与第 9 课实验规格；[AGENTS.md](../../AGENTS.md) 证据标准。</a:t>
             </a:r>
           </a:p>
           <a:p xmlns:a="http://schemas.openxmlformats.org/drawingml/2006/main">
@@ -3287,212 +2052,7 @@
           </a:p>
           <a:p xmlns:a="http://schemas.openxmlformats.org/drawingml/2006/main">
             <a:r>
-              <a:t>- run-001</a:t>
-            </a:r>
-          </a:p>
-          <a:p xmlns:a="http://schemas.openxmlformats.org/drawingml/2006/main">
-            <a:r>
-              <a:t/>
-            </a:r>
-          </a:p>
-          <a:p xmlns:a="http://schemas.openxmlformats.org/drawingml/2006/main">
-            <a:r>
-              <a:t>- 正常</a:t>
-            </a:r>
-          </a:p>
-          <a:p xmlns:a="http://schemas.openxmlformats.org/drawingml/2006/main">
-            <a:r>
-              <a:t/>
-            </a:r>
-          </a:p>
-          <a:p xmlns:a="http://schemas.openxmlformats.org/drawingml/2006/main">
-            <a:r>
-              <a:t>- run-002</a:t>
-            </a:r>
-          </a:p>
-          <a:p xmlns:a="http://schemas.openxmlformats.org/drawingml/2006/main">
-            <a:r>
-              <a:t/>
-            </a:r>
-          </a:p>
-          <a:p xmlns:a="http://schemas.openxmlformats.org/drawingml/2006/main">
-            <a:r>
-              <a:t>- 无改善</a:t>
-            </a:r>
-          </a:p>
-          <a:p xmlns:a="http://schemas.openxmlformats.org/drawingml/2006/main">
-            <a:r>
-              <a:t/>
-            </a:r>
-          </a:p>
-          <a:p xmlns:a="http://schemas.openxmlformats.org/drawingml/2006/main">
-            <a:r>
-              <a:t>- run-003</a:t>
-            </a:r>
-          </a:p>
-          <a:p xmlns:a="http://schemas.openxmlformats.org/drawingml/2006/main">
-            <a:r>
-              <a:t/>
-            </a:r>
-          </a:p>
-          <a:p xmlns:a="http://schemas.openxmlformats.org/drawingml/2006/main">
-            <a:r>
-              <a:t>- 失败保留</a:t>
-            </a:r>
-          </a:p>
-          <a:p xmlns:a="http://schemas.openxmlformats.org/drawingml/2006/main">
-            <a:r>
-              <a:t/>
-            </a:r>
-          </a:p>
-          <a:p xmlns:a="http://schemas.openxmlformats.org/drawingml/2006/main">
-            <a:r>
-              <a:t>- 循环还缺：固定指标｜预算｜停止条件｜回退</a:t>
-            </a:r>
-          </a:p>
-          <a:p xmlns:a="http://schemas.openxmlformats.org/drawingml/2006/main">
-            <a:r>
-              <a:t/>
-            </a:r>
-          </a:p>
-          <a:p xmlns:a="http://schemas.openxmlformats.org/drawingml/2006/main">
-            <a:r>
-              <a:t>教师讲述：</a:t>
-            </a:r>
-          </a:p>
-          <a:p xmlns:a="http://schemas.openxmlformats.org/drawingml/2006/main">
-            <a:r>
-              <a:t>回扣第 10 课：受限 Agent 让"Agent 帮忙"可见，但没有回答"能不能反复跑""指标会不会被篡改""失败会不会被删""AutoResearch 那类系统在哪些维度上仍需人工"。本课进入阶段七实验追踪，把受限执行扩展为受限循环。</a:t>
-            </a:r>
-          </a:p>
-          <a:p xmlns:a="http://schemas.openxmlformats.org/drawingml/2006/main">
-            <a:r>
-              <a:t/>
-            </a:r>
-          </a:p>
-          <a:p xmlns:a="http://schemas.openxmlformats.org/drawingml/2006/main">
-            <a:r>
-              <a:t>学生动作：</a:t>
-            </a:r>
-          </a:p>
-          <a:p xmlns:a="http://schemas.openxmlformats.org/drawingml/2006/main">
-            <a:r>
-              <a:t>先停 1 分钟：在你现有的受限执行记录里，圈出最缺的一项：指标 / 预算 / 停止 / 回退。然后快问：指标是预先固定的吗？失败能与运行次数对账吗？</a:t>
-            </a:r>
-          </a:p>
-          <a:p xmlns:a="http://schemas.openxmlformats.org/drawingml/2006/main">
-            <a:r>
-              <a:t/>
-            </a:r>
-          </a:p>
-          <a:p xmlns:a="http://schemas.openxmlformats.org/drawingml/2006/main">
-            <a:r>
-              <a:t>本课板书、诊断与串词：</a:t>
-            </a:r>
-          </a:p>
-          <a:p xmlns:a="http://schemas.openxmlformats.org/drawingml/2006/main">
-            <a:r>
-              <a:t>本节替换同类口头提示，不增加既有时段。开场诊断嵌入现有开场/回顾，后续再沿原实践时段操作。</a:t>
-            </a:r>
-          </a:p>
-          <a:p xmlns:a="http://schemas.openxmlformats.org/drawingml/2006/main">
-            <a:r>
-              <a:t/>
-            </a:r>
-          </a:p>
-          <a:p xmlns:a="http://schemas.openxmlformats.org/drawingml/2006/main">
-            <a:r>
-              <a:t>- **板书主线**：固定队列 ≠ 优化循环；任务数 / 尝试数 / 样本数。</a:t>
-            </a:r>
-          </a:p>
-          <a:p xmlns:a="http://schemas.openxmlformats.org/drawingml/2006/main">
-            <a:r>
-              <a:t>- **诊断问题**：恢复一次失败是否增加一个研究样本？</a:t>
-            </a:r>
-          </a:p>
-          <a:p xmlns:a="http://schemas.openxmlformats.org/drawingml/2006/main">
-            <a:r>
-              <a:t>- **预期回答**：没有；只是同一任务的新尝试，旧失败要留存。</a:t>
-            </a:r>
-          </a:p>
-          <a:p xmlns:a="http://schemas.openxmlformats.org/drawingml/2006/main">
-            <a:r>
-              <a:t>- **常见误答后的追问**：如答“重跑直到好结果”，回到预算和停止规则。</a:t>
-            </a:r>
-          </a:p>
-          <a:p xmlns:a="http://schemas.openxmlformats.org/drawingml/2006/main">
-            <a:r>
-              <a:t>- **过渡串词**：“接下来把执行、评价与人工审核组织成一个可追踪工作流。”</a:t>
-            </a:r>
-          </a:p>
-          <a:p xmlns:a="http://schemas.openxmlformats.org/drawingml/2006/main">
-            <a:r>
-              <a:t>- **当堂最小产出**：预算、权限、停止、审核四约束及一次恢复检查。</a:t>
-            </a:r>
-          </a:p>
-          <a:p xmlns:a="http://schemas.openxmlformats.org/drawingml/2006/main">
-            <a:r>
-              <a:t>- **退出记录**：写“已完成的动作、本人项目仍缺的证据/工件、下次补齐位置”。使用教师包时标明课堂方法练习，不能据此宣称本人研究门通过；正式提交课次仍为第 6、9、13、16 课。</a:t>
-            </a:r>
-          </a:p>
-          <a:p xmlns:a="http://schemas.openxmlformats.org/drawingml/2006/main">
-            <a:r>
-              <a:t/>
-            </a:r>
-          </a:p>
-          <a:p xmlns:a="http://schemas.openxmlformats.org/drawingml/2006/main">
-            <a:r>
-              <a:t>来源与边界：</a:t>
-            </a:r>
-          </a:p>
-          <a:p xmlns:a="http://schemas.openxmlformats.org/drawingml/2006/main">
-            <a:r>
-              <a:t>回扣第 10 课讲义与第 9 课实验规格；[AGENTS.md](../../AGENTS.md) 证据标准。</a:t>
-            </a:r>
-          </a:p>
-          <a:p xmlns:a="http://schemas.openxmlformats.org/drawingml/2006/main">
-            <a:r>
-              <a:t/>
-            </a:r>
-          </a:p>
-          <a:p xmlns:a="http://schemas.openxmlformats.org/drawingml/2006/main">
-            <a:r>
-              <a:t>---</a:t>
-            </a:r>
-          </a:p>
-          <a:p xmlns:a="http://schemas.openxmlformats.org/drawingml/2006/main">
-            <a:r>
-              <a:t/>
-            </a:r>
-          </a:p>
-          <a:p xmlns:a="http://schemas.openxmlformats.org/drawingml/2006/main">
-            <a:r>
-              <a:t>[Sources]</a:t>
-            </a:r>
-          </a:p>
-          <a:p xmlns:a="http://schemas.openxmlformats.org/drawingml/2006/main">
-            <a:r>
-              <a:t/>
-            </a:r>
-          </a:p>
-          <a:p xmlns:a="http://schemas.openxmlformats.org/drawingml/2006/main">
-            <a:r>
-              <a:t>- 本课 handout.md 与 slides.md</a:t>
-            </a:r>
-          </a:p>
-          <a:p xmlns:a="http://schemas.openxmlformats.org/drawingml/2006/main">
-            <a:r>
-              <a:t/>
-            </a:r>
-          </a:p>
-          <a:p xmlns:a="http://schemas.openxmlformats.org/drawingml/2006/main">
-            <a:r>
-              <a:t>- ../../course/reading-card-case.md</a:t>
-            </a:r>
-          </a:p>
-          <a:p xmlns:a="http://schemas.openxmlformats.org/drawingml/2006/main">
-            <a:r>
-              <a:t/>
+              <a:t>本课 handout.md、judgment-task.md；../../course/judgment-path.md。</a:t>
             </a:r>
           </a:p>
           <a:p xmlns:a="http://schemas.openxmlformats.org/drawingml/2006/main">
@@ -3567,7 +2127,7 @@
           <a:lstStyle xmlns:a="http://schemas.openxmlformats.org/drawingml/2006/main"/>
           <a:p xmlns:a="http://schemas.openxmlformats.org/drawingml/2006/main">
             <a:r>
-              <a:t>页面：P20 受限循环将升级为最小工作流</a:t>
+              <a:t>页面：P20 保留本课决定，准备下一课输入</a:t>
             </a:r>
           </a:p>
           <a:p xmlns:a="http://schemas.openxmlformats.org/drawingml/2006/main">
@@ -3577,7 +2137,12 @@
           </a:p>
           <a:p xmlns:a="http://schemas.openxmlformats.org/drawingml/2006/main">
             <a:r>
-              <a:t>讲义位置：本课讲义；见逐页母稿映射表</a:t>
+              <a:t>讲述与校准：</a:t>
+            </a:r>
+          </a:p>
+          <a:p xmlns:a="http://schemas.openxmlformats.org/drawingml/2006/main">
+            <a:r>
+              <a:t>整理一次恢复和停止理由；按需查看 RSI 选优案例，不新增运行项目。 每课课外最多60分钟；详见讲义。</a:t>
             </a:r>
           </a:p>
           <a:p xmlns:a="http://schemas.openxmlformats.org/drawingml/2006/main">
@@ -3587,12 +2152,12 @@
           </a:p>
           <a:p xmlns:a="http://schemas.openxmlformats.org/drawingml/2006/main">
             <a:r>
-              <a:t>屏显核对：</a:t>
-            </a:r>
-          </a:p>
-          <a:p xmlns:a="http://schemas.openxmlformats.org/drawingml/2006/main">
-            <a:r>
-              <a:t>受限循环将升级为最小工作流</a:t>
+              <a:t>学生动作：</a:t>
+            </a:r>
+          </a:p>
+          <a:p xmlns:a="http://schemas.openxmlformats.org/drawingml/2006/main">
+            <a:r>
+              <a:t>定位实际工件与下一项动作；按既定预算收口。</a:t>
             </a:r>
           </a:p>
           <a:p xmlns:a="http://schemas.openxmlformats.org/drawingml/2006/main">
@@ -3602,7 +2167,7 @@
           </a:p>
           <a:p xmlns:a="http://schemas.openxmlformats.org/drawingml/2006/main">
             <a:r>
-              <a:t>- L10 / 一次执行</a:t>
+              <a:t>课堂安排：按本稿下方 90 分钟教学路由安排；此页不另占独立时段。</a:t>
             </a:r>
           </a:p>
           <a:p xmlns:a="http://schemas.openxmlformats.org/drawingml/2006/main">
@@ -3612,7 +2177,12 @@
           </a:p>
           <a:p xmlns:a="http://schemas.openxmlformats.org/drawingml/2006/main">
             <a:r>
-              <a:t>- L11 / 冻结循环</a:t>
+              <a:t>[Sources]</a:t>
+            </a:r>
+          </a:p>
+          <a:p xmlns:a="http://schemas.openxmlformats.org/drawingml/2006/main">
+            <a:r>
+              <a:t>[assignments.md](../../course/assignments.md) 验证门 Checkpoint 3 在第 13 课后；[syllabus.md](../../course/syllabus.md) 第 12 课主题。</a:t>
             </a:r>
           </a:p>
           <a:p xmlns:a="http://schemas.openxmlformats.org/drawingml/2006/main">
@@ -3622,117 +2192,7 @@
           </a:p>
           <a:p xmlns:a="http://schemas.openxmlformats.org/drawingml/2006/main">
             <a:r>
-              <a:t>- 当前位置 / 输出</a:t>
-            </a:r>
-          </a:p>
-          <a:p xmlns:a="http://schemas.openxmlformats.org/drawingml/2006/main">
-            <a:r>
-              <a:t/>
-            </a:r>
-          </a:p>
-          <a:p xmlns:a="http://schemas.openxmlformats.org/drawingml/2006/main">
-            <a:r>
-              <a:t>- L12 / 最小工作流</a:t>
-            </a:r>
-          </a:p>
-          <a:p xmlns:a="http://schemas.openxmlformats.org/drawingml/2006/main">
-            <a:r>
-              <a:t/>
-            </a:r>
-          </a:p>
-          <a:p xmlns:a="http://schemas.openxmlformats.org/drawingml/2006/main">
-            <a:r>
-              <a:t>- L13 / 评价</a:t>
-            </a:r>
-          </a:p>
-          <a:p xmlns:a="http://schemas.openxmlformats.org/drawingml/2006/main">
-            <a:r>
-              <a:t/>
-            </a:r>
-          </a:p>
-          <a:p xmlns:a="http://schemas.openxmlformats.org/drawingml/2006/main">
-            <a:r>
-              <a:t>- 交给第 12 课：循环说明｜三种 trace｜四约束短分析</a:t>
-            </a:r>
-          </a:p>
-          <a:p xmlns:a="http://schemas.openxmlformats.org/drawingml/2006/main">
-            <a:r>
-              <a:t/>
-            </a:r>
-          </a:p>
-          <a:p xmlns:a="http://schemas.openxmlformats.org/drawingml/2006/main">
-            <a:r>
-              <a:t>教师讲述：</a:t>
-            </a:r>
-          </a:p>
-          <a:p xmlns:a="http://schemas.openxmlformats.org/drawingml/2006/main">
-            <a:r>
-              <a:t>退出卡让学生记录卡点。本课不正式提交。第 12 课会把本课的循环骨架重新组合为个人工作流设计——任务契约、Context、Memory、工具/MCP、权限、Evals、人工审核点会再次出现，但这次是你自己组合而非拆解别人的系统。第 13 课验证门统一检查实验记录与失败保留。</a:t>
-            </a:r>
-          </a:p>
-          <a:p xmlns:a="http://schemas.openxmlformats.org/drawingml/2006/main">
-            <a:r>
-              <a:t/>
-            </a:r>
-          </a:p>
-          <a:p xmlns:a="http://schemas.openxmlformats.org/drawingml/2006/main">
-            <a:r>
-              <a:t>学生动作：</a:t>
-            </a:r>
-          </a:p>
-          <a:p xmlns:a="http://schemas.openxmlformats.org/drawingml/2006/main">
-            <a:r>
-              <a:t>学生填写退出卡（2 分钟）。教师收回或学生自留。</a:t>
-            </a:r>
-          </a:p>
-          <a:p xmlns:a="http://schemas.openxmlformats.org/drawingml/2006/main">
-            <a:r>
-              <a:t/>
-            </a:r>
-          </a:p>
-          <a:p xmlns:a="http://schemas.openxmlformats.org/drawingml/2006/main">
-            <a:r>
-              <a:t>来源与边界：</a:t>
-            </a:r>
-          </a:p>
-          <a:p xmlns:a="http://schemas.openxmlformats.org/drawingml/2006/main">
-            <a:r>
-              <a:t>[assignments.md](../../course/assignments.md) 验证门 Checkpoint 3 在第 13 课后；[syllabus.md](../../course/syllabus.md) 第 12 课主题。</a:t>
-            </a:r>
-          </a:p>
-          <a:p xmlns:a="http://schemas.openxmlformats.org/drawingml/2006/main">
-            <a:r>
-              <a:t/>
-            </a:r>
-          </a:p>
-          <a:p xmlns:a="http://schemas.openxmlformats.org/drawingml/2006/main">
-            <a:r>
-              <a:t>[Sources]</a:t>
-            </a:r>
-          </a:p>
-          <a:p xmlns:a="http://schemas.openxmlformats.org/drawingml/2006/main">
-            <a:r>
-              <a:t/>
-            </a:r>
-          </a:p>
-          <a:p xmlns:a="http://schemas.openxmlformats.org/drawingml/2006/main">
-            <a:r>
-              <a:t>- 本课 handout.md 与 slides.md</a:t>
-            </a:r>
-          </a:p>
-          <a:p xmlns:a="http://schemas.openxmlformats.org/drawingml/2006/main">
-            <a:r>
-              <a:t/>
-            </a:r>
-          </a:p>
-          <a:p xmlns:a="http://schemas.openxmlformats.org/drawingml/2006/main">
-            <a:r>
-              <a:t>- ../../course/reading-card-case.md</a:t>
-            </a:r>
-          </a:p>
-          <a:p xmlns:a="http://schemas.openxmlformats.org/drawingml/2006/main">
-            <a:r>
-              <a:t/>
+              <a:t>本课 handout.md、judgment-task.md；../../course/judgment-path.md。教学构造仅用于方法判断；本人结果以实际记录为准。</a:t>
             </a:r>
           </a:p>
           <a:p xmlns:a="http://schemas.openxmlformats.org/drawingml/2006/main">
@@ -3807,7 +2267,7 @@
           <a:lstStyle xmlns:a="http://schemas.openxmlformats.org/drawingml/2006/main"/>
           <a:p xmlns:a="http://schemas.openxmlformats.org/drawingml/2006/main">
             <a:r>
-              <a:t>页面：P03 本课形成三件可交给第 12 课的工件</a:t>
+              <a:t>页面：P03 恢复与停止是两种判断</a:t>
             </a:r>
           </a:p>
           <a:p xmlns:a="http://schemas.openxmlformats.org/drawingml/2006/main">
@@ -3817,7 +2277,12 @@
           </a:p>
           <a:p xmlns:a="http://schemas.openxmlformats.org/drawingml/2006/main">
             <a:r>
-              <a:t>讲义位置：本课讲义；见逐页母稿映射表</a:t>
+              <a:t>讲述与校准：</a:t>
+            </a:r>
+          </a:p>
+          <a:p xmlns:a="http://schemas.openxmlformats.org/drawingml/2006/main">
+            <a:r>
+              <a:t>先独立作答，再同伴比较；以下依据只在校准时揭示。</a:t>
             </a:r>
           </a:p>
           <a:p xmlns:a="http://schemas.openxmlformats.org/drawingml/2006/main">
@@ -3827,12 +2292,7 @@
           </a:p>
           <a:p xmlns:a="http://schemas.openxmlformats.org/drawingml/2006/main">
             <a:r>
-              <a:t>屏显核对：</a:t>
-            </a:r>
-          </a:p>
-          <a:p xmlns:a="http://schemas.openxmlformats.org/drawingml/2006/main">
-            <a:r>
-              <a:t>本课形成三件可交给第 12 课的工件</a:t>
+              <a:t>技术失败在配置/输入未变时可恢复，成功任务不重复；更改输入须新版本新目录。无改善/负结果是评价事实，不是运行故障；保留并据协议决定停止或下一轮。固定指标仍可能因反复选优乐观，RSI 作为该问题的补充，不要求再做一个项目。</a:t>
             </a:r>
           </a:p>
           <a:p xmlns:a="http://schemas.openxmlformats.org/drawingml/2006/main">
@@ -3842,7 +2302,12 @@
           </a:p>
           <a:p xmlns:a="http://schemas.openxmlformats.org/drawingml/2006/main">
             <a:r>
-              <a:t>- 受限循环说明</a:t>
+              <a:t>学生动作：</a:t>
+            </a:r>
+          </a:p>
+          <a:p xmlns:a="http://schemas.openxmlformats.org/drawingml/2006/main">
+            <a:r>
+              <a:t>先独立写决定和证据，后同伴比较；校准后再回写。</a:t>
             </a:r>
           </a:p>
           <a:p xmlns:a="http://schemas.openxmlformats.org/drawingml/2006/main">
@@ -3852,7 +2317,7 @@
           </a:p>
           <a:p xmlns:a="http://schemas.openxmlformats.org/drawingml/2006/main">
             <a:r>
-              <a:t>- 固定指标 / 预算 / 停止 / 回退</a:t>
+              <a:t>课堂安排：按本稿下方 90 分钟教学路由安排；此页不另占独立时段。</a:t>
             </a:r>
           </a:p>
           <a:p xmlns:a="http://schemas.openxmlformats.org/drawingml/2006/main">
@@ -3862,7 +2327,12 @@
           </a:p>
           <a:p xmlns:a="http://schemas.openxmlformats.org/drawingml/2006/main">
             <a:r>
-              <a:t>- 三种运行 trace</a:t>
+              <a:t>[Sources]</a:t>
+            </a:r>
+          </a:p>
+          <a:p xmlns:a="http://schemas.openxmlformats.org/drawingml/2006/main">
+            <a:r>
+              <a:t>[备课规划.md](../备课规划.md) 第 11 课权威六段；[assignments.md](../../course/assignments.md) 验证门 Checkpoint 3 在第 13 课后。</a:t>
             </a:r>
           </a:p>
           <a:p xmlns:a="http://schemas.openxmlformats.org/drawingml/2006/main">
@@ -3872,117 +2342,7 @@
           </a:p>
           <a:p xmlns:a="http://schemas.openxmlformats.org/drawingml/2006/main">
             <a:r>
-              <a:t>- 正常 / 无改善 / 失败</a:t>
-            </a:r>
-          </a:p>
-          <a:p xmlns:a="http://schemas.openxmlformats.org/drawingml/2006/main">
-            <a:r>
-              <a:t/>
-            </a:r>
-          </a:p>
-          <a:p xmlns:a="http://schemas.openxmlformats.org/drawingml/2006/main">
-            <a:r>
-              <a:t>- 四约束短分析</a:t>
-            </a:r>
-          </a:p>
-          <a:p xmlns:a="http://schemas.openxmlformats.org/drawingml/2006/main">
-            <a:r>
-              <a:t/>
-            </a:r>
-          </a:p>
-          <a:p xmlns:a="http://schemas.openxmlformats.org/drawingml/2006/main">
-            <a:r>
-              <a:t>- 何处仍需人工</a:t>
-            </a:r>
-          </a:p>
-          <a:p xmlns:a="http://schemas.openxmlformats.org/drawingml/2006/main">
-            <a:r>
-              <a:t/>
-            </a:r>
-          </a:p>
-          <a:p xmlns:a="http://schemas.openxmlformats.org/drawingml/2006/main">
-            <a:r>
-              <a:t>教师讲述：</a:t>
-            </a:r>
-          </a:p>
-          <a:p xmlns:a="http://schemas.openxmlformats.org/drawingml/2006/main">
-            <a:r>
-              <a:t>明确边界：本课目标是建立受限循环说明和失败保留记录，不要求循环在课堂内跑完。本课不是验证门；验证门在第 13 课后，统一检查实验记录与失败保留。本课为第 12 课个人工作流设计直接铺垫——第 12 课会把本课的循环骨架重新组合为服务于学生自己科研动作的工作流。</a:t>
-            </a:r>
-          </a:p>
-          <a:p xmlns:a="http://schemas.openxmlformats.org/drawingml/2006/main">
-            <a:r>
-              <a:t/>
-            </a:r>
-          </a:p>
-          <a:p xmlns:a="http://schemas.openxmlformats.org/drawingml/2006/main">
-            <a:r>
-              <a:t>学生动作：</a:t>
-            </a:r>
-          </a:p>
-          <a:p xmlns:a="http://schemas.openxmlformats.org/drawingml/2006/main">
-            <a:r>
-              <a:t>无。</a:t>
-            </a:r>
-          </a:p>
-          <a:p xmlns:a="http://schemas.openxmlformats.org/drawingml/2006/main">
-            <a:r>
-              <a:t/>
-            </a:r>
-          </a:p>
-          <a:p xmlns:a="http://schemas.openxmlformats.org/drawingml/2006/main">
-            <a:r>
-              <a:t>来源与边界：</a:t>
-            </a:r>
-          </a:p>
-          <a:p xmlns:a="http://schemas.openxmlformats.org/drawingml/2006/main">
-            <a:r>
-              <a:t>[备课规划.md](../备课规划.md) 第 11 课权威六段；[assignments.md](../../course/assignments.md) 验证门 Checkpoint 3 在第 13 课后。</a:t>
-            </a:r>
-          </a:p>
-          <a:p xmlns:a="http://schemas.openxmlformats.org/drawingml/2006/main">
-            <a:r>
-              <a:t/>
-            </a:r>
-          </a:p>
-          <a:p xmlns:a="http://schemas.openxmlformats.org/drawingml/2006/main">
-            <a:r>
-              <a:t>---</a:t>
-            </a:r>
-          </a:p>
-          <a:p xmlns:a="http://schemas.openxmlformats.org/drawingml/2006/main">
-            <a:r>
-              <a:t/>
-            </a:r>
-          </a:p>
-          <a:p xmlns:a="http://schemas.openxmlformats.org/drawingml/2006/main">
-            <a:r>
-              <a:t>[Sources]</a:t>
-            </a:r>
-          </a:p>
-          <a:p xmlns:a="http://schemas.openxmlformats.org/drawingml/2006/main">
-            <a:r>
-              <a:t/>
-            </a:r>
-          </a:p>
-          <a:p xmlns:a="http://schemas.openxmlformats.org/drawingml/2006/main">
-            <a:r>
-              <a:t>- 本课 handout.md 与 slides.md</a:t>
-            </a:r>
-          </a:p>
-          <a:p xmlns:a="http://schemas.openxmlformats.org/drawingml/2006/main">
-            <a:r>
-              <a:t/>
-            </a:r>
-          </a:p>
-          <a:p xmlns:a="http://schemas.openxmlformats.org/drawingml/2006/main">
-            <a:r>
-              <a:t>- ../../course/reading-card-case.md</a:t>
-            </a:r>
-          </a:p>
-          <a:p xmlns:a="http://schemas.openxmlformats.org/drawingml/2006/main">
-            <a:r>
-              <a:t/>
+              <a:t>本课 handout.md、judgment-task.md；../../course/judgment-path.md。教学构造仅用于方法判断；本人结果以实际记录为准。</a:t>
             </a:r>
           </a:p>
           <a:p xmlns:a="http://schemas.openxmlformats.org/drawingml/2006/main">
@@ -4067,7 +2427,12 @@
           </a:p>
           <a:p xmlns:a="http://schemas.openxmlformats.org/drawingml/2006/main">
             <a:r>
-              <a:t>讲义位置：本课讲义；见逐页母稿映射表</a:t>
+              <a:t>讲述与校准：</a:t>
+            </a:r>
+          </a:p>
+          <a:p xmlns:a="http://schemas.openxmlformats.org/drawingml/2006/main">
+            <a:r>
+              <a:t>本页讲优化循环：候选方法改动在预先隔离的开发集上比较，评价口径、预算和停止规则保持冻结。Keep / Discard 决定是否采用候选改动，不删除失败记录。第 10 页的 6 份构造输出仅执行已冻结配置，不沿此分支调参。</a:t>
             </a:r>
           </a:p>
           <a:p xmlns:a="http://schemas.openxmlformats.org/drawingml/2006/main">
@@ -4077,12 +2442,12 @@
           </a:p>
           <a:p xmlns:a="http://schemas.openxmlformats.org/drawingml/2006/main">
             <a:r>
-              <a:t>屏显核对：</a:t>
-            </a:r>
-          </a:p>
-          <a:p xmlns:a="http://schemas.openxmlformats.org/drawingml/2006/main">
-            <a:r>
-              <a:t>循环五步与 Keep / Discard 分支</a:t>
+              <a:t>学生动作：</a:t>
+            </a:r>
+          </a:p>
+          <a:p xmlns:a="http://schemas.openxmlformats.org/drawingml/2006/main">
+            <a:r>
+              <a:t>快问：你之前做实验时，假设是先写的还是结果出来后补的？只听回答。</a:t>
             </a:r>
           </a:p>
           <a:p xmlns:a="http://schemas.openxmlformats.org/drawingml/2006/main">
@@ -4092,7 +2457,7 @@
           </a:p>
           <a:p xmlns:a="http://schemas.openxmlformats.org/drawingml/2006/main">
             <a:r>
-              <a:t>- 假设</a:t>
+              <a:t>课堂安排：按本稿下方 90 分钟教学路由安排；此页不另占独立时段。</a:t>
             </a:r>
           </a:p>
           <a:p xmlns:a="http://schemas.openxmlformats.org/drawingml/2006/main">
@@ -4102,7 +2467,12 @@
           </a:p>
           <a:p xmlns:a="http://schemas.openxmlformats.org/drawingml/2006/main">
             <a:r>
-              <a:t>- 运行前写明</a:t>
+              <a:t>[Sources]</a:t>
+            </a:r>
+          </a:p>
+          <a:p xmlns:a="http://schemas.openxmlformats.org/drawingml/2006/main">
+            <a:r>
+              <a:t>handout §二·1；第 1 课 §2.7 工作流何时停止。</a:t>
             </a:r>
           </a:p>
           <a:p xmlns:a="http://schemas.openxmlformats.org/drawingml/2006/main">
@@ -4112,177 +2482,7 @@
           </a:p>
           <a:p xmlns:a="http://schemas.openxmlformats.org/drawingml/2006/main">
             <a:r>
-              <a:t>- 运行</a:t>
-            </a:r>
-          </a:p>
-          <a:p xmlns:a="http://schemas.openxmlformats.org/drawingml/2006/main">
-            <a:r>
-              <a:t/>
-            </a:r>
-          </a:p>
-          <a:p xmlns:a="http://schemas.openxmlformats.org/drawingml/2006/main">
-            <a:r>
-              <a:t>- 冻结配置</a:t>
-            </a:r>
-          </a:p>
-          <a:p xmlns:a="http://schemas.openxmlformats.org/drawingml/2006/main">
-            <a:r>
-              <a:t/>
-            </a:r>
-          </a:p>
-          <a:p xmlns:a="http://schemas.openxmlformats.org/drawingml/2006/main">
-            <a:r>
-              <a:t>- 度量</a:t>
-            </a:r>
-          </a:p>
-          <a:p xmlns:a="http://schemas.openxmlformats.org/drawingml/2006/main">
-            <a:r>
-              <a:t/>
-            </a:r>
-          </a:p>
-          <a:p xmlns:a="http://schemas.openxmlformats.org/drawingml/2006/main">
-            <a:r>
-              <a:t>- 指标不可改</a:t>
-            </a:r>
-          </a:p>
-          <a:p xmlns:a="http://schemas.openxmlformats.org/drawingml/2006/main">
-            <a:r>
-              <a:t/>
-            </a:r>
-          </a:p>
-          <a:p xmlns:a="http://schemas.openxmlformats.org/drawingml/2006/main">
-            <a:r>
-              <a:t>- 评价</a:t>
-            </a:r>
-          </a:p>
-          <a:p xmlns:a="http://schemas.openxmlformats.org/drawingml/2006/main">
-            <a:r>
-              <a:t/>
-            </a:r>
-          </a:p>
-          <a:p xmlns:a="http://schemas.openxmlformats.org/drawingml/2006/main">
-            <a:r>
-              <a:t>- 人工判断</a:t>
-            </a:r>
-          </a:p>
-          <a:p xmlns:a="http://schemas.openxmlformats.org/drawingml/2006/main">
-            <a:r>
-              <a:t/>
-            </a:r>
-          </a:p>
-          <a:p xmlns:a="http://schemas.openxmlformats.org/drawingml/2006/main">
-            <a:r>
-              <a:t>- Keep / Discard</a:t>
-            </a:r>
-          </a:p>
-          <a:p xmlns:a="http://schemas.openxmlformats.org/drawingml/2006/main">
-            <a:r>
-              <a:t/>
-            </a:r>
-          </a:p>
-          <a:p xmlns:a="http://schemas.openxmlformats.org/drawingml/2006/main">
-            <a:r>
-              <a:t>- 回写或回退</a:t>
-            </a:r>
-          </a:p>
-          <a:p xmlns:a="http://schemas.openxmlformats.org/drawingml/2006/main">
-            <a:r>
-              <a:t/>
-            </a:r>
-          </a:p>
-          <a:p xmlns:a="http://schemas.openxmlformats.org/drawingml/2006/main">
-            <a:r>
-              <a:t>- Discard 回到稳定配置；失败日志留在账本中</a:t>
-            </a:r>
-          </a:p>
-          <a:p xmlns:a="http://schemas.openxmlformats.org/drawingml/2006/main">
-            <a:r>
-              <a:t/>
-            </a:r>
-          </a:p>
-          <a:p xmlns:a="http://schemas.openxmlformats.org/drawingml/2006/main">
-            <a:r>
-              <a:t>教师讲述：</a:t>
-            </a:r>
-          </a:p>
-          <a:p xmlns:a="http://schemas.openxmlformats.org/drawingml/2006/main">
-            <a:r>
-              <a:t>本页讲优化循环：候选方法改动在预先隔离的开发集上比较，评价口径、预算和停止规则保持冻结。Keep / Discard 决定是否采用候选改动，不删除失败记录。第 10 页的 6 份构造输出仅执行已冻结配置，不沿此分支调参。</a:t>
-            </a:r>
-          </a:p>
-          <a:p xmlns:a="http://schemas.openxmlformats.org/drawingml/2006/main">
-            <a:r>
-              <a:t/>
-            </a:r>
-          </a:p>
-          <a:p xmlns:a="http://schemas.openxmlformats.org/drawingml/2006/main">
-            <a:r>
-              <a:t>学生动作：</a:t>
-            </a:r>
-          </a:p>
-          <a:p xmlns:a="http://schemas.openxmlformats.org/drawingml/2006/main">
-            <a:r>
-              <a:t>快问：你之前做实验时，假设是先写的还是结果出来后补的？只听回答。</a:t>
-            </a:r>
-          </a:p>
-          <a:p xmlns:a="http://schemas.openxmlformats.org/drawingml/2006/main">
-            <a:r>
-              <a:t/>
-            </a:r>
-          </a:p>
-          <a:p xmlns:a="http://schemas.openxmlformats.org/drawingml/2006/main">
-            <a:r>
-              <a:t>来源与边界：</a:t>
-            </a:r>
-          </a:p>
-          <a:p xmlns:a="http://schemas.openxmlformats.org/drawingml/2006/main">
-            <a:r>
-              <a:t>handout §二·1；第 1 课 §2.7 工作流何时停止。</a:t>
-            </a:r>
-          </a:p>
-          <a:p xmlns:a="http://schemas.openxmlformats.org/drawingml/2006/main">
-            <a:r>
-              <a:t/>
-            </a:r>
-          </a:p>
-          <a:p xmlns:a="http://schemas.openxmlformats.org/drawingml/2006/main">
-            <a:r>
-              <a:t>---</a:t>
-            </a:r>
-          </a:p>
-          <a:p xmlns:a="http://schemas.openxmlformats.org/drawingml/2006/main">
-            <a:r>
-              <a:t/>
-            </a:r>
-          </a:p>
-          <a:p xmlns:a="http://schemas.openxmlformats.org/drawingml/2006/main">
-            <a:r>
-              <a:t>[Sources]</a:t>
-            </a:r>
-          </a:p>
-          <a:p xmlns:a="http://schemas.openxmlformats.org/drawingml/2006/main">
-            <a:r>
-              <a:t/>
-            </a:r>
-          </a:p>
-          <a:p xmlns:a="http://schemas.openxmlformats.org/drawingml/2006/main">
-            <a:r>
-              <a:t>- 本课 handout.md 与 slides.md</a:t>
-            </a:r>
-          </a:p>
-          <a:p xmlns:a="http://schemas.openxmlformats.org/drawingml/2006/main">
-            <a:r>
-              <a:t/>
-            </a:r>
-          </a:p>
-          <a:p xmlns:a="http://schemas.openxmlformats.org/drawingml/2006/main">
-            <a:r>
-              <a:t>- ../../course/reading-card-case.md</a:t>
-            </a:r>
-          </a:p>
-          <a:p xmlns:a="http://schemas.openxmlformats.org/drawingml/2006/main">
-            <a:r>
-              <a:t/>
+              <a:t>本课 handout.md、judgment-task.md；../../course/judgment-path.md。</a:t>
             </a:r>
           </a:p>
           <a:p xmlns:a="http://schemas.openxmlformats.org/drawingml/2006/main">
@@ -4367,7 +2567,12 @@
           </a:p>
           <a:p xmlns:a="http://schemas.openxmlformats.org/drawingml/2006/main">
             <a:r>
-              <a:t>讲义位置：本课讲义；见逐页母稿映射表</a:t>
+              <a:t>讲述与校准：</a:t>
+            </a:r>
+          </a:p>
+          <a:p xmlns:a="http://schemas.openxmlformats.org/drawingml/2006/main">
+            <a:r>
+              <a:t>区分可固定的评价协议与不可交给执行器的判断。指标可以依赖人工建立并复核的基准和盲评，并不因为需要专家标注就排除自动化。研究问题仍在形成、评价持续变化或高风险外部动作应保留人工主导。</a:t>
             </a:r>
           </a:p>
           <a:p xmlns:a="http://schemas.openxmlformats.org/drawingml/2006/main">
@@ -4377,12 +2582,12 @@
           </a:p>
           <a:p xmlns:a="http://schemas.openxmlformats.org/drawingml/2006/main">
             <a:r>
-              <a:t>屏显核对：</a:t>
-            </a:r>
-          </a:p>
-          <a:p xmlns:a="http://schemas.openxmlformats.org/drawingml/2006/main">
-            <a:r>
-              <a:t>适用边界取决于重复性与判断风险</a:t>
+              <a:t>学生动作：</a:t>
+            </a:r>
+          </a:p>
+          <a:p xmlns:a="http://schemas.openxmlformats.org/drawingml/2006/main">
+            <a:r>
+              <a:t>追问：判断"Agent 自动判断哪篇论文值得深入研究"是否适合改写为循环？为什么？</a:t>
             </a:r>
           </a:p>
           <a:p xmlns:a="http://schemas.openxmlformats.org/drawingml/2006/main">
@@ -4392,7 +2597,7 @@
           </a:p>
           <a:p xmlns:a="http://schemas.openxmlformats.org/drawingml/2006/main">
             <a:r>
-              <a:t>- 适合受限循环</a:t>
+              <a:t>课堂安排：按本稿下方 90 分钟教学路由安排；此页不另占独立时段。</a:t>
             </a:r>
           </a:p>
           <a:p xmlns:a="http://schemas.openxmlformats.org/drawingml/2006/main">
@@ -4402,7 +2607,12 @@
           </a:p>
           <a:p xmlns:a="http://schemas.openxmlformats.org/drawingml/2006/main">
             <a:r>
-              <a:t>- 保留人工主导</a:t>
+              <a:t>[Sources]</a:t>
+            </a:r>
+          </a:p>
+          <a:p xmlns:a="http://schemas.openxmlformats.org/drawingml/2006/main">
+            <a:r>
+              <a:t>handout §二·2-3；Sandve et al. 2013（可复现追踪链）。</a:t>
             </a:r>
           </a:p>
           <a:p xmlns:a="http://schemas.openxmlformats.org/drawingml/2006/main">
@@ -4412,167 +2622,7 @@
           </a:p>
           <a:p xmlns:a="http://schemas.openxmlformats.org/drawingml/2006/main">
             <a:r>
-              <a:t>- 输入输出明确</a:t>
-            </a:r>
-          </a:p>
-          <a:p xmlns:a="http://schemas.openxmlformats.org/drawingml/2006/main">
-            <a:r>
-              <a:t/>
-            </a:r>
-          </a:p>
-          <a:p xmlns:a="http://schemas.openxmlformats.org/drawingml/2006/main">
-            <a:r>
-              <a:t>- 评价标准可预先固定</a:t>
-            </a:r>
-          </a:p>
-          <a:p xmlns:a="http://schemas.openxmlformats.org/drawingml/2006/main">
-            <a:r>
-              <a:t/>
-            </a:r>
-          </a:p>
-          <a:p xmlns:a="http://schemas.openxmlformats.org/drawingml/2006/main">
-            <a:r>
-              <a:t>- 失败可检测并回退</a:t>
-            </a:r>
-          </a:p>
-          <a:p xmlns:a="http://schemas.openxmlformats.org/drawingml/2006/main">
-            <a:r>
-              <a:t/>
-            </a:r>
-          </a:p>
-          <a:p xmlns:a="http://schemas.openxmlformats.org/drawingml/2006/main">
-            <a:r>
-              <a:t>- 重复执行有价值</a:t>
-            </a:r>
-          </a:p>
-          <a:p xmlns:a="http://schemas.openxmlformats.org/drawingml/2006/main">
-            <a:r>
-              <a:t/>
-            </a:r>
-          </a:p>
-          <a:p xmlns:a="http://schemas.openxmlformats.org/drawingml/2006/main">
-            <a:r>
-              <a:t>- 研究问题仍在形成</a:t>
-            </a:r>
-          </a:p>
-          <a:p xmlns:a="http://schemas.openxmlformats.org/drawingml/2006/main">
-            <a:r>
-              <a:t/>
-            </a:r>
-          </a:p>
-          <a:p xmlns:a="http://schemas.openxmlformats.org/drawingml/2006/main">
-            <a:r>
-              <a:t>- 评价协议需要不断改写</a:t>
-            </a:r>
-          </a:p>
-          <a:p xmlns:a="http://schemas.openxmlformats.org/drawingml/2006/main">
-            <a:r>
-              <a:t/>
-            </a:r>
-          </a:p>
-          <a:p xmlns:a="http://schemas.openxmlformats.org/drawingml/2006/main">
-            <a:r>
-              <a:t>- 涉及高风险外部动作</a:t>
-            </a:r>
-          </a:p>
-          <a:p xmlns:a="http://schemas.openxmlformats.org/drawingml/2006/main">
-            <a:r>
-              <a:t/>
-            </a:r>
-          </a:p>
-          <a:p xmlns:a="http://schemas.openxmlformats.org/drawingml/2006/main">
-            <a:r>
-              <a:t>- 无法保留失败与审计</a:t>
-            </a:r>
-          </a:p>
-          <a:p xmlns:a="http://schemas.openxmlformats.org/drawingml/2006/main">
-            <a:r>
-              <a:t/>
-            </a:r>
-          </a:p>
-          <a:p xmlns:a="http://schemas.openxmlformats.org/drawingml/2006/main">
-            <a:r>
-              <a:t>教师讲述：</a:t>
-            </a:r>
-          </a:p>
-          <a:p xmlns:a="http://schemas.openxmlformats.org/drawingml/2006/main">
-            <a:r>
-              <a:t>区分可固定的评价协议与不可交给执行器的判断。指标可以依赖人工建立并复核的基准和盲评，并不因为需要专家标注就排除自动化。研究问题仍在形成、评价持续变化或高风险外部动作应保留人工主导。</a:t>
-            </a:r>
-          </a:p>
-          <a:p xmlns:a="http://schemas.openxmlformats.org/drawingml/2006/main">
-            <a:r>
-              <a:t/>
-            </a:r>
-          </a:p>
-          <a:p xmlns:a="http://schemas.openxmlformats.org/drawingml/2006/main">
-            <a:r>
-              <a:t>学生动作：</a:t>
-            </a:r>
-          </a:p>
-          <a:p xmlns:a="http://schemas.openxmlformats.org/drawingml/2006/main">
-            <a:r>
-              <a:t>追问：判断"Agent 自动判断哪篇论文值得深入研究"是否适合改写为循环？为什么？</a:t>
-            </a:r>
-          </a:p>
-          <a:p xmlns:a="http://schemas.openxmlformats.org/drawingml/2006/main">
-            <a:r>
-              <a:t/>
-            </a:r>
-          </a:p>
-          <a:p xmlns:a="http://schemas.openxmlformats.org/drawingml/2006/main">
-            <a:r>
-              <a:t>来源与边界：</a:t>
-            </a:r>
-          </a:p>
-          <a:p xmlns:a="http://schemas.openxmlformats.org/drawingml/2006/main">
-            <a:r>
-              <a:t>handout §二·2-3；Sandve et al. 2013（可复现追踪链）。</a:t>
-            </a:r>
-          </a:p>
-          <a:p xmlns:a="http://schemas.openxmlformats.org/drawingml/2006/main">
-            <a:r>
-              <a:t/>
-            </a:r>
-          </a:p>
-          <a:p xmlns:a="http://schemas.openxmlformats.org/drawingml/2006/main">
-            <a:r>
-              <a:t>---</a:t>
-            </a:r>
-          </a:p>
-          <a:p xmlns:a="http://schemas.openxmlformats.org/drawingml/2006/main">
-            <a:r>
-              <a:t/>
-            </a:r>
-          </a:p>
-          <a:p xmlns:a="http://schemas.openxmlformats.org/drawingml/2006/main">
-            <a:r>
-              <a:t>[Sources]</a:t>
-            </a:r>
-          </a:p>
-          <a:p xmlns:a="http://schemas.openxmlformats.org/drawingml/2006/main">
-            <a:r>
-              <a:t/>
-            </a:r>
-          </a:p>
-          <a:p xmlns:a="http://schemas.openxmlformats.org/drawingml/2006/main">
-            <a:r>
-              <a:t>- 本课 handout.md 与 slides.md</a:t>
-            </a:r>
-          </a:p>
-          <a:p xmlns:a="http://schemas.openxmlformats.org/drawingml/2006/main">
-            <a:r>
-              <a:t/>
-            </a:r>
-          </a:p>
-          <a:p xmlns:a="http://schemas.openxmlformats.org/drawingml/2006/main">
-            <a:r>
-              <a:t>- ../../course/reading-card-case.md</a:t>
-            </a:r>
-          </a:p>
-          <a:p xmlns:a="http://schemas.openxmlformats.org/drawingml/2006/main">
-            <a:r>
-              <a:t/>
+              <a:t>本课 handout.md、judgment-task.md；../../course/judgment-path.md。</a:t>
             </a:r>
           </a:p>
           <a:p xmlns:a="http://schemas.openxmlformats.org/drawingml/2006/main">
@@ -4657,7 +2707,12 @@
           </a:p>
           <a:p xmlns:a="http://schemas.openxmlformats.org/drawingml/2006/main">
             <a:r>
-              <a:t>讲义位置：本课讲义；见逐页母稿映射表</a:t>
+              <a:t>讲述与校准：</a:t>
+            </a:r>
+          </a:p>
+          <a:p xmlns:a="http://schemas.openxmlformats.org/drawingml/2006/main">
+            <a:r>
+              <a:t>固定指标不是"用什么指标"，而是"这个指标怎么算出来，且不可被工作流自身修改"。三个失败模式都是评价协议漂移的常见表现。判断指标是否被篡改：循环运行前后，指标定义文件、rubric 版本号、数据划分是否一致。任何不一致都应触发循环停止并人工审核。</a:t>
             </a:r>
           </a:p>
           <a:p xmlns:a="http://schemas.openxmlformats.org/drawingml/2006/main">
@@ -4667,12 +2722,12 @@
           </a:p>
           <a:p xmlns:a="http://schemas.openxmlformats.org/drawingml/2006/main">
             <a:r>
-              <a:t>屏显核对：</a:t>
-            </a:r>
-          </a:p>
-          <a:p xmlns:a="http://schemas.openxmlformats.org/drawingml/2006/main">
-            <a:r>
-              <a:t>指标定义在循环启动前冻结</a:t>
+              <a:t>学生动作：</a:t>
+            </a:r>
+          </a:p>
+          <a:p xmlns:a="http://schemas.openxmlformats.org/drawingml/2006/main">
+            <a:r>
+              <a:t>无。</a:t>
             </a:r>
           </a:p>
           <a:p xmlns:a="http://schemas.openxmlformats.org/drawingml/2006/main">
@@ -4682,7 +2737,7 @@
           </a:p>
           <a:p xmlns:a="http://schemas.openxmlformats.org/drawingml/2006/main">
             <a:r>
-              <a:t>课程虚构教学工件</a:t>
+              <a:t>课堂安排：按本稿下方 90 分钟教学路由安排；此页不另占独立时段。</a:t>
             </a:r>
           </a:p>
           <a:p xmlns:a="http://schemas.openxmlformats.org/drawingml/2006/main">
@@ -4692,7 +2747,12 @@
           </a:p>
           <a:p xmlns:a="http://schemas.openxmlformats.org/drawingml/2006/main">
             <a:r>
-              <a:t>- metric.yaml｜v1.2</a:t>
+              <a:t>[Sources]</a:t>
+            </a:r>
+          </a:p>
+          <a:p xmlns:a="http://schemas.openxmlformats.org/drawingml/2006/main">
+            <a:r>
+              <a:t>handout §三·1；第 9 课 §三·3 度量标准与标注协议。</a:t>
             </a:r>
           </a:p>
           <a:p xmlns:a="http://schemas.openxmlformats.org/drawingml/2006/main">
@@ -4702,177 +2762,7 @@
           </a:p>
           <a:p xmlns:a="http://schemas.openxmlformats.org/drawingml/2006/main">
             <a:r>
-              <a:t>- name: qualifying_condition_omission_rate</a:t>
-            </a:r>
-          </a:p>
-          <a:p xmlns:a="http://schemas.openxmlformats.org/drawingml/2006/main">
-            <a:r>
-              <a:t/>
-            </a:r>
-          </a:p>
-          <a:p xmlns:a="http://schemas.openxmlformats.org/drawingml/2006/main">
-            <a:r>
-              <a:t>- numerator: omitted_gold_conditions</a:t>
-            </a:r>
-          </a:p>
-          <a:p xmlns:a="http://schemas.openxmlformats.org/drawingml/2006/main">
-            <a:r>
-              <a:t/>
-            </a:r>
-          </a:p>
-          <a:p xmlns:a="http://schemas.openxmlformats.org/drawingml/2006/main">
-            <a:r>
-              <a:t>- denominator: gold_conditions</a:t>
-            </a:r>
-          </a:p>
-          <a:p xmlns:a="http://schemas.openxmlformats.org/drawingml/2006/main">
-            <a:r>
-              <a:t/>
-            </a:r>
-          </a:p>
-          <a:p xmlns:a="http://schemas.openxmlformats.org/drawingml/2006/main">
-            <a:r>
-              <a:t>- missing_output: count_as_omission</a:t>
-            </a:r>
-          </a:p>
-          <a:p xmlns:a="http://schemas.openxmlformats.org/drawingml/2006/main">
-            <a:r>
-              <a:t/>
-            </a:r>
-          </a:p>
-          <a:p xmlns:a="http://schemas.openxmlformats.org/drawingml/2006/main">
-            <a:r>
-              <a:t>- rubric: human_gold_v1.2</a:t>
-            </a:r>
-          </a:p>
-          <a:p xmlns:a="http://schemas.openxmlformats.org/drawingml/2006/main">
-            <a:r>
-              <a:t/>
-            </a:r>
-          </a:p>
-          <a:p xmlns:a="http://schemas.openxmlformats.org/drawingml/2006/main">
-            <a:r>
-              <a:t>- 运行期间不可写</a:t>
-            </a:r>
-          </a:p>
-          <a:p xmlns:a="http://schemas.openxmlformats.org/drawingml/2006/main">
-            <a:r>
-              <a:t/>
-            </a:r>
-          </a:p>
-          <a:p xmlns:a="http://schemas.openxmlformats.org/drawingml/2006/main">
-            <a:r>
-              <a:t>- × 不能换更容易的指标</a:t>
-            </a:r>
-          </a:p>
-          <a:p xmlns:a="http://schemas.openxmlformats.org/drawingml/2006/main">
-            <a:r>
-              <a:t/>
-            </a:r>
-          </a:p>
-          <a:p xmlns:a="http://schemas.openxmlformats.org/drawingml/2006/main">
-            <a:r>
-              <a:t>- × 不能删除失败样本</a:t>
-            </a:r>
-          </a:p>
-          <a:p xmlns:a="http://schemas.openxmlformats.org/drawingml/2006/main">
-            <a:r>
-              <a:t/>
-            </a:r>
-          </a:p>
-          <a:p xmlns:a="http://schemas.openxmlformats.org/drawingml/2006/main">
-            <a:r>
-              <a:t>- × 不能改变人工基准</a:t>
-            </a:r>
-          </a:p>
-          <a:p xmlns:a="http://schemas.openxmlformats.org/drawingml/2006/main">
-            <a:r>
-              <a:t/>
-            </a:r>
-          </a:p>
-          <a:p xmlns:a="http://schemas.openxmlformats.org/drawingml/2006/main">
-            <a:r>
-              <a:t>教师讲述：</a:t>
-            </a:r>
-          </a:p>
-          <a:p xmlns:a="http://schemas.openxmlformats.org/drawingml/2006/main">
-            <a:r>
-              <a:t>固定指标不是"用什么指标"，而是"这个指标怎么算出来，且不可被工作流自身修改"。三个失败模式都是评价协议漂移的常见表现。判断指标是否被篡改：循环运行前后，指标定义文件、rubric 版本号、数据划分是否一致。任何不一致都应触发循环停止并人工审核。</a:t>
-            </a:r>
-          </a:p>
-          <a:p xmlns:a="http://schemas.openxmlformats.org/drawingml/2006/main">
-            <a:r>
-              <a:t/>
-            </a:r>
-          </a:p>
-          <a:p xmlns:a="http://schemas.openxmlformats.org/drawingml/2006/main">
-            <a:r>
-              <a:t>学生动作：</a:t>
-            </a:r>
-          </a:p>
-          <a:p xmlns:a="http://schemas.openxmlformats.org/drawingml/2006/main">
-            <a:r>
-              <a:t>无。</a:t>
-            </a:r>
-          </a:p>
-          <a:p xmlns:a="http://schemas.openxmlformats.org/drawingml/2006/main">
-            <a:r>
-              <a:t/>
-            </a:r>
-          </a:p>
-          <a:p xmlns:a="http://schemas.openxmlformats.org/drawingml/2006/main">
-            <a:r>
-              <a:t>来源与边界：</a:t>
-            </a:r>
-          </a:p>
-          <a:p xmlns:a="http://schemas.openxmlformats.org/drawingml/2006/main">
-            <a:r>
-              <a:t>handout §三·1；第 9 课 §三·3 度量标准与标注协议。</a:t>
-            </a:r>
-          </a:p>
-          <a:p xmlns:a="http://schemas.openxmlformats.org/drawingml/2006/main">
-            <a:r>
-              <a:t/>
-            </a:r>
-          </a:p>
-          <a:p xmlns:a="http://schemas.openxmlformats.org/drawingml/2006/main">
-            <a:r>
-              <a:t>---</a:t>
-            </a:r>
-          </a:p>
-          <a:p xmlns:a="http://schemas.openxmlformats.org/drawingml/2006/main">
-            <a:r>
-              <a:t/>
-            </a:r>
-          </a:p>
-          <a:p xmlns:a="http://schemas.openxmlformats.org/drawingml/2006/main">
-            <a:r>
-              <a:t>[Sources]</a:t>
-            </a:r>
-          </a:p>
-          <a:p xmlns:a="http://schemas.openxmlformats.org/drawingml/2006/main">
-            <a:r>
-              <a:t/>
-            </a:r>
-          </a:p>
-          <a:p xmlns:a="http://schemas.openxmlformats.org/drawingml/2006/main">
-            <a:r>
-              <a:t>- 本课 handout.md 与 slides.md</a:t>
-            </a:r>
-          </a:p>
-          <a:p xmlns:a="http://schemas.openxmlformats.org/drawingml/2006/main">
-            <a:r>
-              <a:t/>
-            </a:r>
-          </a:p>
-          <a:p xmlns:a="http://schemas.openxmlformats.org/drawingml/2006/main">
-            <a:r>
-              <a:t>- ../../course/reading-card-case.md</a:t>
-            </a:r>
-          </a:p>
-          <a:p xmlns:a="http://schemas.openxmlformats.org/drawingml/2006/main">
-            <a:r>
-              <a:t/>
+              <a:t>本课 handout.md、judgment-task.md；../../course/judgment-path.md。</a:t>
             </a:r>
           </a:p>
           <a:p xmlns:a="http://schemas.openxmlformats.org/drawingml/2006/main">
@@ -4957,7 +2847,12 @@
           </a:p>
           <a:p xmlns:a="http://schemas.openxmlformats.org/drawingml/2006/main">
             <a:r>
-              <a:t>讲义位置：本课讲义；见逐页母稿映射表</a:t>
+              <a:t>讲述与校准：</a:t>
+            </a:r>
+          </a:p>
+          <a:p xmlns:a="http://schemas.openxmlformats.org/drawingml/2006/main">
+            <a:r>
+              <a:t>预算是预先写明的硬上限，而非"大概要花多久"。停止条件在第 9 课是"运行次数与停止规则"，本课扩展为三类触发器。协议性停止指循环本身出了问题（数据污染、配置错误、指标被修改），与结果是否有利无关。禁止的停止是"因为结果不利就停、因为结果有利就停"——这构成隐性 p-hacking。</a:t>
             </a:r>
           </a:p>
           <a:p xmlns:a="http://schemas.openxmlformats.org/drawingml/2006/main">
@@ -4967,12 +2862,12 @@
           </a:p>
           <a:p xmlns:a="http://schemas.openxmlformats.org/drawingml/2006/main">
             <a:r>
-              <a:t>屏显核对：</a:t>
-            </a:r>
-          </a:p>
-          <a:p xmlns:a="http://schemas.openxmlformats.org/drawingml/2006/main">
-            <a:r>
-              <a:t>预算与停止条件写进运行序列</a:t>
+              <a:t>学生动作：</a:t>
+            </a:r>
+          </a:p>
+          <a:p xmlns:a="http://schemas.openxmlformats.org/drawingml/2006/main">
+            <a:r>
+              <a:t>追问：你的循环如果"跑 100 次都没出现显著结果"，应该停还是继续？为什么？</a:t>
             </a:r>
           </a:p>
           <a:p xmlns:a="http://schemas.openxmlformats.org/drawingml/2006/main">
@@ -4982,7 +2877,7 @@
           </a:p>
           <a:p xmlns:a="http://schemas.openxmlformats.org/drawingml/2006/main">
             <a:r>
-              <a:t>- 启动</a:t>
+              <a:t>课堂安排：按本稿下方 90 分钟教学路由安排；此页不另占独立时段。</a:t>
             </a:r>
           </a:p>
           <a:p xmlns:a="http://schemas.openxmlformats.org/drawingml/2006/main">
@@ -4992,7 +2887,12 @@
           </a:p>
           <a:p xmlns:a="http://schemas.openxmlformats.org/drawingml/2006/main">
             <a:r>
-              <a:t>- 冻结承诺</a:t>
+              <a:t>[Sources]</a:t>
+            </a:r>
+          </a:p>
+          <a:p xmlns:a="http://schemas.openxmlformats.org/drawingml/2006/main">
+            <a:r>
+              <a:t>handout §三·2-3；第 9 课 §三·2 停止条件；第 1 课 §2.7 工作流何时停止。</a:t>
             </a:r>
           </a:p>
           <a:p xmlns:a="http://schemas.openxmlformats.org/drawingml/2006/main">
@@ -5002,177 +2902,7 @@
           </a:p>
           <a:p xmlns:a="http://schemas.openxmlformats.org/drawingml/2006/main">
             <a:r>
-              <a:t>- 预算 1/3</a:t>
-            </a:r>
-          </a:p>
-          <a:p xmlns:a="http://schemas.openxmlformats.org/drawingml/2006/main">
-            <a:r>
-              <a:t/>
-            </a:r>
-          </a:p>
-          <a:p xmlns:a="http://schemas.openxmlformats.org/drawingml/2006/main">
-            <a:r>
-              <a:t>- 调用 / token</a:t>
-            </a:r>
-          </a:p>
-          <a:p xmlns:a="http://schemas.openxmlformats.org/drawingml/2006/main">
-            <a:r>
-              <a:t/>
-            </a:r>
-          </a:p>
-          <a:p xmlns:a="http://schemas.openxmlformats.org/drawingml/2006/main">
-            <a:r>
-              <a:t>- 预算 2/3</a:t>
-            </a:r>
-          </a:p>
-          <a:p xmlns:a="http://schemas.openxmlformats.org/drawingml/2006/main">
-            <a:r>
-              <a:t/>
-            </a:r>
-          </a:p>
-          <a:p xmlns:a="http://schemas.openxmlformats.org/drawingml/2006/main">
-            <a:r>
-              <a:t>- 时间 / 运行数</a:t>
-            </a:r>
-          </a:p>
-          <a:p xmlns:a="http://schemas.openxmlformats.org/drawingml/2006/main">
-            <a:r>
-              <a:t/>
-            </a:r>
-          </a:p>
-          <a:p xmlns:a="http://schemas.openxmlformats.org/drawingml/2006/main">
-            <a:r>
-              <a:t>- 正常停止</a:t>
-            </a:r>
-          </a:p>
-          <a:p xmlns:a="http://schemas.openxmlformats.org/drawingml/2006/main">
-            <a:r>
-              <a:t/>
-            </a:r>
-          </a:p>
-          <a:p xmlns:a="http://schemas.openxmlformats.org/drawingml/2006/main">
-            <a:r>
-              <a:t>- 预算耗尽或队列完成</a:t>
-            </a:r>
-          </a:p>
-          <a:p xmlns:a="http://schemas.openxmlformats.org/drawingml/2006/main">
-            <a:r>
-              <a:t/>
-            </a:r>
-          </a:p>
-          <a:p xmlns:a="http://schemas.openxmlformats.org/drawingml/2006/main">
-            <a:r>
-              <a:t>- 协议性停止</a:t>
-            </a:r>
-          </a:p>
-          <a:p xmlns:a="http://schemas.openxmlformats.org/drawingml/2006/main">
-            <a:r>
-              <a:t/>
-            </a:r>
-          </a:p>
-          <a:p xmlns:a="http://schemas.openxmlformats.org/drawingml/2006/main">
-            <a:r>
-              <a:t>- 指标漂移 / 越权 / 数据异常</a:t>
-            </a:r>
-          </a:p>
-          <a:p xmlns:a="http://schemas.openxmlformats.org/drawingml/2006/main">
-            <a:r>
-              <a:t/>
-            </a:r>
-          </a:p>
-          <a:p xmlns:a="http://schemas.openxmlformats.org/drawingml/2006/main">
-            <a:r>
-              <a:t>- 禁止按结果好坏停止；越权、协议变更或删日志须立即停并记录</a:t>
-            </a:r>
-          </a:p>
-          <a:p xmlns:a="http://schemas.openxmlformats.org/drawingml/2006/main">
-            <a:r>
-              <a:t/>
-            </a:r>
-          </a:p>
-          <a:p xmlns:a="http://schemas.openxmlformats.org/drawingml/2006/main">
-            <a:r>
-              <a:t>教师讲述：</a:t>
-            </a:r>
-          </a:p>
-          <a:p xmlns:a="http://schemas.openxmlformats.org/drawingml/2006/main">
-            <a:r>
-              <a:t>预算是预先写明的硬上限，而非"大概要花多久"。停止条件在第 9 课是"运行次数与停止规则"，本课扩展为三类触发器。协议性停止指循环本身出了问题（数据污染、配置错误、指标被修改），与结果是否有利无关。禁止的停止是"因为结果不利就停、因为结果有利就停"——这构成隐性 p-hacking。</a:t>
-            </a:r>
-          </a:p>
-          <a:p xmlns:a="http://schemas.openxmlformats.org/drawingml/2006/main">
-            <a:r>
-              <a:t/>
-            </a:r>
-          </a:p>
-          <a:p xmlns:a="http://schemas.openxmlformats.org/drawingml/2006/main">
-            <a:r>
-              <a:t>学生动作：</a:t>
-            </a:r>
-          </a:p>
-          <a:p xmlns:a="http://schemas.openxmlformats.org/drawingml/2006/main">
-            <a:r>
-              <a:t>追问：你的循环如果"跑 100 次都没出现显著结果"，应该停还是继续？为什么？</a:t>
-            </a:r>
-          </a:p>
-          <a:p xmlns:a="http://schemas.openxmlformats.org/drawingml/2006/main">
-            <a:r>
-              <a:t/>
-            </a:r>
-          </a:p>
-          <a:p xmlns:a="http://schemas.openxmlformats.org/drawingml/2006/main">
-            <a:r>
-              <a:t>来源与边界：</a:t>
-            </a:r>
-          </a:p>
-          <a:p xmlns:a="http://schemas.openxmlformats.org/drawingml/2006/main">
-            <a:r>
-              <a:t>handout §三·2-3；第 9 课 §三·2 停止条件；第 1 课 §2.7 工作流何时停止。</a:t>
-            </a:r>
-          </a:p>
-          <a:p xmlns:a="http://schemas.openxmlformats.org/drawingml/2006/main">
-            <a:r>
-              <a:t/>
-            </a:r>
-          </a:p>
-          <a:p xmlns:a="http://schemas.openxmlformats.org/drawingml/2006/main">
-            <a:r>
-              <a:t>---</a:t>
-            </a:r>
-          </a:p>
-          <a:p xmlns:a="http://schemas.openxmlformats.org/drawingml/2006/main">
-            <a:r>
-              <a:t/>
-            </a:r>
-          </a:p>
-          <a:p xmlns:a="http://schemas.openxmlformats.org/drawingml/2006/main">
-            <a:r>
-              <a:t>[Sources]</a:t>
-            </a:r>
-          </a:p>
-          <a:p xmlns:a="http://schemas.openxmlformats.org/drawingml/2006/main">
-            <a:r>
-              <a:t/>
-            </a:r>
-          </a:p>
-          <a:p xmlns:a="http://schemas.openxmlformats.org/drawingml/2006/main">
-            <a:r>
-              <a:t>- 本课 handout.md 与 slides.md</a:t>
-            </a:r>
-          </a:p>
-          <a:p xmlns:a="http://schemas.openxmlformats.org/drawingml/2006/main">
-            <a:r>
-              <a:t/>
-            </a:r>
-          </a:p>
-          <a:p xmlns:a="http://schemas.openxmlformats.org/drawingml/2006/main">
-            <a:r>
-              <a:t>- ../../course/reading-card-case.md</a:t>
-            </a:r>
-          </a:p>
-          <a:p xmlns:a="http://schemas.openxmlformats.org/drawingml/2006/main">
-            <a:r>
-              <a:t/>
+              <a:t>本课 handout.md、judgment-task.md；../../course/judgment-path.md。</a:t>
             </a:r>
           </a:p>
           <a:p xmlns:a="http://schemas.openxmlformats.org/drawingml/2006/main">
@@ -5257,7 +2987,12 @@
           </a:p>
           <a:p xmlns:a="http://schemas.openxmlformats.org/drawingml/2006/main">
             <a:r>
-              <a:t>讲义位置：本课讲义；见逐页母稿映射表</a:t>
+              <a:t>讲述与校准：</a:t>
+            </a:r>
+          </a:p>
+          <a:p xmlns:a="http://schemas.openxmlformats.org/drawingml/2006/main">
+            <a:r>
+              <a:t>回退机制是循环在失败或停止后的处理路径。关键区分：回退到"最近一次通过人工审核的配置"，不是"上一次看起来不错的配置"——这两者经常被混淆。回退后失败迭代必须保留，并触发研究判断的修订。回退默认需要人工确认，因为回退通常意味着循环未按预期推进。</a:t>
             </a:r>
           </a:p>
           <a:p xmlns:a="http://schemas.openxmlformats.org/drawingml/2006/main">
@@ -5267,12 +3002,12 @@
           </a:p>
           <a:p xmlns:a="http://schemas.openxmlformats.org/drawingml/2006/main">
             <a:r>
-              <a:t>屏显核对：</a:t>
-            </a:r>
-          </a:p>
-          <a:p xmlns:a="http://schemas.openxmlformats.org/drawingml/2006/main">
-            <a:r>
-              <a:t>回退到稳定配置，同时保留失败</a:t>
+              <a:t>学生动作：</a:t>
+            </a:r>
+          </a:p>
+          <a:p xmlns:a="http://schemas.openxmlformats.org/drawingml/2006/main">
+            <a:r>
+              <a:t>无。</a:t>
             </a:r>
           </a:p>
           <a:p xmlns:a="http://schemas.openxmlformats.org/drawingml/2006/main">
@@ -5282,7 +3017,7 @@
           </a:p>
           <a:p xmlns:a="http://schemas.openxmlformats.org/drawingml/2006/main">
             <a:r>
-              <a:t>- stable-config</a:t>
+              <a:t>课堂安排：按本稿下方 90 分钟教学路由安排；此页不另占独立时段。</a:t>
             </a:r>
           </a:p>
           <a:p xmlns:a="http://schemas.openxmlformats.org/drawingml/2006/main">
@@ -5292,7 +3027,12 @@
           </a:p>
           <a:p xmlns:a="http://schemas.openxmlformats.org/drawingml/2006/main">
             <a:r>
-              <a:t>- 冻结基线</a:t>
+              <a:t>[Sources]</a:t>
+            </a:r>
+          </a:p>
+          <a:p xmlns:a="http://schemas.openxmlformats.org/drawingml/2006/main">
+            <a:r>
+              <a:t>handout §三·4；第 9 课 §三·4 失败预案。</a:t>
             </a:r>
           </a:p>
           <a:p xmlns:a="http://schemas.openxmlformats.org/drawingml/2006/main">
@@ -5302,157 +3042,7 @@
           </a:p>
           <a:p xmlns:a="http://schemas.openxmlformats.org/drawingml/2006/main">
             <a:r>
-              <a:t>- candidate-run</a:t>
-            </a:r>
-          </a:p>
-          <a:p xmlns:a="http://schemas.openxmlformats.org/drawingml/2006/main">
-            <a:r>
-              <a:t/>
-            </a:r>
-          </a:p>
-          <a:p xmlns:a="http://schemas.openxmlformats.org/drawingml/2006/main">
-            <a:r>
-              <a:t>- 保持同一指标</a:t>
-            </a:r>
-          </a:p>
-          <a:p xmlns:a="http://schemas.openxmlformats.org/drawingml/2006/main">
-            <a:r>
-              <a:t/>
-            </a:r>
-          </a:p>
-          <a:p xmlns:a="http://schemas.openxmlformats.org/drawingml/2006/main">
-            <a:r>
-              <a:t>- 失败</a:t>
-            </a:r>
-          </a:p>
-          <a:p xmlns:a="http://schemas.openxmlformats.org/drawingml/2006/main">
-            <a:r>
-              <a:t/>
-            </a:r>
-          </a:p>
-          <a:p xmlns:a="http://schemas.openxmlformats.org/drawingml/2006/main">
-            <a:r>
-              <a:t>- 保留 run ID / 日志</a:t>
-            </a:r>
-          </a:p>
-          <a:p xmlns:a="http://schemas.openxmlformats.org/drawingml/2006/main">
-            <a:r>
-              <a:t/>
-            </a:r>
-          </a:p>
-          <a:p xmlns:a="http://schemas.openxmlformats.org/drawingml/2006/main">
-            <a:r>
-              <a:t>- rollback pointer</a:t>
-            </a:r>
-          </a:p>
-          <a:p xmlns:a="http://schemas.openxmlformats.org/drawingml/2006/main">
-            <a:r>
-              <a:t/>
-            </a:r>
-          </a:p>
-          <a:p xmlns:a="http://schemas.openxmlformats.org/drawingml/2006/main">
-            <a:r>
-              <a:t>- 回到稳定版本</a:t>
-            </a:r>
-          </a:p>
-          <a:p xmlns:a="http://schemas.openxmlformats.org/drawingml/2006/main">
-            <a:r>
-              <a:t/>
-            </a:r>
-          </a:p>
-          <a:p xmlns:a="http://schemas.openxmlformats.org/drawingml/2006/main">
-            <a:r>
-              <a:t>- 回退不等于“重跑到成功”或删除失败。</a:t>
-            </a:r>
-          </a:p>
-          <a:p xmlns:a="http://schemas.openxmlformats.org/drawingml/2006/main">
-            <a:r>
-              <a:t/>
-            </a:r>
-          </a:p>
-          <a:p xmlns:a="http://schemas.openxmlformats.org/drawingml/2006/main">
-            <a:r>
-              <a:t>教师讲述：</a:t>
-            </a:r>
-          </a:p>
-          <a:p xmlns:a="http://schemas.openxmlformats.org/drawingml/2006/main">
-            <a:r>
-              <a:t>回退机制是循环在失败或停止后的处理路径。关键区分：回退到"最近一次通过人工审核的配置"，不是"上一次看起来不错的配置"——这两者经常被混淆。回退后失败迭代必须保留，并触发研究判断的修订。回退默认需要人工确认，因为回退通常意味着循环未按预期推进。</a:t>
-            </a:r>
-          </a:p>
-          <a:p xmlns:a="http://schemas.openxmlformats.org/drawingml/2006/main">
-            <a:r>
-              <a:t/>
-            </a:r>
-          </a:p>
-          <a:p xmlns:a="http://schemas.openxmlformats.org/drawingml/2006/main">
-            <a:r>
-              <a:t>学生动作：</a:t>
-            </a:r>
-          </a:p>
-          <a:p xmlns:a="http://schemas.openxmlformats.org/drawingml/2006/main">
-            <a:r>
-              <a:t>无。</a:t>
-            </a:r>
-          </a:p>
-          <a:p xmlns:a="http://schemas.openxmlformats.org/drawingml/2006/main">
-            <a:r>
-              <a:t/>
-            </a:r>
-          </a:p>
-          <a:p xmlns:a="http://schemas.openxmlformats.org/drawingml/2006/main">
-            <a:r>
-              <a:t>来源与边界：</a:t>
-            </a:r>
-          </a:p>
-          <a:p xmlns:a="http://schemas.openxmlformats.org/drawingml/2006/main">
-            <a:r>
-              <a:t>handout §三·4；第 9 课 §三·4 失败预案。</a:t>
-            </a:r>
-          </a:p>
-          <a:p xmlns:a="http://schemas.openxmlformats.org/drawingml/2006/main">
-            <a:r>
-              <a:t/>
-            </a:r>
-          </a:p>
-          <a:p xmlns:a="http://schemas.openxmlformats.org/drawingml/2006/main">
-            <a:r>
-              <a:t>---</a:t>
-            </a:r>
-          </a:p>
-          <a:p xmlns:a="http://schemas.openxmlformats.org/drawingml/2006/main">
-            <a:r>
-              <a:t/>
-            </a:r>
-          </a:p>
-          <a:p xmlns:a="http://schemas.openxmlformats.org/drawingml/2006/main">
-            <a:r>
-              <a:t>[Sources]</a:t>
-            </a:r>
-          </a:p>
-          <a:p xmlns:a="http://schemas.openxmlformats.org/drawingml/2006/main">
-            <a:r>
-              <a:t/>
-            </a:r>
-          </a:p>
-          <a:p xmlns:a="http://schemas.openxmlformats.org/drawingml/2006/main">
-            <a:r>
-              <a:t>- 本课 handout.md 与 slides.md</a:t>
-            </a:r>
-          </a:p>
-          <a:p xmlns:a="http://schemas.openxmlformats.org/drawingml/2006/main">
-            <a:r>
-              <a:t/>
-            </a:r>
-          </a:p>
-          <a:p xmlns:a="http://schemas.openxmlformats.org/drawingml/2006/main">
-            <a:r>
-              <a:t>- ../../course/reading-card-case.md</a:t>
-            </a:r>
-          </a:p>
-          <a:p xmlns:a="http://schemas.openxmlformats.org/drawingml/2006/main">
-            <a:r>
-              <a:t/>
+              <a:t>本课 handout.md、judgment-task.md；../../course/judgment-path.md。</a:t>
             </a:r>
           </a:p>
           <a:p xmlns:a="http://schemas.openxmlformats.org/drawingml/2006/main">
@@ -5537,7 +3127,12 @@
           </a:p>
           <a:p xmlns:a="http://schemas.openxmlformats.org/drawingml/2006/main">
             <a:r>
-              <a:t>讲义位置：本课讲义；见逐页母稿映射表</a:t>
+              <a:t>讲述与校准：</a:t>
+            </a:r>
+          </a:p>
+          <a:p xmlns:a="http://schemas.openxmlformats.org/drawingml/2006/main">
+            <a:r>
+              <a:t>日志中的 auto-switch rubric 是协议漂移的直接证据。停止并拒绝的是协议改动或无效候选，失败日志必须保留；结果不支持本身仍是有效结果，不触发删除、换指标或结果导向停止。0.34 与 0.19 均为教学虚构值，不可作研究结论。</a:t>
             </a:r>
           </a:p>
           <a:p xmlns:a="http://schemas.openxmlformats.org/drawingml/2006/main">
@@ -5547,12 +3142,12 @@
           </a:p>
           <a:p xmlns:a="http://schemas.openxmlformats.org/drawingml/2006/main">
             <a:r>
-              <a:t>屏显核对：</a:t>
-            </a:r>
-          </a:p>
-          <a:p xmlns:a="http://schemas.openxmlformats.org/drawingml/2006/main">
-            <a:r>
-              <a:t>评价协议漂移会让循环失去可比性</a:t>
+              <a:t>学生动作：</a:t>
+            </a:r>
+          </a:p>
+          <a:p xmlns:a="http://schemas.openxmlformats.org/drawingml/2006/main">
+            <a:r>
+              <a:t>让学生指出日志中哪一行暴露了问题。追问：若只看较低的最终分数，是否能发现协议已改变？</a:t>
             </a:r>
           </a:p>
           <a:p xmlns:a="http://schemas.openxmlformats.org/drawingml/2006/main">
@@ -5562,7 +3157,7 @@
           </a:p>
           <a:p xmlns:a="http://schemas.openxmlformats.org/drawingml/2006/main">
             <a:r>
-              <a:t>- run-017.log｜虚构记录</a:t>
+              <a:t>课堂安排：按本稿下方 90 分钟教学路由安排；此页不另占独立时段。</a:t>
             </a:r>
           </a:p>
           <a:p xmlns:a="http://schemas.openxmlformats.org/drawingml/2006/main">
@@ -5572,7 +3167,12 @@
           </a:p>
           <a:p xmlns:a="http://schemas.openxmlformats.org/drawingml/2006/main">
             <a:r>
-              <a:t>- metric_version = human_gold_v1.2</a:t>
+              <a:t>[Sources]</a:t>
+            </a:r>
+          </a:p>
+          <a:p xmlns:a="http://schemas.openxmlformats.org/drawingml/2006/main">
+            <a:r>
+              <a:t>handout §三·1；第 9 课 §三·3 度量标准。</a:t>
             </a:r>
           </a:p>
           <a:p xmlns:a="http://schemas.openxmlformats.org/drawingml/2006/main">
@@ -5582,137 +3182,7 @@
           </a:p>
           <a:p xmlns:a="http://schemas.openxmlformats.org/drawingml/2006/main">
             <a:r>
-              <a:t>- score = 0.34</a:t>
-            </a:r>
-          </a:p>
-          <a:p xmlns:a="http://schemas.openxmlformats.org/drawingml/2006/main">
-            <a:r>
-              <a:t/>
-            </a:r>
-          </a:p>
-          <a:p xmlns:a="http://schemas.openxmlformats.org/drawingml/2006/main">
-            <a:r>
-              <a:t>- ! auto-switch rubric -&gt; easy-v2</a:t>
-            </a:r>
-          </a:p>
-          <a:p xmlns:a="http://schemas.openxmlformats.org/drawingml/2006/main">
-            <a:r>
-              <a:t/>
-            </a:r>
-          </a:p>
-          <a:p xmlns:a="http://schemas.openxmlformats.org/drawingml/2006/main">
-            <a:r>
-              <a:t>- score = 0.19</a:t>
-            </a:r>
-          </a:p>
-          <a:p xmlns:a="http://schemas.openxmlformats.org/drawingml/2006/main">
-            <a:r>
-              <a:t/>
-            </a:r>
-          </a:p>
-          <a:p xmlns:a="http://schemas.openxmlformats.org/drawingml/2006/main">
-            <a:r>
-              <a:t>- decision = DISCARD_PROTOCOL_CHANGE</a:t>
-            </a:r>
-          </a:p>
-          <a:p xmlns:a="http://schemas.openxmlformats.org/drawingml/2006/main">
-            <a:r>
-              <a:t/>
-            </a:r>
-          </a:p>
-          <a:p xmlns:a="http://schemas.openxmlformats.org/drawingml/2006/main">
-            <a:r>
-              <a:t>- 处置：Discard / 回到冻结协议 / 保留本次失败</a:t>
-            </a:r>
-          </a:p>
-          <a:p xmlns:a="http://schemas.openxmlformats.org/drawingml/2006/main">
-            <a:r>
-              <a:t/>
-            </a:r>
-          </a:p>
-          <a:p xmlns:a="http://schemas.openxmlformats.org/drawingml/2006/main">
-            <a:r>
-              <a:t>教师讲述：</a:t>
-            </a:r>
-          </a:p>
-          <a:p xmlns:a="http://schemas.openxmlformats.org/drawingml/2006/main">
-            <a:r>
-              <a:t>日志中的 auto-switch rubric 是协议漂移的直接证据。停止并拒绝的是协议改动或无效候选，失败日志必须保留；结果不支持本身仍是有效结果，不触发删除、换指标或结果导向停止。0.34 与 0.19 均为教学虚构值，不可作研究结论。</a:t>
-            </a:r>
-          </a:p>
-          <a:p xmlns:a="http://schemas.openxmlformats.org/drawingml/2006/main">
-            <a:r>
-              <a:t/>
-            </a:r>
-          </a:p>
-          <a:p xmlns:a="http://schemas.openxmlformats.org/drawingml/2006/main">
-            <a:r>
-              <a:t>学生动作：</a:t>
-            </a:r>
-          </a:p>
-          <a:p xmlns:a="http://schemas.openxmlformats.org/drawingml/2006/main">
-            <a:r>
-              <a:t>让学生指出日志中哪一行暴露了问题。追问：若只看较低的最终分数，是否能发现协议已改变？</a:t>
-            </a:r>
-          </a:p>
-          <a:p xmlns:a="http://schemas.openxmlformats.org/drawingml/2006/main">
-            <a:r>
-              <a:t/>
-            </a:r>
-          </a:p>
-          <a:p xmlns:a="http://schemas.openxmlformats.org/drawingml/2006/main">
-            <a:r>
-              <a:t>来源与边界：</a:t>
-            </a:r>
-          </a:p>
-          <a:p xmlns:a="http://schemas.openxmlformats.org/drawingml/2006/main">
-            <a:r>
-              <a:t>handout §三·1；第 9 课 §三·3 度量标准。</a:t>
-            </a:r>
-          </a:p>
-          <a:p xmlns:a="http://schemas.openxmlformats.org/drawingml/2006/main">
-            <a:r>
-              <a:t/>
-            </a:r>
-          </a:p>
-          <a:p xmlns:a="http://schemas.openxmlformats.org/drawingml/2006/main">
-            <a:r>
-              <a:t>---</a:t>
-            </a:r>
-          </a:p>
-          <a:p xmlns:a="http://schemas.openxmlformats.org/drawingml/2006/main">
-            <a:r>
-              <a:t/>
-            </a:r>
-          </a:p>
-          <a:p xmlns:a="http://schemas.openxmlformats.org/drawingml/2006/main">
-            <a:r>
-              <a:t>[Sources]</a:t>
-            </a:r>
-          </a:p>
-          <a:p xmlns:a="http://schemas.openxmlformats.org/drawingml/2006/main">
-            <a:r>
-              <a:t/>
-            </a:r>
-          </a:p>
-          <a:p xmlns:a="http://schemas.openxmlformats.org/drawingml/2006/main">
-            <a:r>
-              <a:t>- 本课 handout.md 与 slides.md</a:t>
-            </a:r>
-          </a:p>
-          <a:p xmlns:a="http://schemas.openxmlformats.org/drawingml/2006/main">
-            <a:r>
-              <a:t/>
-            </a:r>
-          </a:p>
-          <a:p xmlns:a="http://schemas.openxmlformats.org/drawingml/2006/main">
-            <a:r>
-              <a:t>- ../../course/reading-card-case.md</a:t>
-            </a:r>
-          </a:p>
-          <a:p xmlns:a="http://schemas.openxmlformats.org/drawingml/2006/main">
-            <a:r>
-              <a:t/>
+              <a:t>本课 handout.md、judgment-task.md；../../course/judgment-path.md。</a:t>
             </a:r>
           </a:p>
           <a:p xmlns:a="http://schemas.openxmlformats.org/drawingml/2006/main">
@@ -9445,7 +6915,7 @@
                 <a:ea typeface="微软雅黑"/>
                 <a:cs typeface="微软雅黑"/>
               </a:rPr>
-              <a:t>八维比较的主轴是人工判断</a:t>
+              <a:t>固定协议下，选优分数仍会乐观</a:t>
             </a:r>
             <a:endParaRPr/>
           </a:p>
@@ -9585,7 +7055,7 @@
                 <a:ea typeface="微软雅黑"/>
                 <a:cs typeface="微软雅黑"/>
               </a:rPr>
-              <a:t>八维比较的主轴是人工判断</a:t>
+              <a:t>固定协议下，选优分数仍会乐观</a:t>
             </a:r>
           </a:p>
         </p:txBody>
@@ -9644,7 +7114,7 @@
                 <a:ea typeface="微软雅黑"/>
                 <a:cs typeface="微软雅黑"/>
               </a:rPr>
-              <a:t>来源：Lu et al., 2026；课程八维分析框架详见 speaker notes</a:t>
+              <a:t>来源：RSI 合成环境实际 CPU 运行；配置与记录见 notes</a:t>
             </a:r>
           </a:p>
         </p:txBody>
@@ -9703,7 +7173,7 @@
                 <a:ea typeface="微软雅黑"/>
                 <a:cs typeface="微软雅黑"/>
               </a:rPr>
-              <a:t>任务契约</a:t>
+              <a:t>候选真值</a:t>
             </a:r>
           </a:p>
         </p:txBody>
@@ -9762,7 +7232,7 @@
                 <a:ea typeface="微软雅黑"/>
                 <a:cs typeface="微软雅黑"/>
               </a:rPr>
-              <a:t>目标能否预先固定？</a:t>
+              <a:t>全部 0.65（合成）</a:t>
             </a:r>
           </a:p>
         </p:txBody>
@@ -9851,7 +7321,7 @@
                 <a:ea typeface="微软雅黑"/>
                 <a:cs typeface="微软雅黑"/>
               </a:rPr>
-              <a:t>Context / 状态</a:t>
+              <a:t>历史预算</a:t>
             </a:r>
           </a:p>
         </p:txBody>
@@ -9910,7 +7380,7 @@
                 <a:ea typeface="微软雅黑"/>
                 <a:cs typeface="微软雅黑"/>
               </a:rPr>
-              <a:t>输入与中间工件能否追溯？</a:t>
+              <a:t>每候选 32 次</a:t>
             </a:r>
           </a:p>
         </p:txBody>
@@ -9999,7 +7469,7 @@
                 <a:ea typeface="微软雅黑"/>
                 <a:cs typeface="微软雅黑"/>
               </a:rPr>
-              <a:t>工具与权限</a:t>
+              <a:t>候选数 K</a:t>
             </a:r>
           </a:p>
         </p:txBody>
@@ -10058,7 +7528,7 @@
                 <a:ea typeface="微软雅黑"/>
                 <a:cs typeface="微软雅黑"/>
               </a:rPr>
-              <a:t>哪些外部动作必须确认？</a:t>
+              <a:t>1 → 4 → 16 → 64</a:t>
             </a:r>
           </a:p>
         </p:txBody>
@@ -10147,7 +7617,7 @@
                 <a:ea typeface="微软雅黑"/>
                 <a:cs typeface="微软雅黑"/>
               </a:rPr>
-              <a:t>执行与追踪</a:t>
+              <a:t>乐观偏差</a:t>
             </a:r>
           </a:p>
         </p:txBody>
@@ -10206,7 +7676,7 @@
                 <a:ea typeface="微软雅黑"/>
                 <a:cs typeface="微软雅黑"/>
               </a:rPr>
-              <a:t>失败是否完整保留？</a:t>
+              <a:t>0.0006 → 0.0828 → 0.1410 → 0.1882</a:t>
             </a:r>
           </a:p>
         </p:txBody>
@@ -10295,7 +7765,7 @@
                 <a:ea typeface="微软雅黑"/>
                 <a:cs typeface="微软雅黑"/>
               </a:rPr>
-              <a:t>Evals</a:t>
+              <a:t>独立最终</a:t>
             </a:r>
           </a:p>
         </p:txBody>
@@ -10354,7 +7824,7 @@
                 <a:ea typeface="微软雅黑"/>
                 <a:cs typeface="微软雅黑"/>
               </a:rPr>
-              <a:t>评价器是否独立？</a:t>
+              <a:t>K=64：0.6508 [0.6491, 0.6525]</a:t>
             </a:r>
           </a:p>
         </p:txBody>
@@ -10443,7 +7913,7 @@
                 <a:ea typeface="微软雅黑"/>
                 <a:cs typeface="微软雅黑"/>
               </a:rPr>
-              <a:t>人工判断</a:t>
+              <a:t>研究判断</a:t>
             </a:r>
           </a:p>
         </p:txBody>
@@ -10502,7 +7972,7 @@
                 <a:ea typeface="微软雅黑"/>
                 <a:cs typeface="微软雅黑"/>
               </a:rPr>
-              <a:t>方法、证据与结论由谁决定？</a:t>
+              <a:t>分数乐观；真实选择损失为零</a:t>
             </a:r>
           </a:p>
         </p:txBody>
@@ -12514,7 +9984,7 @@
                 <a:ea typeface="微软雅黑"/>
                 <a:cs typeface="微软雅黑"/>
               </a:rPr>
-              <a:t>共同约束：指标、预算、停止、失败保留；冻结队列不做方法优化。</a:t>
+              <a:t>共同约束：指标、预算、停止、失败保留；选优另需独立最终评价。</a:t>
             </a:r>
           </a:p>
         </p:txBody>
@@ -12543,35 +10013,55 @@
       </p:grpSpPr>
       <p:sp>
         <p:nvSpPr>
-          <p:cNvPr id="4" name="Text Placeholder 3">
-            <a:extLst xmlns:a="http://schemas.openxmlformats.org/drawingml/2006/main">
-              <a:ext uri="{FF2B5EF4-FFF2-40B4-BE49-F238E27FC236}">
-                <a16:creationId xmlns:a16="http://schemas.microsoft.com/office/drawing/2014/main" id="{4D941B40-7A0A-534E-3563-CA11753C8E3F}"/>
-              </a:ext>
-            </a:extLst>
-          </p:cNvPr>
-          <p:cNvSpPr>
-            <a:spLocks xmlns:a="http://schemas.openxmlformats.org/drawingml/2006/main" noGrp="1"/>
-          </p:cNvSpPr>
-          <p:nvPr>
-            <p:ph type="body" idx="14"/>
-          </p:nvPr>
-        </p:nvSpPr>
-        <p:spPr>
-          <a:xfrm xmlns:a="http://schemas.openxmlformats.org/drawingml/2006/main">
-            <a:off x="1028700" y="57150"/>
-            <a:ext cx="10668000" cy="571500"/>
-          </a:xfrm>
-        </p:spPr>
-        <p:txBody>
-          <a:bodyPr xmlns:a="http://schemas.openxmlformats.org/drawingml/2006/main" lIns="0" tIns="0" rIns="0" bIns="0" anchor="ctr"/>
-          <a:lstStyle xmlns:a="http://schemas.openxmlformats.org/drawingml/2006/main"/>
+          <p:cNvPr id="7" name="judgment-title">
+            <a:extLst xmlns:a="http://schemas.openxmlformats.org/drawingml/2006/main">
+              <a:ext uri="{FF2B5EF4-FFF2-40B4-BE49-F238E27FC236}">
+                <a16:creationId xmlns:a16="http://schemas.microsoft.com/office/drawing/2014/main" id="{9902218B-D177-4706-BC8E-8466A776647E}"/>
+              </a:ext>
+            </a:extLst>
+          </p:cNvPr>
+          <p:cNvSpPr>
+            <a:spLocks xmlns:a="http://schemas.openxmlformats.org/drawingml/2006/main" noGrp="1"/>
+          </p:cNvSpPr>
+          <p:nvPr/>
+        </p:nvSpPr>
+        <p:spPr>
+          <a:xfrm xmlns:a="http://schemas.openxmlformats.org/drawingml/2006/main">
+            <a:off x="1028700" y="76200"/>
+            <a:ext cx="10687050" cy="514350"/>
+          </a:xfrm>
+          <a:prstGeom xmlns:a="http://schemas.openxmlformats.org/drawingml/2006/main" prst="rect">
+            <a:avLst/>
+          </a:prstGeom>
+          <a:noFill xmlns:a="http://schemas.openxmlformats.org/drawingml/2006/main"/>
+          <a:ln xmlns:a="http://schemas.openxmlformats.org/drawingml/2006/main" w="0">
+            <a:noFill/>
+          </a:ln>
+        </p:spPr>
+        <p:txBody>
+          <a:bodyPr xmlns:a="http://schemas.openxmlformats.org/drawingml/2006/main" lIns="0" tIns="0" rIns="0" bIns="0" anchor="t"/>
+          <a:lstStyle xmlns:a="http://schemas.openxmlformats.org/drawingml/2006/main">
+            <a:defPPr algn="l">
+              <a:defRPr sz="3000" b="1">
+                <a:solidFill>
+                  <a:srgbClr val="FFFFFF"/>
+                </a:solidFill>
+                <a:latin typeface="微软雅黑"/>
+                <a:ea typeface="微软雅黑"/>
+                <a:cs typeface="微软雅黑"/>
+              </a:defRPr>
+            </a:defPPr>
+          </a:lstStyle>
           <a:p xmlns:a="http://schemas.openxmlformats.org/drawingml/2006/main">
             <a:pPr algn="l">
-              <a:lnSpc>
-                <a:spcPct val="118000"/>
-              </a:lnSpc>
-              <a:buNone/>
+              <a:defRPr sz="3000" b="1">
+                <a:solidFill>
+                  <a:srgbClr val="FFFFFF"/>
+                </a:solidFill>
+                <a:latin typeface="微软雅黑"/>
+                <a:ea typeface="微软雅黑"/>
+                <a:cs typeface="微软雅黑"/>
+              </a:defRPr>
             </a:pPr>
             <a:r>
               <a:rPr sz="3000" b="1">
@@ -12582,978 +10072,337 @@
                 <a:ea typeface="微软雅黑"/>
                 <a:cs typeface="微软雅黑"/>
               </a:rPr>
-              <a:t>把可重复动作改写为受限循环</a:t>
-            </a:r>
-            <a:endParaRPr/>
-          </a:p>
-        </p:txBody>
-      </p:sp>
-      <p:sp>
-        <p:nvSpPr>
-          <p:cNvPr id="5" name="Slide Number Placeholder 4">
-            <a:extLst xmlns:a="http://schemas.openxmlformats.org/drawingml/2006/main">
-              <a:ext uri="{FF2B5EF4-FFF2-40B4-BE49-F238E27FC236}">
-                <a16:creationId xmlns:a16="http://schemas.microsoft.com/office/drawing/2014/main" id="{EBA5909F-738E-F60C-BE8C-B3F1D94548E5}"/>
-              </a:ext>
-            </a:extLst>
-          </p:cNvPr>
-          <p:cNvSpPr>
-            <a:spLocks xmlns:a="http://schemas.openxmlformats.org/drawingml/2006/main" noGrp="1"/>
-          </p:cNvSpPr>
-          <p:nvPr>
-            <p:ph type="sldNum" idx="10"/>
-          </p:nvPr>
-        </p:nvSpPr>
-        <p:spPr/>
-        <p:txBody>
-          <a:bodyPr xmlns:a="http://schemas.openxmlformats.org/drawingml/2006/main"/>
-          <a:lstStyle xmlns:a="http://schemas.openxmlformats.org/drawingml/2006/main"/>
-          <a:p xmlns:a="http://schemas.openxmlformats.org/drawingml/2006/main">
-            <a:fld id="{DC9C7607-4BA3-B4DC-A00F-2E67A9FCFF7E}" type="slidenum">
+              <a:t>本人项目：决定、核验与回写</a:t>
+            </a:r>
+          </a:p>
+        </p:txBody>
+      </p:sp>
+      <p:sp>
+        <p:nvSpPr>
+          <p:cNvPr id="2" name="judgment-body-0">
+            <a:extLst xmlns:a="http://schemas.openxmlformats.org/drawingml/2006/main">
+              <a:ext uri="{FF2B5EF4-FFF2-40B4-BE49-F238E27FC236}">
+                <a16:creationId xmlns:a16="http://schemas.microsoft.com/office/drawing/2014/main" id="{DD0CAE47-5773-48C5-9DCD-A9676E0AB2B3}"/>
+              </a:ext>
+            </a:extLst>
+          </p:cNvPr>
+          <p:cNvSpPr>
+            <a:spLocks xmlns:a="http://schemas.openxmlformats.org/drawingml/2006/main" noGrp="1"/>
+          </p:cNvSpPr>
+          <p:nvPr/>
+        </p:nvSpPr>
+        <p:spPr>
+          <a:xfrm xmlns:a="http://schemas.openxmlformats.org/drawingml/2006/main">
+            <a:off x="666750" y="1066800"/>
+            <a:ext cx="10858500" cy="1476375"/>
+          </a:xfrm>
+          <a:prstGeom xmlns:a="http://schemas.openxmlformats.org/drawingml/2006/main" prst="rect">
+            <a:avLst/>
+          </a:prstGeom>
+          <a:noFill xmlns:a="http://schemas.openxmlformats.org/drawingml/2006/main"/>
+          <a:ln xmlns:a="http://schemas.openxmlformats.org/drawingml/2006/main" w="0">
+            <a:noFill/>
+          </a:ln>
+        </p:spPr>
+        <p:txBody>
+          <a:bodyPr xmlns:a="http://schemas.openxmlformats.org/drawingml/2006/main" lIns="0" tIns="0" rIns="0" bIns="0" anchor="t"/>
+          <a:lstStyle xmlns:a="http://schemas.openxmlformats.org/drawingml/2006/main">
+            <a:defPPr algn="l">
+              <a:defRPr sz="2400" b="0">
+                <a:solidFill>
+                  <a:srgbClr val="263746"/>
+                </a:solidFill>
+                <a:latin typeface="微软雅黑"/>
+                <a:ea typeface="微软雅黑"/>
+                <a:cs typeface="微软雅黑"/>
+              </a:defRPr>
+            </a:defPPr>
+          </a:lstStyle>
+          <a:p xmlns:a="http://schemas.openxmlformats.org/drawingml/2006/main">
+            <a:pPr algn="l">
+              <a:defRPr sz="2400" b="0">
+                <a:solidFill>
+                  <a:srgbClr val="263746"/>
+                </a:solidFill>
+                <a:latin typeface="微软雅黑"/>
+                <a:ea typeface="微软雅黑"/>
+                <a:cs typeface="微软雅黑"/>
+              </a:defRPr>
+            </a:pPr>
+            <a:r>
+              <a:rPr sz="2400" b="0">
+                <a:solidFill>
+                  <a:srgbClr val="263746"/>
+                </a:solidFill>
+                <a:latin typeface="微软雅黑"/>
+                <a:ea typeface="微软雅黑"/>
+                <a:cs typeface="微软雅黑"/>
+              </a:rPr>
+              <a:t>在同一微型项目执行 changed.py，使用 execute --fault-once；检查失败后状态，人工批准后恢复，比对 run_id 与完成任务，解释预算耗尽、完成或停止决定。</a:t>
+            </a:r>
+          </a:p>
+        </p:txBody>
+      </p:sp>
+      <p:sp>
+        <p:nvSpPr>
+          <p:cNvPr id="3" name="judgment-body-1">
+            <a:extLst xmlns:a="http://schemas.openxmlformats.org/drawingml/2006/main">
+              <a:ext uri="{FF2B5EF4-FFF2-40B4-BE49-F238E27FC236}">
+                <a16:creationId xmlns:a16="http://schemas.microsoft.com/office/drawing/2014/main" id="{C38A276A-1150-4436-B132-41F248F69109}"/>
+              </a:ext>
+            </a:extLst>
+          </p:cNvPr>
+          <p:cNvSpPr>
+            <a:spLocks xmlns:a="http://schemas.openxmlformats.org/drawingml/2006/main" noGrp="1"/>
+          </p:cNvSpPr>
+          <p:nvPr/>
+        </p:nvSpPr>
+        <p:spPr>
+          <a:xfrm xmlns:a="http://schemas.openxmlformats.org/drawingml/2006/main">
+            <a:off x="666750" y="2724150"/>
+            <a:ext cx="10858500" cy="1524000"/>
+          </a:xfrm>
+          <a:prstGeom xmlns:a="http://schemas.openxmlformats.org/drawingml/2006/main" prst="rect">
+            <a:avLst/>
+          </a:prstGeom>
+          <a:noFill xmlns:a="http://schemas.openxmlformats.org/drawingml/2006/main"/>
+          <a:ln xmlns:a="http://schemas.openxmlformats.org/drawingml/2006/main" w="0">
+            <a:noFill/>
+          </a:ln>
+        </p:spPr>
+        <p:txBody>
+          <a:bodyPr xmlns:a="http://schemas.openxmlformats.org/drawingml/2006/main" lIns="0" tIns="0" rIns="0" bIns="0" anchor="t"/>
+          <a:lstStyle xmlns:a="http://schemas.openxmlformats.org/drawingml/2006/main">
+            <a:defPPr algn="l">
+              <a:defRPr sz="2400" b="0">
+                <a:solidFill>
+                  <a:srgbClr val="263746"/>
+                </a:solidFill>
+                <a:latin typeface="微软雅黑"/>
+                <a:ea typeface="微软雅黑"/>
+                <a:cs typeface="微软雅黑"/>
+              </a:defRPr>
+            </a:defPPr>
+          </a:lstStyle>
+          <a:p xmlns:a="http://schemas.openxmlformats.org/drawingml/2006/main">
+            <a:pPr algn="l">
+              <a:defRPr sz="2400" b="0">
+                <a:solidFill>
+                  <a:srgbClr val="263746"/>
+                </a:solidFill>
+                <a:latin typeface="微软雅黑"/>
+                <a:ea typeface="微软雅黑"/>
+                <a:cs typeface="微软雅黑"/>
+              </a:defRPr>
+            </a:pPr>
+            <a:r>
+              <a:rPr sz="2400" b="0">
+                <a:solidFill>
+                  <a:srgbClr val="263746"/>
+                </a:solidFill>
+                <a:latin typeface="微软雅黑"/>
+                <a:ea typeface="微软雅黑"/>
+                <a:cs typeface="微软雅黑"/>
+              </a:rPr>
+              <a:t>验证中断保留、重启不重复成功任务、输入或实现改变须新建目录。保留无改善和负结果；原阅读卡 replay 仅作相邻示范，权限接口不等于系统隔离。</a:t>
+            </a:r>
+          </a:p>
+        </p:txBody>
+      </p:sp>
+      <p:sp>
+        <p:nvSpPr>
+          <p:cNvPr id="4" name="judgment-body-2">
+            <a:extLst xmlns:a="http://schemas.openxmlformats.org/drawingml/2006/main">
+              <a:ext uri="{FF2B5EF4-FFF2-40B4-BE49-F238E27FC236}">
+                <a16:creationId xmlns:a16="http://schemas.microsoft.com/office/drawing/2014/main" id="{52882B5D-0711-48F5-BC2B-D836AAAD621C}"/>
+              </a:ext>
+            </a:extLst>
+          </p:cNvPr>
+          <p:cNvSpPr>
+            <a:spLocks xmlns:a="http://schemas.openxmlformats.org/drawingml/2006/main" noGrp="1"/>
+          </p:cNvSpPr>
+          <p:nvPr/>
+        </p:nvSpPr>
+        <p:spPr>
+          <a:xfrm xmlns:a="http://schemas.openxmlformats.org/drawingml/2006/main">
+            <a:off x="666750" y="4457700"/>
+            <a:ext cx="10858500" cy="1466850"/>
+          </a:xfrm>
+          <a:prstGeom xmlns:a="http://schemas.openxmlformats.org/drawingml/2006/main" prst="rect">
+            <a:avLst/>
+          </a:prstGeom>
+          <a:noFill xmlns:a="http://schemas.openxmlformats.org/drawingml/2006/main"/>
+          <a:ln xmlns:a="http://schemas.openxmlformats.org/drawingml/2006/main" w="0">
+            <a:noFill/>
+          </a:ln>
+        </p:spPr>
+        <p:txBody>
+          <a:bodyPr xmlns:a="http://schemas.openxmlformats.org/drawingml/2006/main" lIns="0" tIns="0" rIns="0" bIns="0" anchor="t"/>
+          <a:lstStyle xmlns:a="http://schemas.openxmlformats.org/drawingml/2006/main">
+            <a:defPPr algn="l">
+              <a:defRPr sz="2200" b="0">
+                <a:solidFill>
+                  <a:srgbClr val="1F4D78"/>
+                </a:solidFill>
+                <a:latin typeface="微软雅黑"/>
+                <a:ea typeface="微软雅黑"/>
+                <a:cs typeface="微软雅黑"/>
+              </a:defRPr>
+            </a:defPPr>
+          </a:lstStyle>
+          <a:p xmlns:a="http://schemas.openxmlformats.org/drawingml/2006/main">
+            <a:pPr algn="l">
+              <a:defRPr sz="2200" b="0">
+                <a:solidFill>
+                  <a:srgbClr val="1F4D78"/>
+                </a:solidFill>
+                <a:latin typeface="微软雅黑"/>
+                <a:ea typeface="微软雅黑"/>
+                <a:cs typeface="微软雅黑"/>
+              </a:defRPr>
+            </a:pPr>
+            <a:r>
+              <a:rPr sz="2200" b="0">
+                <a:solidFill>
+                  <a:srgbClr val="1F4D78"/>
+                </a:solidFill>
+                <a:latin typeface="微软雅黑"/>
+                <a:ea typeface="微软雅黑"/>
+                <a:cs typeface="微软雅黑"/>
+              </a:rPr>
+              <a:t>保存：本人队列运行目录、恢复证据与停止决定</a:t>
+            </a:r>
+          </a:p>
+        </p:txBody>
+      </p:sp>
+      <p:sp>
+        <p:nvSpPr>
+          <p:cNvPr id="5" name="judgment-source">
+            <a:extLst xmlns:a="http://schemas.openxmlformats.org/drawingml/2006/main">
+              <a:ext uri="{FF2B5EF4-FFF2-40B4-BE49-F238E27FC236}">
+                <a16:creationId xmlns:a16="http://schemas.microsoft.com/office/drawing/2014/main" id="{3C96206C-77FC-4829-B088-B97888C57C84}"/>
+              </a:ext>
+            </a:extLst>
+          </p:cNvPr>
+          <p:cNvSpPr>
+            <a:spLocks xmlns:a="http://schemas.openxmlformats.org/drawingml/2006/main" noGrp="1"/>
+          </p:cNvSpPr>
+          <p:nvPr/>
+        </p:nvSpPr>
+        <p:spPr>
+          <a:xfrm xmlns:a="http://schemas.openxmlformats.org/drawingml/2006/main">
+            <a:off x="666750" y="6276975"/>
+            <a:ext cx="10572750" cy="209550"/>
+          </a:xfrm>
+          <a:prstGeom xmlns:a="http://schemas.openxmlformats.org/drawingml/2006/main" prst="rect">
+            <a:avLst/>
+          </a:prstGeom>
+          <a:noFill xmlns:a="http://schemas.openxmlformats.org/drawingml/2006/main"/>
+          <a:ln xmlns:a="http://schemas.openxmlformats.org/drawingml/2006/main" w="0">
+            <a:noFill/>
+          </a:ln>
+        </p:spPr>
+        <p:txBody>
+          <a:bodyPr xmlns:a="http://schemas.openxmlformats.org/drawingml/2006/main" lIns="0" tIns="0" rIns="0" bIns="0" anchor="t"/>
+          <a:lstStyle xmlns:a="http://schemas.openxmlformats.org/drawingml/2006/main">
+            <a:defPPr algn="l">
+              <a:defRPr sz="1100" b="0">
+                <a:solidFill>
+                  <a:srgbClr val="667684"/>
+                </a:solidFill>
+                <a:latin typeface="微软雅黑"/>
+                <a:ea typeface="微软雅黑"/>
+                <a:cs typeface="微软雅黑"/>
+              </a:defRPr>
+            </a:defPPr>
+          </a:lstStyle>
+          <a:p xmlns:a="http://schemas.openxmlformats.org/drawingml/2006/main">
+            <a:pPr algn="l">
+              <a:defRPr sz="1100" b="0">
+                <a:solidFill>
+                  <a:srgbClr val="667684"/>
+                </a:solidFill>
+                <a:latin typeface="微软雅黑"/>
+                <a:ea typeface="微软雅黑"/>
+                <a:cs typeface="微软雅黑"/>
+              </a:defRPr>
+            </a:pPr>
+            <a:r>
+              <a:rPr sz="1100" b="0">
+                <a:solidFill>
+                  <a:srgbClr val="667684"/>
+                </a:solidFill>
+                <a:latin typeface="微软雅黑"/>
+                <a:ea typeface="微软雅黑"/>
+                <a:cs typeface="微软雅黑"/>
+              </a:rPr>
+              <a:t>来源：本课判断任务与讲义；构造材料及真实来源按材料包标识</a:t>
+            </a:r>
+          </a:p>
+        </p:txBody>
+      </p:sp>
+      <p:sp>
+        <p:nvSpPr>
+          <p:cNvPr id="6" name="judgment-page">
+            <a:extLst xmlns:a="http://schemas.openxmlformats.org/drawingml/2006/main">
+              <a:ext uri="{FF2B5EF4-FFF2-40B4-BE49-F238E27FC236}">
+                <a16:creationId xmlns:a16="http://schemas.microsoft.com/office/drawing/2014/main" id="{77BD77BA-649F-47B7-8DEC-956C565C182D}"/>
+              </a:ext>
+            </a:extLst>
+          </p:cNvPr>
+          <p:cNvSpPr>
+            <a:spLocks xmlns:a="http://schemas.openxmlformats.org/drawingml/2006/main" noGrp="1"/>
+          </p:cNvSpPr>
+          <p:nvPr/>
+        </p:nvSpPr>
+        <p:spPr>
+          <a:xfrm xmlns:a="http://schemas.openxmlformats.org/drawingml/2006/main">
+            <a:off x="11715750" y="6562725"/>
+            <a:ext cx="238125" cy="171450"/>
+          </a:xfrm>
+          <a:prstGeom xmlns:a="http://schemas.openxmlformats.org/drawingml/2006/main" prst="rect">
+            <a:avLst/>
+          </a:prstGeom>
+          <a:noFill xmlns:a="http://schemas.openxmlformats.org/drawingml/2006/main"/>
+          <a:ln xmlns:a="http://schemas.openxmlformats.org/drawingml/2006/main" w="0">
+            <a:noFill/>
+          </a:ln>
+        </p:spPr>
+        <p:txBody>
+          <a:bodyPr xmlns:a="http://schemas.openxmlformats.org/drawingml/2006/main" lIns="0" tIns="0" rIns="0" bIns="0" anchor="t"/>
+          <a:lstStyle xmlns:a="http://schemas.openxmlformats.org/drawingml/2006/main">
+            <a:defPPr algn="l">
+              <a:defRPr sz="900" b="0">
+                <a:solidFill>
+                  <a:srgbClr val="A5A5A5"/>
+                </a:solidFill>
+                <a:latin typeface="微软雅黑"/>
+                <a:ea typeface="微软雅黑"/>
+                <a:cs typeface="微软雅黑"/>
+              </a:defRPr>
+            </a:defPPr>
+          </a:lstStyle>
+          <a:p xmlns:a="http://schemas.openxmlformats.org/drawingml/2006/main">
+            <a:pPr algn="l">
+              <a:defRPr sz="900" b="0">
+                <a:solidFill>
+                  <a:srgbClr val="A5A5A5"/>
+                </a:solidFill>
+                <a:latin typeface="微软雅黑"/>
+                <a:ea typeface="微软雅黑"/>
+                <a:cs typeface="微软雅黑"/>
+              </a:defRPr>
+            </a:pPr>
+            <a:r>
+              <a:rPr sz="900" b="0">
+                <a:solidFill>
+                  <a:srgbClr val="A5A5A5"/>
+                </a:solidFill>
+                <a:latin typeface="微软雅黑"/>
+                <a:ea typeface="微软雅黑"/>
+                <a:cs typeface="微软雅黑"/>
+              </a:rPr>
               <a:t>16</a:t>
-            </a:fld>
-            <a:endParaRPr/>
-          </a:p>
-        </p:txBody>
-      </p:sp>
-      <p:sp>
-        <p:nvSpPr>
-          <p:cNvPr id="6" name="brand-header">
-            <a:extLst xmlns:a="http://schemas.openxmlformats.org/drawingml/2006/main">
-              <a:ext uri="{FF2B5EF4-FFF2-40B4-BE49-F238E27FC236}">
-                <a16:creationId xmlns:a16="http://schemas.microsoft.com/office/drawing/2014/main" id="{9E51AA90-7623-48D1-BE9D-00A317F8331D}"/>
-              </a:ext>
-            </a:extLst>
-          </p:cNvPr>
-          <p:cNvSpPr>
-            <a:spLocks xmlns:a="http://schemas.openxmlformats.org/drawingml/2006/main" noGrp="1"/>
-          </p:cNvSpPr>
-          <p:nvPr/>
-        </p:nvSpPr>
-        <p:spPr>
-          <a:xfrm xmlns:a="http://schemas.openxmlformats.org/drawingml/2006/main">
-            <a:off x="0" y="0"/>
-            <a:ext cx="11887200" cy="685800"/>
-          </a:xfrm>
-          <a:prstGeom xmlns:a="http://schemas.openxmlformats.org/drawingml/2006/main" prst="rect">
-            <a:avLst/>
-          </a:prstGeom>
-          <a:solidFill xmlns:a="http://schemas.openxmlformats.org/drawingml/2006/main">
-            <a:srgbClr val="C8161E"/>
-          </a:solidFill>
-          <a:ln xmlns:a="http://schemas.openxmlformats.org/drawingml/2006/main" w="0">
-            <a:noFill/>
-          </a:ln>
-        </p:spPr>
-      </p:sp>
-      <p:pic>
-        <p:nvPicPr>
-          <p:cNvPr id="28" name=""/>
-          <p:cNvPicPr>
-            <a:picLocks xmlns:a="http://schemas.openxmlformats.org/drawingml/2006/main" noChangeAspect="1"/>
-          </p:cNvPicPr>
-          <p:nvPr/>
-        </p:nvPicPr>
-        <p:blipFill>
-          <a:blip xmlns:r="http://schemas.openxmlformats.org/officeDocument/2006/relationships" xmlns:a="http://schemas.openxmlformats.org/drawingml/2006/main" r:embed="Rae4d7d701cea42fe"/>
-          <a:stretch xmlns:a="http://schemas.openxmlformats.org/drawingml/2006/main"/>
-        </p:blipFill>
-        <p:spPr>
-          <a:xfrm xmlns:a="http://schemas.openxmlformats.org/drawingml/2006/main">
-            <a:off x="323850" y="76200"/>
-            <a:ext cx="533400" cy="533400"/>
-          </a:xfrm>
-          <a:prstGeom xmlns:a="http://schemas.openxmlformats.org/drawingml/2006/main" prst="rect">
-            <a:avLst/>
-          </a:prstGeom>
-        </p:spPr>
-      </p:pic>
-      <p:sp>
-        <p:nvSpPr>
-          <p:cNvPr id="8" name="brand-title">
-            <a:extLst xmlns:a="http://schemas.openxmlformats.org/drawingml/2006/main">
-              <a:ext uri="{FF2B5EF4-FFF2-40B4-BE49-F238E27FC236}">
-                <a16:creationId xmlns:a16="http://schemas.microsoft.com/office/drawing/2014/main" id="{8F549422-6031-4454-A1AB-8B80E4ED41FD}"/>
-              </a:ext>
-            </a:extLst>
-          </p:cNvPr>
-          <p:cNvSpPr>
-            <a:spLocks xmlns:a="http://schemas.openxmlformats.org/drawingml/2006/main" noGrp="1"/>
-          </p:cNvSpPr>
-          <p:nvPr/>
-        </p:nvSpPr>
-        <p:spPr>
-          <a:xfrm xmlns:a="http://schemas.openxmlformats.org/drawingml/2006/main">
-            <a:off x="1028700" y="66675"/>
-            <a:ext cx="10477500" cy="552450"/>
-          </a:xfrm>
-          <a:prstGeom xmlns:a="http://schemas.openxmlformats.org/drawingml/2006/main" prst="rect">
-            <a:avLst/>
-          </a:prstGeom>
-          <a:noFill xmlns:a="http://schemas.openxmlformats.org/drawingml/2006/main"/>
-          <a:ln xmlns:a="http://schemas.openxmlformats.org/drawingml/2006/main" w="0">
-            <a:noFill/>
-          </a:ln>
-        </p:spPr>
-        <p:txBody>
-          <a:bodyPr xmlns:a="http://schemas.openxmlformats.org/drawingml/2006/main" lIns="0" tIns="0" rIns="0" bIns="0" anchor="ctr"/>
-          <a:lstStyle xmlns:a="http://schemas.openxmlformats.org/drawingml/2006/main"/>
-          <a:p xmlns:a="http://schemas.openxmlformats.org/drawingml/2006/main">
-            <a:pPr algn="l">
-              <a:lnSpc>
-                <a:spcPct val="118000"/>
-              </a:lnSpc>
-              <a:buNone/>
-              <a:defRPr sz="3000" b="1">
-                <a:solidFill>
-                  <a:srgbClr val="FFFFFF"/>
-                </a:solidFill>
-                <a:latin typeface="微软雅黑"/>
-                <a:ea typeface="微软雅黑"/>
-                <a:cs typeface="微软雅黑"/>
-              </a:defRPr>
-            </a:pPr>
-            <a:r>
-              <a:rPr sz="3000" b="1">
-                <a:solidFill>
-                  <a:srgbClr val="FFFFFF"/>
-                </a:solidFill>
-                <a:latin typeface="微软雅黑"/>
-                <a:ea typeface="微软雅黑"/>
-                <a:cs typeface="微软雅黑"/>
-              </a:rPr>
-              <a:t>把可重复动作改写为受限循环</a:t>
-            </a:r>
-          </a:p>
-        </p:txBody>
-      </p:sp>
-      <p:sp>
-        <p:nvSpPr>
-          <p:cNvPr id="9" name="source">
-            <a:extLst xmlns:a="http://schemas.openxmlformats.org/drawingml/2006/main">
-              <a:ext uri="{FF2B5EF4-FFF2-40B4-BE49-F238E27FC236}">
-                <a16:creationId xmlns:a16="http://schemas.microsoft.com/office/drawing/2014/main" id="{CD2CCE72-5D2E-4553-A7FC-771238CBC76D}"/>
-              </a:ext>
-            </a:extLst>
-          </p:cNvPr>
-          <p:cNvSpPr>
-            <a:spLocks xmlns:a="http://schemas.openxmlformats.org/drawingml/2006/main" noGrp="1"/>
-          </p:cNvSpPr>
-          <p:nvPr/>
-        </p:nvSpPr>
-        <p:spPr>
-          <a:xfrm xmlns:a="http://schemas.openxmlformats.org/drawingml/2006/main">
-            <a:off x="609600" y="6067425"/>
-            <a:ext cx="10763250" cy="209550"/>
-          </a:xfrm>
-          <a:prstGeom xmlns:a="http://schemas.openxmlformats.org/drawingml/2006/main" prst="rect">
-            <a:avLst/>
-          </a:prstGeom>
-          <a:noFill xmlns:a="http://schemas.openxmlformats.org/drawingml/2006/main"/>
-          <a:ln xmlns:a="http://schemas.openxmlformats.org/drawingml/2006/main" w="0">
-            <a:noFill/>
-          </a:ln>
-        </p:spPr>
-        <p:txBody>
-          <a:bodyPr xmlns:a="http://schemas.openxmlformats.org/drawingml/2006/main" lIns="0" tIns="0" rIns="0" bIns="0" anchor="t"/>
-          <a:lstStyle xmlns:a="http://schemas.openxmlformats.org/drawingml/2006/main"/>
-          <a:p xmlns:a="http://schemas.openxmlformats.org/drawingml/2006/main">
-            <a:pPr algn="l">
-              <a:lnSpc>
-                <a:spcPct val="118000"/>
-              </a:lnSpc>
-              <a:buNone/>
-              <a:defRPr sz="1100" b="0">
-                <a:solidFill>
-                  <a:srgbClr val="66727D"/>
-                </a:solidFill>
-                <a:latin typeface="微软雅黑"/>
-                <a:ea typeface="微软雅黑"/>
-                <a:cs typeface="微软雅黑"/>
-              </a:defRPr>
-            </a:pPr>
-            <a:r>
-              <a:rPr sz="1100" b="0">
-                <a:solidFill>
-                  <a:srgbClr val="66727D"/>
-                </a:solidFill>
-                <a:latin typeface="微软雅黑"/>
-                <a:ea typeface="微软雅黑"/>
-                <a:cs typeface="微软雅黑"/>
-              </a:rPr>
-              <a:t>来源：lesson-11/slides.md；课程工件与讲义见 speaker notes</a:t>
-            </a:r>
-          </a:p>
-        </p:txBody>
-      </p:sp>
-      <p:sp>
-        <p:nvSpPr>
-          <p:cNvPr id="10" name="num-0">
-            <a:extLst xmlns:a="http://schemas.openxmlformats.org/drawingml/2006/main">
-              <a:ext uri="{FF2B5EF4-FFF2-40B4-BE49-F238E27FC236}">
-                <a16:creationId xmlns:a16="http://schemas.microsoft.com/office/drawing/2014/main" id="{B8A59DDA-F5D0-4923-BCBD-D9BCA952BB3A}"/>
-              </a:ext>
-            </a:extLst>
-          </p:cNvPr>
-          <p:cNvSpPr>
-            <a:spLocks xmlns:a="http://schemas.openxmlformats.org/drawingml/2006/main" noGrp="1"/>
-          </p:cNvSpPr>
-          <p:nvPr/>
-        </p:nvSpPr>
-        <p:spPr>
-          <a:xfrm xmlns:a="http://schemas.openxmlformats.org/drawingml/2006/main">
-            <a:off x="666750" y="1524000"/>
-            <a:ext cx="323850" cy="738188"/>
-          </a:xfrm>
-          <a:prstGeom xmlns:a="http://schemas.openxmlformats.org/drawingml/2006/main" prst="rect">
-            <a:avLst/>
-          </a:prstGeom>
-          <a:solidFill xmlns:a="http://schemas.openxmlformats.org/drawingml/2006/main">
-            <a:srgbClr val="1F4D78"/>
-          </a:solidFill>
-          <a:ln xmlns:a="http://schemas.openxmlformats.org/drawingml/2006/main" w="0">
-            <a:noFill/>
-          </a:ln>
-        </p:spPr>
-        <p:txBody>
-          <a:bodyPr xmlns:a="http://schemas.openxmlformats.org/drawingml/2006/main" lIns="0" tIns="0" rIns="0" bIns="0" anchor="ctr"/>
-          <a:lstStyle xmlns:a="http://schemas.openxmlformats.org/drawingml/2006/main"/>
-          <a:p xmlns:a="http://schemas.openxmlformats.org/drawingml/2006/main">
-            <a:pPr algn="ctr">
-              <a:lnSpc>
-                <a:spcPct val="118000"/>
-              </a:lnSpc>
-              <a:buNone/>
-              <a:defRPr sz="1800" b="1">
-                <a:solidFill>
-                  <a:srgbClr val="FFFFFF"/>
-                </a:solidFill>
-                <a:latin typeface="微软雅黑"/>
-                <a:ea typeface="微软雅黑"/>
-                <a:cs typeface="微软雅黑"/>
-              </a:defRPr>
-            </a:pPr>
-            <a:r>
-              <a:rPr sz="1800" b="1">
-                <a:solidFill>
-                  <a:srgbClr val="FFFFFF"/>
-                </a:solidFill>
-                <a:latin typeface="微软雅黑"/>
-                <a:ea typeface="微软雅黑"/>
-                <a:cs typeface="微软雅黑"/>
-              </a:rPr>
-              <a:t>1</a:t>
-            </a:r>
-          </a:p>
-        </p:txBody>
-      </p:sp>
-      <p:sp>
-        <p:nvSpPr>
-          <p:cNvPr id="11" name="row-0">
-            <a:extLst xmlns:a="http://schemas.openxmlformats.org/drawingml/2006/main">
-              <a:ext uri="{FF2B5EF4-FFF2-40B4-BE49-F238E27FC236}">
-                <a16:creationId xmlns:a16="http://schemas.microsoft.com/office/drawing/2014/main" id="{5D68E49F-5EE2-43C3-BAD5-4081A301C03A}"/>
-              </a:ext>
-            </a:extLst>
-          </p:cNvPr>
-          <p:cNvSpPr>
-            <a:spLocks xmlns:a="http://schemas.openxmlformats.org/drawingml/2006/main" noGrp="1"/>
-          </p:cNvSpPr>
-          <p:nvPr/>
-        </p:nvSpPr>
-        <p:spPr>
-          <a:xfrm xmlns:a="http://schemas.openxmlformats.org/drawingml/2006/main">
-            <a:off x="1143000" y="1524000"/>
-            <a:ext cx="6191250" cy="738188"/>
-          </a:xfrm>
-          <a:prstGeom xmlns:a="http://schemas.openxmlformats.org/drawingml/2006/main" prst="rect">
-            <a:avLst/>
-          </a:prstGeom>
-          <a:noFill xmlns:a="http://schemas.openxmlformats.org/drawingml/2006/main"/>
-          <a:ln xmlns:a="http://schemas.openxmlformats.org/drawingml/2006/main" w="0">
-            <a:noFill/>
-          </a:ln>
-        </p:spPr>
-        <p:txBody>
-          <a:bodyPr xmlns:a="http://schemas.openxmlformats.org/drawingml/2006/main" lIns="0" tIns="0" rIns="0" bIns="0" anchor="ctr"/>
-          <a:lstStyle xmlns:a="http://schemas.openxmlformats.org/drawingml/2006/main"/>
-          <a:p xmlns:a="http://schemas.openxmlformats.org/drawingml/2006/main">
-            <a:pPr algn="l">
-              <a:lnSpc>
-                <a:spcPct val="118000"/>
-              </a:lnSpc>
-              <a:buNone/>
-              <a:defRPr sz="2200" b="0">
-                <a:solidFill>
-                  <a:srgbClr val="27333D"/>
-                </a:solidFill>
-                <a:latin typeface="微软雅黑"/>
-                <a:ea typeface="微软雅黑"/>
-                <a:cs typeface="微软雅黑"/>
-              </a:defRPr>
-            </a:pPr>
-            <a:r>
-              <a:rPr sz="2200" b="0">
-                <a:solidFill>
-                  <a:srgbClr val="27333D"/>
-                </a:solidFill>
-                <a:latin typeface="微软雅黑"/>
-                <a:ea typeface="微软雅黑"/>
-                <a:cs typeface="微软雅黑"/>
-              </a:rPr>
-              <a:t>写固定指标与版本</a:t>
-            </a:r>
-          </a:p>
-        </p:txBody>
-      </p:sp>
-      <p:sp>
-        <p:nvSpPr>
-          <p:cNvPr id="12" name="row-rule-0">
-            <a:extLst xmlns:a="http://schemas.openxmlformats.org/drawingml/2006/main">
-              <a:ext uri="{FF2B5EF4-FFF2-40B4-BE49-F238E27FC236}">
-                <a16:creationId xmlns:a16="http://schemas.microsoft.com/office/drawing/2014/main" id="{4F9BB401-7931-4736-8743-7C8D1E96C1AB}"/>
-              </a:ext>
-            </a:extLst>
-          </p:cNvPr>
-          <p:cNvSpPr>
-            <a:spLocks xmlns:a="http://schemas.openxmlformats.org/drawingml/2006/main" noGrp="1"/>
-          </p:cNvSpPr>
-          <p:nvPr/>
-        </p:nvSpPr>
-        <p:spPr>
-          <a:xfrm xmlns:a="http://schemas.openxmlformats.org/drawingml/2006/main">
-            <a:off x="1143000" y="2300288"/>
-            <a:ext cx="6191250" cy="14288"/>
-          </a:xfrm>
-          <a:prstGeom xmlns:a="http://schemas.openxmlformats.org/drawingml/2006/main" prst="rect">
-            <a:avLst/>
-          </a:prstGeom>
-          <a:solidFill xmlns:a="http://schemas.openxmlformats.org/drawingml/2006/main">
-            <a:srgbClr val="CDD5DB"/>
-          </a:solidFill>
-          <a:ln xmlns:a="http://schemas.openxmlformats.org/drawingml/2006/main" w="0">
-            <a:noFill/>
-          </a:ln>
-        </p:spPr>
-      </p:sp>
-      <p:sp>
-        <p:nvSpPr>
-          <p:cNvPr id="13" name="num-1">
-            <a:extLst xmlns:a="http://schemas.openxmlformats.org/drawingml/2006/main">
-              <a:ext uri="{FF2B5EF4-FFF2-40B4-BE49-F238E27FC236}">
-                <a16:creationId xmlns:a16="http://schemas.microsoft.com/office/drawing/2014/main" id="{7A043A78-C6F1-4CF5-A1EB-3621BCCDEAE3}"/>
-              </a:ext>
-            </a:extLst>
-          </p:cNvPr>
-          <p:cNvSpPr>
-            <a:spLocks xmlns:a="http://schemas.openxmlformats.org/drawingml/2006/main" noGrp="1"/>
-          </p:cNvSpPr>
-          <p:nvPr/>
-        </p:nvSpPr>
-        <p:spPr>
-          <a:xfrm xmlns:a="http://schemas.openxmlformats.org/drawingml/2006/main">
-            <a:off x="666750" y="2357438"/>
-            <a:ext cx="323850" cy="738188"/>
-          </a:xfrm>
-          <a:prstGeom xmlns:a="http://schemas.openxmlformats.org/drawingml/2006/main" prst="rect">
-            <a:avLst/>
-          </a:prstGeom>
-          <a:solidFill xmlns:a="http://schemas.openxmlformats.org/drawingml/2006/main">
-            <a:srgbClr val="1F4D78"/>
-          </a:solidFill>
-          <a:ln xmlns:a="http://schemas.openxmlformats.org/drawingml/2006/main" w="0">
-            <a:noFill/>
-          </a:ln>
-        </p:spPr>
-        <p:txBody>
-          <a:bodyPr xmlns:a="http://schemas.openxmlformats.org/drawingml/2006/main" lIns="0" tIns="0" rIns="0" bIns="0" anchor="ctr"/>
-          <a:lstStyle xmlns:a="http://schemas.openxmlformats.org/drawingml/2006/main"/>
-          <a:p xmlns:a="http://schemas.openxmlformats.org/drawingml/2006/main">
-            <a:pPr algn="ctr">
-              <a:lnSpc>
-                <a:spcPct val="118000"/>
-              </a:lnSpc>
-              <a:buNone/>
-              <a:defRPr sz="1800" b="1">
-                <a:solidFill>
-                  <a:srgbClr val="FFFFFF"/>
-                </a:solidFill>
-                <a:latin typeface="微软雅黑"/>
-                <a:ea typeface="微软雅黑"/>
-                <a:cs typeface="微软雅黑"/>
-              </a:defRPr>
-            </a:pPr>
-            <a:r>
-              <a:rPr sz="1800" b="1">
-                <a:solidFill>
-                  <a:srgbClr val="FFFFFF"/>
-                </a:solidFill>
-                <a:latin typeface="微软雅黑"/>
-                <a:ea typeface="微软雅黑"/>
-                <a:cs typeface="微软雅黑"/>
-              </a:rPr>
-              <a:t>2</a:t>
-            </a:r>
-          </a:p>
-        </p:txBody>
-      </p:sp>
-      <p:sp>
-        <p:nvSpPr>
-          <p:cNvPr id="14" name="row-1">
-            <a:extLst xmlns:a="http://schemas.openxmlformats.org/drawingml/2006/main">
-              <a:ext uri="{FF2B5EF4-FFF2-40B4-BE49-F238E27FC236}">
-                <a16:creationId xmlns:a16="http://schemas.microsoft.com/office/drawing/2014/main" id="{890DE06C-1132-41D2-BE5E-24B6543FE191}"/>
-              </a:ext>
-            </a:extLst>
-          </p:cNvPr>
-          <p:cNvSpPr>
-            <a:spLocks xmlns:a="http://schemas.openxmlformats.org/drawingml/2006/main" noGrp="1"/>
-          </p:cNvSpPr>
-          <p:nvPr/>
-        </p:nvSpPr>
-        <p:spPr>
-          <a:xfrm xmlns:a="http://schemas.openxmlformats.org/drawingml/2006/main">
-            <a:off x="1143000" y="2357438"/>
-            <a:ext cx="6191250" cy="738188"/>
-          </a:xfrm>
-          <a:prstGeom xmlns:a="http://schemas.openxmlformats.org/drawingml/2006/main" prst="rect">
-            <a:avLst/>
-          </a:prstGeom>
-          <a:noFill xmlns:a="http://schemas.openxmlformats.org/drawingml/2006/main"/>
-          <a:ln xmlns:a="http://schemas.openxmlformats.org/drawingml/2006/main" w="0">
-            <a:noFill/>
-          </a:ln>
-        </p:spPr>
-        <p:txBody>
-          <a:bodyPr xmlns:a="http://schemas.openxmlformats.org/drawingml/2006/main" lIns="0" tIns="0" rIns="0" bIns="0" anchor="ctr"/>
-          <a:lstStyle xmlns:a="http://schemas.openxmlformats.org/drawingml/2006/main"/>
-          <a:p xmlns:a="http://schemas.openxmlformats.org/drawingml/2006/main">
-            <a:pPr algn="l">
-              <a:lnSpc>
-                <a:spcPct val="118000"/>
-              </a:lnSpc>
-              <a:buNone/>
-              <a:defRPr sz="2200" b="0">
-                <a:solidFill>
-                  <a:srgbClr val="27333D"/>
-                </a:solidFill>
-                <a:latin typeface="微软雅黑"/>
-                <a:ea typeface="微软雅黑"/>
-                <a:cs typeface="微软雅黑"/>
-              </a:defRPr>
-            </a:pPr>
-            <a:r>
-              <a:rPr sz="2200" b="0">
-                <a:solidFill>
-                  <a:srgbClr val="27333D"/>
-                </a:solidFill>
-                <a:latin typeface="微软雅黑"/>
-                <a:ea typeface="微软雅黑"/>
-                <a:cs typeface="微软雅黑"/>
-              </a:rPr>
-              <a:t>写预算和停止触发器</a:t>
-            </a:r>
-          </a:p>
-        </p:txBody>
-      </p:sp>
-      <p:sp>
-        <p:nvSpPr>
-          <p:cNvPr id="15" name="row-rule-1">
-            <a:extLst xmlns:a="http://schemas.openxmlformats.org/drawingml/2006/main">
-              <a:ext uri="{FF2B5EF4-FFF2-40B4-BE49-F238E27FC236}">
-                <a16:creationId xmlns:a16="http://schemas.microsoft.com/office/drawing/2014/main" id="{A845C900-344D-4B83-894F-9234C9F5810D}"/>
-              </a:ext>
-            </a:extLst>
-          </p:cNvPr>
-          <p:cNvSpPr>
-            <a:spLocks xmlns:a="http://schemas.openxmlformats.org/drawingml/2006/main" noGrp="1"/>
-          </p:cNvSpPr>
-          <p:nvPr/>
-        </p:nvSpPr>
-        <p:spPr>
-          <a:xfrm xmlns:a="http://schemas.openxmlformats.org/drawingml/2006/main">
-            <a:off x="1143000" y="3133725"/>
-            <a:ext cx="6191250" cy="14288"/>
-          </a:xfrm>
-          <a:prstGeom xmlns:a="http://schemas.openxmlformats.org/drawingml/2006/main" prst="rect">
-            <a:avLst/>
-          </a:prstGeom>
-          <a:solidFill xmlns:a="http://schemas.openxmlformats.org/drawingml/2006/main">
-            <a:srgbClr val="CDD5DB"/>
-          </a:solidFill>
-          <a:ln xmlns:a="http://schemas.openxmlformats.org/drawingml/2006/main" w="0">
-            <a:noFill/>
-          </a:ln>
-        </p:spPr>
-      </p:sp>
-      <p:sp>
-        <p:nvSpPr>
-          <p:cNvPr id="16" name="num-2">
-            <a:extLst xmlns:a="http://schemas.openxmlformats.org/drawingml/2006/main">
-              <a:ext uri="{FF2B5EF4-FFF2-40B4-BE49-F238E27FC236}">
-                <a16:creationId xmlns:a16="http://schemas.microsoft.com/office/drawing/2014/main" id="{B66AACBB-8991-4C49-AD11-E739243EB705}"/>
-              </a:ext>
-            </a:extLst>
-          </p:cNvPr>
-          <p:cNvSpPr>
-            <a:spLocks xmlns:a="http://schemas.openxmlformats.org/drawingml/2006/main" noGrp="1"/>
-          </p:cNvSpPr>
-          <p:nvPr/>
-        </p:nvSpPr>
-        <p:spPr>
-          <a:xfrm xmlns:a="http://schemas.openxmlformats.org/drawingml/2006/main">
-            <a:off x="666750" y="3190875"/>
-            <a:ext cx="323850" cy="738188"/>
-          </a:xfrm>
-          <a:prstGeom xmlns:a="http://schemas.openxmlformats.org/drawingml/2006/main" prst="rect">
-            <a:avLst/>
-          </a:prstGeom>
-          <a:solidFill xmlns:a="http://schemas.openxmlformats.org/drawingml/2006/main">
-            <a:srgbClr val="1F4D78"/>
-          </a:solidFill>
-          <a:ln xmlns:a="http://schemas.openxmlformats.org/drawingml/2006/main" w="0">
-            <a:noFill/>
-          </a:ln>
-        </p:spPr>
-        <p:txBody>
-          <a:bodyPr xmlns:a="http://schemas.openxmlformats.org/drawingml/2006/main" lIns="0" tIns="0" rIns="0" bIns="0" anchor="ctr"/>
-          <a:lstStyle xmlns:a="http://schemas.openxmlformats.org/drawingml/2006/main"/>
-          <a:p xmlns:a="http://schemas.openxmlformats.org/drawingml/2006/main">
-            <a:pPr algn="ctr">
-              <a:lnSpc>
-                <a:spcPct val="118000"/>
-              </a:lnSpc>
-              <a:buNone/>
-              <a:defRPr sz="1800" b="1">
-                <a:solidFill>
-                  <a:srgbClr val="FFFFFF"/>
-                </a:solidFill>
-                <a:latin typeface="微软雅黑"/>
-                <a:ea typeface="微软雅黑"/>
-                <a:cs typeface="微软雅黑"/>
-              </a:defRPr>
-            </a:pPr>
-            <a:r>
-              <a:rPr sz="1800" b="1">
-                <a:solidFill>
-                  <a:srgbClr val="FFFFFF"/>
-                </a:solidFill>
-                <a:latin typeface="微软雅黑"/>
-                <a:ea typeface="微软雅黑"/>
-                <a:cs typeface="微软雅黑"/>
-              </a:rPr>
-              <a:t>3</a:t>
-            </a:r>
-          </a:p>
-        </p:txBody>
-      </p:sp>
-      <p:sp>
-        <p:nvSpPr>
-          <p:cNvPr id="17" name="row-2">
-            <a:extLst xmlns:a="http://schemas.openxmlformats.org/drawingml/2006/main">
-              <a:ext uri="{FF2B5EF4-FFF2-40B4-BE49-F238E27FC236}">
-                <a16:creationId xmlns:a16="http://schemas.microsoft.com/office/drawing/2014/main" id="{142F75A2-B073-4914-A7D9-D1BD68AF0AAB}"/>
-              </a:ext>
-            </a:extLst>
-          </p:cNvPr>
-          <p:cNvSpPr>
-            <a:spLocks xmlns:a="http://schemas.openxmlformats.org/drawingml/2006/main" noGrp="1"/>
-          </p:cNvSpPr>
-          <p:nvPr/>
-        </p:nvSpPr>
-        <p:spPr>
-          <a:xfrm xmlns:a="http://schemas.openxmlformats.org/drawingml/2006/main">
-            <a:off x="1143000" y="3190875"/>
-            <a:ext cx="6191250" cy="738188"/>
-          </a:xfrm>
-          <a:prstGeom xmlns:a="http://schemas.openxmlformats.org/drawingml/2006/main" prst="rect">
-            <a:avLst/>
-          </a:prstGeom>
-          <a:noFill xmlns:a="http://schemas.openxmlformats.org/drawingml/2006/main"/>
-          <a:ln xmlns:a="http://schemas.openxmlformats.org/drawingml/2006/main" w="0">
-            <a:noFill/>
-          </a:ln>
-        </p:spPr>
-        <p:txBody>
-          <a:bodyPr xmlns:a="http://schemas.openxmlformats.org/drawingml/2006/main" lIns="0" tIns="0" rIns="0" bIns="0" anchor="ctr"/>
-          <a:lstStyle xmlns:a="http://schemas.openxmlformats.org/drawingml/2006/main"/>
-          <a:p xmlns:a="http://schemas.openxmlformats.org/drawingml/2006/main">
-            <a:pPr algn="l">
-              <a:lnSpc>
-                <a:spcPct val="118000"/>
-              </a:lnSpc>
-              <a:buNone/>
-              <a:defRPr sz="2200" b="0">
-                <a:solidFill>
-                  <a:srgbClr val="27333D"/>
-                </a:solidFill>
-                <a:latin typeface="微软雅黑"/>
-                <a:ea typeface="微软雅黑"/>
-                <a:cs typeface="微软雅黑"/>
-              </a:defRPr>
-            </a:pPr>
-            <a:r>
-              <a:rPr sz="2200" b="0">
-                <a:solidFill>
-                  <a:srgbClr val="27333D"/>
-                </a:solidFill>
-                <a:latin typeface="微软雅黑"/>
-                <a:ea typeface="微软雅黑"/>
-                <a:cs typeface="微软雅黑"/>
-              </a:rPr>
-              <a:t>区分队列 / 优化，画失败恢复</a:t>
-            </a:r>
-          </a:p>
-        </p:txBody>
-      </p:sp>
-      <p:sp>
-        <p:nvSpPr>
-          <p:cNvPr id="18" name="row-rule-2">
-            <a:extLst xmlns:a="http://schemas.openxmlformats.org/drawingml/2006/main">
-              <a:ext uri="{FF2B5EF4-FFF2-40B4-BE49-F238E27FC236}">
-                <a16:creationId xmlns:a16="http://schemas.microsoft.com/office/drawing/2014/main" id="{DE32E8DA-F147-43E6-9F49-D735BA2291EC}"/>
-              </a:ext>
-            </a:extLst>
-          </p:cNvPr>
-          <p:cNvSpPr>
-            <a:spLocks xmlns:a="http://schemas.openxmlformats.org/drawingml/2006/main" noGrp="1"/>
-          </p:cNvSpPr>
-          <p:nvPr/>
-        </p:nvSpPr>
-        <p:spPr>
-          <a:xfrm xmlns:a="http://schemas.openxmlformats.org/drawingml/2006/main">
-            <a:off x="1143000" y="3967163"/>
-            <a:ext cx="6191250" cy="14288"/>
-          </a:xfrm>
-          <a:prstGeom xmlns:a="http://schemas.openxmlformats.org/drawingml/2006/main" prst="rect">
-            <a:avLst/>
-          </a:prstGeom>
-          <a:solidFill xmlns:a="http://schemas.openxmlformats.org/drawingml/2006/main">
-            <a:srgbClr val="CDD5DB"/>
-          </a:solidFill>
-          <a:ln xmlns:a="http://schemas.openxmlformats.org/drawingml/2006/main" w="0">
-            <a:noFill/>
-          </a:ln>
-        </p:spPr>
-      </p:sp>
-      <p:sp>
-        <p:nvSpPr>
-          <p:cNvPr id="19" name="num-3">
-            <a:extLst xmlns:a="http://schemas.openxmlformats.org/drawingml/2006/main">
-              <a:ext uri="{FF2B5EF4-FFF2-40B4-BE49-F238E27FC236}">
-                <a16:creationId xmlns:a16="http://schemas.microsoft.com/office/drawing/2014/main" id="{904290F7-1496-4EDC-B769-9928701C6A48}"/>
-              </a:ext>
-            </a:extLst>
-          </p:cNvPr>
-          <p:cNvSpPr>
-            <a:spLocks xmlns:a="http://schemas.openxmlformats.org/drawingml/2006/main" noGrp="1"/>
-          </p:cNvSpPr>
-          <p:nvPr/>
-        </p:nvSpPr>
-        <p:spPr>
-          <a:xfrm xmlns:a="http://schemas.openxmlformats.org/drawingml/2006/main">
-            <a:off x="666750" y="4024313"/>
-            <a:ext cx="323850" cy="738188"/>
-          </a:xfrm>
-          <a:prstGeom xmlns:a="http://schemas.openxmlformats.org/drawingml/2006/main" prst="rect">
-            <a:avLst/>
-          </a:prstGeom>
-          <a:solidFill xmlns:a="http://schemas.openxmlformats.org/drawingml/2006/main">
-            <a:srgbClr val="C8161E"/>
-          </a:solidFill>
-          <a:ln xmlns:a="http://schemas.openxmlformats.org/drawingml/2006/main" w="0">
-            <a:noFill/>
-          </a:ln>
-        </p:spPr>
-        <p:txBody>
-          <a:bodyPr xmlns:a="http://schemas.openxmlformats.org/drawingml/2006/main" lIns="0" tIns="0" rIns="0" bIns="0" anchor="ctr"/>
-          <a:lstStyle xmlns:a="http://schemas.openxmlformats.org/drawingml/2006/main"/>
-          <a:p xmlns:a="http://schemas.openxmlformats.org/drawingml/2006/main">
-            <a:pPr algn="ctr">
-              <a:lnSpc>
-                <a:spcPct val="118000"/>
-              </a:lnSpc>
-              <a:buNone/>
-              <a:defRPr sz="1800" b="1">
-                <a:solidFill>
-                  <a:srgbClr val="C8161E"/>
-                </a:solidFill>
-                <a:latin typeface="微软雅黑"/>
-                <a:ea typeface="微软雅黑"/>
-                <a:cs typeface="微软雅黑"/>
-              </a:defRPr>
-            </a:pPr>
-            <a:r>
-              <a:rPr sz="1800" b="1">
-                <a:solidFill>
-                  <a:srgbClr val="FFFFFF"/>
-                </a:solidFill>
-                <a:latin typeface="微软雅黑"/>
-                <a:ea typeface="微软雅黑"/>
-                <a:cs typeface="微软雅黑"/>
-              </a:rPr>
-              <a:t>4</a:t>
-            </a:r>
-          </a:p>
-        </p:txBody>
-      </p:sp>
-      <p:sp>
-        <p:nvSpPr>
-          <p:cNvPr id="20" name="row-3">
-            <a:extLst xmlns:a="http://schemas.openxmlformats.org/drawingml/2006/main">
-              <a:ext uri="{FF2B5EF4-FFF2-40B4-BE49-F238E27FC236}">
-                <a16:creationId xmlns:a16="http://schemas.microsoft.com/office/drawing/2014/main" id="{A9995ADE-59F5-4D89-A321-188E330F1A19}"/>
-              </a:ext>
-            </a:extLst>
-          </p:cNvPr>
-          <p:cNvSpPr>
-            <a:spLocks xmlns:a="http://schemas.openxmlformats.org/drawingml/2006/main" noGrp="1"/>
-          </p:cNvSpPr>
-          <p:nvPr/>
-        </p:nvSpPr>
-        <p:spPr>
-          <a:xfrm xmlns:a="http://schemas.openxmlformats.org/drawingml/2006/main">
-            <a:off x="1143000" y="4024313"/>
-            <a:ext cx="6191250" cy="738188"/>
-          </a:xfrm>
-          <a:prstGeom xmlns:a="http://schemas.openxmlformats.org/drawingml/2006/main" prst="rect">
-            <a:avLst/>
-          </a:prstGeom>
-          <a:noFill xmlns:a="http://schemas.openxmlformats.org/drawingml/2006/main"/>
-          <a:ln xmlns:a="http://schemas.openxmlformats.org/drawingml/2006/main" w="0">
-            <a:noFill/>
-          </a:ln>
-        </p:spPr>
-        <p:txBody>
-          <a:bodyPr xmlns:a="http://schemas.openxmlformats.org/drawingml/2006/main" lIns="0" tIns="0" rIns="0" bIns="0" anchor="ctr"/>
-          <a:lstStyle xmlns:a="http://schemas.openxmlformats.org/drawingml/2006/main"/>
-          <a:p xmlns:a="http://schemas.openxmlformats.org/drawingml/2006/main">
-            <a:pPr algn="l">
-              <a:lnSpc>
-                <a:spcPct val="118000"/>
-              </a:lnSpc>
-              <a:buNone/>
-              <a:defRPr sz="2200" b="0">
-                <a:solidFill>
-                  <a:srgbClr val="27333D"/>
-                </a:solidFill>
-                <a:latin typeface="微软雅黑"/>
-                <a:ea typeface="微软雅黑"/>
-                <a:cs typeface="微软雅黑"/>
-              </a:defRPr>
-            </a:pPr>
-            <a:r>
-              <a:rPr sz="2200" b="0">
-                <a:solidFill>
-                  <a:srgbClr val="27333D"/>
-                </a:solidFill>
-                <a:latin typeface="微软雅黑"/>
-                <a:ea typeface="微软雅黑"/>
-                <a:cs typeface="微软雅黑"/>
-              </a:rPr>
-              <a:t>留下正常、无改善、失败 trace</a:t>
-            </a:r>
-          </a:p>
-        </p:txBody>
-      </p:sp>
-      <p:sp>
-        <p:nvSpPr>
-          <p:cNvPr id="21" name="practice-side">
-            <a:extLst xmlns:a="http://schemas.openxmlformats.org/drawingml/2006/main">
-              <a:ext uri="{FF2B5EF4-FFF2-40B4-BE49-F238E27FC236}">
-                <a16:creationId xmlns:a16="http://schemas.microsoft.com/office/drawing/2014/main" id="{CD453484-AACC-407C-9717-4C4DC673F91C}"/>
-              </a:ext>
-            </a:extLst>
-          </p:cNvPr>
-          <p:cNvSpPr>
-            <a:spLocks xmlns:a="http://schemas.openxmlformats.org/drawingml/2006/main" noGrp="1"/>
-          </p:cNvSpPr>
-          <p:nvPr/>
-        </p:nvSpPr>
-        <p:spPr>
-          <a:xfrm xmlns:a="http://schemas.openxmlformats.org/drawingml/2006/main">
-            <a:off x="7905750" y="1666875"/>
-            <a:ext cx="3429000" cy="2619375"/>
-          </a:xfrm>
-          <a:prstGeom xmlns:a="http://schemas.openxmlformats.org/drawingml/2006/main" prst="rect">
-            <a:avLst/>
-          </a:prstGeom>
-          <a:solidFill xmlns:a="http://schemas.openxmlformats.org/drawingml/2006/main">
-            <a:srgbClr val="F4F6F8"/>
-          </a:solidFill>
-          <a:ln xmlns:a="http://schemas.openxmlformats.org/drawingml/2006/main" w="0">
-            <a:noFill/>
-          </a:ln>
-        </p:spPr>
-      </p:sp>
-      <p:sp>
-        <p:nvSpPr>
-          <p:cNvPr id="22" name="practice-h">
-            <a:extLst xmlns:a="http://schemas.openxmlformats.org/drawingml/2006/main">
-              <a:ext uri="{FF2B5EF4-FFF2-40B4-BE49-F238E27FC236}">
-                <a16:creationId xmlns:a16="http://schemas.microsoft.com/office/drawing/2014/main" id="{A57A1ECA-D979-4925-894F-6FBBDB5A4BAC}"/>
-              </a:ext>
-            </a:extLst>
-          </p:cNvPr>
-          <p:cNvSpPr>
-            <a:spLocks xmlns:a="http://schemas.openxmlformats.org/drawingml/2006/main" noGrp="1"/>
-          </p:cNvSpPr>
-          <p:nvPr/>
-        </p:nvSpPr>
-        <p:spPr>
-          <a:xfrm xmlns:a="http://schemas.openxmlformats.org/drawingml/2006/main">
-            <a:off x="8191500" y="1952625"/>
-            <a:ext cx="2857500" cy="361950"/>
-          </a:xfrm>
-          <a:prstGeom xmlns:a="http://schemas.openxmlformats.org/drawingml/2006/main" prst="rect">
-            <a:avLst/>
-          </a:prstGeom>
-          <a:noFill xmlns:a="http://schemas.openxmlformats.org/drawingml/2006/main"/>
-          <a:ln xmlns:a="http://schemas.openxmlformats.org/drawingml/2006/main" w="0">
-            <a:noFill/>
-          </a:ln>
-        </p:spPr>
-        <p:txBody>
-          <a:bodyPr xmlns:a="http://schemas.openxmlformats.org/drawingml/2006/main" lIns="0" tIns="0" rIns="0" bIns="0" anchor="t"/>
-          <a:lstStyle xmlns:a="http://schemas.openxmlformats.org/drawingml/2006/main"/>
-          <a:p xmlns:a="http://schemas.openxmlformats.org/drawingml/2006/main">
-            <a:pPr algn="l">
-              <a:lnSpc>
-                <a:spcPct val="118000"/>
-              </a:lnSpc>
-              <a:buNone/>
-              <a:defRPr sz="2200" b="1">
-                <a:solidFill>
-                  <a:srgbClr val="1F4D78"/>
-                </a:solidFill>
-                <a:latin typeface="微软雅黑"/>
-                <a:ea typeface="微软雅黑"/>
-                <a:cs typeface="微软雅黑"/>
-              </a:defRPr>
-            </a:pPr>
-            <a:r>
-              <a:rPr sz="2200" b="1">
-                <a:solidFill>
-                  <a:srgbClr val="1F4D78"/>
-                </a:solidFill>
-                <a:latin typeface="微软雅黑"/>
-                <a:ea typeface="微软雅黑"/>
-                <a:cs typeface="微软雅黑"/>
-              </a:rPr>
-              <a:t>课堂最低产出</a:t>
-            </a:r>
-          </a:p>
-        </p:txBody>
-      </p:sp>
-      <p:sp>
-        <p:nvSpPr>
-          <p:cNvPr id="23" name="practice-note">
-            <a:extLst xmlns:a="http://schemas.openxmlformats.org/drawingml/2006/main">
-              <a:ext uri="{FF2B5EF4-FFF2-40B4-BE49-F238E27FC236}">
-                <a16:creationId xmlns:a16="http://schemas.microsoft.com/office/drawing/2014/main" id="{1FCEABC8-D019-4389-B7EF-636E2AC8CC4D}"/>
-              </a:ext>
-            </a:extLst>
-          </p:cNvPr>
-          <p:cNvSpPr>
-            <a:spLocks xmlns:a="http://schemas.openxmlformats.org/drawingml/2006/main" noGrp="1"/>
-          </p:cNvSpPr>
-          <p:nvPr/>
-        </p:nvSpPr>
-        <p:spPr>
-          <a:xfrm xmlns:a="http://schemas.openxmlformats.org/drawingml/2006/main">
-            <a:off x="8191500" y="2619375"/>
-            <a:ext cx="2762250" cy="1428750"/>
-          </a:xfrm>
-          <a:prstGeom xmlns:a="http://schemas.openxmlformats.org/drawingml/2006/main" prst="rect">
-            <a:avLst/>
-          </a:prstGeom>
-          <a:noFill xmlns:a="http://schemas.openxmlformats.org/drawingml/2006/main"/>
-          <a:ln xmlns:a="http://schemas.openxmlformats.org/drawingml/2006/main" w="0">
-            <a:noFill/>
-          </a:ln>
-        </p:spPr>
-        <p:txBody>
-          <a:bodyPr xmlns:a="http://schemas.openxmlformats.org/drawingml/2006/main" lIns="0" tIns="0" rIns="0" bIns="0" anchor="t"/>
-          <a:lstStyle xmlns:a="http://schemas.openxmlformats.org/drawingml/2006/main"/>
-          <a:p xmlns:a="http://schemas.openxmlformats.org/drawingml/2006/main">
-            <a:pPr algn="l">
-              <a:lnSpc>
-                <a:spcPct val="118000"/>
-              </a:lnSpc>
-              <a:buNone/>
-              <a:defRPr sz="2200" b="0">
-                <a:solidFill>
-                  <a:srgbClr val="27333D"/>
-                </a:solidFill>
-                <a:latin typeface="微软雅黑"/>
-                <a:ea typeface="微软雅黑"/>
-                <a:cs typeface="微软雅黑"/>
-              </a:defRPr>
-            </a:pPr>
-            <a:r>
-              <a:rPr sz="2200" b="0">
-                <a:solidFill>
-                  <a:srgbClr val="27333D"/>
-                </a:solidFill>
-                <a:latin typeface="微软雅黑"/>
-                <a:ea typeface="微软雅黑"/>
-                <a:cs typeface="微软雅黑"/>
-              </a:rPr>
-              <a:t>受限循环说明</a:t>
-            </a:r>
-          </a:p>
-          <a:p xmlns:a="http://schemas.openxmlformats.org/drawingml/2006/main">
-            <a:pPr algn="l">
-              <a:lnSpc>
-                <a:spcPct val="118000"/>
-              </a:lnSpc>
-              <a:buNone/>
-              <a:defRPr sz="2200" b="0">
-                <a:solidFill>
-                  <a:srgbClr val="27333D"/>
-                </a:solidFill>
-                <a:latin typeface="微软雅黑"/>
-                <a:ea typeface="微软雅黑"/>
-                <a:cs typeface="微软雅黑"/>
-              </a:defRPr>
-            </a:pPr>
-            <a:r>
-              <a:rPr sz="2200" b="0">
-                <a:solidFill>
-                  <a:srgbClr val="27333D"/>
-                </a:solidFill>
-                <a:latin typeface="微软雅黑"/>
-                <a:ea typeface="微软雅黑"/>
-                <a:cs typeface="微软雅黑"/>
-              </a:rPr>
-              <a:t>三种 trace</a:t>
-            </a:r>
-          </a:p>
-          <a:p xmlns:a="http://schemas.openxmlformats.org/drawingml/2006/main">
-            <a:pPr algn="l">
-              <a:lnSpc>
-                <a:spcPct val="118000"/>
-              </a:lnSpc>
-              <a:buNone/>
-              <a:defRPr sz="2200" b="0">
-                <a:solidFill>
-                  <a:srgbClr val="27333D"/>
-                </a:solidFill>
-                <a:latin typeface="微软雅黑"/>
-                <a:ea typeface="微软雅黑"/>
-                <a:cs typeface="微软雅黑"/>
-              </a:defRPr>
-            </a:pPr>
-            <a:r>
-              <a:rPr sz="2200" b="0">
-                <a:solidFill>
-                  <a:srgbClr val="27333D"/>
-                </a:solidFill>
-                <a:latin typeface="微软雅黑"/>
-                <a:ea typeface="微软雅黑"/>
-                <a:cs typeface="微软雅黑"/>
-              </a:rPr>
-              <a:t>四约束短分析</a:t>
             </a:r>
           </a:p>
         </p:txBody>
@@ -17049,35 +13898,55 @@
       </p:grpSpPr>
       <p:sp>
         <p:nvSpPr>
-          <p:cNvPr id="4" name="Text Placeholder 3">
-            <a:extLst xmlns:a="http://schemas.openxmlformats.org/drawingml/2006/main">
-              <a:ext uri="{FF2B5EF4-FFF2-40B4-BE49-F238E27FC236}">
-                <a16:creationId xmlns:a16="http://schemas.microsoft.com/office/drawing/2014/main" id="{4D941B40-7A0A-534E-3563-CA11753C8E3F}"/>
-              </a:ext>
-            </a:extLst>
-          </p:cNvPr>
-          <p:cNvSpPr>
-            <a:spLocks xmlns:a="http://schemas.openxmlformats.org/drawingml/2006/main" noGrp="1"/>
-          </p:cNvSpPr>
-          <p:nvPr>
-            <p:ph type="body" idx="14"/>
-          </p:nvPr>
-        </p:nvSpPr>
-        <p:spPr>
-          <a:xfrm xmlns:a="http://schemas.openxmlformats.org/drawingml/2006/main">
-            <a:off x="1028700" y="57150"/>
-            <a:ext cx="10668000" cy="571500"/>
-          </a:xfrm>
-        </p:spPr>
-        <p:txBody>
-          <a:bodyPr xmlns:a="http://schemas.openxmlformats.org/drawingml/2006/main" lIns="0" tIns="0" rIns="0" bIns="0" anchor="ctr"/>
-          <a:lstStyle xmlns:a="http://schemas.openxmlformats.org/drawingml/2006/main"/>
+          <p:cNvPr id="7" name="judgment-title">
+            <a:extLst xmlns:a="http://schemas.openxmlformats.org/drawingml/2006/main">
+              <a:ext uri="{FF2B5EF4-FFF2-40B4-BE49-F238E27FC236}">
+                <a16:creationId xmlns:a16="http://schemas.microsoft.com/office/drawing/2014/main" id="{EA985D8D-338A-4964-9611-8A368C4F99CC}"/>
+              </a:ext>
+            </a:extLst>
+          </p:cNvPr>
+          <p:cNvSpPr>
+            <a:spLocks xmlns:a="http://schemas.openxmlformats.org/drawingml/2006/main" noGrp="1"/>
+          </p:cNvSpPr>
+          <p:nvPr/>
+        </p:nvSpPr>
+        <p:spPr>
+          <a:xfrm xmlns:a="http://schemas.openxmlformats.org/drawingml/2006/main">
+            <a:off x="1028700" y="76200"/>
+            <a:ext cx="10687050" cy="514350"/>
+          </a:xfrm>
+          <a:prstGeom xmlns:a="http://schemas.openxmlformats.org/drawingml/2006/main" prst="rect">
+            <a:avLst/>
+          </a:prstGeom>
+          <a:noFill xmlns:a="http://schemas.openxmlformats.org/drawingml/2006/main"/>
+          <a:ln xmlns:a="http://schemas.openxmlformats.org/drawingml/2006/main" w="0">
+            <a:noFill/>
+          </a:ln>
+        </p:spPr>
+        <p:txBody>
+          <a:bodyPr xmlns:a="http://schemas.openxmlformats.org/drawingml/2006/main" lIns="0" tIns="0" rIns="0" bIns="0" anchor="t"/>
+          <a:lstStyle xmlns:a="http://schemas.openxmlformats.org/drawingml/2006/main">
+            <a:defPPr algn="l">
+              <a:defRPr sz="3000" b="1">
+                <a:solidFill>
+                  <a:srgbClr val="FFFFFF"/>
+                </a:solidFill>
+                <a:latin typeface="微软雅黑"/>
+                <a:ea typeface="微软雅黑"/>
+                <a:cs typeface="微软雅黑"/>
+              </a:defRPr>
+            </a:defPPr>
+          </a:lstStyle>
           <a:p xmlns:a="http://schemas.openxmlformats.org/drawingml/2006/main">
             <a:pPr algn="l">
-              <a:lnSpc>
-                <a:spcPct val="118000"/>
-              </a:lnSpc>
-              <a:buNone/>
+              <a:defRPr sz="3000" b="1">
+                <a:solidFill>
+                  <a:srgbClr val="FFFFFF"/>
+                </a:solidFill>
+                <a:latin typeface="微软雅黑"/>
+                <a:ea typeface="微软雅黑"/>
+                <a:cs typeface="微软雅黑"/>
+              </a:defRPr>
             </a:pPr>
             <a:r>
               <a:rPr sz="3000" b="1">
@@ -17088,965 +13957,337 @@
                 <a:ea typeface="微软雅黑"/>
                 <a:cs typeface="微软雅黑"/>
               </a:rPr>
-              <a:t>受限循环将升级为最小工作流</a:t>
-            </a:r>
-            <a:endParaRPr/>
-          </a:p>
-        </p:txBody>
-      </p:sp>
-      <p:sp>
-        <p:nvSpPr>
-          <p:cNvPr id="5" name="Slide Number Placeholder 4">
-            <a:extLst xmlns:a="http://schemas.openxmlformats.org/drawingml/2006/main">
-              <a:ext uri="{FF2B5EF4-FFF2-40B4-BE49-F238E27FC236}">
-                <a16:creationId xmlns:a16="http://schemas.microsoft.com/office/drawing/2014/main" id="{EBA5909F-738E-F60C-BE8C-B3F1D94548E5}"/>
-              </a:ext>
-            </a:extLst>
-          </p:cNvPr>
-          <p:cNvSpPr>
-            <a:spLocks xmlns:a="http://schemas.openxmlformats.org/drawingml/2006/main" noGrp="1"/>
-          </p:cNvSpPr>
-          <p:nvPr>
-            <p:ph type="sldNum" idx="10"/>
-          </p:nvPr>
-        </p:nvSpPr>
-        <p:spPr/>
-        <p:txBody>
-          <a:bodyPr xmlns:a="http://schemas.openxmlformats.org/drawingml/2006/main"/>
-          <a:lstStyle xmlns:a="http://schemas.openxmlformats.org/drawingml/2006/main"/>
-          <a:p xmlns:a="http://schemas.openxmlformats.org/drawingml/2006/main">
-            <a:fld id="{844E025A-983C-6D44-79C6-4612AACD43FC}" type="slidenum">
+              <a:t>保留本课决定，准备下一课输入</a:t>
+            </a:r>
+          </a:p>
+        </p:txBody>
+      </p:sp>
+      <p:sp>
+        <p:nvSpPr>
+          <p:cNvPr id="2" name="judgment-body-0">
+            <a:extLst xmlns:a="http://schemas.openxmlformats.org/drawingml/2006/main">
+              <a:ext uri="{FF2B5EF4-FFF2-40B4-BE49-F238E27FC236}">
+                <a16:creationId xmlns:a16="http://schemas.microsoft.com/office/drawing/2014/main" id="{47FA7F10-8578-45AB-A0B2-0E6B5848FD6D}"/>
+              </a:ext>
+            </a:extLst>
+          </p:cNvPr>
+          <p:cNvSpPr>
+            <a:spLocks xmlns:a="http://schemas.openxmlformats.org/drawingml/2006/main" noGrp="1"/>
+          </p:cNvSpPr>
+          <p:nvPr/>
+        </p:nvSpPr>
+        <p:spPr>
+          <a:xfrm xmlns:a="http://schemas.openxmlformats.org/drawingml/2006/main">
+            <a:off x="666750" y="1066800"/>
+            <a:ext cx="10858500" cy="1009650"/>
+          </a:xfrm>
+          <a:prstGeom xmlns:a="http://schemas.openxmlformats.org/drawingml/2006/main" prst="rect">
+            <a:avLst/>
+          </a:prstGeom>
+          <a:noFill xmlns:a="http://schemas.openxmlformats.org/drawingml/2006/main"/>
+          <a:ln xmlns:a="http://schemas.openxmlformats.org/drawingml/2006/main" w="0">
+            <a:noFill/>
+          </a:ln>
+        </p:spPr>
+        <p:txBody>
+          <a:bodyPr xmlns:a="http://schemas.openxmlformats.org/drawingml/2006/main" lIns="0" tIns="0" rIns="0" bIns="0" anchor="t"/>
+          <a:lstStyle xmlns:a="http://schemas.openxmlformats.org/drawingml/2006/main">
+            <a:defPPr algn="l">
+              <a:defRPr sz="2400" b="0">
+                <a:solidFill>
+                  <a:srgbClr val="263746"/>
+                </a:solidFill>
+                <a:latin typeface="微软雅黑"/>
+                <a:ea typeface="微软雅黑"/>
+                <a:cs typeface="微软雅黑"/>
+              </a:defRPr>
+            </a:defPPr>
+          </a:lstStyle>
+          <a:p xmlns:a="http://schemas.openxmlformats.org/drawingml/2006/main">
+            <a:pPr algn="l">
+              <a:defRPr sz="2400" b="0">
+                <a:solidFill>
+                  <a:srgbClr val="263746"/>
+                </a:solidFill>
+                <a:latin typeface="微软雅黑"/>
+                <a:ea typeface="微软雅黑"/>
+                <a:cs typeface="微软雅黑"/>
+              </a:defRPr>
+            </a:pPr>
+            <a:r>
+              <a:rPr sz="2400" b="0">
+                <a:solidFill>
+                  <a:srgbClr val="263746"/>
+                </a:solidFill>
+                <a:latin typeface="微软雅黑"/>
+                <a:ea typeface="微软雅黑"/>
+                <a:cs typeface="微软雅黑"/>
+              </a:rPr>
+              <a:t>L12 以已验证动作设计一个实质工作流环节。</a:t>
+            </a:r>
+          </a:p>
+        </p:txBody>
+      </p:sp>
+      <p:sp>
+        <p:nvSpPr>
+          <p:cNvPr id="3" name="judgment-body-1">
+            <a:extLst xmlns:a="http://schemas.openxmlformats.org/drawingml/2006/main">
+              <a:ext uri="{FF2B5EF4-FFF2-40B4-BE49-F238E27FC236}">
+                <a16:creationId xmlns:a16="http://schemas.microsoft.com/office/drawing/2014/main" id="{A94A4AA8-706C-4D93-9528-C28A42273090}"/>
+              </a:ext>
+            </a:extLst>
+          </p:cNvPr>
+          <p:cNvSpPr>
+            <a:spLocks xmlns:a="http://schemas.openxmlformats.org/drawingml/2006/main" noGrp="1"/>
+          </p:cNvSpPr>
+          <p:nvPr/>
+        </p:nvSpPr>
+        <p:spPr>
+          <a:xfrm xmlns:a="http://schemas.openxmlformats.org/drawingml/2006/main">
+            <a:off x="666750" y="2238375"/>
+            <a:ext cx="10858500" cy="2076450"/>
+          </a:xfrm>
+          <a:prstGeom xmlns:a="http://schemas.openxmlformats.org/drawingml/2006/main" prst="rect">
+            <a:avLst/>
+          </a:prstGeom>
+          <a:noFill xmlns:a="http://schemas.openxmlformats.org/drawingml/2006/main"/>
+          <a:ln xmlns:a="http://schemas.openxmlformats.org/drawingml/2006/main" w="0">
+            <a:noFill/>
+          </a:ln>
+        </p:spPr>
+        <p:txBody>
+          <a:bodyPr xmlns:a="http://schemas.openxmlformats.org/drawingml/2006/main" lIns="0" tIns="0" rIns="0" bIns="0" anchor="t"/>
+          <a:lstStyle xmlns:a="http://schemas.openxmlformats.org/drawingml/2006/main">
+            <a:defPPr algn="l">
+              <a:defRPr sz="2400" b="0">
+                <a:solidFill>
+                  <a:srgbClr val="263746"/>
+                </a:solidFill>
+                <a:latin typeface="微软雅黑"/>
+                <a:ea typeface="微软雅黑"/>
+                <a:cs typeface="微软雅黑"/>
+              </a:defRPr>
+            </a:defPPr>
+          </a:lstStyle>
+          <a:p xmlns:a="http://schemas.openxmlformats.org/drawingml/2006/main">
+            <a:pPr algn="l">
+              <a:defRPr sz="2400" b="0">
+                <a:solidFill>
+                  <a:srgbClr val="263746"/>
+                </a:solidFill>
+                <a:latin typeface="微软雅黑"/>
+                <a:ea typeface="微软雅黑"/>
+                <a:cs typeface="微软雅黑"/>
+              </a:defRPr>
+            </a:pPr>
+            <a:r>
+              <a:rPr sz="2400" b="0">
+                <a:solidFill>
+                  <a:srgbClr val="263746"/>
+                </a:solidFill>
+                <a:latin typeface="微软雅黑"/>
+                <a:ea typeface="微软雅黑"/>
+                <a:cs typeface="微软雅黑"/>
+              </a:rPr>
+              <a:t>回写已有项目：本人队列运行目录、恢复证据与停止决定</a:t>
+            </a:r>
+          </a:p>
+        </p:txBody>
+      </p:sp>
+      <p:sp>
+        <p:nvSpPr>
+          <p:cNvPr id="4" name="judgment-body-2">
+            <a:extLst xmlns:a="http://schemas.openxmlformats.org/drawingml/2006/main">
+              <a:ext uri="{FF2B5EF4-FFF2-40B4-BE49-F238E27FC236}">
+                <a16:creationId xmlns:a16="http://schemas.microsoft.com/office/drawing/2014/main" id="{D2CC4186-0F33-436D-A8A9-EEBEBFB06F72}"/>
+              </a:ext>
+            </a:extLst>
+          </p:cNvPr>
+          <p:cNvSpPr>
+            <a:spLocks xmlns:a="http://schemas.openxmlformats.org/drawingml/2006/main" noGrp="1"/>
+          </p:cNvSpPr>
+          <p:nvPr/>
+        </p:nvSpPr>
+        <p:spPr>
+          <a:xfrm xmlns:a="http://schemas.openxmlformats.org/drawingml/2006/main">
+            <a:off x="666750" y="4495800"/>
+            <a:ext cx="10858500" cy="1409700"/>
+          </a:xfrm>
+          <a:prstGeom xmlns:a="http://schemas.openxmlformats.org/drawingml/2006/main" prst="rect">
+            <a:avLst/>
+          </a:prstGeom>
+          <a:noFill xmlns:a="http://schemas.openxmlformats.org/drawingml/2006/main"/>
+          <a:ln xmlns:a="http://schemas.openxmlformats.org/drawingml/2006/main" w="0">
+            <a:noFill/>
+          </a:ln>
+        </p:spPr>
+        <p:txBody>
+          <a:bodyPr xmlns:a="http://schemas.openxmlformats.org/drawingml/2006/main" lIns="0" tIns="0" rIns="0" bIns="0" anchor="t"/>
+          <a:lstStyle xmlns:a="http://schemas.openxmlformats.org/drawingml/2006/main">
+            <a:defPPr algn="l">
+              <a:defRPr sz="2200" b="0">
+                <a:solidFill>
+                  <a:srgbClr val="1F4D78"/>
+                </a:solidFill>
+                <a:latin typeface="微软雅黑"/>
+                <a:ea typeface="微软雅黑"/>
+                <a:cs typeface="微软雅黑"/>
+              </a:defRPr>
+            </a:defPPr>
+          </a:lstStyle>
+          <a:p xmlns:a="http://schemas.openxmlformats.org/drawingml/2006/main">
+            <a:pPr algn="l">
+              <a:defRPr sz="2200" b="0">
+                <a:solidFill>
+                  <a:srgbClr val="1F4D78"/>
+                </a:solidFill>
+                <a:latin typeface="微软雅黑"/>
+                <a:ea typeface="微软雅黑"/>
+                <a:cs typeface="微软雅黑"/>
+              </a:defRPr>
+            </a:pPr>
+            <a:r>
+              <a:rPr sz="2200" b="0">
+                <a:solidFill>
+                  <a:srgbClr val="1F4D78"/>
+                </a:solidFill>
+                <a:latin typeface="微软雅黑"/>
+                <a:ea typeface="微软雅黑"/>
+                <a:cs typeface="微软雅黑"/>
+              </a:rPr>
+              <a:t>只读指定段落，补课堂留下的真实缺口。安装与排障计入课外总预算。</a:t>
+            </a:r>
+          </a:p>
+        </p:txBody>
+      </p:sp>
+      <p:sp>
+        <p:nvSpPr>
+          <p:cNvPr id="5" name="judgment-source">
+            <a:extLst xmlns:a="http://schemas.openxmlformats.org/drawingml/2006/main">
+              <a:ext uri="{FF2B5EF4-FFF2-40B4-BE49-F238E27FC236}">
+                <a16:creationId xmlns:a16="http://schemas.microsoft.com/office/drawing/2014/main" id="{E58A1AAB-057E-40B3-AA9E-3936408F5944}"/>
+              </a:ext>
+            </a:extLst>
+          </p:cNvPr>
+          <p:cNvSpPr>
+            <a:spLocks xmlns:a="http://schemas.openxmlformats.org/drawingml/2006/main" noGrp="1"/>
+          </p:cNvSpPr>
+          <p:nvPr/>
+        </p:nvSpPr>
+        <p:spPr>
+          <a:xfrm xmlns:a="http://schemas.openxmlformats.org/drawingml/2006/main">
+            <a:off x="666750" y="6276975"/>
+            <a:ext cx="10572750" cy="209550"/>
+          </a:xfrm>
+          <a:prstGeom xmlns:a="http://schemas.openxmlformats.org/drawingml/2006/main" prst="rect">
+            <a:avLst/>
+          </a:prstGeom>
+          <a:noFill xmlns:a="http://schemas.openxmlformats.org/drawingml/2006/main"/>
+          <a:ln xmlns:a="http://schemas.openxmlformats.org/drawingml/2006/main" w="0">
+            <a:noFill/>
+          </a:ln>
+        </p:spPr>
+        <p:txBody>
+          <a:bodyPr xmlns:a="http://schemas.openxmlformats.org/drawingml/2006/main" lIns="0" tIns="0" rIns="0" bIns="0" anchor="t"/>
+          <a:lstStyle xmlns:a="http://schemas.openxmlformats.org/drawingml/2006/main">
+            <a:defPPr algn="l">
+              <a:defRPr sz="1100" b="0">
+                <a:solidFill>
+                  <a:srgbClr val="667684"/>
+                </a:solidFill>
+                <a:latin typeface="微软雅黑"/>
+                <a:ea typeface="微软雅黑"/>
+                <a:cs typeface="微软雅黑"/>
+              </a:defRPr>
+            </a:defPPr>
+          </a:lstStyle>
+          <a:p xmlns:a="http://schemas.openxmlformats.org/drawingml/2006/main">
+            <a:pPr algn="l">
+              <a:defRPr sz="1100" b="0">
+                <a:solidFill>
+                  <a:srgbClr val="667684"/>
+                </a:solidFill>
+                <a:latin typeface="微软雅黑"/>
+                <a:ea typeface="微软雅黑"/>
+                <a:cs typeface="微软雅黑"/>
+              </a:defRPr>
+            </a:pPr>
+            <a:r>
+              <a:rPr sz="1100" b="0">
+                <a:solidFill>
+                  <a:srgbClr val="667684"/>
+                </a:solidFill>
+                <a:latin typeface="微软雅黑"/>
+                <a:ea typeface="微软雅黑"/>
+                <a:cs typeface="微软雅黑"/>
+              </a:rPr>
+              <a:t>来源：本课判断任务与讲义；构造材料及真实来源按材料包标识</a:t>
+            </a:r>
+          </a:p>
+        </p:txBody>
+      </p:sp>
+      <p:sp>
+        <p:nvSpPr>
+          <p:cNvPr id="6" name="judgment-page">
+            <a:extLst xmlns:a="http://schemas.openxmlformats.org/drawingml/2006/main">
+              <a:ext uri="{FF2B5EF4-FFF2-40B4-BE49-F238E27FC236}">
+                <a16:creationId xmlns:a16="http://schemas.microsoft.com/office/drawing/2014/main" id="{27748C8C-B4FC-441F-B673-67A00D6D4E95}"/>
+              </a:ext>
+            </a:extLst>
+          </p:cNvPr>
+          <p:cNvSpPr>
+            <a:spLocks xmlns:a="http://schemas.openxmlformats.org/drawingml/2006/main" noGrp="1"/>
+          </p:cNvSpPr>
+          <p:nvPr/>
+        </p:nvSpPr>
+        <p:spPr>
+          <a:xfrm xmlns:a="http://schemas.openxmlformats.org/drawingml/2006/main">
+            <a:off x="11715750" y="6562725"/>
+            <a:ext cx="238125" cy="171450"/>
+          </a:xfrm>
+          <a:prstGeom xmlns:a="http://schemas.openxmlformats.org/drawingml/2006/main" prst="rect">
+            <a:avLst/>
+          </a:prstGeom>
+          <a:noFill xmlns:a="http://schemas.openxmlformats.org/drawingml/2006/main"/>
+          <a:ln xmlns:a="http://schemas.openxmlformats.org/drawingml/2006/main" w="0">
+            <a:noFill/>
+          </a:ln>
+        </p:spPr>
+        <p:txBody>
+          <a:bodyPr xmlns:a="http://schemas.openxmlformats.org/drawingml/2006/main" lIns="0" tIns="0" rIns="0" bIns="0" anchor="t"/>
+          <a:lstStyle xmlns:a="http://schemas.openxmlformats.org/drawingml/2006/main">
+            <a:defPPr algn="l">
+              <a:defRPr sz="900" b="0">
+                <a:solidFill>
+                  <a:srgbClr val="A5A5A5"/>
+                </a:solidFill>
+                <a:latin typeface="微软雅黑"/>
+                <a:ea typeface="微软雅黑"/>
+                <a:cs typeface="微软雅黑"/>
+              </a:defRPr>
+            </a:defPPr>
+          </a:lstStyle>
+          <a:p xmlns:a="http://schemas.openxmlformats.org/drawingml/2006/main">
+            <a:pPr algn="l">
+              <a:defRPr sz="900" b="0">
+                <a:solidFill>
+                  <a:srgbClr val="A5A5A5"/>
+                </a:solidFill>
+                <a:latin typeface="微软雅黑"/>
+                <a:ea typeface="微软雅黑"/>
+                <a:cs typeface="微软雅黑"/>
+              </a:defRPr>
+            </a:pPr>
+            <a:r>
+              <a:rPr sz="900" b="0">
+                <a:solidFill>
+                  <a:srgbClr val="A5A5A5"/>
+                </a:solidFill>
+                <a:latin typeface="微软雅黑"/>
+                <a:ea typeface="微软雅黑"/>
+                <a:cs typeface="微软雅黑"/>
+              </a:rPr>
               <a:t>20</a:t>
-            </a:fld>
-            <a:endParaRPr/>
-          </a:p>
-        </p:txBody>
-      </p:sp>
-      <p:sp>
-        <p:nvSpPr>
-          <p:cNvPr id="6" name="brand-header">
-            <a:extLst xmlns:a="http://schemas.openxmlformats.org/drawingml/2006/main">
-              <a:ext uri="{FF2B5EF4-FFF2-40B4-BE49-F238E27FC236}">
-                <a16:creationId xmlns:a16="http://schemas.microsoft.com/office/drawing/2014/main" id="{63C468C4-472E-4E45-9242-123DA072AEDE}"/>
-              </a:ext>
-            </a:extLst>
-          </p:cNvPr>
-          <p:cNvSpPr>
-            <a:spLocks xmlns:a="http://schemas.openxmlformats.org/drawingml/2006/main" noGrp="1"/>
-          </p:cNvSpPr>
-          <p:nvPr/>
-        </p:nvSpPr>
-        <p:spPr>
-          <a:xfrm xmlns:a="http://schemas.openxmlformats.org/drawingml/2006/main">
-            <a:off x="0" y="0"/>
-            <a:ext cx="11887200" cy="685800"/>
-          </a:xfrm>
-          <a:prstGeom xmlns:a="http://schemas.openxmlformats.org/drawingml/2006/main" prst="rect">
-            <a:avLst/>
-          </a:prstGeom>
-          <a:solidFill xmlns:a="http://schemas.openxmlformats.org/drawingml/2006/main">
-            <a:srgbClr val="C8161E"/>
-          </a:solidFill>
-          <a:ln xmlns:a="http://schemas.openxmlformats.org/drawingml/2006/main" w="0">
-            <a:noFill/>
-          </a:ln>
-        </p:spPr>
-      </p:sp>
-      <p:pic>
-        <p:nvPicPr>
-          <p:cNvPr id="27" name=""/>
-          <p:cNvPicPr>
-            <a:picLocks xmlns:a="http://schemas.openxmlformats.org/drawingml/2006/main" noChangeAspect="1"/>
-          </p:cNvPicPr>
-          <p:nvPr/>
-        </p:nvPicPr>
-        <p:blipFill>
-          <a:blip xmlns:r="http://schemas.openxmlformats.org/officeDocument/2006/relationships" xmlns:a="http://schemas.openxmlformats.org/drawingml/2006/main" r:embed="R7c79cec7ec3240e0"/>
-          <a:stretch xmlns:a="http://schemas.openxmlformats.org/drawingml/2006/main"/>
-        </p:blipFill>
-        <p:spPr>
-          <a:xfrm xmlns:a="http://schemas.openxmlformats.org/drawingml/2006/main">
-            <a:off x="323850" y="76200"/>
-            <a:ext cx="533400" cy="533400"/>
-          </a:xfrm>
-          <a:prstGeom xmlns:a="http://schemas.openxmlformats.org/drawingml/2006/main" prst="rect">
-            <a:avLst/>
-          </a:prstGeom>
-        </p:spPr>
-      </p:pic>
-      <p:sp>
-        <p:nvSpPr>
-          <p:cNvPr id="8" name="brand-title">
-            <a:extLst xmlns:a="http://schemas.openxmlformats.org/drawingml/2006/main">
-              <a:ext uri="{FF2B5EF4-FFF2-40B4-BE49-F238E27FC236}">
-                <a16:creationId xmlns:a16="http://schemas.microsoft.com/office/drawing/2014/main" id="{5BEEB73D-0C3B-4A73-A9AB-BBA338F31779}"/>
-              </a:ext>
-            </a:extLst>
-          </p:cNvPr>
-          <p:cNvSpPr>
-            <a:spLocks xmlns:a="http://schemas.openxmlformats.org/drawingml/2006/main" noGrp="1"/>
-          </p:cNvSpPr>
-          <p:nvPr/>
-        </p:nvSpPr>
-        <p:spPr>
-          <a:xfrm xmlns:a="http://schemas.openxmlformats.org/drawingml/2006/main">
-            <a:off x="1028700" y="66675"/>
-            <a:ext cx="10477500" cy="552450"/>
-          </a:xfrm>
-          <a:prstGeom xmlns:a="http://schemas.openxmlformats.org/drawingml/2006/main" prst="rect">
-            <a:avLst/>
-          </a:prstGeom>
-          <a:noFill xmlns:a="http://schemas.openxmlformats.org/drawingml/2006/main"/>
-          <a:ln xmlns:a="http://schemas.openxmlformats.org/drawingml/2006/main" w="0">
-            <a:noFill/>
-          </a:ln>
-        </p:spPr>
-        <p:txBody>
-          <a:bodyPr xmlns:a="http://schemas.openxmlformats.org/drawingml/2006/main" lIns="0" tIns="0" rIns="0" bIns="0" anchor="ctr"/>
-          <a:lstStyle xmlns:a="http://schemas.openxmlformats.org/drawingml/2006/main"/>
-          <a:p xmlns:a="http://schemas.openxmlformats.org/drawingml/2006/main">
-            <a:pPr algn="l">
-              <a:lnSpc>
-                <a:spcPct val="118000"/>
-              </a:lnSpc>
-              <a:buNone/>
-              <a:defRPr sz="3000" b="1">
-                <a:solidFill>
-                  <a:srgbClr val="FFFFFF"/>
-                </a:solidFill>
-                <a:latin typeface="微软雅黑"/>
-                <a:ea typeface="微软雅黑"/>
-                <a:cs typeface="微软雅黑"/>
-              </a:defRPr>
-            </a:pPr>
-            <a:r>
-              <a:rPr sz="3000" b="1">
-                <a:solidFill>
-                  <a:srgbClr val="FFFFFF"/>
-                </a:solidFill>
-                <a:latin typeface="微软雅黑"/>
-                <a:ea typeface="微软雅黑"/>
-                <a:cs typeface="微软雅黑"/>
-              </a:rPr>
-              <a:t>受限循环将升级为最小工作流</a:t>
-            </a:r>
-          </a:p>
-        </p:txBody>
-      </p:sp>
-      <p:sp>
-        <p:nvSpPr>
-          <p:cNvPr id="9" name="source">
-            <a:extLst xmlns:a="http://schemas.openxmlformats.org/drawingml/2006/main">
-              <a:ext uri="{FF2B5EF4-FFF2-40B4-BE49-F238E27FC236}">
-                <a16:creationId xmlns:a16="http://schemas.microsoft.com/office/drawing/2014/main" id="{D5F13601-7698-488B-8DF9-7A07B822B43C}"/>
-              </a:ext>
-            </a:extLst>
-          </p:cNvPr>
-          <p:cNvSpPr>
-            <a:spLocks xmlns:a="http://schemas.openxmlformats.org/drawingml/2006/main" noGrp="1"/>
-          </p:cNvSpPr>
-          <p:nvPr/>
-        </p:nvSpPr>
-        <p:spPr>
-          <a:xfrm xmlns:a="http://schemas.openxmlformats.org/drawingml/2006/main">
-            <a:off x="609600" y="6067425"/>
-            <a:ext cx="10763250" cy="209550"/>
-          </a:xfrm>
-          <a:prstGeom xmlns:a="http://schemas.openxmlformats.org/drawingml/2006/main" prst="rect">
-            <a:avLst/>
-          </a:prstGeom>
-          <a:noFill xmlns:a="http://schemas.openxmlformats.org/drawingml/2006/main"/>
-          <a:ln xmlns:a="http://schemas.openxmlformats.org/drawingml/2006/main" w="0">
-            <a:noFill/>
-          </a:ln>
-        </p:spPr>
-        <p:txBody>
-          <a:bodyPr xmlns:a="http://schemas.openxmlformats.org/drawingml/2006/main" lIns="0" tIns="0" rIns="0" bIns="0" anchor="t"/>
-          <a:lstStyle xmlns:a="http://schemas.openxmlformats.org/drawingml/2006/main"/>
-          <a:p xmlns:a="http://schemas.openxmlformats.org/drawingml/2006/main">
-            <a:pPr algn="l">
-              <a:lnSpc>
-                <a:spcPct val="118000"/>
-              </a:lnSpc>
-              <a:buNone/>
-              <a:defRPr sz="1100" b="0">
-                <a:solidFill>
-                  <a:srgbClr val="66727D"/>
-                </a:solidFill>
-                <a:latin typeface="微软雅黑"/>
-                <a:ea typeface="微软雅黑"/>
-                <a:cs typeface="微软雅黑"/>
-              </a:defRPr>
-            </a:pPr>
-            <a:r>
-              <a:rPr sz="1100" b="0">
-                <a:solidFill>
-                  <a:srgbClr val="66727D"/>
-                </a:solidFill>
-                <a:latin typeface="微软雅黑"/>
-                <a:ea typeface="微软雅黑"/>
-                <a:cs typeface="微软雅黑"/>
-              </a:rPr>
-              <a:t>来源：lesson-11/slides.md；课程工件与讲义见 speaker notes</a:t>
-            </a:r>
-          </a:p>
-        </p:txBody>
-      </p:sp>
-      <p:sp>
-        <p:nvSpPr>
-          <p:cNvPr id="10" name="chain-line-0">
-            <a:extLst xmlns:a="http://schemas.openxmlformats.org/drawingml/2006/main">
-              <a:ext uri="{FF2B5EF4-FFF2-40B4-BE49-F238E27FC236}">
-                <a16:creationId xmlns:a16="http://schemas.microsoft.com/office/drawing/2014/main" id="{172B414B-8962-47AA-BA37-2014AF0D056C}"/>
-              </a:ext>
-            </a:extLst>
-          </p:cNvPr>
-          <p:cNvSpPr>
-            <a:spLocks xmlns:a="http://schemas.openxmlformats.org/drawingml/2006/main" noGrp="1"/>
-          </p:cNvSpPr>
-          <p:nvPr/>
-        </p:nvSpPr>
-        <p:spPr>
-          <a:xfrm xmlns:a="http://schemas.openxmlformats.org/drawingml/2006/main">
-            <a:off x="666750" y="3105150"/>
-            <a:ext cx="2095500" cy="14288"/>
-          </a:xfrm>
-          <a:prstGeom xmlns:a="http://schemas.openxmlformats.org/drawingml/2006/main" prst="rect">
-            <a:avLst/>
-          </a:prstGeom>
-          <a:solidFill xmlns:a="http://schemas.openxmlformats.org/drawingml/2006/main">
-            <a:srgbClr val="1F4D78"/>
-          </a:solidFill>
-          <a:ln xmlns:a="http://schemas.openxmlformats.org/drawingml/2006/main" w="0">
-            <a:noFill/>
-          </a:ln>
-        </p:spPr>
-      </p:sp>
-      <p:sp>
-        <p:nvSpPr>
-          <p:cNvPr id="11" name="chain-0">
-            <a:extLst xmlns:a="http://schemas.openxmlformats.org/drawingml/2006/main">
-              <a:ext uri="{FF2B5EF4-FFF2-40B4-BE49-F238E27FC236}">
-                <a16:creationId xmlns:a16="http://schemas.microsoft.com/office/drawing/2014/main" id="{64F94D8B-40A4-4C2D-94CA-DB087FE5F12E}"/>
-              </a:ext>
-            </a:extLst>
-          </p:cNvPr>
-          <p:cNvSpPr>
-            <a:spLocks xmlns:a="http://schemas.openxmlformats.org/drawingml/2006/main" noGrp="1"/>
-          </p:cNvSpPr>
-          <p:nvPr/>
-        </p:nvSpPr>
-        <p:spPr>
-          <a:xfrm xmlns:a="http://schemas.openxmlformats.org/drawingml/2006/main">
-            <a:off x="666750" y="2381250"/>
-            <a:ext cx="2095500" cy="666750"/>
-          </a:xfrm>
-          <a:prstGeom xmlns:a="http://schemas.openxmlformats.org/drawingml/2006/main" prst="rect">
-            <a:avLst/>
-          </a:prstGeom>
-          <a:noFill xmlns:a="http://schemas.openxmlformats.org/drawingml/2006/main"/>
-          <a:ln xmlns:a="http://schemas.openxmlformats.org/drawingml/2006/main" w="0">
-            <a:noFill/>
-          </a:ln>
-        </p:spPr>
-        <p:txBody>
-          <a:bodyPr xmlns:a="http://schemas.openxmlformats.org/drawingml/2006/main" lIns="0" tIns="0" rIns="0" bIns="0" anchor="ctr"/>
-          <a:lstStyle xmlns:a="http://schemas.openxmlformats.org/drawingml/2006/main"/>
-          <a:p xmlns:a="http://schemas.openxmlformats.org/drawingml/2006/main">
-            <a:pPr algn="ctr">
-              <a:lnSpc>
-                <a:spcPct val="118000"/>
-              </a:lnSpc>
-              <a:buNone/>
-              <a:defRPr sz="2200" b="0">
-                <a:solidFill>
-                  <a:srgbClr val="1F4D78"/>
-                </a:solidFill>
-                <a:latin typeface="微软雅黑"/>
-                <a:ea typeface="微软雅黑"/>
-                <a:cs typeface="微软雅黑"/>
-              </a:defRPr>
-            </a:pPr>
-            <a:r>
-              <a:rPr sz="2200" b="0">
-                <a:solidFill>
-                  <a:srgbClr val="1F4D78"/>
-                </a:solidFill>
-                <a:latin typeface="微软雅黑"/>
-                <a:ea typeface="微软雅黑"/>
-                <a:cs typeface="微软雅黑"/>
-              </a:rPr>
-              <a:t>L10</a:t>
-            </a:r>
-          </a:p>
-          <a:p xmlns:a="http://schemas.openxmlformats.org/drawingml/2006/main">
-            <a:pPr algn="ctr">
-              <a:lnSpc>
-                <a:spcPct val="118000"/>
-              </a:lnSpc>
-              <a:buNone/>
-              <a:defRPr sz="2200" b="0">
-                <a:solidFill>
-                  <a:srgbClr val="1F4D78"/>
-                </a:solidFill>
-                <a:latin typeface="微软雅黑"/>
-                <a:ea typeface="微软雅黑"/>
-                <a:cs typeface="微软雅黑"/>
-              </a:defRPr>
-            </a:pPr>
-            <a:r>
-              <a:rPr sz="2200" b="0">
-                <a:solidFill>
-                  <a:srgbClr val="1F4D78"/>
-                </a:solidFill>
-                <a:latin typeface="微软雅黑"/>
-                <a:ea typeface="微软雅黑"/>
-                <a:cs typeface="微软雅黑"/>
-              </a:rPr>
-              <a:t>一次执行</a:t>
-            </a:r>
-          </a:p>
-        </p:txBody>
-      </p:sp>
-      <p:sp>
-        <p:nvSpPr>
-          <p:cNvPr id="12" name="chain-arrow-0">
-            <a:extLst xmlns:a="http://schemas.openxmlformats.org/drawingml/2006/main">
-              <a:ext uri="{FF2B5EF4-FFF2-40B4-BE49-F238E27FC236}">
-                <a16:creationId xmlns:a16="http://schemas.microsoft.com/office/drawing/2014/main" id="{18AA0A3E-E109-47B4-A072-BD013759357C}"/>
-              </a:ext>
-            </a:extLst>
-          </p:cNvPr>
-          <p:cNvSpPr>
-            <a:spLocks xmlns:a="http://schemas.openxmlformats.org/drawingml/2006/main" noGrp="1"/>
-          </p:cNvSpPr>
-          <p:nvPr/>
-        </p:nvSpPr>
-        <p:spPr>
-          <a:xfrm xmlns:a="http://schemas.openxmlformats.org/drawingml/2006/main">
-            <a:off x="2762250" y="2552700"/>
-            <a:ext cx="762000" cy="323850"/>
-          </a:xfrm>
-          <a:prstGeom xmlns:a="http://schemas.openxmlformats.org/drawingml/2006/main" prst="rect">
-            <a:avLst/>
-          </a:prstGeom>
-          <a:noFill xmlns:a="http://schemas.openxmlformats.org/drawingml/2006/main"/>
-          <a:ln xmlns:a="http://schemas.openxmlformats.org/drawingml/2006/main" w="0">
-            <a:noFill/>
-          </a:ln>
-        </p:spPr>
-        <p:txBody>
-          <a:bodyPr xmlns:a="http://schemas.openxmlformats.org/drawingml/2006/main" lIns="0" tIns="0" rIns="0" bIns="0" anchor="ctr"/>
-          <a:lstStyle xmlns:a="http://schemas.openxmlformats.org/drawingml/2006/main"/>
-          <a:p xmlns:a="http://schemas.openxmlformats.org/drawingml/2006/main">
-            <a:pPr algn="ctr">
-              <a:lnSpc>
-                <a:spcPct val="118000"/>
-              </a:lnSpc>
-              <a:buNone/>
-              <a:defRPr sz="2400" b="0">
-                <a:solidFill>
-                  <a:srgbClr val="1F4D78"/>
-                </a:solidFill>
-                <a:latin typeface="微软雅黑"/>
-                <a:ea typeface="微软雅黑"/>
-                <a:cs typeface="微软雅黑"/>
-              </a:defRPr>
-            </a:pPr>
-            <a:r>
-              <a:rPr sz="2400" b="0">
-                <a:solidFill>
-                  <a:srgbClr val="1F4D78"/>
-                </a:solidFill>
-                <a:latin typeface="微软雅黑"/>
-                <a:ea typeface="微软雅黑"/>
-                <a:cs typeface="微软雅黑"/>
-              </a:rPr>
-              <a:t>→</a:t>
-            </a:r>
-          </a:p>
-        </p:txBody>
-      </p:sp>
-      <p:sp>
-        <p:nvSpPr>
-          <p:cNvPr id="13" name="chain-line-1">
-            <a:extLst xmlns:a="http://schemas.openxmlformats.org/drawingml/2006/main">
-              <a:ext uri="{FF2B5EF4-FFF2-40B4-BE49-F238E27FC236}">
-                <a16:creationId xmlns:a16="http://schemas.microsoft.com/office/drawing/2014/main" id="{B3B1FBF2-5BF5-4195-8DE7-A369542B7CE0}"/>
-              </a:ext>
-            </a:extLst>
-          </p:cNvPr>
-          <p:cNvSpPr>
-            <a:spLocks xmlns:a="http://schemas.openxmlformats.org/drawingml/2006/main" noGrp="1"/>
-          </p:cNvSpPr>
-          <p:nvPr/>
-        </p:nvSpPr>
-        <p:spPr>
-          <a:xfrm xmlns:a="http://schemas.openxmlformats.org/drawingml/2006/main">
-            <a:off x="3524250" y="3105150"/>
-            <a:ext cx="2095500" cy="14288"/>
-          </a:xfrm>
-          <a:prstGeom xmlns:a="http://schemas.openxmlformats.org/drawingml/2006/main" prst="rect">
-            <a:avLst/>
-          </a:prstGeom>
-          <a:solidFill xmlns:a="http://schemas.openxmlformats.org/drawingml/2006/main">
-            <a:srgbClr val="1F4D78"/>
-          </a:solidFill>
-          <a:ln xmlns:a="http://schemas.openxmlformats.org/drawingml/2006/main" w="0">
-            <a:noFill/>
-          </a:ln>
-        </p:spPr>
-      </p:sp>
-      <p:sp>
-        <p:nvSpPr>
-          <p:cNvPr id="14" name="chain-1">
-            <a:extLst xmlns:a="http://schemas.openxmlformats.org/drawingml/2006/main">
-              <a:ext uri="{FF2B5EF4-FFF2-40B4-BE49-F238E27FC236}">
-                <a16:creationId xmlns:a16="http://schemas.microsoft.com/office/drawing/2014/main" id="{D17CF2CF-B8D8-4AB0-9D90-52B2705B1E31}"/>
-              </a:ext>
-            </a:extLst>
-          </p:cNvPr>
-          <p:cNvSpPr>
-            <a:spLocks xmlns:a="http://schemas.openxmlformats.org/drawingml/2006/main" noGrp="1"/>
-          </p:cNvSpPr>
-          <p:nvPr/>
-        </p:nvSpPr>
-        <p:spPr>
-          <a:xfrm xmlns:a="http://schemas.openxmlformats.org/drawingml/2006/main">
-            <a:off x="3524250" y="2381250"/>
-            <a:ext cx="2095500" cy="666750"/>
-          </a:xfrm>
-          <a:prstGeom xmlns:a="http://schemas.openxmlformats.org/drawingml/2006/main" prst="rect">
-            <a:avLst/>
-          </a:prstGeom>
-          <a:noFill xmlns:a="http://schemas.openxmlformats.org/drawingml/2006/main"/>
-          <a:ln xmlns:a="http://schemas.openxmlformats.org/drawingml/2006/main" w="0">
-            <a:noFill/>
-          </a:ln>
-        </p:spPr>
-        <p:txBody>
-          <a:bodyPr xmlns:a="http://schemas.openxmlformats.org/drawingml/2006/main" lIns="0" tIns="0" rIns="0" bIns="0" anchor="ctr"/>
-          <a:lstStyle xmlns:a="http://schemas.openxmlformats.org/drawingml/2006/main"/>
-          <a:p xmlns:a="http://schemas.openxmlformats.org/drawingml/2006/main">
-            <a:pPr algn="ctr">
-              <a:lnSpc>
-                <a:spcPct val="118000"/>
-              </a:lnSpc>
-              <a:buNone/>
-              <a:defRPr sz="2200" b="0">
-                <a:solidFill>
-                  <a:srgbClr val="1F4D78"/>
-                </a:solidFill>
-                <a:latin typeface="微软雅黑"/>
-                <a:ea typeface="微软雅黑"/>
-                <a:cs typeface="微软雅黑"/>
-              </a:defRPr>
-            </a:pPr>
-            <a:r>
-              <a:rPr sz="2200" b="0">
-                <a:solidFill>
-                  <a:srgbClr val="1F4D78"/>
-                </a:solidFill>
-                <a:latin typeface="微软雅黑"/>
-                <a:ea typeface="微软雅黑"/>
-                <a:cs typeface="微软雅黑"/>
-              </a:rPr>
-              <a:t>L11</a:t>
-            </a:r>
-          </a:p>
-          <a:p xmlns:a="http://schemas.openxmlformats.org/drawingml/2006/main">
-            <a:pPr algn="ctr">
-              <a:lnSpc>
-                <a:spcPct val="118000"/>
-              </a:lnSpc>
-              <a:buNone/>
-              <a:defRPr sz="2200" b="0">
-                <a:solidFill>
-                  <a:srgbClr val="1F4D78"/>
-                </a:solidFill>
-                <a:latin typeface="微软雅黑"/>
-                <a:ea typeface="微软雅黑"/>
-                <a:cs typeface="微软雅黑"/>
-              </a:defRPr>
-            </a:pPr>
-            <a:r>
-              <a:rPr sz="2200" b="0">
-                <a:solidFill>
-                  <a:srgbClr val="1F4D78"/>
-                </a:solidFill>
-                <a:latin typeface="微软雅黑"/>
-                <a:ea typeface="微软雅黑"/>
-                <a:cs typeface="微软雅黑"/>
-              </a:rPr>
-              <a:t>冻结循环</a:t>
-            </a:r>
-          </a:p>
-        </p:txBody>
-      </p:sp>
-      <p:sp>
-        <p:nvSpPr>
-          <p:cNvPr id="15" name="chain-arrow-1">
-            <a:extLst xmlns:a="http://schemas.openxmlformats.org/drawingml/2006/main">
-              <a:ext uri="{FF2B5EF4-FFF2-40B4-BE49-F238E27FC236}">
-                <a16:creationId xmlns:a16="http://schemas.microsoft.com/office/drawing/2014/main" id="{48FBC2C3-BA0E-4D21-9561-420BE854420E}"/>
-              </a:ext>
-            </a:extLst>
-          </p:cNvPr>
-          <p:cNvSpPr>
-            <a:spLocks xmlns:a="http://schemas.openxmlformats.org/drawingml/2006/main" noGrp="1"/>
-          </p:cNvSpPr>
-          <p:nvPr/>
-        </p:nvSpPr>
-        <p:spPr>
-          <a:xfrm xmlns:a="http://schemas.openxmlformats.org/drawingml/2006/main">
-            <a:off x="5619750" y="2552700"/>
-            <a:ext cx="762000" cy="323850"/>
-          </a:xfrm>
-          <a:prstGeom xmlns:a="http://schemas.openxmlformats.org/drawingml/2006/main" prst="rect">
-            <a:avLst/>
-          </a:prstGeom>
-          <a:noFill xmlns:a="http://schemas.openxmlformats.org/drawingml/2006/main"/>
-          <a:ln xmlns:a="http://schemas.openxmlformats.org/drawingml/2006/main" w="0">
-            <a:noFill/>
-          </a:ln>
-        </p:spPr>
-        <p:txBody>
-          <a:bodyPr xmlns:a="http://schemas.openxmlformats.org/drawingml/2006/main" lIns="0" tIns="0" rIns="0" bIns="0" anchor="ctr"/>
-          <a:lstStyle xmlns:a="http://schemas.openxmlformats.org/drawingml/2006/main"/>
-          <a:p xmlns:a="http://schemas.openxmlformats.org/drawingml/2006/main">
-            <a:pPr algn="ctr">
-              <a:lnSpc>
-                <a:spcPct val="118000"/>
-              </a:lnSpc>
-              <a:buNone/>
-              <a:defRPr sz="2400" b="0">
-                <a:solidFill>
-                  <a:srgbClr val="1F4D78"/>
-                </a:solidFill>
-                <a:latin typeface="微软雅黑"/>
-                <a:ea typeface="微软雅黑"/>
-                <a:cs typeface="微软雅黑"/>
-              </a:defRPr>
-            </a:pPr>
-            <a:r>
-              <a:rPr sz="2400" b="0">
-                <a:solidFill>
-                  <a:srgbClr val="1F4D78"/>
-                </a:solidFill>
-                <a:latin typeface="微软雅黑"/>
-                <a:ea typeface="微软雅黑"/>
-                <a:cs typeface="微软雅黑"/>
-              </a:rPr>
-              <a:t>→</a:t>
-            </a:r>
-          </a:p>
-        </p:txBody>
-      </p:sp>
-      <p:sp>
-        <p:nvSpPr>
-          <p:cNvPr id="16" name="chain-sub-1">
-            <a:extLst xmlns:a="http://schemas.openxmlformats.org/drawingml/2006/main">
-              <a:ext uri="{FF2B5EF4-FFF2-40B4-BE49-F238E27FC236}">
-                <a16:creationId xmlns:a16="http://schemas.microsoft.com/office/drawing/2014/main" id="{4C92A392-4852-4343-B9F8-DFD384CA35DA}"/>
-              </a:ext>
-            </a:extLst>
-          </p:cNvPr>
-          <p:cNvSpPr>
-            <a:spLocks xmlns:a="http://schemas.openxmlformats.org/drawingml/2006/main" noGrp="1"/>
-          </p:cNvSpPr>
-          <p:nvPr/>
-        </p:nvSpPr>
-        <p:spPr>
-          <a:xfrm xmlns:a="http://schemas.openxmlformats.org/drawingml/2006/main">
-            <a:off x="3524250" y="3257550"/>
-            <a:ext cx="2095500" cy="571500"/>
-          </a:xfrm>
-          <a:prstGeom xmlns:a="http://schemas.openxmlformats.org/drawingml/2006/main" prst="rect">
-            <a:avLst/>
-          </a:prstGeom>
-          <a:noFill xmlns:a="http://schemas.openxmlformats.org/drawingml/2006/main"/>
-          <a:ln xmlns:a="http://schemas.openxmlformats.org/drawingml/2006/main" w="0">
-            <a:noFill/>
-          </a:ln>
-        </p:spPr>
-        <p:txBody>
-          <a:bodyPr xmlns:a="http://schemas.openxmlformats.org/drawingml/2006/main" lIns="0" tIns="0" rIns="0" bIns="0" anchor="t"/>
-          <a:lstStyle xmlns:a="http://schemas.openxmlformats.org/drawingml/2006/main"/>
-          <a:p xmlns:a="http://schemas.openxmlformats.org/drawingml/2006/main">
-            <a:pPr algn="ctr">
-              <a:lnSpc>
-                <a:spcPct val="118000"/>
-              </a:lnSpc>
-              <a:buNone/>
-              <a:defRPr sz="2000" b="0">
-                <a:solidFill>
-                  <a:srgbClr val="66727D"/>
-                </a:solidFill>
-                <a:latin typeface="微软雅黑"/>
-                <a:ea typeface="微软雅黑"/>
-                <a:cs typeface="微软雅黑"/>
-              </a:defRPr>
-            </a:pPr>
-            <a:r>
-              <a:rPr sz="2000" b="0">
-                <a:solidFill>
-                  <a:srgbClr val="66727D"/>
-                </a:solidFill>
-                <a:latin typeface="微软雅黑"/>
-                <a:ea typeface="微软雅黑"/>
-                <a:cs typeface="微软雅黑"/>
-              </a:rPr>
-              <a:t>当前位置 / 输出</a:t>
-            </a:r>
-          </a:p>
-        </p:txBody>
-      </p:sp>
-      <p:sp>
-        <p:nvSpPr>
-          <p:cNvPr id="17" name="chain-line-2">
-            <a:extLst xmlns:a="http://schemas.openxmlformats.org/drawingml/2006/main">
-              <a:ext uri="{FF2B5EF4-FFF2-40B4-BE49-F238E27FC236}">
-                <a16:creationId xmlns:a16="http://schemas.microsoft.com/office/drawing/2014/main" id="{47DE32A9-4D92-43FA-B4AC-FCC53CC2B8D5}"/>
-              </a:ext>
-            </a:extLst>
-          </p:cNvPr>
-          <p:cNvSpPr>
-            <a:spLocks xmlns:a="http://schemas.openxmlformats.org/drawingml/2006/main" noGrp="1"/>
-          </p:cNvSpPr>
-          <p:nvPr/>
-        </p:nvSpPr>
-        <p:spPr>
-          <a:xfrm xmlns:a="http://schemas.openxmlformats.org/drawingml/2006/main">
-            <a:off x="6381750" y="3105150"/>
-            <a:ext cx="2095500" cy="14288"/>
-          </a:xfrm>
-          <a:prstGeom xmlns:a="http://schemas.openxmlformats.org/drawingml/2006/main" prst="rect">
-            <a:avLst/>
-          </a:prstGeom>
-          <a:solidFill xmlns:a="http://schemas.openxmlformats.org/drawingml/2006/main">
-            <a:srgbClr val="1F4D78"/>
-          </a:solidFill>
-          <a:ln xmlns:a="http://schemas.openxmlformats.org/drawingml/2006/main" w="0">
-            <a:noFill/>
-          </a:ln>
-        </p:spPr>
-      </p:sp>
-      <p:sp>
-        <p:nvSpPr>
-          <p:cNvPr id="18" name="chain-2">
-            <a:extLst xmlns:a="http://schemas.openxmlformats.org/drawingml/2006/main">
-              <a:ext uri="{FF2B5EF4-FFF2-40B4-BE49-F238E27FC236}">
-                <a16:creationId xmlns:a16="http://schemas.microsoft.com/office/drawing/2014/main" id="{FA0BF7F7-7C8D-42FF-8CA8-D918328A34AB}"/>
-              </a:ext>
-            </a:extLst>
-          </p:cNvPr>
-          <p:cNvSpPr>
-            <a:spLocks xmlns:a="http://schemas.openxmlformats.org/drawingml/2006/main" noGrp="1"/>
-          </p:cNvSpPr>
-          <p:nvPr/>
-        </p:nvSpPr>
-        <p:spPr>
-          <a:xfrm xmlns:a="http://schemas.openxmlformats.org/drawingml/2006/main">
-            <a:off x="6381750" y="2381250"/>
-            <a:ext cx="2095500" cy="666750"/>
-          </a:xfrm>
-          <a:prstGeom xmlns:a="http://schemas.openxmlformats.org/drawingml/2006/main" prst="rect">
-            <a:avLst/>
-          </a:prstGeom>
-          <a:noFill xmlns:a="http://schemas.openxmlformats.org/drawingml/2006/main"/>
-          <a:ln xmlns:a="http://schemas.openxmlformats.org/drawingml/2006/main" w="0">
-            <a:noFill/>
-          </a:ln>
-        </p:spPr>
-        <p:txBody>
-          <a:bodyPr xmlns:a="http://schemas.openxmlformats.org/drawingml/2006/main" lIns="0" tIns="0" rIns="0" bIns="0" anchor="ctr"/>
-          <a:lstStyle xmlns:a="http://schemas.openxmlformats.org/drawingml/2006/main"/>
-          <a:p xmlns:a="http://schemas.openxmlformats.org/drawingml/2006/main">
-            <a:pPr algn="ctr">
-              <a:lnSpc>
-                <a:spcPct val="118000"/>
-              </a:lnSpc>
-              <a:buNone/>
-              <a:defRPr sz="2200" b="0">
-                <a:solidFill>
-                  <a:srgbClr val="1F4D78"/>
-                </a:solidFill>
-                <a:latin typeface="微软雅黑"/>
-                <a:ea typeface="微软雅黑"/>
-                <a:cs typeface="微软雅黑"/>
-              </a:defRPr>
-            </a:pPr>
-            <a:r>
-              <a:rPr sz="2200" b="0">
-                <a:solidFill>
-                  <a:srgbClr val="1F4D78"/>
-                </a:solidFill>
-                <a:latin typeface="微软雅黑"/>
-                <a:ea typeface="微软雅黑"/>
-                <a:cs typeface="微软雅黑"/>
-              </a:rPr>
-              <a:t>L12</a:t>
-            </a:r>
-          </a:p>
-          <a:p xmlns:a="http://schemas.openxmlformats.org/drawingml/2006/main">
-            <a:pPr algn="ctr">
-              <a:lnSpc>
-                <a:spcPct val="118000"/>
-              </a:lnSpc>
-              <a:buNone/>
-              <a:defRPr sz="2200" b="0">
-                <a:solidFill>
-                  <a:srgbClr val="1F4D78"/>
-                </a:solidFill>
-                <a:latin typeface="微软雅黑"/>
-                <a:ea typeface="微软雅黑"/>
-                <a:cs typeface="微软雅黑"/>
-              </a:defRPr>
-            </a:pPr>
-            <a:r>
-              <a:rPr sz="2200" b="0">
-                <a:solidFill>
-                  <a:srgbClr val="1F4D78"/>
-                </a:solidFill>
-                <a:latin typeface="微软雅黑"/>
-                <a:ea typeface="微软雅黑"/>
-                <a:cs typeface="微软雅黑"/>
-              </a:rPr>
-              <a:t>最小工作流</a:t>
-            </a:r>
-          </a:p>
-        </p:txBody>
-      </p:sp>
-      <p:sp>
-        <p:nvSpPr>
-          <p:cNvPr id="19" name="chain-arrow-2">
-            <a:extLst xmlns:a="http://schemas.openxmlformats.org/drawingml/2006/main">
-              <a:ext uri="{FF2B5EF4-FFF2-40B4-BE49-F238E27FC236}">
-                <a16:creationId xmlns:a16="http://schemas.microsoft.com/office/drawing/2014/main" id="{51A1544F-BFBB-49A5-90CD-31506E1DD698}"/>
-              </a:ext>
-            </a:extLst>
-          </p:cNvPr>
-          <p:cNvSpPr>
-            <a:spLocks xmlns:a="http://schemas.openxmlformats.org/drawingml/2006/main" noGrp="1"/>
-          </p:cNvSpPr>
-          <p:nvPr/>
-        </p:nvSpPr>
-        <p:spPr>
-          <a:xfrm xmlns:a="http://schemas.openxmlformats.org/drawingml/2006/main">
-            <a:off x="8477250" y="2552700"/>
-            <a:ext cx="762000" cy="323850"/>
-          </a:xfrm>
-          <a:prstGeom xmlns:a="http://schemas.openxmlformats.org/drawingml/2006/main" prst="rect">
-            <a:avLst/>
-          </a:prstGeom>
-          <a:noFill xmlns:a="http://schemas.openxmlformats.org/drawingml/2006/main"/>
-          <a:ln xmlns:a="http://schemas.openxmlformats.org/drawingml/2006/main" w="0">
-            <a:noFill/>
-          </a:ln>
-        </p:spPr>
-        <p:txBody>
-          <a:bodyPr xmlns:a="http://schemas.openxmlformats.org/drawingml/2006/main" lIns="0" tIns="0" rIns="0" bIns="0" anchor="ctr"/>
-          <a:lstStyle xmlns:a="http://schemas.openxmlformats.org/drawingml/2006/main"/>
-          <a:p xmlns:a="http://schemas.openxmlformats.org/drawingml/2006/main">
-            <a:pPr algn="ctr">
-              <a:lnSpc>
-                <a:spcPct val="118000"/>
-              </a:lnSpc>
-              <a:buNone/>
-              <a:defRPr sz="2400" b="0">
-                <a:solidFill>
-                  <a:srgbClr val="1F4D78"/>
-                </a:solidFill>
-                <a:latin typeface="微软雅黑"/>
-                <a:ea typeface="微软雅黑"/>
-                <a:cs typeface="微软雅黑"/>
-              </a:defRPr>
-            </a:pPr>
-            <a:r>
-              <a:rPr sz="2400" b="0">
-                <a:solidFill>
-                  <a:srgbClr val="1F4D78"/>
-                </a:solidFill>
-                <a:latin typeface="微软雅黑"/>
-                <a:ea typeface="微软雅黑"/>
-                <a:cs typeface="微软雅黑"/>
-              </a:rPr>
-              <a:t>→</a:t>
-            </a:r>
-          </a:p>
-        </p:txBody>
-      </p:sp>
-      <p:sp>
-        <p:nvSpPr>
-          <p:cNvPr id="20" name="chain-line-3">
-            <a:extLst xmlns:a="http://schemas.openxmlformats.org/drawingml/2006/main">
-              <a:ext uri="{FF2B5EF4-FFF2-40B4-BE49-F238E27FC236}">
-                <a16:creationId xmlns:a16="http://schemas.microsoft.com/office/drawing/2014/main" id="{83CED6A0-3880-42FF-82A5-5F8F86A4D1B4}"/>
-              </a:ext>
-            </a:extLst>
-          </p:cNvPr>
-          <p:cNvSpPr>
-            <a:spLocks xmlns:a="http://schemas.openxmlformats.org/drawingml/2006/main" noGrp="1"/>
-          </p:cNvSpPr>
-          <p:nvPr/>
-        </p:nvSpPr>
-        <p:spPr>
-          <a:xfrm xmlns:a="http://schemas.openxmlformats.org/drawingml/2006/main">
-            <a:off x="9239250" y="3105150"/>
-            <a:ext cx="2095500" cy="14288"/>
-          </a:xfrm>
-          <a:prstGeom xmlns:a="http://schemas.openxmlformats.org/drawingml/2006/main" prst="rect">
-            <a:avLst/>
-          </a:prstGeom>
-          <a:solidFill xmlns:a="http://schemas.openxmlformats.org/drawingml/2006/main">
-            <a:srgbClr val="1F4D78"/>
-          </a:solidFill>
-          <a:ln xmlns:a="http://schemas.openxmlformats.org/drawingml/2006/main" w="0">
-            <a:noFill/>
-          </a:ln>
-        </p:spPr>
-      </p:sp>
-      <p:sp>
-        <p:nvSpPr>
-          <p:cNvPr id="21" name="chain-3">
-            <a:extLst xmlns:a="http://schemas.openxmlformats.org/drawingml/2006/main">
-              <a:ext uri="{FF2B5EF4-FFF2-40B4-BE49-F238E27FC236}">
-                <a16:creationId xmlns:a16="http://schemas.microsoft.com/office/drawing/2014/main" id="{811F3753-0F7E-411D-8BC7-0D47BD5FC0B7}"/>
-              </a:ext>
-            </a:extLst>
-          </p:cNvPr>
-          <p:cNvSpPr>
-            <a:spLocks xmlns:a="http://schemas.openxmlformats.org/drawingml/2006/main" noGrp="1"/>
-          </p:cNvSpPr>
-          <p:nvPr/>
-        </p:nvSpPr>
-        <p:spPr>
-          <a:xfrm xmlns:a="http://schemas.openxmlformats.org/drawingml/2006/main">
-            <a:off x="9239250" y="2381250"/>
-            <a:ext cx="2095500" cy="666750"/>
-          </a:xfrm>
-          <a:prstGeom xmlns:a="http://schemas.openxmlformats.org/drawingml/2006/main" prst="rect">
-            <a:avLst/>
-          </a:prstGeom>
-          <a:noFill xmlns:a="http://schemas.openxmlformats.org/drawingml/2006/main"/>
-          <a:ln xmlns:a="http://schemas.openxmlformats.org/drawingml/2006/main" w="0">
-            <a:noFill/>
-          </a:ln>
-        </p:spPr>
-        <p:txBody>
-          <a:bodyPr xmlns:a="http://schemas.openxmlformats.org/drawingml/2006/main" lIns="0" tIns="0" rIns="0" bIns="0" anchor="ctr"/>
-          <a:lstStyle xmlns:a="http://schemas.openxmlformats.org/drawingml/2006/main"/>
-          <a:p xmlns:a="http://schemas.openxmlformats.org/drawingml/2006/main">
-            <a:pPr algn="ctr">
-              <a:lnSpc>
-                <a:spcPct val="118000"/>
-              </a:lnSpc>
-              <a:buNone/>
-              <a:defRPr sz="2200" b="0">
-                <a:solidFill>
-                  <a:srgbClr val="1F4D78"/>
-                </a:solidFill>
-                <a:latin typeface="微软雅黑"/>
-                <a:ea typeface="微软雅黑"/>
-                <a:cs typeface="微软雅黑"/>
-              </a:defRPr>
-            </a:pPr>
-            <a:r>
-              <a:rPr sz="2200" b="0">
-                <a:solidFill>
-                  <a:srgbClr val="1F4D78"/>
-                </a:solidFill>
-                <a:latin typeface="微软雅黑"/>
-                <a:ea typeface="微软雅黑"/>
-                <a:cs typeface="微软雅黑"/>
-              </a:rPr>
-              <a:t>L13</a:t>
-            </a:r>
-          </a:p>
-          <a:p xmlns:a="http://schemas.openxmlformats.org/drawingml/2006/main">
-            <a:pPr algn="ctr">
-              <a:lnSpc>
-                <a:spcPct val="118000"/>
-              </a:lnSpc>
-              <a:buNone/>
-              <a:defRPr sz="2200" b="0">
-                <a:solidFill>
-                  <a:srgbClr val="1F4D78"/>
-                </a:solidFill>
-                <a:latin typeface="微软雅黑"/>
-                <a:ea typeface="微软雅黑"/>
-                <a:cs typeface="微软雅黑"/>
-              </a:defRPr>
-            </a:pPr>
-            <a:r>
-              <a:rPr sz="2200" b="0">
-                <a:solidFill>
-                  <a:srgbClr val="1F4D78"/>
-                </a:solidFill>
-                <a:latin typeface="微软雅黑"/>
-                <a:ea typeface="微软雅黑"/>
-                <a:cs typeface="微软雅黑"/>
-              </a:rPr>
-              <a:t>评价</a:t>
-            </a:r>
-          </a:p>
-        </p:txBody>
-      </p:sp>
-      <p:sp>
-        <p:nvSpPr>
-          <p:cNvPr id="22" name="handoff">
-            <a:extLst xmlns:a="http://schemas.openxmlformats.org/drawingml/2006/main">
-              <a:ext uri="{FF2B5EF4-FFF2-40B4-BE49-F238E27FC236}">
-                <a16:creationId xmlns:a16="http://schemas.microsoft.com/office/drawing/2014/main" id="{44FA5B3E-E8A7-4426-ABD0-B48773EFD3EE}"/>
-              </a:ext>
-            </a:extLst>
-          </p:cNvPr>
-          <p:cNvSpPr>
-            <a:spLocks xmlns:a="http://schemas.openxmlformats.org/drawingml/2006/main" noGrp="1"/>
-          </p:cNvSpPr>
-          <p:nvPr/>
-        </p:nvSpPr>
-        <p:spPr>
-          <a:xfrm xmlns:a="http://schemas.openxmlformats.org/drawingml/2006/main">
-            <a:off x="1714500" y="4476750"/>
-            <a:ext cx="8763000" cy="619125"/>
-          </a:xfrm>
-          <a:prstGeom xmlns:a="http://schemas.openxmlformats.org/drawingml/2006/main" prst="rect">
-            <a:avLst/>
-          </a:prstGeom>
-          <a:noFill xmlns:a="http://schemas.openxmlformats.org/drawingml/2006/main"/>
-          <a:ln xmlns:a="http://schemas.openxmlformats.org/drawingml/2006/main" w="0">
-            <a:noFill/>
-          </a:ln>
-        </p:spPr>
-        <p:txBody>
-          <a:bodyPr xmlns:a="http://schemas.openxmlformats.org/drawingml/2006/main" lIns="0" tIns="0" rIns="0" bIns="0" anchor="t"/>
-          <a:lstStyle xmlns:a="http://schemas.openxmlformats.org/drawingml/2006/main"/>
-          <a:p xmlns:a="http://schemas.openxmlformats.org/drawingml/2006/main">
-            <a:pPr algn="ctr">
-              <a:lnSpc>
-                <a:spcPct val="118000"/>
-              </a:lnSpc>
-              <a:buNone/>
-              <a:defRPr sz="2400" b="0">
-                <a:solidFill>
-                  <a:srgbClr val="1F4D78"/>
-                </a:solidFill>
-                <a:latin typeface="微软雅黑"/>
-                <a:ea typeface="微软雅黑"/>
-                <a:cs typeface="微软雅黑"/>
-              </a:defRPr>
-            </a:pPr>
-            <a:r>
-              <a:rPr sz="2400" b="0">
-                <a:solidFill>
-                  <a:srgbClr val="1F4D78"/>
-                </a:solidFill>
-                <a:latin typeface="微软雅黑"/>
-                <a:ea typeface="微软雅黑"/>
-                <a:cs typeface="微软雅黑"/>
-              </a:rPr>
-              <a:t>交给第 12 课：循环说明｜三种 trace｜四约束短分析</a:t>
             </a:r>
           </a:p>
         </p:txBody>
@@ -18075,35 +14316,55 @@
       </p:grpSpPr>
       <p:sp>
         <p:nvSpPr>
-          <p:cNvPr id="4" name="Text Placeholder 3">
-            <a:extLst xmlns:a="http://schemas.openxmlformats.org/drawingml/2006/main">
-              <a:ext uri="{FF2B5EF4-FFF2-40B4-BE49-F238E27FC236}">
-                <a16:creationId xmlns:a16="http://schemas.microsoft.com/office/drawing/2014/main" id="{4D941B40-7A0A-534E-3563-CA11753C8E3F}"/>
-              </a:ext>
-            </a:extLst>
-          </p:cNvPr>
-          <p:cNvSpPr>
-            <a:spLocks xmlns:a="http://schemas.openxmlformats.org/drawingml/2006/main" noGrp="1"/>
-          </p:cNvSpPr>
-          <p:nvPr>
-            <p:ph type="body" idx="14"/>
-          </p:nvPr>
-        </p:nvSpPr>
-        <p:spPr>
-          <a:xfrm xmlns:a="http://schemas.openxmlformats.org/drawingml/2006/main">
-            <a:off x="1028700" y="57150"/>
-            <a:ext cx="10668000" cy="571500"/>
-          </a:xfrm>
-        </p:spPr>
-        <p:txBody>
-          <a:bodyPr xmlns:a="http://schemas.openxmlformats.org/drawingml/2006/main" lIns="0" tIns="0" rIns="0" bIns="0" anchor="ctr"/>
-          <a:lstStyle xmlns:a="http://schemas.openxmlformats.org/drawingml/2006/main"/>
+          <p:cNvPr id="7" name="judgment-title">
+            <a:extLst xmlns:a="http://schemas.openxmlformats.org/drawingml/2006/main">
+              <a:ext uri="{FF2B5EF4-FFF2-40B4-BE49-F238E27FC236}">
+                <a16:creationId xmlns:a16="http://schemas.microsoft.com/office/drawing/2014/main" id="{5AD9174C-F99E-40A2-A89E-D288DB55316C}"/>
+              </a:ext>
+            </a:extLst>
+          </p:cNvPr>
+          <p:cNvSpPr>
+            <a:spLocks xmlns:a="http://schemas.openxmlformats.org/drawingml/2006/main" noGrp="1"/>
+          </p:cNvSpPr>
+          <p:nvPr/>
+        </p:nvSpPr>
+        <p:spPr>
+          <a:xfrm xmlns:a="http://schemas.openxmlformats.org/drawingml/2006/main">
+            <a:off x="1028700" y="76200"/>
+            <a:ext cx="10687050" cy="514350"/>
+          </a:xfrm>
+          <a:prstGeom xmlns:a="http://schemas.openxmlformats.org/drawingml/2006/main" prst="rect">
+            <a:avLst/>
+          </a:prstGeom>
+          <a:noFill xmlns:a="http://schemas.openxmlformats.org/drawingml/2006/main"/>
+          <a:ln xmlns:a="http://schemas.openxmlformats.org/drawingml/2006/main" w="0">
+            <a:noFill/>
+          </a:ln>
+        </p:spPr>
+        <p:txBody>
+          <a:bodyPr xmlns:a="http://schemas.openxmlformats.org/drawingml/2006/main" lIns="0" tIns="0" rIns="0" bIns="0" anchor="t"/>
+          <a:lstStyle xmlns:a="http://schemas.openxmlformats.org/drawingml/2006/main">
+            <a:defPPr algn="l">
+              <a:defRPr sz="3000" b="1">
+                <a:solidFill>
+                  <a:srgbClr val="FFFFFF"/>
+                </a:solidFill>
+                <a:latin typeface="微软雅黑"/>
+                <a:ea typeface="微软雅黑"/>
+                <a:cs typeface="微软雅黑"/>
+              </a:defRPr>
+            </a:defPPr>
+          </a:lstStyle>
           <a:p xmlns:a="http://schemas.openxmlformats.org/drawingml/2006/main">
             <a:pPr algn="l">
-              <a:lnSpc>
-                <a:spcPct val="118000"/>
-              </a:lnSpc>
-              <a:buNone/>
+              <a:defRPr sz="3000" b="1">
+                <a:solidFill>
+                  <a:srgbClr val="FFFFFF"/>
+                </a:solidFill>
+                <a:latin typeface="微软雅黑"/>
+                <a:ea typeface="微软雅黑"/>
+                <a:cs typeface="微软雅黑"/>
+              </a:defRPr>
             </a:pPr>
             <a:r>
               <a:rPr sz="3000" b="1">
@@ -18114,768 +14375,383 @@
                 <a:ea typeface="微软雅黑"/>
                 <a:cs typeface="微软雅黑"/>
               </a:rPr>
-              <a:t>本课形成三件可交给第 12 课的工件</a:t>
-            </a:r>
-            <a:endParaRPr/>
-          </a:p>
-        </p:txBody>
-      </p:sp>
-      <p:sp>
-        <p:nvSpPr>
-          <p:cNvPr id="5" name="Slide Number Placeholder 4">
-            <a:extLst xmlns:a="http://schemas.openxmlformats.org/drawingml/2006/main">
-              <a:ext uri="{FF2B5EF4-FFF2-40B4-BE49-F238E27FC236}">
-                <a16:creationId xmlns:a16="http://schemas.microsoft.com/office/drawing/2014/main" id="{EBA5909F-738E-F60C-BE8C-B3F1D94548E5}"/>
-              </a:ext>
-            </a:extLst>
-          </p:cNvPr>
-          <p:cNvSpPr>
-            <a:spLocks xmlns:a="http://schemas.openxmlformats.org/drawingml/2006/main" noGrp="1"/>
-          </p:cNvSpPr>
-          <p:nvPr>
-            <p:ph type="sldNum" idx="10"/>
-          </p:nvPr>
-        </p:nvSpPr>
-        <p:spPr/>
-        <p:txBody>
-          <a:bodyPr xmlns:a="http://schemas.openxmlformats.org/drawingml/2006/main"/>
-          <a:lstStyle xmlns:a="http://schemas.openxmlformats.org/drawingml/2006/main"/>
-          <a:p xmlns:a="http://schemas.openxmlformats.org/drawingml/2006/main">
-            <a:fld id="{202359C0-8A7A-196E-DD58-8E6569619F09}" type="slidenum">
+              <a:t>恢复与停止是两种判断</a:t>
+            </a:r>
+          </a:p>
+        </p:txBody>
+      </p:sp>
+      <p:sp>
+        <p:nvSpPr>
+          <p:cNvPr id="2" name="judgment-body-0">
+            <a:extLst xmlns:a="http://schemas.openxmlformats.org/drawingml/2006/main">
+              <a:ext uri="{FF2B5EF4-FFF2-40B4-BE49-F238E27FC236}">
+                <a16:creationId xmlns:a16="http://schemas.microsoft.com/office/drawing/2014/main" id="{D00982A1-1794-425F-BA7B-C23392B10941}"/>
+              </a:ext>
+            </a:extLst>
+          </p:cNvPr>
+          <p:cNvSpPr>
+            <a:spLocks xmlns:a="http://schemas.openxmlformats.org/drawingml/2006/main" noGrp="1"/>
+          </p:cNvSpPr>
+          <p:nvPr/>
+        </p:nvSpPr>
+        <p:spPr>
+          <a:xfrm xmlns:a="http://schemas.openxmlformats.org/drawingml/2006/main">
+            <a:off x="666750" y="1066800"/>
+            <a:ext cx="10858500" cy="1009650"/>
+          </a:xfrm>
+          <a:prstGeom xmlns:a="http://schemas.openxmlformats.org/drawingml/2006/main" prst="rect">
+            <a:avLst/>
+          </a:prstGeom>
+          <a:noFill xmlns:a="http://schemas.openxmlformats.org/drawingml/2006/main"/>
+          <a:ln xmlns:a="http://schemas.openxmlformats.org/drawingml/2006/main" w="0">
+            <a:noFill/>
+          </a:ln>
+        </p:spPr>
+        <p:txBody>
+          <a:bodyPr xmlns:a="http://schemas.openxmlformats.org/drawingml/2006/main" lIns="0" tIns="0" rIns="0" bIns="0" anchor="t"/>
+          <a:lstStyle xmlns:a="http://schemas.openxmlformats.org/drawingml/2006/main">
+            <a:defPPr algn="l">
+              <a:defRPr sz="2400" b="0">
+                <a:solidFill>
+                  <a:srgbClr val="263746"/>
+                </a:solidFill>
+                <a:latin typeface="微软雅黑"/>
+                <a:ea typeface="微软雅黑"/>
+                <a:cs typeface="微软雅黑"/>
+              </a:defRPr>
+            </a:defPPr>
+          </a:lstStyle>
+          <a:p xmlns:a="http://schemas.openxmlformats.org/drawingml/2006/main">
+            <a:pPr algn="l">
+              <a:defRPr sz="2400" b="0">
+                <a:solidFill>
+                  <a:srgbClr val="263746"/>
+                </a:solidFill>
+                <a:latin typeface="微软雅黑"/>
+                <a:ea typeface="微软雅黑"/>
+                <a:cs typeface="微软雅黑"/>
+              </a:defRPr>
+            </a:pPr>
+            <a:r>
+              <a:rPr sz="2400" b="0">
+                <a:solidFill>
+                  <a:srgbClr val="263746"/>
+                </a:solidFill>
+                <a:latin typeface="微软雅黑"/>
+                <a:ea typeface="微软雅黑"/>
+                <a:cs typeface="微软雅黑"/>
+              </a:rPr>
+              <a:t>6 个任务；最多 8 次尝试；前两任务成功，第三次 timeout</a:t>
+            </a:r>
+          </a:p>
+        </p:txBody>
+      </p:sp>
+      <p:sp>
+        <p:nvSpPr>
+          <p:cNvPr id="3" name="judgment-body-1">
+            <a:extLst xmlns:a="http://schemas.openxmlformats.org/drawingml/2006/main">
+              <a:ext uri="{FF2B5EF4-FFF2-40B4-BE49-F238E27FC236}">
+                <a16:creationId xmlns:a16="http://schemas.microsoft.com/office/drawing/2014/main" id="{2F57A1BC-61A7-439B-8C98-1ED7B636C593}"/>
+              </a:ext>
+            </a:extLst>
+          </p:cNvPr>
+          <p:cNvSpPr>
+            <a:spLocks xmlns:a="http://schemas.openxmlformats.org/drawingml/2006/main" noGrp="1"/>
+          </p:cNvSpPr>
+          <p:nvPr/>
+        </p:nvSpPr>
+        <p:spPr>
+          <a:xfrm xmlns:a="http://schemas.openxmlformats.org/drawingml/2006/main">
+            <a:off x="666750" y="2238375"/>
+            <a:ext cx="10858500" cy="2076450"/>
+          </a:xfrm>
+          <a:prstGeom xmlns:a="http://schemas.openxmlformats.org/drawingml/2006/main" prst="rect">
+            <a:avLst/>
+          </a:prstGeom>
+          <a:noFill xmlns:a="http://schemas.openxmlformats.org/drawingml/2006/main"/>
+          <a:ln xmlns:a="http://schemas.openxmlformats.org/drawingml/2006/main" w="0">
+            <a:noFill/>
+          </a:ln>
+        </p:spPr>
+        <p:txBody>
+          <a:bodyPr xmlns:a="http://schemas.openxmlformats.org/drawingml/2006/main" lIns="0" tIns="0" rIns="0" bIns="0" anchor="t"/>
+          <a:lstStyle xmlns:a="http://schemas.openxmlformats.org/drawingml/2006/main">
+            <a:defPPr algn="l">
+              <a:defRPr sz="2400" b="0">
+                <a:solidFill>
+                  <a:srgbClr val="263746"/>
+                </a:solidFill>
+                <a:latin typeface="微软雅黑"/>
+                <a:ea typeface="微软雅黑"/>
+                <a:cs typeface="微软雅黑"/>
+              </a:defRPr>
+            </a:defPPr>
+          </a:lstStyle>
+          <a:p xmlns:a="http://schemas.openxmlformats.org/drawingml/2006/main">
+            <a:pPr algn="l">
+              <a:defRPr sz="2400" b="0">
+                <a:solidFill>
+                  <a:srgbClr val="263746"/>
+                </a:solidFill>
+                <a:latin typeface="微软雅黑"/>
+                <a:ea typeface="微软雅黑"/>
+                <a:cs typeface="微软雅黑"/>
+              </a:defRPr>
+            </a:pPr>
+            <a:r>
+              <a:rPr sz="2400" b="0">
+                <a:solidFill>
+                  <a:srgbClr val="263746"/>
+                </a:solidFill>
+                <a:latin typeface="微软雅黑"/>
+                <a:ea typeface="微软雅黑"/>
+                <a:cs typeface="微软雅黑"/>
+              </a:rPr>
+              <a:t>技术失败｜能否按原输入恢复？</a:t>
+            </a:r>
+          </a:p>
+          <a:p xmlns:a="http://schemas.openxmlformats.org/drawingml/2006/main">
+            <a:pPr algn="l">
+              <a:defRPr sz="2400" b="0">
+                <a:solidFill>
+                  <a:srgbClr val="263746"/>
+                </a:solidFill>
+                <a:latin typeface="微软雅黑"/>
+                <a:ea typeface="微软雅黑"/>
+                <a:cs typeface="微软雅黑"/>
+              </a:defRPr>
+            </a:pPr>
+            <a:r>
+              <a:rPr sz="2400" b="0">
+                <a:solidFill>
+                  <a:srgbClr val="263746"/>
+                </a:solidFill>
+                <a:latin typeface="微软雅黑"/>
+                <a:ea typeface="微软雅黑"/>
+                <a:cs typeface="微软雅黑"/>
+              </a:rPr>
+              <a:t>T02 无改善｜是否需要重跑？</a:t>
+            </a:r>
+          </a:p>
+          <a:p xmlns:a="http://schemas.openxmlformats.org/drawingml/2006/main">
+            <a:pPr algn="l">
+              <a:defRPr sz="2400" b="0">
+                <a:solidFill>
+                  <a:srgbClr val="263746"/>
+                </a:solidFill>
+                <a:latin typeface="微软雅黑"/>
+                <a:ea typeface="微软雅黑"/>
+                <a:cs typeface="微软雅黑"/>
+              </a:defRPr>
+            </a:pPr>
+            <a:r>
+              <a:rPr sz="2400" b="0">
+                <a:solidFill>
+                  <a:srgbClr val="263746"/>
+                </a:solidFill>
+                <a:latin typeface="微软雅黑"/>
+                <a:ea typeface="微软雅黑"/>
+                <a:cs typeface="微软雅黑"/>
+              </a:rPr>
+              <a:t>T03 负向｜是否可以删除？</a:t>
+            </a:r>
+          </a:p>
+        </p:txBody>
+      </p:sp>
+      <p:sp>
+        <p:nvSpPr>
+          <p:cNvPr id="4" name="judgment-body-2">
+            <a:extLst xmlns:a="http://schemas.openxmlformats.org/drawingml/2006/main">
+              <a:ext uri="{FF2B5EF4-FFF2-40B4-BE49-F238E27FC236}">
+                <a16:creationId xmlns:a16="http://schemas.microsoft.com/office/drawing/2014/main" id="{25E926D6-B0DE-4D51-A485-12DAF211B0E6}"/>
+              </a:ext>
+            </a:extLst>
+          </p:cNvPr>
+          <p:cNvSpPr>
+            <a:spLocks xmlns:a="http://schemas.openxmlformats.org/drawingml/2006/main" noGrp="1"/>
+          </p:cNvSpPr>
+          <p:nvPr/>
+        </p:nvSpPr>
+        <p:spPr>
+          <a:xfrm xmlns:a="http://schemas.openxmlformats.org/drawingml/2006/main">
+            <a:off x="666750" y="4495800"/>
+            <a:ext cx="10858500" cy="1409700"/>
+          </a:xfrm>
+          <a:prstGeom xmlns:a="http://schemas.openxmlformats.org/drawingml/2006/main" prst="rect">
+            <a:avLst/>
+          </a:prstGeom>
+          <a:noFill xmlns:a="http://schemas.openxmlformats.org/drawingml/2006/main"/>
+          <a:ln xmlns:a="http://schemas.openxmlformats.org/drawingml/2006/main" w="0">
+            <a:noFill/>
+          </a:ln>
+        </p:spPr>
+        <p:txBody>
+          <a:bodyPr xmlns:a="http://schemas.openxmlformats.org/drawingml/2006/main" lIns="0" tIns="0" rIns="0" bIns="0" anchor="t"/>
+          <a:lstStyle xmlns:a="http://schemas.openxmlformats.org/drawingml/2006/main">
+            <a:defPPr algn="l">
+              <a:defRPr sz="2200" b="0">
+                <a:solidFill>
+                  <a:srgbClr val="1F4D78"/>
+                </a:solidFill>
+                <a:latin typeface="微软雅黑"/>
+                <a:ea typeface="微软雅黑"/>
+                <a:cs typeface="微软雅黑"/>
+              </a:defRPr>
+            </a:defPPr>
+          </a:lstStyle>
+          <a:p xmlns:a="http://schemas.openxmlformats.org/drawingml/2006/main">
+            <a:pPr algn="l">
+              <a:defRPr sz="2200" b="0">
+                <a:solidFill>
+                  <a:srgbClr val="1F4D78"/>
+                </a:solidFill>
+                <a:latin typeface="微软雅黑"/>
+                <a:ea typeface="微软雅黑"/>
+                <a:cs typeface="微软雅黑"/>
+              </a:defRPr>
+            </a:pPr>
+            <a:r>
+              <a:rPr sz="2200" b="0">
+                <a:solidFill>
+                  <a:srgbClr val="1F4D78"/>
+                </a:solidFill>
+                <a:latin typeface="微软雅黑"/>
+                <a:ea typeface="微软雅黑"/>
+                <a:cs typeface="微软雅黑"/>
+              </a:rPr>
+              <a:t>输入变化时如何处理目录？保留什么证据才能解释停止决定？</a:t>
+            </a:r>
+          </a:p>
+        </p:txBody>
+      </p:sp>
+      <p:sp>
+        <p:nvSpPr>
+          <p:cNvPr id="5" name="judgment-source">
+            <a:extLst xmlns:a="http://schemas.openxmlformats.org/drawingml/2006/main">
+              <a:ext uri="{FF2B5EF4-FFF2-40B4-BE49-F238E27FC236}">
+                <a16:creationId xmlns:a16="http://schemas.microsoft.com/office/drawing/2014/main" id="{5BBBC72F-7C73-4EA5-A548-9BE51D21C5A2}"/>
+              </a:ext>
+            </a:extLst>
+          </p:cNvPr>
+          <p:cNvSpPr>
+            <a:spLocks xmlns:a="http://schemas.openxmlformats.org/drawingml/2006/main" noGrp="1"/>
+          </p:cNvSpPr>
+          <p:nvPr/>
+        </p:nvSpPr>
+        <p:spPr>
+          <a:xfrm xmlns:a="http://schemas.openxmlformats.org/drawingml/2006/main">
+            <a:off x="666750" y="6276975"/>
+            <a:ext cx="10572750" cy="209550"/>
+          </a:xfrm>
+          <a:prstGeom xmlns:a="http://schemas.openxmlformats.org/drawingml/2006/main" prst="rect">
+            <a:avLst/>
+          </a:prstGeom>
+          <a:noFill xmlns:a="http://schemas.openxmlformats.org/drawingml/2006/main"/>
+          <a:ln xmlns:a="http://schemas.openxmlformats.org/drawingml/2006/main" w="0">
+            <a:noFill/>
+          </a:ln>
+        </p:spPr>
+        <p:txBody>
+          <a:bodyPr xmlns:a="http://schemas.openxmlformats.org/drawingml/2006/main" lIns="0" tIns="0" rIns="0" bIns="0" anchor="t"/>
+          <a:lstStyle xmlns:a="http://schemas.openxmlformats.org/drawingml/2006/main">
+            <a:defPPr algn="l">
+              <a:defRPr sz="1100" b="0">
+                <a:solidFill>
+                  <a:srgbClr val="667684"/>
+                </a:solidFill>
+                <a:latin typeface="微软雅黑"/>
+                <a:ea typeface="微软雅黑"/>
+                <a:cs typeface="微软雅黑"/>
+              </a:defRPr>
+            </a:defPPr>
+          </a:lstStyle>
+          <a:p xmlns:a="http://schemas.openxmlformats.org/drawingml/2006/main">
+            <a:pPr algn="l">
+              <a:defRPr sz="1100" b="0">
+                <a:solidFill>
+                  <a:srgbClr val="667684"/>
+                </a:solidFill>
+                <a:latin typeface="微软雅黑"/>
+                <a:ea typeface="微软雅黑"/>
+                <a:cs typeface="微软雅黑"/>
+              </a:defRPr>
+            </a:pPr>
+            <a:r>
+              <a:rPr sz="1100" b="0">
+                <a:solidFill>
+                  <a:srgbClr val="667684"/>
+                </a:solidFill>
+                <a:latin typeface="微软雅黑"/>
+                <a:ea typeface="微软雅黑"/>
+                <a:cs typeface="微软雅黑"/>
+              </a:rPr>
+              <a:t>来源：本课判断任务与讲义；构造材料及真实来源按材料包标识</a:t>
+            </a:r>
+          </a:p>
+        </p:txBody>
+      </p:sp>
+      <p:sp>
+        <p:nvSpPr>
+          <p:cNvPr id="6" name="judgment-page">
+            <a:extLst xmlns:a="http://schemas.openxmlformats.org/drawingml/2006/main">
+              <a:ext uri="{FF2B5EF4-FFF2-40B4-BE49-F238E27FC236}">
+                <a16:creationId xmlns:a16="http://schemas.microsoft.com/office/drawing/2014/main" id="{6140D968-4E7B-44AA-A7DA-1BCA0FBCE49A}"/>
+              </a:ext>
+            </a:extLst>
+          </p:cNvPr>
+          <p:cNvSpPr>
+            <a:spLocks xmlns:a="http://schemas.openxmlformats.org/drawingml/2006/main" noGrp="1"/>
+          </p:cNvSpPr>
+          <p:nvPr/>
+        </p:nvSpPr>
+        <p:spPr>
+          <a:xfrm xmlns:a="http://schemas.openxmlformats.org/drawingml/2006/main">
+            <a:off x="11715750" y="6562725"/>
+            <a:ext cx="238125" cy="171450"/>
+          </a:xfrm>
+          <a:prstGeom xmlns:a="http://schemas.openxmlformats.org/drawingml/2006/main" prst="rect">
+            <a:avLst/>
+          </a:prstGeom>
+          <a:noFill xmlns:a="http://schemas.openxmlformats.org/drawingml/2006/main"/>
+          <a:ln xmlns:a="http://schemas.openxmlformats.org/drawingml/2006/main" w="0">
+            <a:noFill/>
+          </a:ln>
+        </p:spPr>
+        <p:txBody>
+          <a:bodyPr xmlns:a="http://schemas.openxmlformats.org/drawingml/2006/main" lIns="0" tIns="0" rIns="0" bIns="0" anchor="t"/>
+          <a:lstStyle xmlns:a="http://schemas.openxmlformats.org/drawingml/2006/main">
+            <a:defPPr algn="l">
+              <a:defRPr sz="900" b="0">
+                <a:solidFill>
+                  <a:srgbClr val="A5A5A5"/>
+                </a:solidFill>
+                <a:latin typeface="微软雅黑"/>
+                <a:ea typeface="微软雅黑"/>
+                <a:cs typeface="微软雅黑"/>
+              </a:defRPr>
+            </a:defPPr>
+          </a:lstStyle>
+          <a:p xmlns:a="http://schemas.openxmlformats.org/drawingml/2006/main">
+            <a:pPr algn="l">
+              <a:defRPr sz="900" b="0">
+                <a:solidFill>
+                  <a:srgbClr val="A5A5A5"/>
+                </a:solidFill>
+                <a:latin typeface="微软雅黑"/>
+                <a:ea typeface="微软雅黑"/>
+                <a:cs typeface="微软雅黑"/>
+              </a:defRPr>
+            </a:pPr>
+            <a:r>
+              <a:rPr sz="900" b="0">
+                <a:solidFill>
+                  <a:srgbClr val="A5A5A5"/>
+                </a:solidFill>
+                <a:latin typeface="微软雅黑"/>
+                <a:ea typeface="微软雅黑"/>
+                <a:cs typeface="微软雅黑"/>
+              </a:rPr>
               <a:t>3</a:t>
-            </a:fld>
-            <a:endParaRPr/>
-          </a:p>
-        </p:txBody>
-      </p:sp>
-      <p:sp>
-        <p:nvSpPr>
-          <p:cNvPr id="6" name="brand-header">
-            <a:extLst xmlns:a="http://schemas.openxmlformats.org/drawingml/2006/main">
-              <a:ext uri="{FF2B5EF4-FFF2-40B4-BE49-F238E27FC236}">
-                <a16:creationId xmlns:a16="http://schemas.microsoft.com/office/drawing/2014/main" id="{72CE762E-758E-4684-A82E-BB5390AEBABF}"/>
-              </a:ext>
-            </a:extLst>
-          </p:cNvPr>
-          <p:cNvSpPr>
-            <a:spLocks xmlns:a="http://schemas.openxmlformats.org/drawingml/2006/main" noGrp="1"/>
-          </p:cNvSpPr>
-          <p:nvPr/>
-        </p:nvSpPr>
-        <p:spPr>
-          <a:xfrm xmlns:a="http://schemas.openxmlformats.org/drawingml/2006/main">
-            <a:off x="0" y="0"/>
-            <a:ext cx="11887200" cy="685800"/>
-          </a:xfrm>
-          <a:prstGeom xmlns:a="http://schemas.openxmlformats.org/drawingml/2006/main" prst="rect">
-            <a:avLst/>
-          </a:prstGeom>
-          <a:solidFill xmlns:a="http://schemas.openxmlformats.org/drawingml/2006/main">
-            <a:srgbClr val="C8161E"/>
-          </a:solidFill>
-          <a:ln xmlns:a="http://schemas.openxmlformats.org/drawingml/2006/main" w="0">
-            <a:noFill/>
-          </a:ln>
-        </p:spPr>
-      </p:sp>
-      <p:pic>
-        <p:nvPicPr>
-          <p:cNvPr id="25" name=""/>
-          <p:cNvPicPr>
-            <a:picLocks xmlns:a="http://schemas.openxmlformats.org/drawingml/2006/main" noChangeAspect="1"/>
-          </p:cNvPicPr>
-          <p:nvPr/>
-        </p:nvPicPr>
-        <p:blipFill>
-          <a:blip xmlns:r="http://schemas.openxmlformats.org/officeDocument/2006/relationships" xmlns:a="http://schemas.openxmlformats.org/drawingml/2006/main" r:embed="Ra8cbc61490474444"/>
-          <a:stretch xmlns:a="http://schemas.openxmlformats.org/drawingml/2006/main"/>
-        </p:blipFill>
-        <p:spPr>
-          <a:xfrm xmlns:a="http://schemas.openxmlformats.org/drawingml/2006/main">
-            <a:off x="323850" y="76200"/>
-            <a:ext cx="533400" cy="533400"/>
-          </a:xfrm>
-          <a:prstGeom xmlns:a="http://schemas.openxmlformats.org/drawingml/2006/main" prst="rect">
-            <a:avLst/>
-          </a:prstGeom>
-        </p:spPr>
-      </p:pic>
-      <p:sp>
-        <p:nvSpPr>
-          <p:cNvPr id="8" name="brand-title">
-            <a:extLst xmlns:a="http://schemas.openxmlformats.org/drawingml/2006/main">
-              <a:ext uri="{FF2B5EF4-FFF2-40B4-BE49-F238E27FC236}">
-                <a16:creationId xmlns:a16="http://schemas.microsoft.com/office/drawing/2014/main" id="{ECB0A77E-C355-402A-B450-E0686328B6EE}"/>
-              </a:ext>
-            </a:extLst>
-          </p:cNvPr>
-          <p:cNvSpPr>
-            <a:spLocks xmlns:a="http://schemas.openxmlformats.org/drawingml/2006/main" noGrp="1"/>
-          </p:cNvSpPr>
-          <p:nvPr/>
-        </p:nvSpPr>
-        <p:spPr>
-          <a:xfrm xmlns:a="http://schemas.openxmlformats.org/drawingml/2006/main">
-            <a:off x="1028700" y="66675"/>
-            <a:ext cx="10477500" cy="552450"/>
-          </a:xfrm>
-          <a:prstGeom xmlns:a="http://schemas.openxmlformats.org/drawingml/2006/main" prst="rect">
-            <a:avLst/>
-          </a:prstGeom>
-          <a:noFill xmlns:a="http://schemas.openxmlformats.org/drawingml/2006/main"/>
-          <a:ln xmlns:a="http://schemas.openxmlformats.org/drawingml/2006/main" w="0">
-            <a:noFill/>
-          </a:ln>
-        </p:spPr>
-        <p:txBody>
-          <a:bodyPr xmlns:a="http://schemas.openxmlformats.org/drawingml/2006/main" lIns="0" tIns="0" rIns="0" bIns="0" anchor="ctr"/>
-          <a:lstStyle xmlns:a="http://schemas.openxmlformats.org/drawingml/2006/main"/>
-          <a:p xmlns:a="http://schemas.openxmlformats.org/drawingml/2006/main">
-            <a:pPr algn="l">
-              <a:lnSpc>
-                <a:spcPct val="118000"/>
-              </a:lnSpc>
-              <a:buNone/>
-              <a:defRPr sz="3000" b="1">
-                <a:solidFill>
-                  <a:srgbClr val="FFFFFF"/>
-                </a:solidFill>
-                <a:latin typeface="微软雅黑"/>
-                <a:ea typeface="微软雅黑"/>
-                <a:cs typeface="微软雅黑"/>
-              </a:defRPr>
-            </a:pPr>
-            <a:r>
-              <a:rPr sz="3000" b="1">
-                <a:solidFill>
-                  <a:srgbClr val="FFFFFF"/>
-                </a:solidFill>
-                <a:latin typeface="微软雅黑"/>
-                <a:ea typeface="微软雅黑"/>
-                <a:cs typeface="微软雅黑"/>
-              </a:rPr>
-              <a:t>本课形成三件可交给第 12 课的工件</a:t>
-            </a:r>
-          </a:p>
-        </p:txBody>
-      </p:sp>
-      <p:sp>
-        <p:nvSpPr>
-          <p:cNvPr id="9" name="source">
-            <a:extLst xmlns:a="http://schemas.openxmlformats.org/drawingml/2006/main">
-              <a:ext uri="{FF2B5EF4-FFF2-40B4-BE49-F238E27FC236}">
-                <a16:creationId xmlns:a16="http://schemas.microsoft.com/office/drawing/2014/main" id="{DC6D4ABE-25E0-4566-ABE4-24A486AC1A66}"/>
-              </a:ext>
-            </a:extLst>
-          </p:cNvPr>
-          <p:cNvSpPr>
-            <a:spLocks xmlns:a="http://schemas.openxmlformats.org/drawingml/2006/main" noGrp="1"/>
-          </p:cNvSpPr>
-          <p:nvPr/>
-        </p:nvSpPr>
-        <p:spPr>
-          <a:xfrm xmlns:a="http://schemas.openxmlformats.org/drawingml/2006/main">
-            <a:off x="609600" y="6067425"/>
-            <a:ext cx="10763250" cy="209550"/>
-          </a:xfrm>
-          <a:prstGeom xmlns:a="http://schemas.openxmlformats.org/drawingml/2006/main" prst="rect">
-            <a:avLst/>
-          </a:prstGeom>
-          <a:noFill xmlns:a="http://schemas.openxmlformats.org/drawingml/2006/main"/>
-          <a:ln xmlns:a="http://schemas.openxmlformats.org/drawingml/2006/main" w="0">
-            <a:noFill/>
-          </a:ln>
-        </p:spPr>
-        <p:txBody>
-          <a:bodyPr xmlns:a="http://schemas.openxmlformats.org/drawingml/2006/main" lIns="0" tIns="0" rIns="0" bIns="0" anchor="t"/>
-          <a:lstStyle xmlns:a="http://schemas.openxmlformats.org/drawingml/2006/main"/>
-          <a:p xmlns:a="http://schemas.openxmlformats.org/drawingml/2006/main">
-            <a:pPr algn="l">
-              <a:lnSpc>
-                <a:spcPct val="118000"/>
-              </a:lnSpc>
-              <a:buNone/>
-              <a:defRPr sz="1100" b="0">
-                <a:solidFill>
-                  <a:srgbClr val="66727D"/>
-                </a:solidFill>
-                <a:latin typeface="微软雅黑"/>
-                <a:ea typeface="微软雅黑"/>
-                <a:cs typeface="微软雅黑"/>
-              </a:defRPr>
-            </a:pPr>
-            <a:r>
-              <a:rPr sz="1100" b="0">
-                <a:solidFill>
-                  <a:srgbClr val="66727D"/>
-                </a:solidFill>
-                <a:latin typeface="微软雅黑"/>
-                <a:ea typeface="微软雅黑"/>
-                <a:cs typeface="微软雅黑"/>
-              </a:rPr>
-              <a:t>来源：lesson-11/slides.md；课程工件与讲义见 speaker notes</a:t>
-            </a:r>
-          </a:p>
-        </p:txBody>
-      </p:sp>
-      <p:sp>
-        <p:nvSpPr>
-          <p:cNvPr id="10" name="chain-line-0">
-            <a:extLst xmlns:a="http://schemas.openxmlformats.org/drawingml/2006/main">
-              <a:ext uri="{FF2B5EF4-FFF2-40B4-BE49-F238E27FC236}">
-                <a16:creationId xmlns:a16="http://schemas.microsoft.com/office/drawing/2014/main" id="{3EAA5851-C628-4A3C-83A5-620E95443439}"/>
-              </a:ext>
-            </a:extLst>
-          </p:cNvPr>
-          <p:cNvSpPr>
-            <a:spLocks xmlns:a="http://schemas.openxmlformats.org/drawingml/2006/main" noGrp="1"/>
-          </p:cNvSpPr>
-          <p:nvPr/>
-        </p:nvSpPr>
-        <p:spPr>
-          <a:xfrm xmlns:a="http://schemas.openxmlformats.org/drawingml/2006/main">
-            <a:off x="1381125" y="2819400"/>
-            <a:ext cx="2381250" cy="14288"/>
-          </a:xfrm>
-          <a:prstGeom xmlns:a="http://schemas.openxmlformats.org/drawingml/2006/main" prst="rect">
-            <a:avLst/>
-          </a:prstGeom>
-          <a:solidFill xmlns:a="http://schemas.openxmlformats.org/drawingml/2006/main">
-            <a:srgbClr val="1F4D78"/>
-          </a:solidFill>
-          <a:ln xmlns:a="http://schemas.openxmlformats.org/drawingml/2006/main" w="0">
-            <a:noFill/>
-          </a:ln>
-        </p:spPr>
-      </p:sp>
-      <p:sp>
-        <p:nvSpPr>
-          <p:cNvPr id="11" name="chain-0">
-            <a:extLst xmlns:a="http://schemas.openxmlformats.org/drawingml/2006/main">
-              <a:ext uri="{FF2B5EF4-FFF2-40B4-BE49-F238E27FC236}">
-                <a16:creationId xmlns:a16="http://schemas.microsoft.com/office/drawing/2014/main" id="{AA34558A-F818-4D1A-B5B0-FC935E02CF2D}"/>
-              </a:ext>
-            </a:extLst>
-          </p:cNvPr>
-          <p:cNvSpPr>
-            <a:spLocks xmlns:a="http://schemas.openxmlformats.org/drawingml/2006/main" noGrp="1"/>
-          </p:cNvSpPr>
-          <p:nvPr/>
-        </p:nvSpPr>
-        <p:spPr>
-          <a:xfrm xmlns:a="http://schemas.openxmlformats.org/drawingml/2006/main">
-            <a:off x="1381125" y="2095500"/>
-            <a:ext cx="2381250" cy="666750"/>
-          </a:xfrm>
-          <a:prstGeom xmlns:a="http://schemas.openxmlformats.org/drawingml/2006/main" prst="rect">
-            <a:avLst/>
-          </a:prstGeom>
-          <a:noFill xmlns:a="http://schemas.openxmlformats.org/drawingml/2006/main"/>
-          <a:ln xmlns:a="http://schemas.openxmlformats.org/drawingml/2006/main" w="0">
-            <a:noFill/>
-          </a:ln>
-        </p:spPr>
-        <p:txBody>
-          <a:bodyPr xmlns:a="http://schemas.openxmlformats.org/drawingml/2006/main" lIns="0" tIns="0" rIns="0" bIns="0" anchor="ctr"/>
-          <a:lstStyle xmlns:a="http://schemas.openxmlformats.org/drawingml/2006/main"/>
-          <a:p xmlns:a="http://schemas.openxmlformats.org/drawingml/2006/main">
-            <a:pPr algn="ctr">
-              <a:lnSpc>
-                <a:spcPct val="118000"/>
-              </a:lnSpc>
-              <a:buNone/>
-              <a:defRPr sz="2200" b="0">
-                <a:solidFill>
-                  <a:srgbClr val="1F4D78"/>
-                </a:solidFill>
-                <a:latin typeface="微软雅黑"/>
-                <a:ea typeface="微软雅黑"/>
-                <a:cs typeface="微软雅黑"/>
-              </a:defRPr>
-            </a:pPr>
-            <a:r>
-              <a:rPr sz="2200" b="0">
-                <a:solidFill>
-                  <a:srgbClr val="1F4D78"/>
-                </a:solidFill>
-                <a:latin typeface="微软雅黑"/>
-                <a:ea typeface="微软雅黑"/>
-                <a:cs typeface="微软雅黑"/>
-              </a:rPr>
-              <a:t>受限循环说明</a:t>
-            </a:r>
-          </a:p>
-        </p:txBody>
-      </p:sp>
-      <p:sp>
-        <p:nvSpPr>
-          <p:cNvPr id="12" name="chain-arrow-0">
-            <a:extLst xmlns:a="http://schemas.openxmlformats.org/drawingml/2006/main">
-              <a:ext uri="{FF2B5EF4-FFF2-40B4-BE49-F238E27FC236}">
-                <a16:creationId xmlns:a16="http://schemas.microsoft.com/office/drawing/2014/main" id="{83DF5567-D1C4-4428-B864-3141425C0176}"/>
-              </a:ext>
-            </a:extLst>
-          </p:cNvPr>
-          <p:cNvSpPr>
-            <a:spLocks xmlns:a="http://schemas.openxmlformats.org/drawingml/2006/main" noGrp="1"/>
-          </p:cNvSpPr>
-          <p:nvPr/>
-        </p:nvSpPr>
-        <p:spPr>
-          <a:xfrm xmlns:a="http://schemas.openxmlformats.org/drawingml/2006/main">
-            <a:off x="3762375" y="2266950"/>
-            <a:ext cx="1143000" cy="323850"/>
-          </a:xfrm>
-          <a:prstGeom xmlns:a="http://schemas.openxmlformats.org/drawingml/2006/main" prst="rect">
-            <a:avLst/>
-          </a:prstGeom>
-          <a:noFill xmlns:a="http://schemas.openxmlformats.org/drawingml/2006/main"/>
-          <a:ln xmlns:a="http://schemas.openxmlformats.org/drawingml/2006/main" w="0">
-            <a:noFill/>
-          </a:ln>
-        </p:spPr>
-        <p:txBody>
-          <a:bodyPr xmlns:a="http://schemas.openxmlformats.org/drawingml/2006/main" lIns="0" tIns="0" rIns="0" bIns="0" anchor="ctr"/>
-          <a:lstStyle xmlns:a="http://schemas.openxmlformats.org/drawingml/2006/main"/>
-          <a:p xmlns:a="http://schemas.openxmlformats.org/drawingml/2006/main">
-            <a:pPr algn="ctr">
-              <a:lnSpc>
-                <a:spcPct val="118000"/>
-              </a:lnSpc>
-              <a:buNone/>
-              <a:defRPr sz="2400" b="0">
-                <a:solidFill>
-                  <a:srgbClr val="1F4D78"/>
-                </a:solidFill>
-                <a:latin typeface="微软雅黑"/>
-                <a:ea typeface="微软雅黑"/>
-                <a:cs typeface="微软雅黑"/>
-              </a:defRPr>
-            </a:pPr>
-            <a:r>
-              <a:rPr sz="2400" b="0">
-                <a:solidFill>
-                  <a:srgbClr val="1F4D78"/>
-                </a:solidFill>
-                <a:latin typeface="微软雅黑"/>
-                <a:ea typeface="微软雅黑"/>
-                <a:cs typeface="微软雅黑"/>
-              </a:rPr>
-              <a:t>→</a:t>
-            </a:r>
-          </a:p>
-        </p:txBody>
-      </p:sp>
-      <p:sp>
-        <p:nvSpPr>
-          <p:cNvPr id="13" name="chain-sub-0">
-            <a:extLst xmlns:a="http://schemas.openxmlformats.org/drawingml/2006/main">
-              <a:ext uri="{FF2B5EF4-FFF2-40B4-BE49-F238E27FC236}">
-                <a16:creationId xmlns:a16="http://schemas.microsoft.com/office/drawing/2014/main" id="{358F8E81-288D-4A48-875A-B88F0D96239F}"/>
-              </a:ext>
-            </a:extLst>
-          </p:cNvPr>
-          <p:cNvSpPr>
-            <a:spLocks xmlns:a="http://schemas.openxmlformats.org/drawingml/2006/main" noGrp="1"/>
-          </p:cNvSpPr>
-          <p:nvPr/>
-        </p:nvSpPr>
-        <p:spPr>
-          <a:xfrm xmlns:a="http://schemas.openxmlformats.org/drawingml/2006/main">
-            <a:off x="1381125" y="2971800"/>
-            <a:ext cx="2381250" cy="571500"/>
-          </a:xfrm>
-          <a:prstGeom xmlns:a="http://schemas.openxmlformats.org/drawingml/2006/main" prst="rect">
-            <a:avLst/>
-          </a:prstGeom>
-          <a:noFill xmlns:a="http://schemas.openxmlformats.org/drawingml/2006/main"/>
-          <a:ln xmlns:a="http://schemas.openxmlformats.org/drawingml/2006/main" w="0">
-            <a:noFill/>
-          </a:ln>
-        </p:spPr>
-        <p:txBody>
-          <a:bodyPr xmlns:a="http://schemas.openxmlformats.org/drawingml/2006/main" lIns="0" tIns="0" rIns="0" bIns="0" anchor="t"/>
-          <a:lstStyle xmlns:a="http://schemas.openxmlformats.org/drawingml/2006/main"/>
-          <a:p xmlns:a="http://schemas.openxmlformats.org/drawingml/2006/main">
-            <a:pPr algn="ctr">
-              <a:lnSpc>
-                <a:spcPct val="118000"/>
-              </a:lnSpc>
-              <a:buNone/>
-              <a:defRPr sz="2000" b="0">
-                <a:solidFill>
-                  <a:srgbClr val="66727D"/>
-                </a:solidFill>
-                <a:latin typeface="微软雅黑"/>
-                <a:ea typeface="微软雅黑"/>
-                <a:cs typeface="微软雅黑"/>
-              </a:defRPr>
-            </a:pPr>
-            <a:r>
-              <a:rPr sz="2000" b="0">
-                <a:solidFill>
-                  <a:srgbClr val="66727D"/>
-                </a:solidFill>
-                <a:latin typeface="微软雅黑"/>
-                <a:ea typeface="微软雅黑"/>
-                <a:cs typeface="微软雅黑"/>
-              </a:rPr>
-              <a:t>固定指标 / 预算 / 停止 / 回退</a:t>
-            </a:r>
-          </a:p>
-        </p:txBody>
-      </p:sp>
-      <p:sp>
-        <p:nvSpPr>
-          <p:cNvPr id="14" name="chain-line-1">
-            <a:extLst xmlns:a="http://schemas.openxmlformats.org/drawingml/2006/main">
-              <a:ext uri="{FF2B5EF4-FFF2-40B4-BE49-F238E27FC236}">
-                <a16:creationId xmlns:a16="http://schemas.microsoft.com/office/drawing/2014/main" id="{711F76E0-5CFE-403A-B46E-A1FA5D266E18}"/>
-              </a:ext>
-            </a:extLst>
-          </p:cNvPr>
-          <p:cNvSpPr>
-            <a:spLocks xmlns:a="http://schemas.openxmlformats.org/drawingml/2006/main" noGrp="1"/>
-          </p:cNvSpPr>
-          <p:nvPr/>
-        </p:nvSpPr>
-        <p:spPr>
-          <a:xfrm xmlns:a="http://schemas.openxmlformats.org/drawingml/2006/main">
-            <a:off x="4905375" y="2819400"/>
-            <a:ext cx="2381250" cy="14288"/>
-          </a:xfrm>
-          <a:prstGeom xmlns:a="http://schemas.openxmlformats.org/drawingml/2006/main" prst="rect">
-            <a:avLst/>
-          </a:prstGeom>
-          <a:solidFill xmlns:a="http://schemas.openxmlformats.org/drawingml/2006/main">
-            <a:srgbClr val="1F4D78"/>
-          </a:solidFill>
-          <a:ln xmlns:a="http://schemas.openxmlformats.org/drawingml/2006/main" w="0">
-            <a:noFill/>
-          </a:ln>
-        </p:spPr>
-      </p:sp>
-      <p:sp>
-        <p:nvSpPr>
-          <p:cNvPr id="15" name="chain-1">
-            <a:extLst xmlns:a="http://schemas.openxmlformats.org/drawingml/2006/main">
-              <a:ext uri="{FF2B5EF4-FFF2-40B4-BE49-F238E27FC236}">
-                <a16:creationId xmlns:a16="http://schemas.microsoft.com/office/drawing/2014/main" id="{0E674618-AF86-4675-AFB7-3CC4FF09360C}"/>
-              </a:ext>
-            </a:extLst>
-          </p:cNvPr>
-          <p:cNvSpPr>
-            <a:spLocks xmlns:a="http://schemas.openxmlformats.org/drawingml/2006/main" noGrp="1"/>
-          </p:cNvSpPr>
-          <p:nvPr/>
-        </p:nvSpPr>
-        <p:spPr>
-          <a:xfrm xmlns:a="http://schemas.openxmlformats.org/drawingml/2006/main">
-            <a:off x="4905375" y="2095500"/>
-            <a:ext cx="2381250" cy="666750"/>
-          </a:xfrm>
-          <a:prstGeom xmlns:a="http://schemas.openxmlformats.org/drawingml/2006/main" prst="rect">
-            <a:avLst/>
-          </a:prstGeom>
-          <a:noFill xmlns:a="http://schemas.openxmlformats.org/drawingml/2006/main"/>
-          <a:ln xmlns:a="http://schemas.openxmlformats.org/drawingml/2006/main" w="0">
-            <a:noFill/>
-          </a:ln>
-        </p:spPr>
-        <p:txBody>
-          <a:bodyPr xmlns:a="http://schemas.openxmlformats.org/drawingml/2006/main" lIns="0" tIns="0" rIns="0" bIns="0" anchor="ctr"/>
-          <a:lstStyle xmlns:a="http://schemas.openxmlformats.org/drawingml/2006/main"/>
-          <a:p xmlns:a="http://schemas.openxmlformats.org/drawingml/2006/main">
-            <a:pPr algn="ctr">
-              <a:lnSpc>
-                <a:spcPct val="118000"/>
-              </a:lnSpc>
-              <a:buNone/>
-              <a:defRPr sz="2200" b="0">
-                <a:solidFill>
-                  <a:srgbClr val="1F4D78"/>
-                </a:solidFill>
-                <a:latin typeface="微软雅黑"/>
-                <a:ea typeface="微软雅黑"/>
-                <a:cs typeface="微软雅黑"/>
-              </a:defRPr>
-            </a:pPr>
-            <a:r>
-              <a:rPr sz="2200" b="0">
-                <a:solidFill>
-                  <a:srgbClr val="1F4D78"/>
-                </a:solidFill>
-                <a:latin typeface="微软雅黑"/>
-                <a:ea typeface="微软雅黑"/>
-                <a:cs typeface="微软雅黑"/>
-              </a:rPr>
-              <a:t>三种运行 trace</a:t>
-            </a:r>
-          </a:p>
-        </p:txBody>
-      </p:sp>
-      <p:sp>
-        <p:nvSpPr>
-          <p:cNvPr id="16" name="chain-arrow-1">
-            <a:extLst xmlns:a="http://schemas.openxmlformats.org/drawingml/2006/main">
-              <a:ext uri="{FF2B5EF4-FFF2-40B4-BE49-F238E27FC236}">
-                <a16:creationId xmlns:a16="http://schemas.microsoft.com/office/drawing/2014/main" id="{855CE9E7-BBEE-4599-8D91-77379D61BC3A}"/>
-              </a:ext>
-            </a:extLst>
-          </p:cNvPr>
-          <p:cNvSpPr>
-            <a:spLocks xmlns:a="http://schemas.openxmlformats.org/drawingml/2006/main" noGrp="1"/>
-          </p:cNvSpPr>
-          <p:nvPr/>
-        </p:nvSpPr>
-        <p:spPr>
-          <a:xfrm xmlns:a="http://schemas.openxmlformats.org/drawingml/2006/main">
-            <a:off x="7286625" y="2266950"/>
-            <a:ext cx="1143000" cy="323850"/>
-          </a:xfrm>
-          <a:prstGeom xmlns:a="http://schemas.openxmlformats.org/drawingml/2006/main" prst="rect">
-            <a:avLst/>
-          </a:prstGeom>
-          <a:noFill xmlns:a="http://schemas.openxmlformats.org/drawingml/2006/main"/>
-          <a:ln xmlns:a="http://schemas.openxmlformats.org/drawingml/2006/main" w="0">
-            <a:noFill/>
-          </a:ln>
-        </p:spPr>
-        <p:txBody>
-          <a:bodyPr xmlns:a="http://schemas.openxmlformats.org/drawingml/2006/main" lIns="0" tIns="0" rIns="0" bIns="0" anchor="ctr"/>
-          <a:lstStyle xmlns:a="http://schemas.openxmlformats.org/drawingml/2006/main"/>
-          <a:p xmlns:a="http://schemas.openxmlformats.org/drawingml/2006/main">
-            <a:pPr algn="ctr">
-              <a:lnSpc>
-                <a:spcPct val="118000"/>
-              </a:lnSpc>
-              <a:buNone/>
-              <a:defRPr sz="2400" b="0">
-                <a:solidFill>
-                  <a:srgbClr val="1F4D78"/>
-                </a:solidFill>
-                <a:latin typeface="微软雅黑"/>
-                <a:ea typeface="微软雅黑"/>
-                <a:cs typeface="微软雅黑"/>
-              </a:defRPr>
-            </a:pPr>
-            <a:r>
-              <a:rPr sz="2400" b="0">
-                <a:solidFill>
-                  <a:srgbClr val="1F4D78"/>
-                </a:solidFill>
-                <a:latin typeface="微软雅黑"/>
-                <a:ea typeface="微软雅黑"/>
-                <a:cs typeface="微软雅黑"/>
-              </a:rPr>
-              <a:t>→</a:t>
-            </a:r>
-          </a:p>
-        </p:txBody>
-      </p:sp>
-      <p:sp>
-        <p:nvSpPr>
-          <p:cNvPr id="17" name="chain-sub-1">
-            <a:extLst xmlns:a="http://schemas.openxmlformats.org/drawingml/2006/main">
-              <a:ext uri="{FF2B5EF4-FFF2-40B4-BE49-F238E27FC236}">
-                <a16:creationId xmlns:a16="http://schemas.microsoft.com/office/drawing/2014/main" id="{10C01102-E5E3-49CC-B64D-75ECE2D03F97}"/>
-              </a:ext>
-            </a:extLst>
-          </p:cNvPr>
-          <p:cNvSpPr>
-            <a:spLocks xmlns:a="http://schemas.openxmlformats.org/drawingml/2006/main" noGrp="1"/>
-          </p:cNvSpPr>
-          <p:nvPr/>
-        </p:nvSpPr>
-        <p:spPr>
-          <a:xfrm xmlns:a="http://schemas.openxmlformats.org/drawingml/2006/main">
-            <a:off x="4905375" y="2971800"/>
-            <a:ext cx="2381250" cy="571500"/>
-          </a:xfrm>
-          <a:prstGeom xmlns:a="http://schemas.openxmlformats.org/drawingml/2006/main" prst="rect">
-            <a:avLst/>
-          </a:prstGeom>
-          <a:noFill xmlns:a="http://schemas.openxmlformats.org/drawingml/2006/main"/>
-          <a:ln xmlns:a="http://schemas.openxmlformats.org/drawingml/2006/main" w="0">
-            <a:noFill/>
-          </a:ln>
-        </p:spPr>
-        <p:txBody>
-          <a:bodyPr xmlns:a="http://schemas.openxmlformats.org/drawingml/2006/main" lIns="0" tIns="0" rIns="0" bIns="0" anchor="t"/>
-          <a:lstStyle xmlns:a="http://schemas.openxmlformats.org/drawingml/2006/main"/>
-          <a:p xmlns:a="http://schemas.openxmlformats.org/drawingml/2006/main">
-            <a:pPr algn="ctr">
-              <a:lnSpc>
-                <a:spcPct val="118000"/>
-              </a:lnSpc>
-              <a:buNone/>
-              <a:defRPr sz="2000" b="0">
-                <a:solidFill>
-                  <a:srgbClr val="66727D"/>
-                </a:solidFill>
-                <a:latin typeface="微软雅黑"/>
-                <a:ea typeface="微软雅黑"/>
-                <a:cs typeface="微软雅黑"/>
-              </a:defRPr>
-            </a:pPr>
-            <a:r>
-              <a:rPr sz="2000" b="0">
-                <a:solidFill>
-                  <a:srgbClr val="66727D"/>
-                </a:solidFill>
-                <a:latin typeface="微软雅黑"/>
-                <a:ea typeface="微软雅黑"/>
-                <a:cs typeface="微软雅黑"/>
-              </a:rPr>
-              <a:t>正常 / 无改善 / 失败</a:t>
-            </a:r>
-          </a:p>
-        </p:txBody>
-      </p:sp>
-      <p:sp>
-        <p:nvSpPr>
-          <p:cNvPr id="18" name="chain-line-2">
-            <a:extLst xmlns:a="http://schemas.openxmlformats.org/drawingml/2006/main">
-              <a:ext uri="{FF2B5EF4-FFF2-40B4-BE49-F238E27FC236}">
-                <a16:creationId xmlns:a16="http://schemas.microsoft.com/office/drawing/2014/main" id="{3C840F29-AB3D-4D31-9A65-4E6F95ED4C76}"/>
-              </a:ext>
-            </a:extLst>
-          </p:cNvPr>
-          <p:cNvSpPr>
-            <a:spLocks xmlns:a="http://schemas.openxmlformats.org/drawingml/2006/main" noGrp="1"/>
-          </p:cNvSpPr>
-          <p:nvPr/>
-        </p:nvSpPr>
-        <p:spPr>
-          <a:xfrm xmlns:a="http://schemas.openxmlformats.org/drawingml/2006/main">
-            <a:off x="8429625" y="2819400"/>
-            <a:ext cx="2381250" cy="14288"/>
-          </a:xfrm>
-          <a:prstGeom xmlns:a="http://schemas.openxmlformats.org/drawingml/2006/main" prst="rect">
-            <a:avLst/>
-          </a:prstGeom>
-          <a:solidFill xmlns:a="http://schemas.openxmlformats.org/drawingml/2006/main">
-            <a:srgbClr val="1F4D78"/>
-          </a:solidFill>
-          <a:ln xmlns:a="http://schemas.openxmlformats.org/drawingml/2006/main" w="0">
-            <a:noFill/>
-          </a:ln>
-        </p:spPr>
-      </p:sp>
-      <p:sp>
-        <p:nvSpPr>
-          <p:cNvPr id="19" name="chain-2">
-            <a:extLst xmlns:a="http://schemas.openxmlformats.org/drawingml/2006/main">
-              <a:ext uri="{FF2B5EF4-FFF2-40B4-BE49-F238E27FC236}">
-                <a16:creationId xmlns:a16="http://schemas.microsoft.com/office/drawing/2014/main" id="{4D34B5E8-2B6F-4730-9F6B-25151FDFDAAE}"/>
-              </a:ext>
-            </a:extLst>
-          </p:cNvPr>
-          <p:cNvSpPr>
-            <a:spLocks xmlns:a="http://schemas.openxmlformats.org/drawingml/2006/main" noGrp="1"/>
-          </p:cNvSpPr>
-          <p:nvPr/>
-        </p:nvSpPr>
-        <p:spPr>
-          <a:xfrm xmlns:a="http://schemas.openxmlformats.org/drawingml/2006/main">
-            <a:off x="8429625" y="2095500"/>
-            <a:ext cx="2381250" cy="666750"/>
-          </a:xfrm>
-          <a:prstGeom xmlns:a="http://schemas.openxmlformats.org/drawingml/2006/main" prst="rect">
-            <a:avLst/>
-          </a:prstGeom>
-          <a:noFill xmlns:a="http://schemas.openxmlformats.org/drawingml/2006/main"/>
-          <a:ln xmlns:a="http://schemas.openxmlformats.org/drawingml/2006/main" w="0">
-            <a:noFill/>
-          </a:ln>
-        </p:spPr>
-        <p:txBody>
-          <a:bodyPr xmlns:a="http://schemas.openxmlformats.org/drawingml/2006/main" lIns="0" tIns="0" rIns="0" bIns="0" anchor="ctr"/>
-          <a:lstStyle xmlns:a="http://schemas.openxmlformats.org/drawingml/2006/main"/>
-          <a:p xmlns:a="http://schemas.openxmlformats.org/drawingml/2006/main">
-            <a:pPr algn="ctr">
-              <a:lnSpc>
-                <a:spcPct val="118000"/>
-              </a:lnSpc>
-              <a:buNone/>
-              <a:defRPr sz="2200" b="0">
-                <a:solidFill>
-                  <a:srgbClr val="1F4D78"/>
-                </a:solidFill>
-                <a:latin typeface="微软雅黑"/>
-                <a:ea typeface="微软雅黑"/>
-                <a:cs typeface="微软雅黑"/>
-              </a:defRPr>
-            </a:pPr>
-            <a:r>
-              <a:rPr sz="2200" b="0">
-                <a:solidFill>
-                  <a:srgbClr val="1F4D78"/>
-                </a:solidFill>
-                <a:latin typeface="微软雅黑"/>
-                <a:ea typeface="微软雅黑"/>
-                <a:cs typeface="微软雅黑"/>
-              </a:rPr>
-              <a:t>四约束短分析</a:t>
-            </a:r>
-          </a:p>
-        </p:txBody>
-      </p:sp>
-      <p:sp>
-        <p:nvSpPr>
-          <p:cNvPr id="20" name="chain-sub-2">
-            <a:extLst xmlns:a="http://schemas.openxmlformats.org/drawingml/2006/main">
-              <a:ext uri="{FF2B5EF4-FFF2-40B4-BE49-F238E27FC236}">
-                <a16:creationId xmlns:a16="http://schemas.microsoft.com/office/drawing/2014/main" id="{908331F4-47EF-411B-BE18-517F7C8F70F2}"/>
-              </a:ext>
-            </a:extLst>
-          </p:cNvPr>
-          <p:cNvSpPr>
-            <a:spLocks xmlns:a="http://schemas.openxmlformats.org/drawingml/2006/main" noGrp="1"/>
-          </p:cNvSpPr>
-          <p:nvPr/>
-        </p:nvSpPr>
-        <p:spPr>
-          <a:xfrm xmlns:a="http://schemas.openxmlformats.org/drawingml/2006/main">
-            <a:off x="8429625" y="2971800"/>
-            <a:ext cx="2381250" cy="571500"/>
-          </a:xfrm>
-          <a:prstGeom xmlns:a="http://schemas.openxmlformats.org/drawingml/2006/main" prst="rect">
-            <a:avLst/>
-          </a:prstGeom>
-          <a:noFill xmlns:a="http://schemas.openxmlformats.org/drawingml/2006/main"/>
-          <a:ln xmlns:a="http://schemas.openxmlformats.org/drawingml/2006/main" w="0">
-            <a:noFill/>
-          </a:ln>
-        </p:spPr>
-        <p:txBody>
-          <a:bodyPr xmlns:a="http://schemas.openxmlformats.org/drawingml/2006/main" lIns="0" tIns="0" rIns="0" bIns="0" anchor="t"/>
-          <a:lstStyle xmlns:a="http://schemas.openxmlformats.org/drawingml/2006/main"/>
-          <a:p xmlns:a="http://schemas.openxmlformats.org/drawingml/2006/main">
-            <a:pPr algn="ctr">
-              <a:lnSpc>
-                <a:spcPct val="118000"/>
-              </a:lnSpc>
-              <a:buNone/>
-              <a:defRPr sz="2000" b="0">
-                <a:solidFill>
-                  <a:srgbClr val="66727D"/>
-                </a:solidFill>
-                <a:latin typeface="微软雅黑"/>
-                <a:ea typeface="微软雅黑"/>
-                <a:cs typeface="微软雅黑"/>
-              </a:defRPr>
-            </a:pPr>
-            <a:r>
-              <a:rPr sz="2000" b="0">
-                <a:solidFill>
-                  <a:srgbClr val="66727D"/>
-                </a:solidFill>
-                <a:latin typeface="微软雅黑"/>
-                <a:ea typeface="微软雅黑"/>
-                <a:cs typeface="微软雅黑"/>
-              </a:rPr>
-              <a:t>何处仍需人工</a:t>
             </a:r>
           </a:p>
         </p:txBody>
